--- a/supervision-gobierno-corporativo/Matriz_Requerimientos_DS-SABAO-BCS-BC-23486.pptx
+++ b/supervision-gobierno-corporativo/Matriz_Requerimientos_DS-SABAO-BCS-BC-23486.pptx
@@ -1476,17 +1476,6 @@
               </a:rPr>
               <a:t>OBSERVACIONES NUEVAS DE LA VISITA</a:t>
             </a:r>
-            <a:pPr indent="0" marL="0">
-              <a:buNone/>
-            </a:pPr>
-            <a:r>
-              <a:rPr lang="en-US" sz="950" i="1" spc="200" kern="0" dirty="0">
-                <a:solidFill>
-                  <a:schemeClr val="accent5"/>
-                </a:solidFill>
-              </a:rPr>
-              <a:t>   ·   todas con compromiso al 14/10/2026</a:t>
-            </a:r>
             <a:endParaRPr lang="en-US" sz="950" dirty="0"/>
           </a:p>
         </p:txBody>
@@ -1564,7 +1553,7 @@
                         <a:buNone/>
                       </a:pPr>
                       <a:r>
-                        <a:rPr lang="en-US" sz="850" b="1" dirty="0">
+                        <a:rPr lang="en-US" sz="800" b="1" spc="100" kern="0" dirty="0">
                           <a:solidFill>
                             <a:schemeClr val="bg1"/>
                           </a:solidFill>
@@ -1572,44 +1561,26 @@
                           <a:ea typeface="Calibri" pitchFamily="34" charset="-122"/>
                           <a:cs typeface="Calibri" pitchFamily="34" charset="-120"/>
                         </a:rPr>
-                        <a:t>Observación</a:t>
-                      </a:r>
-                      <a:endParaRPr lang="en-US" sz="850" dirty="0">
-                        <a:latin typeface="Calibri" charset="0"/>
-                        <a:ea typeface="Calibri" charset="0"/>
-                        <a:cs typeface="Calibri" charset="0"/>
-                      </a:endParaRPr>
-                    </a:p>
-                  </a:txBody>
-                  <a:tcPr marL="45720" marR="45720" marT="22860" marB="22860" anchor="ctr">
-                    <a:lnL w="6350" cap="flat" cmpd="sng" algn="ctr">
-                      <a:solidFill>
-                        <a:srgbClr val="D9E0EA"/>
-                      </a:solidFill>
-                      <a:prstDash val="solid"/>
-                      <a:round/>
-                      <a:headEnd type="none" w="med" len="med"/>
-                      <a:tailEnd type="none" w="med" len="med"/>
-                    </a:lnL>
-                    <a:lnR w="6350" cap="flat" cmpd="sng" algn="ctr">
-                      <a:solidFill>
-                        <a:srgbClr val="D9E0EA"/>
-                      </a:solidFill>
-                      <a:prstDash val="solid"/>
-                      <a:round/>
-                      <a:headEnd type="none" w="med" len="med"/>
-                      <a:tailEnd type="none" w="med" len="med"/>
-                    </a:lnR>
-                    <a:lnT w="6350" cap="flat" cmpd="sng" algn="ctr">
-                      <a:solidFill>
-                        <a:srgbClr val="D9E0EA"/>
-                      </a:solidFill>
-                      <a:prstDash val="solid"/>
-                      <a:round/>
-                      <a:headEnd type="none" w="med" len="med"/>
-                      <a:tailEnd type="none" w="med" len="med"/>
-                    </a:lnT>
-                    <a:lnB w="6350" cap="flat" cmpd="sng" algn="ctr">
+                        <a:t>OBSERVACIÓN</a:t>
+                      </a:r>
+                      <a:endParaRPr lang="en-US" sz="800" dirty="0">
+                        <a:latin typeface="Calibri" charset="0"/>
+                        <a:ea typeface="Calibri" charset="0"/>
+                        <a:cs typeface="Calibri" charset="0"/>
+                      </a:endParaRPr>
+                    </a:p>
+                  </a:txBody>
+                  <a:tcPr marL="45720" marR="45720" marT="22860" marB="22860" anchor="ctr">
+                    <a:lnL w="0" cap="flat" cmpd="sng" algn="ctr">
+                      <a:noFill/>
+                    </a:lnL>
+                    <a:lnR w="0" cap="flat" cmpd="sng" algn="ctr">
+                      <a:noFill/>
+                    </a:lnR>
+                    <a:lnT w="0" cap="flat" cmpd="sng" algn="ctr">
+                      <a:noFill/>
+                    </a:lnT>
+                    <a:lnB w="9525" cap="flat" cmpd="sng" algn="ctr">
                       <a:solidFill>
                         <a:srgbClr val="D9E0EA"/>
                       </a:solidFill>
@@ -1632,7 +1603,7 @@
                         <a:buNone/>
                       </a:pPr>
                       <a:r>
-                        <a:rPr lang="en-US" sz="850" b="1" dirty="0">
+                        <a:rPr lang="en-US" sz="800" b="1" spc="100" kern="0" dirty="0">
                           <a:solidFill>
                             <a:schemeClr val="bg1"/>
                           </a:solidFill>
@@ -1640,44 +1611,26 @@
                           <a:ea typeface="Calibri" pitchFamily="34" charset="-122"/>
                           <a:cs typeface="Calibri" pitchFamily="34" charset="-120"/>
                         </a:rPr>
-                        <a:t>Comentarios</a:t>
-                      </a:r>
-                      <a:endParaRPr lang="en-US" sz="850" dirty="0">
-                        <a:latin typeface="Calibri" charset="0"/>
-                        <a:ea typeface="Calibri" charset="0"/>
-                        <a:cs typeface="Calibri" charset="0"/>
-                      </a:endParaRPr>
-                    </a:p>
-                  </a:txBody>
-                  <a:tcPr marL="45720" marR="45720" marT="22860" marB="22860" anchor="ctr">
-                    <a:lnL w="6350" cap="flat" cmpd="sng" algn="ctr">
-                      <a:solidFill>
-                        <a:srgbClr val="D9E0EA"/>
-                      </a:solidFill>
-                      <a:prstDash val="solid"/>
-                      <a:round/>
-                      <a:headEnd type="none" w="med" len="med"/>
-                      <a:tailEnd type="none" w="med" len="med"/>
-                    </a:lnL>
-                    <a:lnR w="6350" cap="flat" cmpd="sng" algn="ctr">
-                      <a:solidFill>
-                        <a:srgbClr val="D9E0EA"/>
-                      </a:solidFill>
-                      <a:prstDash val="solid"/>
-                      <a:round/>
-                      <a:headEnd type="none" w="med" len="med"/>
-                      <a:tailEnd type="none" w="med" len="med"/>
-                    </a:lnR>
-                    <a:lnT w="6350" cap="flat" cmpd="sng" algn="ctr">
-                      <a:solidFill>
-                        <a:srgbClr val="D9E0EA"/>
-                      </a:solidFill>
-                      <a:prstDash val="solid"/>
-                      <a:round/>
-                      <a:headEnd type="none" w="med" len="med"/>
-                      <a:tailEnd type="none" w="med" len="med"/>
-                    </a:lnT>
-                    <a:lnB w="6350" cap="flat" cmpd="sng" algn="ctr">
+                        <a:t>COMENTARIOS</a:t>
+                      </a:r>
+                      <a:endParaRPr lang="en-US" sz="800" dirty="0">
+                        <a:latin typeface="Calibri" charset="0"/>
+                        <a:ea typeface="Calibri" charset="0"/>
+                        <a:cs typeface="Calibri" charset="0"/>
+                      </a:endParaRPr>
+                    </a:p>
+                  </a:txBody>
+                  <a:tcPr marL="45720" marR="45720" marT="22860" marB="22860" anchor="ctr">
+                    <a:lnL w="0" cap="flat" cmpd="sng" algn="ctr">
+                      <a:noFill/>
+                    </a:lnL>
+                    <a:lnR w="0" cap="flat" cmpd="sng" algn="ctr">
+                      <a:noFill/>
+                    </a:lnR>
+                    <a:lnT w="0" cap="flat" cmpd="sng" algn="ctr">
+                      <a:noFill/>
+                    </a:lnT>
+                    <a:lnB w="9525" cap="flat" cmpd="sng" algn="ctr">
                       <a:solidFill>
                         <a:srgbClr val="D9E0EA"/>
                       </a:solidFill>
@@ -1700,7 +1653,7 @@
                         <a:buNone/>
                       </a:pPr>
                       <a:r>
-                        <a:rPr lang="en-US" sz="850" b="1" dirty="0">
+                        <a:rPr lang="en-US" sz="800" b="1" spc="100" kern="0" dirty="0">
                           <a:solidFill>
                             <a:schemeClr val="bg1"/>
                           </a:solidFill>
@@ -1708,44 +1661,26 @@
                           <a:ea typeface="Calibri" pitchFamily="34" charset="-122"/>
                           <a:cs typeface="Calibri" pitchFamily="34" charset="-120"/>
                         </a:rPr>
-                        <a:t>Responsable</a:t>
-                      </a:r>
-                      <a:endParaRPr lang="en-US" sz="850" dirty="0">
-                        <a:latin typeface="Calibri" charset="0"/>
-                        <a:ea typeface="Calibri" charset="0"/>
-                        <a:cs typeface="Calibri" charset="0"/>
-                      </a:endParaRPr>
-                    </a:p>
-                  </a:txBody>
-                  <a:tcPr marL="45720" marR="45720" marT="22860" marB="22860" anchor="ctr">
-                    <a:lnL w="6350" cap="flat" cmpd="sng" algn="ctr">
-                      <a:solidFill>
-                        <a:srgbClr val="D9E0EA"/>
-                      </a:solidFill>
-                      <a:prstDash val="solid"/>
-                      <a:round/>
-                      <a:headEnd type="none" w="med" len="med"/>
-                      <a:tailEnd type="none" w="med" len="med"/>
-                    </a:lnL>
-                    <a:lnR w="6350" cap="flat" cmpd="sng" algn="ctr">
-                      <a:solidFill>
-                        <a:srgbClr val="D9E0EA"/>
-                      </a:solidFill>
-                      <a:prstDash val="solid"/>
-                      <a:round/>
-                      <a:headEnd type="none" w="med" len="med"/>
-                      <a:tailEnd type="none" w="med" len="med"/>
-                    </a:lnR>
-                    <a:lnT w="6350" cap="flat" cmpd="sng" algn="ctr">
-                      <a:solidFill>
-                        <a:srgbClr val="D9E0EA"/>
-                      </a:solidFill>
-                      <a:prstDash val="solid"/>
-                      <a:round/>
-                      <a:headEnd type="none" w="med" len="med"/>
-                      <a:tailEnd type="none" w="med" len="med"/>
-                    </a:lnT>
-                    <a:lnB w="6350" cap="flat" cmpd="sng" algn="ctr">
+                        <a:t>RESPONSABLE</a:t>
+                      </a:r>
+                      <a:endParaRPr lang="en-US" sz="800" dirty="0">
+                        <a:latin typeface="Calibri" charset="0"/>
+                        <a:ea typeface="Calibri" charset="0"/>
+                        <a:cs typeface="Calibri" charset="0"/>
+                      </a:endParaRPr>
+                    </a:p>
+                  </a:txBody>
+                  <a:tcPr marL="45720" marR="45720" marT="22860" marB="22860" anchor="ctr">
+                    <a:lnL w="0" cap="flat" cmpd="sng" algn="ctr">
+                      <a:noFill/>
+                    </a:lnL>
+                    <a:lnR w="0" cap="flat" cmpd="sng" algn="ctr">
+                      <a:noFill/>
+                    </a:lnR>
+                    <a:lnT w="0" cap="flat" cmpd="sng" algn="ctr">
+                      <a:noFill/>
+                    </a:lnT>
+                    <a:lnB w="9525" cap="flat" cmpd="sng" algn="ctr">
                       <a:solidFill>
                         <a:srgbClr val="D9E0EA"/>
                       </a:solidFill>
@@ -1770,7 +1705,7 @@
                         <a:buNone/>
                       </a:pPr>
                       <a:r>
-                        <a:rPr lang="en-US" sz="800" b="1" spc="100" kern="0" dirty="0">
+                        <a:rPr lang="en-US" sz="750" b="1" spc="100" kern="0" dirty="0">
                           <a:solidFill>
                             <a:schemeClr val="accent1"/>
                           </a:solidFill>
@@ -1780,42 +1715,24 @@
                         </a:rPr>
                         <a:t>A. GESTIÓN DE RIESGO DE LDA/FT/FPADM</a:t>
                       </a:r>
-                      <a:endParaRPr lang="en-US" sz="800" dirty="0">
-                        <a:latin typeface="Calibri" charset="0"/>
-                        <a:ea typeface="Calibri" charset="0"/>
-                        <a:cs typeface="Calibri" charset="0"/>
-                      </a:endParaRPr>
-                    </a:p>
-                  </a:txBody>
-                  <a:tcPr marL="45720" marR="45720" marT="22860" marB="22860" anchor="ctr">
-                    <a:lnL w="6350" cap="flat" cmpd="sng" algn="ctr">
-                      <a:solidFill>
-                        <a:srgbClr val="D9E0EA"/>
-                      </a:solidFill>
-                      <a:prstDash val="solid"/>
-                      <a:round/>
-                      <a:headEnd type="none" w="med" len="med"/>
-                      <a:tailEnd type="none" w="med" len="med"/>
-                    </a:lnL>
-                    <a:lnR w="6350" cap="flat" cmpd="sng" algn="ctr">
-                      <a:solidFill>
-                        <a:srgbClr val="D9E0EA"/>
-                      </a:solidFill>
-                      <a:prstDash val="solid"/>
-                      <a:round/>
-                      <a:headEnd type="none" w="med" len="med"/>
-                      <a:tailEnd type="none" w="med" len="med"/>
-                    </a:lnR>
-                    <a:lnT w="6350" cap="flat" cmpd="sng" algn="ctr">
-                      <a:solidFill>
-                        <a:srgbClr val="D9E0EA"/>
-                      </a:solidFill>
-                      <a:prstDash val="solid"/>
-                      <a:round/>
-                      <a:headEnd type="none" w="med" len="med"/>
-                      <a:tailEnd type="none" w="med" len="med"/>
-                    </a:lnT>
-                    <a:lnB w="6350" cap="flat" cmpd="sng" algn="ctr">
+                      <a:endParaRPr lang="en-US" sz="750" dirty="0">
+                        <a:latin typeface="Calibri" charset="0"/>
+                        <a:ea typeface="Calibri" charset="0"/>
+                        <a:cs typeface="Calibri" charset="0"/>
+                      </a:endParaRPr>
+                    </a:p>
+                  </a:txBody>
+                  <a:tcPr marL="45720" marR="45720" marT="22860" marB="22860" anchor="ctr">
+                    <a:lnL w="0" cap="flat" cmpd="sng" algn="ctr">
+                      <a:noFill/>
+                    </a:lnL>
+                    <a:lnR w="0" cap="flat" cmpd="sng" algn="ctr">
+                      <a:noFill/>
+                    </a:lnR>
+                    <a:lnT w="0" cap="flat" cmpd="sng" algn="ctr">
+                      <a:noFill/>
+                    </a:lnT>
+                    <a:lnB w="9525" cap="flat" cmpd="sng" algn="ctr">
                       <a:solidFill>
                         <a:srgbClr val="D9E0EA"/>
                       </a:solidFill>
@@ -1864,44 +1781,26 @@
                     </a:p>
                   </a:txBody>
                   <a:tcPr marL="45720" marR="45720" marT="22860" marB="22860" anchor="ctr">
-                    <a:lnL w="6350" cap="flat" cmpd="sng" algn="ctr">
-                      <a:solidFill>
-                        <a:srgbClr val="D9E0EA"/>
-                      </a:solidFill>
-                      <a:prstDash val="solid"/>
-                      <a:round/>
-                      <a:headEnd type="none" w="med" len="med"/>
-                      <a:tailEnd type="none" w="med" len="med"/>
-                    </a:lnL>
-                    <a:lnR w="6350" cap="flat" cmpd="sng" algn="ctr">
-                      <a:solidFill>
-                        <a:srgbClr val="D9E0EA"/>
-                      </a:solidFill>
-                      <a:prstDash val="solid"/>
-                      <a:round/>
-                      <a:headEnd type="none" w="med" len="med"/>
-                      <a:tailEnd type="none" w="med" len="med"/>
-                    </a:lnR>
-                    <a:lnT w="6350" cap="flat" cmpd="sng" algn="ctr">
-                      <a:solidFill>
-                        <a:srgbClr val="D9E0EA"/>
-                      </a:solidFill>
-                      <a:prstDash val="solid"/>
-                      <a:round/>
-                      <a:headEnd type="none" w="med" len="med"/>
-                      <a:tailEnd type="none" w="med" len="med"/>
-                    </a:lnT>
-                    <a:lnB w="6350" cap="flat" cmpd="sng" algn="ctr">
-                      <a:solidFill>
-                        <a:srgbClr val="D9E0EA"/>
-                      </a:solidFill>
-                      <a:prstDash val="solid"/>
-                      <a:round/>
-                      <a:headEnd type="none" w="med" len="med"/>
-                      <a:tailEnd type="none" w="med" len="med"/>
-                    </a:lnB>
-                    <a:solidFill>
-                      <a:schemeClr val="bg1"/>
+                    <a:lnL w="0" cap="flat" cmpd="sng" algn="ctr">
+                      <a:noFill/>
+                    </a:lnL>
+                    <a:lnR w="0" cap="flat" cmpd="sng" algn="ctr">
+                      <a:noFill/>
+                    </a:lnR>
+                    <a:lnT w="0" cap="flat" cmpd="sng" algn="ctr">
+                      <a:noFill/>
+                    </a:lnT>
+                    <a:lnB w="9525" cap="flat" cmpd="sng" algn="ctr">
+                      <a:solidFill>
+                        <a:srgbClr val="D9E0EA"/>
+                      </a:solidFill>
+                      <a:prstDash val="solid"/>
+                      <a:round/>
+                      <a:headEnd type="none" w="med" len="med"/>
+                      <a:tailEnd type="none" w="med" len="med"/>
+                    </a:lnB>
+                    <a:solidFill>
+                      <a:srgbClr val="FFFFFF"/>
                     </a:solidFill>
                   </a:tcPr>
                 </a:tc>
@@ -1932,59 +1831,41 @@
                     </a:p>
                   </a:txBody>
                   <a:tcPr marL="45720" marR="45720" marT="22860" marB="22860" anchor="ctr">
-                    <a:lnL w="6350" cap="flat" cmpd="sng" algn="ctr">
-                      <a:solidFill>
-                        <a:srgbClr val="D9E0EA"/>
-                      </a:solidFill>
-                      <a:prstDash val="solid"/>
-                      <a:round/>
-                      <a:headEnd type="none" w="med" len="med"/>
-                      <a:tailEnd type="none" w="med" len="med"/>
-                    </a:lnL>
-                    <a:lnR w="6350" cap="flat" cmpd="sng" algn="ctr">
-                      <a:solidFill>
-                        <a:srgbClr val="D9E0EA"/>
-                      </a:solidFill>
-                      <a:prstDash val="solid"/>
-                      <a:round/>
-                      <a:headEnd type="none" w="med" len="med"/>
-                      <a:tailEnd type="none" w="med" len="med"/>
-                    </a:lnR>
-                    <a:lnT w="6350" cap="flat" cmpd="sng" algn="ctr">
-                      <a:solidFill>
-                        <a:srgbClr val="D9E0EA"/>
-                      </a:solidFill>
-                      <a:prstDash val="solid"/>
-                      <a:round/>
-                      <a:headEnd type="none" w="med" len="med"/>
-                      <a:tailEnd type="none" w="med" len="med"/>
-                    </a:lnT>
-                    <a:lnB w="6350" cap="flat" cmpd="sng" algn="ctr">
-                      <a:solidFill>
-                        <a:srgbClr val="D9E0EA"/>
-                      </a:solidFill>
-                      <a:prstDash val="solid"/>
-                      <a:round/>
-                      <a:headEnd type="none" w="med" len="med"/>
-                      <a:tailEnd type="none" w="med" len="med"/>
-                    </a:lnB>
-                    <a:solidFill>
-                      <a:schemeClr val="bg1"/>
-                    </a:solidFill>
-                  </a:tcPr>
-                </a:tc>
-                <a:tc>
-                  <a:txBody>
-                    <a:bodyPr/>
-                    <a:lstStyle/>
-                    <a:p>
-                      <a:pPr indent="0" marL="0">
-                        <a:buNone/>
-                      </a:pPr>
-                      <a:r>
-                        <a:rPr lang="en-US" sz="750" dirty="0">
-                          <a:solidFill>
-                            <a:schemeClr val="accent5"/>
+                    <a:lnL w="0" cap="flat" cmpd="sng" algn="ctr">
+                      <a:noFill/>
+                    </a:lnL>
+                    <a:lnR w="0" cap="flat" cmpd="sng" algn="ctr">
+                      <a:noFill/>
+                    </a:lnR>
+                    <a:lnT w="0" cap="flat" cmpd="sng" algn="ctr">
+                      <a:noFill/>
+                    </a:lnT>
+                    <a:lnB w="9525" cap="flat" cmpd="sng" algn="ctr">
+                      <a:solidFill>
+                        <a:srgbClr val="D9E0EA"/>
+                      </a:solidFill>
+                      <a:prstDash val="solid"/>
+                      <a:round/>
+                      <a:headEnd type="none" w="med" len="med"/>
+                      <a:tailEnd type="none" w="med" len="med"/>
+                    </a:lnB>
+                    <a:solidFill>
+                      <a:srgbClr val="FFFFFF"/>
+                    </a:solidFill>
+                  </a:tcPr>
+                </a:tc>
+                <a:tc>
+                  <a:txBody>
+                    <a:bodyPr/>
+                    <a:lstStyle/>
+                    <a:p>
+                      <a:pPr indent="0" marL="0">
+                        <a:buNone/>
+                      </a:pPr>
+                      <a:r>
+                        <a:rPr lang="en-US" sz="750" b="1" dirty="0">
+                          <a:solidFill>
+                            <a:schemeClr val="accent1"/>
                           </a:solidFill>
                           <a:latin typeface="Calibri" pitchFamily="34" charset="0"/>
                           <a:ea typeface="Calibri" pitchFamily="34" charset="-122"/>
@@ -2000,44 +1881,26 @@
                     </a:p>
                   </a:txBody>
                   <a:tcPr marL="45720" marR="45720" marT="22860" marB="22860" anchor="ctr">
-                    <a:lnL w="6350" cap="flat" cmpd="sng" algn="ctr">
-                      <a:solidFill>
-                        <a:srgbClr val="D9E0EA"/>
-                      </a:solidFill>
-                      <a:prstDash val="solid"/>
-                      <a:round/>
-                      <a:headEnd type="none" w="med" len="med"/>
-                      <a:tailEnd type="none" w="med" len="med"/>
-                    </a:lnL>
-                    <a:lnR w="6350" cap="flat" cmpd="sng" algn="ctr">
-                      <a:solidFill>
-                        <a:srgbClr val="D9E0EA"/>
-                      </a:solidFill>
-                      <a:prstDash val="solid"/>
-                      <a:round/>
-                      <a:headEnd type="none" w="med" len="med"/>
-                      <a:tailEnd type="none" w="med" len="med"/>
-                    </a:lnR>
-                    <a:lnT w="6350" cap="flat" cmpd="sng" algn="ctr">
-                      <a:solidFill>
-                        <a:srgbClr val="D9E0EA"/>
-                      </a:solidFill>
-                      <a:prstDash val="solid"/>
-                      <a:round/>
-                      <a:headEnd type="none" w="med" len="med"/>
-                      <a:tailEnd type="none" w="med" len="med"/>
-                    </a:lnT>
-                    <a:lnB w="6350" cap="flat" cmpd="sng" algn="ctr">
-                      <a:solidFill>
-                        <a:srgbClr val="D9E0EA"/>
-                      </a:solidFill>
-                      <a:prstDash val="solid"/>
-                      <a:round/>
-                      <a:headEnd type="none" w="med" len="med"/>
-                      <a:tailEnd type="none" w="med" len="med"/>
-                    </a:lnB>
-                    <a:solidFill>
-                      <a:schemeClr val="bg1"/>
+                    <a:lnL w="0" cap="flat" cmpd="sng" algn="ctr">
+                      <a:noFill/>
+                    </a:lnL>
+                    <a:lnR w="0" cap="flat" cmpd="sng" algn="ctr">
+                      <a:noFill/>
+                    </a:lnR>
+                    <a:lnT w="0" cap="flat" cmpd="sng" algn="ctr">
+                      <a:noFill/>
+                    </a:lnT>
+                    <a:lnB w="9525" cap="flat" cmpd="sng" algn="ctr">
+                      <a:solidFill>
+                        <a:srgbClr val="D9E0EA"/>
+                      </a:solidFill>
+                      <a:prstDash val="solid"/>
+                      <a:round/>
+                      <a:headEnd type="none" w="med" len="med"/>
+                      <a:tailEnd type="none" w="med" len="med"/>
+                    </a:lnB>
+                    <a:solidFill>
+                      <a:srgbClr val="FFFFFF"/>
                     </a:solidFill>
                   </a:tcPr>
                 </a:tc>
@@ -2070,44 +1933,26 @@
                     </a:p>
                   </a:txBody>
                   <a:tcPr marL="45720" marR="45720" marT="22860" marB="22860" anchor="ctr">
-                    <a:lnL w="6350" cap="flat" cmpd="sng" algn="ctr">
-                      <a:solidFill>
-                        <a:srgbClr val="D9E0EA"/>
-                      </a:solidFill>
-                      <a:prstDash val="solid"/>
-                      <a:round/>
-                      <a:headEnd type="none" w="med" len="med"/>
-                      <a:tailEnd type="none" w="med" len="med"/>
-                    </a:lnL>
-                    <a:lnR w="6350" cap="flat" cmpd="sng" algn="ctr">
-                      <a:solidFill>
-                        <a:srgbClr val="D9E0EA"/>
-                      </a:solidFill>
-                      <a:prstDash val="solid"/>
-                      <a:round/>
-                      <a:headEnd type="none" w="med" len="med"/>
-                      <a:tailEnd type="none" w="med" len="med"/>
-                    </a:lnR>
-                    <a:lnT w="6350" cap="flat" cmpd="sng" algn="ctr">
-                      <a:solidFill>
-                        <a:srgbClr val="D9E0EA"/>
-                      </a:solidFill>
-                      <a:prstDash val="solid"/>
-                      <a:round/>
-                      <a:headEnd type="none" w="med" len="med"/>
-                      <a:tailEnd type="none" w="med" len="med"/>
-                    </a:lnT>
-                    <a:lnB w="6350" cap="flat" cmpd="sng" algn="ctr">
-                      <a:solidFill>
-                        <a:srgbClr val="D9E0EA"/>
-                      </a:solidFill>
-                      <a:prstDash val="solid"/>
-                      <a:round/>
-                      <a:headEnd type="none" w="med" len="med"/>
-                      <a:tailEnd type="none" w="med" len="med"/>
-                    </a:lnB>
-                    <a:solidFill>
-                      <a:schemeClr val="bg1"/>
+                    <a:lnL w="0" cap="flat" cmpd="sng" algn="ctr">
+                      <a:noFill/>
+                    </a:lnL>
+                    <a:lnR w="0" cap="flat" cmpd="sng" algn="ctr">
+                      <a:noFill/>
+                    </a:lnR>
+                    <a:lnT w="0" cap="flat" cmpd="sng" algn="ctr">
+                      <a:noFill/>
+                    </a:lnT>
+                    <a:lnB w="9525" cap="flat" cmpd="sng" algn="ctr">
+                      <a:solidFill>
+                        <a:srgbClr val="D9E0EA"/>
+                      </a:solidFill>
+                      <a:prstDash val="solid"/>
+                      <a:round/>
+                      <a:headEnd type="none" w="med" len="med"/>
+                      <a:tailEnd type="none" w="med" len="med"/>
+                    </a:lnB>
+                    <a:solidFill>
+                      <a:srgbClr val="FFFFFF"/>
                     </a:solidFill>
                   </a:tcPr>
                 </a:tc>
@@ -2138,59 +1983,41 @@
                     </a:p>
                   </a:txBody>
                   <a:tcPr marL="45720" marR="45720" marT="22860" marB="22860" anchor="ctr">
-                    <a:lnL w="6350" cap="flat" cmpd="sng" algn="ctr">
-                      <a:solidFill>
-                        <a:srgbClr val="D9E0EA"/>
-                      </a:solidFill>
-                      <a:prstDash val="solid"/>
-                      <a:round/>
-                      <a:headEnd type="none" w="med" len="med"/>
-                      <a:tailEnd type="none" w="med" len="med"/>
-                    </a:lnL>
-                    <a:lnR w="6350" cap="flat" cmpd="sng" algn="ctr">
-                      <a:solidFill>
-                        <a:srgbClr val="D9E0EA"/>
-                      </a:solidFill>
-                      <a:prstDash val="solid"/>
-                      <a:round/>
-                      <a:headEnd type="none" w="med" len="med"/>
-                      <a:tailEnd type="none" w="med" len="med"/>
-                    </a:lnR>
-                    <a:lnT w="6350" cap="flat" cmpd="sng" algn="ctr">
-                      <a:solidFill>
-                        <a:srgbClr val="D9E0EA"/>
-                      </a:solidFill>
-                      <a:prstDash val="solid"/>
-                      <a:round/>
-                      <a:headEnd type="none" w="med" len="med"/>
-                      <a:tailEnd type="none" w="med" len="med"/>
-                    </a:lnT>
-                    <a:lnB w="6350" cap="flat" cmpd="sng" algn="ctr">
-                      <a:solidFill>
-                        <a:srgbClr val="D9E0EA"/>
-                      </a:solidFill>
-                      <a:prstDash val="solid"/>
-                      <a:round/>
-                      <a:headEnd type="none" w="med" len="med"/>
-                      <a:tailEnd type="none" w="med" len="med"/>
-                    </a:lnB>
-                    <a:solidFill>
-                      <a:schemeClr val="bg1"/>
-                    </a:solidFill>
-                  </a:tcPr>
-                </a:tc>
-                <a:tc>
-                  <a:txBody>
-                    <a:bodyPr/>
-                    <a:lstStyle/>
-                    <a:p>
-                      <a:pPr indent="0" marL="0">
-                        <a:buNone/>
-                      </a:pPr>
-                      <a:r>
-                        <a:rPr lang="en-US" sz="750" dirty="0">
-                          <a:solidFill>
-                            <a:schemeClr val="accent5"/>
+                    <a:lnL w="0" cap="flat" cmpd="sng" algn="ctr">
+                      <a:noFill/>
+                    </a:lnL>
+                    <a:lnR w="0" cap="flat" cmpd="sng" algn="ctr">
+                      <a:noFill/>
+                    </a:lnR>
+                    <a:lnT w="0" cap="flat" cmpd="sng" algn="ctr">
+                      <a:noFill/>
+                    </a:lnT>
+                    <a:lnB w="9525" cap="flat" cmpd="sng" algn="ctr">
+                      <a:solidFill>
+                        <a:srgbClr val="D9E0EA"/>
+                      </a:solidFill>
+                      <a:prstDash val="solid"/>
+                      <a:round/>
+                      <a:headEnd type="none" w="med" len="med"/>
+                      <a:tailEnd type="none" w="med" len="med"/>
+                    </a:lnB>
+                    <a:solidFill>
+                      <a:srgbClr val="FFFFFF"/>
+                    </a:solidFill>
+                  </a:tcPr>
+                </a:tc>
+                <a:tc>
+                  <a:txBody>
+                    <a:bodyPr/>
+                    <a:lstStyle/>
+                    <a:p>
+                      <a:pPr indent="0" marL="0">
+                        <a:buNone/>
+                      </a:pPr>
+                      <a:r>
+                        <a:rPr lang="en-US" sz="750" b="1" dirty="0">
+                          <a:solidFill>
+                            <a:schemeClr val="accent1"/>
                           </a:solidFill>
                           <a:latin typeface="Calibri" pitchFamily="34" charset="0"/>
                           <a:ea typeface="Calibri" pitchFamily="34" charset="-122"/>
@@ -2206,44 +2033,26 @@
                     </a:p>
                   </a:txBody>
                   <a:tcPr marL="45720" marR="45720" marT="22860" marB="22860" anchor="ctr">
-                    <a:lnL w="6350" cap="flat" cmpd="sng" algn="ctr">
-                      <a:solidFill>
-                        <a:srgbClr val="D9E0EA"/>
-                      </a:solidFill>
-                      <a:prstDash val="solid"/>
-                      <a:round/>
-                      <a:headEnd type="none" w="med" len="med"/>
-                      <a:tailEnd type="none" w="med" len="med"/>
-                    </a:lnL>
-                    <a:lnR w="6350" cap="flat" cmpd="sng" algn="ctr">
-                      <a:solidFill>
-                        <a:srgbClr val="D9E0EA"/>
-                      </a:solidFill>
-                      <a:prstDash val="solid"/>
-                      <a:round/>
-                      <a:headEnd type="none" w="med" len="med"/>
-                      <a:tailEnd type="none" w="med" len="med"/>
-                    </a:lnR>
-                    <a:lnT w="6350" cap="flat" cmpd="sng" algn="ctr">
-                      <a:solidFill>
-                        <a:srgbClr val="D9E0EA"/>
-                      </a:solidFill>
-                      <a:prstDash val="solid"/>
-                      <a:round/>
-                      <a:headEnd type="none" w="med" len="med"/>
-                      <a:tailEnd type="none" w="med" len="med"/>
-                    </a:lnT>
-                    <a:lnB w="6350" cap="flat" cmpd="sng" algn="ctr">
-                      <a:solidFill>
-                        <a:srgbClr val="D9E0EA"/>
-                      </a:solidFill>
-                      <a:prstDash val="solid"/>
-                      <a:round/>
-                      <a:headEnd type="none" w="med" len="med"/>
-                      <a:tailEnd type="none" w="med" len="med"/>
-                    </a:lnB>
-                    <a:solidFill>
-                      <a:schemeClr val="bg1"/>
+                    <a:lnL w="0" cap="flat" cmpd="sng" algn="ctr">
+                      <a:noFill/>
+                    </a:lnL>
+                    <a:lnR w="0" cap="flat" cmpd="sng" algn="ctr">
+                      <a:noFill/>
+                    </a:lnR>
+                    <a:lnT w="0" cap="flat" cmpd="sng" algn="ctr">
+                      <a:noFill/>
+                    </a:lnT>
+                    <a:lnB w="9525" cap="flat" cmpd="sng" algn="ctr">
+                      <a:solidFill>
+                        <a:srgbClr val="D9E0EA"/>
+                      </a:solidFill>
+                      <a:prstDash val="solid"/>
+                      <a:round/>
+                      <a:headEnd type="none" w="med" len="med"/>
+                      <a:tailEnd type="none" w="med" len="med"/>
+                    </a:lnB>
+                    <a:solidFill>
+                      <a:srgbClr val="FFFFFF"/>
                     </a:solidFill>
                   </a:tcPr>
                 </a:tc>
@@ -2258,7 +2067,7 @@
                         <a:buNone/>
                       </a:pPr>
                       <a:r>
-                        <a:rPr lang="en-US" sz="800" b="1" spc="100" kern="0" dirty="0">
+                        <a:rPr lang="en-US" sz="750" b="1" spc="100" kern="0" dirty="0">
                           <a:solidFill>
                             <a:schemeClr val="accent1"/>
                           </a:solidFill>
@@ -2268,42 +2077,24 @@
                         </a:rPr>
                         <a:t>B. IMPLEMENTACIÓN DE LA HERRAMIENTA DE MONITOREO</a:t>
                       </a:r>
-                      <a:endParaRPr lang="en-US" sz="800" dirty="0">
-                        <a:latin typeface="Calibri" charset="0"/>
-                        <a:ea typeface="Calibri" charset="0"/>
-                        <a:cs typeface="Calibri" charset="0"/>
-                      </a:endParaRPr>
-                    </a:p>
-                  </a:txBody>
-                  <a:tcPr marL="45720" marR="45720" marT="22860" marB="22860" anchor="ctr">
-                    <a:lnL w="6350" cap="flat" cmpd="sng" algn="ctr">
-                      <a:solidFill>
-                        <a:srgbClr val="D9E0EA"/>
-                      </a:solidFill>
-                      <a:prstDash val="solid"/>
-                      <a:round/>
-                      <a:headEnd type="none" w="med" len="med"/>
-                      <a:tailEnd type="none" w="med" len="med"/>
-                    </a:lnL>
-                    <a:lnR w="6350" cap="flat" cmpd="sng" algn="ctr">
-                      <a:solidFill>
-                        <a:srgbClr val="D9E0EA"/>
-                      </a:solidFill>
-                      <a:prstDash val="solid"/>
-                      <a:round/>
-                      <a:headEnd type="none" w="med" len="med"/>
-                      <a:tailEnd type="none" w="med" len="med"/>
-                    </a:lnR>
-                    <a:lnT w="6350" cap="flat" cmpd="sng" algn="ctr">
-                      <a:solidFill>
-                        <a:srgbClr val="D9E0EA"/>
-                      </a:solidFill>
-                      <a:prstDash val="solid"/>
-                      <a:round/>
-                      <a:headEnd type="none" w="med" len="med"/>
-                      <a:tailEnd type="none" w="med" len="med"/>
-                    </a:lnT>
-                    <a:lnB w="6350" cap="flat" cmpd="sng" algn="ctr">
+                      <a:endParaRPr lang="en-US" sz="750" dirty="0">
+                        <a:latin typeface="Calibri" charset="0"/>
+                        <a:ea typeface="Calibri" charset="0"/>
+                        <a:cs typeface="Calibri" charset="0"/>
+                      </a:endParaRPr>
+                    </a:p>
+                  </a:txBody>
+                  <a:tcPr marL="45720" marR="45720" marT="22860" marB="22860" anchor="ctr">
+                    <a:lnL w="0" cap="flat" cmpd="sng" algn="ctr">
+                      <a:noFill/>
+                    </a:lnL>
+                    <a:lnR w="0" cap="flat" cmpd="sng" algn="ctr">
+                      <a:noFill/>
+                    </a:lnR>
+                    <a:lnT w="0" cap="flat" cmpd="sng" algn="ctr">
+                      <a:noFill/>
+                    </a:lnT>
+                    <a:lnB w="9525" cap="flat" cmpd="sng" algn="ctr">
                       <a:solidFill>
                         <a:srgbClr val="D9E0EA"/>
                       </a:solidFill>
@@ -2352,44 +2143,26 @@
                     </a:p>
                   </a:txBody>
                   <a:tcPr marL="45720" marR="45720" marT="22860" marB="22860" anchor="ctr">
-                    <a:lnL w="6350" cap="flat" cmpd="sng" algn="ctr">
-                      <a:solidFill>
-                        <a:srgbClr val="D9E0EA"/>
-                      </a:solidFill>
-                      <a:prstDash val="solid"/>
-                      <a:round/>
-                      <a:headEnd type="none" w="med" len="med"/>
-                      <a:tailEnd type="none" w="med" len="med"/>
-                    </a:lnL>
-                    <a:lnR w="6350" cap="flat" cmpd="sng" algn="ctr">
-                      <a:solidFill>
-                        <a:srgbClr val="D9E0EA"/>
-                      </a:solidFill>
-                      <a:prstDash val="solid"/>
-                      <a:round/>
-                      <a:headEnd type="none" w="med" len="med"/>
-                      <a:tailEnd type="none" w="med" len="med"/>
-                    </a:lnR>
-                    <a:lnT w="6350" cap="flat" cmpd="sng" algn="ctr">
-                      <a:solidFill>
-                        <a:srgbClr val="D9E0EA"/>
-                      </a:solidFill>
-                      <a:prstDash val="solid"/>
-                      <a:round/>
-                      <a:headEnd type="none" w="med" len="med"/>
-                      <a:tailEnd type="none" w="med" len="med"/>
-                    </a:lnT>
-                    <a:lnB w="6350" cap="flat" cmpd="sng" algn="ctr">
-                      <a:solidFill>
-                        <a:srgbClr val="D9E0EA"/>
-                      </a:solidFill>
-                      <a:prstDash val="solid"/>
-                      <a:round/>
-                      <a:headEnd type="none" w="med" len="med"/>
-                      <a:tailEnd type="none" w="med" len="med"/>
-                    </a:lnB>
-                    <a:solidFill>
-                      <a:schemeClr val="bg1"/>
+                    <a:lnL w="0" cap="flat" cmpd="sng" algn="ctr">
+                      <a:noFill/>
+                    </a:lnL>
+                    <a:lnR w="0" cap="flat" cmpd="sng" algn="ctr">
+                      <a:noFill/>
+                    </a:lnR>
+                    <a:lnT w="0" cap="flat" cmpd="sng" algn="ctr">
+                      <a:noFill/>
+                    </a:lnT>
+                    <a:lnB w="9525" cap="flat" cmpd="sng" algn="ctr">
+                      <a:solidFill>
+                        <a:srgbClr val="D9E0EA"/>
+                      </a:solidFill>
+                      <a:prstDash val="solid"/>
+                      <a:round/>
+                      <a:headEnd type="none" w="med" len="med"/>
+                      <a:tailEnd type="none" w="med" len="med"/>
+                    </a:lnB>
+                    <a:solidFill>
+                      <a:srgbClr val="FFFFFF"/>
                     </a:solidFill>
                   </a:tcPr>
                 </a:tc>
@@ -2420,59 +2193,41 @@
                     </a:p>
                   </a:txBody>
                   <a:tcPr marL="45720" marR="45720" marT="22860" marB="22860" anchor="ctr">
-                    <a:lnL w="6350" cap="flat" cmpd="sng" algn="ctr">
-                      <a:solidFill>
-                        <a:srgbClr val="D9E0EA"/>
-                      </a:solidFill>
-                      <a:prstDash val="solid"/>
-                      <a:round/>
-                      <a:headEnd type="none" w="med" len="med"/>
-                      <a:tailEnd type="none" w="med" len="med"/>
-                    </a:lnL>
-                    <a:lnR w="6350" cap="flat" cmpd="sng" algn="ctr">
-                      <a:solidFill>
-                        <a:srgbClr val="D9E0EA"/>
-                      </a:solidFill>
-                      <a:prstDash val="solid"/>
-                      <a:round/>
-                      <a:headEnd type="none" w="med" len="med"/>
-                      <a:tailEnd type="none" w="med" len="med"/>
-                    </a:lnR>
-                    <a:lnT w="6350" cap="flat" cmpd="sng" algn="ctr">
-                      <a:solidFill>
-                        <a:srgbClr val="D9E0EA"/>
-                      </a:solidFill>
-                      <a:prstDash val="solid"/>
-                      <a:round/>
-                      <a:headEnd type="none" w="med" len="med"/>
-                      <a:tailEnd type="none" w="med" len="med"/>
-                    </a:lnT>
-                    <a:lnB w="6350" cap="flat" cmpd="sng" algn="ctr">
-                      <a:solidFill>
-                        <a:srgbClr val="D9E0EA"/>
-                      </a:solidFill>
-                      <a:prstDash val="solid"/>
-                      <a:round/>
-                      <a:headEnd type="none" w="med" len="med"/>
-                      <a:tailEnd type="none" w="med" len="med"/>
-                    </a:lnB>
-                    <a:solidFill>
-                      <a:schemeClr val="bg1"/>
-                    </a:solidFill>
-                  </a:tcPr>
-                </a:tc>
-                <a:tc>
-                  <a:txBody>
-                    <a:bodyPr/>
-                    <a:lstStyle/>
-                    <a:p>
-                      <a:pPr indent="0" marL="0">
-                        <a:buNone/>
-                      </a:pPr>
-                      <a:r>
-                        <a:rPr lang="en-US" sz="750" dirty="0">
-                          <a:solidFill>
-                            <a:schemeClr val="accent5"/>
+                    <a:lnL w="0" cap="flat" cmpd="sng" algn="ctr">
+                      <a:noFill/>
+                    </a:lnL>
+                    <a:lnR w="0" cap="flat" cmpd="sng" algn="ctr">
+                      <a:noFill/>
+                    </a:lnR>
+                    <a:lnT w="0" cap="flat" cmpd="sng" algn="ctr">
+                      <a:noFill/>
+                    </a:lnT>
+                    <a:lnB w="9525" cap="flat" cmpd="sng" algn="ctr">
+                      <a:solidFill>
+                        <a:srgbClr val="D9E0EA"/>
+                      </a:solidFill>
+                      <a:prstDash val="solid"/>
+                      <a:round/>
+                      <a:headEnd type="none" w="med" len="med"/>
+                      <a:tailEnd type="none" w="med" len="med"/>
+                    </a:lnB>
+                    <a:solidFill>
+                      <a:srgbClr val="FFFFFF"/>
+                    </a:solidFill>
+                  </a:tcPr>
+                </a:tc>
+                <a:tc>
+                  <a:txBody>
+                    <a:bodyPr/>
+                    <a:lstStyle/>
+                    <a:p>
+                      <a:pPr indent="0" marL="0">
+                        <a:buNone/>
+                      </a:pPr>
+                      <a:r>
+                        <a:rPr lang="en-US" sz="750" b="1" dirty="0">
+                          <a:solidFill>
+                            <a:schemeClr val="accent1"/>
                           </a:solidFill>
                           <a:latin typeface="Calibri" pitchFamily="34" charset="0"/>
                           <a:ea typeface="Calibri" pitchFamily="34" charset="-122"/>
@@ -2488,44 +2243,26 @@
                     </a:p>
                   </a:txBody>
                   <a:tcPr marL="45720" marR="45720" marT="22860" marB="22860" anchor="ctr">
-                    <a:lnL w="6350" cap="flat" cmpd="sng" algn="ctr">
-                      <a:solidFill>
-                        <a:srgbClr val="D9E0EA"/>
-                      </a:solidFill>
-                      <a:prstDash val="solid"/>
-                      <a:round/>
-                      <a:headEnd type="none" w="med" len="med"/>
-                      <a:tailEnd type="none" w="med" len="med"/>
-                    </a:lnL>
-                    <a:lnR w="6350" cap="flat" cmpd="sng" algn="ctr">
-                      <a:solidFill>
-                        <a:srgbClr val="D9E0EA"/>
-                      </a:solidFill>
-                      <a:prstDash val="solid"/>
-                      <a:round/>
-                      <a:headEnd type="none" w="med" len="med"/>
-                      <a:tailEnd type="none" w="med" len="med"/>
-                    </a:lnR>
-                    <a:lnT w="6350" cap="flat" cmpd="sng" algn="ctr">
-                      <a:solidFill>
-                        <a:srgbClr val="D9E0EA"/>
-                      </a:solidFill>
-                      <a:prstDash val="solid"/>
-                      <a:round/>
-                      <a:headEnd type="none" w="med" len="med"/>
-                      <a:tailEnd type="none" w="med" len="med"/>
-                    </a:lnT>
-                    <a:lnB w="6350" cap="flat" cmpd="sng" algn="ctr">
-                      <a:solidFill>
-                        <a:srgbClr val="D9E0EA"/>
-                      </a:solidFill>
-                      <a:prstDash val="solid"/>
-                      <a:round/>
-                      <a:headEnd type="none" w="med" len="med"/>
-                      <a:tailEnd type="none" w="med" len="med"/>
-                    </a:lnB>
-                    <a:solidFill>
-                      <a:schemeClr val="bg1"/>
+                    <a:lnL w="0" cap="flat" cmpd="sng" algn="ctr">
+                      <a:noFill/>
+                    </a:lnL>
+                    <a:lnR w="0" cap="flat" cmpd="sng" algn="ctr">
+                      <a:noFill/>
+                    </a:lnR>
+                    <a:lnT w="0" cap="flat" cmpd="sng" algn="ctr">
+                      <a:noFill/>
+                    </a:lnT>
+                    <a:lnB w="9525" cap="flat" cmpd="sng" algn="ctr">
+                      <a:solidFill>
+                        <a:srgbClr val="D9E0EA"/>
+                      </a:solidFill>
+                      <a:prstDash val="solid"/>
+                      <a:round/>
+                      <a:headEnd type="none" w="med" len="med"/>
+                      <a:tailEnd type="none" w="med" len="med"/>
+                    </a:lnB>
+                    <a:solidFill>
+                      <a:srgbClr val="FFFFFF"/>
                     </a:solidFill>
                   </a:tcPr>
                 </a:tc>
@@ -2558,44 +2295,26 @@
                     </a:p>
                   </a:txBody>
                   <a:tcPr marL="45720" marR="45720" marT="22860" marB="22860" anchor="ctr">
-                    <a:lnL w="6350" cap="flat" cmpd="sng" algn="ctr">
-                      <a:solidFill>
-                        <a:srgbClr val="D9E0EA"/>
-                      </a:solidFill>
-                      <a:prstDash val="solid"/>
-                      <a:round/>
-                      <a:headEnd type="none" w="med" len="med"/>
-                      <a:tailEnd type="none" w="med" len="med"/>
-                    </a:lnL>
-                    <a:lnR w="6350" cap="flat" cmpd="sng" algn="ctr">
-                      <a:solidFill>
-                        <a:srgbClr val="D9E0EA"/>
-                      </a:solidFill>
-                      <a:prstDash val="solid"/>
-                      <a:round/>
-                      <a:headEnd type="none" w="med" len="med"/>
-                      <a:tailEnd type="none" w="med" len="med"/>
-                    </a:lnR>
-                    <a:lnT w="6350" cap="flat" cmpd="sng" algn="ctr">
-                      <a:solidFill>
-                        <a:srgbClr val="D9E0EA"/>
-                      </a:solidFill>
-                      <a:prstDash val="solid"/>
-                      <a:round/>
-                      <a:headEnd type="none" w="med" len="med"/>
-                      <a:tailEnd type="none" w="med" len="med"/>
-                    </a:lnT>
-                    <a:lnB w="6350" cap="flat" cmpd="sng" algn="ctr">
-                      <a:solidFill>
-                        <a:srgbClr val="D9E0EA"/>
-                      </a:solidFill>
-                      <a:prstDash val="solid"/>
-                      <a:round/>
-                      <a:headEnd type="none" w="med" len="med"/>
-                      <a:tailEnd type="none" w="med" len="med"/>
-                    </a:lnB>
-                    <a:solidFill>
-                      <a:schemeClr val="bg1"/>
+                    <a:lnL w="0" cap="flat" cmpd="sng" algn="ctr">
+                      <a:noFill/>
+                    </a:lnL>
+                    <a:lnR w="0" cap="flat" cmpd="sng" algn="ctr">
+                      <a:noFill/>
+                    </a:lnR>
+                    <a:lnT w="0" cap="flat" cmpd="sng" algn="ctr">
+                      <a:noFill/>
+                    </a:lnT>
+                    <a:lnB w="9525" cap="flat" cmpd="sng" algn="ctr">
+                      <a:solidFill>
+                        <a:srgbClr val="D9E0EA"/>
+                      </a:solidFill>
+                      <a:prstDash val="solid"/>
+                      <a:round/>
+                      <a:headEnd type="none" w="med" len="med"/>
+                      <a:tailEnd type="none" w="med" len="med"/>
+                    </a:lnB>
+                    <a:solidFill>
+                      <a:srgbClr val="FFFFFF"/>
                     </a:solidFill>
                   </a:tcPr>
                 </a:tc>
@@ -2626,59 +2345,41 @@
                     </a:p>
                   </a:txBody>
                   <a:tcPr marL="45720" marR="45720" marT="22860" marB="22860" anchor="ctr">
-                    <a:lnL w="6350" cap="flat" cmpd="sng" algn="ctr">
-                      <a:solidFill>
-                        <a:srgbClr val="D9E0EA"/>
-                      </a:solidFill>
-                      <a:prstDash val="solid"/>
-                      <a:round/>
-                      <a:headEnd type="none" w="med" len="med"/>
-                      <a:tailEnd type="none" w="med" len="med"/>
-                    </a:lnL>
-                    <a:lnR w="6350" cap="flat" cmpd="sng" algn="ctr">
-                      <a:solidFill>
-                        <a:srgbClr val="D9E0EA"/>
-                      </a:solidFill>
-                      <a:prstDash val="solid"/>
-                      <a:round/>
-                      <a:headEnd type="none" w="med" len="med"/>
-                      <a:tailEnd type="none" w="med" len="med"/>
-                    </a:lnR>
-                    <a:lnT w="6350" cap="flat" cmpd="sng" algn="ctr">
-                      <a:solidFill>
-                        <a:srgbClr val="D9E0EA"/>
-                      </a:solidFill>
-                      <a:prstDash val="solid"/>
-                      <a:round/>
-                      <a:headEnd type="none" w="med" len="med"/>
-                      <a:tailEnd type="none" w="med" len="med"/>
-                    </a:lnT>
-                    <a:lnB w="6350" cap="flat" cmpd="sng" algn="ctr">
-                      <a:solidFill>
-                        <a:srgbClr val="D9E0EA"/>
-                      </a:solidFill>
-                      <a:prstDash val="solid"/>
-                      <a:round/>
-                      <a:headEnd type="none" w="med" len="med"/>
-                      <a:tailEnd type="none" w="med" len="med"/>
-                    </a:lnB>
-                    <a:solidFill>
-                      <a:schemeClr val="bg1"/>
-                    </a:solidFill>
-                  </a:tcPr>
-                </a:tc>
-                <a:tc>
-                  <a:txBody>
-                    <a:bodyPr/>
-                    <a:lstStyle/>
-                    <a:p>
-                      <a:pPr indent="0" marL="0">
-                        <a:buNone/>
-                      </a:pPr>
-                      <a:r>
-                        <a:rPr lang="en-US" sz="750" dirty="0">
-                          <a:solidFill>
-                            <a:schemeClr val="accent5"/>
+                    <a:lnL w="0" cap="flat" cmpd="sng" algn="ctr">
+                      <a:noFill/>
+                    </a:lnL>
+                    <a:lnR w="0" cap="flat" cmpd="sng" algn="ctr">
+                      <a:noFill/>
+                    </a:lnR>
+                    <a:lnT w="0" cap="flat" cmpd="sng" algn="ctr">
+                      <a:noFill/>
+                    </a:lnT>
+                    <a:lnB w="9525" cap="flat" cmpd="sng" algn="ctr">
+                      <a:solidFill>
+                        <a:srgbClr val="D9E0EA"/>
+                      </a:solidFill>
+                      <a:prstDash val="solid"/>
+                      <a:round/>
+                      <a:headEnd type="none" w="med" len="med"/>
+                      <a:tailEnd type="none" w="med" len="med"/>
+                    </a:lnB>
+                    <a:solidFill>
+                      <a:srgbClr val="FFFFFF"/>
+                    </a:solidFill>
+                  </a:tcPr>
+                </a:tc>
+                <a:tc>
+                  <a:txBody>
+                    <a:bodyPr/>
+                    <a:lstStyle/>
+                    <a:p>
+                      <a:pPr indent="0" marL="0">
+                        <a:buNone/>
+                      </a:pPr>
+                      <a:r>
+                        <a:rPr lang="en-US" sz="750" b="1" dirty="0">
+                          <a:solidFill>
+                            <a:schemeClr val="accent1"/>
                           </a:solidFill>
                           <a:latin typeface="Calibri" pitchFamily="34" charset="0"/>
                           <a:ea typeface="Calibri" pitchFamily="34" charset="-122"/>
@@ -2694,44 +2395,26 @@
                     </a:p>
                   </a:txBody>
                   <a:tcPr marL="45720" marR="45720" marT="22860" marB="22860" anchor="ctr">
-                    <a:lnL w="6350" cap="flat" cmpd="sng" algn="ctr">
-                      <a:solidFill>
-                        <a:srgbClr val="D9E0EA"/>
-                      </a:solidFill>
-                      <a:prstDash val="solid"/>
-                      <a:round/>
-                      <a:headEnd type="none" w="med" len="med"/>
-                      <a:tailEnd type="none" w="med" len="med"/>
-                    </a:lnL>
-                    <a:lnR w="6350" cap="flat" cmpd="sng" algn="ctr">
-                      <a:solidFill>
-                        <a:srgbClr val="D9E0EA"/>
-                      </a:solidFill>
-                      <a:prstDash val="solid"/>
-                      <a:round/>
-                      <a:headEnd type="none" w="med" len="med"/>
-                      <a:tailEnd type="none" w="med" len="med"/>
-                    </a:lnR>
-                    <a:lnT w="6350" cap="flat" cmpd="sng" algn="ctr">
-                      <a:solidFill>
-                        <a:srgbClr val="D9E0EA"/>
-                      </a:solidFill>
-                      <a:prstDash val="solid"/>
-                      <a:round/>
-                      <a:headEnd type="none" w="med" len="med"/>
-                      <a:tailEnd type="none" w="med" len="med"/>
-                    </a:lnT>
-                    <a:lnB w="6350" cap="flat" cmpd="sng" algn="ctr">
-                      <a:solidFill>
-                        <a:srgbClr val="D9E0EA"/>
-                      </a:solidFill>
-                      <a:prstDash val="solid"/>
-                      <a:round/>
-                      <a:headEnd type="none" w="med" len="med"/>
-                      <a:tailEnd type="none" w="med" len="med"/>
-                    </a:lnB>
-                    <a:solidFill>
-                      <a:schemeClr val="bg1"/>
+                    <a:lnL w="0" cap="flat" cmpd="sng" algn="ctr">
+                      <a:noFill/>
+                    </a:lnL>
+                    <a:lnR w="0" cap="flat" cmpd="sng" algn="ctr">
+                      <a:noFill/>
+                    </a:lnR>
+                    <a:lnT w="0" cap="flat" cmpd="sng" algn="ctr">
+                      <a:noFill/>
+                    </a:lnT>
+                    <a:lnB w="9525" cap="flat" cmpd="sng" algn="ctr">
+                      <a:solidFill>
+                        <a:srgbClr val="D9E0EA"/>
+                      </a:solidFill>
+                      <a:prstDash val="solid"/>
+                      <a:round/>
+                      <a:headEnd type="none" w="med" len="med"/>
+                      <a:tailEnd type="none" w="med" len="med"/>
+                    </a:lnB>
+                    <a:solidFill>
+                      <a:srgbClr val="FFFFFF"/>
                     </a:solidFill>
                   </a:tcPr>
                 </a:tc>
@@ -2764,44 +2447,26 @@
                     </a:p>
                   </a:txBody>
                   <a:tcPr marL="45720" marR="45720" marT="22860" marB="22860" anchor="ctr">
-                    <a:lnL w="6350" cap="flat" cmpd="sng" algn="ctr">
-                      <a:solidFill>
-                        <a:srgbClr val="D9E0EA"/>
-                      </a:solidFill>
-                      <a:prstDash val="solid"/>
-                      <a:round/>
-                      <a:headEnd type="none" w="med" len="med"/>
-                      <a:tailEnd type="none" w="med" len="med"/>
-                    </a:lnL>
-                    <a:lnR w="6350" cap="flat" cmpd="sng" algn="ctr">
-                      <a:solidFill>
-                        <a:srgbClr val="D9E0EA"/>
-                      </a:solidFill>
-                      <a:prstDash val="solid"/>
-                      <a:round/>
-                      <a:headEnd type="none" w="med" len="med"/>
-                      <a:tailEnd type="none" w="med" len="med"/>
-                    </a:lnR>
-                    <a:lnT w="6350" cap="flat" cmpd="sng" algn="ctr">
-                      <a:solidFill>
-                        <a:srgbClr val="D9E0EA"/>
-                      </a:solidFill>
-                      <a:prstDash val="solid"/>
-                      <a:round/>
-                      <a:headEnd type="none" w="med" len="med"/>
-                      <a:tailEnd type="none" w="med" len="med"/>
-                    </a:lnT>
-                    <a:lnB w="6350" cap="flat" cmpd="sng" algn="ctr">
-                      <a:solidFill>
-                        <a:srgbClr val="D9E0EA"/>
-                      </a:solidFill>
-                      <a:prstDash val="solid"/>
-                      <a:round/>
-                      <a:headEnd type="none" w="med" len="med"/>
-                      <a:tailEnd type="none" w="med" len="med"/>
-                    </a:lnB>
-                    <a:solidFill>
-                      <a:schemeClr val="bg1"/>
+                    <a:lnL w="0" cap="flat" cmpd="sng" algn="ctr">
+                      <a:noFill/>
+                    </a:lnL>
+                    <a:lnR w="0" cap="flat" cmpd="sng" algn="ctr">
+                      <a:noFill/>
+                    </a:lnR>
+                    <a:lnT w="0" cap="flat" cmpd="sng" algn="ctr">
+                      <a:noFill/>
+                    </a:lnT>
+                    <a:lnB w="9525" cap="flat" cmpd="sng" algn="ctr">
+                      <a:solidFill>
+                        <a:srgbClr val="D9E0EA"/>
+                      </a:solidFill>
+                      <a:prstDash val="solid"/>
+                      <a:round/>
+                      <a:headEnd type="none" w="med" len="med"/>
+                      <a:tailEnd type="none" w="med" len="med"/>
+                    </a:lnB>
+                    <a:solidFill>
+                      <a:srgbClr val="FFFFFF"/>
                     </a:solidFill>
                   </a:tcPr>
                 </a:tc>
@@ -2832,59 +2497,41 @@
                     </a:p>
                   </a:txBody>
                   <a:tcPr marL="45720" marR="45720" marT="22860" marB="22860" anchor="ctr">
-                    <a:lnL w="6350" cap="flat" cmpd="sng" algn="ctr">
-                      <a:solidFill>
-                        <a:srgbClr val="D9E0EA"/>
-                      </a:solidFill>
-                      <a:prstDash val="solid"/>
-                      <a:round/>
-                      <a:headEnd type="none" w="med" len="med"/>
-                      <a:tailEnd type="none" w="med" len="med"/>
-                    </a:lnL>
-                    <a:lnR w="6350" cap="flat" cmpd="sng" algn="ctr">
-                      <a:solidFill>
-                        <a:srgbClr val="D9E0EA"/>
-                      </a:solidFill>
-                      <a:prstDash val="solid"/>
-                      <a:round/>
-                      <a:headEnd type="none" w="med" len="med"/>
-                      <a:tailEnd type="none" w="med" len="med"/>
-                    </a:lnR>
-                    <a:lnT w="6350" cap="flat" cmpd="sng" algn="ctr">
-                      <a:solidFill>
-                        <a:srgbClr val="D9E0EA"/>
-                      </a:solidFill>
-                      <a:prstDash val="solid"/>
-                      <a:round/>
-                      <a:headEnd type="none" w="med" len="med"/>
-                      <a:tailEnd type="none" w="med" len="med"/>
-                    </a:lnT>
-                    <a:lnB w="6350" cap="flat" cmpd="sng" algn="ctr">
-                      <a:solidFill>
-                        <a:srgbClr val="D9E0EA"/>
-                      </a:solidFill>
-                      <a:prstDash val="solid"/>
-                      <a:round/>
-                      <a:headEnd type="none" w="med" len="med"/>
-                      <a:tailEnd type="none" w="med" len="med"/>
-                    </a:lnB>
-                    <a:solidFill>
-                      <a:schemeClr val="bg1"/>
-                    </a:solidFill>
-                  </a:tcPr>
-                </a:tc>
-                <a:tc>
-                  <a:txBody>
-                    <a:bodyPr/>
-                    <a:lstStyle/>
-                    <a:p>
-                      <a:pPr indent="0" marL="0">
-                        <a:buNone/>
-                      </a:pPr>
-                      <a:r>
-                        <a:rPr lang="en-US" sz="750" dirty="0">
-                          <a:solidFill>
-                            <a:schemeClr val="accent5"/>
+                    <a:lnL w="0" cap="flat" cmpd="sng" algn="ctr">
+                      <a:noFill/>
+                    </a:lnL>
+                    <a:lnR w="0" cap="flat" cmpd="sng" algn="ctr">
+                      <a:noFill/>
+                    </a:lnR>
+                    <a:lnT w="0" cap="flat" cmpd="sng" algn="ctr">
+                      <a:noFill/>
+                    </a:lnT>
+                    <a:lnB w="9525" cap="flat" cmpd="sng" algn="ctr">
+                      <a:solidFill>
+                        <a:srgbClr val="D9E0EA"/>
+                      </a:solidFill>
+                      <a:prstDash val="solid"/>
+                      <a:round/>
+                      <a:headEnd type="none" w="med" len="med"/>
+                      <a:tailEnd type="none" w="med" len="med"/>
+                    </a:lnB>
+                    <a:solidFill>
+                      <a:srgbClr val="FFFFFF"/>
+                    </a:solidFill>
+                  </a:tcPr>
+                </a:tc>
+                <a:tc>
+                  <a:txBody>
+                    <a:bodyPr/>
+                    <a:lstStyle/>
+                    <a:p>
+                      <a:pPr indent="0" marL="0">
+                        <a:buNone/>
+                      </a:pPr>
+                      <a:r>
+                        <a:rPr lang="en-US" sz="750" b="1" dirty="0">
+                          <a:solidFill>
+                            <a:schemeClr val="accent1"/>
                           </a:solidFill>
                           <a:latin typeface="Calibri" pitchFamily="34" charset="0"/>
                           <a:ea typeface="Calibri" pitchFamily="34" charset="-122"/>
@@ -2900,44 +2547,26 @@
                     </a:p>
                   </a:txBody>
                   <a:tcPr marL="45720" marR="45720" marT="22860" marB="22860" anchor="ctr">
-                    <a:lnL w="6350" cap="flat" cmpd="sng" algn="ctr">
-                      <a:solidFill>
-                        <a:srgbClr val="D9E0EA"/>
-                      </a:solidFill>
-                      <a:prstDash val="solid"/>
-                      <a:round/>
-                      <a:headEnd type="none" w="med" len="med"/>
-                      <a:tailEnd type="none" w="med" len="med"/>
-                    </a:lnL>
-                    <a:lnR w="6350" cap="flat" cmpd="sng" algn="ctr">
-                      <a:solidFill>
-                        <a:srgbClr val="D9E0EA"/>
-                      </a:solidFill>
-                      <a:prstDash val="solid"/>
-                      <a:round/>
-                      <a:headEnd type="none" w="med" len="med"/>
-                      <a:tailEnd type="none" w="med" len="med"/>
-                    </a:lnR>
-                    <a:lnT w="6350" cap="flat" cmpd="sng" algn="ctr">
-                      <a:solidFill>
-                        <a:srgbClr val="D9E0EA"/>
-                      </a:solidFill>
-                      <a:prstDash val="solid"/>
-                      <a:round/>
-                      <a:headEnd type="none" w="med" len="med"/>
-                      <a:tailEnd type="none" w="med" len="med"/>
-                    </a:lnT>
-                    <a:lnB w="6350" cap="flat" cmpd="sng" algn="ctr">
-                      <a:solidFill>
-                        <a:srgbClr val="D9E0EA"/>
-                      </a:solidFill>
-                      <a:prstDash val="solid"/>
-                      <a:round/>
-                      <a:headEnd type="none" w="med" len="med"/>
-                      <a:tailEnd type="none" w="med" len="med"/>
-                    </a:lnB>
-                    <a:solidFill>
-                      <a:schemeClr val="bg1"/>
+                    <a:lnL w="0" cap="flat" cmpd="sng" algn="ctr">
+                      <a:noFill/>
+                    </a:lnL>
+                    <a:lnR w="0" cap="flat" cmpd="sng" algn="ctr">
+                      <a:noFill/>
+                    </a:lnR>
+                    <a:lnT w="0" cap="flat" cmpd="sng" algn="ctr">
+                      <a:noFill/>
+                    </a:lnT>
+                    <a:lnB w="9525" cap="flat" cmpd="sng" algn="ctr">
+                      <a:solidFill>
+                        <a:srgbClr val="D9E0EA"/>
+                      </a:solidFill>
+                      <a:prstDash val="solid"/>
+                      <a:round/>
+                      <a:headEnd type="none" w="med" len="med"/>
+                      <a:tailEnd type="none" w="med" len="med"/>
+                    </a:lnB>
+                    <a:solidFill>
+                      <a:srgbClr val="FFFFFF"/>
                     </a:solidFill>
                   </a:tcPr>
                 </a:tc>
@@ -2970,44 +2599,26 @@
                     </a:p>
                   </a:txBody>
                   <a:tcPr marL="45720" marR="45720" marT="22860" marB="22860" anchor="ctr">
-                    <a:lnL w="6350" cap="flat" cmpd="sng" algn="ctr">
-                      <a:solidFill>
-                        <a:srgbClr val="D9E0EA"/>
-                      </a:solidFill>
-                      <a:prstDash val="solid"/>
-                      <a:round/>
-                      <a:headEnd type="none" w="med" len="med"/>
-                      <a:tailEnd type="none" w="med" len="med"/>
-                    </a:lnL>
-                    <a:lnR w="6350" cap="flat" cmpd="sng" algn="ctr">
-                      <a:solidFill>
-                        <a:srgbClr val="D9E0EA"/>
-                      </a:solidFill>
-                      <a:prstDash val="solid"/>
-                      <a:round/>
-                      <a:headEnd type="none" w="med" len="med"/>
-                      <a:tailEnd type="none" w="med" len="med"/>
-                    </a:lnR>
-                    <a:lnT w="6350" cap="flat" cmpd="sng" algn="ctr">
-                      <a:solidFill>
-                        <a:srgbClr val="D9E0EA"/>
-                      </a:solidFill>
-                      <a:prstDash val="solid"/>
-                      <a:round/>
-                      <a:headEnd type="none" w="med" len="med"/>
-                      <a:tailEnd type="none" w="med" len="med"/>
-                    </a:lnT>
-                    <a:lnB w="6350" cap="flat" cmpd="sng" algn="ctr">
-                      <a:solidFill>
-                        <a:srgbClr val="D9E0EA"/>
-                      </a:solidFill>
-                      <a:prstDash val="solid"/>
-                      <a:round/>
-                      <a:headEnd type="none" w="med" len="med"/>
-                      <a:tailEnd type="none" w="med" len="med"/>
-                    </a:lnB>
-                    <a:solidFill>
-                      <a:schemeClr val="bg1"/>
+                    <a:lnL w="0" cap="flat" cmpd="sng" algn="ctr">
+                      <a:noFill/>
+                    </a:lnL>
+                    <a:lnR w="0" cap="flat" cmpd="sng" algn="ctr">
+                      <a:noFill/>
+                    </a:lnR>
+                    <a:lnT w="0" cap="flat" cmpd="sng" algn="ctr">
+                      <a:noFill/>
+                    </a:lnT>
+                    <a:lnB w="9525" cap="flat" cmpd="sng" algn="ctr">
+                      <a:solidFill>
+                        <a:srgbClr val="D9E0EA"/>
+                      </a:solidFill>
+                      <a:prstDash val="solid"/>
+                      <a:round/>
+                      <a:headEnd type="none" w="med" len="med"/>
+                      <a:tailEnd type="none" w="med" len="med"/>
+                    </a:lnB>
+                    <a:solidFill>
+                      <a:srgbClr val="FFFFFF"/>
                     </a:solidFill>
                   </a:tcPr>
                 </a:tc>
@@ -3038,59 +2649,41 @@
                     </a:p>
                   </a:txBody>
                   <a:tcPr marL="45720" marR="45720" marT="22860" marB="22860" anchor="ctr">
-                    <a:lnL w="6350" cap="flat" cmpd="sng" algn="ctr">
-                      <a:solidFill>
-                        <a:srgbClr val="D9E0EA"/>
-                      </a:solidFill>
-                      <a:prstDash val="solid"/>
-                      <a:round/>
-                      <a:headEnd type="none" w="med" len="med"/>
-                      <a:tailEnd type="none" w="med" len="med"/>
-                    </a:lnL>
-                    <a:lnR w="6350" cap="flat" cmpd="sng" algn="ctr">
-                      <a:solidFill>
-                        <a:srgbClr val="D9E0EA"/>
-                      </a:solidFill>
-                      <a:prstDash val="solid"/>
-                      <a:round/>
-                      <a:headEnd type="none" w="med" len="med"/>
-                      <a:tailEnd type="none" w="med" len="med"/>
-                    </a:lnR>
-                    <a:lnT w="6350" cap="flat" cmpd="sng" algn="ctr">
-                      <a:solidFill>
-                        <a:srgbClr val="D9E0EA"/>
-                      </a:solidFill>
-                      <a:prstDash val="solid"/>
-                      <a:round/>
-                      <a:headEnd type="none" w="med" len="med"/>
-                      <a:tailEnd type="none" w="med" len="med"/>
-                    </a:lnT>
-                    <a:lnB w="6350" cap="flat" cmpd="sng" algn="ctr">
-                      <a:solidFill>
-                        <a:srgbClr val="D9E0EA"/>
-                      </a:solidFill>
-                      <a:prstDash val="solid"/>
-                      <a:round/>
-                      <a:headEnd type="none" w="med" len="med"/>
-                      <a:tailEnd type="none" w="med" len="med"/>
-                    </a:lnB>
-                    <a:solidFill>
-                      <a:schemeClr val="bg1"/>
-                    </a:solidFill>
-                  </a:tcPr>
-                </a:tc>
-                <a:tc>
-                  <a:txBody>
-                    <a:bodyPr/>
-                    <a:lstStyle/>
-                    <a:p>
-                      <a:pPr indent="0" marL="0">
-                        <a:buNone/>
-                      </a:pPr>
-                      <a:r>
-                        <a:rPr lang="en-US" sz="750" dirty="0">
-                          <a:solidFill>
-                            <a:schemeClr val="accent5"/>
+                    <a:lnL w="0" cap="flat" cmpd="sng" algn="ctr">
+                      <a:noFill/>
+                    </a:lnL>
+                    <a:lnR w="0" cap="flat" cmpd="sng" algn="ctr">
+                      <a:noFill/>
+                    </a:lnR>
+                    <a:lnT w="0" cap="flat" cmpd="sng" algn="ctr">
+                      <a:noFill/>
+                    </a:lnT>
+                    <a:lnB w="9525" cap="flat" cmpd="sng" algn="ctr">
+                      <a:solidFill>
+                        <a:srgbClr val="D9E0EA"/>
+                      </a:solidFill>
+                      <a:prstDash val="solid"/>
+                      <a:round/>
+                      <a:headEnd type="none" w="med" len="med"/>
+                      <a:tailEnd type="none" w="med" len="med"/>
+                    </a:lnB>
+                    <a:solidFill>
+                      <a:srgbClr val="FFFFFF"/>
+                    </a:solidFill>
+                  </a:tcPr>
+                </a:tc>
+                <a:tc>
+                  <a:txBody>
+                    <a:bodyPr/>
+                    <a:lstStyle/>
+                    <a:p>
+                      <a:pPr indent="0" marL="0">
+                        <a:buNone/>
+                      </a:pPr>
+                      <a:r>
+                        <a:rPr lang="en-US" sz="750" b="1" dirty="0">
+                          <a:solidFill>
+                            <a:schemeClr val="accent1"/>
                           </a:solidFill>
                           <a:latin typeface="Calibri" pitchFamily="34" charset="0"/>
                           <a:ea typeface="Calibri" pitchFamily="34" charset="-122"/>
@@ -3106,44 +2699,26 @@
                     </a:p>
                   </a:txBody>
                   <a:tcPr marL="45720" marR="45720" marT="22860" marB="22860" anchor="ctr">
-                    <a:lnL w="6350" cap="flat" cmpd="sng" algn="ctr">
-                      <a:solidFill>
-                        <a:srgbClr val="D9E0EA"/>
-                      </a:solidFill>
-                      <a:prstDash val="solid"/>
-                      <a:round/>
-                      <a:headEnd type="none" w="med" len="med"/>
-                      <a:tailEnd type="none" w="med" len="med"/>
-                    </a:lnL>
-                    <a:lnR w="6350" cap="flat" cmpd="sng" algn="ctr">
-                      <a:solidFill>
-                        <a:srgbClr val="D9E0EA"/>
-                      </a:solidFill>
-                      <a:prstDash val="solid"/>
-                      <a:round/>
-                      <a:headEnd type="none" w="med" len="med"/>
-                      <a:tailEnd type="none" w="med" len="med"/>
-                    </a:lnR>
-                    <a:lnT w="6350" cap="flat" cmpd="sng" algn="ctr">
-                      <a:solidFill>
-                        <a:srgbClr val="D9E0EA"/>
-                      </a:solidFill>
-                      <a:prstDash val="solid"/>
-                      <a:round/>
-                      <a:headEnd type="none" w="med" len="med"/>
-                      <a:tailEnd type="none" w="med" len="med"/>
-                    </a:lnT>
-                    <a:lnB w="6350" cap="flat" cmpd="sng" algn="ctr">
-                      <a:solidFill>
-                        <a:srgbClr val="D9E0EA"/>
-                      </a:solidFill>
-                      <a:prstDash val="solid"/>
-                      <a:round/>
-                      <a:headEnd type="none" w="med" len="med"/>
-                      <a:tailEnd type="none" w="med" len="med"/>
-                    </a:lnB>
-                    <a:solidFill>
-                      <a:schemeClr val="bg1"/>
+                    <a:lnL w="0" cap="flat" cmpd="sng" algn="ctr">
+                      <a:noFill/>
+                    </a:lnL>
+                    <a:lnR w="0" cap="flat" cmpd="sng" algn="ctr">
+                      <a:noFill/>
+                    </a:lnR>
+                    <a:lnT w="0" cap="flat" cmpd="sng" algn="ctr">
+                      <a:noFill/>
+                    </a:lnT>
+                    <a:lnB w="9525" cap="flat" cmpd="sng" algn="ctr">
+                      <a:solidFill>
+                        <a:srgbClr val="D9E0EA"/>
+                      </a:solidFill>
+                      <a:prstDash val="solid"/>
+                      <a:round/>
+                      <a:headEnd type="none" w="med" len="med"/>
+                      <a:tailEnd type="none" w="med" len="med"/>
+                    </a:lnB>
+                    <a:solidFill>
+                      <a:srgbClr val="FFFFFF"/>
                     </a:solidFill>
                   </a:tcPr>
                 </a:tc>
@@ -3176,44 +2751,26 @@
                     </a:p>
                   </a:txBody>
                   <a:tcPr marL="45720" marR="45720" marT="22860" marB="22860" anchor="ctr">
-                    <a:lnL w="6350" cap="flat" cmpd="sng" algn="ctr">
-                      <a:solidFill>
-                        <a:srgbClr val="D9E0EA"/>
-                      </a:solidFill>
-                      <a:prstDash val="solid"/>
-                      <a:round/>
-                      <a:headEnd type="none" w="med" len="med"/>
-                      <a:tailEnd type="none" w="med" len="med"/>
-                    </a:lnL>
-                    <a:lnR w="6350" cap="flat" cmpd="sng" algn="ctr">
-                      <a:solidFill>
-                        <a:srgbClr val="D9E0EA"/>
-                      </a:solidFill>
-                      <a:prstDash val="solid"/>
-                      <a:round/>
-                      <a:headEnd type="none" w="med" len="med"/>
-                      <a:tailEnd type="none" w="med" len="med"/>
-                    </a:lnR>
-                    <a:lnT w="6350" cap="flat" cmpd="sng" algn="ctr">
-                      <a:solidFill>
-                        <a:srgbClr val="D9E0EA"/>
-                      </a:solidFill>
-                      <a:prstDash val="solid"/>
-                      <a:round/>
-                      <a:headEnd type="none" w="med" len="med"/>
-                      <a:tailEnd type="none" w="med" len="med"/>
-                    </a:lnT>
-                    <a:lnB w="6350" cap="flat" cmpd="sng" algn="ctr">
-                      <a:solidFill>
-                        <a:srgbClr val="D9E0EA"/>
-                      </a:solidFill>
-                      <a:prstDash val="solid"/>
-                      <a:round/>
-                      <a:headEnd type="none" w="med" len="med"/>
-                      <a:tailEnd type="none" w="med" len="med"/>
-                    </a:lnB>
-                    <a:solidFill>
-                      <a:schemeClr val="bg1"/>
+                    <a:lnL w="0" cap="flat" cmpd="sng" algn="ctr">
+                      <a:noFill/>
+                    </a:lnL>
+                    <a:lnR w="0" cap="flat" cmpd="sng" algn="ctr">
+                      <a:noFill/>
+                    </a:lnR>
+                    <a:lnT w="0" cap="flat" cmpd="sng" algn="ctr">
+                      <a:noFill/>
+                    </a:lnT>
+                    <a:lnB w="9525" cap="flat" cmpd="sng" algn="ctr">
+                      <a:solidFill>
+                        <a:srgbClr val="D9E0EA"/>
+                      </a:solidFill>
+                      <a:prstDash val="solid"/>
+                      <a:round/>
+                      <a:headEnd type="none" w="med" len="med"/>
+                      <a:tailEnd type="none" w="med" len="med"/>
+                    </a:lnB>
+                    <a:solidFill>
+                      <a:srgbClr val="FFFFFF"/>
                     </a:solidFill>
                   </a:tcPr>
                 </a:tc>
@@ -3244,59 +2801,41 @@
                     </a:p>
                   </a:txBody>
                   <a:tcPr marL="45720" marR="45720" marT="22860" marB="22860" anchor="ctr">
-                    <a:lnL w="6350" cap="flat" cmpd="sng" algn="ctr">
-                      <a:solidFill>
-                        <a:srgbClr val="D9E0EA"/>
-                      </a:solidFill>
-                      <a:prstDash val="solid"/>
-                      <a:round/>
-                      <a:headEnd type="none" w="med" len="med"/>
-                      <a:tailEnd type="none" w="med" len="med"/>
-                    </a:lnL>
-                    <a:lnR w="6350" cap="flat" cmpd="sng" algn="ctr">
-                      <a:solidFill>
-                        <a:srgbClr val="D9E0EA"/>
-                      </a:solidFill>
-                      <a:prstDash val="solid"/>
-                      <a:round/>
-                      <a:headEnd type="none" w="med" len="med"/>
-                      <a:tailEnd type="none" w="med" len="med"/>
-                    </a:lnR>
-                    <a:lnT w="6350" cap="flat" cmpd="sng" algn="ctr">
-                      <a:solidFill>
-                        <a:srgbClr val="D9E0EA"/>
-                      </a:solidFill>
-                      <a:prstDash val="solid"/>
-                      <a:round/>
-                      <a:headEnd type="none" w="med" len="med"/>
-                      <a:tailEnd type="none" w="med" len="med"/>
-                    </a:lnT>
-                    <a:lnB w="6350" cap="flat" cmpd="sng" algn="ctr">
-                      <a:solidFill>
-                        <a:srgbClr val="D9E0EA"/>
-                      </a:solidFill>
-                      <a:prstDash val="solid"/>
-                      <a:round/>
-                      <a:headEnd type="none" w="med" len="med"/>
-                      <a:tailEnd type="none" w="med" len="med"/>
-                    </a:lnB>
-                    <a:solidFill>
-                      <a:schemeClr val="bg1"/>
-                    </a:solidFill>
-                  </a:tcPr>
-                </a:tc>
-                <a:tc>
-                  <a:txBody>
-                    <a:bodyPr/>
-                    <a:lstStyle/>
-                    <a:p>
-                      <a:pPr indent="0" marL="0">
-                        <a:buNone/>
-                      </a:pPr>
-                      <a:r>
-                        <a:rPr lang="en-US" sz="750" dirty="0">
-                          <a:solidFill>
-                            <a:schemeClr val="accent5"/>
+                    <a:lnL w="0" cap="flat" cmpd="sng" algn="ctr">
+                      <a:noFill/>
+                    </a:lnL>
+                    <a:lnR w="0" cap="flat" cmpd="sng" algn="ctr">
+                      <a:noFill/>
+                    </a:lnR>
+                    <a:lnT w="0" cap="flat" cmpd="sng" algn="ctr">
+                      <a:noFill/>
+                    </a:lnT>
+                    <a:lnB w="9525" cap="flat" cmpd="sng" algn="ctr">
+                      <a:solidFill>
+                        <a:srgbClr val="D9E0EA"/>
+                      </a:solidFill>
+                      <a:prstDash val="solid"/>
+                      <a:round/>
+                      <a:headEnd type="none" w="med" len="med"/>
+                      <a:tailEnd type="none" w="med" len="med"/>
+                    </a:lnB>
+                    <a:solidFill>
+                      <a:srgbClr val="FFFFFF"/>
+                    </a:solidFill>
+                  </a:tcPr>
+                </a:tc>
+                <a:tc>
+                  <a:txBody>
+                    <a:bodyPr/>
+                    <a:lstStyle/>
+                    <a:p>
+                      <a:pPr indent="0" marL="0">
+                        <a:buNone/>
+                      </a:pPr>
+                      <a:r>
+                        <a:rPr lang="en-US" sz="750" b="1" dirty="0">
+                          <a:solidFill>
+                            <a:schemeClr val="accent1"/>
                           </a:solidFill>
                           <a:latin typeface="Calibri" pitchFamily="34" charset="0"/>
                           <a:ea typeface="Calibri" pitchFamily="34" charset="-122"/>
@@ -3312,44 +2851,26 @@
                     </a:p>
                   </a:txBody>
                   <a:tcPr marL="45720" marR="45720" marT="22860" marB="22860" anchor="ctr">
-                    <a:lnL w="6350" cap="flat" cmpd="sng" algn="ctr">
-                      <a:solidFill>
-                        <a:srgbClr val="D9E0EA"/>
-                      </a:solidFill>
-                      <a:prstDash val="solid"/>
-                      <a:round/>
-                      <a:headEnd type="none" w="med" len="med"/>
-                      <a:tailEnd type="none" w="med" len="med"/>
-                    </a:lnL>
-                    <a:lnR w="6350" cap="flat" cmpd="sng" algn="ctr">
-                      <a:solidFill>
-                        <a:srgbClr val="D9E0EA"/>
-                      </a:solidFill>
-                      <a:prstDash val="solid"/>
-                      <a:round/>
-                      <a:headEnd type="none" w="med" len="med"/>
-                      <a:tailEnd type="none" w="med" len="med"/>
-                    </a:lnR>
-                    <a:lnT w="6350" cap="flat" cmpd="sng" algn="ctr">
-                      <a:solidFill>
-                        <a:srgbClr val="D9E0EA"/>
-                      </a:solidFill>
-                      <a:prstDash val="solid"/>
-                      <a:round/>
-                      <a:headEnd type="none" w="med" len="med"/>
-                      <a:tailEnd type="none" w="med" len="med"/>
-                    </a:lnT>
-                    <a:lnB w="6350" cap="flat" cmpd="sng" algn="ctr">
-                      <a:solidFill>
-                        <a:srgbClr val="D9E0EA"/>
-                      </a:solidFill>
-                      <a:prstDash val="solid"/>
-                      <a:round/>
-                      <a:headEnd type="none" w="med" len="med"/>
-                      <a:tailEnd type="none" w="med" len="med"/>
-                    </a:lnB>
-                    <a:solidFill>
-                      <a:schemeClr val="bg1"/>
+                    <a:lnL w="0" cap="flat" cmpd="sng" algn="ctr">
+                      <a:noFill/>
+                    </a:lnL>
+                    <a:lnR w="0" cap="flat" cmpd="sng" algn="ctr">
+                      <a:noFill/>
+                    </a:lnR>
+                    <a:lnT w="0" cap="flat" cmpd="sng" algn="ctr">
+                      <a:noFill/>
+                    </a:lnT>
+                    <a:lnB w="9525" cap="flat" cmpd="sng" algn="ctr">
+                      <a:solidFill>
+                        <a:srgbClr val="D9E0EA"/>
+                      </a:solidFill>
+                      <a:prstDash val="solid"/>
+                      <a:round/>
+                      <a:headEnd type="none" w="med" len="med"/>
+                      <a:tailEnd type="none" w="med" len="med"/>
+                    </a:lnB>
+                    <a:solidFill>
+                      <a:srgbClr val="FFFFFF"/>
                     </a:solidFill>
                   </a:tcPr>
                 </a:tc>
@@ -3382,44 +2903,26 @@
                     </a:p>
                   </a:txBody>
                   <a:tcPr marL="45720" marR="45720" marT="22860" marB="22860" anchor="ctr">
-                    <a:lnL w="6350" cap="flat" cmpd="sng" algn="ctr">
-                      <a:solidFill>
-                        <a:srgbClr val="D9E0EA"/>
-                      </a:solidFill>
-                      <a:prstDash val="solid"/>
-                      <a:round/>
-                      <a:headEnd type="none" w="med" len="med"/>
-                      <a:tailEnd type="none" w="med" len="med"/>
-                    </a:lnL>
-                    <a:lnR w="6350" cap="flat" cmpd="sng" algn="ctr">
-                      <a:solidFill>
-                        <a:srgbClr val="D9E0EA"/>
-                      </a:solidFill>
-                      <a:prstDash val="solid"/>
-                      <a:round/>
-                      <a:headEnd type="none" w="med" len="med"/>
-                      <a:tailEnd type="none" w="med" len="med"/>
-                    </a:lnR>
-                    <a:lnT w="6350" cap="flat" cmpd="sng" algn="ctr">
-                      <a:solidFill>
-                        <a:srgbClr val="D9E0EA"/>
-                      </a:solidFill>
-                      <a:prstDash val="solid"/>
-                      <a:round/>
-                      <a:headEnd type="none" w="med" len="med"/>
-                      <a:tailEnd type="none" w="med" len="med"/>
-                    </a:lnT>
-                    <a:lnB w="6350" cap="flat" cmpd="sng" algn="ctr">
-                      <a:solidFill>
-                        <a:srgbClr val="D9E0EA"/>
-                      </a:solidFill>
-                      <a:prstDash val="solid"/>
-                      <a:round/>
-                      <a:headEnd type="none" w="med" len="med"/>
-                      <a:tailEnd type="none" w="med" len="med"/>
-                    </a:lnB>
-                    <a:solidFill>
-                      <a:schemeClr val="bg1"/>
+                    <a:lnL w="0" cap="flat" cmpd="sng" algn="ctr">
+                      <a:noFill/>
+                    </a:lnL>
+                    <a:lnR w="0" cap="flat" cmpd="sng" algn="ctr">
+                      <a:noFill/>
+                    </a:lnR>
+                    <a:lnT w="0" cap="flat" cmpd="sng" algn="ctr">
+                      <a:noFill/>
+                    </a:lnT>
+                    <a:lnB w="9525" cap="flat" cmpd="sng" algn="ctr">
+                      <a:solidFill>
+                        <a:srgbClr val="D9E0EA"/>
+                      </a:solidFill>
+                      <a:prstDash val="solid"/>
+                      <a:round/>
+                      <a:headEnd type="none" w="med" len="med"/>
+                      <a:tailEnd type="none" w="med" len="med"/>
+                    </a:lnB>
+                    <a:solidFill>
+                      <a:srgbClr val="FFFFFF"/>
                     </a:solidFill>
                   </a:tcPr>
                 </a:tc>
@@ -3450,59 +2953,41 @@
                     </a:p>
                   </a:txBody>
                   <a:tcPr marL="45720" marR="45720" marT="22860" marB="22860" anchor="ctr">
-                    <a:lnL w="6350" cap="flat" cmpd="sng" algn="ctr">
-                      <a:solidFill>
-                        <a:srgbClr val="D9E0EA"/>
-                      </a:solidFill>
-                      <a:prstDash val="solid"/>
-                      <a:round/>
-                      <a:headEnd type="none" w="med" len="med"/>
-                      <a:tailEnd type="none" w="med" len="med"/>
-                    </a:lnL>
-                    <a:lnR w="6350" cap="flat" cmpd="sng" algn="ctr">
-                      <a:solidFill>
-                        <a:srgbClr val="D9E0EA"/>
-                      </a:solidFill>
-                      <a:prstDash val="solid"/>
-                      <a:round/>
-                      <a:headEnd type="none" w="med" len="med"/>
-                      <a:tailEnd type="none" w="med" len="med"/>
-                    </a:lnR>
-                    <a:lnT w="6350" cap="flat" cmpd="sng" algn="ctr">
-                      <a:solidFill>
-                        <a:srgbClr val="D9E0EA"/>
-                      </a:solidFill>
-                      <a:prstDash val="solid"/>
-                      <a:round/>
-                      <a:headEnd type="none" w="med" len="med"/>
-                      <a:tailEnd type="none" w="med" len="med"/>
-                    </a:lnT>
-                    <a:lnB w="6350" cap="flat" cmpd="sng" algn="ctr">
-                      <a:solidFill>
-                        <a:srgbClr val="D9E0EA"/>
-                      </a:solidFill>
-                      <a:prstDash val="solid"/>
-                      <a:round/>
-                      <a:headEnd type="none" w="med" len="med"/>
-                      <a:tailEnd type="none" w="med" len="med"/>
-                    </a:lnB>
-                    <a:solidFill>
-                      <a:schemeClr val="bg1"/>
-                    </a:solidFill>
-                  </a:tcPr>
-                </a:tc>
-                <a:tc>
-                  <a:txBody>
-                    <a:bodyPr/>
-                    <a:lstStyle/>
-                    <a:p>
-                      <a:pPr indent="0" marL="0">
-                        <a:buNone/>
-                      </a:pPr>
-                      <a:r>
-                        <a:rPr lang="en-US" sz="750" dirty="0">
-                          <a:solidFill>
-                            <a:schemeClr val="accent5"/>
+                    <a:lnL w="0" cap="flat" cmpd="sng" algn="ctr">
+                      <a:noFill/>
+                    </a:lnL>
+                    <a:lnR w="0" cap="flat" cmpd="sng" algn="ctr">
+                      <a:noFill/>
+                    </a:lnR>
+                    <a:lnT w="0" cap="flat" cmpd="sng" algn="ctr">
+                      <a:noFill/>
+                    </a:lnT>
+                    <a:lnB w="9525" cap="flat" cmpd="sng" algn="ctr">
+                      <a:solidFill>
+                        <a:srgbClr val="D9E0EA"/>
+                      </a:solidFill>
+                      <a:prstDash val="solid"/>
+                      <a:round/>
+                      <a:headEnd type="none" w="med" len="med"/>
+                      <a:tailEnd type="none" w="med" len="med"/>
+                    </a:lnB>
+                    <a:solidFill>
+                      <a:srgbClr val="FFFFFF"/>
+                    </a:solidFill>
+                  </a:tcPr>
+                </a:tc>
+                <a:tc>
+                  <a:txBody>
+                    <a:bodyPr/>
+                    <a:lstStyle/>
+                    <a:p>
+                      <a:pPr indent="0" marL="0">
+                        <a:buNone/>
+                      </a:pPr>
+                      <a:r>
+                        <a:rPr lang="en-US" sz="750" b="1" dirty="0">
+                          <a:solidFill>
+                            <a:schemeClr val="accent1"/>
                           </a:solidFill>
                           <a:latin typeface="Calibri" pitchFamily="34" charset="0"/>
                           <a:ea typeface="Calibri" pitchFamily="34" charset="-122"/>
@@ -3518,44 +3003,26 @@
                     </a:p>
                   </a:txBody>
                   <a:tcPr marL="45720" marR="45720" marT="22860" marB="22860" anchor="ctr">
-                    <a:lnL w="6350" cap="flat" cmpd="sng" algn="ctr">
-                      <a:solidFill>
-                        <a:srgbClr val="D9E0EA"/>
-                      </a:solidFill>
-                      <a:prstDash val="solid"/>
-                      <a:round/>
-                      <a:headEnd type="none" w="med" len="med"/>
-                      <a:tailEnd type="none" w="med" len="med"/>
-                    </a:lnL>
-                    <a:lnR w="6350" cap="flat" cmpd="sng" algn="ctr">
-                      <a:solidFill>
-                        <a:srgbClr val="D9E0EA"/>
-                      </a:solidFill>
-                      <a:prstDash val="solid"/>
-                      <a:round/>
-                      <a:headEnd type="none" w="med" len="med"/>
-                      <a:tailEnd type="none" w="med" len="med"/>
-                    </a:lnR>
-                    <a:lnT w="6350" cap="flat" cmpd="sng" algn="ctr">
-                      <a:solidFill>
-                        <a:srgbClr val="D9E0EA"/>
-                      </a:solidFill>
-                      <a:prstDash val="solid"/>
-                      <a:round/>
-                      <a:headEnd type="none" w="med" len="med"/>
-                      <a:tailEnd type="none" w="med" len="med"/>
-                    </a:lnT>
-                    <a:lnB w="6350" cap="flat" cmpd="sng" algn="ctr">
-                      <a:solidFill>
-                        <a:srgbClr val="D9E0EA"/>
-                      </a:solidFill>
-                      <a:prstDash val="solid"/>
-                      <a:round/>
-                      <a:headEnd type="none" w="med" len="med"/>
-                      <a:tailEnd type="none" w="med" len="med"/>
-                    </a:lnB>
-                    <a:solidFill>
-                      <a:schemeClr val="bg1"/>
+                    <a:lnL w="0" cap="flat" cmpd="sng" algn="ctr">
+                      <a:noFill/>
+                    </a:lnL>
+                    <a:lnR w="0" cap="flat" cmpd="sng" algn="ctr">
+                      <a:noFill/>
+                    </a:lnR>
+                    <a:lnT w="0" cap="flat" cmpd="sng" algn="ctr">
+                      <a:noFill/>
+                    </a:lnT>
+                    <a:lnB w="9525" cap="flat" cmpd="sng" algn="ctr">
+                      <a:solidFill>
+                        <a:srgbClr val="D9E0EA"/>
+                      </a:solidFill>
+                      <a:prstDash val="solid"/>
+                      <a:round/>
+                      <a:headEnd type="none" w="med" len="med"/>
+                      <a:tailEnd type="none" w="med" len="med"/>
+                    </a:lnB>
+                    <a:solidFill>
+                      <a:srgbClr val="FFFFFF"/>
                     </a:solidFill>
                   </a:tcPr>
                 </a:tc>
@@ -3588,44 +3055,26 @@
                     </a:p>
                   </a:txBody>
                   <a:tcPr marL="45720" marR="45720" marT="22860" marB="22860" anchor="ctr">
-                    <a:lnL w="6350" cap="flat" cmpd="sng" algn="ctr">
-                      <a:solidFill>
-                        <a:srgbClr val="D9E0EA"/>
-                      </a:solidFill>
-                      <a:prstDash val="solid"/>
-                      <a:round/>
-                      <a:headEnd type="none" w="med" len="med"/>
-                      <a:tailEnd type="none" w="med" len="med"/>
-                    </a:lnL>
-                    <a:lnR w="6350" cap="flat" cmpd="sng" algn="ctr">
-                      <a:solidFill>
-                        <a:srgbClr val="D9E0EA"/>
-                      </a:solidFill>
-                      <a:prstDash val="solid"/>
-                      <a:round/>
-                      <a:headEnd type="none" w="med" len="med"/>
-                      <a:tailEnd type="none" w="med" len="med"/>
-                    </a:lnR>
-                    <a:lnT w="6350" cap="flat" cmpd="sng" algn="ctr">
-                      <a:solidFill>
-                        <a:srgbClr val="D9E0EA"/>
-                      </a:solidFill>
-                      <a:prstDash val="solid"/>
-                      <a:round/>
-                      <a:headEnd type="none" w="med" len="med"/>
-                      <a:tailEnd type="none" w="med" len="med"/>
-                    </a:lnT>
-                    <a:lnB w="6350" cap="flat" cmpd="sng" algn="ctr">
-                      <a:solidFill>
-                        <a:srgbClr val="D9E0EA"/>
-                      </a:solidFill>
-                      <a:prstDash val="solid"/>
-                      <a:round/>
-                      <a:headEnd type="none" w="med" len="med"/>
-                      <a:tailEnd type="none" w="med" len="med"/>
-                    </a:lnB>
-                    <a:solidFill>
-                      <a:schemeClr val="bg1"/>
+                    <a:lnL w="0" cap="flat" cmpd="sng" algn="ctr">
+                      <a:noFill/>
+                    </a:lnL>
+                    <a:lnR w="0" cap="flat" cmpd="sng" algn="ctr">
+                      <a:noFill/>
+                    </a:lnR>
+                    <a:lnT w="0" cap="flat" cmpd="sng" algn="ctr">
+                      <a:noFill/>
+                    </a:lnT>
+                    <a:lnB w="9525" cap="flat" cmpd="sng" algn="ctr">
+                      <a:solidFill>
+                        <a:srgbClr val="D9E0EA"/>
+                      </a:solidFill>
+                      <a:prstDash val="solid"/>
+                      <a:round/>
+                      <a:headEnd type="none" w="med" len="med"/>
+                      <a:tailEnd type="none" w="med" len="med"/>
+                    </a:lnB>
+                    <a:solidFill>
+                      <a:srgbClr val="FFFFFF"/>
                     </a:solidFill>
                   </a:tcPr>
                 </a:tc>
@@ -3656,59 +3105,41 @@
                     </a:p>
                   </a:txBody>
                   <a:tcPr marL="45720" marR="45720" marT="22860" marB="22860" anchor="ctr">
-                    <a:lnL w="6350" cap="flat" cmpd="sng" algn="ctr">
-                      <a:solidFill>
-                        <a:srgbClr val="D9E0EA"/>
-                      </a:solidFill>
-                      <a:prstDash val="solid"/>
-                      <a:round/>
-                      <a:headEnd type="none" w="med" len="med"/>
-                      <a:tailEnd type="none" w="med" len="med"/>
-                    </a:lnL>
-                    <a:lnR w="6350" cap="flat" cmpd="sng" algn="ctr">
-                      <a:solidFill>
-                        <a:srgbClr val="D9E0EA"/>
-                      </a:solidFill>
-                      <a:prstDash val="solid"/>
-                      <a:round/>
-                      <a:headEnd type="none" w="med" len="med"/>
-                      <a:tailEnd type="none" w="med" len="med"/>
-                    </a:lnR>
-                    <a:lnT w="6350" cap="flat" cmpd="sng" algn="ctr">
-                      <a:solidFill>
-                        <a:srgbClr val="D9E0EA"/>
-                      </a:solidFill>
-                      <a:prstDash val="solid"/>
-                      <a:round/>
-                      <a:headEnd type="none" w="med" len="med"/>
-                      <a:tailEnd type="none" w="med" len="med"/>
-                    </a:lnT>
-                    <a:lnB w="6350" cap="flat" cmpd="sng" algn="ctr">
-                      <a:solidFill>
-                        <a:srgbClr val="D9E0EA"/>
-                      </a:solidFill>
-                      <a:prstDash val="solid"/>
-                      <a:round/>
-                      <a:headEnd type="none" w="med" len="med"/>
-                      <a:tailEnd type="none" w="med" len="med"/>
-                    </a:lnB>
-                    <a:solidFill>
-                      <a:schemeClr val="bg1"/>
-                    </a:solidFill>
-                  </a:tcPr>
-                </a:tc>
-                <a:tc>
-                  <a:txBody>
-                    <a:bodyPr/>
-                    <a:lstStyle/>
-                    <a:p>
-                      <a:pPr indent="0" marL="0">
-                        <a:buNone/>
-                      </a:pPr>
-                      <a:r>
-                        <a:rPr lang="en-US" sz="750" dirty="0">
-                          <a:solidFill>
-                            <a:schemeClr val="accent5"/>
+                    <a:lnL w="0" cap="flat" cmpd="sng" algn="ctr">
+                      <a:noFill/>
+                    </a:lnL>
+                    <a:lnR w="0" cap="flat" cmpd="sng" algn="ctr">
+                      <a:noFill/>
+                    </a:lnR>
+                    <a:lnT w="0" cap="flat" cmpd="sng" algn="ctr">
+                      <a:noFill/>
+                    </a:lnT>
+                    <a:lnB w="9525" cap="flat" cmpd="sng" algn="ctr">
+                      <a:solidFill>
+                        <a:srgbClr val="D9E0EA"/>
+                      </a:solidFill>
+                      <a:prstDash val="solid"/>
+                      <a:round/>
+                      <a:headEnd type="none" w="med" len="med"/>
+                      <a:tailEnd type="none" w="med" len="med"/>
+                    </a:lnB>
+                    <a:solidFill>
+                      <a:srgbClr val="FFFFFF"/>
+                    </a:solidFill>
+                  </a:tcPr>
+                </a:tc>
+                <a:tc>
+                  <a:txBody>
+                    <a:bodyPr/>
+                    <a:lstStyle/>
+                    <a:p>
+                      <a:pPr indent="0" marL="0">
+                        <a:buNone/>
+                      </a:pPr>
+                      <a:r>
+                        <a:rPr lang="en-US" sz="750" b="1" dirty="0">
+                          <a:solidFill>
+                            <a:schemeClr val="accent1"/>
                           </a:solidFill>
                           <a:latin typeface="Calibri" pitchFamily="34" charset="0"/>
                           <a:ea typeface="Calibri" pitchFamily="34" charset="-122"/>
@@ -3724,44 +3155,26 @@
                     </a:p>
                   </a:txBody>
                   <a:tcPr marL="45720" marR="45720" marT="22860" marB="22860" anchor="ctr">
-                    <a:lnL w="6350" cap="flat" cmpd="sng" algn="ctr">
-                      <a:solidFill>
-                        <a:srgbClr val="D9E0EA"/>
-                      </a:solidFill>
-                      <a:prstDash val="solid"/>
-                      <a:round/>
-                      <a:headEnd type="none" w="med" len="med"/>
-                      <a:tailEnd type="none" w="med" len="med"/>
-                    </a:lnL>
-                    <a:lnR w="6350" cap="flat" cmpd="sng" algn="ctr">
-                      <a:solidFill>
-                        <a:srgbClr val="D9E0EA"/>
-                      </a:solidFill>
-                      <a:prstDash val="solid"/>
-                      <a:round/>
-                      <a:headEnd type="none" w="med" len="med"/>
-                      <a:tailEnd type="none" w="med" len="med"/>
-                    </a:lnR>
-                    <a:lnT w="6350" cap="flat" cmpd="sng" algn="ctr">
-                      <a:solidFill>
-                        <a:srgbClr val="D9E0EA"/>
-                      </a:solidFill>
-                      <a:prstDash val="solid"/>
-                      <a:round/>
-                      <a:headEnd type="none" w="med" len="med"/>
-                      <a:tailEnd type="none" w="med" len="med"/>
-                    </a:lnT>
-                    <a:lnB w="6350" cap="flat" cmpd="sng" algn="ctr">
-                      <a:solidFill>
-                        <a:srgbClr val="D9E0EA"/>
-                      </a:solidFill>
-                      <a:prstDash val="solid"/>
-                      <a:round/>
-                      <a:headEnd type="none" w="med" len="med"/>
-                      <a:tailEnd type="none" w="med" len="med"/>
-                    </a:lnB>
-                    <a:solidFill>
-                      <a:schemeClr val="bg1"/>
+                    <a:lnL w="0" cap="flat" cmpd="sng" algn="ctr">
+                      <a:noFill/>
+                    </a:lnL>
+                    <a:lnR w="0" cap="flat" cmpd="sng" algn="ctr">
+                      <a:noFill/>
+                    </a:lnR>
+                    <a:lnT w="0" cap="flat" cmpd="sng" algn="ctr">
+                      <a:noFill/>
+                    </a:lnT>
+                    <a:lnB w="9525" cap="flat" cmpd="sng" algn="ctr">
+                      <a:solidFill>
+                        <a:srgbClr val="D9E0EA"/>
+                      </a:solidFill>
+                      <a:prstDash val="solid"/>
+                      <a:round/>
+                      <a:headEnd type="none" w="med" len="med"/>
+                      <a:tailEnd type="none" w="med" len="med"/>
+                    </a:lnB>
+                    <a:solidFill>
+                      <a:srgbClr val="FFFFFF"/>
                     </a:solidFill>
                   </a:tcPr>
                 </a:tc>
@@ -3794,44 +3207,26 @@
                     </a:p>
                   </a:txBody>
                   <a:tcPr marL="45720" marR="45720" marT="22860" marB="22860" anchor="ctr">
-                    <a:lnL w="6350" cap="flat" cmpd="sng" algn="ctr">
-                      <a:solidFill>
-                        <a:srgbClr val="D9E0EA"/>
-                      </a:solidFill>
-                      <a:prstDash val="solid"/>
-                      <a:round/>
-                      <a:headEnd type="none" w="med" len="med"/>
-                      <a:tailEnd type="none" w="med" len="med"/>
-                    </a:lnL>
-                    <a:lnR w="6350" cap="flat" cmpd="sng" algn="ctr">
-                      <a:solidFill>
-                        <a:srgbClr val="D9E0EA"/>
-                      </a:solidFill>
-                      <a:prstDash val="solid"/>
-                      <a:round/>
-                      <a:headEnd type="none" w="med" len="med"/>
-                      <a:tailEnd type="none" w="med" len="med"/>
-                    </a:lnR>
-                    <a:lnT w="6350" cap="flat" cmpd="sng" algn="ctr">
-                      <a:solidFill>
-                        <a:srgbClr val="D9E0EA"/>
-                      </a:solidFill>
-                      <a:prstDash val="solid"/>
-                      <a:round/>
-                      <a:headEnd type="none" w="med" len="med"/>
-                      <a:tailEnd type="none" w="med" len="med"/>
-                    </a:lnT>
-                    <a:lnB w="6350" cap="flat" cmpd="sng" algn="ctr">
-                      <a:solidFill>
-                        <a:srgbClr val="D9E0EA"/>
-                      </a:solidFill>
-                      <a:prstDash val="solid"/>
-                      <a:round/>
-                      <a:headEnd type="none" w="med" len="med"/>
-                      <a:tailEnd type="none" w="med" len="med"/>
-                    </a:lnB>
-                    <a:solidFill>
-                      <a:schemeClr val="bg1"/>
+                    <a:lnL w="0" cap="flat" cmpd="sng" algn="ctr">
+                      <a:noFill/>
+                    </a:lnL>
+                    <a:lnR w="0" cap="flat" cmpd="sng" algn="ctr">
+                      <a:noFill/>
+                    </a:lnR>
+                    <a:lnT w="0" cap="flat" cmpd="sng" algn="ctr">
+                      <a:noFill/>
+                    </a:lnT>
+                    <a:lnB w="9525" cap="flat" cmpd="sng" algn="ctr">
+                      <a:solidFill>
+                        <a:srgbClr val="D9E0EA"/>
+                      </a:solidFill>
+                      <a:prstDash val="solid"/>
+                      <a:round/>
+                      <a:headEnd type="none" w="med" len="med"/>
+                      <a:tailEnd type="none" w="med" len="med"/>
+                    </a:lnB>
+                    <a:solidFill>
+                      <a:srgbClr val="FFFFFF"/>
                     </a:solidFill>
                   </a:tcPr>
                 </a:tc>
@@ -3862,59 +3257,41 @@
                     </a:p>
                   </a:txBody>
                   <a:tcPr marL="45720" marR="45720" marT="22860" marB="22860" anchor="ctr">
-                    <a:lnL w="6350" cap="flat" cmpd="sng" algn="ctr">
-                      <a:solidFill>
-                        <a:srgbClr val="D9E0EA"/>
-                      </a:solidFill>
-                      <a:prstDash val="solid"/>
-                      <a:round/>
-                      <a:headEnd type="none" w="med" len="med"/>
-                      <a:tailEnd type="none" w="med" len="med"/>
-                    </a:lnL>
-                    <a:lnR w="6350" cap="flat" cmpd="sng" algn="ctr">
-                      <a:solidFill>
-                        <a:srgbClr val="D9E0EA"/>
-                      </a:solidFill>
-                      <a:prstDash val="solid"/>
-                      <a:round/>
-                      <a:headEnd type="none" w="med" len="med"/>
-                      <a:tailEnd type="none" w="med" len="med"/>
-                    </a:lnR>
-                    <a:lnT w="6350" cap="flat" cmpd="sng" algn="ctr">
-                      <a:solidFill>
-                        <a:srgbClr val="D9E0EA"/>
-                      </a:solidFill>
-                      <a:prstDash val="solid"/>
-                      <a:round/>
-                      <a:headEnd type="none" w="med" len="med"/>
-                      <a:tailEnd type="none" w="med" len="med"/>
-                    </a:lnT>
-                    <a:lnB w="6350" cap="flat" cmpd="sng" algn="ctr">
-                      <a:solidFill>
-                        <a:srgbClr val="D9E0EA"/>
-                      </a:solidFill>
-                      <a:prstDash val="solid"/>
-                      <a:round/>
-                      <a:headEnd type="none" w="med" len="med"/>
-                      <a:tailEnd type="none" w="med" len="med"/>
-                    </a:lnB>
-                    <a:solidFill>
-                      <a:schemeClr val="bg1"/>
-                    </a:solidFill>
-                  </a:tcPr>
-                </a:tc>
-                <a:tc>
-                  <a:txBody>
-                    <a:bodyPr/>
-                    <a:lstStyle/>
-                    <a:p>
-                      <a:pPr indent="0" marL="0">
-                        <a:buNone/>
-                      </a:pPr>
-                      <a:r>
-                        <a:rPr lang="en-US" sz="750" dirty="0">
-                          <a:solidFill>
-                            <a:schemeClr val="accent5"/>
+                    <a:lnL w="0" cap="flat" cmpd="sng" algn="ctr">
+                      <a:noFill/>
+                    </a:lnL>
+                    <a:lnR w="0" cap="flat" cmpd="sng" algn="ctr">
+                      <a:noFill/>
+                    </a:lnR>
+                    <a:lnT w="0" cap="flat" cmpd="sng" algn="ctr">
+                      <a:noFill/>
+                    </a:lnT>
+                    <a:lnB w="9525" cap="flat" cmpd="sng" algn="ctr">
+                      <a:solidFill>
+                        <a:srgbClr val="D9E0EA"/>
+                      </a:solidFill>
+                      <a:prstDash val="solid"/>
+                      <a:round/>
+                      <a:headEnd type="none" w="med" len="med"/>
+                      <a:tailEnd type="none" w="med" len="med"/>
+                    </a:lnB>
+                    <a:solidFill>
+                      <a:srgbClr val="FFFFFF"/>
+                    </a:solidFill>
+                  </a:tcPr>
+                </a:tc>
+                <a:tc>
+                  <a:txBody>
+                    <a:bodyPr/>
+                    <a:lstStyle/>
+                    <a:p>
+                      <a:pPr indent="0" marL="0">
+                        <a:buNone/>
+                      </a:pPr>
+                      <a:r>
+                        <a:rPr lang="en-US" sz="750" b="1" dirty="0">
+                          <a:solidFill>
+                            <a:schemeClr val="accent1"/>
                           </a:solidFill>
                           <a:latin typeface="Calibri" pitchFamily="34" charset="0"/>
                           <a:ea typeface="Calibri" pitchFamily="34" charset="-122"/>
@@ -3930,44 +3307,26 @@
                     </a:p>
                   </a:txBody>
                   <a:tcPr marL="45720" marR="45720" marT="22860" marB="22860" anchor="ctr">
-                    <a:lnL w="6350" cap="flat" cmpd="sng" algn="ctr">
-                      <a:solidFill>
-                        <a:srgbClr val="D9E0EA"/>
-                      </a:solidFill>
-                      <a:prstDash val="solid"/>
-                      <a:round/>
-                      <a:headEnd type="none" w="med" len="med"/>
-                      <a:tailEnd type="none" w="med" len="med"/>
-                    </a:lnL>
-                    <a:lnR w="6350" cap="flat" cmpd="sng" algn="ctr">
-                      <a:solidFill>
-                        <a:srgbClr val="D9E0EA"/>
-                      </a:solidFill>
-                      <a:prstDash val="solid"/>
-                      <a:round/>
-                      <a:headEnd type="none" w="med" len="med"/>
-                      <a:tailEnd type="none" w="med" len="med"/>
-                    </a:lnR>
-                    <a:lnT w="6350" cap="flat" cmpd="sng" algn="ctr">
-                      <a:solidFill>
-                        <a:srgbClr val="D9E0EA"/>
-                      </a:solidFill>
-                      <a:prstDash val="solid"/>
-                      <a:round/>
-                      <a:headEnd type="none" w="med" len="med"/>
-                      <a:tailEnd type="none" w="med" len="med"/>
-                    </a:lnT>
-                    <a:lnB w="6350" cap="flat" cmpd="sng" algn="ctr">
-                      <a:solidFill>
-                        <a:srgbClr val="D9E0EA"/>
-                      </a:solidFill>
-                      <a:prstDash val="solid"/>
-                      <a:round/>
-                      <a:headEnd type="none" w="med" len="med"/>
-                      <a:tailEnd type="none" w="med" len="med"/>
-                    </a:lnB>
-                    <a:solidFill>
-                      <a:schemeClr val="bg1"/>
+                    <a:lnL w="0" cap="flat" cmpd="sng" algn="ctr">
+                      <a:noFill/>
+                    </a:lnL>
+                    <a:lnR w="0" cap="flat" cmpd="sng" algn="ctr">
+                      <a:noFill/>
+                    </a:lnR>
+                    <a:lnT w="0" cap="flat" cmpd="sng" algn="ctr">
+                      <a:noFill/>
+                    </a:lnT>
+                    <a:lnB w="9525" cap="flat" cmpd="sng" algn="ctr">
+                      <a:solidFill>
+                        <a:srgbClr val="D9E0EA"/>
+                      </a:solidFill>
+                      <a:prstDash val="solid"/>
+                      <a:round/>
+                      <a:headEnd type="none" w="med" len="med"/>
+                      <a:tailEnd type="none" w="med" len="med"/>
+                    </a:lnB>
+                    <a:solidFill>
+                      <a:srgbClr val="FFFFFF"/>
                     </a:solidFill>
                   </a:tcPr>
                 </a:tc>
@@ -4000,44 +3359,26 @@
                     </a:p>
                   </a:txBody>
                   <a:tcPr marL="45720" marR="45720" marT="22860" marB="22860" anchor="ctr">
-                    <a:lnL w="6350" cap="flat" cmpd="sng" algn="ctr">
-                      <a:solidFill>
-                        <a:srgbClr val="D9E0EA"/>
-                      </a:solidFill>
-                      <a:prstDash val="solid"/>
-                      <a:round/>
-                      <a:headEnd type="none" w="med" len="med"/>
-                      <a:tailEnd type="none" w="med" len="med"/>
-                    </a:lnL>
-                    <a:lnR w="6350" cap="flat" cmpd="sng" algn="ctr">
-                      <a:solidFill>
-                        <a:srgbClr val="D9E0EA"/>
-                      </a:solidFill>
-                      <a:prstDash val="solid"/>
-                      <a:round/>
-                      <a:headEnd type="none" w="med" len="med"/>
-                      <a:tailEnd type="none" w="med" len="med"/>
-                    </a:lnR>
-                    <a:lnT w="6350" cap="flat" cmpd="sng" algn="ctr">
-                      <a:solidFill>
-                        <a:srgbClr val="D9E0EA"/>
-                      </a:solidFill>
-                      <a:prstDash val="solid"/>
-                      <a:round/>
-                      <a:headEnd type="none" w="med" len="med"/>
-                      <a:tailEnd type="none" w="med" len="med"/>
-                    </a:lnT>
-                    <a:lnB w="6350" cap="flat" cmpd="sng" algn="ctr">
-                      <a:solidFill>
-                        <a:srgbClr val="D9E0EA"/>
-                      </a:solidFill>
-                      <a:prstDash val="solid"/>
-                      <a:round/>
-                      <a:headEnd type="none" w="med" len="med"/>
-                      <a:tailEnd type="none" w="med" len="med"/>
-                    </a:lnB>
-                    <a:solidFill>
-                      <a:schemeClr val="bg1"/>
+                    <a:lnL w="0" cap="flat" cmpd="sng" algn="ctr">
+                      <a:noFill/>
+                    </a:lnL>
+                    <a:lnR w="0" cap="flat" cmpd="sng" algn="ctr">
+                      <a:noFill/>
+                    </a:lnR>
+                    <a:lnT w="0" cap="flat" cmpd="sng" algn="ctr">
+                      <a:noFill/>
+                    </a:lnT>
+                    <a:lnB w="9525" cap="flat" cmpd="sng" algn="ctr">
+                      <a:solidFill>
+                        <a:srgbClr val="D9E0EA"/>
+                      </a:solidFill>
+                      <a:prstDash val="solid"/>
+                      <a:round/>
+                      <a:headEnd type="none" w="med" len="med"/>
+                      <a:tailEnd type="none" w="med" len="med"/>
+                    </a:lnB>
+                    <a:solidFill>
+                      <a:srgbClr val="FFFFFF"/>
                     </a:solidFill>
                   </a:tcPr>
                 </a:tc>
@@ -4068,59 +3409,41 @@
                     </a:p>
                   </a:txBody>
                   <a:tcPr marL="45720" marR="45720" marT="22860" marB="22860" anchor="ctr">
-                    <a:lnL w="6350" cap="flat" cmpd="sng" algn="ctr">
-                      <a:solidFill>
-                        <a:srgbClr val="D9E0EA"/>
-                      </a:solidFill>
-                      <a:prstDash val="solid"/>
-                      <a:round/>
-                      <a:headEnd type="none" w="med" len="med"/>
-                      <a:tailEnd type="none" w="med" len="med"/>
-                    </a:lnL>
-                    <a:lnR w="6350" cap="flat" cmpd="sng" algn="ctr">
-                      <a:solidFill>
-                        <a:srgbClr val="D9E0EA"/>
-                      </a:solidFill>
-                      <a:prstDash val="solid"/>
-                      <a:round/>
-                      <a:headEnd type="none" w="med" len="med"/>
-                      <a:tailEnd type="none" w="med" len="med"/>
-                    </a:lnR>
-                    <a:lnT w="6350" cap="flat" cmpd="sng" algn="ctr">
-                      <a:solidFill>
-                        <a:srgbClr val="D9E0EA"/>
-                      </a:solidFill>
-                      <a:prstDash val="solid"/>
-                      <a:round/>
-                      <a:headEnd type="none" w="med" len="med"/>
-                      <a:tailEnd type="none" w="med" len="med"/>
-                    </a:lnT>
-                    <a:lnB w="6350" cap="flat" cmpd="sng" algn="ctr">
-                      <a:solidFill>
-                        <a:srgbClr val="D9E0EA"/>
-                      </a:solidFill>
-                      <a:prstDash val="solid"/>
-                      <a:round/>
-                      <a:headEnd type="none" w="med" len="med"/>
-                      <a:tailEnd type="none" w="med" len="med"/>
-                    </a:lnB>
-                    <a:solidFill>
-                      <a:schemeClr val="bg1"/>
-                    </a:solidFill>
-                  </a:tcPr>
-                </a:tc>
-                <a:tc>
-                  <a:txBody>
-                    <a:bodyPr/>
-                    <a:lstStyle/>
-                    <a:p>
-                      <a:pPr indent="0" marL="0">
-                        <a:buNone/>
-                      </a:pPr>
-                      <a:r>
-                        <a:rPr lang="en-US" sz="750" dirty="0">
-                          <a:solidFill>
-                            <a:schemeClr val="accent5"/>
+                    <a:lnL w="0" cap="flat" cmpd="sng" algn="ctr">
+                      <a:noFill/>
+                    </a:lnL>
+                    <a:lnR w="0" cap="flat" cmpd="sng" algn="ctr">
+                      <a:noFill/>
+                    </a:lnR>
+                    <a:lnT w="0" cap="flat" cmpd="sng" algn="ctr">
+                      <a:noFill/>
+                    </a:lnT>
+                    <a:lnB w="9525" cap="flat" cmpd="sng" algn="ctr">
+                      <a:solidFill>
+                        <a:srgbClr val="D9E0EA"/>
+                      </a:solidFill>
+                      <a:prstDash val="solid"/>
+                      <a:round/>
+                      <a:headEnd type="none" w="med" len="med"/>
+                      <a:tailEnd type="none" w="med" len="med"/>
+                    </a:lnB>
+                    <a:solidFill>
+                      <a:srgbClr val="FFFFFF"/>
+                    </a:solidFill>
+                  </a:tcPr>
+                </a:tc>
+                <a:tc>
+                  <a:txBody>
+                    <a:bodyPr/>
+                    <a:lstStyle/>
+                    <a:p>
+                      <a:pPr indent="0" marL="0">
+                        <a:buNone/>
+                      </a:pPr>
+                      <a:r>
+                        <a:rPr lang="en-US" sz="750" b="1" dirty="0">
+                          <a:solidFill>
+                            <a:schemeClr val="accent1"/>
                           </a:solidFill>
                           <a:latin typeface="Calibri" pitchFamily="34" charset="0"/>
                           <a:ea typeface="Calibri" pitchFamily="34" charset="-122"/>
@@ -4136,44 +3459,26 @@
                     </a:p>
                   </a:txBody>
                   <a:tcPr marL="45720" marR="45720" marT="22860" marB="22860" anchor="ctr">
-                    <a:lnL w="6350" cap="flat" cmpd="sng" algn="ctr">
-                      <a:solidFill>
-                        <a:srgbClr val="D9E0EA"/>
-                      </a:solidFill>
-                      <a:prstDash val="solid"/>
-                      <a:round/>
-                      <a:headEnd type="none" w="med" len="med"/>
-                      <a:tailEnd type="none" w="med" len="med"/>
-                    </a:lnL>
-                    <a:lnR w="6350" cap="flat" cmpd="sng" algn="ctr">
-                      <a:solidFill>
-                        <a:srgbClr val="D9E0EA"/>
-                      </a:solidFill>
-                      <a:prstDash val="solid"/>
-                      <a:round/>
-                      <a:headEnd type="none" w="med" len="med"/>
-                      <a:tailEnd type="none" w="med" len="med"/>
-                    </a:lnR>
-                    <a:lnT w="6350" cap="flat" cmpd="sng" algn="ctr">
-                      <a:solidFill>
-                        <a:srgbClr val="D9E0EA"/>
-                      </a:solidFill>
-                      <a:prstDash val="solid"/>
-                      <a:round/>
-                      <a:headEnd type="none" w="med" len="med"/>
-                      <a:tailEnd type="none" w="med" len="med"/>
-                    </a:lnT>
-                    <a:lnB w="6350" cap="flat" cmpd="sng" algn="ctr">
-                      <a:solidFill>
-                        <a:srgbClr val="D9E0EA"/>
-                      </a:solidFill>
-                      <a:prstDash val="solid"/>
-                      <a:round/>
-                      <a:headEnd type="none" w="med" len="med"/>
-                      <a:tailEnd type="none" w="med" len="med"/>
-                    </a:lnB>
-                    <a:solidFill>
-                      <a:schemeClr val="bg1"/>
+                    <a:lnL w="0" cap="flat" cmpd="sng" algn="ctr">
+                      <a:noFill/>
+                    </a:lnL>
+                    <a:lnR w="0" cap="flat" cmpd="sng" algn="ctr">
+                      <a:noFill/>
+                    </a:lnR>
+                    <a:lnT w="0" cap="flat" cmpd="sng" algn="ctr">
+                      <a:noFill/>
+                    </a:lnT>
+                    <a:lnB w="9525" cap="flat" cmpd="sng" algn="ctr">
+                      <a:solidFill>
+                        <a:srgbClr val="D9E0EA"/>
+                      </a:solidFill>
+                      <a:prstDash val="solid"/>
+                      <a:round/>
+                      <a:headEnd type="none" w="med" len="med"/>
+                      <a:tailEnd type="none" w="med" len="med"/>
+                    </a:lnB>
+                    <a:solidFill>
+                      <a:srgbClr val="FFFFFF"/>
                     </a:solidFill>
                   </a:tcPr>
                 </a:tc>
@@ -4206,44 +3511,26 @@
                     </a:p>
                   </a:txBody>
                   <a:tcPr marL="45720" marR="45720" marT="22860" marB="22860" anchor="ctr">
-                    <a:lnL w="6350" cap="flat" cmpd="sng" algn="ctr">
-                      <a:solidFill>
-                        <a:srgbClr val="D9E0EA"/>
-                      </a:solidFill>
-                      <a:prstDash val="solid"/>
-                      <a:round/>
-                      <a:headEnd type="none" w="med" len="med"/>
-                      <a:tailEnd type="none" w="med" len="med"/>
-                    </a:lnL>
-                    <a:lnR w="6350" cap="flat" cmpd="sng" algn="ctr">
-                      <a:solidFill>
-                        <a:srgbClr val="D9E0EA"/>
-                      </a:solidFill>
-                      <a:prstDash val="solid"/>
-                      <a:round/>
-                      <a:headEnd type="none" w="med" len="med"/>
-                      <a:tailEnd type="none" w="med" len="med"/>
-                    </a:lnR>
-                    <a:lnT w="6350" cap="flat" cmpd="sng" algn="ctr">
-                      <a:solidFill>
-                        <a:srgbClr val="D9E0EA"/>
-                      </a:solidFill>
-                      <a:prstDash val="solid"/>
-                      <a:round/>
-                      <a:headEnd type="none" w="med" len="med"/>
-                      <a:tailEnd type="none" w="med" len="med"/>
-                    </a:lnT>
-                    <a:lnB w="6350" cap="flat" cmpd="sng" algn="ctr">
-                      <a:solidFill>
-                        <a:srgbClr val="D9E0EA"/>
-                      </a:solidFill>
-                      <a:prstDash val="solid"/>
-                      <a:round/>
-                      <a:headEnd type="none" w="med" len="med"/>
-                      <a:tailEnd type="none" w="med" len="med"/>
-                    </a:lnB>
-                    <a:solidFill>
-                      <a:schemeClr val="bg1"/>
+                    <a:lnL w="0" cap="flat" cmpd="sng" algn="ctr">
+                      <a:noFill/>
+                    </a:lnL>
+                    <a:lnR w="0" cap="flat" cmpd="sng" algn="ctr">
+                      <a:noFill/>
+                    </a:lnR>
+                    <a:lnT w="0" cap="flat" cmpd="sng" algn="ctr">
+                      <a:noFill/>
+                    </a:lnT>
+                    <a:lnB w="9525" cap="flat" cmpd="sng" algn="ctr">
+                      <a:solidFill>
+                        <a:srgbClr val="D9E0EA"/>
+                      </a:solidFill>
+                      <a:prstDash val="solid"/>
+                      <a:round/>
+                      <a:headEnd type="none" w="med" len="med"/>
+                      <a:tailEnd type="none" w="med" len="med"/>
+                    </a:lnB>
+                    <a:solidFill>
+                      <a:srgbClr val="FFFFFF"/>
                     </a:solidFill>
                   </a:tcPr>
                 </a:tc>
@@ -4274,59 +3561,41 @@
                     </a:p>
                   </a:txBody>
                   <a:tcPr marL="45720" marR="45720" marT="22860" marB="22860" anchor="ctr">
-                    <a:lnL w="6350" cap="flat" cmpd="sng" algn="ctr">
-                      <a:solidFill>
-                        <a:srgbClr val="D9E0EA"/>
-                      </a:solidFill>
-                      <a:prstDash val="solid"/>
-                      <a:round/>
-                      <a:headEnd type="none" w="med" len="med"/>
-                      <a:tailEnd type="none" w="med" len="med"/>
-                    </a:lnL>
-                    <a:lnR w="6350" cap="flat" cmpd="sng" algn="ctr">
-                      <a:solidFill>
-                        <a:srgbClr val="D9E0EA"/>
-                      </a:solidFill>
-                      <a:prstDash val="solid"/>
-                      <a:round/>
-                      <a:headEnd type="none" w="med" len="med"/>
-                      <a:tailEnd type="none" w="med" len="med"/>
-                    </a:lnR>
-                    <a:lnT w="6350" cap="flat" cmpd="sng" algn="ctr">
-                      <a:solidFill>
-                        <a:srgbClr val="D9E0EA"/>
-                      </a:solidFill>
-                      <a:prstDash val="solid"/>
-                      <a:round/>
-                      <a:headEnd type="none" w="med" len="med"/>
-                      <a:tailEnd type="none" w="med" len="med"/>
-                    </a:lnT>
-                    <a:lnB w="6350" cap="flat" cmpd="sng" algn="ctr">
-                      <a:solidFill>
-                        <a:srgbClr val="D9E0EA"/>
-                      </a:solidFill>
-                      <a:prstDash val="solid"/>
-                      <a:round/>
-                      <a:headEnd type="none" w="med" len="med"/>
-                      <a:tailEnd type="none" w="med" len="med"/>
-                    </a:lnB>
-                    <a:solidFill>
-                      <a:schemeClr val="bg1"/>
-                    </a:solidFill>
-                  </a:tcPr>
-                </a:tc>
-                <a:tc>
-                  <a:txBody>
-                    <a:bodyPr/>
-                    <a:lstStyle/>
-                    <a:p>
-                      <a:pPr indent="0" marL="0">
-                        <a:buNone/>
-                      </a:pPr>
-                      <a:r>
-                        <a:rPr lang="en-US" sz="750" dirty="0">
-                          <a:solidFill>
-                            <a:schemeClr val="accent5"/>
+                    <a:lnL w="0" cap="flat" cmpd="sng" algn="ctr">
+                      <a:noFill/>
+                    </a:lnL>
+                    <a:lnR w="0" cap="flat" cmpd="sng" algn="ctr">
+                      <a:noFill/>
+                    </a:lnR>
+                    <a:lnT w="0" cap="flat" cmpd="sng" algn="ctr">
+                      <a:noFill/>
+                    </a:lnT>
+                    <a:lnB w="9525" cap="flat" cmpd="sng" algn="ctr">
+                      <a:solidFill>
+                        <a:srgbClr val="D9E0EA"/>
+                      </a:solidFill>
+                      <a:prstDash val="solid"/>
+                      <a:round/>
+                      <a:headEnd type="none" w="med" len="med"/>
+                      <a:tailEnd type="none" w="med" len="med"/>
+                    </a:lnB>
+                    <a:solidFill>
+                      <a:srgbClr val="FFFFFF"/>
+                    </a:solidFill>
+                  </a:tcPr>
+                </a:tc>
+                <a:tc>
+                  <a:txBody>
+                    <a:bodyPr/>
+                    <a:lstStyle/>
+                    <a:p>
+                      <a:pPr indent="0" marL="0">
+                        <a:buNone/>
+                      </a:pPr>
+                      <a:r>
+                        <a:rPr lang="en-US" sz="750" b="1" dirty="0">
+                          <a:solidFill>
+                            <a:schemeClr val="accent1"/>
                           </a:solidFill>
                           <a:latin typeface="Calibri" pitchFamily="34" charset="0"/>
                           <a:ea typeface="Calibri" pitchFamily="34" charset="-122"/>
@@ -4342,44 +3611,26 @@
                     </a:p>
                   </a:txBody>
                   <a:tcPr marL="45720" marR="45720" marT="22860" marB="22860" anchor="ctr">
-                    <a:lnL w="6350" cap="flat" cmpd="sng" algn="ctr">
-                      <a:solidFill>
-                        <a:srgbClr val="D9E0EA"/>
-                      </a:solidFill>
-                      <a:prstDash val="solid"/>
-                      <a:round/>
-                      <a:headEnd type="none" w="med" len="med"/>
-                      <a:tailEnd type="none" w="med" len="med"/>
-                    </a:lnL>
-                    <a:lnR w="6350" cap="flat" cmpd="sng" algn="ctr">
-                      <a:solidFill>
-                        <a:srgbClr val="D9E0EA"/>
-                      </a:solidFill>
-                      <a:prstDash val="solid"/>
-                      <a:round/>
-                      <a:headEnd type="none" w="med" len="med"/>
-                      <a:tailEnd type="none" w="med" len="med"/>
-                    </a:lnR>
-                    <a:lnT w="6350" cap="flat" cmpd="sng" algn="ctr">
-                      <a:solidFill>
-                        <a:srgbClr val="D9E0EA"/>
-                      </a:solidFill>
-                      <a:prstDash val="solid"/>
-                      <a:round/>
-                      <a:headEnd type="none" w="med" len="med"/>
-                      <a:tailEnd type="none" w="med" len="med"/>
-                    </a:lnT>
-                    <a:lnB w="6350" cap="flat" cmpd="sng" algn="ctr">
-                      <a:solidFill>
-                        <a:srgbClr val="D9E0EA"/>
-                      </a:solidFill>
-                      <a:prstDash val="solid"/>
-                      <a:round/>
-                      <a:headEnd type="none" w="med" len="med"/>
-                      <a:tailEnd type="none" w="med" len="med"/>
-                    </a:lnB>
-                    <a:solidFill>
-                      <a:schemeClr val="bg1"/>
+                    <a:lnL w="0" cap="flat" cmpd="sng" algn="ctr">
+                      <a:noFill/>
+                    </a:lnL>
+                    <a:lnR w="0" cap="flat" cmpd="sng" algn="ctr">
+                      <a:noFill/>
+                    </a:lnR>
+                    <a:lnT w="0" cap="flat" cmpd="sng" algn="ctr">
+                      <a:noFill/>
+                    </a:lnT>
+                    <a:lnB w="9525" cap="flat" cmpd="sng" algn="ctr">
+                      <a:solidFill>
+                        <a:srgbClr val="D9E0EA"/>
+                      </a:solidFill>
+                      <a:prstDash val="solid"/>
+                      <a:round/>
+                      <a:headEnd type="none" w="med" len="med"/>
+                      <a:tailEnd type="none" w="med" len="med"/>
+                    </a:lnB>
+                    <a:solidFill>
+                      <a:srgbClr val="FFFFFF"/>
                     </a:solidFill>
                   </a:tcPr>
                 </a:tc>
@@ -4412,44 +3663,26 @@
                     </a:p>
                   </a:txBody>
                   <a:tcPr marL="45720" marR="45720" marT="22860" marB="22860" anchor="ctr">
-                    <a:lnL w="6350" cap="flat" cmpd="sng" algn="ctr">
-                      <a:solidFill>
-                        <a:srgbClr val="D9E0EA"/>
-                      </a:solidFill>
-                      <a:prstDash val="solid"/>
-                      <a:round/>
-                      <a:headEnd type="none" w="med" len="med"/>
-                      <a:tailEnd type="none" w="med" len="med"/>
-                    </a:lnL>
-                    <a:lnR w="6350" cap="flat" cmpd="sng" algn="ctr">
-                      <a:solidFill>
-                        <a:srgbClr val="D9E0EA"/>
-                      </a:solidFill>
-                      <a:prstDash val="solid"/>
-                      <a:round/>
-                      <a:headEnd type="none" w="med" len="med"/>
-                      <a:tailEnd type="none" w="med" len="med"/>
-                    </a:lnR>
-                    <a:lnT w="6350" cap="flat" cmpd="sng" algn="ctr">
-                      <a:solidFill>
-                        <a:srgbClr val="D9E0EA"/>
-                      </a:solidFill>
-                      <a:prstDash val="solid"/>
-                      <a:round/>
-                      <a:headEnd type="none" w="med" len="med"/>
-                      <a:tailEnd type="none" w="med" len="med"/>
-                    </a:lnT>
-                    <a:lnB w="6350" cap="flat" cmpd="sng" algn="ctr">
-                      <a:solidFill>
-                        <a:srgbClr val="D9E0EA"/>
-                      </a:solidFill>
-                      <a:prstDash val="solid"/>
-                      <a:round/>
-                      <a:headEnd type="none" w="med" len="med"/>
-                      <a:tailEnd type="none" w="med" len="med"/>
-                    </a:lnB>
-                    <a:solidFill>
-                      <a:schemeClr val="bg1"/>
+                    <a:lnL w="0" cap="flat" cmpd="sng" algn="ctr">
+                      <a:noFill/>
+                    </a:lnL>
+                    <a:lnR w="0" cap="flat" cmpd="sng" algn="ctr">
+                      <a:noFill/>
+                    </a:lnR>
+                    <a:lnT w="0" cap="flat" cmpd="sng" algn="ctr">
+                      <a:noFill/>
+                    </a:lnT>
+                    <a:lnB w="9525" cap="flat" cmpd="sng" algn="ctr">
+                      <a:solidFill>
+                        <a:srgbClr val="D9E0EA"/>
+                      </a:solidFill>
+                      <a:prstDash val="solid"/>
+                      <a:round/>
+                      <a:headEnd type="none" w="med" len="med"/>
+                      <a:tailEnd type="none" w="med" len="med"/>
+                    </a:lnB>
+                    <a:solidFill>
+                      <a:srgbClr val="FFFFFF"/>
                     </a:solidFill>
                   </a:tcPr>
                 </a:tc>
@@ -4480,59 +3713,41 @@
                     </a:p>
                   </a:txBody>
                   <a:tcPr marL="45720" marR="45720" marT="22860" marB="22860" anchor="ctr">
-                    <a:lnL w="6350" cap="flat" cmpd="sng" algn="ctr">
-                      <a:solidFill>
-                        <a:srgbClr val="D9E0EA"/>
-                      </a:solidFill>
-                      <a:prstDash val="solid"/>
-                      <a:round/>
-                      <a:headEnd type="none" w="med" len="med"/>
-                      <a:tailEnd type="none" w="med" len="med"/>
-                    </a:lnL>
-                    <a:lnR w="6350" cap="flat" cmpd="sng" algn="ctr">
-                      <a:solidFill>
-                        <a:srgbClr val="D9E0EA"/>
-                      </a:solidFill>
-                      <a:prstDash val="solid"/>
-                      <a:round/>
-                      <a:headEnd type="none" w="med" len="med"/>
-                      <a:tailEnd type="none" w="med" len="med"/>
-                    </a:lnR>
-                    <a:lnT w="6350" cap="flat" cmpd="sng" algn="ctr">
-                      <a:solidFill>
-                        <a:srgbClr val="D9E0EA"/>
-                      </a:solidFill>
-                      <a:prstDash val="solid"/>
-                      <a:round/>
-                      <a:headEnd type="none" w="med" len="med"/>
-                      <a:tailEnd type="none" w="med" len="med"/>
-                    </a:lnT>
-                    <a:lnB w="6350" cap="flat" cmpd="sng" algn="ctr">
-                      <a:solidFill>
-                        <a:srgbClr val="D9E0EA"/>
-                      </a:solidFill>
-                      <a:prstDash val="solid"/>
-                      <a:round/>
-                      <a:headEnd type="none" w="med" len="med"/>
-                      <a:tailEnd type="none" w="med" len="med"/>
-                    </a:lnB>
-                    <a:solidFill>
-                      <a:schemeClr val="bg1"/>
-                    </a:solidFill>
-                  </a:tcPr>
-                </a:tc>
-                <a:tc>
-                  <a:txBody>
-                    <a:bodyPr/>
-                    <a:lstStyle/>
-                    <a:p>
-                      <a:pPr indent="0" marL="0">
-                        <a:buNone/>
-                      </a:pPr>
-                      <a:r>
-                        <a:rPr lang="en-US" sz="750" dirty="0">
-                          <a:solidFill>
-                            <a:schemeClr val="accent5"/>
+                    <a:lnL w="0" cap="flat" cmpd="sng" algn="ctr">
+                      <a:noFill/>
+                    </a:lnL>
+                    <a:lnR w="0" cap="flat" cmpd="sng" algn="ctr">
+                      <a:noFill/>
+                    </a:lnR>
+                    <a:lnT w="0" cap="flat" cmpd="sng" algn="ctr">
+                      <a:noFill/>
+                    </a:lnT>
+                    <a:lnB w="9525" cap="flat" cmpd="sng" algn="ctr">
+                      <a:solidFill>
+                        <a:srgbClr val="D9E0EA"/>
+                      </a:solidFill>
+                      <a:prstDash val="solid"/>
+                      <a:round/>
+                      <a:headEnd type="none" w="med" len="med"/>
+                      <a:tailEnd type="none" w="med" len="med"/>
+                    </a:lnB>
+                    <a:solidFill>
+                      <a:srgbClr val="FFFFFF"/>
+                    </a:solidFill>
+                  </a:tcPr>
+                </a:tc>
+                <a:tc>
+                  <a:txBody>
+                    <a:bodyPr/>
+                    <a:lstStyle/>
+                    <a:p>
+                      <a:pPr indent="0" marL="0">
+                        <a:buNone/>
+                      </a:pPr>
+                      <a:r>
+                        <a:rPr lang="en-US" sz="750" b="1" dirty="0">
+                          <a:solidFill>
+                            <a:schemeClr val="accent1"/>
                           </a:solidFill>
                           <a:latin typeface="Calibri" pitchFamily="34" charset="0"/>
                           <a:ea typeface="Calibri" pitchFamily="34" charset="-122"/>
@@ -4548,44 +3763,26 @@
                     </a:p>
                   </a:txBody>
                   <a:tcPr marL="45720" marR="45720" marT="22860" marB="22860" anchor="ctr">
-                    <a:lnL w="6350" cap="flat" cmpd="sng" algn="ctr">
-                      <a:solidFill>
-                        <a:srgbClr val="D9E0EA"/>
-                      </a:solidFill>
-                      <a:prstDash val="solid"/>
-                      <a:round/>
-                      <a:headEnd type="none" w="med" len="med"/>
-                      <a:tailEnd type="none" w="med" len="med"/>
-                    </a:lnL>
-                    <a:lnR w="6350" cap="flat" cmpd="sng" algn="ctr">
-                      <a:solidFill>
-                        <a:srgbClr val="D9E0EA"/>
-                      </a:solidFill>
-                      <a:prstDash val="solid"/>
-                      <a:round/>
-                      <a:headEnd type="none" w="med" len="med"/>
-                      <a:tailEnd type="none" w="med" len="med"/>
-                    </a:lnR>
-                    <a:lnT w="6350" cap="flat" cmpd="sng" algn="ctr">
-                      <a:solidFill>
-                        <a:srgbClr val="D9E0EA"/>
-                      </a:solidFill>
-                      <a:prstDash val="solid"/>
-                      <a:round/>
-                      <a:headEnd type="none" w="med" len="med"/>
-                      <a:tailEnd type="none" w="med" len="med"/>
-                    </a:lnT>
-                    <a:lnB w="6350" cap="flat" cmpd="sng" algn="ctr">
-                      <a:solidFill>
-                        <a:srgbClr val="D9E0EA"/>
-                      </a:solidFill>
-                      <a:prstDash val="solid"/>
-                      <a:round/>
-                      <a:headEnd type="none" w="med" len="med"/>
-                      <a:tailEnd type="none" w="med" len="med"/>
-                    </a:lnB>
-                    <a:solidFill>
-                      <a:schemeClr val="bg1"/>
+                    <a:lnL w="0" cap="flat" cmpd="sng" algn="ctr">
+                      <a:noFill/>
+                    </a:lnL>
+                    <a:lnR w="0" cap="flat" cmpd="sng" algn="ctr">
+                      <a:noFill/>
+                    </a:lnR>
+                    <a:lnT w="0" cap="flat" cmpd="sng" algn="ctr">
+                      <a:noFill/>
+                    </a:lnT>
+                    <a:lnB w="9525" cap="flat" cmpd="sng" algn="ctr">
+                      <a:solidFill>
+                        <a:srgbClr val="D9E0EA"/>
+                      </a:solidFill>
+                      <a:prstDash val="solid"/>
+                      <a:round/>
+                      <a:headEnd type="none" w="med" len="med"/>
+                      <a:tailEnd type="none" w="med" len="med"/>
+                    </a:lnB>
+                    <a:solidFill>
+                      <a:srgbClr val="FFFFFF"/>
                     </a:solidFill>
                   </a:tcPr>
                 </a:tc>
@@ -4618,44 +3815,26 @@
                     </a:p>
                   </a:txBody>
                   <a:tcPr marL="45720" marR="45720" marT="22860" marB="22860" anchor="ctr">
-                    <a:lnL w="6350" cap="flat" cmpd="sng" algn="ctr">
-                      <a:solidFill>
-                        <a:srgbClr val="D9E0EA"/>
-                      </a:solidFill>
-                      <a:prstDash val="solid"/>
-                      <a:round/>
-                      <a:headEnd type="none" w="med" len="med"/>
-                      <a:tailEnd type="none" w="med" len="med"/>
-                    </a:lnL>
-                    <a:lnR w="6350" cap="flat" cmpd="sng" algn="ctr">
-                      <a:solidFill>
-                        <a:srgbClr val="D9E0EA"/>
-                      </a:solidFill>
-                      <a:prstDash val="solid"/>
-                      <a:round/>
-                      <a:headEnd type="none" w="med" len="med"/>
-                      <a:tailEnd type="none" w="med" len="med"/>
-                    </a:lnR>
-                    <a:lnT w="6350" cap="flat" cmpd="sng" algn="ctr">
-                      <a:solidFill>
-                        <a:srgbClr val="D9E0EA"/>
-                      </a:solidFill>
-                      <a:prstDash val="solid"/>
-                      <a:round/>
-                      <a:headEnd type="none" w="med" len="med"/>
-                      <a:tailEnd type="none" w="med" len="med"/>
-                    </a:lnT>
-                    <a:lnB w="6350" cap="flat" cmpd="sng" algn="ctr">
-                      <a:solidFill>
-                        <a:srgbClr val="D9E0EA"/>
-                      </a:solidFill>
-                      <a:prstDash val="solid"/>
-                      <a:round/>
-                      <a:headEnd type="none" w="med" len="med"/>
-                      <a:tailEnd type="none" w="med" len="med"/>
-                    </a:lnB>
-                    <a:solidFill>
-                      <a:schemeClr val="bg1"/>
+                    <a:lnL w="0" cap="flat" cmpd="sng" algn="ctr">
+                      <a:noFill/>
+                    </a:lnL>
+                    <a:lnR w="0" cap="flat" cmpd="sng" algn="ctr">
+                      <a:noFill/>
+                    </a:lnR>
+                    <a:lnT w="0" cap="flat" cmpd="sng" algn="ctr">
+                      <a:noFill/>
+                    </a:lnT>
+                    <a:lnB w="9525" cap="flat" cmpd="sng" algn="ctr">
+                      <a:solidFill>
+                        <a:srgbClr val="D9E0EA"/>
+                      </a:solidFill>
+                      <a:prstDash val="solid"/>
+                      <a:round/>
+                      <a:headEnd type="none" w="med" len="med"/>
+                      <a:tailEnd type="none" w="med" len="med"/>
+                    </a:lnB>
+                    <a:solidFill>
+                      <a:srgbClr val="FFFFFF"/>
                     </a:solidFill>
                   </a:tcPr>
                 </a:tc>
@@ -4686,59 +3865,41 @@
                     </a:p>
                   </a:txBody>
                   <a:tcPr marL="45720" marR="45720" marT="22860" marB="22860" anchor="ctr">
-                    <a:lnL w="6350" cap="flat" cmpd="sng" algn="ctr">
-                      <a:solidFill>
-                        <a:srgbClr val="D9E0EA"/>
-                      </a:solidFill>
-                      <a:prstDash val="solid"/>
-                      <a:round/>
-                      <a:headEnd type="none" w="med" len="med"/>
-                      <a:tailEnd type="none" w="med" len="med"/>
-                    </a:lnL>
-                    <a:lnR w="6350" cap="flat" cmpd="sng" algn="ctr">
-                      <a:solidFill>
-                        <a:srgbClr val="D9E0EA"/>
-                      </a:solidFill>
-                      <a:prstDash val="solid"/>
-                      <a:round/>
-                      <a:headEnd type="none" w="med" len="med"/>
-                      <a:tailEnd type="none" w="med" len="med"/>
-                    </a:lnR>
-                    <a:lnT w="6350" cap="flat" cmpd="sng" algn="ctr">
-                      <a:solidFill>
-                        <a:srgbClr val="D9E0EA"/>
-                      </a:solidFill>
-                      <a:prstDash val="solid"/>
-                      <a:round/>
-                      <a:headEnd type="none" w="med" len="med"/>
-                      <a:tailEnd type="none" w="med" len="med"/>
-                    </a:lnT>
-                    <a:lnB w="6350" cap="flat" cmpd="sng" algn="ctr">
-                      <a:solidFill>
-                        <a:srgbClr val="D9E0EA"/>
-                      </a:solidFill>
-                      <a:prstDash val="solid"/>
-                      <a:round/>
-                      <a:headEnd type="none" w="med" len="med"/>
-                      <a:tailEnd type="none" w="med" len="med"/>
-                    </a:lnB>
-                    <a:solidFill>
-                      <a:schemeClr val="bg1"/>
-                    </a:solidFill>
-                  </a:tcPr>
-                </a:tc>
-                <a:tc>
-                  <a:txBody>
-                    <a:bodyPr/>
-                    <a:lstStyle/>
-                    <a:p>
-                      <a:pPr indent="0" marL="0">
-                        <a:buNone/>
-                      </a:pPr>
-                      <a:r>
-                        <a:rPr lang="en-US" sz="750" dirty="0">
-                          <a:solidFill>
-                            <a:schemeClr val="accent5"/>
+                    <a:lnL w="0" cap="flat" cmpd="sng" algn="ctr">
+                      <a:noFill/>
+                    </a:lnL>
+                    <a:lnR w="0" cap="flat" cmpd="sng" algn="ctr">
+                      <a:noFill/>
+                    </a:lnR>
+                    <a:lnT w="0" cap="flat" cmpd="sng" algn="ctr">
+                      <a:noFill/>
+                    </a:lnT>
+                    <a:lnB w="9525" cap="flat" cmpd="sng" algn="ctr">
+                      <a:solidFill>
+                        <a:srgbClr val="D9E0EA"/>
+                      </a:solidFill>
+                      <a:prstDash val="solid"/>
+                      <a:round/>
+                      <a:headEnd type="none" w="med" len="med"/>
+                      <a:tailEnd type="none" w="med" len="med"/>
+                    </a:lnB>
+                    <a:solidFill>
+                      <a:srgbClr val="FFFFFF"/>
+                    </a:solidFill>
+                  </a:tcPr>
+                </a:tc>
+                <a:tc>
+                  <a:txBody>
+                    <a:bodyPr/>
+                    <a:lstStyle/>
+                    <a:p>
+                      <a:pPr indent="0" marL="0">
+                        <a:buNone/>
+                      </a:pPr>
+                      <a:r>
+                        <a:rPr lang="en-US" sz="750" b="1" dirty="0">
+                          <a:solidFill>
+                            <a:schemeClr val="accent1"/>
                           </a:solidFill>
                           <a:latin typeface="Calibri" pitchFamily="34" charset="0"/>
                           <a:ea typeface="Calibri" pitchFamily="34" charset="-122"/>
@@ -4754,44 +3915,26 @@
                     </a:p>
                   </a:txBody>
                   <a:tcPr marL="45720" marR="45720" marT="22860" marB="22860" anchor="ctr">
-                    <a:lnL w="6350" cap="flat" cmpd="sng" algn="ctr">
-                      <a:solidFill>
-                        <a:srgbClr val="D9E0EA"/>
-                      </a:solidFill>
-                      <a:prstDash val="solid"/>
-                      <a:round/>
-                      <a:headEnd type="none" w="med" len="med"/>
-                      <a:tailEnd type="none" w="med" len="med"/>
-                    </a:lnL>
-                    <a:lnR w="6350" cap="flat" cmpd="sng" algn="ctr">
-                      <a:solidFill>
-                        <a:srgbClr val="D9E0EA"/>
-                      </a:solidFill>
-                      <a:prstDash val="solid"/>
-                      <a:round/>
-                      <a:headEnd type="none" w="med" len="med"/>
-                      <a:tailEnd type="none" w="med" len="med"/>
-                    </a:lnR>
-                    <a:lnT w="6350" cap="flat" cmpd="sng" algn="ctr">
-                      <a:solidFill>
-                        <a:srgbClr val="D9E0EA"/>
-                      </a:solidFill>
-                      <a:prstDash val="solid"/>
-                      <a:round/>
-                      <a:headEnd type="none" w="med" len="med"/>
-                      <a:tailEnd type="none" w="med" len="med"/>
-                    </a:lnT>
-                    <a:lnB w="6350" cap="flat" cmpd="sng" algn="ctr">
-                      <a:solidFill>
-                        <a:srgbClr val="D9E0EA"/>
-                      </a:solidFill>
-                      <a:prstDash val="solid"/>
-                      <a:round/>
-                      <a:headEnd type="none" w="med" len="med"/>
-                      <a:tailEnd type="none" w="med" len="med"/>
-                    </a:lnB>
-                    <a:solidFill>
-                      <a:schemeClr val="bg1"/>
+                    <a:lnL w="0" cap="flat" cmpd="sng" algn="ctr">
+                      <a:noFill/>
+                    </a:lnL>
+                    <a:lnR w="0" cap="flat" cmpd="sng" algn="ctr">
+                      <a:noFill/>
+                    </a:lnR>
+                    <a:lnT w="0" cap="flat" cmpd="sng" algn="ctr">
+                      <a:noFill/>
+                    </a:lnT>
+                    <a:lnB w="9525" cap="flat" cmpd="sng" algn="ctr">
+                      <a:solidFill>
+                        <a:srgbClr val="D9E0EA"/>
+                      </a:solidFill>
+                      <a:prstDash val="solid"/>
+                      <a:round/>
+                      <a:headEnd type="none" w="med" len="med"/>
+                      <a:tailEnd type="none" w="med" len="med"/>
+                    </a:lnB>
+                    <a:solidFill>
+                      <a:srgbClr val="FFFFFF"/>
                     </a:solidFill>
                   </a:tcPr>
                 </a:tc>
@@ -4824,44 +3967,26 @@
                     </a:p>
                   </a:txBody>
                   <a:tcPr marL="45720" marR="45720" marT="22860" marB="22860" anchor="ctr">
-                    <a:lnL w="6350" cap="flat" cmpd="sng" algn="ctr">
-                      <a:solidFill>
-                        <a:srgbClr val="D9E0EA"/>
-                      </a:solidFill>
-                      <a:prstDash val="solid"/>
-                      <a:round/>
-                      <a:headEnd type="none" w="med" len="med"/>
-                      <a:tailEnd type="none" w="med" len="med"/>
-                    </a:lnL>
-                    <a:lnR w="6350" cap="flat" cmpd="sng" algn="ctr">
-                      <a:solidFill>
-                        <a:srgbClr val="D9E0EA"/>
-                      </a:solidFill>
-                      <a:prstDash val="solid"/>
-                      <a:round/>
-                      <a:headEnd type="none" w="med" len="med"/>
-                      <a:tailEnd type="none" w="med" len="med"/>
-                    </a:lnR>
-                    <a:lnT w="6350" cap="flat" cmpd="sng" algn="ctr">
-                      <a:solidFill>
-                        <a:srgbClr val="D9E0EA"/>
-                      </a:solidFill>
-                      <a:prstDash val="solid"/>
-                      <a:round/>
-                      <a:headEnd type="none" w="med" len="med"/>
-                      <a:tailEnd type="none" w="med" len="med"/>
-                    </a:lnT>
-                    <a:lnB w="6350" cap="flat" cmpd="sng" algn="ctr">
-                      <a:solidFill>
-                        <a:srgbClr val="D9E0EA"/>
-                      </a:solidFill>
-                      <a:prstDash val="solid"/>
-                      <a:round/>
-                      <a:headEnd type="none" w="med" len="med"/>
-                      <a:tailEnd type="none" w="med" len="med"/>
-                    </a:lnB>
-                    <a:solidFill>
-                      <a:schemeClr val="bg1"/>
+                    <a:lnL w="0" cap="flat" cmpd="sng" algn="ctr">
+                      <a:noFill/>
+                    </a:lnL>
+                    <a:lnR w="0" cap="flat" cmpd="sng" algn="ctr">
+                      <a:noFill/>
+                    </a:lnR>
+                    <a:lnT w="0" cap="flat" cmpd="sng" algn="ctr">
+                      <a:noFill/>
+                    </a:lnT>
+                    <a:lnB w="9525" cap="flat" cmpd="sng" algn="ctr">
+                      <a:solidFill>
+                        <a:srgbClr val="D9E0EA"/>
+                      </a:solidFill>
+                      <a:prstDash val="solid"/>
+                      <a:round/>
+                      <a:headEnd type="none" w="med" len="med"/>
+                      <a:tailEnd type="none" w="med" len="med"/>
+                    </a:lnB>
+                    <a:solidFill>
+                      <a:srgbClr val="FFFFFF"/>
                     </a:solidFill>
                   </a:tcPr>
                 </a:tc>
@@ -4892,59 +4017,41 @@
                     </a:p>
                   </a:txBody>
                   <a:tcPr marL="45720" marR="45720" marT="22860" marB="22860" anchor="ctr">
-                    <a:lnL w="6350" cap="flat" cmpd="sng" algn="ctr">
-                      <a:solidFill>
-                        <a:srgbClr val="D9E0EA"/>
-                      </a:solidFill>
-                      <a:prstDash val="solid"/>
-                      <a:round/>
-                      <a:headEnd type="none" w="med" len="med"/>
-                      <a:tailEnd type="none" w="med" len="med"/>
-                    </a:lnL>
-                    <a:lnR w="6350" cap="flat" cmpd="sng" algn="ctr">
-                      <a:solidFill>
-                        <a:srgbClr val="D9E0EA"/>
-                      </a:solidFill>
-                      <a:prstDash val="solid"/>
-                      <a:round/>
-                      <a:headEnd type="none" w="med" len="med"/>
-                      <a:tailEnd type="none" w="med" len="med"/>
-                    </a:lnR>
-                    <a:lnT w="6350" cap="flat" cmpd="sng" algn="ctr">
-                      <a:solidFill>
-                        <a:srgbClr val="D9E0EA"/>
-                      </a:solidFill>
-                      <a:prstDash val="solid"/>
-                      <a:round/>
-                      <a:headEnd type="none" w="med" len="med"/>
-                      <a:tailEnd type="none" w="med" len="med"/>
-                    </a:lnT>
-                    <a:lnB w="6350" cap="flat" cmpd="sng" algn="ctr">
-                      <a:solidFill>
-                        <a:srgbClr val="D9E0EA"/>
-                      </a:solidFill>
-                      <a:prstDash val="solid"/>
-                      <a:round/>
-                      <a:headEnd type="none" w="med" len="med"/>
-                      <a:tailEnd type="none" w="med" len="med"/>
-                    </a:lnB>
-                    <a:solidFill>
-                      <a:schemeClr val="bg1"/>
-                    </a:solidFill>
-                  </a:tcPr>
-                </a:tc>
-                <a:tc>
-                  <a:txBody>
-                    <a:bodyPr/>
-                    <a:lstStyle/>
-                    <a:p>
-                      <a:pPr indent="0" marL="0">
-                        <a:buNone/>
-                      </a:pPr>
-                      <a:r>
-                        <a:rPr lang="en-US" sz="750" dirty="0">
-                          <a:solidFill>
-                            <a:schemeClr val="accent5"/>
+                    <a:lnL w="0" cap="flat" cmpd="sng" algn="ctr">
+                      <a:noFill/>
+                    </a:lnL>
+                    <a:lnR w="0" cap="flat" cmpd="sng" algn="ctr">
+                      <a:noFill/>
+                    </a:lnR>
+                    <a:lnT w="0" cap="flat" cmpd="sng" algn="ctr">
+                      <a:noFill/>
+                    </a:lnT>
+                    <a:lnB w="9525" cap="flat" cmpd="sng" algn="ctr">
+                      <a:solidFill>
+                        <a:srgbClr val="D9E0EA"/>
+                      </a:solidFill>
+                      <a:prstDash val="solid"/>
+                      <a:round/>
+                      <a:headEnd type="none" w="med" len="med"/>
+                      <a:tailEnd type="none" w="med" len="med"/>
+                    </a:lnB>
+                    <a:solidFill>
+                      <a:srgbClr val="FFFFFF"/>
+                    </a:solidFill>
+                  </a:tcPr>
+                </a:tc>
+                <a:tc>
+                  <a:txBody>
+                    <a:bodyPr/>
+                    <a:lstStyle/>
+                    <a:p>
+                      <a:pPr indent="0" marL="0">
+                        <a:buNone/>
+                      </a:pPr>
+                      <a:r>
+                        <a:rPr lang="en-US" sz="750" b="1" dirty="0">
+                          <a:solidFill>
+                            <a:schemeClr val="accent1"/>
                           </a:solidFill>
                           <a:latin typeface="Calibri" pitchFamily="34" charset="0"/>
                           <a:ea typeface="Calibri" pitchFamily="34" charset="-122"/>
@@ -4960,44 +4067,26 @@
                     </a:p>
                   </a:txBody>
                   <a:tcPr marL="45720" marR="45720" marT="22860" marB="22860" anchor="ctr">
-                    <a:lnL w="6350" cap="flat" cmpd="sng" algn="ctr">
-                      <a:solidFill>
-                        <a:srgbClr val="D9E0EA"/>
-                      </a:solidFill>
-                      <a:prstDash val="solid"/>
-                      <a:round/>
-                      <a:headEnd type="none" w="med" len="med"/>
-                      <a:tailEnd type="none" w="med" len="med"/>
-                    </a:lnL>
-                    <a:lnR w="6350" cap="flat" cmpd="sng" algn="ctr">
-                      <a:solidFill>
-                        <a:srgbClr val="D9E0EA"/>
-                      </a:solidFill>
-                      <a:prstDash val="solid"/>
-                      <a:round/>
-                      <a:headEnd type="none" w="med" len="med"/>
-                      <a:tailEnd type="none" w="med" len="med"/>
-                    </a:lnR>
-                    <a:lnT w="6350" cap="flat" cmpd="sng" algn="ctr">
-                      <a:solidFill>
-                        <a:srgbClr val="D9E0EA"/>
-                      </a:solidFill>
-                      <a:prstDash val="solid"/>
-                      <a:round/>
-                      <a:headEnd type="none" w="med" len="med"/>
-                      <a:tailEnd type="none" w="med" len="med"/>
-                    </a:lnT>
-                    <a:lnB w="6350" cap="flat" cmpd="sng" algn="ctr">
-                      <a:solidFill>
-                        <a:srgbClr val="D9E0EA"/>
-                      </a:solidFill>
-                      <a:prstDash val="solid"/>
-                      <a:round/>
-                      <a:headEnd type="none" w="med" len="med"/>
-                      <a:tailEnd type="none" w="med" len="med"/>
-                    </a:lnB>
-                    <a:solidFill>
-                      <a:schemeClr val="bg1"/>
+                    <a:lnL w="0" cap="flat" cmpd="sng" algn="ctr">
+                      <a:noFill/>
+                    </a:lnL>
+                    <a:lnR w="0" cap="flat" cmpd="sng" algn="ctr">
+                      <a:noFill/>
+                    </a:lnR>
+                    <a:lnT w="0" cap="flat" cmpd="sng" algn="ctr">
+                      <a:noFill/>
+                    </a:lnT>
+                    <a:lnB w="9525" cap="flat" cmpd="sng" algn="ctr">
+                      <a:solidFill>
+                        <a:srgbClr val="D9E0EA"/>
+                      </a:solidFill>
+                      <a:prstDash val="solid"/>
+                      <a:round/>
+                      <a:headEnd type="none" w="med" len="med"/>
+                      <a:tailEnd type="none" w="med" len="med"/>
+                    </a:lnB>
+                    <a:solidFill>
+                      <a:srgbClr val="FFFFFF"/>
                     </a:solidFill>
                   </a:tcPr>
                 </a:tc>
@@ -5030,44 +4119,26 @@
                     </a:p>
                   </a:txBody>
                   <a:tcPr marL="45720" marR="45720" marT="22860" marB="22860" anchor="ctr">
-                    <a:lnL w="6350" cap="flat" cmpd="sng" algn="ctr">
-                      <a:solidFill>
-                        <a:srgbClr val="D9E0EA"/>
-                      </a:solidFill>
-                      <a:prstDash val="solid"/>
-                      <a:round/>
-                      <a:headEnd type="none" w="med" len="med"/>
-                      <a:tailEnd type="none" w="med" len="med"/>
-                    </a:lnL>
-                    <a:lnR w="6350" cap="flat" cmpd="sng" algn="ctr">
-                      <a:solidFill>
-                        <a:srgbClr val="D9E0EA"/>
-                      </a:solidFill>
-                      <a:prstDash val="solid"/>
-                      <a:round/>
-                      <a:headEnd type="none" w="med" len="med"/>
-                      <a:tailEnd type="none" w="med" len="med"/>
-                    </a:lnR>
-                    <a:lnT w="6350" cap="flat" cmpd="sng" algn="ctr">
-                      <a:solidFill>
-                        <a:srgbClr val="D9E0EA"/>
-                      </a:solidFill>
-                      <a:prstDash val="solid"/>
-                      <a:round/>
-                      <a:headEnd type="none" w="med" len="med"/>
-                      <a:tailEnd type="none" w="med" len="med"/>
-                    </a:lnT>
-                    <a:lnB w="6350" cap="flat" cmpd="sng" algn="ctr">
-                      <a:solidFill>
-                        <a:srgbClr val="D9E0EA"/>
-                      </a:solidFill>
-                      <a:prstDash val="solid"/>
-                      <a:round/>
-                      <a:headEnd type="none" w="med" len="med"/>
-                      <a:tailEnd type="none" w="med" len="med"/>
-                    </a:lnB>
-                    <a:solidFill>
-                      <a:schemeClr val="bg1"/>
+                    <a:lnL w="0" cap="flat" cmpd="sng" algn="ctr">
+                      <a:noFill/>
+                    </a:lnL>
+                    <a:lnR w="0" cap="flat" cmpd="sng" algn="ctr">
+                      <a:noFill/>
+                    </a:lnR>
+                    <a:lnT w="0" cap="flat" cmpd="sng" algn="ctr">
+                      <a:noFill/>
+                    </a:lnT>
+                    <a:lnB w="9525" cap="flat" cmpd="sng" algn="ctr">
+                      <a:solidFill>
+                        <a:srgbClr val="D9E0EA"/>
+                      </a:solidFill>
+                      <a:prstDash val="solid"/>
+                      <a:round/>
+                      <a:headEnd type="none" w="med" len="med"/>
+                      <a:tailEnd type="none" w="med" len="med"/>
+                    </a:lnB>
+                    <a:solidFill>
+                      <a:srgbClr val="FFFFFF"/>
                     </a:solidFill>
                   </a:tcPr>
                 </a:tc>
@@ -5098,59 +4169,41 @@
                     </a:p>
                   </a:txBody>
                   <a:tcPr marL="45720" marR="45720" marT="22860" marB="22860" anchor="ctr">
-                    <a:lnL w="6350" cap="flat" cmpd="sng" algn="ctr">
-                      <a:solidFill>
-                        <a:srgbClr val="D9E0EA"/>
-                      </a:solidFill>
-                      <a:prstDash val="solid"/>
-                      <a:round/>
-                      <a:headEnd type="none" w="med" len="med"/>
-                      <a:tailEnd type="none" w="med" len="med"/>
-                    </a:lnL>
-                    <a:lnR w="6350" cap="flat" cmpd="sng" algn="ctr">
-                      <a:solidFill>
-                        <a:srgbClr val="D9E0EA"/>
-                      </a:solidFill>
-                      <a:prstDash val="solid"/>
-                      <a:round/>
-                      <a:headEnd type="none" w="med" len="med"/>
-                      <a:tailEnd type="none" w="med" len="med"/>
-                    </a:lnR>
-                    <a:lnT w="6350" cap="flat" cmpd="sng" algn="ctr">
-                      <a:solidFill>
-                        <a:srgbClr val="D9E0EA"/>
-                      </a:solidFill>
-                      <a:prstDash val="solid"/>
-                      <a:round/>
-                      <a:headEnd type="none" w="med" len="med"/>
-                      <a:tailEnd type="none" w="med" len="med"/>
-                    </a:lnT>
-                    <a:lnB w="6350" cap="flat" cmpd="sng" algn="ctr">
-                      <a:solidFill>
-                        <a:srgbClr val="D9E0EA"/>
-                      </a:solidFill>
-                      <a:prstDash val="solid"/>
-                      <a:round/>
-                      <a:headEnd type="none" w="med" len="med"/>
-                      <a:tailEnd type="none" w="med" len="med"/>
-                    </a:lnB>
-                    <a:solidFill>
-                      <a:schemeClr val="bg1"/>
-                    </a:solidFill>
-                  </a:tcPr>
-                </a:tc>
-                <a:tc>
-                  <a:txBody>
-                    <a:bodyPr/>
-                    <a:lstStyle/>
-                    <a:p>
-                      <a:pPr indent="0" marL="0">
-                        <a:buNone/>
-                      </a:pPr>
-                      <a:r>
-                        <a:rPr lang="en-US" sz="750" dirty="0">
-                          <a:solidFill>
-                            <a:schemeClr val="accent5"/>
+                    <a:lnL w="0" cap="flat" cmpd="sng" algn="ctr">
+                      <a:noFill/>
+                    </a:lnL>
+                    <a:lnR w="0" cap="flat" cmpd="sng" algn="ctr">
+                      <a:noFill/>
+                    </a:lnR>
+                    <a:lnT w="0" cap="flat" cmpd="sng" algn="ctr">
+                      <a:noFill/>
+                    </a:lnT>
+                    <a:lnB w="9525" cap="flat" cmpd="sng" algn="ctr">
+                      <a:solidFill>
+                        <a:srgbClr val="D9E0EA"/>
+                      </a:solidFill>
+                      <a:prstDash val="solid"/>
+                      <a:round/>
+                      <a:headEnd type="none" w="med" len="med"/>
+                      <a:tailEnd type="none" w="med" len="med"/>
+                    </a:lnB>
+                    <a:solidFill>
+                      <a:srgbClr val="FFFFFF"/>
+                    </a:solidFill>
+                  </a:tcPr>
+                </a:tc>
+                <a:tc>
+                  <a:txBody>
+                    <a:bodyPr/>
+                    <a:lstStyle/>
+                    <a:p>
+                      <a:pPr indent="0" marL="0">
+                        <a:buNone/>
+                      </a:pPr>
+                      <a:r>
+                        <a:rPr lang="en-US" sz="750" b="1" dirty="0">
+                          <a:solidFill>
+                            <a:schemeClr val="accent1"/>
                           </a:solidFill>
                           <a:latin typeface="Calibri" pitchFamily="34" charset="0"/>
                           <a:ea typeface="Calibri" pitchFamily="34" charset="-122"/>
@@ -5166,44 +4219,26 @@
                     </a:p>
                   </a:txBody>
                   <a:tcPr marL="45720" marR="45720" marT="22860" marB="22860" anchor="ctr">
-                    <a:lnL w="6350" cap="flat" cmpd="sng" algn="ctr">
-                      <a:solidFill>
-                        <a:srgbClr val="D9E0EA"/>
-                      </a:solidFill>
-                      <a:prstDash val="solid"/>
-                      <a:round/>
-                      <a:headEnd type="none" w="med" len="med"/>
-                      <a:tailEnd type="none" w="med" len="med"/>
-                    </a:lnL>
-                    <a:lnR w="6350" cap="flat" cmpd="sng" algn="ctr">
-                      <a:solidFill>
-                        <a:srgbClr val="D9E0EA"/>
-                      </a:solidFill>
-                      <a:prstDash val="solid"/>
-                      <a:round/>
-                      <a:headEnd type="none" w="med" len="med"/>
-                      <a:tailEnd type="none" w="med" len="med"/>
-                    </a:lnR>
-                    <a:lnT w="6350" cap="flat" cmpd="sng" algn="ctr">
-                      <a:solidFill>
-                        <a:srgbClr val="D9E0EA"/>
-                      </a:solidFill>
-                      <a:prstDash val="solid"/>
-                      <a:round/>
-                      <a:headEnd type="none" w="med" len="med"/>
-                      <a:tailEnd type="none" w="med" len="med"/>
-                    </a:lnT>
-                    <a:lnB w="6350" cap="flat" cmpd="sng" algn="ctr">
-                      <a:solidFill>
-                        <a:srgbClr val="D9E0EA"/>
-                      </a:solidFill>
-                      <a:prstDash val="solid"/>
-                      <a:round/>
-                      <a:headEnd type="none" w="med" len="med"/>
-                      <a:tailEnd type="none" w="med" len="med"/>
-                    </a:lnB>
-                    <a:solidFill>
-                      <a:schemeClr val="bg1"/>
+                    <a:lnL w="0" cap="flat" cmpd="sng" algn="ctr">
+                      <a:noFill/>
+                    </a:lnL>
+                    <a:lnR w="0" cap="flat" cmpd="sng" algn="ctr">
+                      <a:noFill/>
+                    </a:lnR>
+                    <a:lnT w="0" cap="flat" cmpd="sng" algn="ctr">
+                      <a:noFill/>
+                    </a:lnT>
+                    <a:lnB w="9525" cap="flat" cmpd="sng" algn="ctr">
+                      <a:solidFill>
+                        <a:srgbClr val="D9E0EA"/>
+                      </a:solidFill>
+                      <a:prstDash val="solid"/>
+                      <a:round/>
+                      <a:headEnd type="none" w="med" len="med"/>
+                      <a:tailEnd type="none" w="med" len="med"/>
+                    </a:lnB>
+                    <a:solidFill>
+                      <a:srgbClr val="FFFFFF"/>
                     </a:solidFill>
                   </a:tcPr>
                 </a:tc>
@@ -5236,44 +4271,26 @@
                     </a:p>
                   </a:txBody>
                   <a:tcPr marL="45720" marR="45720" marT="22860" marB="22860" anchor="ctr">
-                    <a:lnL w="6350" cap="flat" cmpd="sng" algn="ctr">
-                      <a:solidFill>
-                        <a:srgbClr val="D9E0EA"/>
-                      </a:solidFill>
-                      <a:prstDash val="solid"/>
-                      <a:round/>
-                      <a:headEnd type="none" w="med" len="med"/>
-                      <a:tailEnd type="none" w="med" len="med"/>
-                    </a:lnL>
-                    <a:lnR w="6350" cap="flat" cmpd="sng" algn="ctr">
-                      <a:solidFill>
-                        <a:srgbClr val="D9E0EA"/>
-                      </a:solidFill>
-                      <a:prstDash val="solid"/>
-                      <a:round/>
-                      <a:headEnd type="none" w="med" len="med"/>
-                      <a:tailEnd type="none" w="med" len="med"/>
-                    </a:lnR>
-                    <a:lnT w="6350" cap="flat" cmpd="sng" algn="ctr">
-                      <a:solidFill>
-                        <a:srgbClr val="D9E0EA"/>
-                      </a:solidFill>
-                      <a:prstDash val="solid"/>
-                      <a:round/>
-                      <a:headEnd type="none" w="med" len="med"/>
-                      <a:tailEnd type="none" w="med" len="med"/>
-                    </a:lnT>
-                    <a:lnB w="6350" cap="flat" cmpd="sng" algn="ctr">
-                      <a:solidFill>
-                        <a:srgbClr val="D9E0EA"/>
-                      </a:solidFill>
-                      <a:prstDash val="solid"/>
-                      <a:round/>
-                      <a:headEnd type="none" w="med" len="med"/>
-                      <a:tailEnd type="none" w="med" len="med"/>
-                    </a:lnB>
-                    <a:solidFill>
-                      <a:schemeClr val="bg1"/>
+                    <a:lnL w="0" cap="flat" cmpd="sng" algn="ctr">
+                      <a:noFill/>
+                    </a:lnL>
+                    <a:lnR w="0" cap="flat" cmpd="sng" algn="ctr">
+                      <a:noFill/>
+                    </a:lnR>
+                    <a:lnT w="0" cap="flat" cmpd="sng" algn="ctr">
+                      <a:noFill/>
+                    </a:lnT>
+                    <a:lnB w="9525" cap="flat" cmpd="sng" algn="ctr">
+                      <a:solidFill>
+                        <a:srgbClr val="D9E0EA"/>
+                      </a:solidFill>
+                      <a:prstDash val="solid"/>
+                      <a:round/>
+                      <a:headEnd type="none" w="med" len="med"/>
+                      <a:tailEnd type="none" w="med" len="med"/>
+                    </a:lnB>
+                    <a:solidFill>
+                      <a:srgbClr val="FFFFFF"/>
                     </a:solidFill>
                   </a:tcPr>
                 </a:tc>
@@ -5304,59 +4321,41 @@
                     </a:p>
                   </a:txBody>
                   <a:tcPr marL="45720" marR="45720" marT="22860" marB="22860" anchor="ctr">
-                    <a:lnL w="6350" cap="flat" cmpd="sng" algn="ctr">
-                      <a:solidFill>
-                        <a:srgbClr val="D9E0EA"/>
-                      </a:solidFill>
-                      <a:prstDash val="solid"/>
-                      <a:round/>
-                      <a:headEnd type="none" w="med" len="med"/>
-                      <a:tailEnd type="none" w="med" len="med"/>
-                    </a:lnL>
-                    <a:lnR w="6350" cap="flat" cmpd="sng" algn="ctr">
-                      <a:solidFill>
-                        <a:srgbClr val="D9E0EA"/>
-                      </a:solidFill>
-                      <a:prstDash val="solid"/>
-                      <a:round/>
-                      <a:headEnd type="none" w="med" len="med"/>
-                      <a:tailEnd type="none" w="med" len="med"/>
-                    </a:lnR>
-                    <a:lnT w="6350" cap="flat" cmpd="sng" algn="ctr">
-                      <a:solidFill>
-                        <a:srgbClr val="D9E0EA"/>
-                      </a:solidFill>
-                      <a:prstDash val="solid"/>
-                      <a:round/>
-                      <a:headEnd type="none" w="med" len="med"/>
-                      <a:tailEnd type="none" w="med" len="med"/>
-                    </a:lnT>
-                    <a:lnB w="6350" cap="flat" cmpd="sng" algn="ctr">
-                      <a:solidFill>
-                        <a:srgbClr val="D9E0EA"/>
-                      </a:solidFill>
-                      <a:prstDash val="solid"/>
-                      <a:round/>
-                      <a:headEnd type="none" w="med" len="med"/>
-                      <a:tailEnd type="none" w="med" len="med"/>
-                    </a:lnB>
-                    <a:solidFill>
-                      <a:schemeClr val="bg1"/>
-                    </a:solidFill>
-                  </a:tcPr>
-                </a:tc>
-                <a:tc>
-                  <a:txBody>
-                    <a:bodyPr/>
-                    <a:lstStyle/>
-                    <a:p>
-                      <a:pPr indent="0" marL="0">
-                        <a:buNone/>
-                      </a:pPr>
-                      <a:r>
-                        <a:rPr lang="en-US" sz="750" dirty="0">
-                          <a:solidFill>
-                            <a:schemeClr val="accent5"/>
+                    <a:lnL w="0" cap="flat" cmpd="sng" algn="ctr">
+                      <a:noFill/>
+                    </a:lnL>
+                    <a:lnR w="0" cap="flat" cmpd="sng" algn="ctr">
+                      <a:noFill/>
+                    </a:lnR>
+                    <a:lnT w="0" cap="flat" cmpd="sng" algn="ctr">
+                      <a:noFill/>
+                    </a:lnT>
+                    <a:lnB w="9525" cap="flat" cmpd="sng" algn="ctr">
+                      <a:solidFill>
+                        <a:srgbClr val="D9E0EA"/>
+                      </a:solidFill>
+                      <a:prstDash val="solid"/>
+                      <a:round/>
+                      <a:headEnd type="none" w="med" len="med"/>
+                      <a:tailEnd type="none" w="med" len="med"/>
+                    </a:lnB>
+                    <a:solidFill>
+                      <a:srgbClr val="FFFFFF"/>
+                    </a:solidFill>
+                  </a:tcPr>
+                </a:tc>
+                <a:tc>
+                  <a:txBody>
+                    <a:bodyPr/>
+                    <a:lstStyle/>
+                    <a:p>
+                      <a:pPr indent="0" marL="0">
+                        <a:buNone/>
+                      </a:pPr>
+                      <a:r>
+                        <a:rPr lang="en-US" sz="750" b="1" dirty="0">
+                          <a:solidFill>
+                            <a:schemeClr val="accent1"/>
                           </a:solidFill>
                           <a:latin typeface="Calibri" pitchFamily="34" charset="0"/>
                           <a:ea typeface="Calibri" pitchFamily="34" charset="-122"/>
@@ -5372,44 +4371,26 @@
                     </a:p>
                   </a:txBody>
                   <a:tcPr marL="45720" marR="45720" marT="22860" marB="22860" anchor="ctr">
-                    <a:lnL w="6350" cap="flat" cmpd="sng" algn="ctr">
-                      <a:solidFill>
-                        <a:srgbClr val="D9E0EA"/>
-                      </a:solidFill>
-                      <a:prstDash val="solid"/>
-                      <a:round/>
-                      <a:headEnd type="none" w="med" len="med"/>
-                      <a:tailEnd type="none" w="med" len="med"/>
-                    </a:lnL>
-                    <a:lnR w="6350" cap="flat" cmpd="sng" algn="ctr">
-                      <a:solidFill>
-                        <a:srgbClr val="D9E0EA"/>
-                      </a:solidFill>
-                      <a:prstDash val="solid"/>
-                      <a:round/>
-                      <a:headEnd type="none" w="med" len="med"/>
-                      <a:tailEnd type="none" w="med" len="med"/>
-                    </a:lnR>
-                    <a:lnT w="6350" cap="flat" cmpd="sng" algn="ctr">
-                      <a:solidFill>
-                        <a:srgbClr val="D9E0EA"/>
-                      </a:solidFill>
-                      <a:prstDash val="solid"/>
-                      <a:round/>
-                      <a:headEnd type="none" w="med" len="med"/>
-                      <a:tailEnd type="none" w="med" len="med"/>
-                    </a:lnT>
-                    <a:lnB w="6350" cap="flat" cmpd="sng" algn="ctr">
-                      <a:solidFill>
-                        <a:srgbClr val="D9E0EA"/>
-                      </a:solidFill>
-                      <a:prstDash val="solid"/>
-                      <a:round/>
-                      <a:headEnd type="none" w="med" len="med"/>
-                      <a:tailEnd type="none" w="med" len="med"/>
-                    </a:lnB>
-                    <a:solidFill>
-                      <a:schemeClr val="bg1"/>
+                    <a:lnL w="0" cap="flat" cmpd="sng" algn="ctr">
+                      <a:noFill/>
+                    </a:lnL>
+                    <a:lnR w="0" cap="flat" cmpd="sng" algn="ctr">
+                      <a:noFill/>
+                    </a:lnR>
+                    <a:lnT w="0" cap="flat" cmpd="sng" algn="ctr">
+                      <a:noFill/>
+                    </a:lnT>
+                    <a:lnB w="9525" cap="flat" cmpd="sng" algn="ctr">
+                      <a:solidFill>
+                        <a:srgbClr val="D9E0EA"/>
+                      </a:solidFill>
+                      <a:prstDash val="solid"/>
+                      <a:round/>
+                      <a:headEnd type="none" w="med" len="med"/>
+                      <a:tailEnd type="none" w="med" len="med"/>
+                    </a:lnB>
+                    <a:solidFill>
+                      <a:srgbClr val="FFFFFF"/>
                     </a:solidFill>
                   </a:tcPr>
                 </a:tc>
@@ -5455,7 +4436,7 @@
                         <a:buNone/>
                       </a:pPr>
                       <a:r>
-                        <a:rPr lang="en-US" sz="850" b="1" dirty="0">
+                        <a:rPr lang="en-US" sz="800" b="1" spc="100" kern="0" dirty="0">
                           <a:solidFill>
                             <a:schemeClr val="bg1"/>
                           </a:solidFill>
@@ -5463,44 +4444,26 @@
                           <a:ea typeface="Calibri" pitchFamily="34" charset="-122"/>
                           <a:cs typeface="Calibri" pitchFamily="34" charset="-120"/>
                         </a:rPr>
-                        <a:t>Observación</a:t>
-                      </a:r>
-                      <a:endParaRPr lang="en-US" sz="850" dirty="0">
-                        <a:latin typeface="Calibri" charset="0"/>
-                        <a:ea typeface="Calibri" charset="0"/>
-                        <a:cs typeface="Calibri" charset="0"/>
-                      </a:endParaRPr>
-                    </a:p>
-                  </a:txBody>
-                  <a:tcPr marL="45720" marR="45720" marT="22860" marB="22860" anchor="ctr">
-                    <a:lnL w="6350" cap="flat" cmpd="sng" algn="ctr">
-                      <a:solidFill>
-                        <a:srgbClr val="D9E0EA"/>
-                      </a:solidFill>
-                      <a:prstDash val="solid"/>
-                      <a:round/>
-                      <a:headEnd type="none" w="med" len="med"/>
-                      <a:tailEnd type="none" w="med" len="med"/>
-                    </a:lnL>
-                    <a:lnR w="6350" cap="flat" cmpd="sng" algn="ctr">
-                      <a:solidFill>
-                        <a:srgbClr val="D9E0EA"/>
-                      </a:solidFill>
-                      <a:prstDash val="solid"/>
-                      <a:round/>
-                      <a:headEnd type="none" w="med" len="med"/>
-                      <a:tailEnd type="none" w="med" len="med"/>
-                    </a:lnR>
-                    <a:lnT w="6350" cap="flat" cmpd="sng" algn="ctr">
-                      <a:solidFill>
-                        <a:srgbClr val="D9E0EA"/>
-                      </a:solidFill>
-                      <a:prstDash val="solid"/>
-                      <a:round/>
-                      <a:headEnd type="none" w="med" len="med"/>
-                      <a:tailEnd type="none" w="med" len="med"/>
-                    </a:lnT>
-                    <a:lnB w="6350" cap="flat" cmpd="sng" algn="ctr">
+                        <a:t>OBSERVACIÓN</a:t>
+                      </a:r>
+                      <a:endParaRPr lang="en-US" sz="800" dirty="0">
+                        <a:latin typeface="Calibri" charset="0"/>
+                        <a:ea typeface="Calibri" charset="0"/>
+                        <a:cs typeface="Calibri" charset="0"/>
+                      </a:endParaRPr>
+                    </a:p>
+                  </a:txBody>
+                  <a:tcPr marL="45720" marR="45720" marT="22860" marB="22860" anchor="ctr">
+                    <a:lnL w="0" cap="flat" cmpd="sng" algn="ctr">
+                      <a:noFill/>
+                    </a:lnL>
+                    <a:lnR w="0" cap="flat" cmpd="sng" algn="ctr">
+                      <a:noFill/>
+                    </a:lnR>
+                    <a:lnT w="0" cap="flat" cmpd="sng" algn="ctr">
+                      <a:noFill/>
+                    </a:lnT>
+                    <a:lnB w="9525" cap="flat" cmpd="sng" algn="ctr">
                       <a:solidFill>
                         <a:srgbClr val="D9E0EA"/>
                       </a:solidFill>
@@ -5523,7 +4486,7 @@
                         <a:buNone/>
                       </a:pPr>
                       <a:r>
-                        <a:rPr lang="en-US" sz="850" b="1" dirty="0">
+                        <a:rPr lang="en-US" sz="800" b="1" spc="100" kern="0" dirty="0">
                           <a:solidFill>
                             <a:schemeClr val="bg1"/>
                           </a:solidFill>
@@ -5531,44 +4494,26 @@
                           <a:ea typeface="Calibri" pitchFamily="34" charset="-122"/>
                           <a:cs typeface="Calibri" pitchFamily="34" charset="-120"/>
                         </a:rPr>
-                        <a:t>Comentarios</a:t>
-                      </a:r>
-                      <a:endParaRPr lang="en-US" sz="850" dirty="0">
-                        <a:latin typeface="Calibri" charset="0"/>
-                        <a:ea typeface="Calibri" charset="0"/>
-                        <a:cs typeface="Calibri" charset="0"/>
-                      </a:endParaRPr>
-                    </a:p>
-                  </a:txBody>
-                  <a:tcPr marL="45720" marR="45720" marT="22860" marB="22860" anchor="ctr">
-                    <a:lnL w="6350" cap="flat" cmpd="sng" algn="ctr">
-                      <a:solidFill>
-                        <a:srgbClr val="D9E0EA"/>
-                      </a:solidFill>
-                      <a:prstDash val="solid"/>
-                      <a:round/>
-                      <a:headEnd type="none" w="med" len="med"/>
-                      <a:tailEnd type="none" w="med" len="med"/>
-                    </a:lnL>
-                    <a:lnR w="6350" cap="flat" cmpd="sng" algn="ctr">
-                      <a:solidFill>
-                        <a:srgbClr val="D9E0EA"/>
-                      </a:solidFill>
-                      <a:prstDash val="solid"/>
-                      <a:round/>
-                      <a:headEnd type="none" w="med" len="med"/>
-                      <a:tailEnd type="none" w="med" len="med"/>
-                    </a:lnR>
-                    <a:lnT w="6350" cap="flat" cmpd="sng" algn="ctr">
-                      <a:solidFill>
-                        <a:srgbClr val="D9E0EA"/>
-                      </a:solidFill>
-                      <a:prstDash val="solid"/>
-                      <a:round/>
-                      <a:headEnd type="none" w="med" len="med"/>
-                      <a:tailEnd type="none" w="med" len="med"/>
-                    </a:lnT>
-                    <a:lnB w="6350" cap="flat" cmpd="sng" algn="ctr">
+                        <a:t>COMENTARIOS</a:t>
+                      </a:r>
+                      <a:endParaRPr lang="en-US" sz="800" dirty="0">
+                        <a:latin typeface="Calibri" charset="0"/>
+                        <a:ea typeface="Calibri" charset="0"/>
+                        <a:cs typeface="Calibri" charset="0"/>
+                      </a:endParaRPr>
+                    </a:p>
+                  </a:txBody>
+                  <a:tcPr marL="45720" marR="45720" marT="22860" marB="22860" anchor="ctr">
+                    <a:lnL w="0" cap="flat" cmpd="sng" algn="ctr">
+                      <a:noFill/>
+                    </a:lnL>
+                    <a:lnR w="0" cap="flat" cmpd="sng" algn="ctr">
+                      <a:noFill/>
+                    </a:lnR>
+                    <a:lnT w="0" cap="flat" cmpd="sng" algn="ctr">
+                      <a:noFill/>
+                    </a:lnT>
+                    <a:lnB w="9525" cap="flat" cmpd="sng" algn="ctr">
                       <a:solidFill>
                         <a:srgbClr val="D9E0EA"/>
                       </a:solidFill>
@@ -5591,7 +4536,7 @@
                         <a:buNone/>
                       </a:pPr>
                       <a:r>
-                        <a:rPr lang="en-US" sz="850" b="1" dirty="0">
+                        <a:rPr lang="en-US" sz="800" b="1" spc="100" kern="0" dirty="0">
                           <a:solidFill>
                             <a:schemeClr val="bg1"/>
                           </a:solidFill>
@@ -5599,44 +4544,26 @@
                           <a:ea typeface="Calibri" pitchFamily="34" charset="-122"/>
                           <a:cs typeface="Calibri" pitchFamily="34" charset="-120"/>
                         </a:rPr>
-                        <a:t>Responsable</a:t>
-                      </a:r>
-                      <a:endParaRPr lang="en-US" sz="850" dirty="0">
-                        <a:latin typeface="Calibri" charset="0"/>
-                        <a:ea typeface="Calibri" charset="0"/>
-                        <a:cs typeface="Calibri" charset="0"/>
-                      </a:endParaRPr>
-                    </a:p>
-                  </a:txBody>
-                  <a:tcPr marL="45720" marR="45720" marT="22860" marB="22860" anchor="ctr">
-                    <a:lnL w="6350" cap="flat" cmpd="sng" algn="ctr">
-                      <a:solidFill>
-                        <a:srgbClr val="D9E0EA"/>
-                      </a:solidFill>
-                      <a:prstDash val="solid"/>
-                      <a:round/>
-                      <a:headEnd type="none" w="med" len="med"/>
-                      <a:tailEnd type="none" w="med" len="med"/>
-                    </a:lnL>
-                    <a:lnR w="6350" cap="flat" cmpd="sng" algn="ctr">
-                      <a:solidFill>
-                        <a:srgbClr val="D9E0EA"/>
-                      </a:solidFill>
-                      <a:prstDash val="solid"/>
-                      <a:round/>
-                      <a:headEnd type="none" w="med" len="med"/>
-                      <a:tailEnd type="none" w="med" len="med"/>
-                    </a:lnR>
-                    <a:lnT w="6350" cap="flat" cmpd="sng" algn="ctr">
-                      <a:solidFill>
-                        <a:srgbClr val="D9E0EA"/>
-                      </a:solidFill>
-                      <a:prstDash val="solid"/>
-                      <a:round/>
-                      <a:headEnd type="none" w="med" len="med"/>
-                      <a:tailEnd type="none" w="med" len="med"/>
-                    </a:lnT>
-                    <a:lnB w="6350" cap="flat" cmpd="sng" algn="ctr">
+                        <a:t>RESPONSABLE</a:t>
+                      </a:r>
+                      <a:endParaRPr lang="en-US" sz="800" dirty="0">
+                        <a:latin typeface="Calibri" charset="0"/>
+                        <a:ea typeface="Calibri" charset="0"/>
+                        <a:cs typeface="Calibri" charset="0"/>
+                      </a:endParaRPr>
+                    </a:p>
+                  </a:txBody>
+                  <a:tcPr marL="45720" marR="45720" marT="22860" marB="22860" anchor="ctr">
+                    <a:lnL w="0" cap="flat" cmpd="sng" algn="ctr">
+                      <a:noFill/>
+                    </a:lnL>
+                    <a:lnR w="0" cap="flat" cmpd="sng" algn="ctr">
+                      <a:noFill/>
+                    </a:lnR>
+                    <a:lnT w="0" cap="flat" cmpd="sng" algn="ctr">
+                      <a:noFill/>
+                    </a:lnT>
+                    <a:lnB w="9525" cap="flat" cmpd="sng" algn="ctr">
                       <a:solidFill>
                         <a:srgbClr val="D9E0EA"/>
                       </a:solidFill>
@@ -5661,7 +4588,7 @@
                         <a:buNone/>
                       </a:pPr>
                       <a:r>
-                        <a:rPr lang="en-US" sz="800" b="1" spc="100" kern="0" dirty="0">
+                        <a:rPr lang="en-US" sz="750" b="1" spc="100" kern="0" dirty="0">
                           <a:solidFill>
                             <a:schemeClr val="accent1"/>
                           </a:solidFill>
@@ -5671,42 +4598,24 @@
                         </a:rPr>
                         <a:t>C.1 CRÉDITO, OPERACIONAL Y TECNOLÓGICO · CIRCULAR 16572 (10/09/2025)</a:t>
                       </a:r>
-                      <a:endParaRPr lang="en-US" sz="800" dirty="0">
-                        <a:latin typeface="Calibri" charset="0"/>
-                        <a:ea typeface="Calibri" charset="0"/>
-                        <a:cs typeface="Calibri" charset="0"/>
-                      </a:endParaRPr>
-                    </a:p>
-                  </a:txBody>
-                  <a:tcPr marL="45720" marR="45720" marT="22860" marB="22860" anchor="ctr">
-                    <a:lnL w="6350" cap="flat" cmpd="sng" algn="ctr">
-                      <a:solidFill>
-                        <a:srgbClr val="D9E0EA"/>
-                      </a:solidFill>
-                      <a:prstDash val="solid"/>
-                      <a:round/>
-                      <a:headEnd type="none" w="med" len="med"/>
-                      <a:tailEnd type="none" w="med" len="med"/>
-                    </a:lnL>
-                    <a:lnR w="6350" cap="flat" cmpd="sng" algn="ctr">
-                      <a:solidFill>
-                        <a:srgbClr val="D9E0EA"/>
-                      </a:solidFill>
-                      <a:prstDash val="solid"/>
-                      <a:round/>
-                      <a:headEnd type="none" w="med" len="med"/>
-                      <a:tailEnd type="none" w="med" len="med"/>
-                    </a:lnR>
-                    <a:lnT w="6350" cap="flat" cmpd="sng" algn="ctr">
-                      <a:solidFill>
-                        <a:srgbClr val="D9E0EA"/>
-                      </a:solidFill>
-                      <a:prstDash val="solid"/>
-                      <a:round/>
-                      <a:headEnd type="none" w="med" len="med"/>
-                      <a:tailEnd type="none" w="med" len="med"/>
-                    </a:lnT>
-                    <a:lnB w="6350" cap="flat" cmpd="sng" algn="ctr">
+                      <a:endParaRPr lang="en-US" sz="750" dirty="0">
+                        <a:latin typeface="Calibri" charset="0"/>
+                        <a:ea typeface="Calibri" charset="0"/>
+                        <a:cs typeface="Calibri" charset="0"/>
+                      </a:endParaRPr>
+                    </a:p>
+                  </a:txBody>
+                  <a:tcPr marL="45720" marR="45720" marT="22860" marB="22860" anchor="ctr">
+                    <a:lnL w="0" cap="flat" cmpd="sng" algn="ctr">
+                      <a:noFill/>
+                    </a:lnL>
+                    <a:lnR w="0" cap="flat" cmpd="sng" algn="ctr">
+                      <a:noFill/>
+                    </a:lnR>
+                    <a:lnT w="0" cap="flat" cmpd="sng" algn="ctr">
+                      <a:noFill/>
+                    </a:lnT>
+                    <a:lnB w="9525" cap="flat" cmpd="sng" algn="ctr">
                       <a:solidFill>
                         <a:srgbClr val="D9E0EA"/>
                       </a:solidFill>
@@ -5779,44 +4688,26 @@
                     </a:p>
                   </a:txBody>
                   <a:tcPr marL="45720" marR="45720" marT="22860" marB="22860" anchor="ctr">
-                    <a:lnL w="6350" cap="flat" cmpd="sng" algn="ctr">
-                      <a:solidFill>
-                        <a:srgbClr val="D9E0EA"/>
-                      </a:solidFill>
-                      <a:prstDash val="solid"/>
-                      <a:round/>
-                      <a:headEnd type="none" w="med" len="med"/>
-                      <a:tailEnd type="none" w="med" len="med"/>
-                    </a:lnL>
-                    <a:lnR w="6350" cap="flat" cmpd="sng" algn="ctr">
-                      <a:solidFill>
-                        <a:srgbClr val="D9E0EA"/>
-                      </a:solidFill>
-                      <a:prstDash val="solid"/>
-                      <a:round/>
-                      <a:headEnd type="none" w="med" len="med"/>
-                      <a:tailEnd type="none" w="med" len="med"/>
-                    </a:lnR>
-                    <a:lnT w="6350" cap="flat" cmpd="sng" algn="ctr">
-                      <a:solidFill>
-                        <a:srgbClr val="D9E0EA"/>
-                      </a:solidFill>
-                      <a:prstDash val="solid"/>
-                      <a:round/>
-                      <a:headEnd type="none" w="med" len="med"/>
-                      <a:tailEnd type="none" w="med" len="med"/>
-                    </a:lnT>
-                    <a:lnB w="6350" cap="flat" cmpd="sng" algn="ctr">
-                      <a:solidFill>
-                        <a:srgbClr val="D9E0EA"/>
-                      </a:solidFill>
-                      <a:prstDash val="solid"/>
-                      <a:round/>
-                      <a:headEnd type="none" w="med" len="med"/>
-                      <a:tailEnd type="none" w="med" len="med"/>
-                    </a:lnB>
-                    <a:solidFill>
-                      <a:schemeClr val="bg1"/>
+                    <a:lnL w="0" cap="flat" cmpd="sng" algn="ctr">
+                      <a:noFill/>
+                    </a:lnL>
+                    <a:lnR w="0" cap="flat" cmpd="sng" algn="ctr">
+                      <a:noFill/>
+                    </a:lnR>
+                    <a:lnT w="0" cap="flat" cmpd="sng" algn="ctr">
+                      <a:noFill/>
+                    </a:lnT>
+                    <a:lnB w="9525" cap="flat" cmpd="sng" algn="ctr">
+                      <a:solidFill>
+                        <a:srgbClr val="D9E0EA"/>
+                      </a:solidFill>
+                      <a:prstDash val="solid"/>
+                      <a:round/>
+                      <a:headEnd type="none" w="med" len="med"/>
+                      <a:tailEnd type="none" w="med" len="med"/>
+                    </a:lnB>
+                    <a:solidFill>
+                      <a:srgbClr val="FDF4E3"/>
                     </a:solidFill>
                   </a:tcPr>
                 </a:tc>
@@ -5847,59 +4738,41 @@
                     </a:p>
                   </a:txBody>
                   <a:tcPr marL="45720" marR="45720" marT="22860" marB="22860" anchor="ctr">
-                    <a:lnL w="6350" cap="flat" cmpd="sng" algn="ctr">
-                      <a:solidFill>
-                        <a:srgbClr val="D9E0EA"/>
-                      </a:solidFill>
-                      <a:prstDash val="solid"/>
-                      <a:round/>
-                      <a:headEnd type="none" w="med" len="med"/>
-                      <a:tailEnd type="none" w="med" len="med"/>
-                    </a:lnL>
-                    <a:lnR w="6350" cap="flat" cmpd="sng" algn="ctr">
-                      <a:solidFill>
-                        <a:srgbClr val="D9E0EA"/>
-                      </a:solidFill>
-                      <a:prstDash val="solid"/>
-                      <a:round/>
-                      <a:headEnd type="none" w="med" len="med"/>
-                      <a:tailEnd type="none" w="med" len="med"/>
-                    </a:lnR>
-                    <a:lnT w="6350" cap="flat" cmpd="sng" algn="ctr">
-                      <a:solidFill>
-                        <a:srgbClr val="D9E0EA"/>
-                      </a:solidFill>
-                      <a:prstDash val="solid"/>
-                      <a:round/>
-                      <a:headEnd type="none" w="med" len="med"/>
-                      <a:tailEnd type="none" w="med" len="med"/>
-                    </a:lnT>
-                    <a:lnB w="6350" cap="flat" cmpd="sng" algn="ctr">
-                      <a:solidFill>
-                        <a:srgbClr val="D9E0EA"/>
-                      </a:solidFill>
-                      <a:prstDash val="solid"/>
-                      <a:round/>
-                      <a:headEnd type="none" w="med" len="med"/>
-                      <a:tailEnd type="none" w="med" len="med"/>
-                    </a:lnB>
-                    <a:solidFill>
-                      <a:schemeClr val="bg1"/>
-                    </a:solidFill>
-                  </a:tcPr>
-                </a:tc>
-                <a:tc>
-                  <a:txBody>
-                    <a:bodyPr/>
-                    <a:lstStyle/>
-                    <a:p>
-                      <a:pPr indent="0" marL="0">
-                        <a:buNone/>
-                      </a:pPr>
-                      <a:r>
-                        <a:rPr lang="en-US" sz="750" dirty="0">
-                          <a:solidFill>
-                            <a:schemeClr val="accent5"/>
+                    <a:lnL w="0" cap="flat" cmpd="sng" algn="ctr">
+                      <a:noFill/>
+                    </a:lnL>
+                    <a:lnR w="0" cap="flat" cmpd="sng" algn="ctr">
+                      <a:noFill/>
+                    </a:lnR>
+                    <a:lnT w="0" cap="flat" cmpd="sng" algn="ctr">
+                      <a:noFill/>
+                    </a:lnT>
+                    <a:lnB w="9525" cap="flat" cmpd="sng" algn="ctr">
+                      <a:solidFill>
+                        <a:srgbClr val="D9E0EA"/>
+                      </a:solidFill>
+                      <a:prstDash val="solid"/>
+                      <a:round/>
+                      <a:headEnd type="none" w="med" len="med"/>
+                      <a:tailEnd type="none" w="med" len="med"/>
+                    </a:lnB>
+                    <a:solidFill>
+                      <a:srgbClr val="FFFFFF"/>
+                    </a:solidFill>
+                  </a:tcPr>
+                </a:tc>
+                <a:tc>
+                  <a:txBody>
+                    <a:bodyPr/>
+                    <a:lstStyle/>
+                    <a:p>
+                      <a:pPr indent="0" marL="0">
+                        <a:buNone/>
+                      </a:pPr>
+                      <a:r>
+                        <a:rPr lang="en-US" sz="750" b="1" dirty="0">
+                          <a:solidFill>
+                            <a:schemeClr val="accent1"/>
                           </a:solidFill>
                           <a:latin typeface="Calibri" pitchFamily="34" charset="0"/>
                           <a:ea typeface="Calibri" pitchFamily="34" charset="-122"/>
@@ -5915,44 +4788,26 @@
                     </a:p>
                   </a:txBody>
                   <a:tcPr marL="45720" marR="45720" marT="22860" marB="22860" anchor="ctr">
-                    <a:lnL w="6350" cap="flat" cmpd="sng" algn="ctr">
-                      <a:solidFill>
-                        <a:srgbClr val="D9E0EA"/>
-                      </a:solidFill>
-                      <a:prstDash val="solid"/>
-                      <a:round/>
-                      <a:headEnd type="none" w="med" len="med"/>
-                      <a:tailEnd type="none" w="med" len="med"/>
-                    </a:lnL>
-                    <a:lnR w="6350" cap="flat" cmpd="sng" algn="ctr">
-                      <a:solidFill>
-                        <a:srgbClr val="D9E0EA"/>
-                      </a:solidFill>
-                      <a:prstDash val="solid"/>
-                      <a:round/>
-                      <a:headEnd type="none" w="med" len="med"/>
-                      <a:tailEnd type="none" w="med" len="med"/>
-                    </a:lnR>
-                    <a:lnT w="6350" cap="flat" cmpd="sng" algn="ctr">
-                      <a:solidFill>
-                        <a:srgbClr val="D9E0EA"/>
-                      </a:solidFill>
-                      <a:prstDash val="solid"/>
-                      <a:round/>
-                      <a:headEnd type="none" w="med" len="med"/>
-                      <a:tailEnd type="none" w="med" len="med"/>
-                    </a:lnT>
-                    <a:lnB w="6350" cap="flat" cmpd="sng" algn="ctr">
-                      <a:solidFill>
-                        <a:srgbClr val="D9E0EA"/>
-                      </a:solidFill>
-                      <a:prstDash val="solid"/>
-                      <a:round/>
-                      <a:headEnd type="none" w="med" len="med"/>
-                      <a:tailEnd type="none" w="med" len="med"/>
-                    </a:lnB>
-                    <a:solidFill>
-                      <a:schemeClr val="bg1"/>
+                    <a:lnL w="0" cap="flat" cmpd="sng" algn="ctr">
+                      <a:noFill/>
+                    </a:lnL>
+                    <a:lnR w="0" cap="flat" cmpd="sng" algn="ctr">
+                      <a:noFill/>
+                    </a:lnR>
+                    <a:lnT w="0" cap="flat" cmpd="sng" algn="ctr">
+                      <a:noFill/>
+                    </a:lnT>
+                    <a:lnB w="9525" cap="flat" cmpd="sng" algn="ctr">
+                      <a:solidFill>
+                        <a:srgbClr val="D9E0EA"/>
+                      </a:solidFill>
+                      <a:prstDash val="solid"/>
+                      <a:round/>
+                      <a:headEnd type="none" w="med" len="med"/>
+                      <a:tailEnd type="none" w="med" len="med"/>
+                    </a:lnB>
+                    <a:solidFill>
+                      <a:srgbClr val="FFFFFF"/>
                     </a:solidFill>
                   </a:tcPr>
                 </a:tc>
@@ -6009,44 +4864,26 @@
                     </a:p>
                   </a:txBody>
                   <a:tcPr marL="45720" marR="45720" marT="22860" marB="22860" anchor="ctr">
-                    <a:lnL w="6350" cap="flat" cmpd="sng" algn="ctr">
-                      <a:solidFill>
-                        <a:srgbClr val="D9E0EA"/>
-                      </a:solidFill>
-                      <a:prstDash val="solid"/>
-                      <a:round/>
-                      <a:headEnd type="none" w="med" len="med"/>
-                      <a:tailEnd type="none" w="med" len="med"/>
-                    </a:lnL>
-                    <a:lnR w="6350" cap="flat" cmpd="sng" algn="ctr">
-                      <a:solidFill>
-                        <a:srgbClr val="D9E0EA"/>
-                      </a:solidFill>
-                      <a:prstDash val="solid"/>
-                      <a:round/>
-                      <a:headEnd type="none" w="med" len="med"/>
-                      <a:tailEnd type="none" w="med" len="med"/>
-                    </a:lnR>
-                    <a:lnT w="6350" cap="flat" cmpd="sng" algn="ctr">
-                      <a:solidFill>
-                        <a:srgbClr val="D9E0EA"/>
-                      </a:solidFill>
-                      <a:prstDash val="solid"/>
-                      <a:round/>
-                      <a:headEnd type="none" w="med" len="med"/>
-                      <a:tailEnd type="none" w="med" len="med"/>
-                    </a:lnT>
-                    <a:lnB w="6350" cap="flat" cmpd="sng" algn="ctr">
-                      <a:solidFill>
-                        <a:srgbClr val="D9E0EA"/>
-                      </a:solidFill>
-                      <a:prstDash val="solid"/>
-                      <a:round/>
-                      <a:headEnd type="none" w="med" len="med"/>
-                      <a:tailEnd type="none" w="med" len="med"/>
-                    </a:lnB>
-                    <a:solidFill>
-                      <a:schemeClr val="bg1"/>
+                    <a:lnL w="0" cap="flat" cmpd="sng" algn="ctr">
+                      <a:noFill/>
+                    </a:lnL>
+                    <a:lnR w="0" cap="flat" cmpd="sng" algn="ctr">
+                      <a:noFill/>
+                    </a:lnR>
+                    <a:lnT w="0" cap="flat" cmpd="sng" algn="ctr">
+                      <a:noFill/>
+                    </a:lnT>
+                    <a:lnB w="9525" cap="flat" cmpd="sng" algn="ctr">
+                      <a:solidFill>
+                        <a:srgbClr val="D9E0EA"/>
+                      </a:solidFill>
+                      <a:prstDash val="solid"/>
+                      <a:round/>
+                      <a:headEnd type="none" w="med" len="med"/>
+                      <a:tailEnd type="none" w="med" len="med"/>
+                    </a:lnB>
+                    <a:solidFill>
+                      <a:srgbClr val="FBEAE8"/>
                     </a:solidFill>
                   </a:tcPr>
                 </a:tc>
@@ -6077,59 +4914,41 @@
                     </a:p>
                   </a:txBody>
                   <a:tcPr marL="45720" marR="45720" marT="22860" marB="22860" anchor="ctr">
-                    <a:lnL w="6350" cap="flat" cmpd="sng" algn="ctr">
-                      <a:solidFill>
-                        <a:srgbClr val="D9E0EA"/>
-                      </a:solidFill>
-                      <a:prstDash val="solid"/>
-                      <a:round/>
-                      <a:headEnd type="none" w="med" len="med"/>
-                      <a:tailEnd type="none" w="med" len="med"/>
-                    </a:lnL>
-                    <a:lnR w="6350" cap="flat" cmpd="sng" algn="ctr">
-                      <a:solidFill>
-                        <a:srgbClr val="D9E0EA"/>
-                      </a:solidFill>
-                      <a:prstDash val="solid"/>
-                      <a:round/>
-                      <a:headEnd type="none" w="med" len="med"/>
-                      <a:tailEnd type="none" w="med" len="med"/>
-                    </a:lnR>
-                    <a:lnT w="6350" cap="flat" cmpd="sng" algn="ctr">
-                      <a:solidFill>
-                        <a:srgbClr val="D9E0EA"/>
-                      </a:solidFill>
-                      <a:prstDash val="solid"/>
-                      <a:round/>
-                      <a:headEnd type="none" w="med" len="med"/>
-                      <a:tailEnd type="none" w="med" len="med"/>
-                    </a:lnT>
-                    <a:lnB w="6350" cap="flat" cmpd="sng" algn="ctr">
-                      <a:solidFill>
-                        <a:srgbClr val="D9E0EA"/>
-                      </a:solidFill>
-                      <a:prstDash val="solid"/>
-                      <a:round/>
-                      <a:headEnd type="none" w="med" len="med"/>
-                      <a:tailEnd type="none" w="med" len="med"/>
-                    </a:lnB>
-                    <a:solidFill>
-                      <a:schemeClr val="bg1"/>
-                    </a:solidFill>
-                  </a:tcPr>
-                </a:tc>
-                <a:tc>
-                  <a:txBody>
-                    <a:bodyPr/>
-                    <a:lstStyle/>
-                    <a:p>
-                      <a:pPr indent="0" marL="0">
-                        <a:buNone/>
-                      </a:pPr>
-                      <a:r>
-                        <a:rPr lang="en-US" sz="750" dirty="0">
-                          <a:solidFill>
-                            <a:schemeClr val="accent5"/>
+                    <a:lnL w="0" cap="flat" cmpd="sng" algn="ctr">
+                      <a:noFill/>
+                    </a:lnL>
+                    <a:lnR w="0" cap="flat" cmpd="sng" algn="ctr">
+                      <a:noFill/>
+                    </a:lnR>
+                    <a:lnT w="0" cap="flat" cmpd="sng" algn="ctr">
+                      <a:noFill/>
+                    </a:lnT>
+                    <a:lnB w="9525" cap="flat" cmpd="sng" algn="ctr">
+                      <a:solidFill>
+                        <a:srgbClr val="D9E0EA"/>
+                      </a:solidFill>
+                      <a:prstDash val="solid"/>
+                      <a:round/>
+                      <a:headEnd type="none" w="med" len="med"/>
+                      <a:tailEnd type="none" w="med" len="med"/>
+                    </a:lnB>
+                    <a:solidFill>
+                      <a:srgbClr val="FFFFFF"/>
+                    </a:solidFill>
+                  </a:tcPr>
+                </a:tc>
+                <a:tc>
+                  <a:txBody>
+                    <a:bodyPr/>
+                    <a:lstStyle/>
+                    <a:p>
+                      <a:pPr indent="0" marL="0">
+                        <a:buNone/>
+                      </a:pPr>
+                      <a:r>
+                        <a:rPr lang="en-US" sz="750" b="1" dirty="0">
+                          <a:solidFill>
+                            <a:schemeClr val="accent1"/>
                           </a:solidFill>
                           <a:latin typeface="Calibri" pitchFamily="34" charset="0"/>
                           <a:ea typeface="Calibri" pitchFamily="34" charset="-122"/>
@@ -6145,44 +4964,26 @@
                     </a:p>
                   </a:txBody>
                   <a:tcPr marL="45720" marR="45720" marT="22860" marB="22860" anchor="ctr">
-                    <a:lnL w="6350" cap="flat" cmpd="sng" algn="ctr">
-                      <a:solidFill>
-                        <a:srgbClr val="D9E0EA"/>
-                      </a:solidFill>
-                      <a:prstDash val="solid"/>
-                      <a:round/>
-                      <a:headEnd type="none" w="med" len="med"/>
-                      <a:tailEnd type="none" w="med" len="med"/>
-                    </a:lnL>
-                    <a:lnR w="6350" cap="flat" cmpd="sng" algn="ctr">
-                      <a:solidFill>
-                        <a:srgbClr val="D9E0EA"/>
-                      </a:solidFill>
-                      <a:prstDash val="solid"/>
-                      <a:round/>
-                      <a:headEnd type="none" w="med" len="med"/>
-                      <a:tailEnd type="none" w="med" len="med"/>
-                    </a:lnR>
-                    <a:lnT w="6350" cap="flat" cmpd="sng" algn="ctr">
-                      <a:solidFill>
-                        <a:srgbClr val="D9E0EA"/>
-                      </a:solidFill>
-                      <a:prstDash val="solid"/>
-                      <a:round/>
-                      <a:headEnd type="none" w="med" len="med"/>
-                      <a:tailEnd type="none" w="med" len="med"/>
-                    </a:lnT>
-                    <a:lnB w="6350" cap="flat" cmpd="sng" algn="ctr">
-                      <a:solidFill>
-                        <a:srgbClr val="D9E0EA"/>
-                      </a:solidFill>
-                      <a:prstDash val="solid"/>
-                      <a:round/>
-                      <a:headEnd type="none" w="med" len="med"/>
-                      <a:tailEnd type="none" w="med" len="med"/>
-                    </a:lnB>
-                    <a:solidFill>
-                      <a:schemeClr val="bg1"/>
+                    <a:lnL w="0" cap="flat" cmpd="sng" algn="ctr">
+                      <a:noFill/>
+                    </a:lnL>
+                    <a:lnR w="0" cap="flat" cmpd="sng" algn="ctr">
+                      <a:noFill/>
+                    </a:lnR>
+                    <a:lnT w="0" cap="flat" cmpd="sng" algn="ctr">
+                      <a:noFill/>
+                    </a:lnT>
+                    <a:lnB w="9525" cap="flat" cmpd="sng" algn="ctr">
+                      <a:solidFill>
+                        <a:srgbClr val="D9E0EA"/>
+                      </a:solidFill>
+                      <a:prstDash val="solid"/>
+                      <a:round/>
+                      <a:headEnd type="none" w="med" len="med"/>
+                      <a:tailEnd type="none" w="med" len="med"/>
+                    </a:lnB>
+                    <a:solidFill>
+                      <a:srgbClr val="FFFFFF"/>
                     </a:solidFill>
                   </a:tcPr>
                 </a:tc>
@@ -6239,44 +5040,26 @@
                     </a:p>
                   </a:txBody>
                   <a:tcPr marL="45720" marR="45720" marT="22860" marB="22860" anchor="ctr">
-                    <a:lnL w="6350" cap="flat" cmpd="sng" algn="ctr">
-                      <a:solidFill>
-                        <a:srgbClr val="D9E0EA"/>
-                      </a:solidFill>
-                      <a:prstDash val="solid"/>
-                      <a:round/>
-                      <a:headEnd type="none" w="med" len="med"/>
-                      <a:tailEnd type="none" w="med" len="med"/>
-                    </a:lnL>
-                    <a:lnR w="6350" cap="flat" cmpd="sng" algn="ctr">
-                      <a:solidFill>
-                        <a:srgbClr val="D9E0EA"/>
-                      </a:solidFill>
-                      <a:prstDash val="solid"/>
-                      <a:round/>
-                      <a:headEnd type="none" w="med" len="med"/>
-                      <a:tailEnd type="none" w="med" len="med"/>
-                    </a:lnR>
-                    <a:lnT w="6350" cap="flat" cmpd="sng" algn="ctr">
-                      <a:solidFill>
-                        <a:srgbClr val="D9E0EA"/>
-                      </a:solidFill>
-                      <a:prstDash val="solid"/>
-                      <a:round/>
-                      <a:headEnd type="none" w="med" len="med"/>
-                      <a:tailEnd type="none" w="med" len="med"/>
-                    </a:lnT>
-                    <a:lnB w="6350" cap="flat" cmpd="sng" algn="ctr">
-                      <a:solidFill>
-                        <a:srgbClr val="D9E0EA"/>
-                      </a:solidFill>
-                      <a:prstDash val="solid"/>
-                      <a:round/>
-                      <a:headEnd type="none" w="med" len="med"/>
-                      <a:tailEnd type="none" w="med" len="med"/>
-                    </a:lnB>
-                    <a:solidFill>
-                      <a:schemeClr val="bg1"/>
+                    <a:lnL w="0" cap="flat" cmpd="sng" algn="ctr">
+                      <a:noFill/>
+                    </a:lnL>
+                    <a:lnR w="0" cap="flat" cmpd="sng" algn="ctr">
+                      <a:noFill/>
+                    </a:lnR>
+                    <a:lnT w="0" cap="flat" cmpd="sng" algn="ctr">
+                      <a:noFill/>
+                    </a:lnT>
+                    <a:lnB w="9525" cap="flat" cmpd="sng" algn="ctr">
+                      <a:solidFill>
+                        <a:srgbClr val="D9E0EA"/>
+                      </a:solidFill>
+                      <a:prstDash val="solid"/>
+                      <a:round/>
+                      <a:headEnd type="none" w="med" len="med"/>
+                      <a:tailEnd type="none" w="med" len="med"/>
+                    </a:lnB>
+                    <a:solidFill>
+                      <a:srgbClr val="FDF4E3"/>
                     </a:solidFill>
                   </a:tcPr>
                 </a:tc>
@@ -6307,59 +5090,41 @@
                     </a:p>
                   </a:txBody>
                   <a:tcPr marL="45720" marR="45720" marT="22860" marB="22860" anchor="ctr">
-                    <a:lnL w="6350" cap="flat" cmpd="sng" algn="ctr">
-                      <a:solidFill>
-                        <a:srgbClr val="D9E0EA"/>
-                      </a:solidFill>
-                      <a:prstDash val="solid"/>
-                      <a:round/>
-                      <a:headEnd type="none" w="med" len="med"/>
-                      <a:tailEnd type="none" w="med" len="med"/>
-                    </a:lnL>
-                    <a:lnR w="6350" cap="flat" cmpd="sng" algn="ctr">
-                      <a:solidFill>
-                        <a:srgbClr val="D9E0EA"/>
-                      </a:solidFill>
-                      <a:prstDash val="solid"/>
-                      <a:round/>
-                      <a:headEnd type="none" w="med" len="med"/>
-                      <a:tailEnd type="none" w="med" len="med"/>
-                    </a:lnR>
-                    <a:lnT w="6350" cap="flat" cmpd="sng" algn="ctr">
-                      <a:solidFill>
-                        <a:srgbClr val="D9E0EA"/>
-                      </a:solidFill>
-                      <a:prstDash val="solid"/>
-                      <a:round/>
-                      <a:headEnd type="none" w="med" len="med"/>
-                      <a:tailEnd type="none" w="med" len="med"/>
-                    </a:lnT>
-                    <a:lnB w="6350" cap="flat" cmpd="sng" algn="ctr">
-                      <a:solidFill>
-                        <a:srgbClr val="D9E0EA"/>
-                      </a:solidFill>
-                      <a:prstDash val="solid"/>
-                      <a:round/>
-                      <a:headEnd type="none" w="med" len="med"/>
-                      <a:tailEnd type="none" w="med" len="med"/>
-                    </a:lnB>
-                    <a:solidFill>
-                      <a:schemeClr val="bg1"/>
-                    </a:solidFill>
-                  </a:tcPr>
-                </a:tc>
-                <a:tc>
-                  <a:txBody>
-                    <a:bodyPr/>
-                    <a:lstStyle/>
-                    <a:p>
-                      <a:pPr indent="0" marL="0">
-                        <a:buNone/>
-                      </a:pPr>
-                      <a:r>
-                        <a:rPr lang="en-US" sz="750" dirty="0">
-                          <a:solidFill>
-                            <a:schemeClr val="accent5"/>
+                    <a:lnL w="0" cap="flat" cmpd="sng" algn="ctr">
+                      <a:noFill/>
+                    </a:lnL>
+                    <a:lnR w="0" cap="flat" cmpd="sng" algn="ctr">
+                      <a:noFill/>
+                    </a:lnR>
+                    <a:lnT w="0" cap="flat" cmpd="sng" algn="ctr">
+                      <a:noFill/>
+                    </a:lnT>
+                    <a:lnB w="9525" cap="flat" cmpd="sng" algn="ctr">
+                      <a:solidFill>
+                        <a:srgbClr val="D9E0EA"/>
+                      </a:solidFill>
+                      <a:prstDash val="solid"/>
+                      <a:round/>
+                      <a:headEnd type="none" w="med" len="med"/>
+                      <a:tailEnd type="none" w="med" len="med"/>
+                    </a:lnB>
+                    <a:solidFill>
+                      <a:srgbClr val="FFFFFF"/>
+                    </a:solidFill>
+                  </a:tcPr>
+                </a:tc>
+                <a:tc>
+                  <a:txBody>
+                    <a:bodyPr/>
+                    <a:lstStyle/>
+                    <a:p>
+                      <a:pPr indent="0" marL="0">
+                        <a:buNone/>
+                      </a:pPr>
+                      <a:r>
+                        <a:rPr lang="en-US" sz="750" b="1" dirty="0">
+                          <a:solidFill>
+                            <a:schemeClr val="accent1"/>
                           </a:solidFill>
                           <a:latin typeface="Calibri" pitchFamily="34" charset="0"/>
                           <a:ea typeface="Calibri" pitchFamily="34" charset="-122"/>
@@ -6375,44 +5140,26 @@
                     </a:p>
                   </a:txBody>
                   <a:tcPr marL="45720" marR="45720" marT="22860" marB="22860" anchor="ctr">
-                    <a:lnL w="6350" cap="flat" cmpd="sng" algn="ctr">
-                      <a:solidFill>
-                        <a:srgbClr val="D9E0EA"/>
-                      </a:solidFill>
-                      <a:prstDash val="solid"/>
-                      <a:round/>
-                      <a:headEnd type="none" w="med" len="med"/>
-                      <a:tailEnd type="none" w="med" len="med"/>
-                    </a:lnL>
-                    <a:lnR w="6350" cap="flat" cmpd="sng" algn="ctr">
-                      <a:solidFill>
-                        <a:srgbClr val="D9E0EA"/>
-                      </a:solidFill>
-                      <a:prstDash val="solid"/>
-                      <a:round/>
-                      <a:headEnd type="none" w="med" len="med"/>
-                      <a:tailEnd type="none" w="med" len="med"/>
-                    </a:lnR>
-                    <a:lnT w="6350" cap="flat" cmpd="sng" algn="ctr">
-                      <a:solidFill>
-                        <a:srgbClr val="D9E0EA"/>
-                      </a:solidFill>
-                      <a:prstDash val="solid"/>
-                      <a:round/>
-                      <a:headEnd type="none" w="med" len="med"/>
-                      <a:tailEnd type="none" w="med" len="med"/>
-                    </a:lnT>
-                    <a:lnB w="6350" cap="flat" cmpd="sng" algn="ctr">
-                      <a:solidFill>
-                        <a:srgbClr val="D9E0EA"/>
-                      </a:solidFill>
-                      <a:prstDash val="solid"/>
-                      <a:round/>
-                      <a:headEnd type="none" w="med" len="med"/>
-                      <a:tailEnd type="none" w="med" len="med"/>
-                    </a:lnB>
-                    <a:solidFill>
-                      <a:schemeClr val="bg1"/>
+                    <a:lnL w="0" cap="flat" cmpd="sng" algn="ctr">
+                      <a:noFill/>
+                    </a:lnL>
+                    <a:lnR w="0" cap="flat" cmpd="sng" algn="ctr">
+                      <a:noFill/>
+                    </a:lnR>
+                    <a:lnT w="0" cap="flat" cmpd="sng" algn="ctr">
+                      <a:noFill/>
+                    </a:lnT>
+                    <a:lnB w="9525" cap="flat" cmpd="sng" algn="ctr">
+                      <a:solidFill>
+                        <a:srgbClr val="D9E0EA"/>
+                      </a:solidFill>
+                      <a:prstDash val="solid"/>
+                      <a:round/>
+                      <a:headEnd type="none" w="med" len="med"/>
+                      <a:tailEnd type="none" w="med" len="med"/>
+                    </a:lnB>
+                    <a:solidFill>
+                      <a:srgbClr val="FFFFFF"/>
                     </a:solidFill>
                   </a:tcPr>
                 </a:tc>
@@ -6427,7 +5174,7 @@
                         <a:buNone/>
                       </a:pPr>
                       <a:r>
-                        <a:rPr lang="en-US" sz="800" b="1" spc="100" kern="0" dirty="0">
+                        <a:rPr lang="en-US" sz="750" b="1" spc="100" kern="0" dirty="0">
                           <a:solidFill>
                             <a:schemeClr val="accent1"/>
                           </a:solidFill>
@@ -6437,42 +5184,24 @@
                         </a:rPr>
                         <a:t>C.2 NRP-36 (LDA/FT/FPADM) · CIRCULAR 18445 (30/10/2025)</a:t>
                       </a:r>
-                      <a:endParaRPr lang="en-US" sz="800" dirty="0">
-                        <a:latin typeface="Calibri" charset="0"/>
-                        <a:ea typeface="Calibri" charset="0"/>
-                        <a:cs typeface="Calibri" charset="0"/>
-                      </a:endParaRPr>
-                    </a:p>
-                  </a:txBody>
-                  <a:tcPr marL="45720" marR="45720" marT="22860" marB="22860" anchor="ctr">
-                    <a:lnL w="6350" cap="flat" cmpd="sng" algn="ctr">
-                      <a:solidFill>
-                        <a:srgbClr val="D9E0EA"/>
-                      </a:solidFill>
-                      <a:prstDash val="solid"/>
-                      <a:round/>
-                      <a:headEnd type="none" w="med" len="med"/>
-                      <a:tailEnd type="none" w="med" len="med"/>
-                    </a:lnL>
-                    <a:lnR w="6350" cap="flat" cmpd="sng" algn="ctr">
-                      <a:solidFill>
-                        <a:srgbClr val="D9E0EA"/>
-                      </a:solidFill>
-                      <a:prstDash val="solid"/>
-                      <a:round/>
-                      <a:headEnd type="none" w="med" len="med"/>
-                      <a:tailEnd type="none" w="med" len="med"/>
-                    </a:lnR>
-                    <a:lnT w="6350" cap="flat" cmpd="sng" algn="ctr">
-                      <a:solidFill>
-                        <a:srgbClr val="D9E0EA"/>
-                      </a:solidFill>
-                      <a:prstDash val="solid"/>
-                      <a:round/>
-                      <a:headEnd type="none" w="med" len="med"/>
-                      <a:tailEnd type="none" w="med" len="med"/>
-                    </a:lnT>
-                    <a:lnB w="6350" cap="flat" cmpd="sng" algn="ctr">
+                      <a:endParaRPr lang="en-US" sz="750" dirty="0">
+                        <a:latin typeface="Calibri" charset="0"/>
+                        <a:ea typeface="Calibri" charset="0"/>
+                        <a:cs typeface="Calibri" charset="0"/>
+                      </a:endParaRPr>
+                    </a:p>
+                  </a:txBody>
+                  <a:tcPr marL="45720" marR="45720" marT="22860" marB="22860" anchor="ctr">
+                    <a:lnL w="0" cap="flat" cmpd="sng" algn="ctr">
+                      <a:noFill/>
+                    </a:lnL>
+                    <a:lnR w="0" cap="flat" cmpd="sng" algn="ctr">
+                      <a:noFill/>
+                    </a:lnR>
+                    <a:lnT w="0" cap="flat" cmpd="sng" algn="ctr">
+                      <a:noFill/>
+                    </a:lnT>
+                    <a:lnB w="9525" cap="flat" cmpd="sng" algn="ctr">
                       <a:solidFill>
                         <a:srgbClr val="D9E0EA"/>
                       </a:solidFill>
@@ -6545,44 +5274,26 @@
                     </a:p>
                   </a:txBody>
                   <a:tcPr marL="45720" marR="45720" marT="22860" marB="22860" anchor="ctr">
-                    <a:lnL w="6350" cap="flat" cmpd="sng" algn="ctr">
-                      <a:solidFill>
-                        <a:srgbClr val="D9E0EA"/>
-                      </a:solidFill>
-                      <a:prstDash val="solid"/>
-                      <a:round/>
-                      <a:headEnd type="none" w="med" len="med"/>
-                      <a:tailEnd type="none" w="med" len="med"/>
-                    </a:lnL>
-                    <a:lnR w="6350" cap="flat" cmpd="sng" algn="ctr">
-                      <a:solidFill>
-                        <a:srgbClr val="D9E0EA"/>
-                      </a:solidFill>
-                      <a:prstDash val="solid"/>
-                      <a:round/>
-                      <a:headEnd type="none" w="med" len="med"/>
-                      <a:tailEnd type="none" w="med" len="med"/>
-                    </a:lnR>
-                    <a:lnT w="6350" cap="flat" cmpd="sng" algn="ctr">
-                      <a:solidFill>
-                        <a:srgbClr val="D9E0EA"/>
-                      </a:solidFill>
-                      <a:prstDash val="solid"/>
-                      <a:round/>
-                      <a:headEnd type="none" w="med" len="med"/>
-                      <a:tailEnd type="none" w="med" len="med"/>
-                    </a:lnT>
-                    <a:lnB w="6350" cap="flat" cmpd="sng" algn="ctr">
-                      <a:solidFill>
-                        <a:srgbClr val="D9E0EA"/>
-                      </a:solidFill>
-                      <a:prstDash val="solid"/>
-                      <a:round/>
-                      <a:headEnd type="none" w="med" len="med"/>
-                      <a:tailEnd type="none" w="med" len="med"/>
-                    </a:lnB>
-                    <a:solidFill>
-                      <a:schemeClr val="bg1"/>
+                    <a:lnL w="0" cap="flat" cmpd="sng" algn="ctr">
+                      <a:noFill/>
+                    </a:lnL>
+                    <a:lnR w="0" cap="flat" cmpd="sng" algn="ctr">
+                      <a:noFill/>
+                    </a:lnR>
+                    <a:lnT w="0" cap="flat" cmpd="sng" algn="ctr">
+                      <a:noFill/>
+                    </a:lnT>
+                    <a:lnB w="9525" cap="flat" cmpd="sng" algn="ctr">
+                      <a:solidFill>
+                        <a:srgbClr val="D9E0EA"/>
+                      </a:solidFill>
+                      <a:prstDash val="solid"/>
+                      <a:round/>
+                      <a:headEnd type="none" w="med" len="med"/>
+                      <a:tailEnd type="none" w="med" len="med"/>
+                    </a:lnB>
+                    <a:solidFill>
+                      <a:srgbClr val="FBEAE8"/>
                     </a:solidFill>
                   </a:tcPr>
                 </a:tc>
@@ -6613,59 +5324,41 @@
                     </a:p>
                   </a:txBody>
                   <a:tcPr marL="45720" marR="45720" marT="22860" marB="22860" anchor="ctr">
-                    <a:lnL w="6350" cap="flat" cmpd="sng" algn="ctr">
-                      <a:solidFill>
-                        <a:srgbClr val="D9E0EA"/>
-                      </a:solidFill>
-                      <a:prstDash val="solid"/>
-                      <a:round/>
-                      <a:headEnd type="none" w="med" len="med"/>
-                      <a:tailEnd type="none" w="med" len="med"/>
-                    </a:lnL>
-                    <a:lnR w="6350" cap="flat" cmpd="sng" algn="ctr">
-                      <a:solidFill>
-                        <a:srgbClr val="D9E0EA"/>
-                      </a:solidFill>
-                      <a:prstDash val="solid"/>
-                      <a:round/>
-                      <a:headEnd type="none" w="med" len="med"/>
-                      <a:tailEnd type="none" w="med" len="med"/>
-                    </a:lnR>
-                    <a:lnT w="6350" cap="flat" cmpd="sng" algn="ctr">
-                      <a:solidFill>
-                        <a:srgbClr val="D9E0EA"/>
-                      </a:solidFill>
-                      <a:prstDash val="solid"/>
-                      <a:round/>
-                      <a:headEnd type="none" w="med" len="med"/>
-                      <a:tailEnd type="none" w="med" len="med"/>
-                    </a:lnT>
-                    <a:lnB w="6350" cap="flat" cmpd="sng" algn="ctr">
-                      <a:solidFill>
-                        <a:srgbClr val="D9E0EA"/>
-                      </a:solidFill>
-                      <a:prstDash val="solid"/>
-                      <a:round/>
-                      <a:headEnd type="none" w="med" len="med"/>
-                      <a:tailEnd type="none" w="med" len="med"/>
-                    </a:lnB>
-                    <a:solidFill>
-                      <a:schemeClr val="bg1"/>
-                    </a:solidFill>
-                  </a:tcPr>
-                </a:tc>
-                <a:tc>
-                  <a:txBody>
-                    <a:bodyPr/>
-                    <a:lstStyle/>
-                    <a:p>
-                      <a:pPr indent="0" marL="0">
-                        <a:buNone/>
-                      </a:pPr>
-                      <a:r>
-                        <a:rPr lang="en-US" sz="750" dirty="0">
-                          <a:solidFill>
-                            <a:schemeClr val="accent5"/>
+                    <a:lnL w="0" cap="flat" cmpd="sng" algn="ctr">
+                      <a:noFill/>
+                    </a:lnL>
+                    <a:lnR w="0" cap="flat" cmpd="sng" algn="ctr">
+                      <a:noFill/>
+                    </a:lnR>
+                    <a:lnT w="0" cap="flat" cmpd="sng" algn="ctr">
+                      <a:noFill/>
+                    </a:lnT>
+                    <a:lnB w="9525" cap="flat" cmpd="sng" algn="ctr">
+                      <a:solidFill>
+                        <a:srgbClr val="D9E0EA"/>
+                      </a:solidFill>
+                      <a:prstDash val="solid"/>
+                      <a:round/>
+                      <a:headEnd type="none" w="med" len="med"/>
+                      <a:tailEnd type="none" w="med" len="med"/>
+                    </a:lnB>
+                    <a:solidFill>
+                      <a:srgbClr val="FFFFFF"/>
+                    </a:solidFill>
+                  </a:tcPr>
+                </a:tc>
+                <a:tc>
+                  <a:txBody>
+                    <a:bodyPr/>
+                    <a:lstStyle/>
+                    <a:p>
+                      <a:pPr indent="0" marL="0">
+                        <a:buNone/>
+                      </a:pPr>
+                      <a:r>
+                        <a:rPr lang="en-US" sz="750" b="1" dirty="0">
+                          <a:solidFill>
+                            <a:schemeClr val="accent1"/>
                           </a:solidFill>
                           <a:latin typeface="Calibri" pitchFamily="34" charset="0"/>
                           <a:ea typeface="Calibri" pitchFamily="34" charset="-122"/>
@@ -6681,44 +5374,26 @@
                     </a:p>
                   </a:txBody>
                   <a:tcPr marL="45720" marR="45720" marT="22860" marB="22860" anchor="ctr">
-                    <a:lnL w="6350" cap="flat" cmpd="sng" algn="ctr">
-                      <a:solidFill>
-                        <a:srgbClr val="D9E0EA"/>
-                      </a:solidFill>
-                      <a:prstDash val="solid"/>
-                      <a:round/>
-                      <a:headEnd type="none" w="med" len="med"/>
-                      <a:tailEnd type="none" w="med" len="med"/>
-                    </a:lnL>
-                    <a:lnR w="6350" cap="flat" cmpd="sng" algn="ctr">
-                      <a:solidFill>
-                        <a:srgbClr val="D9E0EA"/>
-                      </a:solidFill>
-                      <a:prstDash val="solid"/>
-                      <a:round/>
-                      <a:headEnd type="none" w="med" len="med"/>
-                      <a:tailEnd type="none" w="med" len="med"/>
-                    </a:lnR>
-                    <a:lnT w="6350" cap="flat" cmpd="sng" algn="ctr">
-                      <a:solidFill>
-                        <a:srgbClr val="D9E0EA"/>
-                      </a:solidFill>
-                      <a:prstDash val="solid"/>
-                      <a:round/>
-                      <a:headEnd type="none" w="med" len="med"/>
-                      <a:tailEnd type="none" w="med" len="med"/>
-                    </a:lnT>
-                    <a:lnB w="6350" cap="flat" cmpd="sng" algn="ctr">
-                      <a:solidFill>
-                        <a:srgbClr val="D9E0EA"/>
-                      </a:solidFill>
-                      <a:prstDash val="solid"/>
-                      <a:round/>
-                      <a:headEnd type="none" w="med" len="med"/>
-                      <a:tailEnd type="none" w="med" len="med"/>
-                    </a:lnB>
-                    <a:solidFill>
-                      <a:schemeClr val="bg1"/>
+                    <a:lnL w="0" cap="flat" cmpd="sng" algn="ctr">
+                      <a:noFill/>
+                    </a:lnL>
+                    <a:lnR w="0" cap="flat" cmpd="sng" algn="ctr">
+                      <a:noFill/>
+                    </a:lnR>
+                    <a:lnT w="0" cap="flat" cmpd="sng" algn="ctr">
+                      <a:noFill/>
+                    </a:lnT>
+                    <a:lnB w="9525" cap="flat" cmpd="sng" algn="ctr">
+                      <a:solidFill>
+                        <a:srgbClr val="D9E0EA"/>
+                      </a:solidFill>
+                      <a:prstDash val="solid"/>
+                      <a:round/>
+                      <a:headEnd type="none" w="med" len="med"/>
+                      <a:tailEnd type="none" w="med" len="med"/>
+                    </a:lnB>
+                    <a:solidFill>
+                      <a:srgbClr val="FFFFFF"/>
                     </a:solidFill>
                   </a:tcPr>
                 </a:tc>
@@ -6775,44 +5450,26 @@
                     </a:p>
                   </a:txBody>
                   <a:tcPr marL="45720" marR="45720" marT="22860" marB="22860" anchor="ctr">
-                    <a:lnL w="6350" cap="flat" cmpd="sng" algn="ctr">
-                      <a:solidFill>
-                        <a:srgbClr val="D9E0EA"/>
-                      </a:solidFill>
-                      <a:prstDash val="solid"/>
-                      <a:round/>
-                      <a:headEnd type="none" w="med" len="med"/>
-                      <a:tailEnd type="none" w="med" len="med"/>
-                    </a:lnL>
-                    <a:lnR w="6350" cap="flat" cmpd="sng" algn="ctr">
-                      <a:solidFill>
-                        <a:srgbClr val="D9E0EA"/>
-                      </a:solidFill>
-                      <a:prstDash val="solid"/>
-                      <a:round/>
-                      <a:headEnd type="none" w="med" len="med"/>
-                      <a:tailEnd type="none" w="med" len="med"/>
-                    </a:lnR>
-                    <a:lnT w="6350" cap="flat" cmpd="sng" algn="ctr">
-                      <a:solidFill>
-                        <a:srgbClr val="D9E0EA"/>
-                      </a:solidFill>
-                      <a:prstDash val="solid"/>
-                      <a:round/>
-                      <a:headEnd type="none" w="med" len="med"/>
-                      <a:tailEnd type="none" w="med" len="med"/>
-                    </a:lnT>
-                    <a:lnB w="6350" cap="flat" cmpd="sng" algn="ctr">
-                      <a:solidFill>
-                        <a:srgbClr val="D9E0EA"/>
-                      </a:solidFill>
-                      <a:prstDash val="solid"/>
-                      <a:round/>
-                      <a:headEnd type="none" w="med" len="med"/>
-                      <a:tailEnd type="none" w="med" len="med"/>
-                    </a:lnB>
-                    <a:solidFill>
-                      <a:schemeClr val="bg1"/>
+                    <a:lnL w="0" cap="flat" cmpd="sng" algn="ctr">
+                      <a:noFill/>
+                    </a:lnL>
+                    <a:lnR w="0" cap="flat" cmpd="sng" algn="ctr">
+                      <a:noFill/>
+                    </a:lnR>
+                    <a:lnT w="0" cap="flat" cmpd="sng" algn="ctr">
+                      <a:noFill/>
+                    </a:lnT>
+                    <a:lnB w="9525" cap="flat" cmpd="sng" algn="ctr">
+                      <a:solidFill>
+                        <a:srgbClr val="D9E0EA"/>
+                      </a:solidFill>
+                      <a:prstDash val="solid"/>
+                      <a:round/>
+                      <a:headEnd type="none" w="med" len="med"/>
+                      <a:tailEnd type="none" w="med" len="med"/>
+                    </a:lnB>
+                    <a:solidFill>
+                      <a:srgbClr val="FDF4E3"/>
                     </a:solidFill>
                   </a:tcPr>
                 </a:tc>
@@ -6843,59 +5500,41 @@
                     </a:p>
                   </a:txBody>
                   <a:tcPr marL="45720" marR="45720" marT="22860" marB="22860" anchor="ctr">
-                    <a:lnL w="6350" cap="flat" cmpd="sng" algn="ctr">
-                      <a:solidFill>
-                        <a:srgbClr val="D9E0EA"/>
-                      </a:solidFill>
-                      <a:prstDash val="solid"/>
-                      <a:round/>
-                      <a:headEnd type="none" w="med" len="med"/>
-                      <a:tailEnd type="none" w="med" len="med"/>
-                    </a:lnL>
-                    <a:lnR w="6350" cap="flat" cmpd="sng" algn="ctr">
-                      <a:solidFill>
-                        <a:srgbClr val="D9E0EA"/>
-                      </a:solidFill>
-                      <a:prstDash val="solid"/>
-                      <a:round/>
-                      <a:headEnd type="none" w="med" len="med"/>
-                      <a:tailEnd type="none" w="med" len="med"/>
-                    </a:lnR>
-                    <a:lnT w="6350" cap="flat" cmpd="sng" algn="ctr">
-                      <a:solidFill>
-                        <a:srgbClr val="D9E0EA"/>
-                      </a:solidFill>
-                      <a:prstDash val="solid"/>
-                      <a:round/>
-                      <a:headEnd type="none" w="med" len="med"/>
-                      <a:tailEnd type="none" w="med" len="med"/>
-                    </a:lnT>
-                    <a:lnB w="6350" cap="flat" cmpd="sng" algn="ctr">
-                      <a:solidFill>
-                        <a:srgbClr val="D9E0EA"/>
-                      </a:solidFill>
-                      <a:prstDash val="solid"/>
-                      <a:round/>
-                      <a:headEnd type="none" w="med" len="med"/>
-                      <a:tailEnd type="none" w="med" len="med"/>
-                    </a:lnB>
-                    <a:solidFill>
-                      <a:schemeClr val="bg1"/>
-                    </a:solidFill>
-                  </a:tcPr>
-                </a:tc>
-                <a:tc>
-                  <a:txBody>
-                    <a:bodyPr/>
-                    <a:lstStyle/>
-                    <a:p>
-                      <a:pPr indent="0" marL="0">
-                        <a:buNone/>
-                      </a:pPr>
-                      <a:r>
-                        <a:rPr lang="en-US" sz="750" dirty="0">
-                          <a:solidFill>
-                            <a:schemeClr val="accent5"/>
+                    <a:lnL w="0" cap="flat" cmpd="sng" algn="ctr">
+                      <a:noFill/>
+                    </a:lnL>
+                    <a:lnR w="0" cap="flat" cmpd="sng" algn="ctr">
+                      <a:noFill/>
+                    </a:lnR>
+                    <a:lnT w="0" cap="flat" cmpd="sng" algn="ctr">
+                      <a:noFill/>
+                    </a:lnT>
+                    <a:lnB w="9525" cap="flat" cmpd="sng" algn="ctr">
+                      <a:solidFill>
+                        <a:srgbClr val="D9E0EA"/>
+                      </a:solidFill>
+                      <a:prstDash val="solid"/>
+                      <a:round/>
+                      <a:headEnd type="none" w="med" len="med"/>
+                      <a:tailEnd type="none" w="med" len="med"/>
+                    </a:lnB>
+                    <a:solidFill>
+                      <a:srgbClr val="FFFFFF"/>
+                    </a:solidFill>
+                  </a:tcPr>
+                </a:tc>
+                <a:tc>
+                  <a:txBody>
+                    <a:bodyPr/>
+                    <a:lstStyle/>
+                    <a:p>
+                      <a:pPr indent="0" marL="0">
+                        <a:buNone/>
+                      </a:pPr>
+                      <a:r>
+                        <a:rPr lang="en-US" sz="750" b="1" dirty="0">
+                          <a:solidFill>
+                            <a:schemeClr val="accent1"/>
                           </a:solidFill>
                           <a:latin typeface="Calibri" pitchFamily="34" charset="0"/>
                           <a:ea typeface="Calibri" pitchFamily="34" charset="-122"/>
@@ -6911,44 +5550,26 @@
                     </a:p>
                   </a:txBody>
                   <a:tcPr marL="45720" marR="45720" marT="22860" marB="22860" anchor="ctr">
-                    <a:lnL w="6350" cap="flat" cmpd="sng" algn="ctr">
-                      <a:solidFill>
-                        <a:srgbClr val="D9E0EA"/>
-                      </a:solidFill>
-                      <a:prstDash val="solid"/>
-                      <a:round/>
-                      <a:headEnd type="none" w="med" len="med"/>
-                      <a:tailEnd type="none" w="med" len="med"/>
-                    </a:lnL>
-                    <a:lnR w="6350" cap="flat" cmpd="sng" algn="ctr">
-                      <a:solidFill>
-                        <a:srgbClr val="D9E0EA"/>
-                      </a:solidFill>
-                      <a:prstDash val="solid"/>
-                      <a:round/>
-                      <a:headEnd type="none" w="med" len="med"/>
-                      <a:tailEnd type="none" w="med" len="med"/>
-                    </a:lnR>
-                    <a:lnT w="6350" cap="flat" cmpd="sng" algn="ctr">
-                      <a:solidFill>
-                        <a:srgbClr val="D9E0EA"/>
-                      </a:solidFill>
-                      <a:prstDash val="solid"/>
-                      <a:round/>
-                      <a:headEnd type="none" w="med" len="med"/>
-                      <a:tailEnd type="none" w="med" len="med"/>
-                    </a:lnT>
-                    <a:lnB w="6350" cap="flat" cmpd="sng" algn="ctr">
-                      <a:solidFill>
-                        <a:srgbClr val="D9E0EA"/>
-                      </a:solidFill>
-                      <a:prstDash val="solid"/>
-                      <a:round/>
-                      <a:headEnd type="none" w="med" len="med"/>
-                      <a:tailEnd type="none" w="med" len="med"/>
-                    </a:lnB>
-                    <a:solidFill>
-                      <a:schemeClr val="bg1"/>
+                    <a:lnL w="0" cap="flat" cmpd="sng" algn="ctr">
+                      <a:noFill/>
+                    </a:lnL>
+                    <a:lnR w="0" cap="flat" cmpd="sng" algn="ctr">
+                      <a:noFill/>
+                    </a:lnR>
+                    <a:lnT w="0" cap="flat" cmpd="sng" algn="ctr">
+                      <a:noFill/>
+                    </a:lnT>
+                    <a:lnB w="9525" cap="flat" cmpd="sng" algn="ctr">
+                      <a:solidFill>
+                        <a:srgbClr val="D9E0EA"/>
+                      </a:solidFill>
+                      <a:prstDash val="solid"/>
+                      <a:round/>
+                      <a:headEnd type="none" w="med" len="med"/>
+                      <a:tailEnd type="none" w="med" len="med"/>
+                    </a:lnB>
+                    <a:solidFill>
+                      <a:srgbClr val="FFFFFF"/>
                     </a:solidFill>
                   </a:tcPr>
                 </a:tc>
@@ -6963,7 +5584,7 @@
                         <a:buNone/>
                       </a:pPr>
                       <a:r>
-                        <a:rPr lang="en-US" sz="800" b="1" spc="100" kern="0" dirty="0">
+                        <a:rPr lang="en-US" sz="750" b="1" spc="100" kern="0" dirty="0">
                           <a:solidFill>
                             <a:schemeClr val="accent1"/>
                           </a:solidFill>
@@ -6973,42 +5594,24 @@
                         </a:rPr>
                         <a:t>C.3 GUÍAS DE CALIDAD · CIRCULAR 29295 (03/12/2025)</a:t>
                       </a:r>
-                      <a:endParaRPr lang="en-US" sz="800" dirty="0">
-                        <a:latin typeface="Calibri" charset="0"/>
-                        <a:ea typeface="Calibri" charset="0"/>
-                        <a:cs typeface="Calibri" charset="0"/>
-                      </a:endParaRPr>
-                    </a:p>
-                  </a:txBody>
-                  <a:tcPr marL="45720" marR="45720" marT="22860" marB="22860" anchor="ctr">
-                    <a:lnL w="6350" cap="flat" cmpd="sng" algn="ctr">
-                      <a:solidFill>
-                        <a:srgbClr val="D9E0EA"/>
-                      </a:solidFill>
-                      <a:prstDash val="solid"/>
-                      <a:round/>
-                      <a:headEnd type="none" w="med" len="med"/>
-                      <a:tailEnd type="none" w="med" len="med"/>
-                    </a:lnL>
-                    <a:lnR w="6350" cap="flat" cmpd="sng" algn="ctr">
-                      <a:solidFill>
-                        <a:srgbClr val="D9E0EA"/>
-                      </a:solidFill>
-                      <a:prstDash val="solid"/>
-                      <a:round/>
-                      <a:headEnd type="none" w="med" len="med"/>
-                      <a:tailEnd type="none" w="med" len="med"/>
-                    </a:lnR>
-                    <a:lnT w="6350" cap="flat" cmpd="sng" algn="ctr">
-                      <a:solidFill>
-                        <a:srgbClr val="D9E0EA"/>
-                      </a:solidFill>
-                      <a:prstDash val="solid"/>
-                      <a:round/>
-                      <a:headEnd type="none" w="med" len="med"/>
-                      <a:tailEnd type="none" w="med" len="med"/>
-                    </a:lnT>
-                    <a:lnB w="6350" cap="flat" cmpd="sng" algn="ctr">
+                      <a:endParaRPr lang="en-US" sz="750" dirty="0">
+                        <a:latin typeface="Calibri" charset="0"/>
+                        <a:ea typeface="Calibri" charset="0"/>
+                        <a:cs typeface="Calibri" charset="0"/>
+                      </a:endParaRPr>
+                    </a:p>
+                  </a:txBody>
+                  <a:tcPr marL="45720" marR="45720" marT="22860" marB="22860" anchor="ctr">
+                    <a:lnL w="0" cap="flat" cmpd="sng" algn="ctr">
+                      <a:noFill/>
+                    </a:lnL>
+                    <a:lnR w="0" cap="flat" cmpd="sng" algn="ctr">
+                      <a:noFill/>
+                    </a:lnR>
+                    <a:lnT w="0" cap="flat" cmpd="sng" algn="ctr">
+                      <a:noFill/>
+                    </a:lnT>
+                    <a:lnB w="9525" cap="flat" cmpd="sng" algn="ctr">
                       <a:solidFill>
                         <a:srgbClr val="D9E0EA"/>
                       </a:solidFill>
@@ -7081,44 +5684,26 @@
                     </a:p>
                   </a:txBody>
                   <a:tcPr marL="45720" marR="45720" marT="22860" marB="22860" anchor="ctr">
-                    <a:lnL w="6350" cap="flat" cmpd="sng" algn="ctr">
-                      <a:solidFill>
-                        <a:srgbClr val="D9E0EA"/>
-                      </a:solidFill>
-                      <a:prstDash val="solid"/>
-                      <a:round/>
-                      <a:headEnd type="none" w="med" len="med"/>
-                      <a:tailEnd type="none" w="med" len="med"/>
-                    </a:lnL>
-                    <a:lnR w="6350" cap="flat" cmpd="sng" algn="ctr">
-                      <a:solidFill>
-                        <a:srgbClr val="D9E0EA"/>
-                      </a:solidFill>
-                      <a:prstDash val="solid"/>
-                      <a:round/>
-                      <a:headEnd type="none" w="med" len="med"/>
-                      <a:tailEnd type="none" w="med" len="med"/>
-                    </a:lnR>
-                    <a:lnT w="6350" cap="flat" cmpd="sng" algn="ctr">
-                      <a:solidFill>
-                        <a:srgbClr val="D9E0EA"/>
-                      </a:solidFill>
-                      <a:prstDash val="solid"/>
-                      <a:round/>
-                      <a:headEnd type="none" w="med" len="med"/>
-                      <a:tailEnd type="none" w="med" len="med"/>
-                    </a:lnT>
-                    <a:lnB w="6350" cap="flat" cmpd="sng" algn="ctr">
-                      <a:solidFill>
-                        <a:srgbClr val="D9E0EA"/>
-                      </a:solidFill>
-                      <a:prstDash val="solid"/>
-                      <a:round/>
-                      <a:headEnd type="none" w="med" len="med"/>
-                      <a:tailEnd type="none" w="med" len="med"/>
-                    </a:lnB>
-                    <a:solidFill>
-                      <a:schemeClr val="bg1"/>
+                    <a:lnL w="0" cap="flat" cmpd="sng" algn="ctr">
+                      <a:noFill/>
+                    </a:lnL>
+                    <a:lnR w="0" cap="flat" cmpd="sng" algn="ctr">
+                      <a:noFill/>
+                    </a:lnR>
+                    <a:lnT w="0" cap="flat" cmpd="sng" algn="ctr">
+                      <a:noFill/>
+                    </a:lnT>
+                    <a:lnB w="9525" cap="flat" cmpd="sng" algn="ctr">
+                      <a:solidFill>
+                        <a:srgbClr val="D9E0EA"/>
+                      </a:solidFill>
+                      <a:prstDash val="solid"/>
+                      <a:round/>
+                      <a:headEnd type="none" w="med" len="med"/>
+                      <a:tailEnd type="none" w="med" len="med"/>
+                    </a:lnB>
+                    <a:solidFill>
+                      <a:srgbClr val="FBEAE8"/>
                     </a:solidFill>
                   </a:tcPr>
                 </a:tc>
@@ -7149,59 +5734,41 @@
                     </a:p>
                   </a:txBody>
                   <a:tcPr marL="45720" marR="45720" marT="22860" marB="22860" anchor="ctr">
-                    <a:lnL w="6350" cap="flat" cmpd="sng" algn="ctr">
-                      <a:solidFill>
-                        <a:srgbClr val="D9E0EA"/>
-                      </a:solidFill>
-                      <a:prstDash val="solid"/>
-                      <a:round/>
-                      <a:headEnd type="none" w="med" len="med"/>
-                      <a:tailEnd type="none" w="med" len="med"/>
-                    </a:lnL>
-                    <a:lnR w="6350" cap="flat" cmpd="sng" algn="ctr">
-                      <a:solidFill>
-                        <a:srgbClr val="D9E0EA"/>
-                      </a:solidFill>
-                      <a:prstDash val="solid"/>
-                      <a:round/>
-                      <a:headEnd type="none" w="med" len="med"/>
-                      <a:tailEnd type="none" w="med" len="med"/>
-                    </a:lnR>
-                    <a:lnT w="6350" cap="flat" cmpd="sng" algn="ctr">
-                      <a:solidFill>
-                        <a:srgbClr val="D9E0EA"/>
-                      </a:solidFill>
-                      <a:prstDash val="solid"/>
-                      <a:round/>
-                      <a:headEnd type="none" w="med" len="med"/>
-                      <a:tailEnd type="none" w="med" len="med"/>
-                    </a:lnT>
-                    <a:lnB w="6350" cap="flat" cmpd="sng" algn="ctr">
-                      <a:solidFill>
-                        <a:srgbClr val="D9E0EA"/>
-                      </a:solidFill>
-                      <a:prstDash val="solid"/>
-                      <a:round/>
-                      <a:headEnd type="none" w="med" len="med"/>
-                      <a:tailEnd type="none" w="med" len="med"/>
-                    </a:lnB>
-                    <a:solidFill>
-                      <a:schemeClr val="bg1"/>
-                    </a:solidFill>
-                  </a:tcPr>
-                </a:tc>
-                <a:tc>
-                  <a:txBody>
-                    <a:bodyPr/>
-                    <a:lstStyle/>
-                    <a:p>
-                      <a:pPr indent="0" marL="0">
-                        <a:buNone/>
-                      </a:pPr>
-                      <a:r>
-                        <a:rPr lang="en-US" sz="750" dirty="0">
-                          <a:solidFill>
-                            <a:schemeClr val="accent5"/>
+                    <a:lnL w="0" cap="flat" cmpd="sng" algn="ctr">
+                      <a:noFill/>
+                    </a:lnL>
+                    <a:lnR w="0" cap="flat" cmpd="sng" algn="ctr">
+                      <a:noFill/>
+                    </a:lnR>
+                    <a:lnT w="0" cap="flat" cmpd="sng" algn="ctr">
+                      <a:noFill/>
+                    </a:lnT>
+                    <a:lnB w="9525" cap="flat" cmpd="sng" algn="ctr">
+                      <a:solidFill>
+                        <a:srgbClr val="D9E0EA"/>
+                      </a:solidFill>
+                      <a:prstDash val="solid"/>
+                      <a:round/>
+                      <a:headEnd type="none" w="med" len="med"/>
+                      <a:tailEnd type="none" w="med" len="med"/>
+                    </a:lnB>
+                    <a:solidFill>
+                      <a:srgbClr val="FFFFFF"/>
+                    </a:solidFill>
+                  </a:tcPr>
+                </a:tc>
+                <a:tc>
+                  <a:txBody>
+                    <a:bodyPr/>
+                    <a:lstStyle/>
+                    <a:p>
+                      <a:pPr indent="0" marL="0">
+                        <a:buNone/>
+                      </a:pPr>
+                      <a:r>
+                        <a:rPr lang="en-US" sz="750" b="1" dirty="0">
+                          <a:solidFill>
+                            <a:schemeClr val="accent1"/>
                           </a:solidFill>
                           <a:latin typeface="Calibri" pitchFamily="34" charset="0"/>
                           <a:ea typeface="Calibri" pitchFamily="34" charset="-122"/>
@@ -7217,44 +5784,26 @@
                     </a:p>
                   </a:txBody>
                   <a:tcPr marL="45720" marR="45720" marT="22860" marB="22860" anchor="ctr">
-                    <a:lnL w="6350" cap="flat" cmpd="sng" algn="ctr">
-                      <a:solidFill>
-                        <a:srgbClr val="D9E0EA"/>
-                      </a:solidFill>
-                      <a:prstDash val="solid"/>
-                      <a:round/>
-                      <a:headEnd type="none" w="med" len="med"/>
-                      <a:tailEnd type="none" w="med" len="med"/>
-                    </a:lnL>
-                    <a:lnR w="6350" cap="flat" cmpd="sng" algn="ctr">
-                      <a:solidFill>
-                        <a:srgbClr val="D9E0EA"/>
-                      </a:solidFill>
-                      <a:prstDash val="solid"/>
-                      <a:round/>
-                      <a:headEnd type="none" w="med" len="med"/>
-                      <a:tailEnd type="none" w="med" len="med"/>
-                    </a:lnR>
-                    <a:lnT w="6350" cap="flat" cmpd="sng" algn="ctr">
-                      <a:solidFill>
-                        <a:srgbClr val="D9E0EA"/>
-                      </a:solidFill>
-                      <a:prstDash val="solid"/>
-                      <a:round/>
-                      <a:headEnd type="none" w="med" len="med"/>
-                      <a:tailEnd type="none" w="med" len="med"/>
-                    </a:lnT>
-                    <a:lnB w="6350" cap="flat" cmpd="sng" algn="ctr">
-                      <a:solidFill>
-                        <a:srgbClr val="D9E0EA"/>
-                      </a:solidFill>
-                      <a:prstDash val="solid"/>
-                      <a:round/>
-                      <a:headEnd type="none" w="med" len="med"/>
-                      <a:tailEnd type="none" w="med" len="med"/>
-                    </a:lnB>
-                    <a:solidFill>
-                      <a:schemeClr val="bg1"/>
+                    <a:lnL w="0" cap="flat" cmpd="sng" algn="ctr">
+                      <a:noFill/>
+                    </a:lnL>
+                    <a:lnR w="0" cap="flat" cmpd="sng" algn="ctr">
+                      <a:noFill/>
+                    </a:lnR>
+                    <a:lnT w="0" cap="flat" cmpd="sng" algn="ctr">
+                      <a:noFill/>
+                    </a:lnT>
+                    <a:lnB w="9525" cap="flat" cmpd="sng" algn="ctr">
+                      <a:solidFill>
+                        <a:srgbClr val="D9E0EA"/>
+                      </a:solidFill>
+                      <a:prstDash val="solid"/>
+                      <a:round/>
+                      <a:headEnd type="none" w="med" len="med"/>
+                      <a:tailEnd type="none" w="med" len="med"/>
+                    </a:lnB>
+                    <a:solidFill>
+                      <a:srgbClr val="FFFFFF"/>
                     </a:solidFill>
                   </a:tcPr>
                 </a:tc>
@@ -7311,44 +5860,26 @@
                     </a:p>
                   </a:txBody>
                   <a:tcPr marL="45720" marR="45720" marT="22860" marB="22860" anchor="ctr">
-                    <a:lnL w="6350" cap="flat" cmpd="sng" algn="ctr">
-                      <a:solidFill>
-                        <a:srgbClr val="D9E0EA"/>
-                      </a:solidFill>
-                      <a:prstDash val="solid"/>
-                      <a:round/>
-                      <a:headEnd type="none" w="med" len="med"/>
-                      <a:tailEnd type="none" w="med" len="med"/>
-                    </a:lnL>
-                    <a:lnR w="6350" cap="flat" cmpd="sng" algn="ctr">
-                      <a:solidFill>
-                        <a:srgbClr val="D9E0EA"/>
-                      </a:solidFill>
-                      <a:prstDash val="solid"/>
-                      <a:round/>
-                      <a:headEnd type="none" w="med" len="med"/>
-                      <a:tailEnd type="none" w="med" len="med"/>
-                    </a:lnR>
-                    <a:lnT w="6350" cap="flat" cmpd="sng" algn="ctr">
-                      <a:solidFill>
-                        <a:srgbClr val="D9E0EA"/>
-                      </a:solidFill>
-                      <a:prstDash val="solid"/>
-                      <a:round/>
-                      <a:headEnd type="none" w="med" len="med"/>
-                      <a:tailEnd type="none" w="med" len="med"/>
-                    </a:lnT>
-                    <a:lnB w="6350" cap="flat" cmpd="sng" algn="ctr">
-                      <a:solidFill>
-                        <a:srgbClr val="D9E0EA"/>
-                      </a:solidFill>
-                      <a:prstDash val="solid"/>
-                      <a:round/>
-                      <a:headEnd type="none" w="med" len="med"/>
-                      <a:tailEnd type="none" w="med" len="med"/>
-                    </a:lnB>
-                    <a:solidFill>
-                      <a:schemeClr val="bg1"/>
+                    <a:lnL w="0" cap="flat" cmpd="sng" algn="ctr">
+                      <a:noFill/>
+                    </a:lnL>
+                    <a:lnR w="0" cap="flat" cmpd="sng" algn="ctr">
+                      <a:noFill/>
+                    </a:lnR>
+                    <a:lnT w="0" cap="flat" cmpd="sng" algn="ctr">
+                      <a:noFill/>
+                    </a:lnT>
+                    <a:lnB w="9525" cap="flat" cmpd="sng" algn="ctr">
+                      <a:solidFill>
+                        <a:srgbClr val="D9E0EA"/>
+                      </a:solidFill>
+                      <a:prstDash val="solid"/>
+                      <a:round/>
+                      <a:headEnd type="none" w="med" len="med"/>
+                      <a:tailEnd type="none" w="med" len="med"/>
+                    </a:lnB>
+                    <a:solidFill>
+                      <a:srgbClr val="FBEAE8"/>
                     </a:solidFill>
                   </a:tcPr>
                 </a:tc>
@@ -7379,59 +5910,41 @@
                     </a:p>
                   </a:txBody>
                   <a:tcPr marL="45720" marR="45720" marT="22860" marB="22860" anchor="ctr">
-                    <a:lnL w="6350" cap="flat" cmpd="sng" algn="ctr">
-                      <a:solidFill>
-                        <a:srgbClr val="D9E0EA"/>
-                      </a:solidFill>
-                      <a:prstDash val="solid"/>
-                      <a:round/>
-                      <a:headEnd type="none" w="med" len="med"/>
-                      <a:tailEnd type="none" w="med" len="med"/>
-                    </a:lnL>
-                    <a:lnR w="6350" cap="flat" cmpd="sng" algn="ctr">
-                      <a:solidFill>
-                        <a:srgbClr val="D9E0EA"/>
-                      </a:solidFill>
-                      <a:prstDash val="solid"/>
-                      <a:round/>
-                      <a:headEnd type="none" w="med" len="med"/>
-                      <a:tailEnd type="none" w="med" len="med"/>
-                    </a:lnR>
-                    <a:lnT w="6350" cap="flat" cmpd="sng" algn="ctr">
-                      <a:solidFill>
-                        <a:srgbClr val="D9E0EA"/>
-                      </a:solidFill>
-                      <a:prstDash val="solid"/>
-                      <a:round/>
-                      <a:headEnd type="none" w="med" len="med"/>
-                      <a:tailEnd type="none" w="med" len="med"/>
-                    </a:lnT>
-                    <a:lnB w="6350" cap="flat" cmpd="sng" algn="ctr">
-                      <a:solidFill>
-                        <a:srgbClr val="D9E0EA"/>
-                      </a:solidFill>
-                      <a:prstDash val="solid"/>
-                      <a:round/>
-                      <a:headEnd type="none" w="med" len="med"/>
-                      <a:tailEnd type="none" w="med" len="med"/>
-                    </a:lnB>
-                    <a:solidFill>
-                      <a:schemeClr val="bg1"/>
-                    </a:solidFill>
-                  </a:tcPr>
-                </a:tc>
-                <a:tc>
-                  <a:txBody>
-                    <a:bodyPr/>
-                    <a:lstStyle/>
-                    <a:p>
-                      <a:pPr indent="0" marL="0">
-                        <a:buNone/>
-                      </a:pPr>
-                      <a:r>
-                        <a:rPr lang="en-US" sz="750" dirty="0">
-                          <a:solidFill>
-                            <a:schemeClr val="accent5"/>
+                    <a:lnL w="0" cap="flat" cmpd="sng" algn="ctr">
+                      <a:noFill/>
+                    </a:lnL>
+                    <a:lnR w="0" cap="flat" cmpd="sng" algn="ctr">
+                      <a:noFill/>
+                    </a:lnR>
+                    <a:lnT w="0" cap="flat" cmpd="sng" algn="ctr">
+                      <a:noFill/>
+                    </a:lnT>
+                    <a:lnB w="9525" cap="flat" cmpd="sng" algn="ctr">
+                      <a:solidFill>
+                        <a:srgbClr val="D9E0EA"/>
+                      </a:solidFill>
+                      <a:prstDash val="solid"/>
+                      <a:round/>
+                      <a:headEnd type="none" w="med" len="med"/>
+                      <a:tailEnd type="none" w="med" len="med"/>
+                    </a:lnB>
+                    <a:solidFill>
+                      <a:srgbClr val="FFFFFF"/>
+                    </a:solidFill>
+                  </a:tcPr>
+                </a:tc>
+                <a:tc>
+                  <a:txBody>
+                    <a:bodyPr/>
+                    <a:lstStyle/>
+                    <a:p>
+                      <a:pPr indent="0" marL="0">
+                        <a:buNone/>
+                      </a:pPr>
+                      <a:r>
+                        <a:rPr lang="en-US" sz="750" b="1" dirty="0">
+                          <a:solidFill>
+                            <a:schemeClr val="accent1"/>
                           </a:solidFill>
                           <a:latin typeface="Calibri" pitchFamily="34" charset="0"/>
                           <a:ea typeface="Calibri" pitchFamily="34" charset="-122"/>
@@ -7447,44 +5960,26 @@
                     </a:p>
                   </a:txBody>
                   <a:tcPr marL="45720" marR="45720" marT="22860" marB="22860" anchor="ctr">
-                    <a:lnL w="6350" cap="flat" cmpd="sng" algn="ctr">
-                      <a:solidFill>
-                        <a:srgbClr val="D9E0EA"/>
-                      </a:solidFill>
-                      <a:prstDash val="solid"/>
-                      <a:round/>
-                      <a:headEnd type="none" w="med" len="med"/>
-                      <a:tailEnd type="none" w="med" len="med"/>
-                    </a:lnL>
-                    <a:lnR w="6350" cap="flat" cmpd="sng" algn="ctr">
-                      <a:solidFill>
-                        <a:srgbClr val="D9E0EA"/>
-                      </a:solidFill>
-                      <a:prstDash val="solid"/>
-                      <a:round/>
-                      <a:headEnd type="none" w="med" len="med"/>
-                      <a:tailEnd type="none" w="med" len="med"/>
-                    </a:lnR>
-                    <a:lnT w="6350" cap="flat" cmpd="sng" algn="ctr">
-                      <a:solidFill>
-                        <a:srgbClr val="D9E0EA"/>
-                      </a:solidFill>
-                      <a:prstDash val="solid"/>
-                      <a:round/>
-                      <a:headEnd type="none" w="med" len="med"/>
-                      <a:tailEnd type="none" w="med" len="med"/>
-                    </a:lnT>
-                    <a:lnB w="6350" cap="flat" cmpd="sng" algn="ctr">
-                      <a:solidFill>
-                        <a:srgbClr val="D9E0EA"/>
-                      </a:solidFill>
-                      <a:prstDash val="solid"/>
-                      <a:round/>
-                      <a:headEnd type="none" w="med" len="med"/>
-                      <a:tailEnd type="none" w="med" len="med"/>
-                    </a:lnB>
-                    <a:solidFill>
-                      <a:schemeClr val="bg1"/>
+                    <a:lnL w="0" cap="flat" cmpd="sng" algn="ctr">
+                      <a:noFill/>
+                    </a:lnL>
+                    <a:lnR w="0" cap="flat" cmpd="sng" algn="ctr">
+                      <a:noFill/>
+                    </a:lnR>
+                    <a:lnT w="0" cap="flat" cmpd="sng" algn="ctr">
+                      <a:noFill/>
+                    </a:lnT>
+                    <a:lnB w="9525" cap="flat" cmpd="sng" algn="ctr">
+                      <a:solidFill>
+                        <a:srgbClr val="D9E0EA"/>
+                      </a:solidFill>
+                      <a:prstDash val="solid"/>
+                      <a:round/>
+                      <a:headEnd type="none" w="med" len="med"/>
+                      <a:tailEnd type="none" w="med" len="med"/>
+                    </a:lnB>
+                    <a:solidFill>
+                      <a:srgbClr val="FFFFFF"/>
                     </a:solidFill>
                   </a:tcPr>
                 </a:tc>
@@ -7541,44 +6036,26 @@
                     </a:p>
                   </a:txBody>
                   <a:tcPr marL="45720" marR="45720" marT="22860" marB="22860" anchor="ctr">
-                    <a:lnL w="6350" cap="flat" cmpd="sng" algn="ctr">
-                      <a:solidFill>
-                        <a:srgbClr val="D9E0EA"/>
-                      </a:solidFill>
-                      <a:prstDash val="solid"/>
-                      <a:round/>
-                      <a:headEnd type="none" w="med" len="med"/>
-                      <a:tailEnd type="none" w="med" len="med"/>
-                    </a:lnL>
-                    <a:lnR w="6350" cap="flat" cmpd="sng" algn="ctr">
-                      <a:solidFill>
-                        <a:srgbClr val="D9E0EA"/>
-                      </a:solidFill>
-                      <a:prstDash val="solid"/>
-                      <a:round/>
-                      <a:headEnd type="none" w="med" len="med"/>
-                      <a:tailEnd type="none" w="med" len="med"/>
-                    </a:lnR>
-                    <a:lnT w="6350" cap="flat" cmpd="sng" algn="ctr">
-                      <a:solidFill>
-                        <a:srgbClr val="D9E0EA"/>
-                      </a:solidFill>
-                      <a:prstDash val="solid"/>
-                      <a:round/>
-                      <a:headEnd type="none" w="med" len="med"/>
-                      <a:tailEnd type="none" w="med" len="med"/>
-                    </a:lnT>
-                    <a:lnB w="6350" cap="flat" cmpd="sng" algn="ctr">
-                      <a:solidFill>
-                        <a:srgbClr val="D9E0EA"/>
-                      </a:solidFill>
-                      <a:prstDash val="solid"/>
-                      <a:round/>
-                      <a:headEnd type="none" w="med" len="med"/>
-                      <a:tailEnd type="none" w="med" len="med"/>
-                    </a:lnB>
-                    <a:solidFill>
-                      <a:schemeClr val="bg1"/>
+                    <a:lnL w="0" cap="flat" cmpd="sng" algn="ctr">
+                      <a:noFill/>
+                    </a:lnL>
+                    <a:lnR w="0" cap="flat" cmpd="sng" algn="ctr">
+                      <a:noFill/>
+                    </a:lnR>
+                    <a:lnT w="0" cap="flat" cmpd="sng" algn="ctr">
+                      <a:noFill/>
+                    </a:lnT>
+                    <a:lnB w="9525" cap="flat" cmpd="sng" algn="ctr">
+                      <a:solidFill>
+                        <a:srgbClr val="D9E0EA"/>
+                      </a:solidFill>
+                      <a:prstDash val="solid"/>
+                      <a:round/>
+                      <a:headEnd type="none" w="med" len="med"/>
+                      <a:tailEnd type="none" w="med" len="med"/>
+                    </a:lnB>
+                    <a:solidFill>
+                      <a:srgbClr val="FDF4E3"/>
                     </a:solidFill>
                   </a:tcPr>
                 </a:tc>
@@ -7609,59 +6086,41 @@
                     </a:p>
                   </a:txBody>
                   <a:tcPr marL="45720" marR="45720" marT="22860" marB="22860" anchor="ctr">
-                    <a:lnL w="6350" cap="flat" cmpd="sng" algn="ctr">
-                      <a:solidFill>
-                        <a:srgbClr val="D9E0EA"/>
-                      </a:solidFill>
-                      <a:prstDash val="solid"/>
-                      <a:round/>
-                      <a:headEnd type="none" w="med" len="med"/>
-                      <a:tailEnd type="none" w="med" len="med"/>
-                    </a:lnL>
-                    <a:lnR w="6350" cap="flat" cmpd="sng" algn="ctr">
-                      <a:solidFill>
-                        <a:srgbClr val="D9E0EA"/>
-                      </a:solidFill>
-                      <a:prstDash val="solid"/>
-                      <a:round/>
-                      <a:headEnd type="none" w="med" len="med"/>
-                      <a:tailEnd type="none" w="med" len="med"/>
-                    </a:lnR>
-                    <a:lnT w="6350" cap="flat" cmpd="sng" algn="ctr">
-                      <a:solidFill>
-                        <a:srgbClr val="D9E0EA"/>
-                      </a:solidFill>
-                      <a:prstDash val="solid"/>
-                      <a:round/>
-                      <a:headEnd type="none" w="med" len="med"/>
-                      <a:tailEnd type="none" w="med" len="med"/>
-                    </a:lnT>
-                    <a:lnB w="6350" cap="flat" cmpd="sng" algn="ctr">
-                      <a:solidFill>
-                        <a:srgbClr val="D9E0EA"/>
-                      </a:solidFill>
-                      <a:prstDash val="solid"/>
-                      <a:round/>
-                      <a:headEnd type="none" w="med" len="med"/>
-                      <a:tailEnd type="none" w="med" len="med"/>
-                    </a:lnB>
-                    <a:solidFill>
-                      <a:schemeClr val="bg1"/>
-                    </a:solidFill>
-                  </a:tcPr>
-                </a:tc>
-                <a:tc>
-                  <a:txBody>
-                    <a:bodyPr/>
-                    <a:lstStyle/>
-                    <a:p>
-                      <a:pPr indent="0" marL="0">
-                        <a:buNone/>
-                      </a:pPr>
-                      <a:r>
-                        <a:rPr lang="en-US" sz="750" dirty="0">
-                          <a:solidFill>
-                            <a:schemeClr val="accent5"/>
+                    <a:lnL w="0" cap="flat" cmpd="sng" algn="ctr">
+                      <a:noFill/>
+                    </a:lnL>
+                    <a:lnR w="0" cap="flat" cmpd="sng" algn="ctr">
+                      <a:noFill/>
+                    </a:lnR>
+                    <a:lnT w="0" cap="flat" cmpd="sng" algn="ctr">
+                      <a:noFill/>
+                    </a:lnT>
+                    <a:lnB w="9525" cap="flat" cmpd="sng" algn="ctr">
+                      <a:solidFill>
+                        <a:srgbClr val="D9E0EA"/>
+                      </a:solidFill>
+                      <a:prstDash val="solid"/>
+                      <a:round/>
+                      <a:headEnd type="none" w="med" len="med"/>
+                      <a:tailEnd type="none" w="med" len="med"/>
+                    </a:lnB>
+                    <a:solidFill>
+                      <a:srgbClr val="FFFFFF"/>
+                    </a:solidFill>
+                  </a:tcPr>
+                </a:tc>
+                <a:tc>
+                  <a:txBody>
+                    <a:bodyPr/>
+                    <a:lstStyle/>
+                    <a:p>
+                      <a:pPr indent="0" marL="0">
+                        <a:buNone/>
+                      </a:pPr>
+                      <a:r>
+                        <a:rPr lang="en-US" sz="750" b="1" dirty="0">
+                          <a:solidFill>
+                            <a:schemeClr val="accent1"/>
                           </a:solidFill>
                           <a:latin typeface="Calibri" pitchFamily="34" charset="0"/>
                           <a:ea typeface="Calibri" pitchFamily="34" charset="-122"/>
@@ -7677,44 +6136,26 @@
                     </a:p>
                   </a:txBody>
                   <a:tcPr marL="45720" marR="45720" marT="22860" marB="22860" anchor="ctr">
-                    <a:lnL w="6350" cap="flat" cmpd="sng" algn="ctr">
-                      <a:solidFill>
-                        <a:srgbClr val="D9E0EA"/>
-                      </a:solidFill>
-                      <a:prstDash val="solid"/>
-                      <a:round/>
-                      <a:headEnd type="none" w="med" len="med"/>
-                      <a:tailEnd type="none" w="med" len="med"/>
-                    </a:lnL>
-                    <a:lnR w="6350" cap="flat" cmpd="sng" algn="ctr">
-                      <a:solidFill>
-                        <a:srgbClr val="D9E0EA"/>
-                      </a:solidFill>
-                      <a:prstDash val="solid"/>
-                      <a:round/>
-                      <a:headEnd type="none" w="med" len="med"/>
-                      <a:tailEnd type="none" w="med" len="med"/>
-                    </a:lnR>
-                    <a:lnT w="6350" cap="flat" cmpd="sng" algn="ctr">
-                      <a:solidFill>
-                        <a:srgbClr val="D9E0EA"/>
-                      </a:solidFill>
-                      <a:prstDash val="solid"/>
-                      <a:round/>
-                      <a:headEnd type="none" w="med" len="med"/>
-                      <a:tailEnd type="none" w="med" len="med"/>
-                    </a:lnT>
-                    <a:lnB w="6350" cap="flat" cmpd="sng" algn="ctr">
-                      <a:solidFill>
-                        <a:srgbClr val="D9E0EA"/>
-                      </a:solidFill>
-                      <a:prstDash val="solid"/>
-                      <a:round/>
-                      <a:headEnd type="none" w="med" len="med"/>
-                      <a:tailEnd type="none" w="med" len="med"/>
-                    </a:lnB>
-                    <a:solidFill>
-                      <a:schemeClr val="bg1"/>
+                    <a:lnL w="0" cap="flat" cmpd="sng" algn="ctr">
+                      <a:noFill/>
+                    </a:lnL>
+                    <a:lnR w="0" cap="flat" cmpd="sng" algn="ctr">
+                      <a:noFill/>
+                    </a:lnR>
+                    <a:lnT w="0" cap="flat" cmpd="sng" algn="ctr">
+                      <a:noFill/>
+                    </a:lnT>
+                    <a:lnB w="9525" cap="flat" cmpd="sng" algn="ctr">
+                      <a:solidFill>
+                        <a:srgbClr val="D9E0EA"/>
+                      </a:solidFill>
+                      <a:prstDash val="solid"/>
+                      <a:round/>
+                      <a:headEnd type="none" w="med" len="med"/>
+                      <a:tailEnd type="none" w="med" len="med"/>
+                    </a:lnB>
+                    <a:solidFill>
+                      <a:srgbClr val="FFFFFF"/>
                     </a:solidFill>
                   </a:tcPr>
                 </a:tc>
@@ -7771,44 +6212,26 @@
                     </a:p>
                   </a:txBody>
                   <a:tcPr marL="45720" marR="45720" marT="22860" marB="22860" anchor="ctr">
-                    <a:lnL w="6350" cap="flat" cmpd="sng" algn="ctr">
-                      <a:solidFill>
-                        <a:srgbClr val="D9E0EA"/>
-                      </a:solidFill>
-                      <a:prstDash val="solid"/>
-                      <a:round/>
-                      <a:headEnd type="none" w="med" len="med"/>
-                      <a:tailEnd type="none" w="med" len="med"/>
-                    </a:lnL>
-                    <a:lnR w="6350" cap="flat" cmpd="sng" algn="ctr">
-                      <a:solidFill>
-                        <a:srgbClr val="D9E0EA"/>
-                      </a:solidFill>
-                      <a:prstDash val="solid"/>
-                      <a:round/>
-                      <a:headEnd type="none" w="med" len="med"/>
-                      <a:tailEnd type="none" w="med" len="med"/>
-                    </a:lnR>
-                    <a:lnT w="6350" cap="flat" cmpd="sng" algn="ctr">
-                      <a:solidFill>
-                        <a:srgbClr val="D9E0EA"/>
-                      </a:solidFill>
-                      <a:prstDash val="solid"/>
-                      <a:round/>
-                      <a:headEnd type="none" w="med" len="med"/>
-                      <a:tailEnd type="none" w="med" len="med"/>
-                    </a:lnT>
-                    <a:lnB w="6350" cap="flat" cmpd="sng" algn="ctr">
-                      <a:solidFill>
-                        <a:srgbClr val="D9E0EA"/>
-                      </a:solidFill>
-                      <a:prstDash val="solid"/>
-                      <a:round/>
-                      <a:headEnd type="none" w="med" len="med"/>
-                      <a:tailEnd type="none" w="med" len="med"/>
-                    </a:lnB>
-                    <a:solidFill>
-                      <a:schemeClr val="bg1"/>
+                    <a:lnL w="0" cap="flat" cmpd="sng" algn="ctr">
+                      <a:noFill/>
+                    </a:lnL>
+                    <a:lnR w="0" cap="flat" cmpd="sng" algn="ctr">
+                      <a:noFill/>
+                    </a:lnR>
+                    <a:lnT w="0" cap="flat" cmpd="sng" algn="ctr">
+                      <a:noFill/>
+                    </a:lnT>
+                    <a:lnB w="9525" cap="flat" cmpd="sng" algn="ctr">
+                      <a:solidFill>
+                        <a:srgbClr val="D9E0EA"/>
+                      </a:solidFill>
+                      <a:prstDash val="solid"/>
+                      <a:round/>
+                      <a:headEnd type="none" w="med" len="med"/>
+                      <a:tailEnd type="none" w="med" len="med"/>
+                    </a:lnB>
+                    <a:solidFill>
+                      <a:srgbClr val="FBEAE8"/>
                     </a:solidFill>
                   </a:tcPr>
                 </a:tc>
@@ -7839,59 +6262,41 @@
                     </a:p>
                   </a:txBody>
                   <a:tcPr marL="45720" marR="45720" marT="22860" marB="22860" anchor="ctr">
-                    <a:lnL w="6350" cap="flat" cmpd="sng" algn="ctr">
-                      <a:solidFill>
-                        <a:srgbClr val="D9E0EA"/>
-                      </a:solidFill>
-                      <a:prstDash val="solid"/>
-                      <a:round/>
-                      <a:headEnd type="none" w="med" len="med"/>
-                      <a:tailEnd type="none" w="med" len="med"/>
-                    </a:lnL>
-                    <a:lnR w="6350" cap="flat" cmpd="sng" algn="ctr">
-                      <a:solidFill>
-                        <a:srgbClr val="D9E0EA"/>
-                      </a:solidFill>
-                      <a:prstDash val="solid"/>
-                      <a:round/>
-                      <a:headEnd type="none" w="med" len="med"/>
-                      <a:tailEnd type="none" w="med" len="med"/>
-                    </a:lnR>
-                    <a:lnT w="6350" cap="flat" cmpd="sng" algn="ctr">
-                      <a:solidFill>
-                        <a:srgbClr val="D9E0EA"/>
-                      </a:solidFill>
-                      <a:prstDash val="solid"/>
-                      <a:round/>
-                      <a:headEnd type="none" w="med" len="med"/>
-                      <a:tailEnd type="none" w="med" len="med"/>
-                    </a:lnT>
-                    <a:lnB w="6350" cap="flat" cmpd="sng" algn="ctr">
-                      <a:solidFill>
-                        <a:srgbClr val="D9E0EA"/>
-                      </a:solidFill>
-                      <a:prstDash val="solid"/>
-                      <a:round/>
-                      <a:headEnd type="none" w="med" len="med"/>
-                      <a:tailEnd type="none" w="med" len="med"/>
-                    </a:lnB>
-                    <a:solidFill>
-                      <a:schemeClr val="bg1"/>
-                    </a:solidFill>
-                  </a:tcPr>
-                </a:tc>
-                <a:tc>
-                  <a:txBody>
-                    <a:bodyPr/>
-                    <a:lstStyle/>
-                    <a:p>
-                      <a:pPr indent="0" marL="0">
-                        <a:buNone/>
-                      </a:pPr>
-                      <a:r>
-                        <a:rPr lang="en-US" sz="750" dirty="0">
-                          <a:solidFill>
-                            <a:schemeClr val="accent5"/>
+                    <a:lnL w="0" cap="flat" cmpd="sng" algn="ctr">
+                      <a:noFill/>
+                    </a:lnL>
+                    <a:lnR w="0" cap="flat" cmpd="sng" algn="ctr">
+                      <a:noFill/>
+                    </a:lnR>
+                    <a:lnT w="0" cap="flat" cmpd="sng" algn="ctr">
+                      <a:noFill/>
+                    </a:lnT>
+                    <a:lnB w="9525" cap="flat" cmpd="sng" algn="ctr">
+                      <a:solidFill>
+                        <a:srgbClr val="D9E0EA"/>
+                      </a:solidFill>
+                      <a:prstDash val="solid"/>
+                      <a:round/>
+                      <a:headEnd type="none" w="med" len="med"/>
+                      <a:tailEnd type="none" w="med" len="med"/>
+                    </a:lnB>
+                    <a:solidFill>
+                      <a:srgbClr val="FFFFFF"/>
+                    </a:solidFill>
+                  </a:tcPr>
+                </a:tc>
+                <a:tc>
+                  <a:txBody>
+                    <a:bodyPr/>
+                    <a:lstStyle/>
+                    <a:p>
+                      <a:pPr indent="0" marL="0">
+                        <a:buNone/>
+                      </a:pPr>
+                      <a:r>
+                        <a:rPr lang="en-US" sz="750" b="1" dirty="0">
+                          <a:solidFill>
+                            <a:schemeClr val="accent1"/>
                           </a:solidFill>
                           <a:latin typeface="Calibri" pitchFamily="34" charset="0"/>
                           <a:ea typeface="Calibri" pitchFamily="34" charset="-122"/>
@@ -7907,44 +6312,26 @@
                     </a:p>
                   </a:txBody>
                   <a:tcPr marL="45720" marR="45720" marT="22860" marB="22860" anchor="ctr">
-                    <a:lnL w="6350" cap="flat" cmpd="sng" algn="ctr">
-                      <a:solidFill>
-                        <a:srgbClr val="D9E0EA"/>
-                      </a:solidFill>
-                      <a:prstDash val="solid"/>
-                      <a:round/>
-                      <a:headEnd type="none" w="med" len="med"/>
-                      <a:tailEnd type="none" w="med" len="med"/>
-                    </a:lnL>
-                    <a:lnR w="6350" cap="flat" cmpd="sng" algn="ctr">
-                      <a:solidFill>
-                        <a:srgbClr val="D9E0EA"/>
-                      </a:solidFill>
-                      <a:prstDash val="solid"/>
-                      <a:round/>
-                      <a:headEnd type="none" w="med" len="med"/>
-                      <a:tailEnd type="none" w="med" len="med"/>
-                    </a:lnR>
-                    <a:lnT w="6350" cap="flat" cmpd="sng" algn="ctr">
-                      <a:solidFill>
-                        <a:srgbClr val="D9E0EA"/>
-                      </a:solidFill>
-                      <a:prstDash val="solid"/>
-                      <a:round/>
-                      <a:headEnd type="none" w="med" len="med"/>
-                      <a:tailEnd type="none" w="med" len="med"/>
-                    </a:lnT>
-                    <a:lnB w="6350" cap="flat" cmpd="sng" algn="ctr">
-                      <a:solidFill>
-                        <a:srgbClr val="D9E0EA"/>
-                      </a:solidFill>
-                      <a:prstDash val="solid"/>
-                      <a:round/>
-                      <a:headEnd type="none" w="med" len="med"/>
-                      <a:tailEnd type="none" w="med" len="med"/>
-                    </a:lnB>
-                    <a:solidFill>
-                      <a:schemeClr val="bg1"/>
+                    <a:lnL w="0" cap="flat" cmpd="sng" algn="ctr">
+                      <a:noFill/>
+                    </a:lnL>
+                    <a:lnR w="0" cap="flat" cmpd="sng" algn="ctr">
+                      <a:noFill/>
+                    </a:lnR>
+                    <a:lnT w="0" cap="flat" cmpd="sng" algn="ctr">
+                      <a:noFill/>
+                    </a:lnT>
+                    <a:lnB w="9525" cap="flat" cmpd="sng" algn="ctr">
+                      <a:solidFill>
+                        <a:srgbClr val="D9E0EA"/>
+                      </a:solidFill>
+                      <a:prstDash val="solid"/>
+                      <a:round/>
+                      <a:headEnd type="none" w="med" len="med"/>
+                      <a:tailEnd type="none" w="med" len="med"/>
+                    </a:lnB>
+                    <a:solidFill>
+                      <a:srgbClr val="FFFFFF"/>
                     </a:solidFill>
                   </a:tcPr>
                 </a:tc>
@@ -7953,6 +6340,338 @@
           </a:graphicData>
         </a:graphic>
       </p:graphicFrame>
+      <p:sp>
+        <p:nvSpPr>
+          <p:cNvPr id="16" name="Nota compromiso"/>
+          <p:cNvSpPr txBox="1"/>
+          <p:nvPr/>
+        </p:nvSpPr>
+        <p:spPr>
+          <a:xfrm>
+            <a:off x="4206240" y="1033272"/>
+            <a:ext cx="2377440" cy="219456"/>
+          </a:xfrm>
+          <a:prstGeom prst="rect">
+            <a:avLst/>
+          </a:prstGeom>
+          <a:noFill/>
+          <a:ln/>
+        </p:spPr>
+        <p:txBody>
+          <a:bodyPr wrap="square" lIns="0" tIns="0" rIns="0" bIns="0" rtlCol="0" anchor="ctr"/>
+          <a:lstStyle/>
+          <a:p>
+            <a:pPr algn="r" indent="0" marL="0">
+              <a:buNone/>
+            </a:pPr>
+            <a:r>
+              <a:rPr lang="en-US" sz="850" i="1" dirty="0">
+                <a:solidFill>
+                  <a:schemeClr val="accent5"/>
+                </a:solidFill>
+              </a:rPr>
+              <a:t>Todas con compromiso al 14/10/2026</a:t>
+            </a:r>
+            <a:endParaRPr lang="en-US" sz="850" dirty="0"/>
+          </a:p>
+        </p:txBody>
+      </p:sp>
+      <p:sp>
+        <p:nvSpPr>
+          <p:cNvPr id="17" name="Vencimientos fondo"/>
+          <p:cNvSpPr/>
+          <p:nvPr/>
+        </p:nvSpPr>
+        <p:spPr>
+          <a:xfrm>
+            <a:off x="6812280" y="5779008"/>
+            <a:ext cx="4967935" cy="713232"/>
+          </a:xfrm>
+          <a:prstGeom prst="roundRect">
+            <a:avLst>
+              <a:gd name="adj" fmla="val 10256"/>
+            </a:avLst>
+          </a:prstGeom>
+          <a:solidFill>
+            <a:schemeClr val="bg2"/>
+          </a:solidFill>
+          <a:ln w="12700">
+            <a:solidFill>
+              <a:schemeClr val="bg2">
+                <a:alpha val="0"/>
+              </a:schemeClr>
+            </a:solidFill>
+            <a:prstDash val="solid"/>
+          </a:ln>
+        </p:spPr>
+      </p:sp>
+      <p:sp>
+        <p:nvSpPr>
+          <p:cNvPr id="18" name="Vencimientos título"/>
+          <p:cNvSpPr txBox="1"/>
+          <p:nvPr/>
+        </p:nvSpPr>
+        <p:spPr>
+          <a:xfrm>
+            <a:off x="6949440" y="5852160"/>
+            <a:ext cx="2743200" cy="182880"/>
+          </a:xfrm>
+          <a:prstGeom prst="rect">
+            <a:avLst/>
+          </a:prstGeom>
+          <a:noFill/>
+          <a:ln/>
+        </p:spPr>
+        <p:txBody>
+          <a:bodyPr wrap="square" lIns="0" tIns="0" rIns="0" bIns="0" rtlCol="0" anchor="ctr"/>
+          <a:lstStyle/>
+          <a:p>
+            <a:pPr indent="0" marL="0">
+              <a:buNone/>
+            </a:pPr>
+            <a:r>
+              <a:rPr lang="en-US" sz="800" b="1" spc="200" kern="0" dirty="0">
+                <a:solidFill>
+                  <a:schemeClr val="accent1"/>
+                </a:solidFill>
+              </a:rPr>
+              <a:t>PRÓXIMOS VENCIMIENTOS</a:t>
+            </a:r>
+            <a:endParaRPr lang="en-US" sz="800" dirty="0"/>
+          </a:p>
+        </p:txBody>
+      </p:sp>
+      <p:sp>
+        <p:nvSpPr>
+          <p:cNvPr id="19" name="Vence 0"/>
+          <p:cNvSpPr/>
+          <p:nvPr/>
+        </p:nvSpPr>
+        <p:spPr>
+          <a:xfrm>
+            <a:off x="6949440" y="6071616"/>
+            <a:ext cx="1503578" cy="347472"/>
+          </a:xfrm>
+          <a:prstGeom prst="roundRect">
+            <a:avLst>
+              <a:gd name="adj" fmla="val 15789"/>
+            </a:avLst>
+          </a:prstGeom>
+          <a:solidFill>
+            <a:schemeClr val="bg1"/>
+          </a:solidFill>
+          <a:ln w="9525">
+            <a:solidFill>
+              <a:srgbClr val="D9E0EA"/>
+            </a:solidFill>
+            <a:prstDash val="solid"/>
+          </a:ln>
+        </p:spPr>
+      </p:sp>
+      <p:sp>
+        <p:nvSpPr>
+          <p:cNvPr id="20" name="Vence texto 0"/>
+          <p:cNvSpPr txBox="1"/>
+          <p:nvPr/>
+        </p:nvSpPr>
+        <p:spPr>
+          <a:xfrm>
+            <a:off x="7022592" y="6080760"/>
+            <a:ext cx="1357274" cy="329184"/>
+          </a:xfrm>
+          <a:prstGeom prst="rect">
+            <a:avLst/>
+          </a:prstGeom>
+          <a:noFill/>
+          <a:ln/>
+        </p:spPr>
+        <p:txBody>
+          <a:bodyPr wrap="square" lIns="0" tIns="0" rIns="0" bIns="0" rtlCol="0" anchor="ctr"/>
+          <a:lstStyle/>
+          <a:p>
+            <a:pPr indent="0" marL="0">
+              <a:buNone/>
+            </a:pPr>
+            <a:r>
+              <a:rPr lang="en-US" sz="850" b="1" dirty="0">
+                <a:solidFill>
+                  <a:schemeClr val="accent3"/>
+                </a:solidFill>
+              </a:rPr>
+              <a:t>16 NOV 2026</a:t>
+            </a:r>
+            <a:endParaRPr lang="en-US" sz="850" dirty="0"/>
+          </a:p>
+          <a:p>
+            <a:pPr indent="0" marL="0">
+              <a:buNone/>
+            </a:pPr>
+            <a:r>
+              <a:rPr lang="en-US" sz="750" dirty="0">
+                <a:solidFill>
+                  <a:schemeClr val="tx1"/>
+                </a:solidFill>
+              </a:rPr>
+              <a:t>Plan de Contingencia de Liquidez</a:t>
+            </a:r>
+            <a:endParaRPr lang="en-US" sz="850" dirty="0"/>
+          </a:p>
+        </p:txBody>
+      </p:sp>
+      <p:sp>
+        <p:nvSpPr>
+          <p:cNvPr id="21" name="Vence 1"/>
+          <p:cNvSpPr/>
+          <p:nvPr/>
+        </p:nvSpPr>
+        <p:spPr>
+          <a:xfrm>
+            <a:off x="8544458" y="6071616"/>
+            <a:ext cx="1503578" cy="347472"/>
+          </a:xfrm>
+          <a:prstGeom prst="roundRect">
+            <a:avLst>
+              <a:gd name="adj" fmla="val 15789"/>
+            </a:avLst>
+          </a:prstGeom>
+          <a:solidFill>
+            <a:schemeClr val="bg1"/>
+          </a:solidFill>
+          <a:ln w="9525">
+            <a:solidFill>
+              <a:srgbClr val="D9E0EA"/>
+            </a:solidFill>
+            <a:prstDash val="solid"/>
+          </a:ln>
+        </p:spPr>
+      </p:sp>
+      <p:sp>
+        <p:nvSpPr>
+          <p:cNvPr id="22" name="Vence texto 1"/>
+          <p:cNvSpPr txBox="1"/>
+          <p:nvPr/>
+        </p:nvSpPr>
+        <p:spPr>
+          <a:xfrm>
+            <a:off x="8617610" y="6080760"/>
+            <a:ext cx="1357274" cy="329184"/>
+          </a:xfrm>
+          <a:prstGeom prst="rect">
+            <a:avLst/>
+          </a:prstGeom>
+          <a:noFill/>
+          <a:ln/>
+        </p:spPr>
+        <p:txBody>
+          <a:bodyPr wrap="square" lIns="0" tIns="0" rIns="0" bIns="0" rtlCol="0" anchor="ctr"/>
+          <a:lstStyle/>
+          <a:p>
+            <a:pPr indent="0" marL="0">
+              <a:buNone/>
+            </a:pPr>
+            <a:r>
+              <a:rPr lang="en-US" sz="850" b="1" dirty="0">
+                <a:solidFill>
+                  <a:schemeClr val="accent3"/>
+                </a:solidFill>
+              </a:rPr>
+              <a:t>30 NOV 2026</a:t>
+            </a:r>
+            <a:endParaRPr lang="en-US" sz="850" dirty="0"/>
+          </a:p>
+          <a:p>
+            <a:pPr indent="0" marL="0">
+              <a:buNone/>
+            </a:pPr>
+            <a:r>
+              <a:rPr lang="en-US" sz="750" dirty="0">
+                <a:solidFill>
+                  <a:schemeClr val="tx1"/>
+                </a:solidFill>
+              </a:rPr>
+              <a:t>Auditoría Interna y servicio ACRM</a:t>
+            </a:r>
+            <a:endParaRPr lang="en-US" sz="850" dirty="0"/>
+          </a:p>
+        </p:txBody>
+      </p:sp>
+      <p:sp>
+        <p:nvSpPr>
+          <p:cNvPr id="23" name="Vence 2"/>
+          <p:cNvSpPr/>
+          <p:nvPr/>
+        </p:nvSpPr>
+        <p:spPr>
+          <a:xfrm>
+            <a:off x="10139477" y="6071616"/>
+            <a:ext cx="1503578" cy="347472"/>
+          </a:xfrm>
+          <a:prstGeom prst="roundRect">
+            <a:avLst>
+              <a:gd name="adj" fmla="val 15789"/>
+            </a:avLst>
+          </a:prstGeom>
+          <a:solidFill>
+            <a:schemeClr val="bg1"/>
+          </a:solidFill>
+          <a:ln w="9525">
+            <a:solidFill>
+              <a:srgbClr val="D9E0EA"/>
+            </a:solidFill>
+            <a:prstDash val="solid"/>
+          </a:ln>
+        </p:spPr>
+      </p:sp>
+      <p:sp>
+        <p:nvSpPr>
+          <p:cNvPr id="24" name="Vence texto 2"/>
+          <p:cNvSpPr txBox="1"/>
+          <p:nvPr/>
+        </p:nvSpPr>
+        <p:spPr>
+          <a:xfrm>
+            <a:off x="10212629" y="6080760"/>
+            <a:ext cx="1357274" cy="329184"/>
+          </a:xfrm>
+          <a:prstGeom prst="rect">
+            <a:avLst/>
+          </a:prstGeom>
+          <a:noFill/>
+          <a:ln/>
+        </p:spPr>
+        <p:txBody>
+          <a:bodyPr wrap="square" lIns="0" tIns="0" rIns="0" bIns="0" rtlCol="0" anchor="ctr"/>
+          <a:lstStyle/>
+          <a:p>
+            <a:pPr indent="0" marL="0">
+              <a:buNone/>
+            </a:pPr>
+            <a:r>
+              <a:rPr lang="en-US" sz="850" b="1" dirty="0">
+                <a:solidFill>
+                  <a:schemeClr val="accent3"/>
+                </a:solidFill>
+              </a:rPr>
+              <a:t>NOV 2026</a:t>
+            </a:r>
+            <a:endParaRPr lang="en-US" sz="850" dirty="0"/>
+          </a:p>
+          <a:p>
+            <a:pPr indent="0" marL="0">
+              <a:buNone/>
+            </a:pPr>
+            <a:r>
+              <a:rPr lang="en-US" sz="750" dirty="0">
+                <a:solidFill>
+                  <a:schemeClr val="tx1"/>
+                </a:solidFill>
+              </a:rPr>
+              <a:t>Actualización del BIA</a:t>
+            </a:r>
+            <a:endParaRPr lang="en-US" sz="850" dirty="0"/>
+          </a:p>
+        </p:txBody>
+      </p:sp>
     </p:spTree>
   </p:cSld>
   <p:clrMapOvr>

--- a/supervision-gobierno-corporativo/Matriz_Requerimientos_DS-SABAO-BCS-BC-23486.pptx
+++ b/supervision-gobierno-corporativo/Matriz_Requerimientos_DS-SABAO-BCS-BC-23486.pptx
@@ -1243,7 +1243,7 @@
                     <a:bodyPr/>
                     <a:lstStyle/>
                     <a:p>
-                      <a:pPr indent="0" marL="0">
+                      <a:pPr algn="just" indent="0" marL="0">
                         <a:buNone/>
                       </a:pPr>
                       <a:r>
@@ -1293,7 +1293,7 @@
                     <a:bodyPr/>
                     <a:lstStyle/>
                     <a:p>
-                      <a:pPr indent="0" marL="0">
+                      <a:pPr algn="just" indent="0" marL="0">
                         <a:buNone/>
                       </a:pPr>
                       <a:r>
@@ -1343,7 +1343,7 @@
                     <a:bodyPr/>
                     <a:lstStyle/>
                     <a:p>
-                      <a:pPr indent="0" marL="0">
+                      <a:pPr algn="just" indent="0" marL="0">
                         <a:buNone/>
                       </a:pPr>
                       <a:r>
@@ -1364,7 +1364,7 @@
                       </a:endParaRPr>
                     </a:p>
                     <a:p>
-                      <a:pPr indent="0" marL="0">
+                      <a:pPr algn="just" indent="0" marL="0">
                         <a:buNone/>
                       </a:pPr>
                       <a:r>
@@ -1416,7 +1416,7 @@
                     <a:bodyPr/>
                     <a:lstStyle/>
                     <a:p>
-                      <a:pPr indent="0" marL="0">
+                      <a:pPr algn="just" indent="0" marL="0">
                         <a:buNone/>
                       </a:pPr>
                       <a:r>
@@ -1474,7 +1474,7 @@
                     <a:bodyPr/>
                     <a:lstStyle/>
                     <a:p>
-                      <a:pPr indent="0" marL="0">
+                      <a:pPr algn="just" indent="0" marL="0">
                         <a:buNone/>
                       </a:pPr>
                       <a:r>
@@ -1524,7 +1524,7 @@
                     <a:bodyPr/>
                     <a:lstStyle/>
                     <a:p>
-                      <a:pPr indent="0" marL="0">
+                      <a:pPr algn="just" indent="0" marL="0">
                         <a:buNone/>
                       </a:pPr>
                       <a:r>
@@ -1571,7 +1571,7 @@
                     <a:bodyPr/>
                     <a:lstStyle/>
                     <a:p>
-                      <a:pPr indent="0" marL="0">
+                      <a:pPr algn="l" indent="0" marL="0">
                         <a:buNone/>
                       </a:pPr>
                       <a:r>
@@ -1620,7 +1620,7 @@
                     <a:bodyPr/>
                     <a:lstStyle/>
                     <a:p>
-                      <a:pPr indent="0" marL="0">
+                      <a:pPr algn="just" indent="0" marL="0">
                         <a:buNone/>
                       </a:pPr>
                       <a:r>
@@ -1670,7 +1670,7 @@
                     <a:bodyPr/>
                     <a:lstStyle/>
                     <a:p>
-                      <a:pPr indent="0" marL="0">
+                      <a:pPr algn="just" indent="0" marL="0">
                         <a:buNone/>
                       </a:pPr>
                       <a:r>
@@ -1717,7 +1717,7 @@
                     <a:bodyPr/>
                     <a:lstStyle/>
                     <a:p>
-                      <a:pPr indent="0" marL="0">
+                      <a:pPr algn="l" indent="0" marL="0">
                         <a:buNone/>
                       </a:pPr>
                       <a:r>
@@ -1766,7 +1766,7 @@
                     <a:bodyPr/>
                     <a:lstStyle/>
                     <a:p>
-                      <a:pPr indent="0" marL="0">
+                      <a:pPr algn="just" indent="0" marL="0">
                         <a:buNone/>
                       </a:pPr>
                       <a:r>
@@ -1824,7 +1824,7 @@
                     <a:bodyPr/>
                     <a:lstStyle/>
                     <a:p>
-                      <a:pPr indent="0" marL="0">
+                      <a:pPr algn="just" indent="0" marL="0">
                         <a:buNone/>
                       </a:pPr>
                       <a:r>
@@ -1874,7 +1874,7 @@
                     <a:bodyPr/>
                     <a:lstStyle/>
                     <a:p>
-                      <a:pPr indent="0" marL="0">
+                      <a:pPr algn="just" indent="0" marL="0">
                         <a:buNone/>
                       </a:pPr>
                       <a:r>
@@ -1921,7 +1921,7 @@
                     <a:bodyPr/>
                     <a:lstStyle/>
                     <a:p>
-                      <a:pPr indent="0" marL="0">
+                      <a:pPr algn="l" indent="0" marL="0">
                         <a:buNone/>
                       </a:pPr>
                       <a:r>
@@ -1970,7 +1970,7 @@
                     <a:bodyPr/>
                     <a:lstStyle/>
                     <a:p>
-                      <a:pPr indent="0" marL="0">
+                      <a:pPr algn="just" indent="0" marL="0">
                         <a:buNone/>
                       </a:pPr>
                       <a:r>
@@ -2020,7 +2020,7 @@
                     <a:bodyPr/>
                     <a:lstStyle/>
                     <a:p>
-                      <a:pPr indent="0" marL="0">
+                      <a:pPr algn="just" indent="0" marL="0">
                         <a:buNone/>
                       </a:pPr>
                       <a:r>
@@ -2067,7 +2067,7 @@
                     <a:bodyPr/>
                     <a:lstStyle/>
                     <a:p>
-                      <a:pPr indent="0" marL="0">
+                      <a:pPr algn="l" indent="0" marL="0">
                         <a:buNone/>
                       </a:pPr>
                       <a:r>
@@ -2116,7 +2116,7 @@
                     <a:bodyPr/>
                     <a:lstStyle/>
                     <a:p>
-                      <a:pPr indent="0" marL="0">
+                      <a:pPr algn="just" indent="0" marL="0">
                         <a:buNone/>
                       </a:pPr>
                       <a:r>
@@ -2166,7 +2166,7 @@
                     <a:bodyPr/>
                     <a:lstStyle/>
                     <a:p>
-                      <a:pPr indent="0" marL="0">
+                      <a:pPr algn="just" indent="0" marL="0">
                         <a:buNone/>
                       </a:pPr>
                       <a:r>
@@ -2213,7 +2213,7 @@
                     <a:bodyPr/>
                     <a:lstStyle/>
                     <a:p>
-                      <a:pPr indent="0" marL="0">
+                      <a:pPr algn="l" indent="0" marL="0">
                         <a:buNone/>
                       </a:pPr>
                       <a:r>
@@ -2262,7 +2262,7 @@
                     <a:bodyPr/>
                     <a:lstStyle/>
                     <a:p>
-                      <a:pPr indent="0" marL="0">
+                      <a:pPr algn="just" indent="0" marL="0">
                         <a:buNone/>
                       </a:pPr>
                       <a:r>
@@ -2312,7 +2312,7 @@
                     <a:bodyPr/>
                     <a:lstStyle/>
                     <a:p>
-                      <a:pPr indent="0" marL="0">
+                      <a:pPr algn="just" indent="0" marL="0">
                         <a:buNone/>
                       </a:pPr>
                       <a:r>
@@ -2359,7 +2359,7 @@
                     <a:bodyPr/>
                     <a:lstStyle/>
                     <a:p>
-                      <a:pPr indent="0" marL="0">
+                      <a:pPr algn="l" indent="0" marL="0">
                         <a:buNone/>
                       </a:pPr>
                       <a:r>
@@ -2408,7 +2408,7 @@
                     <a:bodyPr/>
                     <a:lstStyle/>
                     <a:p>
-                      <a:pPr indent="0" marL="0">
+                      <a:pPr algn="just" indent="0" marL="0">
                         <a:buNone/>
                       </a:pPr>
                       <a:r>
@@ -2458,7 +2458,7 @@
                     <a:bodyPr/>
                     <a:lstStyle/>
                     <a:p>
-                      <a:pPr indent="0" marL="0">
+                      <a:pPr algn="just" indent="0" marL="0">
                         <a:buNone/>
                       </a:pPr>
                       <a:r>
@@ -2505,7 +2505,7 @@
                     <a:bodyPr/>
                     <a:lstStyle/>
                     <a:p>
-                      <a:pPr indent="0" marL="0">
+                      <a:pPr algn="l" indent="0" marL="0">
                         <a:buNone/>
                       </a:pPr>
                       <a:r>
@@ -2554,7 +2554,7 @@
                     <a:bodyPr/>
                     <a:lstStyle/>
                     <a:p>
-                      <a:pPr indent="0" marL="0">
+                      <a:pPr algn="just" indent="0" marL="0">
                         <a:buNone/>
                       </a:pPr>
                       <a:r>
@@ -2604,7 +2604,7 @@
                     <a:bodyPr/>
                     <a:lstStyle/>
                     <a:p>
-                      <a:pPr indent="0" marL="0">
+                      <a:pPr algn="just" indent="0" marL="0">
                         <a:buNone/>
                       </a:pPr>
                       <a:r>
@@ -2616,7 +2616,7 @@
                           <a:ea typeface="Calibri" pitchFamily="34" charset="-122"/>
                           <a:cs typeface="Calibri" pitchFamily="34" charset="-120"/>
                         </a:rPr>
-                        <a:t>Comentario CA: 14/10/2026 Compromiso</a:t>
+                        <a:t>Se anexa informe elaborado en fecha 13 de diciembre de 2024, sobre proyecto de implementación de un nuevo sistema de monitoreo de LDA/FT/FPADM y del sistema de fraude de canales digitales.</a:t>
                       </a:r>
                       <a:endParaRPr lang="en-US" sz="750" dirty="0">
                         <a:latin typeface="Calibri" charset="0"/>
@@ -2624,55 +2624,34 @@
                         <a:cs typeface="Calibri" charset="0"/>
                       </a:endParaRPr>
                     </a:p>
-                    <a:p>
-                      <a:pPr indent="0" marL="0">
-                        <a:buNone/>
-                      </a:pPr>
-                      <a:r>
-                        <a:rPr lang="en-US" sz="750" dirty="0">
-                          <a:solidFill>
-                            <a:schemeClr val="tx1"/>
-                          </a:solidFill>
-                          <a:latin typeface="Calibri" pitchFamily="34" charset="0"/>
-                          <a:ea typeface="Calibri" pitchFamily="34" charset="-122"/>
-                          <a:cs typeface="Calibri" pitchFamily="34" charset="-120"/>
-                        </a:rPr>
-                        <a:t>Adjuntar evidencia de fecha de matriz de riesgos.</a:t>
-                      </a:r>
-                      <a:endParaRPr lang="en-US" sz="750" dirty="0">
-                        <a:latin typeface="Calibri" charset="0"/>
-                        <a:ea typeface="Calibri" charset="0"/>
-                        <a:cs typeface="Calibri" charset="0"/>
-                      </a:endParaRPr>
-                    </a:p>
-                  </a:txBody>
-                  <a:tcPr marL="54864" marR="54864" marT="18288" marB="18288" anchor="ctr">
-                    <a:lnL w="0" cap="flat" cmpd="sng" algn="ctr">
-                      <a:noFill/>
-                    </a:lnL>
-                    <a:lnR w="0" cap="flat" cmpd="sng" algn="ctr">
-                      <a:noFill/>
-                    </a:lnR>
-                    <a:lnT w="0" cap="flat" cmpd="sng" algn="ctr">
-                      <a:noFill/>
-                    </a:lnT>
-                    <a:lnB w="9525" cap="flat" cmpd="sng" algn="ctr">
-                      <a:solidFill>
-                        <a:srgbClr val="D9E0EA"/>
-                      </a:solidFill>
-                      <a:prstDash val="solid"/>
-                      <a:round/>
-                      <a:headEnd type="none" w="med" len="med"/>
-                      <a:tailEnd type="none" w="med" len="med"/>
-                    </a:lnB>
-                  </a:tcPr>
-                </a:tc>
-                <a:tc>
-                  <a:txBody>
-                    <a:bodyPr/>
-                    <a:lstStyle/>
-                    <a:p>
-                      <a:pPr indent="0" marL="0">
+                  </a:txBody>
+                  <a:tcPr marL="54864" marR="54864" marT="18288" marB="18288" anchor="ctr">
+                    <a:lnL w="0" cap="flat" cmpd="sng" algn="ctr">
+                      <a:noFill/>
+                    </a:lnL>
+                    <a:lnR w="0" cap="flat" cmpd="sng" algn="ctr">
+                      <a:noFill/>
+                    </a:lnR>
+                    <a:lnT w="0" cap="flat" cmpd="sng" algn="ctr">
+                      <a:noFill/>
+                    </a:lnT>
+                    <a:lnB w="9525" cap="flat" cmpd="sng" algn="ctr">
+                      <a:solidFill>
+                        <a:srgbClr val="D9E0EA"/>
+                      </a:solidFill>
+                      <a:prstDash val="solid"/>
+                      <a:round/>
+                      <a:headEnd type="none" w="med" len="med"/>
+                      <a:tailEnd type="none" w="med" len="med"/>
+                    </a:lnB>
+                  </a:tcPr>
+                </a:tc>
+                <a:tc>
+                  <a:txBody>
+                    <a:bodyPr/>
+                    <a:lstStyle/>
+                    <a:p>
+                      <a:pPr algn="l" indent="0" marL="0">
                         <a:buNone/>
                       </a:pPr>
                       <a:r>
@@ -2721,7 +2700,7 @@
                     <a:bodyPr/>
                     <a:lstStyle/>
                     <a:p>
-                      <a:pPr indent="0" marL="0">
+                      <a:pPr algn="just" indent="0" marL="0">
                         <a:buNone/>
                       </a:pPr>
                       <a:r>
@@ -2771,7 +2750,7 @@
                     <a:bodyPr/>
                     <a:lstStyle/>
                     <a:p>
-                      <a:pPr indent="0" marL="0">
+                      <a:pPr algn="just" indent="0" marL="0">
                         <a:buNone/>
                       </a:pPr>
                       <a:r>
@@ -2792,7 +2771,7 @@
                       </a:endParaRPr>
                     </a:p>
                     <a:p>
-                      <a:pPr indent="0" marL="0">
+                      <a:pPr algn="just" indent="0" marL="0">
                         <a:buNone/>
                       </a:pPr>
                       <a:r>
@@ -2839,7 +2818,7 @@
                     <a:bodyPr/>
                     <a:lstStyle/>
                     <a:p>
-                      <a:pPr indent="0" marL="0">
+                      <a:pPr algn="l" indent="0" marL="0">
                         <a:buNone/>
                       </a:pPr>
                       <a:r>
@@ -2860,7 +2839,7 @@
                       </a:endParaRPr>
                     </a:p>
                     <a:p>
-                      <a:pPr indent="0" marL="0">
+                      <a:pPr algn="l" indent="0" marL="0">
                         <a:buNone/>
                       </a:pPr>
                       <a:r>
@@ -2909,7 +2888,7 @@
                     <a:bodyPr/>
                     <a:lstStyle/>
                     <a:p>
-                      <a:pPr indent="0" marL="0">
+                      <a:pPr algn="just" indent="0" marL="0">
                         <a:buNone/>
                       </a:pPr>
                       <a:r>
@@ -2959,7 +2938,7 @@
                     <a:bodyPr/>
                     <a:lstStyle/>
                     <a:p>
-                      <a:pPr indent="0" marL="0">
+                      <a:pPr algn="just" indent="0" marL="0">
                         <a:buNone/>
                       </a:pPr>
                       <a:r>
@@ -2980,7 +2959,7 @@
                       </a:endParaRPr>
                     </a:p>
                     <a:p>
-                      <a:pPr indent="0" marL="0">
+                      <a:pPr algn="just" indent="0" marL="0">
                         <a:buNone/>
                       </a:pPr>
                       <a:r>
@@ -3000,34 +2979,55 @@
                         <a:cs typeface="Calibri" charset="0"/>
                       </a:endParaRPr>
                     </a:p>
-                  </a:txBody>
-                  <a:tcPr marL="54864" marR="54864" marT="18288" marB="18288" anchor="ctr">
-                    <a:lnL w="0" cap="flat" cmpd="sng" algn="ctr">
-                      <a:noFill/>
-                    </a:lnL>
-                    <a:lnR w="0" cap="flat" cmpd="sng" algn="ctr">
-                      <a:noFill/>
-                    </a:lnR>
-                    <a:lnT w="0" cap="flat" cmpd="sng" algn="ctr">
-                      <a:noFill/>
-                    </a:lnT>
-                    <a:lnB w="9525" cap="flat" cmpd="sng" algn="ctr">
-                      <a:solidFill>
-                        <a:srgbClr val="D9E0EA"/>
-                      </a:solidFill>
-                      <a:prstDash val="solid"/>
-                      <a:round/>
-                      <a:headEnd type="none" w="med" len="med"/>
-                      <a:tailEnd type="none" w="med" len="med"/>
-                    </a:lnB>
-                  </a:tcPr>
-                </a:tc>
-                <a:tc>
-                  <a:txBody>
-                    <a:bodyPr/>
-                    <a:lstStyle/>
-                    <a:p>
-                      <a:pPr indent="0" marL="0">
+                    <a:p>
+                      <a:pPr algn="just" indent="0" marL="0">
+                        <a:buNone/>
+                      </a:pPr>
+                      <a:r>
+                        <a:rPr lang="en-US" sz="750" dirty="0">
+                          <a:solidFill>
+                            <a:schemeClr val="tx1"/>
+                          </a:solidFill>
+                          <a:latin typeface="Calibri" pitchFamily="34" charset="0"/>
+                          <a:ea typeface="Calibri" pitchFamily="34" charset="-122"/>
+                          <a:cs typeface="Calibri" pitchFamily="34" charset="-120"/>
+                        </a:rPr>
+                        <a:t>Se identificarán los servicios tecnológicos tercerizados críticos y se incorporarán en el alcance de las pruebas de continuidad del negocio. Asimismo, se solicitarán a los proveedores los resultados y evidencias de las pruebas realizadas, con el fin de validar la efectividad de los controles implementados.</a:t>
+                      </a:r>
+                      <a:endParaRPr lang="en-US" sz="750" dirty="0">
+                        <a:latin typeface="Calibri" charset="0"/>
+                        <a:ea typeface="Calibri" charset="0"/>
+                        <a:cs typeface="Calibri" charset="0"/>
+                      </a:endParaRPr>
+                    </a:p>
+                  </a:txBody>
+                  <a:tcPr marL="54864" marR="54864" marT="18288" marB="18288" anchor="ctr">
+                    <a:lnL w="0" cap="flat" cmpd="sng" algn="ctr">
+                      <a:noFill/>
+                    </a:lnL>
+                    <a:lnR w="0" cap="flat" cmpd="sng" algn="ctr">
+                      <a:noFill/>
+                    </a:lnR>
+                    <a:lnT w="0" cap="flat" cmpd="sng" algn="ctr">
+                      <a:noFill/>
+                    </a:lnT>
+                    <a:lnB w="9525" cap="flat" cmpd="sng" algn="ctr">
+                      <a:solidFill>
+                        <a:srgbClr val="D9E0EA"/>
+                      </a:solidFill>
+                      <a:prstDash val="solid"/>
+                      <a:round/>
+                      <a:headEnd type="none" w="med" len="med"/>
+                      <a:tailEnd type="none" w="med" len="med"/>
+                    </a:lnB>
+                  </a:tcPr>
+                </a:tc>
+                <a:tc>
+                  <a:txBody>
+                    <a:bodyPr/>
+                    <a:lstStyle/>
+                    <a:p>
+                      <a:pPr algn="l" indent="0" marL="0">
                         <a:buNone/>
                       </a:pPr>
                       <a:r>
@@ -3039,7 +3039,7 @@
                           <a:ea typeface="Calibri" pitchFamily="34" charset="-122"/>
                           <a:cs typeface="Calibri" pitchFamily="34" charset="-120"/>
                         </a:rPr>
-                        <a:t>Seguridad de la información</a:t>
+                        <a:t>Administración de Riesgos/Gerencia de sistemas/Seguridad de la información</a:t>
                       </a:r>
                       <a:endParaRPr lang="en-US" sz="750" dirty="0">
                         <a:latin typeface="Calibri" charset="0"/>
@@ -3076,7 +3076,7 @@
                     <a:bodyPr/>
                     <a:lstStyle/>
                     <a:p>
-                      <a:pPr indent="0" marL="0">
+                      <a:pPr algn="just" indent="0" marL="0">
                         <a:buNone/>
                       </a:pPr>
                       <a:r>
@@ -3126,7 +3126,7 @@
                     <a:bodyPr/>
                     <a:lstStyle/>
                     <a:p>
-                      <a:pPr indent="0" marL="0">
+                      <a:pPr algn="just" indent="0" marL="0">
                         <a:buNone/>
                       </a:pPr>
                       <a:r>
@@ -3147,7 +3147,7 @@
                       </a:endParaRPr>
                     </a:p>
                     <a:p>
-                      <a:pPr indent="0" marL="0">
+                      <a:pPr algn="just" indent="0" marL="0">
                         <a:buNone/>
                       </a:pPr>
                       <a:r>
@@ -3194,7 +3194,7 @@
                     <a:bodyPr/>
                     <a:lstStyle/>
                     <a:p>
-                      <a:pPr indent="0" marL="0">
+                      <a:pPr algn="l" indent="0" marL="0">
                         <a:buNone/>
                       </a:pPr>
                       <a:r>
@@ -3215,7 +3215,7 @@
                       </a:endParaRPr>
                     </a:p>
                     <a:p>
-                      <a:pPr indent="0" marL="0">
+                      <a:pPr algn="l" indent="0" marL="0">
                         <a:buNone/>
                       </a:pPr>
                       <a:r>
@@ -3264,7 +3264,7 @@
                     <a:bodyPr/>
                     <a:lstStyle/>
                     <a:p>
-                      <a:pPr indent="0" marL="0">
+                      <a:pPr algn="just" indent="0" marL="0">
                         <a:buNone/>
                       </a:pPr>
                       <a:r>
@@ -3314,7 +3314,7 @@
                     <a:bodyPr/>
                     <a:lstStyle/>
                     <a:p>
-                      <a:pPr indent="0" marL="0">
+                      <a:pPr algn="just" indent="0" marL="0">
                         <a:buNone/>
                       </a:pPr>
                       <a:r>
@@ -3335,7 +3335,7 @@
                       </a:endParaRPr>
                     </a:p>
                     <a:p>
-                      <a:pPr indent="0" marL="0">
+                      <a:pPr algn="just" indent="0" marL="0">
                         <a:buNone/>
                       </a:pPr>
                       <a:r>
@@ -3382,7 +3382,7 @@
                     <a:bodyPr/>
                     <a:lstStyle/>
                     <a:p>
-                      <a:pPr indent="0" marL="0">
+                      <a:pPr algn="l" indent="0" marL="0">
                         <a:buNone/>
                       </a:pPr>
                       <a:r>
@@ -3431,7 +3431,7 @@
                     <a:bodyPr/>
                     <a:lstStyle/>
                     <a:p>
-                      <a:pPr indent="0" marL="0">
+                      <a:pPr algn="just" indent="0" marL="0">
                         <a:buNone/>
                       </a:pPr>
                       <a:r>
@@ -3481,7 +3481,7 @@
                     <a:bodyPr/>
                     <a:lstStyle/>
                     <a:p>
-                      <a:pPr indent="0" marL="0">
+                      <a:pPr algn="just" indent="0" marL="0">
                         <a:buNone/>
                       </a:pPr>
                       <a:r>
@@ -3502,7 +3502,7 @@
                       </a:endParaRPr>
                     </a:p>
                     <a:p>
-                      <a:pPr indent="0" marL="0">
+                      <a:pPr algn="just" indent="0" marL="0">
                         <a:buNone/>
                       </a:pPr>
                       <a:r>
@@ -3549,7 +3549,7 @@
                     <a:bodyPr/>
                     <a:lstStyle/>
                     <a:p>
-                      <a:pPr indent="0" marL="0">
+                      <a:pPr algn="l" indent="0" marL="0">
                         <a:buNone/>
                       </a:pPr>
                       <a:r>
@@ -3598,7 +3598,7 @@
                     <a:bodyPr/>
                     <a:lstStyle/>
                     <a:p>
-                      <a:pPr indent="0" marL="0">
+                      <a:pPr algn="just" indent="0" marL="0">
                         <a:buNone/>
                       </a:pPr>
                       <a:r>
@@ -3648,7 +3648,7 @@
                     <a:bodyPr/>
                     <a:lstStyle/>
                     <a:p>
-                      <a:pPr indent="0" marL="0">
+                      <a:pPr algn="just" indent="0" marL="0">
                         <a:buNone/>
                       </a:pPr>
                       <a:r>
@@ -3669,7 +3669,7 @@
                       </a:endParaRPr>
                     </a:p>
                     <a:p>
-                      <a:pPr indent="0" marL="0">
+                      <a:pPr algn="just" indent="0" marL="0">
                         <a:buNone/>
                       </a:pPr>
                       <a:r>
@@ -3716,7 +3716,7 @@
                     <a:bodyPr/>
                     <a:lstStyle/>
                     <a:p>
-                      <a:pPr indent="0" marL="0">
+                      <a:pPr algn="l" indent="0" marL="0">
                         <a:buNone/>
                       </a:pPr>
                       <a:r>
@@ -3737,7 +3737,7 @@
                       </a:endParaRPr>
                     </a:p>
                     <a:p>
-                      <a:pPr indent="0" marL="0">
+                      <a:pPr algn="l" indent="0" marL="0">
                         <a:buNone/>
                       </a:pPr>
                       <a:r>
@@ -3786,7 +3786,7 @@
                     <a:bodyPr/>
                     <a:lstStyle/>
                     <a:p>
-                      <a:pPr indent="0" marL="0">
+                      <a:pPr algn="just" indent="0" marL="0">
                         <a:buNone/>
                       </a:pPr>
                       <a:r>
@@ -3836,7 +3836,7 @@
                     <a:bodyPr/>
                     <a:lstStyle/>
                     <a:p>
-                      <a:pPr indent="0" marL="0">
+                      <a:pPr algn="just" indent="0" marL="0">
                         <a:buNone/>
                       </a:pPr>
                       <a:r>
@@ -3883,7 +3883,7 @@
                     <a:bodyPr/>
                     <a:lstStyle/>
                     <a:p>
-                      <a:pPr indent="0" marL="0">
+                      <a:pPr algn="l" indent="0" marL="0">
                         <a:buNone/>
                       </a:pPr>
                       <a:r>
@@ -3904,7 +3904,7 @@
                       </a:endParaRPr>
                     </a:p>
                     <a:p>
-                      <a:pPr indent="0" marL="0">
+                      <a:pPr algn="l" indent="0" marL="0">
                         <a:buNone/>
                       </a:pPr>
                       <a:r>
@@ -3953,7 +3953,7 @@
                     <a:bodyPr/>
                     <a:lstStyle/>
                     <a:p>
-                      <a:pPr indent="0" marL="0">
+                      <a:pPr algn="just" indent="0" marL="0">
                         <a:buNone/>
                       </a:pPr>
                       <a:r>
@@ -4003,7 +4003,7 @@
                     <a:bodyPr/>
                     <a:lstStyle/>
                     <a:p>
-                      <a:pPr indent="0" marL="0">
+                      <a:pPr algn="just" indent="0" marL="0">
                         <a:buNone/>
                       </a:pPr>
                       <a:r>
@@ -4024,7 +4024,7 @@
                       </a:endParaRPr>
                     </a:p>
                     <a:p>
-                      <a:pPr indent="0" marL="0">
+                      <a:pPr algn="just" indent="0" marL="0">
                         <a:buNone/>
                       </a:pPr>
                       <a:r>
@@ -4071,7 +4071,7 @@
                     <a:bodyPr/>
                     <a:lstStyle/>
                     <a:p>
-                      <a:pPr indent="0" marL="0">
+                      <a:pPr algn="l" indent="0" marL="0">
                         <a:buNone/>
                       </a:pPr>
                       <a:r>
@@ -4092,7 +4092,7 @@
                       </a:endParaRPr>
                     </a:p>
                     <a:p>
-                      <a:pPr indent="0" marL="0">
+                      <a:pPr algn="l" indent="0" marL="0">
                         <a:buNone/>
                       </a:pPr>
                       <a:r>
@@ -4141,7 +4141,7 @@
                     <a:bodyPr/>
                     <a:lstStyle/>
                     <a:p>
-                      <a:pPr indent="0" marL="0">
+                      <a:pPr algn="just" indent="0" marL="0">
                         <a:buNone/>
                       </a:pPr>
                       <a:r>
@@ -4191,7 +4191,7 @@
                     <a:bodyPr/>
                     <a:lstStyle/>
                     <a:p>
-                      <a:pPr indent="0" marL="0">
+                      <a:pPr algn="just" indent="0" marL="0">
                         <a:buNone/>
                       </a:pPr>
                       <a:r>
@@ -4212,7 +4212,7 @@
                       </a:endParaRPr>
                     </a:p>
                     <a:p>
-                      <a:pPr indent="0" marL="0">
+                      <a:pPr algn="just" indent="0" marL="0">
                         <a:buNone/>
                       </a:pPr>
                       <a:r>
@@ -4233,7 +4233,7 @@
                       </a:endParaRPr>
                     </a:p>
                     <a:p>
-                      <a:pPr indent="0" marL="0">
+                      <a:pPr algn="just" indent="0" marL="0">
                         <a:buNone/>
                       </a:pPr>
                       <a:r>
@@ -4254,7 +4254,7 @@
                       </a:endParaRPr>
                     </a:p>
                     <a:p>
-                      <a:pPr indent="0" marL="0">
+                      <a:pPr algn="just" indent="0" marL="0">
                         <a:buNone/>
                       </a:pPr>
                       <a:r>
@@ -4301,7 +4301,7 @@
                     <a:bodyPr/>
                     <a:lstStyle/>
                     <a:p>
-                      <a:pPr indent="0" marL="0">
+                      <a:pPr algn="l" indent="0" marL="0">
                         <a:buNone/>
                       </a:pPr>
                       <a:r>
@@ -4322,7 +4322,7 @@
                       </a:endParaRPr>
                     </a:p>
                     <a:p>
-                      <a:pPr indent="0" marL="0">
+                      <a:pPr algn="l" indent="0" marL="0">
                         <a:buNone/>
                       </a:pPr>
                       <a:r>
@@ -4513,7 +4513,7 @@
                     <a:bodyPr/>
                     <a:lstStyle/>
                     <a:p>
-                      <a:pPr indent="0" marL="0">
+                      <a:pPr algn="just" indent="0" marL="0">
                         <a:buNone/>
                       </a:pPr>
                       <a:r>
@@ -4563,7 +4563,7 @@
                     <a:bodyPr/>
                     <a:lstStyle/>
                     <a:p>
-                      <a:pPr indent="0" marL="0">
+                      <a:pPr algn="just" indent="0" marL="0">
                         <a:buNone/>
                       </a:pPr>
                       <a:r>
@@ -4613,7 +4613,7 @@
                     <a:bodyPr/>
                     <a:lstStyle/>
                     <a:p>
-                      <a:pPr indent="0" marL="0">
+                      <a:pPr algn="just" indent="0" marL="0">
                         <a:buNone/>
                       </a:pPr>
                       <a:r>
@@ -4634,7 +4634,7 @@
                       </a:endParaRPr>
                     </a:p>
                     <a:p>
-                      <a:pPr indent="0" marL="0">
+                      <a:pPr algn="just" indent="0" marL="0">
                         <a:buNone/>
                       </a:pPr>
                       <a:r>
@@ -4686,7 +4686,7 @@
                     <a:bodyPr/>
                     <a:lstStyle/>
                     <a:p>
-                      <a:pPr indent="0" marL="0">
+                      <a:pPr algn="just" indent="0" marL="0">
                         <a:buNone/>
                       </a:pPr>
                       <a:r>
@@ -4707,7 +4707,7 @@
                       </a:endParaRPr>
                     </a:p>
                     <a:p>
-                      <a:pPr indent="0" marL="0">
+                      <a:pPr algn="just" indent="0" marL="0">
                         <a:buNone/>
                       </a:pPr>
                       <a:r>
@@ -4728,7 +4728,7 @@
                       </a:endParaRPr>
                     </a:p>
                     <a:p>
-                      <a:pPr indent="0" marL="0">
+                      <a:pPr algn="just" indent="0" marL="0">
                         <a:buNone/>
                       </a:pPr>
                       <a:r>
@@ -4786,7 +4786,7 @@
                     <a:bodyPr/>
                     <a:lstStyle/>
                     <a:p>
-                      <a:pPr indent="0" marL="0">
+                      <a:pPr algn="just" indent="0" marL="0">
                         <a:buNone/>
                       </a:pPr>
                       <a:r>
@@ -4807,7 +4807,7 @@
                       </a:endParaRPr>
                     </a:p>
                     <a:p>
-                      <a:pPr indent="0" marL="0">
+                      <a:pPr algn="just" indent="0" marL="0">
                         <a:buNone/>
                       </a:pPr>
                       <a:r>
@@ -4828,7 +4828,7 @@
                       </a:endParaRPr>
                     </a:p>
                     <a:p>
-                      <a:pPr indent="0" marL="0">
+                      <a:pPr algn="just" indent="0" marL="0">
                         <a:buNone/>
                       </a:pPr>
                       <a:r>
@@ -4849,7 +4849,7 @@
                       </a:endParaRPr>
                     </a:p>
                     <a:p>
-                      <a:pPr indent="0" marL="0">
+                      <a:pPr algn="just" indent="0" marL="0">
                         <a:buNone/>
                       </a:pPr>
                       <a:r>
@@ -4899,7 +4899,7 @@
                     <a:bodyPr/>
                     <a:lstStyle/>
                     <a:p>
-                      <a:pPr indent="0" marL="0">
+                      <a:pPr algn="just" indent="0" marL="0">
                         <a:buNone/>
                       </a:pPr>
                       <a:r>
@@ -4920,7 +4920,7 @@
                       </a:endParaRPr>
                     </a:p>
                     <a:p>
-                      <a:pPr indent="0" marL="0">
+                      <a:pPr algn="just" indent="0" marL="0">
                         <a:buNone/>
                       </a:pPr>
                       <a:r>
@@ -4941,7 +4941,7 @@
                       </a:endParaRPr>
                     </a:p>
                     <a:p>
-                      <a:pPr indent="0" marL="0">
+                      <a:pPr algn="just" indent="0" marL="0">
                         <a:buNone/>
                       </a:pPr>
                       <a:r>
@@ -4962,7 +4962,7 @@
                       </a:endParaRPr>
                     </a:p>
                     <a:p>
-                      <a:pPr indent="0" marL="0">
+                      <a:pPr algn="just" indent="0" marL="0">
                         <a:buNone/>
                       </a:pPr>
                       <a:r>
@@ -4983,7 +4983,7 @@
                       </a:endParaRPr>
                     </a:p>
                     <a:p>
-                      <a:pPr indent="0" marL="0">
+                      <a:pPr algn="just" indent="0" marL="0">
                         <a:buNone/>
                       </a:pPr>
                       <a:r>
@@ -5004,7 +5004,7 @@
                       </a:endParaRPr>
                     </a:p>
                     <a:p>
-                      <a:pPr indent="0" marL="0">
+                      <a:pPr algn="just" indent="0" marL="0">
                         <a:buNone/>
                       </a:pPr>
                       <a:r>
@@ -5025,7 +5025,7 @@
                       </a:endParaRPr>
                     </a:p>
                     <a:p>
-                      <a:pPr indent="0" marL="0">
+                      <a:pPr algn="just" indent="0" marL="0">
                         <a:buNone/>
                       </a:pPr>
                       <a:r>
@@ -5072,7 +5072,7 @@
                     <a:bodyPr/>
                     <a:lstStyle/>
                     <a:p>
-                      <a:pPr indent="0" marL="0">
+                      <a:pPr algn="l" indent="0" marL="0">
                         <a:buNone/>
                       </a:pPr>
                       <a:r>
@@ -5121,7 +5121,7 @@
                     <a:bodyPr/>
                     <a:lstStyle/>
                     <a:p>
-                      <a:pPr indent="0" marL="0">
+                      <a:pPr algn="just" indent="0" marL="0">
                         <a:buNone/>
                       </a:pPr>
                       <a:r>
@@ -5142,7 +5142,7 @@
                       </a:endParaRPr>
                     </a:p>
                     <a:p>
-                      <a:pPr indent="0" marL="0">
+                      <a:pPr algn="just" indent="0" marL="0">
                         <a:buNone/>
                       </a:pPr>
                       <a:r>
@@ -5163,7 +5163,7 @@
                       </a:endParaRPr>
                     </a:p>
                     <a:p>
-                      <a:pPr indent="0" marL="0">
+                      <a:pPr algn="just" indent="0" marL="0">
                         <a:buNone/>
                       </a:pPr>
                       <a:r>
@@ -5184,7 +5184,7 @@
                       </a:endParaRPr>
                     </a:p>
                     <a:p>
-                      <a:pPr indent="0" marL="0">
+                      <a:pPr algn="just" indent="0" marL="0">
                         <a:buNone/>
                       </a:pPr>
                       <a:r>
@@ -5234,7 +5234,7 @@
                     <a:bodyPr/>
                     <a:lstStyle/>
                     <a:p>
-                      <a:pPr indent="0" marL="0">
+                      <a:pPr algn="just" indent="0" marL="0">
                         <a:buNone/>
                       </a:pPr>
                       <a:r>
@@ -5255,7 +5255,7 @@
                       </a:endParaRPr>
                     </a:p>
                     <a:p>
-                      <a:pPr indent="0" marL="0">
+                      <a:pPr algn="just" indent="0" marL="0">
                         <a:buNone/>
                       </a:pPr>
                       <a:r>
@@ -5302,7 +5302,7 @@
                     <a:bodyPr/>
                     <a:lstStyle/>
                     <a:p>
-                      <a:pPr indent="0" marL="0">
+                      <a:pPr algn="l" indent="0" marL="0">
                         <a:buNone/>
                       </a:pPr>
                       <a:r>
@@ -5351,7 +5351,7 @@
                     <a:bodyPr/>
                     <a:lstStyle/>
                     <a:p>
-                      <a:pPr indent="0" marL="0">
+                      <a:pPr algn="just" indent="0" marL="0">
                         <a:buNone/>
                       </a:pPr>
                       <a:r>
@@ -5409,7 +5409,7 @@
                     <a:bodyPr/>
                     <a:lstStyle/>
                     <a:p>
-                      <a:pPr indent="0" marL="0">
+                      <a:pPr algn="just" indent="0" marL="0">
                         <a:buNone/>
                       </a:pPr>
                       <a:r>
@@ -5430,7 +5430,7 @@
                       </a:endParaRPr>
                     </a:p>
                     <a:p>
-                      <a:pPr indent="0" marL="0">
+                      <a:pPr algn="just" indent="0" marL="0">
                         <a:buNone/>
                       </a:pPr>
                       <a:r>
@@ -5480,7 +5480,7 @@
                     <a:bodyPr/>
                     <a:lstStyle/>
                     <a:p>
-                      <a:pPr indent="0" marL="0">
+                      <a:pPr algn="just" indent="0" marL="0">
                         <a:buNone/>
                       </a:pPr>
                       <a:r>
@@ -5501,7 +5501,7 @@
                       </a:endParaRPr>
                     </a:p>
                     <a:p>
-                      <a:pPr indent="0" marL="0">
+                      <a:pPr algn="just" indent="0" marL="0">
                         <a:buNone/>
                       </a:pPr>
                       <a:r>
@@ -5548,7 +5548,7 @@
                     <a:bodyPr/>
                     <a:lstStyle/>
                     <a:p>
-                      <a:pPr indent="0" marL="0">
+                      <a:pPr algn="l" indent="0" marL="0">
                         <a:buNone/>
                       </a:pPr>
                       <a:r>
@@ -5597,7 +5597,7 @@
                     <a:bodyPr/>
                     <a:lstStyle/>
                     <a:p>
-                      <a:pPr indent="0" marL="0">
+                      <a:pPr algn="just" indent="0" marL="0">
                         <a:buNone/>
                       </a:pPr>
                       <a:r>
@@ -5655,7 +5655,7 @@
                     <a:bodyPr/>
                     <a:lstStyle/>
                     <a:p>
-                      <a:pPr indent="0" marL="0">
+                      <a:pPr algn="just" indent="0" marL="0">
                         <a:buNone/>
                       </a:pPr>
                       <a:r>
@@ -5676,7 +5676,7 @@
                       </a:endParaRPr>
                     </a:p>
                     <a:p>
-                      <a:pPr indent="0" marL="0">
+                      <a:pPr algn="just" indent="0" marL="0">
                         <a:buNone/>
                       </a:pPr>
                       <a:r>
@@ -5697,7 +5697,7 @@
                       </a:endParaRPr>
                     </a:p>
                     <a:p>
-                      <a:pPr indent="0" marL="0">
+                      <a:pPr algn="just" indent="0" marL="0">
                         <a:buNone/>
                       </a:pPr>
                       <a:r>
@@ -5747,7 +5747,7 @@
                     <a:bodyPr/>
                     <a:lstStyle/>
                     <a:p>
-                      <a:pPr indent="0" marL="0">
+                      <a:pPr algn="just" indent="0" marL="0">
                         <a:buNone/>
                       </a:pPr>
                       <a:r>
@@ -5794,7 +5794,7 @@
                     <a:bodyPr/>
                     <a:lstStyle/>
                     <a:p>
-                      <a:pPr indent="0" marL="0">
+                      <a:pPr algn="l" indent="0" marL="0">
                         <a:buNone/>
                       </a:pPr>
                       <a:r>
@@ -5843,7 +5843,7 @@
                     <a:bodyPr/>
                     <a:lstStyle/>
                     <a:p>
-                      <a:pPr indent="0" marL="0">
+                      <a:pPr algn="just" indent="0" marL="0">
                         <a:buNone/>
                       </a:pPr>
                       <a:r>
@@ -5864,7 +5864,7 @@
                       </a:endParaRPr>
                     </a:p>
                     <a:p>
-                      <a:pPr indent="0" marL="0">
+                      <a:pPr algn="just" indent="0" marL="0">
                         <a:buNone/>
                       </a:pPr>
                       <a:r>
@@ -5885,7 +5885,7 @@
                       </a:endParaRPr>
                     </a:p>
                     <a:p>
-                      <a:pPr indent="0" marL="0">
+                      <a:pPr algn="just" indent="0" marL="0">
                         <a:buNone/>
                       </a:pPr>
                       <a:r>
@@ -5935,7 +5935,7 @@
                     <a:bodyPr/>
                     <a:lstStyle/>
                     <a:p>
-                      <a:pPr indent="0" marL="0">
+                      <a:pPr algn="just" indent="0" marL="0">
                         <a:buNone/>
                       </a:pPr>
                       <a:r>
@@ -5982,7 +5982,7 @@
                     <a:bodyPr/>
                     <a:lstStyle/>
                     <a:p>
-                      <a:pPr indent="0" marL="0">
+                      <a:pPr algn="l" indent="0" marL="0">
                         <a:buNone/>
                       </a:pPr>
                       <a:r>
@@ -6031,7 +6031,7 @@
                     <a:bodyPr/>
                     <a:lstStyle/>
                     <a:p>
-                      <a:pPr indent="0" marL="0">
+                      <a:pPr algn="just" indent="0" marL="0">
                         <a:buNone/>
                       </a:pPr>
                       <a:r>
@@ -6089,7 +6089,7 @@
                     <a:bodyPr/>
                     <a:lstStyle/>
                     <a:p>
-                      <a:pPr indent="0" marL="0">
+                      <a:pPr algn="just" indent="0" marL="0">
                         <a:buNone/>
                       </a:pPr>
                       <a:r>
@@ -6147,7 +6147,7 @@
                     <a:bodyPr/>
                     <a:lstStyle/>
                     <a:p>
-                      <a:pPr indent="0" marL="0">
+                      <a:pPr algn="just" indent="0" marL="0">
                         <a:buNone/>
                       </a:pPr>
                       <a:r>
@@ -6168,7 +6168,7 @@
                       </a:endParaRPr>
                     </a:p>
                     <a:p>
-                      <a:pPr indent="0" marL="0">
+                      <a:pPr algn="just" indent="0" marL="0">
                         <a:buNone/>
                       </a:pPr>
                       <a:r>
@@ -6189,7 +6189,7 @@
                       </a:endParaRPr>
                     </a:p>
                     <a:p>
-                      <a:pPr indent="0" marL="0">
+                      <a:pPr algn="just" indent="0" marL="0">
                         <a:buNone/>
                       </a:pPr>
                       <a:r>
@@ -6239,7 +6239,7 @@
                     <a:bodyPr/>
                     <a:lstStyle/>
                     <a:p>
-                      <a:pPr indent="0" marL="0">
+                      <a:pPr algn="just" indent="0" marL="0">
                         <a:buNone/>
                       </a:pPr>
                       <a:r>
@@ -6260,7 +6260,7 @@
                       </a:endParaRPr>
                     </a:p>
                     <a:p>
-                      <a:pPr indent="0" marL="0">
+                      <a:pPr algn="just" indent="0" marL="0">
                         <a:buNone/>
                       </a:pPr>
                       <a:r>
@@ -6307,7 +6307,7 @@
                     <a:bodyPr/>
                     <a:lstStyle/>
                     <a:p>
-                      <a:pPr indent="0" marL="0">
+                      <a:pPr algn="l" indent="0" marL="0">
                         <a:buNone/>
                       </a:pPr>
                       <a:r>
@@ -6356,7 +6356,7 @@
                     <a:bodyPr/>
                     <a:lstStyle/>
                     <a:p>
-                      <a:pPr indent="0" marL="0">
+                      <a:pPr algn="just" indent="0" marL="0">
                         <a:buNone/>
                       </a:pPr>
                       <a:r>
@@ -6377,7 +6377,7 @@
                       </a:endParaRPr>
                     </a:p>
                     <a:p>
-                      <a:pPr indent="0" marL="0">
+                      <a:pPr algn="just" indent="0" marL="0">
                         <a:buNone/>
                       </a:pPr>
                       <a:r>
@@ -6427,7 +6427,7 @@
                     <a:bodyPr/>
                     <a:lstStyle/>
                     <a:p>
-                      <a:pPr indent="0" marL="0">
+                      <a:pPr algn="just" indent="0" marL="0">
                         <a:buNone/>
                       </a:pPr>
                       <a:r>
@@ -6448,7 +6448,7 @@
                       </a:endParaRPr>
                     </a:p>
                     <a:p>
-                      <a:pPr indent="0" marL="0">
+                      <a:pPr algn="just" indent="0" marL="0">
                         <a:buNone/>
                       </a:pPr>
                       <a:r>
@@ -6495,7 +6495,7 @@
                     <a:bodyPr/>
                     <a:lstStyle/>
                     <a:p>
-                      <a:pPr indent="0" marL="0">
+                      <a:pPr algn="l" indent="0" marL="0">
                         <a:buNone/>
                       </a:pPr>
                       <a:r>
@@ -6544,7 +6544,7 @@
                     <a:bodyPr/>
                     <a:lstStyle/>
                     <a:p>
-                      <a:pPr indent="0" marL="0">
+                      <a:pPr algn="just" indent="0" marL="0">
                         <a:buNone/>
                       </a:pPr>
                       <a:r>
@@ -6602,7 +6602,7 @@
                     <a:bodyPr/>
                     <a:lstStyle/>
                     <a:p>
-                      <a:pPr indent="0" marL="0">
+                      <a:pPr algn="just" indent="0" marL="0">
                         <a:buNone/>
                       </a:pPr>
                       <a:r>
@@ -6623,7 +6623,7 @@
                       </a:endParaRPr>
                     </a:p>
                     <a:p>
-                      <a:pPr indent="0" marL="0">
+                      <a:pPr algn="just" indent="0" marL="0">
                         <a:buNone/>
                       </a:pPr>
                       <a:r>
@@ -6644,7 +6644,7 @@
                       </a:endParaRPr>
                     </a:p>
                     <a:p>
-                      <a:pPr indent="0" marL="0">
+                      <a:pPr algn="just" indent="0" marL="0">
                         <a:buNone/>
                       </a:pPr>
                       <a:r>
@@ -6694,7 +6694,7 @@
                     <a:bodyPr/>
                     <a:lstStyle/>
                     <a:p>
-                      <a:pPr indent="0" marL="0">
+                      <a:pPr algn="just" indent="0" marL="0">
                         <a:buNone/>
                       </a:pPr>
                       <a:r>
@@ -6715,7 +6715,7 @@
                       </a:endParaRPr>
                     </a:p>
                     <a:p>
-                      <a:pPr indent="0" marL="0">
+                      <a:pPr algn="just" indent="0" marL="0">
                         <a:buNone/>
                       </a:pPr>
                       <a:r>
@@ -6736,7 +6736,7 @@
                       </a:endParaRPr>
                     </a:p>
                     <a:p>
-                      <a:pPr indent="0" marL="0">
+                      <a:pPr algn="just" indent="0" marL="0">
                         <a:buNone/>
                       </a:pPr>
                       <a:r>
@@ -6757,7 +6757,7 @@
                       </a:endParaRPr>
                     </a:p>
                     <a:p>
-                      <a:pPr indent="0" marL="0">
+                      <a:pPr algn="just" indent="0" marL="0">
                         <a:buNone/>
                       </a:pPr>
                       <a:r>
@@ -6804,7 +6804,7 @@
                     <a:bodyPr/>
                     <a:lstStyle/>
                     <a:p>
-                      <a:pPr indent="0" marL="0">
+                      <a:pPr algn="l" indent="0" marL="0">
                         <a:buNone/>
                       </a:pPr>
                       <a:r>
@@ -6853,7 +6853,7 @@
                     <a:bodyPr/>
                     <a:lstStyle/>
                     <a:p>
-                      <a:pPr indent="0" marL="0">
+                      <a:pPr algn="just" indent="0" marL="0">
                         <a:buNone/>
                       </a:pPr>
                       <a:r>
@@ -6874,7 +6874,7 @@
                       </a:endParaRPr>
                     </a:p>
                     <a:p>
-                      <a:pPr indent="0" marL="0">
+                      <a:pPr algn="just" indent="0" marL="0">
                         <a:buNone/>
                       </a:pPr>
                       <a:r>
@@ -6924,7 +6924,7 @@
                     <a:bodyPr/>
                     <a:lstStyle/>
                     <a:p>
-                      <a:pPr indent="0" marL="0">
+                      <a:pPr algn="just" indent="0" marL="0">
                         <a:buNone/>
                       </a:pPr>
                       <a:r>
@@ -6971,7 +6971,7 @@
                     <a:bodyPr/>
                     <a:lstStyle/>
                     <a:p>
-                      <a:pPr indent="0" marL="0">
+                      <a:pPr algn="l" indent="0" marL="0">
                         <a:buNone/>
                       </a:pPr>
                       <a:r>

--- a/supervision-gobierno-corporativo/Matriz_Requerimientos_DS-SABAO-BCS-BC-23486.pptx
+++ b/supervision-gobierno-corporativo/Matriz_Requerimientos_DS-SABAO-BCS-BC-23486.pptx
@@ -7,9 +7,11 @@
   <p:sldIdLst>
     <p:sldId id="256" r:id="rId2"/>
     <p:sldId id="257" r:id="rId3"/>
+    <p:sldId id="258" r:id="rId4"/>
+    <p:sldId id="259" r:id="rId5"/>
   </p:sldIdLst>
   <p:notesMasterIdLst>
-    <p:notesMasterId r:id="rId4"/>
+    <p:notesMasterId r:id="rId6"/>
   </p:notesMasterIdLst>
   <p:sldSz cx="12192000" cy="6858000"/>
   <p:notesSz cx="6858000" cy="12192000"/>
@@ -591,6 +593,94 @@
           <a:p>
             <a:r>
               <a:rPr lang="en-US" dirty="0"/>
+              <a:t>Texto tal como aparece en la Matriz de requerimientos DS-SABAO-BCS-BC-23486 (versión corta). Sección B (continuación).</a:t>
+            </a:r>
+            <a:endParaRPr lang="en-US" dirty="0"/>
+          </a:p>
+        </p:txBody>
+      </p:sp>
+      <p:sp>
+        <p:nvSpPr>
+          <p:cNvPr id="4" name="Slide Number Placeholder 3"/>
+          <p:cNvSpPr>
+            <a:spLocks noGrp="1"/>
+          </p:cNvSpPr>
+          <p:nvPr>
+            <p:ph type="sldNum" sz="quarter" idx="10"/>
+          </p:nvPr>
+        </p:nvSpPr>
+        <p:spPr/>
+        <p:txBody>
+          <a:bodyPr/>
+          <a:lstStyle/>
+          <a:p>
+            <a:fld id="{F7021451-1387-4CA6-816F-3879F97B5CBC}" type="slidenum">
+              <a:rPr lang="en-US"/>
+              <a:t>2</a:t>
+            </a:fld>
+            <a:endParaRPr lang="en-US"/>
+          </a:p>
+        </p:txBody>
+      </p:sp>
+    </p:spTree>
+    <p:extLst>
+      <p:ext uri="{BB962C8B-B14F-4D97-AF65-F5344CB8AC3E}">
+        <p14:creationId xmlns:p14="http://schemas.microsoft.com/office/powerpoint/2010/main" val="1024086991"/>
+      </p:ext>
+    </p:extLst>
+  </p:cSld>
+  <p:clrMapOvr>
+    <a:masterClrMapping/>
+  </p:clrMapOvr>
+</p:notes>
+</file>
+
+<file path=ppt/notesSlides/notesSlide3.xml><?xml version="1.0" encoding="utf-8"?>
+<p:notes xmlns:a="http://schemas.openxmlformats.org/drawingml/2006/main" xmlns:r="http://schemas.openxmlformats.org/officeDocument/2006/relationships" xmlns:p="http://schemas.openxmlformats.org/presentationml/2006/main">
+  <p:cSld>
+    <p:spTree>
+      <p:nvGrpSpPr>
+        <p:cNvPr id="1" name=""/>
+        <p:cNvGrpSpPr/>
+        <p:nvPr/>
+      </p:nvGrpSpPr>
+      <p:grpSpPr>
+        <a:xfrm>
+          <a:off x="0" y="0"/>
+          <a:ext cx="0" cy="0"/>
+          <a:chOff x="0" y="0"/>
+          <a:chExt cx="0" cy="0"/>
+        </a:xfrm>
+      </p:grpSpPr>
+      <p:sp>
+        <p:nvSpPr>
+          <p:cNvPr id="2" name="Slide Image Placeholder 1"/>
+          <p:cNvSpPr>
+            <a:spLocks noGrp="1" noRot="1" noChangeAspect="1"/>
+          </p:cNvSpPr>
+          <p:nvPr>
+            <p:ph type="sldImg"/>
+          </p:nvPr>
+        </p:nvSpPr>
+        <p:spPr/>
+      </p:sp>
+      <p:sp>
+        <p:nvSpPr>
+          <p:cNvPr id="3" name="Notes Placeholder 2"/>
+          <p:cNvSpPr>
+            <a:spLocks noGrp="1"/>
+          </p:cNvSpPr>
+          <p:nvPr>
+            <p:ph type="body" idx="1"/>
+          </p:nvPr>
+        </p:nvSpPr>
+        <p:spPr/>
+        <p:txBody>
+          <a:bodyPr/>
+          <a:lstStyle/>
+          <a:p>
+            <a:r>
+              <a:rPr lang="en-US" dirty="0"/>
               <a:t>Texto tal como aparece en la Matriz de requerimientos DS-SABAO-BCS-BC-23486 (versión corta). Seguimiento a observaciones de visitas anteriores.</a:t>
             </a:r>
             <a:endParaRPr lang="en-US" dirty="0"/>
@@ -614,7 +704,95 @@
           <a:p>
             <a:fld id="{F7021451-1387-4CA6-816F-3879F97B5CBC}" type="slidenum">
               <a:rPr lang="en-US"/>
-              <a:t>2</a:t>
+              <a:t>3</a:t>
+            </a:fld>
+            <a:endParaRPr lang="en-US"/>
+          </a:p>
+        </p:txBody>
+      </p:sp>
+    </p:spTree>
+    <p:extLst>
+      <p:ext uri="{BB962C8B-B14F-4D97-AF65-F5344CB8AC3E}">
+        <p14:creationId xmlns:p14="http://schemas.microsoft.com/office/powerpoint/2010/main" val="1024086991"/>
+      </p:ext>
+    </p:extLst>
+  </p:cSld>
+  <p:clrMapOvr>
+    <a:masterClrMapping/>
+  </p:clrMapOvr>
+</p:notes>
+</file>
+
+<file path=ppt/notesSlides/notesSlide4.xml><?xml version="1.0" encoding="utf-8"?>
+<p:notes xmlns:a="http://schemas.openxmlformats.org/drawingml/2006/main" xmlns:r="http://schemas.openxmlformats.org/officeDocument/2006/relationships" xmlns:p="http://schemas.openxmlformats.org/presentationml/2006/main">
+  <p:cSld>
+    <p:spTree>
+      <p:nvGrpSpPr>
+        <p:cNvPr id="1" name=""/>
+        <p:cNvGrpSpPr/>
+        <p:nvPr/>
+      </p:nvGrpSpPr>
+      <p:grpSpPr>
+        <a:xfrm>
+          <a:off x="0" y="0"/>
+          <a:ext cx="0" cy="0"/>
+          <a:chOff x="0" y="0"/>
+          <a:chExt cx="0" cy="0"/>
+        </a:xfrm>
+      </p:grpSpPr>
+      <p:sp>
+        <p:nvSpPr>
+          <p:cNvPr id="2" name="Slide Image Placeholder 1"/>
+          <p:cNvSpPr>
+            <a:spLocks noGrp="1" noRot="1" noChangeAspect="1"/>
+          </p:cNvSpPr>
+          <p:nvPr>
+            <p:ph type="sldImg"/>
+          </p:nvPr>
+        </p:nvSpPr>
+        <p:spPr/>
+      </p:sp>
+      <p:sp>
+        <p:nvSpPr>
+          <p:cNvPr id="3" name="Notes Placeholder 2"/>
+          <p:cNvSpPr>
+            <a:spLocks noGrp="1"/>
+          </p:cNvSpPr>
+          <p:nvPr>
+            <p:ph type="body" idx="1"/>
+          </p:nvPr>
+        </p:nvSpPr>
+        <p:spPr/>
+        <p:txBody>
+          <a:bodyPr/>
+          <a:lstStyle/>
+          <a:p>
+            <a:r>
+              <a:rPr lang="en-US" dirty="0"/>
+              <a:t>Texto tal como aparece en la Matriz de requerimientos DS-SABAO-BCS-BC-23486 (versión corta). Seguimiento a observaciones de visitas anteriores (continuación).</a:t>
+            </a:r>
+            <a:endParaRPr lang="en-US" dirty="0"/>
+          </a:p>
+        </p:txBody>
+      </p:sp>
+      <p:sp>
+        <p:nvSpPr>
+          <p:cNvPr id="4" name="Slide Number Placeholder 3"/>
+          <p:cNvSpPr>
+            <a:spLocks noGrp="1"/>
+          </p:cNvSpPr>
+          <p:nvPr>
+            <p:ph type="sldNum" sz="quarter" idx="10"/>
+          </p:nvPr>
+        </p:nvSpPr>
+        <p:spPr/>
+        <p:txBody>
+          <a:bodyPr/>
+          <a:lstStyle/>
+          <a:p>
+            <a:fld id="{F7021451-1387-4CA6-816F-3879F97B5CBC}" type="slidenum">
+              <a:rPr lang="en-US"/>
+              <a:t>4</a:t>
             </a:fld>
             <a:endParaRPr lang="en-US"/>
           </a:p>
@@ -698,7 +876,7 @@
         <p:spPr>
           <a:xfrm>
             <a:off x="411480" y="228600"/>
-            <a:ext cx="11368735" cy="411480"/>
+            <a:ext cx="9174175" cy="411480"/>
           </a:xfrm>
           <a:prstGeom prst="rect">
             <a:avLst/>
@@ -740,9 +918,33 @@
           </a:p>
         </p:txBody>
       </p:sp>
+      <p:pic>
+        <p:nvPicPr>
+          <p:cNvPr id="3" name="Image 0" descr="logo_comedica.png">    </p:cNvPr>
+          <p:cNvPicPr>
+            <a:picLocks noChangeAspect="1"/>
+          </p:cNvPicPr>
+          <p:nvPr/>
+        </p:nvPicPr>
+        <p:blipFill>
+          <a:blip r:embed="rId1"/>
+          <a:stretch>
+            <a:fillRect/>
+          </a:stretch>
+        </p:blipFill>
+        <p:spPr>
+          <a:xfrm>
+            <a:off x="9814255" y="109728"/>
+            <a:ext cx="1965960" cy="603504"/>
+          </a:xfrm>
+          <a:prstGeom prst="rect">
+            <a:avLst/>
+          </a:prstGeom>
+        </p:spPr>
+      </p:pic>
       <p:sp>
         <p:nvSpPr>
-          <p:cNvPr id="3" name="Text 0"/>
+          <p:cNvPr id="4" name="Text 0"/>
           <p:cNvSpPr/>
           <p:nvPr/>
         </p:nvSpPr>
@@ -1180,7 +1382,7 @@
         <p:spPr>
           <a:xfrm>
             <a:off x="411480" y="228600"/>
-            <a:ext cx="11368735" cy="411480"/>
+            <a:ext cx="9174175" cy="411480"/>
           </a:xfrm>
           <a:prstGeom prst="rect">
             <a:avLst/>
@@ -1233,9 +1435,9 @@
             <a:tbl>
               <a:tblPr/>
               <a:tblGrid>
-                <a:gridCol w="4480560"/>
-                <a:gridCol w="5120640"/>
-                <a:gridCol w="1764792"/>
+                <a:gridCol w="4206240"/>
+                <a:gridCol w="5303520"/>
+                <a:gridCol w="1856232"/>
               </a:tblGrid>
               <a:tr h="0">
                 <a:tc>
@@ -1420,7 +1622,7 @@
                         <a:buNone/>
                       </a:pPr>
                       <a:r>
-                        <a:rPr lang="en-US" sz="700" b="1" dirty="0">
+                        <a:rPr lang="en-US" sz="1100" b="1" dirty="0">
                           <a:solidFill>
                             <a:schemeClr val="accent1"/>
                           </a:solidFill>
@@ -1430,7 +1632,7 @@
                         </a:rPr>
                         <a:t>A. Gestión de Riesgo de LDA/FT/FPADM</a:t>
                       </a:r>
-                      <a:endParaRPr lang="en-US" sz="700" dirty="0">
+                      <a:endParaRPr lang="en-US" sz="1100" dirty="0">
                         <a:latin typeface="Calibri" charset="0"/>
                         <a:ea typeface="Calibri" charset="0"/>
                         <a:cs typeface="Calibri" charset="0"/>
@@ -1478,7 +1680,7 @@
                         <a:buNone/>
                       </a:pPr>
                       <a:r>
-                        <a:rPr lang="en-US" sz="750" b="1" dirty="0">
+                        <a:rPr lang="en-US" sz="1100" b="1" dirty="0">
                           <a:solidFill>
                             <a:schemeClr val="tx1"/>
                           </a:solidFill>
@@ -1488,7 +1690,7 @@
                         </a:rPr>
                         <a:t>Deficiencias en la conformación y actualización de expedientes de clientes.</a:t>
                       </a:r>
-                      <a:endParaRPr lang="en-US" sz="750" dirty="0">
+                      <a:endParaRPr lang="en-US" sz="1100" dirty="0">
                         <a:latin typeface="Calibri" charset="0"/>
                         <a:ea typeface="Calibri" charset="0"/>
                         <a:cs typeface="Calibri" charset="0"/>
@@ -1528,7 +1730,7 @@
                         <a:buNone/>
                       </a:pPr>
                       <a:r>
-                        <a:rPr lang="en-US" sz="750" dirty="0">
+                        <a:rPr lang="en-US" sz="1100" dirty="0">
                           <a:solidFill>
                             <a:schemeClr val="tx1"/>
                           </a:solidFill>
@@ -1538,7 +1740,7 @@
                         </a:rPr>
                         <a:t>Comentario CA: 14/10/2026 Compromiso</a:t>
                       </a:r>
-                      <a:endParaRPr lang="en-US" sz="750" dirty="0">
+                      <a:endParaRPr lang="en-US" sz="1100" dirty="0">
                         <a:latin typeface="Calibri" charset="0"/>
                         <a:ea typeface="Calibri" charset="0"/>
                         <a:cs typeface="Calibri" charset="0"/>
@@ -1575,7 +1777,7 @@
                         <a:buNone/>
                       </a:pPr>
                       <a:r>
-                        <a:rPr lang="en-US" sz="750" b="1" dirty="0">
+                        <a:rPr lang="en-US" sz="1100" b="1" dirty="0">
                           <a:solidFill>
                             <a:schemeClr val="accent1"/>
                           </a:solidFill>
@@ -1585,7 +1787,7 @@
                         </a:rPr>
                         <a:t>Gerencia de Cumplimiento</a:t>
                       </a:r>
-                      <a:endParaRPr lang="en-US" sz="750" dirty="0">
+                      <a:endParaRPr lang="en-US" sz="1100" dirty="0">
                         <a:latin typeface="Calibri" charset="0"/>
                         <a:ea typeface="Calibri" charset="0"/>
                         <a:cs typeface="Calibri" charset="0"/>
@@ -1624,7 +1826,7 @@
                         <a:buNone/>
                       </a:pPr>
                       <a:r>
-                        <a:rPr lang="en-US" sz="750" b="1" dirty="0">
+                        <a:rPr lang="en-US" sz="1100" b="1" dirty="0">
                           <a:solidFill>
                             <a:schemeClr val="tx1"/>
                           </a:solidFill>
@@ -1634,7 +1836,7 @@
                         </a:rPr>
                         <a:t>Deficiencias en la identificación de la actividad económica realizada por clientes.</a:t>
                       </a:r>
-                      <a:endParaRPr lang="en-US" sz="750" dirty="0">
+                      <a:endParaRPr lang="en-US" sz="1100" dirty="0">
                         <a:latin typeface="Calibri" charset="0"/>
                         <a:ea typeface="Calibri" charset="0"/>
                         <a:cs typeface="Calibri" charset="0"/>
@@ -1674,7 +1876,7 @@
                         <a:buNone/>
                       </a:pPr>
                       <a:r>
-                        <a:rPr lang="en-US" sz="750" dirty="0">
+                        <a:rPr lang="en-US" sz="1100" dirty="0">
                           <a:solidFill>
                             <a:schemeClr val="tx1"/>
                           </a:solidFill>
@@ -1684,7 +1886,7 @@
                         </a:rPr>
                         <a:t>Comentario CA: 14/10/2026 Compromiso</a:t>
                       </a:r>
-                      <a:endParaRPr lang="en-US" sz="750" dirty="0">
+                      <a:endParaRPr lang="en-US" sz="1100" dirty="0">
                         <a:latin typeface="Calibri" charset="0"/>
                         <a:ea typeface="Calibri" charset="0"/>
                         <a:cs typeface="Calibri" charset="0"/>
@@ -1721,7 +1923,7 @@
                         <a:buNone/>
                       </a:pPr>
                       <a:r>
-                        <a:rPr lang="en-US" sz="750" b="1" dirty="0">
+                        <a:rPr lang="en-US" sz="1100" b="1" dirty="0">
                           <a:solidFill>
                             <a:schemeClr val="accent1"/>
                           </a:solidFill>
@@ -1731,7 +1933,7 @@
                         </a:rPr>
                         <a:t>Gerencia de Cumplimiento</a:t>
                       </a:r>
-                      <a:endParaRPr lang="en-US" sz="750" dirty="0">
+                      <a:endParaRPr lang="en-US" sz="1100" dirty="0">
                         <a:latin typeface="Calibri" charset="0"/>
                         <a:ea typeface="Calibri" charset="0"/>
                         <a:cs typeface="Calibri" charset="0"/>
@@ -1770,7 +1972,7 @@
                         <a:buNone/>
                       </a:pPr>
                       <a:r>
-                        <a:rPr lang="en-US" sz="700" b="1" dirty="0">
+                        <a:rPr lang="en-US" sz="1100" b="1" dirty="0">
                           <a:solidFill>
                             <a:schemeClr val="accent1"/>
                           </a:solidFill>
@@ -1780,7 +1982,7 @@
                         </a:rPr>
                         <a:t>B. Proceso de implementación de la Herramienta de Monitoreo</a:t>
                       </a:r>
-                      <a:endParaRPr lang="en-US" sz="700" dirty="0">
+                      <a:endParaRPr lang="en-US" sz="1100" dirty="0">
                         <a:latin typeface="Calibri" charset="0"/>
                         <a:ea typeface="Calibri" charset="0"/>
                         <a:cs typeface="Calibri" charset="0"/>
@@ -1828,7 +2030,7 @@
                         <a:buNone/>
                       </a:pPr>
                       <a:r>
-                        <a:rPr lang="en-US" sz="750" b="1" dirty="0">
+                        <a:rPr lang="en-US" sz="1100" b="1" dirty="0">
                           <a:solidFill>
                             <a:schemeClr val="tx1"/>
                           </a:solidFill>
@@ -1838,7 +2040,7 @@
                         </a:rPr>
                         <a:t>Falta de actualización de Metodología y matriz de riesgo LA/FT/FPADM de la Entidad</a:t>
                       </a:r>
-                      <a:endParaRPr lang="en-US" sz="750" dirty="0">
+                      <a:endParaRPr lang="en-US" sz="1100" dirty="0">
                         <a:latin typeface="Calibri" charset="0"/>
                         <a:ea typeface="Calibri" charset="0"/>
                         <a:cs typeface="Calibri" charset="0"/>
@@ -1878,7 +2080,7 @@
                         <a:buNone/>
                       </a:pPr>
                       <a:r>
-                        <a:rPr lang="en-US" sz="750" dirty="0">
+                        <a:rPr lang="en-US" sz="1100" dirty="0">
                           <a:solidFill>
                             <a:schemeClr val="tx1"/>
                           </a:solidFill>
@@ -1888,7 +2090,7 @@
                         </a:rPr>
                         <a:t>Comentario CA: 14/10/2026 Compromiso</a:t>
                       </a:r>
-                      <a:endParaRPr lang="en-US" sz="750" dirty="0">
+                      <a:endParaRPr lang="en-US" sz="1100" dirty="0">
                         <a:latin typeface="Calibri" charset="0"/>
                         <a:ea typeface="Calibri" charset="0"/>
                         <a:cs typeface="Calibri" charset="0"/>
@@ -1925,7 +2127,7 @@
                         <a:buNone/>
                       </a:pPr>
                       <a:r>
-                        <a:rPr lang="en-US" sz="750" b="1" dirty="0">
+                        <a:rPr lang="en-US" sz="1100" b="1" dirty="0">
                           <a:solidFill>
                             <a:schemeClr val="accent1"/>
                           </a:solidFill>
@@ -1935,7 +2137,7 @@
                         </a:rPr>
                         <a:t>Gerencia de Cumplimiento</a:t>
                       </a:r>
-                      <a:endParaRPr lang="en-US" sz="750" dirty="0">
+                      <a:endParaRPr lang="en-US" sz="1100" dirty="0">
                         <a:latin typeface="Calibri" charset="0"/>
                         <a:ea typeface="Calibri" charset="0"/>
                         <a:cs typeface="Calibri" charset="0"/>
@@ -1974,7 +2176,7 @@
                         <a:buNone/>
                       </a:pPr>
                       <a:r>
-                        <a:rPr lang="en-US" sz="750" b="1" dirty="0">
+                        <a:rPr lang="en-US" sz="1100" b="1" dirty="0">
                           <a:solidFill>
                             <a:schemeClr val="tx1"/>
                           </a:solidFill>
@@ -1984,7 +2186,7 @@
                         </a:rPr>
                         <a:t>Falta de actualización de Metodología y matriz de riesgo LA/FT/FPADM Clientes o asociados</a:t>
                       </a:r>
-                      <a:endParaRPr lang="en-US" sz="750" dirty="0">
+                      <a:endParaRPr lang="en-US" sz="1100" dirty="0">
                         <a:latin typeface="Calibri" charset="0"/>
                         <a:ea typeface="Calibri" charset="0"/>
                         <a:cs typeface="Calibri" charset="0"/>
@@ -2024,7 +2226,7 @@
                         <a:buNone/>
                       </a:pPr>
                       <a:r>
-                        <a:rPr lang="en-US" sz="750" dirty="0">
+                        <a:rPr lang="en-US" sz="1100" dirty="0">
                           <a:solidFill>
                             <a:schemeClr val="tx1"/>
                           </a:solidFill>
@@ -2034,7 +2236,7 @@
                         </a:rPr>
                         <a:t>Comentario CA: 14/10/2026 Compromiso</a:t>
                       </a:r>
-                      <a:endParaRPr lang="en-US" sz="750" dirty="0">
+                      <a:endParaRPr lang="en-US" sz="1100" dirty="0">
                         <a:latin typeface="Calibri" charset="0"/>
                         <a:ea typeface="Calibri" charset="0"/>
                         <a:cs typeface="Calibri" charset="0"/>
@@ -2071,7 +2273,7 @@
                         <a:buNone/>
                       </a:pPr>
                       <a:r>
-                        <a:rPr lang="en-US" sz="750" b="1" dirty="0">
+                        <a:rPr lang="en-US" sz="1100" b="1" dirty="0">
                           <a:solidFill>
                             <a:schemeClr val="accent1"/>
                           </a:solidFill>
@@ -2081,7 +2283,7 @@
                         </a:rPr>
                         <a:t>Gerencia de Cumplimiento</a:t>
                       </a:r>
-                      <a:endParaRPr lang="en-US" sz="750" dirty="0">
+                      <a:endParaRPr lang="en-US" sz="1100" dirty="0">
                         <a:latin typeface="Calibri" charset="0"/>
                         <a:ea typeface="Calibri" charset="0"/>
                         <a:cs typeface="Calibri" charset="0"/>
@@ -2120,7 +2322,7 @@
                         <a:buNone/>
                       </a:pPr>
                       <a:r>
-                        <a:rPr lang="en-US" sz="750" b="1" dirty="0">
+                        <a:rPr lang="en-US" sz="1100" b="1" dirty="0">
                           <a:solidFill>
                             <a:schemeClr val="tx1"/>
                           </a:solidFill>
@@ -2130,7 +2332,7 @@
                         </a:rPr>
                         <a:t>Falta de automatización en el proceso de remisión de reportería regulada a la Web Service de UIF.</a:t>
                       </a:r>
-                      <a:endParaRPr lang="en-US" sz="750" dirty="0">
+                      <a:endParaRPr lang="en-US" sz="1100" dirty="0">
                         <a:latin typeface="Calibri" charset="0"/>
                         <a:ea typeface="Calibri" charset="0"/>
                         <a:cs typeface="Calibri" charset="0"/>
@@ -2170,7 +2372,7 @@
                         <a:buNone/>
                       </a:pPr>
                       <a:r>
-                        <a:rPr lang="en-US" sz="750" dirty="0">
+                        <a:rPr lang="en-US" sz="1100" dirty="0">
                           <a:solidFill>
                             <a:schemeClr val="tx1"/>
                           </a:solidFill>
@@ -2180,7 +2382,7 @@
                         </a:rPr>
                         <a:t>Comentario CA: 14/10/2026 Compromiso</a:t>
                       </a:r>
-                      <a:endParaRPr lang="en-US" sz="750" dirty="0">
+                      <a:endParaRPr lang="en-US" sz="1100" dirty="0">
                         <a:latin typeface="Calibri" charset="0"/>
                         <a:ea typeface="Calibri" charset="0"/>
                         <a:cs typeface="Calibri" charset="0"/>
@@ -2217,7 +2419,7 @@
                         <a:buNone/>
                       </a:pPr>
                       <a:r>
-                        <a:rPr lang="en-US" sz="750" b="1" dirty="0">
+                        <a:rPr lang="en-US" sz="1100" b="1" dirty="0">
                           <a:solidFill>
                             <a:schemeClr val="accent1"/>
                           </a:solidFill>
@@ -2227,7 +2429,7 @@
                         </a:rPr>
                         <a:t>Gerencia de Cumplimiento</a:t>
                       </a:r>
-                      <a:endParaRPr lang="en-US" sz="750" dirty="0">
+                      <a:endParaRPr lang="en-US" sz="1100" dirty="0">
                         <a:latin typeface="Calibri" charset="0"/>
                         <a:ea typeface="Calibri" charset="0"/>
                         <a:cs typeface="Calibri" charset="0"/>
@@ -2266,7 +2468,7 @@
                         <a:buNone/>
                       </a:pPr>
                       <a:r>
-                        <a:rPr lang="en-US" sz="750" b="1" dirty="0">
+                        <a:rPr lang="en-US" sz="1100" b="1" dirty="0">
                           <a:solidFill>
                             <a:schemeClr val="tx1"/>
                           </a:solidFill>
@@ -2276,7 +2478,7 @@
                         </a:rPr>
                         <a:t>Falta de Automatización de la herramienta de validación de Listas de Cautela</a:t>
                       </a:r>
-                      <a:endParaRPr lang="en-US" sz="750" dirty="0">
+                      <a:endParaRPr lang="en-US" sz="1100" dirty="0">
                         <a:latin typeface="Calibri" charset="0"/>
                         <a:ea typeface="Calibri" charset="0"/>
                         <a:cs typeface="Calibri" charset="0"/>
@@ -2316,7 +2518,7 @@
                         <a:buNone/>
                       </a:pPr>
                       <a:r>
-                        <a:rPr lang="en-US" sz="750" dirty="0">
+                        <a:rPr lang="en-US" sz="1100" dirty="0">
                           <a:solidFill>
                             <a:schemeClr val="tx1"/>
                           </a:solidFill>
@@ -2326,7 +2528,7 @@
                         </a:rPr>
                         <a:t>Comentario CA: 14/10/2026 Compromiso</a:t>
                       </a:r>
-                      <a:endParaRPr lang="en-US" sz="750" dirty="0">
+                      <a:endParaRPr lang="en-US" sz="1100" dirty="0">
                         <a:latin typeface="Calibri" charset="0"/>
                         <a:ea typeface="Calibri" charset="0"/>
                         <a:cs typeface="Calibri" charset="0"/>
@@ -2363,7 +2565,7 @@
                         <a:buNone/>
                       </a:pPr>
                       <a:r>
-                        <a:rPr lang="en-US" sz="750" b="1" dirty="0">
+                        <a:rPr lang="en-US" sz="1100" b="1" dirty="0">
                           <a:solidFill>
                             <a:schemeClr val="accent1"/>
                           </a:solidFill>
@@ -2373,7 +2575,7 @@
                         </a:rPr>
                         <a:t>Gerencia de Cumplimiento</a:t>
                       </a:r>
-                      <a:endParaRPr lang="en-US" sz="750" dirty="0">
+                      <a:endParaRPr lang="en-US" sz="1100" dirty="0">
                         <a:latin typeface="Calibri" charset="0"/>
                         <a:ea typeface="Calibri" charset="0"/>
                         <a:cs typeface="Calibri" charset="0"/>
@@ -2412,7 +2614,7 @@
                         <a:buNone/>
                       </a:pPr>
                       <a:r>
-                        <a:rPr lang="en-US" sz="750" b="1" dirty="0">
+                        <a:rPr lang="en-US" sz="1100" b="1" dirty="0">
                           <a:solidFill>
                             <a:schemeClr val="tx1"/>
                           </a:solidFill>
@@ -2422,7 +2624,7 @@
                         </a:rPr>
                         <a:t>Falta de evidencia en los porcentajes de avance comunicados en el cronograma</a:t>
                       </a:r>
-                      <a:endParaRPr lang="en-US" sz="750" dirty="0">
+                      <a:endParaRPr lang="en-US" sz="1100" dirty="0">
                         <a:latin typeface="Calibri" charset="0"/>
                         <a:ea typeface="Calibri" charset="0"/>
                         <a:cs typeface="Calibri" charset="0"/>
@@ -2462,7 +2664,7 @@
                         <a:buNone/>
                       </a:pPr>
                       <a:r>
-                        <a:rPr lang="en-US" sz="750" dirty="0">
+                        <a:rPr lang="en-US" sz="1100" dirty="0">
                           <a:solidFill>
                             <a:schemeClr val="tx1"/>
                           </a:solidFill>
@@ -2472,7 +2674,7 @@
                         </a:rPr>
                         <a:t>Comentario CA: 14/10/2026 Compromiso</a:t>
                       </a:r>
-                      <a:endParaRPr lang="en-US" sz="750" dirty="0">
+                      <a:endParaRPr lang="en-US" sz="1100" dirty="0">
                         <a:latin typeface="Calibri" charset="0"/>
                         <a:ea typeface="Calibri" charset="0"/>
                         <a:cs typeface="Calibri" charset="0"/>
@@ -2509,7 +2711,7 @@
                         <a:buNone/>
                       </a:pPr>
                       <a:r>
-                        <a:rPr lang="en-US" sz="750" b="1" dirty="0">
+                        <a:rPr lang="en-US" sz="1100" b="1" dirty="0">
                           <a:solidFill>
                             <a:schemeClr val="accent1"/>
                           </a:solidFill>
@@ -2519,7 +2721,7 @@
                         </a:rPr>
                         <a:t>Gerencia de Cumplimiento</a:t>
                       </a:r>
-                      <a:endParaRPr lang="en-US" sz="750" dirty="0">
+                      <a:endParaRPr lang="en-US" sz="1100" dirty="0">
                         <a:latin typeface="Calibri" charset="0"/>
                         <a:ea typeface="Calibri" charset="0"/>
                         <a:cs typeface="Calibri" charset="0"/>
@@ -2558,7 +2760,7 @@
                         <a:buNone/>
                       </a:pPr>
                       <a:r>
-                        <a:rPr lang="en-US" sz="750" b="1" dirty="0">
+                        <a:rPr lang="en-US" sz="1100" b="1" dirty="0">
                           <a:solidFill>
                             <a:schemeClr val="tx1"/>
                           </a:solidFill>
@@ -2568,7 +2770,7 @@
                         </a:rPr>
                         <a:t>Revisión documentación conforme artículo22 de la NRP-23</a:t>
                       </a:r>
-                      <a:endParaRPr lang="en-US" sz="750" dirty="0">
+                      <a:endParaRPr lang="en-US" sz="1100" dirty="0">
                         <a:latin typeface="Calibri" charset="0"/>
                         <a:ea typeface="Calibri" charset="0"/>
                         <a:cs typeface="Calibri" charset="0"/>
@@ -2608,7 +2810,7 @@
                         <a:buNone/>
                       </a:pPr>
                       <a:r>
-                        <a:rPr lang="en-US" sz="750" dirty="0">
+                        <a:rPr lang="en-US" sz="1100" dirty="0">
                           <a:solidFill>
                             <a:schemeClr val="tx1"/>
                           </a:solidFill>
@@ -2618,7 +2820,7 @@
                         </a:rPr>
                         <a:t>Se anexa informe elaborado en fecha 13 de diciembre de 2024, sobre proyecto de implementación de un nuevo sistema de monitoreo de LDA/FT/FPADM y del sistema de fraude de canales digitales.</a:t>
                       </a:r>
-                      <a:endParaRPr lang="en-US" sz="750" dirty="0">
+                      <a:endParaRPr lang="en-US" sz="1100" dirty="0">
                         <a:latin typeface="Calibri" charset="0"/>
                         <a:ea typeface="Calibri" charset="0"/>
                         <a:cs typeface="Calibri" charset="0"/>
@@ -2655,7 +2857,7 @@
                         <a:buNone/>
                       </a:pPr>
                       <a:r>
-                        <a:rPr lang="en-US" sz="750" b="1" dirty="0">
+                        <a:rPr lang="en-US" sz="1100" b="1" dirty="0">
                           <a:solidFill>
                             <a:schemeClr val="accent1"/>
                           </a:solidFill>
@@ -2665,7 +2867,7 @@
                         </a:rPr>
                         <a:t>Jefe de Riesgos</a:t>
                       </a:r>
-                      <a:endParaRPr lang="en-US" sz="750" dirty="0">
+                      <a:endParaRPr lang="en-US" sz="1100" dirty="0">
                         <a:latin typeface="Calibri" charset="0"/>
                         <a:ea typeface="Calibri" charset="0"/>
                         <a:cs typeface="Calibri" charset="0"/>
@@ -2704,7 +2906,7 @@
                         <a:buNone/>
                       </a:pPr>
                       <a:r>
-                        <a:rPr lang="en-US" sz="750" b="1" dirty="0">
+                        <a:rPr lang="en-US" sz="1100" b="1" dirty="0">
                           <a:solidFill>
                             <a:schemeClr val="tx1"/>
                           </a:solidFill>
@@ -2714,7 +2916,7 @@
                         </a:rPr>
                         <a:t>Debilidades en el contrato del servicio de software</a:t>
                       </a:r>
-                      <a:endParaRPr lang="en-US" sz="750" dirty="0">
+                      <a:endParaRPr lang="en-US" sz="1100" dirty="0">
                         <a:latin typeface="Calibri" charset="0"/>
                         <a:ea typeface="Calibri" charset="0"/>
                         <a:cs typeface="Calibri" charset="0"/>
@@ -2754,7 +2956,7 @@
                         <a:buNone/>
                       </a:pPr>
                       <a:r>
-                        <a:rPr lang="en-US" sz="750" dirty="0">
+                        <a:rPr lang="en-US" sz="1100" dirty="0">
                           <a:solidFill>
                             <a:schemeClr val="tx1"/>
                           </a:solidFill>
@@ -2764,18 +2966,18 @@
                         </a:rPr>
                         <a:t>Se adjuntará la propuesta de la Gerencia Legal por medio de correo de fecha 09 de octubre 2026, envió propuesta a la Gerencia de Cumplimiento y Seguridad de la Información para la modificación del contrato.</a:t>
                       </a:r>
-                      <a:endParaRPr lang="en-US" sz="750" dirty="0">
-                        <a:latin typeface="Calibri" charset="0"/>
-                        <a:ea typeface="Calibri" charset="0"/>
-                        <a:cs typeface="Calibri" charset="0"/>
-                      </a:endParaRPr>
-                    </a:p>
-                    <a:p>
-                      <a:pPr algn="just" indent="0" marL="0">
-                        <a:buNone/>
-                      </a:pPr>
-                      <a:r>
-                        <a:rPr lang="en-US" sz="750" dirty="0">
+                      <a:endParaRPr lang="en-US" sz="1100" dirty="0">
+                        <a:latin typeface="Calibri" charset="0"/>
+                        <a:ea typeface="Calibri" charset="0"/>
+                        <a:cs typeface="Calibri" charset="0"/>
+                      </a:endParaRPr>
+                    </a:p>
+                    <a:p>
+                      <a:pPr algn="just" indent="0" marL="0">
+                        <a:buNone/>
+                      </a:pPr>
+                      <a:r>
+                        <a:rPr lang="en-US" sz="1100" dirty="0">
                           <a:solidFill>
                             <a:schemeClr val="tx1"/>
                           </a:solidFill>
@@ -2785,7 +2987,7 @@
                         </a:rPr>
                         <a:t>Comentario CA: 14/10/2026 Compromiso</a:t>
                       </a:r>
-                      <a:endParaRPr lang="en-US" sz="750" dirty="0">
+                      <a:endParaRPr lang="en-US" sz="1100" dirty="0">
                         <a:latin typeface="Calibri" charset="0"/>
                         <a:ea typeface="Calibri" charset="0"/>
                         <a:cs typeface="Calibri" charset="0"/>
@@ -2822,7 +3024,7 @@
                         <a:buNone/>
                       </a:pPr>
                       <a:r>
-                        <a:rPr lang="en-US" sz="750" b="1" dirty="0">
+                        <a:rPr lang="en-US" sz="1100" b="1" dirty="0">
                           <a:solidFill>
                             <a:schemeClr val="accent1"/>
                           </a:solidFill>
@@ -2832,7 +3034,7 @@
                         </a:rPr>
                         <a:t>Gerencia de Cumplimiento</a:t>
                       </a:r>
-                      <a:endParaRPr lang="en-US" sz="750" dirty="0">
+                      <a:endParaRPr lang="en-US" sz="1100" dirty="0">
                         <a:latin typeface="Calibri" charset="0"/>
                         <a:ea typeface="Calibri" charset="0"/>
                         <a:cs typeface="Calibri" charset="0"/>
@@ -2843,7 +3045,7 @@
                         <a:buNone/>
                       </a:pPr>
                       <a:r>
-                        <a:rPr lang="en-US" sz="750" b="1" dirty="0">
+                        <a:rPr lang="en-US" sz="1100" b="1" dirty="0">
                           <a:solidFill>
                             <a:schemeClr val="accent1"/>
                           </a:solidFill>
@@ -2853,7 +3055,7 @@
                         </a:rPr>
                         <a:t>/ Gerencia Legal</a:t>
                       </a:r>
-                      <a:endParaRPr lang="en-US" sz="750" dirty="0">
+                      <a:endParaRPr lang="en-US" sz="1100" dirty="0">
                         <a:latin typeface="Calibri" charset="0"/>
                         <a:ea typeface="Calibri" charset="0"/>
                         <a:cs typeface="Calibri" charset="0"/>
@@ -2892,7 +3094,7 @@
                         <a:buNone/>
                       </a:pPr>
                       <a:r>
-                        <a:rPr lang="en-US" sz="750" b="1" dirty="0">
+                        <a:rPr lang="en-US" sz="1100" b="1" dirty="0">
                           <a:solidFill>
                             <a:schemeClr val="tx1"/>
                           </a:solidFill>
@@ -2902,7 +3104,7 @@
                         </a:rPr>
                         <a:t>Debilidad en el Alcance de las Pruebas Continuidad del Negocio</a:t>
                       </a:r>
-                      <a:endParaRPr lang="en-US" sz="750" dirty="0">
+                      <a:endParaRPr lang="en-US" sz="1100" dirty="0">
                         <a:latin typeface="Calibri" charset="0"/>
                         <a:ea typeface="Calibri" charset="0"/>
                         <a:cs typeface="Calibri" charset="0"/>
@@ -2942,7 +3144,7 @@
                         <a:buNone/>
                       </a:pPr>
                       <a:r>
-                        <a:rPr lang="en-US" sz="750" dirty="0">
+                        <a:rPr lang="en-US" sz="1100" dirty="0">
                           <a:solidFill>
                             <a:schemeClr val="tx1"/>
                           </a:solidFill>
@@ -2952,18 +3154,18 @@
                         </a:rPr>
                         <a:t>Plan de acción: proveedor critico</a:t>
                       </a:r>
-                      <a:endParaRPr lang="en-US" sz="750" dirty="0">
-                        <a:latin typeface="Calibri" charset="0"/>
-                        <a:ea typeface="Calibri" charset="0"/>
-                        <a:cs typeface="Calibri" charset="0"/>
-                      </a:endParaRPr>
-                    </a:p>
-                    <a:p>
-                      <a:pPr algn="just" indent="0" marL="0">
-                        <a:buNone/>
-                      </a:pPr>
-                      <a:r>
-                        <a:rPr lang="en-US" sz="750" dirty="0">
+                      <a:endParaRPr lang="en-US" sz="1100" dirty="0">
+                        <a:latin typeface="Calibri" charset="0"/>
+                        <a:ea typeface="Calibri" charset="0"/>
+                        <a:cs typeface="Calibri" charset="0"/>
+                      </a:endParaRPr>
+                    </a:p>
+                    <a:p>
+                      <a:pPr algn="just" indent="0" marL="0">
+                        <a:buNone/>
+                      </a:pPr>
+                      <a:r>
+                        <a:rPr lang="en-US" sz="1100" dirty="0">
                           <a:solidFill>
                             <a:schemeClr val="tx1"/>
                           </a:solidFill>
@@ -2973,18 +3175,18 @@
                         </a:rPr>
                         <a:t>Comentario CA: 14/10/2026 Compromiso</a:t>
                       </a:r>
-                      <a:endParaRPr lang="en-US" sz="750" dirty="0">
-                        <a:latin typeface="Calibri" charset="0"/>
-                        <a:ea typeface="Calibri" charset="0"/>
-                        <a:cs typeface="Calibri" charset="0"/>
-                      </a:endParaRPr>
-                    </a:p>
-                    <a:p>
-                      <a:pPr algn="just" indent="0" marL="0">
-                        <a:buNone/>
-                      </a:pPr>
-                      <a:r>
-                        <a:rPr lang="en-US" sz="750" dirty="0">
+                      <a:endParaRPr lang="en-US" sz="1100" dirty="0">
+                        <a:latin typeface="Calibri" charset="0"/>
+                        <a:ea typeface="Calibri" charset="0"/>
+                        <a:cs typeface="Calibri" charset="0"/>
+                      </a:endParaRPr>
+                    </a:p>
+                    <a:p>
+                      <a:pPr algn="just" indent="0" marL="0">
+                        <a:buNone/>
+                      </a:pPr>
+                      <a:r>
+                        <a:rPr lang="en-US" sz="1100" dirty="0">
                           <a:solidFill>
                             <a:schemeClr val="tx1"/>
                           </a:solidFill>
@@ -2994,7 +3196,7 @@
                         </a:rPr>
                         <a:t>Se identificarán los servicios tecnológicos tercerizados críticos y se incorporarán en el alcance de las pruebas de continuidad del negocio. Asimismo, se solicitarán a los proveedores los resultados y evidencias de las pruebas realizadas, con el fin de validar la efectividad de los controles implementados.</a:t>
                       </a:r>
-                      <a:endParaRPr lang="en-US" sz="750" dirty="0">
+                      <a:endParaRPr lang="en-US" sz="1100" dirty="0">
                         <a:latin typeface="Calibri" charset="0"/>
                         <a:ea typeface="Calibri" charset="0"/>
                         <a:cs typeface="Calibri" charset="0"/>
@@ -3031,7 +3233,7 @@
                         <a:buNone/>
                       </a:pPr>
                       <a:r>
-                        <a:rPr lang="en-US" sz="750" b="1" dirty="0">
+                        <a:rPr lang="en-US" sz="1100" b="1" dirty="0">
                           <a:solidFill>
                             <a:schemeClr val="accent1"/>
                           </a:solidFill>
@@ -3041,1302 +3243,7 @@
                         </a:rPr>
                         <a:t>Administración de Riesgos/Gerencia de sistemas/Seguridad de la información</a:t>
                       </a:r>
-                      <a:endParaRPr lang="en-US" sz="750" dirty="0">
-                        <a:latin typeface="Calibri" charset="0"/>
-                        <a:ea typeface="Calibri" charset="0"/>
-                        <a:cs typeface="Calibri" charset="0"/>
-                      </a:endParaRPr>
-                    </a:p>
-                  </a:txBody>
-                  <a:tcPr marL="54864" marR="54864" marT="18288" marB="18288" anchor="ctr">
-                    <a:lnL w="0" cap="flat" cmpd="sng" algn="ctr">
-                      <a:noFill/>
-                    </a:lnL>
-                    <a:lnR w="0" cap="flat" cmpd="sng" algn="ctr">
-                      <a:noFill/>
-                    </a:lnR>
-                    <a:lnT w="0" cap="flat" cmpd="sng" algn="ctr">
-                      <a:noFill/>
-                    </a:lnT>
-                    <a:lnB w="9525" cap="flat" cmpd="sng" algn="ctr">
-                      <a:solidFill>
-                        <a:srgbClr val="D9E0EA"/>
-                      </a:solidFill>
-                      <a:prstDash val="solid"/>
-                      <a:round/>
-                      <a:headEnd type="none" w="med" len="med"/>
-                      <a:tailEnd type="none" w="med" len="med"/>
-                    </a:lnB>
-                  </a:tcPr>
-                </a:tc>
-              </a:tr>
-              <a:tr h="0">
-                <a:tc>
-                  <a:txBody>
-                    <a:bodyPr/>
-                    <a:lstStyle/>
-                    <a:p>
-                      <a:pPr algn="just" indent="0" marL="0">
-                        <a:buNone/>
-                      </a:pPr>
-                      <a:r>
-                        <a:rPr lang="en-US" sz="750" b="1" dirty="0">
-                          <a:solidFill>
-                            <a:schemeClr val="tx1"/>
-                          </a:solidFill>
-                          <a:latin typeface="Calibri" pitchFamily="34" charset="0"/>
-                          <a:ea typeface="Calibri" pitchFamily="34" charset="-122"/>
-                          <a:cs typeface="Calibri" pitchFamily="34" charset="-120"/>
-                        </a:rPr>
-                        <a:t>Deficiencia en los procedimientos de Respaldos.</a:t>
-                      </a:r>
-                      <a:endParaRPr lang="en-US" sz="750" dirty="0">
-                        <a:latin typeface="Calibri" charset="0"/>
-                        <a:ea typeface="Calibri" charset="0"/>
-                        <a:cs typeface="Calibri" charset="0"/>
-                      </a:endParaRPr>
-                    </a:p>
-                  </a:txBody>
-                  <a:tcPr marL="54864" marR="54864" marT="18288" marB="18288" anchor="ctr">
-                    <a:lnL w="0" cap="flat" cmpd="sng" algn="ctr">
-                      <a:noFill/>
-                    </a:lnL>
-                    <a:lnR w="0" cap="flat" cmpd="sng" algn="ctr">
-                      <a:noFill/>
-                    </a:lnR>
-                    <a:lnT w="0" cap="flat" cmpd="sng" algn="ctr">
-                      <a:noFill/>
-                    </a:lnT>
-                    <a:lnB w="9525" cap="flat" cmpd="sng" algn="ctr">
-                      <a:solidFill>
-                        <a:srgbClr val="D9E0EA"/>
-                      </a:solidFill>
-                      <a:prstDash val="solid"/>
-                      <a:round/>
-                      <a:headEnd type="none" w="med" len="med"/>
-                      <a:tailEnd type="none" w="med" len="med"/>
-                    </a:lnB>
-                    <a:solidFill>
-                      <a:srgbClr val="FFFFFF"/>
-                    </a:solidFill>
-                  </a:tcPr>
-                </a:tc>
-                <a:tc>
-                  <a:txBody>
-                    <a:bodyPr/>
-                    <a:lstStyle/>
-                    <a:p>
-                      <a:pPr algn="just" indent="0" marL="0">
-                        <a:buNone/>
-                      </a:pPr>
-                      <a:r>
-                        <a:rPr lang="en-US" sz="750" dirty="0">
-                          <a:solidFill>
-                            <a:schemeClr val="tx1"/>
-                          </a:solidFill>
-                          <a:latin typeface="Calibri" pitchFamily="34" charset="0"/>
-                          <a:ea typeface="Calibri" pitchFamily="34" charset="-122"/>
-                          <a:cs typeface="Calibri" pitchFamily="34" charset="-120"/>
-                        </a:rPr>
-                        <a:t>Plan de acción</a:t>
-                      </a:r>
-                      <a:endParaRPr lang="en-US" sz="750" dirty="0">
-                        <a:latin typeface="Calibri" charset="0"/>
-                        <a:ea typeface="Calibri" charset="0"/>
-                        <a:cs typeface="Calibri" charset="0"/>
-                      </a:endParaRPr>
-                    </a:p>
-                    <a:p>
-                      <a:pPr algn="just" indent="0" marL="0">
-                        <a:buNone/>
-                      </a:pPr>
-                      <a:r>
-                        <a:rPr lang="en-US" sz="750" dirty="0">
-                          <a:solidFill>
-                            <a:schemeClr val="tx1"/>
-                          </a:solidFill>
-                          <a:latin typeface="Calibri" pitchFamily="34" charset="0"/>
-                          <a:ea typeface="Calibri" pitchFamily="34" charset="-122"/>
-                          <a:cs typeface="Calibri" pitchFamily="34" charset="-120"/>
-                        </a:rPr>
-                        <a:t>Comentario CA: 14/10/2026 Compromiso</a:t>
-                      </a:r>
-                      <a:endParaRPr lang="en-US" sz="750" dirty="0">
-                        <a:latin typeface="Calibri" charset="0"/>
-                        <a:ea typeface="Calibri" charset="0"/>
-                        <a:cs typeface="Calibri" charset="0"/>
-                      </a:endParaRPr>
-                    </a:p>
-                  </a:txBody>
-                  <a:tcPr marL="54864" marR="54864" marT="18288" marB="18288" anchor="ctr">
-                    <a:lnL w="0" cap="flat" cmpd="sng" algn="ctr">
-                      <a:noFill/>
-                    </a:lnL>
-                    <a:lnR w="0" cap="flat" cmpd="sng" algn="ctr">
-                      <a:noFill/>
-                    </a:lnR>
-                    <a:lnT w="0" cap="flat" cmpd="sng" algn="ctr">
-                      <a:noFill/>
-                    </a:lnT>
-                    <a:lnB w="9525" cap="flat" cmpd="sng" algn="ctr">
-                      <a:solidFill>
-                        <a:srgbClr val="D9E0EA"/>
-                      </a:solidFill>
-                      <a:prstDash val="solid"/>
-                      <a:round/>
-                      <a:headEnd type="none" w="med" len="med"/>
-                      <a:tailEnd type="none" w="med" len="med"/>
-                    </a:lnB>
-                  </a:tcPr>
-                </a:tc>
-                <a:tc>
-                  <a:txBody>
-                    <a:bodyPr/>
-                    <a:lstStyle/>
-                    <a:p>
-                      <a:pPr algn="l" indent="0" marL="0">
-                        <a:buNone/>
-                      </a:pPr>
-                      <a:r>
-                        <a:rPr lang="en-US" sz="750" b="1" dirty="0">
-                          <a:solidFill>
-                            <a:schemeClr val="accent1"/>
-                          </a:solidFill>
-                          <a:latin typeface="Calibri" pitchFamily="34" charset="0"/>
-                          <a:ea typeface="Calibri" pitchFamily="34" charset="-122"/>
-                          <a:cs typeface="Calibri" pitchFamily="34" charset="-120"/>
-                        </a:rPr>
-                        <a:t>Gerencia de Cumplimiento</a:t>
-                      </a:r>
-                      <a:endParaRPr lang="en-US" sz="750" dirty="0">
-                        <a:latin typeface="Calibri" charset="0"/>
-                        <a:ea typeface="Calibri" charset="0"/>
-                        <a:cs typeface="Calibri" charset="0"/>
-                      </a:endParaRPr>
-                    </a:p>
-                    <a:p>
-                      <a:pPr algn="l" indent="0" marL="0">
-                        <a:buNone/>
-                      </a:pPr>
-                      <a:r>
-                        <a:rPr lang="en-US" sz="750" b="1" dirty="0">
-                          <a:solidFill>
-                            <a:schemeClr val="accent1"/>
-                          </a:solidFill>
-                          <a:latin typeface="Calibri" pitchFamily="34" charset="0"/>
-                          <a:ea typeface="Calibri" pitchFamily="34" charset="-122"/>
-                          <a:cs typeface="Calibri" pitchFamily="34" charset="-120"/>
-                        </a:rPr>
-                        <a:t>/ Gerencia de Sistemas</a:t>
-                      </a:r>
-                      <a:endParaRPr lang="en-US" sz="750" dirty="0">
-                        <a:latin typeface="Calibri" charset="0"/>
-                        <a:ea typeface="Calibri" charset="0"/>
-                        <a:cs typeface="Calibri" charset="0"/>
-                      </a:endParaRPr>
-                    </a:p>
-                  </a:txBody>
-                  <a:tcPr marL="54864" marR="54864" marT="18288" marB="18288" anchor="ctr">
-                    <a:lnL w="0" cap="flat" cmpd="sng" algn="ctr">
-                      <a:noFill/>
-                    </a:lnL>
-                    <a:lnR w="0" cap="flat" cmpd="sng" algn="ctr">
-                      <a:noFill/>
-                    </a:lnR>
-                    <a:lnT w="0" cap="flat" cmpd="sng" algn="ctr">
-                      <a:noFill/>
-                    </a:lnT>
-                    <a:lnB w="9525" cap="flat" cmpd="sng" algn="ctr">
-                      <a:solidFill>
-                        <a:srgbClr val="D9E0EA"/>
-                      </a:solidFill>
-                      <a:prstDash val="solid"/>
-                      <a:round/>
-                      <a:headEnd type="none" w="med" len="med"/>
-                      <a:tailEnd type="none" w="med" len="med"/>
-                    </a:lnB>
-                  </a:tcPr>
-                </a:tc>
-              </a:tr>
-              <a:tr h="0">
-                <a:tc>
-                  <a:txBody>
-                    <a:bodyPr/>
-                    <a:lstStyle/>
-                    <a:p>
-                      <a:pPr algn="just" indent="0" marL="0">
-                        <a:buNone/>
-                      </a:pPr>
-                      <a:r>
-                        <a:rPr lang="en-US" sz="750" b="1" dirty="0">
-                          <a:solidFill>
-                            <a:schemeClr val="tx1"/>
-                          </a:solidFill>
-                          <a:latin typeface="Calibri" pitchFamily="34" charset="0"/>
-                          <a:ea typeface="Calibri" pitchFamily="34" charset="-122"/>
-                          <a:cs typeface="Calibri" pitchFamily="34" charset="-120"/>
-                        </a:rPr>
-                        <a:t>Deficiencia en la hora del sistema y la herramienta de Monitoreo</a:t>
-                      </a:r>
-                      <a:endParaRPr lang="en-US" sz="750" dirty="0">
-                        <a:latin typeface="Calibri" charset="0"/>
-                        <a:ea typeface="Calibri" charset="0"/>
-                        <a:cs typeface="Calibri" charset="0"/>
-                      </a:endParaRPr>
-                    </a:p>
-                  </a:txBody>
-                  <a:tcPr marL="54864" marR="54864" marT="18288" marB="18288" anchor="ctr">
-                    <a:lnL w="0" cap="flat" cmpd="sng" algn="ctr">
-                      <a:noFill/>
-                    </a:lnL>
-                    <a:lnR w="0" cap="flat" cmpd="sng" algn="ctr">
-                      <a:noFill/>
-                    </a:lnR>
-                    <a:lnT w="0" cap="flat" cmpd="sng" algn="ctr">
-                      <a:noFill/>
-                    </a:lnT>
-                    <a:lnB w="9525" cap="flat" cmpd="sng" algn="ctr">
-                      <a:solidFill>
-                        <a:srgbClr val="D9E0EA"/>
-                      </a:solidFill>
-                      <a:prstDash val="solid"/>
-                      <a:round/>
-                      <a:headEnd type="none" w="med" len="med"/>
-                      <a:tailEnd type="none" w="med" len="med"/>
-                    </a:lnB>
-                    <a:solidFill>
-                      <a:srgbClr val="FFFFFF"/>
-                    </a:solidFill>
-                  </a:tcPr>
-                </a:tc>
-                <a:tc>
-                  <a:txBody>
-                    <a:bodyPr/>
-                    <a:lstStyle/>
-                    <a:p>
-                      <a:pPr algn="just" indent="0" marL="0">
-                        <a:buNone/>
-                      </a:pPr>
-                      <a:r>
-                        <a:rPr lang="en-US" sz="750" dirty="0">
-                          <a:solidFill>
-                            <a:schemeClr val="tx1"/>
-                          </a:solidFill>
-                          <a:latin typeface="Calibri" pitchFamily="34" charset="0"/>
-                          <a:ea typeface="Calibri" pitchFamily="34" charset="-122"/>
-                          <a:cs typeface="Calibri" pitchFamily="34" charset="-120"/>
-                        </a:rPr>
-                        <a:t>Descargo correos de gestion</a:t>
-                      </a:r>
-                      <a:endParaRPr lang="en-US" sz="750" dirty="0">
-                        <a:latin typeface="Calibri" charset="0"/>
-                        <a:ea typeface="Calibri" charset="0"/>
-                        <a:cs typeface="Calibri" charset="0"/>
-                      </a:endParaRPr>
-                    </a:p>
-                    <a:p>
-                      <a:pPr algn="just" indent="0" marL="0">
-                        <a:buNone/>
-                      </a:pPr>
-                      <a:r>
-                        <a:rPr lang="en-US" sz="750" dirty="0">
-                          <a:solidFill>
-                            <a:schemeClr val="tx1"/>
-                          </a:solidFill>
-                          <a:latin typeface="Calibri" pitchFamily="34" charset="0"/>
-                          <a:ea typeface="Calibri" pitchFamily="34" charset="-122"/>
-                          <a:cs typeface="Calibri" pitchFamily="34" charset="-120"/>
-                        </a:rPr>
-                        <a:t>Comentario CA: 14/10/2026 Compromiso</a:t>
-                      </a:r>
-                      <a:endParaRPr lang="en-US" sz="750" dirty="0">
-                        <a:latin typeface="Calibri" charset="0"/>
-                        <a:ea typeface="Calibri" charset="0"/>
-                        <a:cs typeface="Calibri" charset="0"/>
-                      </a:endParaRPr>
-                    </a:p>
-                  </a:txBody>
-                  <a:tcPr marL="54864" marR="54864" marT="18288" marB="18288" anchor="ctr">
-                    <a:lnL w="0" cap="flat" cmpd="sng" algn="ctr">
-                      <a:noFill/>
-                    </a:lnL>
-                    <a:lnR w="0" cap="flat" cmpd="sng" algn="ctr">
-                      <a:noFill/>
-                    </a:lnR>
-                    <a:lnT w="0" cap="flat" cmpd="sng" algn="ctr">
-                      <a:noFill/>
-                    </a:lnT>
-                    <a:lnB w="9525" cap="flat" cmpd="sng" algn="ctr">
-                      <a:solidFill>
-                        <a:srgbClr val="D9E0EA"/>
-                      </a:solidFill>
-                      <a:prstDash val="solid"/>
-                      <a:round/>
-                      <a:headEnd type="none" w="med" len="med"/>
-                      <a:tailEnd type="none" w="med" len="med"/>
-                    </a:lnB>
-                  </a:tcPr>
-                </a:tc>
-                <a:tc>
-                  <a:txBody>
-                    <a:bodyPr/>
-                    <a:lstStyle/>
-                    <a:p>
-                      <a:pPr algn="l" indent="0" marL="0">
-                        <a:buNone/>
-                      </a:pPr>
-                      <a:r>
-                        <a:rPr lang="en-US" sz="750" b="1" dirty="0">
-                          <a:solidFill>
-                            <a:schemeClr val="accent1"/>
-                          </a:solidFill>
-                          <a:latin typeface="Calibri" pitchFamily="34" charset="0"/>
-                          <a:ea typeface="Calibri" pitchFamily="34" charset="-122"/>
-                          <a:cs typeface="Calibri" pitchFamily="34" charset="-120"/>
-                        </a:rPr>
-                        <a:t>Gerencia de Cumplimiento</a:t>
-                      </a:r>
-                      <a:endParaRPr lang="en-US" sz="750" dirty="0">
-                        <a:latin typeface="Calibri" charset="0"/>
-                        <a:ea typeface="Calibri" charset="0"/>
-                        <a:cs typeface="Calibri" charset="0"/>
-                      </a:endParaRPr>
-                    </a:p>
-                  </a:txBody>
-                  <a:tcPr marL="54864" marR="54864" marT="18288" marB="18288" anchor="ctr">
-                    <a:lnL w="0" cap="flat" cmpd="sng" algn="ctr">
-                      <a:noFill/>
-                    </a:lnL>
-                    <a:lnR w="0" cap="flat" cmpd="sng" algn="ctr">
-                      <a:noFill/>
-                    </a:lnR>
-                    <a:lnT w="0" cap="flat" cmpd="sng" algn="ctr">
-                      <a:noFill/>
-                    </a:lnT>
-                    <a:lnB w="9525" cap="flat" cmpd="sng" algn="ctr">
-                      <a:solidFill>
-                        <a:srgbClr val="D9E0EA"/>
-                      </a:solidFill>
-                      <a:prstDash val="solid"/>
-                      <a:round/>
-                      <a:headEnd type="none" w="med" len="med"/>
-                      <a:tailEnd type="none" w="med" len="med"/>
-                    </a:lnB>
-                  </a:tcPr>
-                </a:tc>
-              </a:tr>
-              <a:tr h="0">
-                <a:tc>
-                  <a:txBody>
-                    <a:bodyPr/>
-                    <a:lstStyle/>
-                    <a:p>
-                      <a:pPr algn="just" indent="0" marL="0">
-                        <a:buNone/>
-                      </a:pPr>
-                      <a:r>
-                        <a:rPr lang="en-US" sz="750" b="1" dirty="0">
-                          <a:solidFill>
-                            <a:schemeClr val="tx1"/>
-                          </a:solidFill>
-                          <a:latin typeface="Calibri" pitchFamily="34" charset="0"/>
-                          <a:ea typeface="Calibri" pitchFamily="34" charset="-122"/>
-                          <a:cs typeface="Calibri" pitchFamily="34" charset="-120"/>
-                        </a:rPr>
-                        <a:t>Verificación de las condiciones en ACRM</a:t>
-                      </a:r>
-                      <a:endParaRPr lang="en-US" sz="750" dirty="0">
-                        <a:latin typeface="Calibri" charset="0"/>
-                        <a:ea typeface="Calibri" charset="0"/>
-                        <a:cs typeface="Calibri" charset="0"/>
-                      </a:endParaRPr>
-                    </a:p>
-                  </a:txBody>
-                  <a:tcPr marL="54864" marR="54864" marT="18288" marB="18288" anchor="ctr">
-                    <a:lnL w="0" cap="flat" cmpd="sng" algn="ctr">
-                      <a:noFill/>
-                    </a:lnL>
-                    <a:lnR w="0" cap="flat" cmpd="sng" algn="ctr">
-                      <a:noFill/>
-                    </a:lnR>
-                    <a:lnT w="0" cap="flat" cmpd="sng" algn="ctr">
-                      <a:noFill/>
-                    </a:lnT>
-                    <a:lnB w="9525" cap="flat" cmpd="sng" algn="ctr">
-                      <a:solidFill>
-                        <a:srgbClr val="D9E0EA"/>
-                      </a:solidFill>
-                      <a:prstDash val="solid"/>
-                      <a:round/>
-                      <a:headEnd type="none" w="med" len="med"/>
-                      <a:tailEnd type="none" w="med" len="med"/>
-                    </a:lnB>
-                    <a:solidFill>
-                      <a:srgbClr val="FFFFFF"/>
-                    </a:solidFill>
-                  </a:tcPr>
-                </a:tc>
-                <a:tc>
-                  <a:txBody>
-                    <a:bodyPr/>
-                    <a:lstStyle/>
-                    <a:p>
-                      <a:pPr algn="just" indent="0" marL="0">
-                        <a:buNone/>
-                      </a:pPr>
-                      <a:r>
-                        <a:rPr lang="en-US" sz="750" dirty="0">
-                          <a:solidFill>
-                            <a:schemeClr val="tx1"/>
-                          </a:solidFill>
-                          <a:latin typeface="Calibri" pitchFamily="34" charset="0"/>
-                          <a:ea typeface="Calibri" pitchFamily="34" charset="-122"/>
-                          <a:cs typeface="Calibri" pitchFamily="34" charset="-120"/>
-                        </a:rPr>
-                        <a:t>Descargo</a:t>
-                      </a:r>
-                      <a:endParaRPr lang="en-US" sz="750" dirty="0">
-                        <a:latin typeface="Calibri" charset="0"/>
-                        <a:ea typeface="Calibri" charset="0"/>
-                        <a:cs typeface="Calibri" charset="0"/>
-                      </a:endParaRPr>
-                    </a:p>
-                    <a:p>
-                      <a:pPr algn="just" indent="0" marL="0">
-                        <a:buNone/>
-                      </a:pPr>
-                      <a:r>
-                        <a:rPr lang="en-US" sz="750" dirty="0">
-                          <a:solidFill>
-                            <a:schemeClr val="tx1"/>
-                          </a:solidFill>
-                          <a:latin typeface="Calibri" pitchFamily="34" charset="0"/>
-                          <a:ea typeface="Calibri" pitchFamily="34" charset="-122"/>
-                          <a:cs typeface="Calibri" pitchFamily="34" charset="-120"/>
-                        </a:rPr>
-                        <a:t>Comentario CA: 14/10/2026 Compromiso</a:t>
-                      </a:r>
-                      <a:endParaRPr lang="en-US" sz="750" dirty="0">
-                        <a:latin typeface="Calibri" charset="0"/>
-                        <a:ea typeface="Calibri" charset="0"/>
-                        <a:cs typeface="Calibri" charset="0"/>
-                      </a:endParaRPr>
-                    </a:p>
-                  </a:txBody>
-                  <a:tcPr marL="54864" marR="54864" marT="18288" marB="18288" anchor="ctr">
-                    <a:lnL w="0" cap="flat" cmpd="sng" algn="ctr">
-                      <a:noFill/>
-                    </a:lnL>
-                    <a:lnR w="0" cap="flat" cmpd="sng" algn="ctr">
-                      <a:noFill/>
-                    </a:lnR>
-                    <a:lnT w="0" cap="flat" cmpd="sng" algn="ctr">
-                      <a:noFill/>
-                    </a:lnT>
-                    <a:lnB w="9525" cap="flat" cmpd="sng" algn="ctr">
-                      <a:solidFill>
-                        <a:srgbClr val="D9E0EA"/>
-                      </a:solidFill>
-                      <a:prstDash val="solid"/>
-                      <a:round/>
-                      <a:headEnd type="none" w="med" len="med"/>
-                      <a:tailEnd type="none" w="med" len="med"/>
-                    </a:lnB>
-                  </a:tcPr>
-                </a:tc>
-                <a:tc>
-                  <a:txBody>
-                    <a:bodyPr/>
-                    <a:lstStyle/>
-                    <a:p>
-                      <a:pPr algn="l" indent="0" marL="0">
-                        <a:buNone/>
-                      </a:pPr>
-                      <a:r>
-                        <a:rPr lang="en-US" sz="750" b="1" dirty="0">
-                          <a:solidFill>
-                            <a:schemeClr val="accent1"/>
-                          </a:solidFill>
-                          <a:latin typeface="Calibri" pitchFamily="34" charset="0"/>
-                          <a:ea typeface="Calibri" pitchFamily="34" charset="-122"/>
-                          <a:cs typeface="Calibri" pitchFamily="34" charset="-120"/>
-                        </a:rPr>
-                        <a:t>Gerencia de Cumplimiento</a:t>
-                      </a:r>
-                      <a:endParaRPr lang="en-US" sz="750" dirty="0">
-                        <a:latin typeface="Calibri" charset="0"/>
-                        <a:ea typeface="Calibri" charset="0"/>
-                        <a:cs typeface="Calibri" charset="0"/>
-                      </a:endParaRPr>
-                    </a:p>
-                  </a:txBody>
-                  <a:tcPr marL="54864" marR="54864" marT="18288" marB="18288" anchor="ctr">
-                    <a:lnL w="0" cap="flat" cmpd="sng" algn="ctr">
-                      <a:noFill/>
-                    </a:lnL>
-                    <a:lnR w="0" cap="flat" cmpd="sng" algn="ctr">
-                      <a:noFill/>
-                    </a:lnR>
-                    <a:lnT w="0" cap="flat" cmpd="sng" algn="ctr">
-                      <a:noFill/>
-                    </a:lnT>
-                    <a:lnB w="9525" cap="flat" cmpd="sng" algn="ctr">
-                      <a:solidFill>
-                        <a:srgbClr val="D9E0EA"/>
-                      </a:solidFill>
-                      <a:prstDash val="solid"/>
-                      <a:round/>
-                      <a:headEnd type="none" w="med" len="med"/>
-                      <a:tailEnd type="none" w="med" len="med"/>
-                    </a:lnB>
-                  </a:tcPr>
-                </a:tc>
-              </a:tr>
-              <a:tr h="0">
-                <a:tc>
-                  <a:txBody>
-                    <a:bodyPr/>
-                    <a:lstStyle/>
-                    <a:p>
-                      <a:pPr algn="just" indent="0" marL="0">
-                        <a:buNone/>
-                      </a:pPr>
-                      <a:r>
-                        <a:rPr lang="en-US" sz="750" b="1" dirty="0">
-                          <a:solidFill>
-                            <a:schemeClr val="tx1"/>
-                          </a:solidFill>
-                          <a:latin typeface="Calibri" pitchFamily="34" charset="0"/>
-                          <a:ea typeface="Calibri" pitchFamily="34" charset="-122"/>
-                          <a:cs typeface="Calibri" pitchFamily="34" charset="-120"/>
-                        </a:rPr>
-                        <a:t>Limitante de Accesos a los Datos de COMEDICA, alojada en la Herramienta de Monitoreo.</a:t>
-                      </a:r>
-                      <a:endParaRPr lang="en-US" sz="750" dirty="0">
-                        <a:latin typeface="Calibri" charset="0"/>
-                        <a:ea typeface="Calibri" charset="0"/>
-                        <a:cs typeface="Calibri" charset="0"/>
-                      </a:endParaRPr>
-                    </a:p>
-                  </a:txBody>
-                  <a:tcPr marL="54864" marR="54864" marT="18288" marB="18288" anchor="ctr">
-                    <a:lnL w="0" cap="flat" cmpd="sng" algn="ctr">
-                      <a:noFill/>
-                    </a:lnL>
-                    <a:lnR w="0" cap="flat" cmpd="sng" algn="ctr">
-                      <a:noFill/>
-                    </a:lnR>
-                    <a:lnT w="0" cap="flat" cmpd="sng" algn="ctr">
-                      <a:noFill/>
-                    </a:lnT>
-                    <a:lnB w="9525" cap="flat" cmpd="sng" algn="ctr">
-                      <a:solidFill>
-                        <a:srgbClr val="D9E0EA"/>
-                      </a:solidFill>
-                      <a:prstDash val="solid"/>
-                      <a:round/>
-                      <a:headEnd type="none" w="med" len="med"/>
-                      <a:tailEnd type="none" w="med" len="med"/>
-                    </a:lnB>
-                    <a:solidFill>
-                      <a:srgbClr val="FFFFFF"/>
-                    </a:solidFill>
-                  </a:tcPr>
-                </a:tc>
-                <a:tc>
-                  <a:txBody>
-                    <a:bodyPr/>
-                    <a:lstStyle/>
-                    <a:p>
-                      <a:pPr algn="just" indent="0" marL="0">
-                        <a:buNone/>
-                      </a:pPr>
-                      <a:r>
-                        <a:rPr lang="en-US" sz="750" dirty="0">
-                          <a:solidFill>
-                            <a:schemeClr val="tx1"/>
-                          </a:solidFill>
-                          <a:latin typeface="Calibri" pitchFamily="34" charset="0"/>
-                          <a:ea typeface="Calibri" pitchFamily="34" charset="-122"/>
-                          <a:cs typeface="Calibri" pitchFamily="34" charset="-120"/>
-                        </a:rPr>
-                        <a:t>Descargo</a:t>
-                      </a:r>
-                      <a:endParaRPr lang="en-US" sz="750" dirty="0">
-                        <a:latin typeface="Calibri" charset="0"/>
-                        <a:ea typeface="Calibri" charset="0"/>
-                        <a:cs typeface="Calibri" charset="0"/>
-                      </a:endParaRPr>
-                    </a:p>
-                    <a:p>
-                      <a:pPr algn="just" indent="0" marL="0">
-                        <a:buNone/>
-                      </a:pPr>
-                      <a:r>
-                        <a:rPr lang="en-US" sz="750" dirty="0">
-                          <a:solidFill>
-                            <a:schemeClr val="tx1"/>
-                          </a:solidFill>
-                          <a:latin typeface="Calibri" pitchFamily="34" charset="0"/>
-                          <a:ea typeface="Calibri" pitchFamily="34" charset="-122"/>
-                          <a:cs typeface="Calibri" pitchFamily="34" charset="-120"/>
-                        </a:rPr>
-                        <a:t>Comentario CA: 14/10/2026 Compromiso</a:t>
-                      </a:r>
-                      <a:endParaRPr lang="en-US" sz="750" dirty="0">
-                        <a:latin typeface="Calibri" charset="0"/>
-                        <a:ea typeface="Calibri" charset="0"/>
-                        <a:cs typeface="Calibri" charset="0"/>
-                      </a:endParaRPr>
-                    </a:p>
-                  </a:txBody>
-                  <a:tcPr marL="54864" marR="54864" marT="18288" marB="18288" anchor="ctr">
-                    <a:lnL w="0" cap="flat" cmpd="sng" algn="ctr">
-                      <a:noFill/>
-                    </a:lnL>
-                    <a:lnR w="0" cap="flat" cmpd="sng" algn="ctr">
-                      <a:noFill/>
-                    </a:lnR>
-                    <a:lnT w="0" cap="flat" cmpd="sng" algn="ctr">
-                      <a:noFill/>
-                    </a:lnT>
-                    <a:lnB w="9525" cap="flat" cmpd="sng" algn="ctr">
-                      <a:solidFill>
-                        <a:srgbClr val="D9E0EA"/>
-                      </a:solidFill>
-                      <a:prstDash val="solid"/>
-                      <a:round/>
-                      <a:headEnd type="none" w="med" len="med"/>
-                      <a:tailEnd type="none" w="med" len="med"/>
-                    </a:lnB>
-                  </a:tcPr>
-                </a:tc>
-                <a:tc>
-                  <a:txBody>
-                    <a:bodyPr/>
-                    <a:lstStyle/>
-                    <a:p>
-                      <a:pPr algn="l" indent="0" marL="0">
-                        <a:buNone/>
-                      </a:pPr>
-                      <a:r>
-                        <a:rPr lang="en-US" sz="750" b="1" dirty="0">
-                          <a:solidFill>
-                            <a:schemeClr val="accent1"/>
-                          </a:solidFill>
-                          <a:latin typeface="Calibri" pitchFamily="34" charset="0"/>
-                          <a:ea typeface="Calibri" pitchFamily="34" charset="-122"/>
-                          <a:cs typeface="Calibri" pitchFamily="34" charset="-120"/>
-                        </a:rPr>
-                        <a:t>Gerencia de Cumplimiento</a:t>
-                      </a:r>
-                      <a:endParaRPr lang="en-US" sz="750" dirty="0">
-                        <a:latin typeface="Calibri" charset="0"/>
-                        <a:ea typeface="Calibri" charset="0"/>
-                        <a:cs typeface="Calibri" charset="0"/>
-                      </a:endParaRPr>
-                    </a:p>
-                    <a:p>
-                      <a:pPr algn="l" indent="0" marL="0">
-                        <a:buNone/>
-                      </a:pPr>
-                      <a:r>
-                        <a:rPr lang="en-US" sz="750" b="1" dirty="0">
-                          <a:solidFill>
-                            <a:schemeClr val="accent1"/>
-                          </a:solidFill>
-                          <a:latin typeface="Calibri" pitchFamily="34" charset="0"/>
-                          <a:ea typeface="Calibri" pitchFamily="34" charset="-122"/>
-                          <a:cs typeface="Calibri" pitchFamily="34" charset="-120"/>
-                        </a:rPr>
-                        <a:t>/ Seguridad de la información</a:t>
-                      </a:r>
-                      <a:endParaRPr lang="en-US" sz="750" dirty="0">
-                        <a:latin typeface="Calibri" charset="0"/>
-                        <a:ea typeface="Calibri" charset="0"/>
-                        <a:cs typeface="Calibri" charset="0"/>
-                      </a:endParaRPr>
-                    </a:p>
-                  </a:txBody>
-                  <a:tcPr marL="54864" marR="54864" marT="18288" marB="18288" anchor="ctr">
-                    <a:lnL w="0" cap="flat" cmpd="sng" algn="ctr">
-                      <a:noFill/>
-                    </a:lnL>
-                    <a:lnR w="0" cap="flat" cmpd="sng" algn="ctr">
-                      <a:noFill/>
-                    </a:lnR>
-                    <a:lnT w="0" cap="flat" cmpd="sng" algn="ctr">
-                      <a:noFill/>
-                    </a:lnT>
-                    <a:lnB w="9525" cap="flat" cmpd="sng" algn="ctr">
-                      <a:solidFill>
-                        <a:srgbClr val="D9E0EA"/>
-                      </a:solidFill>
-                      <a:prstDash val="solid"/>
-                      <a:round/>
-                      <a:headEnd type="none" w="med" len="med"/>
-                      <a:tailEnd type="none" w="med" len="med"/>
-                    </a:lnB>
-                  </a:tcPr>
-                </a:tc>
-              </a:tr>
-              <a:tr h="0">
-                <a:tc>
-                  <a:txBody>
-                    <a:bodyPr/>
-                    <a:lstStyle/>
-                    <a:p>
-                      <a:pPr algn="just" indent="0" marL="0">
-                        <a:buNone/>
-                      </a:pPr>
-                      <a:r>
-                        <a:rPr lang="en-US" sz="750" b="1" dirty="0">
-                          <a:solidFill>
-                            <a:schemeClr val="tx1"/>
-                          </a:solidFill>
-                          <a:latin typeface="Calibri" pitchFamily="34" charset="0"/>
-                          <a:ea typeface="Calibri" pitchFamily="34" charset="-122"/>
-                          <a:cs typeface="Calibri" pitchFamily="34" charset="-120"/>
-                        </a:rPr>
-                        <a:t>Limitante para identificar la base de datos de CRM</a:t>
-                      </a:r>
-                      <a:endParaRPr lang="en-US" sz="750" dirty="0">
-                        <a:latin typeface="Calibri" charset="0"/>
-                        <a:ea typeface="Calibri" charset="0"/>
-                        <a:cs typeface="Calibri" charset="0"/>
-                      </a:endParaRPr>
-                    </a:p>
-                  </a:txBody>
-                  <a:tcPr marL="54864" marR="54864" marT="18288" marB="18288" anchor="ctr">
-                    <a:lnL w="0" cap="flat" cmpd="sng" algn="ctr">
-                      <a:noFill/>
-                    </a:lnL>
-                    <a:lnR w="0" cap="flat" cmpd="sng" algn="ctr">
-                      <a:noFill/>
-                    </a:lnR>
-                    <a:lnT w="0" cap="flat" cmpd="sng" algn="ctr">
-                      <a:noFill/>
-                    </a:lnT>
-                    <a:lnB w="9525" cap="flat" cmpd="sng" algn="ctr">
-                      <a:solidFill>
-                        <a:srgbClr val="D9E0EA"/>
-                      </a:solidFill>
-                      <a:prstDash val="solid"/>
-                      <a:round/>
-                      <a:headEnd type="none" w="med" len="med"/>
-                      <a:tailEnd type="none" w="med" len="med"/>
-                    </a:lnB>
-                    <a:solidFill>
-                      <a:srgbClr val="FFFFFF"/>
-                    </a:solidFill>
-                  </a:tcPr>
-                </a:tc>
-                <a:tc>
-                  <a:txBody>
-                    <a:bodyPr/>
-                    <a:lstStyle/>
-                    <a:p>
-                      <a:pPr algn="just" indent="0" marL="0">
-                        <a:buNone/>
-                      </a:pPr>
-                      <a:r>
-                        <a:rPr lang="en-US" sz="750" dirty="0">
-                          <a:solidFill>
-                            <a:schemeClr val="tx1"/>
-                          </a:solidFill>
-                          <a:latin typeface="Calibri" pitchFamily="34" charset="0"/>
-                          <a:ea typeface="Calibri" pitchFamily="34" charset="-122"/>
-                          <a:cs typeface="Calibri" pitchFamily="34" charset="-120"/>
-                        </a:rPr>
-                        <a:t>Comentario CA: 14/10/2026 Compromiso</a:t>
-                      </a:r>
-                      <a:endParaRPr lang="en-US" sz="750" dirty="0">
-                        <a:latin typeface="Calibri" charset="0"/>
-                        <a:ea typeface="Calibri" charset="0"/>
-                        <a:cs typeface="Calibri" charset="0"/>
-                      </a:endParaRPr>
-                    </a:p>
-                  </a:txBody>
-                  <a:tcPr marL="54864" marR="54864" marT="18288" marB="18288" anchor="ctr">
-                    <a:lnL w="0" cap="flat" cmpd="sng" algn="ctr">
-                      <a:noFill/>
-                    </a:lnL>
-                    <a:lnR w="0" cap="flat" cmpd="sng" algn="ctr">
-                      <a:noFill/>
-                    </a:lnR>
-                    <a:lnT w="0" cap="flat" cmpd="sng" algn="ctr">
-                      <a:noFill/>
-                    </a:lnT>
-                    <a:lnB w="9525" cap="flat" cmpd="sng" algn="ctr">
-                      <a:solidFill>
-                        <a:srgbClr val="D9E0EA"/>
-                      </a:solidFill>
-                      <a:prstDash val="solid"/>
-                      <a:round/>
-                      <a:headEnd type="none" w="med" len="med"/>
-                      <a:tailEnd type="none" w="med" len="med"/>
-                    </a:lnB>
-                  </a:tcPr>
-                </a:tc>
-                <a:tc>
-                  <a:txBody>
-                    <a:bodyPr/>
-                    <a:lstStyle/>
-                    <a:p>
-                      <a:pPr algn="l" indent="0" marL="0">
-                        <a:buNone/>
-                      </a:pPr>
-                      <a:r>
-                        <a:rPr lang="en-US" sz="750" b="1" dirty="0">
-                          <a:solidFill>
-                            <a:schemeClr val="accent1"/>
-                          </a:solidFill>
-                          <a:latin typeface="Calibri" pitchFamily="34" charset="0"/>
-                          <a:ea typeface="Calibri" pitchFamily="34" charset="-122"/>
-                          <a:cs typeface="Calibri" pitchFamily="34" charset="-120"/>
-                        </a:rPr>
-                        <a:t>Gerencia de Cumplimiento</a:t>
-                      </a:r>
-                      <a:endParaRPr lang="en-US" sz="750" dirty="0">
-                        <a:latin typeface="Calibri" charset="0"/>
-                        <a:ea typeface="Calibri" charset="0"/>
-                        <a:cs typeface="Calibri" charset="0"/>
-                      </a:endParaRPr>
-                    </a:p>
-                    <a:p>
-                      <a:pPr algn="l" indent="0" marL="0">
-                        <a:buNone/>
-                      </a:pPr>
-                      <a:r>
-                        <a:rPr lang="en-US" sz="750" b="1" dirty="0">
-                          <a:solidFill>
-                            <a:schemeClr val="accent1"/>
-                          </a:solidFill>
-                          <a:latin typeface="Calibri" pitchFamily="34" charset="0"/>
-                          <a:ea typeface="Calibri" pitchFamily="34" charset="-122"/>
-                          <a:cs typeface="Calibri" pitchFamily="34" charset="-120"/>
-                        </a:rPr>
-                        <a:t>/ Seguridad de la información</a:t>
-                      </a:r>
-                      <a:endParaRPr lang="en-US" sz="750" dirty="0">
-                        <a:latin typeface="Calibri" charset="0"/>
-                        <a:ea typeface="Calibri" charset="0"/>
-                        <a:cs typeface="Calibri" charset="0"/>
-                      </a:endParaRPr>
-                    </a:p>
-                  </a:txBody>
-                  <a:tcPr marL="54864" marR="54864" marT="18288" marB="18288" anchor="ctr">
-                    <a:lnL w="0" cap="flat" cmpd="sng" algn="ctr">
-                      <a:noFill/>
-                    </a:lnL>
-                    <a:lnR w="0" cap="flat" cmpd="sng" algn="ctr">
-                      <a:noFill/>
-                    </a:lnR>
-                    <a:lnT w="0" cap="flat" cmpd="sng" algn="ctr">
-                      <a:noFill/>
-                    </a:lnT>
-                    <a:lnB w="9525" cap="flat" cmpd="sng" algn="ctr">
-                      <a:solidFill>
-                        <a:srgbClr val="D9E0EA"/>
-                      </a:solidFill>
-                      <a:prstDash val="solid"/>
-                      <a:round/>
-                      <a:headEnd type="none" w="med" len="med"/>
-                      <a:tailEnd type="none" w="med" len="med"/>
-                    </a:lnB>
-                  </a:tcPr>
-                </a:tc>
-              </a:tr>
-              <a:tr h="0">
-                <a:tc>
-                  <a:txBody>
-                    <a:bodyPr/>
-                    <a:lstStyle/>
-                    <a:p>
-                      <a:pPr algn="just" indent="0" marL="0">
-                        <a:buNone/>
-                      </a:pPr>
-                      <a:r>
-                        <a:rPr lang="en-US" sz="750" b="1" dirty="0">
-                          <a:solidFill>
-                            <a:schemeClr val="tx1"/>
-                          </a:solidFill>
-                          <a:latin typeface="Calibri" pitchFamily="34" charset="0"/>
-                          <a:ea typeface="Calibri" pitchFamily="34" charset="-122"/>
-                          <a:cs typeface="Calibri" pitchFamily="34" charset="-120"/>
-                        </a:rPr>
-                        <a:t>Falta de documentación que dé cumplimiento a lo requerido por el artículo 22 de la NRP-23 correspondiente a la adquisición del sistema CRM.</a:t>
-                      </a:r>
-                      <a:endParaRPr lang="en-US" sz="750" dirty="0">
-                        <a:latin typeface="Calibri" charset="0"/>
-                        <a:ea typeface="Calibri" charset="0"/>
-                        <a:cs typeface="Calibri" charset="0"/>
-                      </a:endParaRPr>
-                    </a:p>
-                  </a:txBody>
-                  <a:tcPr marL="54864" marR="54864" marT="18288" marB="18288" anchor="ctr">
-                    <a:lnL w="0" cap="flat" cmpd="sng" algn="ctr">
-                      <a:noFill/>
-                    </a:lnL>
-                    <a:lnR w="0" cap="flat" cmpd="sng" algn="ctr">
-                      <a:noFill/>
-                    </a:lnR>
-                    <a:lnT w="0" cap="flat" cmpd="sng" algn="ctr">
-                      <a:noFill/>
-                    </a:lnT>
-                    <a:lnB w="9525" cap="flat" cmpd="sng" algn="ctr">
-                      <a:solidFill>
-                        <a:srgbClr val="D9E0EA"/>
-                      </a:solidFill>
-                      <a:prstDash val="solid"/>
-                      <a:round/>
-                      <a:headEnd type="none" w="med" len="med"/>
-                      <a:tailEnd type="none" w="med" len="med"/>
-                    </a:lnB>
-                    <a:solidFill>
-                      <a:srgbClr val="FFFFFF"/>
-                    </a:solidFill>
-                  </a:tcPr>
-                </a:tc>
-                <a:tc>
-                  <a:txBody>
-                    <a:bodyPr/>
-                    <a:lstStyle/>
-                    <a:p>
-                      <a:pPr algn="just" indent="0" marL="0">
-                        <a:buNone/>
-                      </a:pPr>
-                      <a:r>
-                        <a:rPr lang="en-US" sz="750" dirty="0">
-                          <a:solidFill>
-                            <a:schemeClr val="tx1"/>
-                          </a:solidFill>
-                          <a:latin typeface="Calibri" pitchFamily="34" charset="0"/>
-                          <a:ea typeface="Calibri" pitchFamily="34" charset="-122"/>
-                          <a:cs typeface="Calibri" pitchFamily="34" charset="-120"/>
-                        </a:rPr>
-                        <a:t>Descargo</a:t>
-                      </a:r>
-                      <a:endParaRPr lang="en-US" sz="750" dirty="0">
-                        <a:latin typeface="Calibri" charset="0"/>
-                        <a:ea typeface="Calibri" charset="0"/>
-                        <a:cs typeface="Calibri" charset="0"/>
-                      </a:endParaRPr>
-                    </a:p>
-                    <a:p>
-                      <a:pPr algn="just" indent="0" marL="0">
-                        <a:buNone/>
-                      </a:pPr>
-                      <a:r>
-                        <a:rPr lang="en-US" sz="750" dirty="0">
-                          <a:solidFill>
-                            <a:schemeClr val="tx1"/>
-                          </a:solidFill>
-                          <a:latin typeface="Calibri" pitchFamily="34" charset="0"/>
-                          <a:ea typeface="Calibri" pitchFamily="34" charset="-122"/>
-                          <a:cs typeface="Calibri" pitchFamily="34" charset="-120"/>
-                        </a:rPr>
-                        <a:t>Comentario CA: 14/10/2026 Compromiso</a:t>
-                      </a:r>
-                      <a:endParaRPr lang="en-US" sz="750" dirty="0">
-                        <a:latin typeface="Calibri" charset="0"/>
-                        <a:ea typeface="Calibri" charset="0"/>
-                        <a:cs typeface="Calibri" charset="0"/>
-                      </a:endParaRPr>
-                    </a:p>
-                  </a:txBody>
-                  <a:tcPr marL="54864" marR="54864" marT="18288" marB="18288" anchor="ctr">
-                    <a:lnL w="0" cap="flat" cmpd="sng" algn="ctr">
-                      <a:noFill/>
-                    </a:lnL>
-                    <a:lnR w="0" cap="flat" cmpd="sng" algn="ctr">
-                      <a:noFill/>
-                    </a:lnR>
-                    <a:lnT w="0" cap="flat" cmpd="sng" algn="ctr">
-                      <a:noFill/>
-                    </a:lnT>
-                    <a:lnB w="9525" cap="flat" cmpd="sng" algn="ctr">
-                      <a:solidFill>
-                        <a:srgbClr val="D9E0EA"/>
-                      </a:solidFill>
-                      <a:prstDash val="solid"/>
-                      <a:round/>
-                      <a:headEnd type="none" w="med" len="med"/>
-                      <a:tailEnd type="none" w="med" len="med"/>
-                    </a:lnB>
-                  </a:tcPr>
-                </a:tc>
-                <a:tc>
-                  <a:txBody>
-                    <a:bodyPr/>
-                    <a:lstStyle/>
-                    <a:p>
-                      <a:pPr algn="l" indent="0" marL="0">
-                        <a:buNone/>
-                      </a:pPr>
-                      <a:r>
-                        <a:rPr lang="en-US" sz="750" b="1" dirty="0">
-                          <a:solidFill>
-                            <a:schemeClr val="accent1"/>
-                          </a:solidFill>
-                          <a:latin typeface="Calibri" pitchFamily="34" charset="0"/>
-                          <a:ea typeface="Calibri" pitchFamily="34" charset="-122"/>
-                          <a:cs typeface="Calibri" pitchFamily="34" charset="-120"/>
-                        </a:rPr>
-                        <a:t>Gerencia de Cumplimiento</a:t>
-                      </a:r>
-                      <a:endParaRPr lang="en-US" sz="750" dirty="0">
-                        <a:latin typeface="Calibri" charset="0"/>
-                        <a:ea typeface="Calibri" charset="0"/>
-                        <a:cs typeface="Calibri" charset="0"/>
-                      </a:endParaRPr>
-                    </a:p>
-                    <a:p>
-                      <a:pPr algn="l" indent="0" marL="0">
-                        <a:buNone/>
-                      </a:pPr>
-                      <a:r>
-                        <a:rPr lang="en-US" sz="750" b="1" dirty="0">
-                          <a:solidFill>
-                            <a:schemeClr val="accent1"/>
-                          </a:solidFill>
-                          <a:latin typeface="Calibri" pitchFamily="34" charset="0"/>
-                          <a:ea typeface="Calibri" pitchFamily="34" charset="-122"/>
-                          <a:cs typeface="Calibri" pitchFamily="34" charset="-120"/>
-                        </a:rPr>
-                        <a:t>/Seguridad de la Información</a:t>
-                      </a:r>
-                      <a:endParaRPr lang="en-US" sz="750" dirty="0">
-                        <a:latin typeface="Calibri" charset="0"/>
-                        <a:ea typeface="Calibri" charset="0"/>
-                        <a:cs typeface="Calibri" charset="0"/>
-                      </a:endParaRPr>
-                    </a:p>
-                  </a:txBody>
-                  <a:tcPr marL="54864" marR="54864" marT="18288" marB="18288" anchor="ctr">
-                    <a:lnL w="0" cap="flat" cmpd="sng" algn="ctr">
-                      <a:noFill/>
-                    </a:lnL>
-                    <a:lnR w="0" cap="flat" cmpd="sng" algn="ctr">
-                      <a:noFill/>
-                    </a:lnR>
-                    <a:lnT w="0" cap="flat" cmpd="sng" algn="ctr">
-                      <a:noFill/>
-                    </a:lnT>
-                    <a:lnB w="9525" cap="flat" cmpd="sng" algn="ctr">
-                      <a:solidFill>
-                        <a:srgbClr val="D9E0EA"/>
-                      </a:solidFill>
-                      <a:prstDash val="solid"/>
-                      <a:round/>
-                      <a:headEnd type="none" w="med" len="med"/>
-                      <a:tailEnd type="none" w="med" len="med"/>
-                    </a:lnB>
-                  </a:tcPr>
-                </a:tc>
-              </a:tr>
-              <a:tr h="0">
-                <a:tc>
-                  <a:txBody>
-                    <a:bodyPr/>
-                    <a:lstStyle/>
-                    <a:p>
-                      <a:pPr algn="just" indent="0" marL="0">
-                        <a:buNone/>
-                      </a:pPr>
-                      <a:r>
-                        <a:rPr lang="en-US" sz="750" b="1" dirty="0">
-                          <a:solidFill>
-                            <a:schemeClr val="tx1"/>
-                          </a:solidFill>
-                          <a:latin typeface="Calibri" pitchFamily="34" charset="0"/>
-                          <a:ea typeface="Calibri" pitchFamily="34" charset="-122"/>
-                          <a:cs typeface="Calibri" pitchFamily="34" charset="-120"/>
-                        </a:rPr>
-                        <a:t>Servicios tercerizados</a:t>
-                      </a:r>
-                      <a:endParaRPr lang="en-US" sz="750" dirty="0">
-                        <a:latin typeface="Calibri" charset="0"/>
-                        <a:ea typeface="Calibri" charset="0"/>
-                        <a:cs typeface="Calibri" charset="0"/>
-                      </a:endParaRPr>
-                    </a:p>
-                  </a:txBody>
-                  <a:tcPr marL="54864" marR="54864" marT="18288" marB="18288" anchor="ctr">
-                    <a:lnL w="0" cap="flat" cmpd="sng" algn="ctr">
-                      <a:noFill/>
-                    </a:lnL>
-                    <a:lnR w="0" cap="flat" cmpd="sng" algn="ctr">
-                      <a:noFill/>
-                    </a:lnR>
-                    <a:lnT w="0" cap="flat" cmpd="sng" algn="ctr">
-                      <a:noFill/>
-                    </a:lnT>
-                    <a:lnB w="9525" cap="flat" cmpd="sng" algn="ctr">
-                      <a:solidFill>
-                        <a:srgbClr val="D9E0EA"/>
-                      </a:solidFill>
-                      <a:prstDash val="solid"/>
-                      <a:round/>
-                      <a:headEnd type="none" w="med" len="med"/>
-                      <a:tailEnd type="none" w="med" len="med"/>
-                    </a:lnB>
-                    <a:solidFill>
-                      <a:srgbClr val="FFFFFF"/>
-                    </a:solidFill>
-                  </a:tcPr>
-                </a:tc>
-                <a:tc>
-                  <a:txBody>
-                    <a:bodyPr/>
-                    <a:lstStyle/>
-                    <a:p>
-                      <a:pPr algn="just" indent="0" marL="0">
-                        <a:buNone/>
-                      </a:pPr>
-                      <a:r>
-                        <a:rPr lang="en-US" sz="750" dirty="0">
-                          <a:solidFill>
-                            <a:schemeClr val="tx1"/>
-                          </a:solidFill>
-                          <a:latin typeface="Calibri" pitchFamily="34" charset="0"/>
-                          <a:ea typeface="Calibri" pitchFamily="34" charset="-122"/>
-                          <a:cs typeface="Calibri" pitchFamily="34" charset="-120"/>
-                        </a:rPr>
-                        <a:t>Plan de acción:</a:t>
-                      </a:r>
-                      <a:endParaRPr lang="en-US" sz="750" dirty="0">
-                        <a:latin typeface="Calibri" charset="0"/>
-                        <a:ea typeface="Calibri" charset="0"/>
-                        <a:cs typeface="Calibri" charset="0"/>
-                      </a:endParaRPr>
-                    </a:p>
-                    <a:p>
-                      <a:pPr algn="just" indent="0" marL="0">
-                        <a:buNone/>
-                      </a:pPr>
-                      <a:r>
-                        <a:rPr lang="en-US" sz="750" dirty="0">
-                          <a:solidFill>
-                            <a:schemeClr val="tx1"/>
-                          </a:solidFill>
-                          <a:latin typeface="Calibri" pitchFamily="34" charset="0"/>
-                          <a:ea typeface="Calibri" pitchFamily="34" charset="-122"/>
-                          <a:cs typeface="Calibri" pitchFamily="34" charset="-120"/>
-                        </a:rPr>
-                        <a:t>Comentario CA: 14/10/2026 Compromiso</a:t>
-                      </a:r>
-                      <a:endParaRPr lang="en-US" sz="750" dirty="0">
-                        <a:latin typeface="Calibri" charset="0"/>
-                        <a:ea typeface="Calibri" charset="0"/>
-                        <a:cs typeface="Calibri" charset="0"/>
-                      </a:endParaRPr>
-                    </a:p>
-                    <a:p>
-                      <a:pPr algn="just" indent="0" marL="0">
-                        <a:buNone/>
-                      </a:pPr>
-                      <a:r>
-                        <a:rPr lang="en-US" sz="750" dirty="0">
-                          <a:solidFill>
-                            <a:schemeClr val="tx1"/>
-                          </a:solidFill>
-                          <a:latin typeface="Calibri" pitchFamily="34" charset="0"/>
-                          <a:ea typeface="Calibri" pitchFamily="34" charset="-122"/>
-                          <a:cs typeface="Calibri" pitchFamily="34" charset="-120"/>
-                        </a:rPr>
-                        <a:t>Comentario Licda. Bonilla: Como parte del fortalecimiento de los controles de seguridad asociados al servicio tercerizado del módulo ACRM, la Unidad de Seguridad de la Información y Ciberseguridad realizará una reevaluación de los riesgos de seguridad de la información y ciberseguridad, mediante la actualización de la matriz de riesgos y la revisión de los controles existentes, con el propósito de identificar oportunidades de mejora y definir las medidas adicionales de tratamiento que correspondan, en coordinación con el área responsable de la solución el proveedor.</a:t>
-                      </a:r>
-                      <a:endParaRPr lang="en-US" sz="750" dirty="0">
-                        <a:latin typeface="Calibri" charset="0"/>
-                        <a:ea typeface="Calibri" charset="0"/>
-                        <a:cs typeface="Calibri" charset="0"/>
-                      </a:endParaRPr>
-                    </a:p>
-                    <a:p>
-                      <a:pPr algn="just" indent="0" marL="0">
-                        <a:buNone/>
-                      </a:pPr>
-                      <a:r>
-                        <a:rPr lang="en-US" sz="750" dirty="0">
-                          <a:solidFill>
-                            <a:schemeClr val="tx1"/>
-                          </a:solidFill>
-                          <a:latin typeface="Calibri" pitchFamily="34" charset="0"/>
-                          <a:ea typeface="Calibri" pitchFamily="34" charset="-122"/>
-                          <a:cs typeface="Calibri" pitchFamily="34" charset="-120"/>
-                        </a:rPr>
-                        <a:t>Fecha de cumplimiento: 30 de noviembre de 2026.</a:t>
-                      </a:r>
-                      <a:endParaRPr lang="en-US" sz="750" dirty="0">
-                        <a:latin typeface="Calibri" charset="0"/>
-                        <a:ea typeface="Calibri" charset="0"/>
-                        <a:cs typeface="Calibri" charset="0"/>
-                      </a:endParaRPr>
-                    </a:p>
-                  </a:txBody>
-                  <a:tcPr marL="54864" marR="54864" marT="18288" marB="18288" anchor="ctr">
-                    <a:lnL w="0" cap="flat" cmpd="sng" algn="ctr">
-                      <a:noFill/>
-                    </a:lnL>
-                    <a:lnR w="0" cap="flat" cmpd="sng" algn="ctr">
-                      <a:noFill/>
-                    </a:lnR>
-                    <a:lnT w="0" cap="flat" cmpd="sng" algn="ctr">
-                      <a:noFill/>
-                    </a:lnT>
-                    <a:lnB w="9525" cap="flat" cmpd="sng" algn="ctr">
-                      <a:solidFill>
-                        <a:srgbClr val="D9E0EA"/>
-                      </a:solidFill>
-                      <a:prstDash val="solid"/>
-                      <a:round/>
-                      <a:headEnd type="none" w="med" len="med"/>
-                      <a:tailEnd type="none" w="med" len="med"/>
-                    </a:lnB>
-                  </a:tcPr>
-                </a:tc>
-                <a:tc>
-                  <a:txBody>
-                    <a:bodyPr/>
-                    <a:lstStyle/>
-                    <a:p>
-                      <a:pPr algn="l" indent="0" marL="0">
-                        <a:buNone/>
-                      </a:pPr>
-                      <a:r>
-                        <a:rPr lang="en-US" sz="750" b="1" dirty="0">
-                          <a:solidFill>
-                            <a:schemeClr val="accent1"/>
-                          </a:solidFill>
-                          <a:latin typeface="Calibri" pitchFamily="34" charset="0"/>
-                          <a:ea typeface="Calibri" pitchFamily="34" charset="-122"/>
-                          <a:cs typeface="Calibri" pitchFamily="34" charset="-120"/>
-                        </a:rPr>
-                        <a:t>Gerencia de Cumplimiento</a:t>
-                      </a:r>
-                      <a:endParaRPr lang="en-US" sz="750" dirty="0">
-                        <a:latin typeface="Calibri" charset="0"/>
-                        <a:ea typeface="Calibri" charset="0"/>
-                        <a:cs typeface="Calibri" charset="0"/>
-                      </a:endParaRPr>
-                    </a:p>
-                    <a:p>
-                      <a:pPr algn="l" indent="0" marL="0">
-                        <a:buNone/>
-                      </a:pPr>
-                      <a:r>
-                        <a:rPr lang="en-US" sz="750" b="1" dirty="0">
-                          <a:solidFill>
-                            <a:schemeClr val="accent1"/>
-                          </a:solidFill>
-                          <a:latin typeface="Calibri" pitchFamily="34" charset="0"/>
-                          <a:ea typeface="Calibri" pitchFamily="34" charset="-122"/>
-                          <a:cs typeface="Calibri" pitchFamily="34" charset="-120"/>
-                        </a:rPr>
-                        <a:t>/ Seguridad de la Información</a:t>
-                      </a:r>
-                      <a:endParaRPr lang="en-US" sz="750" dirty="0">
+                      <a:endParaRPr lang="en-US" sz="1100" dirty="0">
                         <a:latin typeface="Calibri" charset="0"/>
                         <a:ea typeface="Calibri" charset="0"/>
                         <a:cs typeface="Calibri" charset="0"/>
@@ -4450,7 +3357,7 @@
         <p:spPr>
           <a:xfrm>
             <a:off x="411480" y="228600"/>
-            <a:ext cx="11368735" cy="411480"/>
+            <a:ext cx="9174175" cy="411480"/>
           </a:xfrm>
           <a:prstGeom prst="rect">
             <a:avLst/>
@@ -4503,9 +3410,9 @@
             <a:tbl>
               <a:tblPr/>
               <a:tblGrid>
-                <a:gridCol w="4937760"/>
-                <a:gridCol w="4965192"/>
-                <a:gridCol w="1463040"/>
+                <a:gridCol w="3749040"/>
+                <a:gridCol w="5760720"/>
+                <a:gridCol w="1856232"/>
               </a:tblGrid>
               <a:tr h="0">
                 <a:tc>
@@ -4554,7 +3461,7 @@
                       <a:tailEnd type="none" w="med" len="med"/>
                     </a:lnB>
                     <a:solidFill>
-                      <a:schemeClr val="accent3"/>
+                      <a:schemeClr val="accent1"/>
                     </a:solidFill>
                   </a:tcPr>
                 </a:tc>
@@ -4604,7 +3511,7 @@
                       <a:tailEnd type="none" w="med" len="med"/>
                     </a:lnB>
                     <a:solidFill>
-                      <a:schemeClr val="accent3"/>
+                      <a:schemeClr val="accent1"/>
                     </a:solidFill>
                   </a:tcPr>
                 </a:tc>
@@ -4675,7 +3582,7 @@
                       <a:tailEnd type="none" w="med" len="med"/>
                     </a:lnB>
                     <a:solidFill>
-                      <a:schemeClr val="accent3"/>
+                      <a:schemeClr val="accent1"/>
                     </a:solidFill>
                   </a:tcPr>
                 </a:tc>
@@ -4690,7 +3597,7 @@
                         <a:buNone/>
                       </a:pPr>
                       <a:r>
-                        <a:rPr lang="en-US" sz="700" b="1" dirty="0">
+                        <a:rPr lang="en-US" sz="1100" b="1" dirty="0">
                           <a:solidFill>
                             <a:schemeClr val="accent1"/>
                           </a:solidFill>
@@ -4698,51 +3605,9 @@
                           <a:ea typeface="Calibri" pitchFamily="34" charset="-122"/>
                           <a:cs typeface="Calibri" pitchFamily="34" charset="-120"/>
                         </a:rPr>
-                        <a:t>Dar seguimiento a observaciones de visitas anteriores con referencia al 31 de mayo de 2026</a:t>
-                      </a:r>
-                      <a:endParaRPr lang="en-US" sz="700" dirty="0">
-                        <a:latin typeface="Calibri" charset="0"/>
-                        <a:ea typeface="Calibri" charset="0"/>
-                        <a:cs typeface="Calibri" charset="0"/>
-                      </a:endParaRPr>
-                    </a:p>
-                    <a:p>
-                      <a:pPr algn="just" indent="0" marL="0">
-                        <a:buNone/>
-                      </a:pPr>
-                      <a:r>
-                        <a:rPr lang="en-US" sz="700" b="1" dirty="0">
-                          <a:solidFill>
-                            <a:schemeClr val="accent1"/>
-                          </a:solidFill>
-                          <a:latin typeface="Calibri" pitchFamily="34" charset="0"/>
-                          <a:ea typeface="Calibri" pitchFamily="34" charset="-122"/>
-                          <a:cs typeface="Calibri" pitchFamily="34" charset="-120"/>
-                        </a:rPr>
-                        <a:t>Evaluación de la gestión de los Riesgos de Crédito, Operacional y Tecnológico, con referencia al 31 de enero de 2025; resultados preliminares comunicados mediante nota No. DS-SABAO-BCS-BC-16572 del 10 de septiembre de 2025.</a:t>
-                      </a:r>
-                      <a:endParaRPr lang="en-US" sz="700" dirty="0">
-                        <a:latin typeface="Calibri" charset="0"/>
-                        <a:ea typeface="Calibri" charset="0"/>
-                        <a:cs typeface="Calibri" charset="0"/>
-                      </a:endParaRPr>
-                    </a:p>
-                    <a:p>
-                      <a:pPr algn="just" indent="0" marL="0">
-                        <a:buNone/>
-                      </a:pPr>
-                      <a:r>
-                        <a:rPr lang="en-US" sz="700" b="1" dirty="0">
-                          <a:solidFill>
-                            <a:schemeClr val="accent1"/>
-                          </a:solidFill>
-                          <a:latin typeface="Calibri" pitchFamily="34" charset="0"/>
-                          <a:ea typeface="Calibri" pitchFamily="34" charset="-122"/>
-                          <a:cs typeface="Calibri" pitchFamily="34" charset="-120"/>
-                        </a:rPr>
-                        <a:t>C.1.1. Gestión del Riesgo de Crédito.</a:t>
-                      </a:r>
-                      <a:endParaRPr lang="en-US" sz="700" dirty="0">
+                        <a:t>B. Proceso de implementación de la Herramienta de Monitoreo</a:t>
+                      </a:r>
+                      <a:endParaRPr lang="en-US" sz="1100" dirty="0">
                         <a:latin typeface="Calibri" charset="0"/>
                         <a:ea typeface="Calibri" charset="0"/>
                         <a:cs typeface="Calibri" charset="0"/>
@@ -4790,80 +3655,17 @@
                         <a:buNone/>
                       </a:pPr>
                       <a:r>
-                        <a:rPr lang="en-US" sz="700" b="1" dirty="0">
-                          <a:solidFill>
-                            <a:schemeClr val="tx1"/>
-                          </a:solidFill>
-                          <a:latin typeface="Calibri" pitchFamily="34" charset="0"/>
-                          <a:ea typeface="Calibri" pitchFamily="34" charset="-122"/>
-                          <a:cs typeface="Calibri" pitchFamily="34" charset="-120"/>
-                        </a:rPr>
-                        <a:t>Observación 2: Falta de eficacia en la subsanación de observaciones determinadas por el Departamento de Auditoría Interna.</a:t>
-                      </a:r>
-                      <a:endParaRPr lang="en-US" sz="700" dirty="0">
-                        <a:latin typeface="Calibri" charset="0"/>
-                        <a:ea typeface="Calibri" charset="0"/>
-                        <a:cs typeface="Calibri" charset="0"/>
-                      </a:endParaRPr>
-                    </a:p>
-                    <a:p>
-                      <a:pPr algn="just" indent="0" marL="0">
-                        <a:buNone/>
-                      </a:pPr>
-                      <a:r>
-                        <a:rPr lang="en-US" sz="700" dirty="0">
-                          <a:solidFill>
-                            <a:schemeClr val="tx1"/>
-                          </a:solidFill>
-                          <a:latin typeface="Calibri" pitchFamily="34" charset="0"/>
-                          <a:ea typeface="Calibri" pitchFamily="34" charset="-122"/>
-                          <a:cs typeface="Calibri" pitchFamily="34" charset="-120"/>
-                        </a:rPr>
-                        <a:t>Seguimiento realizado en la presente visita de supervisión:</a:t>
-                      </a:r>
-                      <a:endParaRPr lang="en-US" sz="700" dirty="0">
-                        <a:latin typeface="Calibri" charset="0"/>
-                        <a:ea typeface="Calibri" charset="0"/>
-                        <a:cs typeface="Calibri" charset="0"/>
-                      </a:endParaRPr>
-                    </a:p>
-                    <a:p>
-                      <a:pPr algn="just" indent="0" marL="0">
-                        <a:buNone/>
-                      </a:pPr>
-                      <a:r>
-                        <a:rPr lang="en-US" sz="700" dirty="0">
-                          <a:solidFill>
-                            <a:schemeClr val="tx1"/>
-                          </a:solidFill>
-                          <a:latin typeface="Calibri" pitchFamily="34" charset="0"/>
-                          <a:ea typeface="Calibri" pitchFamily="34" charset="-122"/>
-                          <a:cs typeface="Calibri" pitchFamily="34" charset="-120"/>
-                        </a:rPr>
-                        <a:t>Comentarios COMEDICA: en el Plan de Auditoría interna 2026 se incluyó seguimientos trimestrales como actividad 44 para solventar la observación.</a:t>
-                      </a:r>
-                      <a:endParaRPr lang="en-US" sz="700" dirty="0">
-                        <a:latin typeface="Calibri" charset="0"/>
-                        <a:ea typeface="Calibri" charset="0"/>
-                        <a:cs typeface="Calibri" charset="0"/>
-                      </a:endParaRPr>
-                    </a:p>
-                    <a:p>
-                      <a:pPr algn="just" indent="0" marL="0">
-                        <a:buNone/>
-                      </a:pPr>
-                      <a:r>
-                        <a:rPr lang="en-US" sz="700" dirty="0">
-                          <a:solidFill>
-                            <a:schemeClr val="accent6"/>
-                          </a:solidFill>
-                          <a:latin typeface="Calibri" pitchFamily="34" charset="0"/>
-                          <a:ea typeface="Calibri" pitchFamily="34" charset="-122"/>
-                          <a:cs typeface="Calibri" pitchFamily="34" charset="-120"/>
-                        </a:rPr>
-                        <a:t>Estado: parcialmente superada</a:t>
-                      </a:r>
-                      <a:endParaRPr lang="en-US" sz="700" dirty="0">
+                        <a:rPr lang="en-US" sz="1100" b="1" dirty="0">
+                          <a:solidFill>
+                            <a:schemeClr val="tx1"/>
+                          </a:solidFill>
+                          <a:latin typeface="Calibri" pitchFamily="34" charset="0"/>
+                          <a:ea typeface="Calibri" pitchFamily="34" charset="-122"/>
+                          <a:cs typeface="Calibri" pitchFamily="34" charset="-120"/>
+                        </a:rPr>
+                        <a:t>Deficiencia en los procedimientos de Respaldos.</a:t>
+                      </a:r>
+                      <a:endParaRPr lang="en-US" sz="1100" dirty="0">
                         <a:latin typeface="Calibri" charset="0"/>
                         <a:ea typeface="Calibri" charset="0"/>
                         <a:cs typeface="Calibri" charset="0"/>
@@ -4890,7 +3692,7 @@
                       <a:tailEnd type="none" w="med" len="med"/>
                     </a:lnB>
                     <a:solidFill>
-                      <a:srgbClr val="FDF4E3"/>
+                      <a:srgbClr val="FFFFFF"/>
                     </a:solidFill>
                   </a:tcPr>
                 </a:tc>
@@ -4903,143 +3705,38 @@
                         <a:buNone/>
                       </a:pPr>
                       <a:r>
-                        <a:rPr lang="en-US" sz="700" dirty="0">
-                          <a:solidFill>
-                            <a:schemeClr val="tx1"/>
-                          </a:solidFill>
-                          <a:latin typeface="Calibri" pitchFamily="34" charset="0"/>
-                          <a:ea typeface="Calibri" pitchFamily="34" charset="-122"/>
-                          <a:cs typeface="Calibri" pitchFamily="34" charset="-120"/>
-                        </a:rPr>
-                        <a:t>AI 28 2024 y AI 45 2024 Otorgamiento de Préstamos.</a:t>
-                      </a:r>
-                      <a:endParaRPr lang="en-US" sz="700" dirty="0">
-                        <a:latin typeface="Calibri" charset="0"/>
-                        <a:ea typeface="Calibri" charset="0"/>
-                        <a:cs typeface="Calibri" charset="0"/>
-                      </a:endParaRPr>
-                    </a:p>
-                    <a:p>
-                      <a:pPr algn="just" indent="0" marL="0">
-                        <a:buNone/>
-                      </a:pPr>
-                      <a:r>
-                        <a:rPr lang="en-US" sz="700" dirty="0">
-                          <a:solidFill>
-                            <a:schemeClr val="tx1"/>
-                          </a:solidFill>
-                          <a:latin typeface="Calibri" pitchFamily="34" charset="0"/>
-                          <a:ea typeface="Calibri" pitchFamily="34" charset="-122"/>
-                          <a:cs typeface="Calibri" pitchFamily="34" charset="-120"/>
-                        </a:rPr>
-                        <a:t>Se realizó el seguimiento correspondiente a los informes AI 44-2025, AI 64-2025 y AI 20-2026. Como resultado, las observaciones quedaron solventadas. (Se anexan los informes).</a:t>
-                      </a:r>
-                      <a:endParaRPr lang="en-US" sz="700" dirty="0">
-                        <a:latin typeface="Calibri" charset="0"/>
-                        <a:ea typeface="Calibri" charset="0"/>
-                        <a:cs typeface="Calibri" charset="0"/>
-                      </a:endParaRPr>
-                    </a:p>
-                    <a:p>
-                      <a:pPr algn="just" indent="0" marL="0">
-                        <a:buNone/>
-                      </a:pPr>
-                      <a:r>
-                        <a:rPr lang="en-US" sz="700" dirty="0">
-                          <a:solidFill>
-                            <a:schemeClr val="tx1"/>
-                          </a:solidFill>
-                          <a:latin typeface="Calibri" pitchFamily="34" charset="0"/>
-                          <a:ea typeface="Calibri" pitchFamily="34" charset="-122"/>
-                          <a:cs typeface="Calibri" pitchFamily="34" charset="-120"/>
-                        </a:rPr>
-                        <a:t>AI 21 2024 y AI 26 2024 Otorgamiento de Tarjeta de Crédito.</a:t>
-                      </a:r>
-                      <a:endParaRPr lang="en-US" sz="700" dirty="0">
-                        <a:latin typeface="Calibri" charset="0"/>
-                        <a:ea typeface="Calibri" charset="0"/>
-                        <a:cs typeface="Calibri" charset="0"/>
-                      </a:endParaRPr>
-                    </a:p>
-                    <a:p>
-                      <a:pPr algn="just" indent="0" marL="0">
-                        <a:buNone/>
-                      </a:pPr>
-                      <a:r>
-                        <a:rPr lang="en-US" sz="700" dirty="0">
-                          <a:solidFill>
-                            <a:schemeClr val="tx1"/>
-                          </a:solidFill>
-                          <a:latin typeface="Calibri" pitchFamily="34" charset="0"/>
-                          <a:ea typeface="Calibri" pitchFamily="34" charset="-122"/>
-                          <a:cs typeface="Calibri" pitchFamily="34" charset="-120"/>
-                        </a:rPr>
-                        <a:t>Se realizó el seguimiento correspondiente en los informes AI 14 2025 y AI 69 2025. Como resultado, las observaciones quedaron solventadas. (Se anexan los informes).</a:t>
-                      </a:r>
-                      <a:endParaRPr lang="en-US" sz="700" dirty="0">
-                        <a:latin typeface="Calibri" charset="0"/>
-                        <a:ea typeface="Calibri" charset="0"/>
-                        <a:cs typeface="Calibri" charset="0"/>
-                      </a:endParaRPr>
-                    </a:p>
-                    <a:p>
-                      <a:pPr algn="just" indent="0" marL="0">
-                        <a:buNone/>
-                      </a:pPr>
-                      <a:r>
-                        <a:rPr lang="en-US" sz="700" dirty="0">
-                          <a:solidFill>
-                            <a:schemeClr val="tx1"/>
-                          </a:solidFill>
-                          <a:latin typeface="Calibri" pitchFamily="34" charset="0"/>
-                          <a:ea typeface="Calibri" pitchFamily="34" charset="-122"/>
-                          <a:cs typeface="Calibri" pitchFamily="34" charset="-120"/>
-                        </a:rPr>
-                        <a:t>Informes AI 32 2024; AI 37 2024 y AI 52 2024.</a:t>
-                      </a:r>
-                      <a:endParaRPr lang="en-US" sz="700" dirty="0">
-                        <a:latin typeface="Calibri" charset="0"/>
-                        <a:ea typeface="Calibri" charset="0"/>
-                        <a:cs typeface="Calibri" charset="0"/>
-                      </a:endParaRPr>
-                    </a:p>
-                    <a:p>
-                      <a:pPr algn="just" indent="0" marL="0">
-                        <a:buNone/>
-                      </a:pPr>
-                      <a:r>
-                        <a:rPr lang="en-US" sz="700" dirty="0">
-                          <a:solidFill>
-                            <a:schemeClr val="tx1"/>
-                          </a:solidFill>
-                          <a:latin typeface="Calibri" pitchFamily="34" charset="0"/>
-                          <a:ea typeface="Calibri" pitchFamily="34" charset="-122"/>
-                          <a:cs typeface="Calibri" pitchFamily="34" charset="-120"/>
-                        </a:rPr>
-                        <a:t>Se continuará con el seguimiento, solicitando nuevamente planes de acción con fechas plazo, a cada unidad responsable.</a:t>
-                      </a:r>
-                      <a:endParaRPr lang="en-US" sz="700" dirty="0">
-                        <a:latin typeface="Calibri" charset="0"/>
-                        <a:ea typeface="Calibri" charset="0"/>
-                        <a:cs typeface="Calibri" charset="0"/>
-                      </a:endParaRPr>
-                    </a:p>
-                    <a:p>
-                      <a:pPr algn="just" indent="0" marL="0">
-                        <a:buNone/>
-                      </a:pPr>
-                      <a:r>
-                        <a:rPr lang="en-US" sz="700" dirty="0">
-                          <a:solidFill>
-                            <a:schemeClr val="tx1"/>
-                          </a:solidFill>
-                          <a:latin typeface="Calibri" pitchFamily="34" charset="0"/>
-                          <a:ea typeface="Calibri" pitchFamily="34" charset="-122"/>
-                          <a:cs typeface="Calibri" pitchFamily="34" charset="-120"/>
-                        </a:rPr>
-                        <a:t>Plazo: 30/11/2026</a:t>
-                      </a:r>
-                      <a:endParaRPr lang="en-US" sz="700" dirty="0">
+                        <a:rPr lang="en-US" sz="1100" dirty="0">
+                          <a:solidFill>
+                            <a:schemeClr val="tx1"/>
+                          </a:solidFill>
+                          <a:latin typeface="Calibri" pitchFamily="34" charset="0"/>
+                          <a:ea typeface="Calibri" pitchFamily="34" charset="-122"/>
+                          <a:cs typeface="Calibri" pitchFamily="34" charset="-120"/>
+                        </a:rPr>
+                        <a:t>Plan de acción</a:t>
+                      </a:r>
+                      <a:endParaRPr lang="en-US" sz="1100" dirty="0">
+                        <a:latin typeface="Calibri" charset="0"/>
+                        <a:ea typeface="Calibri" charset="0"/>
+                        <a:cs typeface="Calibri" charset="0"/>
+                      </a:endParaRPr>
+                    </a:p>
+                    <a:p>
+                      <a:pPr algn="just" indent="0" marL="0">
+                        <a:buNone/>
+                      </a:pPr>
+                      <a:r>
+                        <a:rPr lang="en-US" sz="1100" dirty="0">
+                          <a:solidFill>
+                            <a:schemeClr val="tx1"/>
+                          </a:solidFill>
+                          <a:latin typeface="Calibri" pitchFamily="34" charset="0"/>
+                          <a:ea typeface="Calibri" pitchFamily="34" charset="-122"/>
+                          <a:cs typeface="Calibri" pitchFamily="34" charset="-120"/>
+                        </a:rPr>
+                        <a:t>Comentario CA: 14/10/2026 Compromiso</a:t>
+                      </a:r>
+                      <a:endParaRPr lang="en-US" sz="1100" dirty="0">
                         <a:latin typeface="Calibri" charset="0"/>
                         <a:ea typeface="Calibri" charset="0"/>
                         <a:cs typeface="Calibri" charset="0"/>
@@ -5076,7 +3773,7 @@
                         <a:buNone/>
                       </a:pPr>
                       <a:r>
-                        <a:rPr lang="en-US" sz="700" b="1" dirty="0">
+                        <a:rPr lang="en-US" sz="1100" b="1" dirty="0">
                           <a:solidFill>
                             <a:schemeClr val="accent1"/>
                           </a:solidFill>
@@ -5084,9 +3781,30 @@
                           <a:ea typeface="Calibri" pitchFamily="34" charset="-122"/>
                           <a:cs typeface="Calibri" pitchFamily="34" charset="-120"/>
                         </a:rPr>
-                        <a:t>Auditoría interna</a:t>
-                      </a:r>
-                      <a:endParaRPr lang="en-US" sz="700" dirty="0">
+                        <a:t>Gerencia de Cumplimiento</a:t>
+                      </a:r>
+                      <a:endParaRPr lang="en-US" sz="1100" dirty="0">
+                        <a:latin typeface="Calibri" charset="0"/>
+                        <a:ea typeface="Calibri" charset="0"/>
+                        <a:cs typeface="Calibri" charset="0"/>
+                      </a:endParaRPr>
+                    </a:p>
+                    <a:p>
+                      <a:pPr algn="l" indent="0" marL="0">
+                        <a:buNone/>
+                      </a:pPr>
+                      <a:r>
+                        <a:rPr lang="en-US" sz="1100" b="1" dirty="0">
+                          <a:solidFill>
+                            <a:schemeClr val="accent1"/>
+                          </a:solidFill>
+                          <a:latin typeface="Calibri" pitchFamily="34" charset="0"/>
+                          <a:ea typeface="Calibri" pitchFamily="34" charset="-122"/>
+                          <a:cs typeface="Calibri" pitchFamily="34" charset="-120"/>
+                        </a:rPr>
+                        <a:t>/ Gerencia de Sistemas</a:t>
+                      </a:r>
+                      <a:endParaRPr lang="en-US" sz="1100" dirty="0">
                         <a:latin typeface="Calibri" charset="0"/>
                         <a:ea typeface="Calibri" charset="0"/>
                         <a:cs typeface="Calibri" charset="0"/>
@@ -5125,80 +3843,17 @@
                         <a:buNone/>
                       </a:pPr>
                       <a:r>
-                        <a:rPr lang="en-US" sz="700" b="1" dirty="0">
-                          <a:solidFill>
-                            <a:schemeClr val="tx1"/>
-                          </a:solidFill>
-                          <a:latin typeface="Calibri" pitchFamily="34" charset="0"/>
-                          <a:ea typeface="Calibri" pitchFamily="34" charset="-122"/>
-                          <a:cs typeface="Calibri" pitchFamily="34" charset="-120"/>
-                        </a:rPr>
-                        <a:t>Observación 3: Seguimiento inoportuno de las observaciones por parte de Auditoría Interna.</a:t>
-                      </a:r>
-                      <a:endParaRPr lang="en-US" sz="700" dirty="0">
-                        <a:latin typeface="Calibri" charset="0"/>
-                        <a:ea typeface="Calibri" charset="0"/>
-                        <a:cs typeface="Calibri" charset="0"/>
-                      </a:endParaRPr>
-                    </a:p>
-                    <a:p>
-                      <a:pPr algn="just" indent="0" marL="0">
-                        <a:buNone/>
-                      </a:pPr>
-                      <a:r>
-                        <a:rPr lang="en-US" sz="700" dirty="0">
-                          <a:solidFill>
-                            <a:schemeClr val="tx1"/>
-                          </a:solidFill>
-                          <a:latin typeface="Calibri" pitchFamily="34" charset="0"/>
-                          <a:ea typeface="Calibri" pitchFamily="34" charset="-122"/>
-                          <a:cs typeface="Calibri" pitchFamily="34" charset="-120"/>
-                        </a:rPr>
-                        <a:t>Seguimiento realizado en la presente visita de supervisión:</a:t>
-                      </a:r>
-                      <a:endParaRPr lang="en-US" sz="700" dirty="0">
-                        <a:latin typeface="Calibri" charset="0"/>
-                        <a:ea typeface="Calibri" charset="0"/>
-                        <a:cs typeface="Calibri" charset="0"/>
-                      </a:endParaRPr>
-                    </a:p>
-                    <a:p>
-                      <a:pPr algn="just" indent="0" marL="0">
-                        <a:buNone/>
-                      </a:pPr>
-                      <a:r>
-                        <a:rPr lang="en-US" sz="700" dirty="0">
-                          <a:solidFill>
-                            <a:schemeClr val="tx1"/>
-                          </a:solidFill>
-                          <a:latin typeface="Calibri" pitchFamily="34" charset="0"/>
-                          <a:ea typeface="Calibri" pitchFamily="34" charset="-122"/>
-                          <a:cs typeface="Calibri" pitchFamily="34" charset="-120"/>
-                        </a:rPr>
-                        <a:t>Comentarios COMEDICA de R.L.: En el Plan de Auditoría Interna 2026 se incluyó seguimientos trimestrales como actividad 44 para solventar la observación.</a:t>
-                      </a:r>
-                      <a:endParaRPr lang="en-US" sz="700" dirty="0">
-                        <a:latin typeface="Calibri" charset="0"/>
-                        <a:ea typeface="Calibri" charset="0"/>
-                        <a:cs typeface="Calibri" charset="0"/>
-                      </a:endParaRPr>
-                    </a:p>
-                    <a:p>
-                      <a:pPr algn="just" indent="0" marL="0">
-                        <a:buNone/>
-                      </a:pPr>
-                      <a:r>
-                        <a:rPr lang="en-US" sz="700" dirty="0">
-                          <a:solidFill>
-                            <a:schemeClr val="accent3"/>
-                          </a:solidFill>
-                          <a:latin typeface="Calibri" pitchFamily="34" charset="0"/>
-                          <a:ea typeface="Calibri" pitchFamily="34" charset="-122"/>
-                          <a:cs typeface="Calibri" pitchFamily="34" charset="-120"/>
-                        </a:rPr>
-                        <a:t>Estado: No superada.</a:t>
-                      </a:r>
-                      <a:endParaRPr lang="en-US" sz="700" dirty="0">
+                        <a:rPr lang="en-US" sz="1100" b="1" dirty="0">
+                          <a:solidFill>
+                            <a:schemeClr val="tx1"/>
+                          </a:solidFill>
+                          <a:latin typeface="Calibri" pitchFamily="34" charset="0"/>
+                          <a:ea typeface="Calibri" pitchFamily="34" charset="-122"/>
+                          <a:cs typeface="Calibri" pitchFamily="34" charset="-120"/>
+                        </a:rPr>
+                        <a:t>Deficiencia en la hora del sistema y la herramienta de Monitoreo</a:t>
+                      </a:r>
+                      <a:endParaRPr lang="en-US" sz="1100" dirty="0">
                         <a:latin typeface="Calibri" charset="0"/>
                         <a:ea typeface="Calibri" charset="0"/>
                         <a:cs typeface="Calibri" charset="0"/>
@@ -5225,7 +3880,7 @@
                       <a:tailEnd type="none" w="med" len="med"/>
                     </a:lnB>
                     <a:solidFill>
-                      <a:srgbClr val="FBEAE8"/>
+                      <a:srgbClr val="FFFFFF"/>
                     </a:solidFill>
                   </a:tcPr>
                 </a:tc>
@@ -5238,38 +3893,38 @@
                         <a:buNone/>
                       </a:pPr>
                       <a:r>
-                        <a:rPr lang="en-US" sz="700" dirty="0">
-                          <a:solidFill>
-                            <a:schemeClr val="tx1"/>
-                          </a:solidFill>
-                          <a:latin typeface="Calibri" pitchFamily="34" charset="0"/>
-                          <a:ea typeface="Calibri" pitchFamily="34" charset="-122"/>
-                          <a:cs typeface="Calibri" pitchFamily="34" charset="-120"/>
-                        </a:rPr>
-                        <a:t>Para dar seguimiento a los informes se ha elaborado una matriz con las observaciones de todos los informes, la matriz es actualizada trimestralmente.</a:t>
-                      </a:r>
-                      <a:endParaRPr lang="en-US" sz="700" dirty="0">
-                        <a:latin typeface="Calibri" charset="0"/>
-                        <a:ea typeface="Calibri" charset="0"/>
-                        <a:cs typeface="Calibri" charset="0"/>
-                      </a:endParaRPr>
-                    </a:p>
-                    <a:p>
-                      <a:pPr algn="just" indent="0" marL="0">
-                        <a:buNone/>
-                      </a:pPr>
-                      <a:r>
-                        <a:rPr lang="en-US" sz="700" dirty="0">
-                          <a:solidFill>
-                            <a:schemeClr val="tx1"/>
-                          </a:solidFill>
-                          <a:latin typeface="Calibri" pitchFamily="34" charset="0"/>
-                          <a:ea typeface="Calibri" pitchFamily="34" charset="-122"/>
-                          <a:cs typeface="Calibri" pitchFamily="34" charset="-120"/>
-                        </a:rPr>
-                        <a:t>Se anexa la matriz de seguimiento de informes.</a:t>
-                      </a:r>
-                      <a:endParaRPr lang="en-US" sz="700" dirty="0">
+                        <a:rPr lang="en-US" sz="1100" dirty="0">
+                          <a:solidFill>
+                            <a:schemeClr val="tx1"/>
+                          </a:solidFill>
+                          <a:latin typeface="Calibri" pitchFamily="34" charset="0"/>
+                          <a:ea typeface="Calibri" pitchFamily="34" charset="-122"/>
+                          <a:cs typeface="Calibri" pitchFamily="34" charset="-120"/>
+                        </a:rPr>
+                        <a:t>Descargo correos de gestion</a:t>
+                      </a:r>
+                      <a:endParaRPr lang="en-US" sz="1100" dirty="0">
+                        <a:latin typeface="Calibri" charset="0"/>
+                        <a:ea typeface="Calibri" charset="0"/>
+                        <a:cs typeface="Calibri" charset="0"/>
+                      </a:endParaRPr>
+                    </a:p>
+                    <a:p>
+                      <a:pPr algn="just" indent="0" marL="0">
+                        <a:buNone/>
+                      </a:pPr>
+                      <a:r>
+                        <a:rPr lang="en-US" sz="1100" dirty="0">
+                          <a:solidFill>
+                            <a:schemeClr val="tx1"/>
+                          </a:solidFill>
+                          <a:latin typeface="Calibri" pitchFamily="34" charset="0"/>
+                          <a:ea typeface="Calibri" pitchFamily="34" charset="-122"/>
+                          <a:cs typeface="Calibri" pitchFamily="34" charset="-120"/>
+                        </a:rPr>
+                        <a:t>Comentario CA: 14/10/2026 Compromiso</a:t>
+                      </a:r>
+                      <a:endParaRPr lang="en-US" sz="1100" dirty="0">
                         <a:latin typeface="Calibri" charset="0"/>
                         <a:ea typeface="Calibri" charset="0"/>
                         <a:cs typeface="Calibri" charset="0"/>
@@ -5306,7 +3961,7 @@
                         <a:buNone/>
                       </a:pPr>
                       <a:r>
-                        <a:rPr lang="en-US" sz="700" b="1" dirty="0">
+                        <a:rPr lang="en-US" sz="1100" b="1" dirty="0">
                           <a:solidFill>
                             <a:schemeClr val="accent1"/>
                           </a:solidFill>
@@ -5314,9 +3969,9 @@
                           <a:ea typeface="Calibri" pitchFamily="34" charset="-122"/>
                           <a:cs typeface="Calibri" pitchFamily="34" charset="-120"/>
                         </a:rPr>
-                        <a:t>Auditoría interna</a:t>
-                      </a:r>
-                      <a:endParaRPr lang="en-US" sz="700" dirty="0">
+                        <a:t>Gerencia de Cumplimiento</a:t>
+                      </a:r>
+                      <a:endParaRPr lang="en-US" sz="1100" dirty="0">
                         <a:latin typeface="Calibri" charset="0"/>
                         <a:ea typeface="Calibri" charset="0"/>
                         <a:cs typeface="Calibri" charset="0"/>
@@ -5346,16 +4001,134 @@
                 </a:tc>
               </a:tr>
               <a:tr h="0">
-                <a:tc gridSpan="3">
-                  <a:txBody>
-                    <a:bodyPr/>
-                    <a:lstStyle/>
-                    <a:p>
-                      <a:pPr algn="just" indent="0" marL="0">
-                        <a:buNone/>
-                      </a:pPr>
-                      <a:r>
-                        <a:rPr lang="en-US" sz="700" b="1" dirty="0">
+                <a:tc>
+                  <a:txBody>
+                    <a:bodyPr/>
+                    <a:lstStyle/>
+                    <a:p>
+                      <a:pPr algn="just" indent="0" marL="0">
+                        <a:buNone/>
+                      </a:pPr>
+                      <a:r>
+                        <a:rPr lang="en-US" sz="1100" b="1" dirty="0">
+                          <a:solidFill>
+                            <a:schemeClr val="tx1"/>
+                          </a:solidFill>
+                          <a:latin typeface="Calibri" pitchFamily="34" charset="0"/>
+                          <a:ea typeface="Calibri" pitchFamily="34" charset="-122"/>
+                          <a:cs typeface="Calibri" pitchFamily="34" charset="-120"/>
+                        </a:rPr>
+                        <a:t>Verificación de las condiciones en ACRM</a:t>
+                      </a:r>
+                      <a:endParaRPr lang="en-US" sz="1100" dirty="0">
+                        <a:latin typeface="Calibri" charset="0"/>
+                        <a:ea typeface="Calibri" charset="0"/>
+                        <a:cs typeface="Calibri" charset="0"/>
+                      </a:endParaRPr>
+                    </a:p>
+                  </a:txBody>
+                  <a:tcPr marL="54864" marR="54864" marT="18288" marB="18288" anchor="ctr">
+                    <a:lnL w="0" cap="flat" cmpd="sng" algn="ctr">
+                      <a:noFill/>
+                    </a:lnL>
+                    <a:lnR w="0" cap="flat" cmpd="sng" algn="ctr">
+                      <a:noFill/>
+                    </a:lnR>
+                    <a:lnT w="0" cap="flat" cmpd="sng" algn="ctr">
+                      <a:noFill/>
+                    </a:lnT>
+                    <a:lnB w="9525" cap="flat" cmpd="sng" algn="ctr">
+                      <a:solidFill>
+                        <a:srgbClr val="D9E0EA"/>
+                      </a:solidFill>
+                      <a:prstDash val="solid"/>
+                      <a:round/>
+                      <a:headEnd type="none" w="med" len="med"/>
+                      <a:tailEnd type="none" w="med" len="med"/>
+                    </a:lnB>
+                    <a:solidFill>
+                      <a:srgbClr val="FFFFFF"/>
+                    </a:solidFill>
+                  </a:tcPr>
+                </a:tc>
+                <a:tc>
+                  <a:txBody>
+                    <a:bodyPr/>
+                    <a:lstStyle/>
+                    <a:p>
+                      <a:pPr algn="just" indent="0" marL="0">
+                        <a:buNone/>
+                      </a:pPr>
+                      <a:r>
+                        <a:rPr lang="en-US" sz="1100" dirty="0">
+                          <a:solidFill>
+                            <a:schemeClr val="tx1"/>
+                          </a:solidFill>
+                          <a:latin typeface="Calibri" pitchFamily="34" charset="0"/>
+                          <a:ea typeface="Calibri" pitchFamily="34" charset="-122"/>
+                          <a:cs typeface="Calibri" pitchFamily="34" charset="-120"/>
+                        </a:rPr>
+                        <a:t>Descargo</a:t>
+                      </a:r>
+                      <a:endParaRPr lang="en-US" sz="1100" dirty="0">
+                        <a:latin typeface="Calibri" charset="0"/>
+                        <a:ea typeface="Calibri" charset="0"/>
+                        <a:cs typeface="Calibri" charset="0"/>
+                      </a:endParaRPr>
+                    </a:p>
+                    <a:p>
+                      <a:pPr algn="just" indent="0" marL="0">
+                        <a:buNone/>
+                      </a:pPr>
+                      <a:r>
+                        <a:rPr lang="en-US" sz="1100" dirty="0">
+                          <a:solidFill>
+                            <a:schemeClr val="tx1"/>
+                          </a:solidFill>
+                          <a:latin typeface="Calibri" pitchFamily="34" charset="0"/>
+                          <a:ea typeface="Calibri" pitchFamily="34" charset="-122"/>
+                          <a:cs typeface="Calibri" pitchFamily="34" charset="-120"/>
+                        </a:rPr>
+                        <a:t>Comentario CA: 14/10/2026 Compromiso</a:t>
+                      </a:r>
+                      <a:endParaRPr lang="en-US" sz="1100" dirty="0">
+                        <a:latin typeface="Calibri" charset="0"/>
+                        <a:ea typeface="Calibri" charset="0"/>
+                        <a:cs typeface="Calibri" charset="0"/>
+                      </a:endParaRPr>
+                    </a:p>
+                  </a:txBody>
+                  <a:tcPr marL="54864" marR="54864" marT="18288" marB="18288" anchor="ctr">
+                    <a:lnL w="0" cap="flat" cmpd="sng" algn="ctr">
+                      <a:noFill/>
+                    </a:lnL>
+                    <a:lnR w="0" cap="flat" cmpd="sng" algn="ctr">
+                      <a:noFill/>
+                    </a:lnR>
+                    <a:lnT w="0" cap="flat" cmpd="sng" algn="ctr">
+                      <a:noFill/>
+                    </a:lnT>
+                    <a:lnB w="9525" cap="flat" cmpd="sng" algn="ctr">
+                      <a:solidFill>
+                        <a:srgbClr val="D9E0EA"/>
+                      </a:solidFill>
+                      <a:prstDash val="solid"/>
+                      <a:round/>
+                      <a:headEnd type="none" w="med" len="med"/>
+                      <a:tailEnd type="none" w="med" len="med"/>
+                    </a:lnB>
+                  </a:tcPr>
+                </a:tc>
+                <a:tc>
+                  <a:txBody>
+                    <a:bodyPr/>
+                    <a:lstStyle/>
+                    <a:p>
+                      <a:pPr algn="l" indent="0" marL="0">
+                        <a:buNone/>
+                      </a:pPr>
+                      <a:r>
+                        <a:rPr lang="en-US" sz="1100" b="1" dirty="0">
                           <a:solidFill>
                             <a:schemeClr val="accent1"/>
                           </a:solidFill>
@@ -5363,44 +4136,35 @@
                           <a:ea typeface="Calibri" pitchFamily="34" charset="-122"/>
                           <a:cs typeface="Calibri" pitchFamily="34" charset="-120"/>
                         </a:rPr>
-                        <a:t>C.1.2. Gestión de Riesgo Operacional y Tecnológico</a:t>
-                      </a:r>
-                      <a:endParaRPr lang="en-US" sz="700" dirty="0">
-                        <a:latin typeface="Calibri" charset="0"/>
-                        <a:ea typeface="Calibri" charset="0"/>
-                        <a:cs typeface="Calibri" charset="0"/>
-                      </a:endParaRPr>
-                    </a:p>
-                  </a:txBody>
-                  <a:tcPr marL="54864" marR="54864" marT="18288" marB="18288" anchor="ctr">
-                    <a:lnL w="0" cap="flat" cmpd="sng" algn="ctr">
-                      <a:noFill/>
-                    </a:lnL>
-                    <a:lnR w="0" cap="flat" cmpd="sng" algn="ctr">
-                      <a:noFill/>
-                    </a:lnR>
-                    <a:lnT w="0" cap="flat" cmpd="sng" algn="ctr">
-                      <a:noFill/>
-                    </a:lnT>
-                    <a:lnB w="9525" cap="flat" cmpd="sng" algn="ctr">
-                      <a:solidFill>
-                        <a:srgbClr val="D9E0EA"/>
-                      </a:solidFill>
-                      <a:prstDash val="solid"/>
-                      <a:round/>
-                      <a:headEnd type="none" w="med" len="med"/>
-                      <a:tailEnd type="none" w="med" len="med"/>
-                    </a:lnB>
-                    <a:solidFill>
-                      <a:schemeClr val="bg2"/>
-                    </a:solidFill>
-                  </a:tcPr>
-                </a:tc>
-                <a:tc hMerge="1">
-                  <a:tcPr/>
-                </a:tc>
-                <a:tc hMerge="1">
-                  <a:tcPr/>
+                        <a:t>Gerencia de Cumplimiento</a:t>
+                      </a:r>
+                      <a:endParaRPr lang="en-US" sz="1100" dirty="0">
+                        <a:latin typeface="Calibri" charset="0"/>
+                        <a:ea typeface="Calibri" charset="0"/>
+                        <a:cs typeface="Calibri" charset="0"/>
+                      </a:endParaRPr>
+                    </a:p>
+                  </a:txBody>
+                  <a:tcPr marL="54864" marR="54864" marT="18288" marB="18288" anchor="ctr">
+                    <a:lnL w="0" cap="flat" cmpd="sng" algn="ctr">
+                      <a:noFill/>
+                    </a:lnL>
+                    <a:lnR w="0" cap="flat" cmpd="sng" algn="ctr">
+                      <a:noFill/>
+                    </a:lnR>
+                    <a:lnT w="0" cap="flat" cmpd="sng" algn="ctr">
+                      <a:noFill/>
+                    </a:lnT>
+                    <a:lnB w="9525" cap="flat" cmpd="sng" algn="ctr">
+                      <a:solidFill>
+                        <a:srgbClr val="D9E0EA"/>
+                      </a:solidFill>
+                      <a:prstDash val="solid"/>
+                      <a:round/>
+                      <a:headEnd type="none" w="med" len="med"/>
+                      <a:tailEnd type="none" w="med" len="med"/>
+                    </a:lnB>
+                  </a:tcPr>
                 </a:tc>
               </a:tr>
               <a:tr h="0">
@@ -5413,38 +4177,17 @@
                         <a:buNone/>
                       </a:pPr>
                       <a:r>
-                        <a:rPr lang="en-US" sz="700" b="1" dirty="0">
-                          <a:solidFill>
-                            <a:schemeClr val="tx1"/>
-                          </a:solidFill>
-                          <a:latin typeface="Calibri" pitchFamily="34" charset="0"/>
-                          <a:ea typeface="Calibri" pitchFamily="34" charset="-122"/>
-                          <a:cs typeface="Calibri" pitchFamily="34" charset="-120"/>
-                        </a:rPr>
-                        <a:t>Observación 2: Seguimiento a informes de observaciones del Comité de Auditoría y de Auditoría Interna durante el período 2023.</a:t>
-                      </a:r>
-                      <a:endParaRPr lang="en-US" sz="700" dirty="0">
-                        <a:latin typeface="Calibri" charset="0"/>
-                        <a:ea typeface="Calibri" charset="0"/>
-                        <a:cs typeface="Calibri" charset="0"/>
-                      </a:endParaRPr>
-                    </a:p>
-                    <a:p>
-                      <a:pPr algn="just" indent="0" marL="0">
-                        <a:buNone/>
-                      </a:pPr>
-                      <a:r>
-                        <a:rPr lang="en-US" sz="700" dirty="0">
-                          <a:solidFill>
-                            <a:schemeClr val="accent6"/>
-                          </a:solidFill>
-                          <a:latin typeface="Calibri" pitchFamily="34" charset="0"/>
-                          <a:ea typeface="Calibri" pitchFamily="34" charset="-122"/>
-                          <a:cs typeface="Calibri" pitchFamily="34" charset="-120"/>
-                        </a:rPr>
-                        <a:t>Estado de la observación : Parciamente superada</a:t>
-                      </a:r>
-                      <a:endParaRPr lang="en-US" sz="700" dirty="0">
+                        <a:rPr lang="en-US" sz="1100" b="1" dirty="0">
+                          <a:solidFill>
+                            <a:schemeClr val="tx1"/>
+                          </a:solidFill>
+                          <a:latin typeface="Calibri" pitchFamily="34" charset="0"/>
+                          <a:ea typeface="Calibri" pitchFamily="34" charset="-122"/>
+                          <a:cs typeface="Calibri" pitchFamily="34" charset="-120"/>
+                        </a:rPr>
+                        <a:t>Limitante de Accesos a los Datos de COMEDICA, alojada en la Herramienta de Monitoreo.</a:t>
+                      </a:r>
+                      <a:endParaRPr lang="en-US" sz="1100" dirty="0">
                         <a:latin typeface="Calibri" charset="0"/>
                         <a:ea typeface="Calibri" charset="0"/>
                         <a:cs typeface="Calibri" charset="0"/>
@@ -5471,7 +4214,7 @@
                       <a:tailEnd type="none" w="med" len="med"/>
                     </a:lnB>
                     <a:solidFill>
-                      <a:srgbClr val="FDF4E3"/>
+                      <a:srgbClr val="FFFFFF"/>
                     </a:solidFill>
                   </a:tcPr>
                 </a:tc>
@@ -5484,38 +4227,38 @@
                         <a:buNone/>
                       </a:pPr>
                       <a:r>
-                        <a:rPr lang="en-US" sz="700" dirty="0">
-                          <a:solidFill>
-                            <a:schemeClr val="tx1"/>
-                          </a:solidFill>
-                          <a:latin typeface="Calibri" pitchFamily="34" charset="0"/>
-                          <a:ea typeface="Calibri" pitchFamily="34" charset="-122"/>
-                          <a:cs typeface="Calibri" pitchFamily="34" charset="-120"/>
-                        </a:rPr>
-                        <a:t>Se realizará nuevamente el seguimiento de las observaciones pendientes de solventar en las Actas: 173 y 175;</a:t>
-                      </a:r>
-                      <a:endParaRPr lang="en-US" sz="700" dirty="0">
-                        <a:latin typeface="Calibri" charset="0"/>
-                        <a:ea typeface="Calibri" charset="0"/>
-                        <a:cs typeface="Calibri" charset="0"/>
-                      </a:endParaRPr>
-                    </a:p>
-                    <a:p>
-                      <a:pPr algn="just" indent="0" marL="0">
-                        <a:buNone/>
-                      </a:pPr>
-                      <a:r>
-                        <a:rPr lang="en-US" sz="700" dirty="0">
-                          <a:solidFill>
-                            <a:schemeClr val="tx1"/>
-                          </a:solidFill>
-                          <a:latin typeface="Calibri" pitchFamily="34" charset="0"/>
-                          <a:ea typeface="Calibri" pitchFamily="34" charset="-122"/>
-                          <a:cs typeface="Calibri" pitchFamily="34" charset="-120"/>
-                        </a:rPr>
-                        <a:t>Plazo: 30/11/2026</a:t>
-                      </a:r>
-                      <a:endParaRPr lang="en-US" sz="700" dirty="0">
+                        <a:rPr lang="en-US" sz="1100" dirty="0">
+                          <a:solidFill>
+                            <a:schemeClr val="tx1"/>
+                          </a:solidFill>
+                          <a:latin typeface="Calibri" pitchFamily="34" charset="0"/>
+                          <a:ea typeface="Calibri" pitchFamily="34" charset="-122"/>
+                          <a:cs typeface="Calibri" pitchFamily="34" charset="-120"/>
+                        </a:rPr>
+                        <a:t>Descargo</a:t>
+                      </a:r>
+                      <a:endParaRPr lang="en-US" sz="1100" dirty="0">
+                        <a:latin typeface="Calibri" charset="0"/>
+                        <a:ea typeface="Calibri" charset="0"/>
+                        <a:cs typeface="Calibri" charset="0"/>
+                      </a:endParaRPr>
+                    </a:p>
+                    <a:p>
+                      <a:pPr algn="just" indent="0" marL="0">
+                        <a:buNone/>
+                      </a:pPr>
+                      <a:r>
+                        <a:rPr lang="en-US" sz="1100" dirty="0">
+                          <a:solidFill>
+                            <a:schemeClr val="tx1"/>
+                          </a:solidFill>
+                          <a:latin typeface="Calibri" pitchFamily="34" charset="0"/>
+                          <a:ea typeface="Calibri" pitchFamily="34" charset="-122"/>
+                          <a:cs typeface="Calibri" pitchFamily="34" charset="-120"/>
+                        </a:rPr>
+                        <a:t>Comentario CA: 14/10/2026 Compromiso</a:t>
+                      </a:r>
+                      <a:endParaRPr lang="en-US" sz="1100" dirty="0">
                         <a:latin typeface="Calibri" charset="0"/>
                         <a:ea typeface="Calibri" charset="0"/>
                         <a:cs typeface="Calibri" charset="0"/>
@@ -5552,7 +4295,7 @@
                         <a:buNone/>
                       </a:pPr>
                       <a:r>
-                        <a:rPr lang="en-US" sz="700" b="1" dirty="0">
+                        <a:rPr lang="en-US" sz="1100" b="1" dirty="0">
                           <a:solidFill>
                             <a:schemeClr val="accent1"/>
                           </a:solidFill>
@@ -5560,9 +4303,30 @@
                           <a:ea typeface="Calibri" pitchFamily="34" charset="-122"/>
                           <a:cs typeface="Calibri" pitchFamily="34" charset="-120"/>
                         </a:rPr>
-                        <a:t>Auditoría interna</a:t>
-                      </a:r>
-                      <a:endParaRPr lang="en-US" sz="700" dirty="0">
+                        <a:t>Gerencia de Cumplimiento</a:t>
+                      </a:r>
+                      <a:endParaRPr lang="en-US" sz="1100" dirty="0">
+                        <a:latin typeface="Calibri" charset="0"/>
+                        <a:ea typeface="Calibri" charset="0"/>
+                        <a:cs typeface="Calibri" charset="0"/>
+                      </a:endParaRPr>
+                    </a:p>
+                    <a:p>
+                      <a:pPr algn="l" indent="0" marL="0">
+                        <a:buNone/>
+                      </a:pPr>
+                      <a:r>
+                        <a:rPr lang="en-US" sz="1100" b="1" dirty="0">
+                          <a:solidFill>
+                            <a:schemeClr val="accent1"/>
+                          </a:solidFill>
+                          <a:latin typeface="Calibri" pitchFamily="34" charset="0"/>
+                          <a:ea typeface="Calibri" pitchFamily="34" charset="-122"/>
+                          <a:cs typeface="Calibri" pitchFamily="34" charset="-120"/>
+                        </a:rPr>
+                        <a:t>/ Seguridad de la información</a:t>
+                      </a:r>
+                      <a:endParaRPr lang="en-US" sz="1100" dirty="0">
                         <a:latin typeface="Calibri" charset="0"/>
                         <a:ea typeface="Calibri" charset="0"/>
                         <a:cs typeface="Calibri" charset="0"/>
@@ -5592,16 +4356,113 @@
                 </a:tc>
               </a:tr>
               <a:tr h="0">
-                <a:tc gridSpan="3">
-                  <a:txBody>
-                    <a:bodyPr/>
-                    <a:lstStyle/>
-                    <a:p>
-                      <a:pPr algn="just" indent="0" marL="0">
-                        <a:buNone/>
-                      </a:pPr>
-                      <a:r>
-                        <a:rPr lang="en-US" sz="700" b="1" dirty="0">
+                <a:tc>
+                  <a:txBody>
+                    <a:bodyPr/>
+                    <a:lstStyle/>
+                    <a:p>
+                      <a:pPr algn="just" indent="0" marL="0">
+                        <a:buNone/>
+                      </a:pPr>
+                      <a:r>
+                        <a:rPr lang="en-US" sz="1100" b="1" dirty="0">
+                          <a:solidFill>
+                            <a:schemeClr val="tx1"/>
+                          </a:solidFill>
+                          <a:latin typeface="Calibri" pitchFamily="34" charset="0"/>
+                          <a:ea typeface="Calibri" pitchFamily="34" charset="-122"/>
+                          <a:cs typeface="Calibri" pitchFamily="34" charset="-120"/>
+                        </a:rPr>
+                        <a:t>Limitante para identificar la base de datos de CRM</a:t>
+                      </a:r>
+                      <a:endParaRPr lang="en-US" sz="1100" dirty="0">
+                        <a:latin typeface="Calibri" charset="0"/>
+                        <a:ea typeface="Calibri" charset="0"/>
+                        <a:cs typeface="Calibri" charset="0"/>
+                      </a:endParaRPr>
+                    </a:p>
+                  </a:txBody>
+                  <a:tcPr marL="54864" marR="54864" marT="18288" marB="18288" anchor="ctr">
+                    <a:lnL w="0" cap="flat" cmpd="sng" algn="ctr">
+                      <a:noFill/>
+                    </a:lnL>
+                    <a:lnR w="0" cap="flat" cmpd="sng" algn="ctr">
+                      <a:noFill/>
+                    </a:lnR>
+                    <a:lnT w="0" cap="flat" cmpd="sng" algn="ctr">
+                      <a:noFill/>
+                    </a:lnT>
+                    <a:lnB w="9525" cap="flat" cmpd="sng" algn="ctr">
+                      <a:solidFill>
+                        <a:srgbClr val="D9E0EA"/>
+                      </a:solidFill>
+                      <a:prstDash val="solid"/>
+                      <a:round/>
+                      <a:headEnd type="none" w="med" len="med"/>
+                      <a:tailEnd type="none" w="med" len="med"/>
+                    </a:lnB>
+                    <a:solidFill>
+                      <a:srgbClr val="FFFFFF"/>
+                    </a:solidFill>
+                  </a:tcPr>
+                </a:tc>
+                <a:tc>
+                  <a:txBody>
+                    <a:bodyPr/>
+                    <a:lstStyle/>
+                    <a:p>
+                      <a:pPr algn="just" indent="0" marL="0">
+                        <a:buNone/>
+                      </a:pPr>
+                      <a:r>
+                        <a:rPr lang="en-US" sz="1100" dirty="0">
+                          <a:solidFill>
+                            <a:schemeClr val="tx1"/>
+                          </a:solidFill>
+                          <a:latin typeface="Calibri" pitchFamily="34" charset="0"/>
+                          <a:ea typeface="Calibri" pitchFamily="34" charset="-122"/>
+                          <a:cs typeface="Calibri" pitchFamily="34" charset="-120"/>
+                        </a:rPr>
+                        <a:t>Comentario CA: 14/10/2026 Compromiso</a:t>
+                      </a:r>
+                      <a:endParaRPr lang="en-US" sz="1100" dirty="0">
+                        <a:latin typeface="Calibri" charset="0"/>
+                        <a:ea typeface="Calibri" charset="0"/>
+                        <a:cs typeface="Calibri" charset="0"/>
+                      </a:endParaRPr>
+                    </a:p>
+                  </a:txBody>
+                  <a:tcPr marL="54864" marR="54864" marT="18288" marB="18288" anchor="ctr">
+                    <a:lnL w="0" cap="flat" cmpd="sng" algn="ctr">
+                      <a:noFill/>
+                    </a:lnL>
+                    <a:lnR w="0" cap="flat" cmpd="sng" algn="ctr">
+                      <a:noFill/>
+                    </a:lnR>
+                    <a:lnT w="0" cap="flat" cmpd="sng" algn="ctr">
+                      <a:noFill/>
+                    </a:lnT>
+                    <a:lnB w="9525" cap="flat" cmpd="sng" algn="ctr">
+                      <a:solidFill>
+                        <a:srgbClr val="D9E0EA"/>
+                      </a:solidFill>
+                      <a:prstDash val="solid"/>
+                      <a:round/>
+                      <a:headEnd type="none" w="med" len="med"/>
+                      <a:tailEnd type="none" w="med" len="med"/>
+                    </a:lnB>
+                  </a:tcPr>
+                </a:tc>
+                <a:tc>
+                  <a:txBody>
+                    <a:bodyPr/>
+                    <a:lstStyle/>
+                    <a:p>
+                      <a:pPr algn="l" indent="0" marL="0">
+                        <a:buNone/>
+                      </a:pPr>
+                      <a:r>
+                        <a:rPr lang="en-US" sz="1100" b="1" dirty="0">
                           <a:solidFill>
                             <a:schemeClr val="accent1"/>
                           </a:solidFill>
@@ -5609,44 +4470,56 @@
                           <a:ea typeface="Calibri" pitchFamily="34" charset="-122"/>
                           <a:cs typeface="Calibri" pitchFamily="34" charset="-120"/>
                         </a:rPr>
-                        <a:t>Verificacion de las Normas Técnicas para la Gestión de los Riesgos de Lavado de Dinero y de Activos, Financiacion del Terrorismo y la Financiacion de la Proliferacion de Armas de Destruccion Masiva (NRP-36), con referencia al 31 de mayo de 2025, comunicadas mediante nota No. DS-SABAO-BCS-BC-18445 del 30 de octubre de 2025.</a:t>
-                      </a:r>
-                      <a:endParaRPr lang="en-US" sz="700" dirty="0">
-                        <a:latin typeface="Calibri" charset="0"/>
-                        <a:ea typeface="Calibri" charset="0"/>
-                        <a:cs typeface="Calibri" charset="0"/>
-                      </a:endParaRPr>
-                    </a:p>
-                  </a:txBody>
-                  <a:tcPr marL="54864" marR="54864" marT="18288" marB="18288" anchor="ctr">
-                    <a:lnL w="0" cap="flat" cmpd="sng" algn="ctr">
-                      <a:noFill/>
-                    </a:lnL>
-                    <a:lnR w="0" cap="flat" cmpd="sng" algn="ctr">
-                      <a:noFill/>
-                    </a:lnR>
-                    <a:lnT w="0" cap="flat" cmpd="sng" algn="ctr">
-                      <a:noFill/>
-                    </a:lnT>
-                    <a:lnB w="9525" cap="flat" cmpd="sng" algn="ctr">
-                      <a:solidFill>
-                        <a:srgbClr val="D9E0EA"/>
-                      </a:solidFill>
-                      <a:prstDash val="solid"/>
-                      <a:round/>
-                      <a:headEnd type="none" w="med" len="med"/>
-                      <a:tailEnd type="none" w="med" len="med"/>
-                    </a:lnB>
-                    <a:solidFill>
-                      <a:schemeClr val="bg2"/>
-                    </a:solidFill>
-                  </a:tcPr>
-                </a:tc>
-                <a:tc hMerge="1">
-                  <a:tcPr/>
-                </a:tc>
-                <a:tc hMerge="1">
-                  <a:tcPr/>
+                        <a:t>Gerencia de Cumplimiento</a:t>
+                      </a:r>
+                      <a:endParaRPr lang="en-US" sz="1100" dirty="0">
+                        <a:latin typeface="Calibri" charset="0"/>
+                        <a:ea typeface="Calibri" charset="0"/>
+                        <a:cs typeface="Calibri" charset="0"/>
+                      </a:endParaRPr>
+                    </a:p>
+                    <a:p>
+                      <a:pPr algn="l" indent="0" marL="0">
+                        <a:buNone/>
+                      </a:pPr>
+                      <a:r>
+                        <a:rPr lang="en-US" sz="1100" b="1" dirty="0">
+                          <a:solidFill>
+                            <a:schemeClr val="accent1"/>
+                          </a:solidFill>
+                          <a:latin typeface="Calibri" pitchFamily="34" charset="0"/>
+                          <a:ea typeface="Calibri" pitchFamily="34" charset="-122"/>
+                          <a:cs typeface="Calibri" pitchFamily="34" charset="-120"/>
+                        </a:rPr>
+                        <a:t>/ Seguridad de la información</a:t>
+                      </a:r>
+                      <a:endParaRPr lang="en-US" sz="1100" dirty="0">
+                        <a:latin typeface="Calibri" charset="0"/>
+                        <a:ea typeface="Calibri" charset="0"/>
+                        <a:cs typeface="Calibri" charset="0"/>
+                      </a:endParaRPr>
+                    </a:p>
+                  </a:txBody>
+                  <a:tcPr marL="54864" marR="54864" marT="18288" marB="18288" anchor="ctr">
+                    <a:lnL w="0" cap="flat" cmpd="sng" algn="ctr">
+                      <a:noFill/>
+                    </a:lnL>
+                    <a:lnR w="0" cap="flat" cmpd="sng" algn="ctr">
+                      <a:noFill/>
+                    </a:lnR>
+                    <a:lnT w="0" cap="flat" cmpd="sng" algn="ctr">
+                      <a:noFill/>
+                    </a:lnT>
+                    <a:lnB w="9525" cap="flat" cmpd="sng" algn="ctr">
+                      <a:solidFill>
+                        <a:srgbClr val="D9E0EA"/>
+                      </a:solidFill>
+                      <a:prstDash val="solid"/>
+                      <a:round/>
+                      <a:headEnd type="none" w="med" len="med"/>
+                      <a:tailEnd type="none" w="med" len="med"/>
+                    </a:lnB>
+                  </a:tcPr>
                 </a:tc>
               </a:tr>
               <a:tr h="0">
@@ -5659,59 +4532,17 @@
                         <a:buNone/>
                       </a:pPr>
                       <a:r>
-                        <a:rPr lang="en-US" sz="700" b="1" dirty="0">
-                          <a:solidFill>
-                            <a:schemeClr val="tx1"/>
-                          </a:solidFill>
-                          <a:latin typeface="Calibri" pitchFamily="34" charset="0"/>
-                          <a:ea typeface="Calibri" pitchFamily="34" charset="-122"/>
-                          <a:cs typeface="Calibri" pitchFamily="34" charset="-120"/>
-                        </a:rPr>
-                        <a:t>Observación 1. Falta de aplicación del factor de riesgo empleados.</a:t>
-                      </a:r>
-                      <a:endParaRPr lang="en-US" sz="700" dirty="0">
-                        <a:latin typeface="Calibri" charset="0"/>
-                        <a:ea typeface="Calibri" charset="0"/>
-                        <a:cs typeface="Calibri" charset="0"/>
-                      </a:endParaRPr>
-                    </a:p>
-                    <a:p>
-                      <a:pPr algn="just" indent="0" marL="0">
-                        <a:buNone/>
-                      </a:pPr>
-                      <a:r>
-                        <a:rPr lang="en-US" sz="700" dirty="0">
-                          <a:solidFill>
-                            <a:schemeClr val="tx1"/>
-                          </a:solidFill>
-                          <a:latin typeface="Calibri" pitchFamily="34" charset="0"/>
-                          <a:ea typeface="Calibri" pitchFamily="34" charset="-122"/>
-                          <a:cs typeface="Calibri" pitchFamily="34" charset="-120"/>
-                        </a:rPr>
-                        <a:t>Seguimiento realizado en la presente visita de supervisión:</a:t>
-                      </a:r>
-                      <a:endParaRPr lang="en-US" sz="700" dirty="0">
-                        <a:latin typeface="Calibri" charset="0"/>
-                        <a:ea typeface="Calibri" charset="0"/>
-                        <a:cs typeface="Calibri" charset="0"/>
-                      </a:endParaRPr>
-                    </a:p>
-                    <a:p>
-                      <a:pPr algn="just" indent="0" marL="0">
-                        <a:buNone/>
-                      </a:pPr>
-                      <a:r>
-                        <a:rPr lang="en-US" sz="700" dirty="0">
-                          <a:solidFill>
-                            <a:schemeClr val="accent3"/>
-                          </a:solidFill>
-                          <a:latin typeface="Calibri" pitchFamily="34" charset="0"/>
-                          <a:ea typeface="Calibri" pitchFamily="34" charset="-122"/>
-                          <a:cs typeface="Calibri" pitchFamily="34" charset="-120"/>
-                        </a:rPr>
-                        <a:t>Estado: No superada</a:t>
-                      </a:r>
-                      <a:endParaRPr lang="en-US" sz="700" dirty="0">
+                        <a:rPr lang="en-US" sz="1100" b="1" dirty="0">
+                          <a:solidFill>
+                            <a:schemeClr val="tx1"/>
+                          </a:solidFill>
+                          <a:latin typeface="Calibri" pitchFamily="34" charset="0"/>
+                          <a:ea typeface="Calibri" pitchFamily="34" charset="-122"/>
+                          <a:cs typeface="Calibri" pitchFamily="34" charset="-120"/>
+                        </a:rPr>
+                        <a:t>Falta de documentación que dé cumplimiento a lo requerido por el artículo 22 de la NRP-23 correspondiente a la adquisición del sistema CRM.</a:t>
+                      </a:r>
+                      <a:endParaRPr lang="en-US" sz="1100" dirty="0">
                         <a:latin typeface="Calibri" charset="0"/>
                         <a:ea typeface="Calibri" charset="0"/>
                         <a:cs typeface="Calibri" charset="0"/>
@@ -5738,7 +4569,7 @@
                       <a:tailEnd type="none" w="med" len="med"/>
                     </a:lnB>
                     <a:solidFill>
-                      <a:srgbClr val="FBEAE8"/>
+                      <a:srgbClr val="FFFFFF"/>
                     </a:solidFill>
                   </a:tcPr>
                 </a:tc>
@@ -5751,17 +4582,38 @@
                         <a:buNone/>
                       </a:pPr>
                       <a:r>
-                        <a:rPr lang="en-US" sz="700" dirty="0">
-                          <a:solidFill>
-                            <a:schemeClr val="tx1"/>
-                          </a:solidFill>
-                          <a:latin typeface="Calibri" pitchFamily="34" charset="0"/>
-                          <a:ea typeface="Calibri" pitchFamily="34" charset="-122"/>
-                          <a:cs typeface="Calibri" pitchFamily="34" charset="-120"/>
-                        </a:rPr>
-                        <a:t>Sin comentarios ni documentación</a:t>
-                      </a:r>
-                      <a:endParaRPr lang="en-US" sz="700" dirty="0">
+                        <a:rPr lang="en-US" sz="1100" dirty="0">
+                          <a:solidFill>
+                            <a:schemeClr val="tx1"/>
+                          </a:solidFill>
+                          <a:latin typeface="Calibri" pitchFamily="34" charset="0"/>
+                          <a:ea typeface="Calibri" pitchFamily="34" charset="-122"/>
+                          <a:cs typeface="Calibri" pitchFamily="34" charset="-120"/>
+                        </a:rPr>
+                        <a:t>Descargo</a:t>
+                      </a:r>
+                      <a:endParaRPr lang="en-US" sz="1100" dirty="0">
+                        <a:latin typeface="Calibri" charset="0"/>
+                        <a:ea typeface="Calibri" charset="0"/>
+                        <a:cs typeface="Calibri" charset="0"/>
+                      </a:endParaRPr>
+                    </a:p>
+                    <a:p>
+                      <a:pPr algn="just" indent="0" marL="0">
+                        <a:buNone/>
+                      </a:pPr>
+                      <a:r>
+                        <a:rPr lang="en-US" sz="1100" dirty="0">
+                          <a:solidFill>
+                            <a:schemeClr val="tx1"/>
+                          </a:solidFill>
+                          <a:latin typeface="Calibri" pitchFamily="34" charset="0"/>
+                          <a:ea typeface="Calibri" pitchFamily="34" charset="-122"/>
+                          <a:cs typeface="Calibri" pitchFamily="34" charset="-120"/>
+                        </a:rPr>
+                        <a:t>Comentario CA: 14/10/2026 Compromiso</a:t>
+                      </a:r>
+                      <a:endParaRPr lang="en-US" sz="1100" dirty="0">
                         <a:latin typeface="Calibri" charset="0"/>
                         <a:ea typeface="Calibri" charset="0"/>
                         <a:cs typeface="Calibri" charset="0"/>
@@ -5798,7 +4650,7 @@
                         <a:buNone/>
                       </a:pPr>
                       <a:r>
-                        <a:rPr lang="en-US" sz="700" b="1" dirty="0">
+                        <a:rPr lang="en-US" sz="1100" b="1" dirty="0">
                           <a:solidFill>
                             <a:schemeClr val="accent1"/>
                           </a:solidFill>
@@ -5806,9 +4658,30 @@
                           <a:ea typeface="Calibri" pitchFamily="34" charset="-122"/>
                           <a:cs typeface="Calibri" pitchFamily="34" charset="-120"/>
                         </a:rPr>
-                        <a:t>Gerencia de Oficialía de Cumplimiento</a:t>
-                      </a:r>
-                      <a:endParaRPr lang="en-US" sz="700" dirty="0">
+                        <a:t>Gerencia de Cumplimiento</a:t>
+                      </a:r>
+                      <a:endParaRPr lang="en-US" sz="1100" dirty="0">
+                        <a:latin typeface="Calibri" charset="0"/>
+                        <a:ea typeface="Calibri" charset="0"/>
+                        <a:cs typeface="Calibri" charset="0"/>
+                      </a:endParaRPr>
+                    </a:p>
+                    <a:p>
+                      <a:pPr algn="l" indent="0" marL="0">
+                        <a:buNone/>
+                      </a:pPr>
+                      <a:r>
+                        <a:rPr lang="en-US" sz="1100" b="1" dirty="0">
+                          <a:solidFill>
+                            <a:schemeClr val="accent1"/>
+                          </a:solidFill>
+                          <a:latin typeface="Calibri" pitchFamily="34" charset="0"/>
+                          <a:ea typeface="Calibri" pitchFamily="34" charset="-122"/>
+                          <a:cs typeface="Calibri" pitchFamily="34" charset="-120"/>
+                        </a:rPr>
+                        <a:t>/Seguridad de la Información</a:t>
+                      </a:r>
+                      <a:endParaRPr lang="en-US" sz="1100" dirty="0">
                         <a:latin typeface="Calibri" charset="0"/>
                         <a:ea typeface="Calibri" charset="0"/>
                         <a:cs typeface="Calibri" charset="0"/>
@@ -5847,59 +4720,17 @@
                         <a:buNone/>
                       </a:pPr>
                       <a:r>
-                        <a:rPr lang="en-US" sz="700" b="1" dirty="0">
-                          <a:solidFill>
-                            <a:schemeClr val="tx1"/>
-                          </a:solidFill>
-                          <a:latin typeface="Calibri" pitchFamily="34" charset="0"/>
-                          <a:ea typeface="Calibri" pitchFamily="34" charset="-122"/>
-                          <a:cs typeface="Calibri" pitchFamily="34" charset="-120"/>
-                        </a:rPr>
-                        <a:t>Observación 4. Seguimiento de observaciones de Auditoría Interna de años anteriores no subsanadas.</a:t>
-                      </a:r>
-                      <a:endParaRPr lang="en-US" sz="700" dirty="0">
-                        <a:latin typeface="Calibri" charset="0"/>
-                        <a:ea typeface="Calibri" charset="0"/>
-                        <a:cs typeface="Calibri" charset="0"/>
-                      </a:endParaRPr>
-                    </a:p>
-                    <a:p>
-                      <a:pPr algn="just" indent="0" marL="0">
-                        <a:buNone/>
-                      </a:pPr>
-                      <a:r>
-                        <a:rPr lang="en-US" sz="700" dirty="0">
-                          <a:solidFill>
-                            <a:schemeClr val="tx1"/>
-                          </a:solidFill>
-                          <a:latin typeface="Calibri" pitchFamily="34" charset="0"/>
-                          <a:ea typeface="Calibri" pitchFamily="34" charset="-122"/>
-                          <a:cs typeface="Calibri" pitchFamily="34" charset="-120"/>
-                        </a:rPr>
-                        <a:t>Seguimiento realizado en la presente visita de supervisión:</a:t>
-                      </a:r>
-                      <a:endParaRPr lang="en-US" sz="700" dirty="0">
-                        <a:latin typeface="Calibri" charset="0"/>
-                        <a:ea typeface="Calibri" charset="0"/>
-                        <a:cs typeface="Calibri" charset="0"/>
-                      </a:endParaRPr>
-                    </a:p>
-                    <a:p>
-                      <a:pPr algn="just" indent="0" marL="0">
-                        <a:buNone/>
-                      </a:pPr>
-                      <a:r>
-                        <a:rPr lang="en-US" sz="700" dirty="0">
-                          <a:solidFill>
-                            <a:schemeClr val="accent6"/>
-                          </a:solidFill>
-                          <a:latin typeface="Calibri" pitchFamily="34" charset="0"/>
-                          <a:ea typeface="Calibri" pitchFamily="34" charset="-122"/>
-                          <a:cs typeface="Calibri" pitchFamily="34" charset="-120"/>
-                        </a:rPr>
-                        <a:t>Estado: Parcialmente Superada.</a:t>
-                      </a:r>
-                      <a:endParaRPr lang="en-US" sz="700" dirty="0">
+                        <a:rPr lang="en-US" sz="1100" b="1" dirty="0">
+                          <a:solidFill>
+                            <a:schemeClr val="tx1"/>
+                          </a:solidFill>
+                          <a:latin typeface="Calibri" pitchFamily="34" charset="0"/>
+                          <a:ea typeface="Calibri" pitchFamily="34" charset="-122"/>
+                          <a:cs typeface="Calibri" pitchFamily="34" charset="-120"/>
+                        </a:rPr>
+                        <a:t>Servicios tercerizados</a:t>
+                      </a:r>
+                      <a:endParaRPr lang="en-US" sz="1100" dirty="0">
                         <a:latin typeface="Calibri" charset="0"/>
                         <a:ea typeface="Calibri" charset="0"/>
                         <a:cs typeface="Calibri" charset="0"/>
@@ -5926,7 +4757,7 @@
                       <a:tailEnd type="none" w="med" len="med"/>
                     </a:lnB>
                     <a:solidFill>
-                      <a:srgbClr val="FDF4E3"/>
+                      <a:srgbClr val="FFFFFF"/>
                     </a:solidFill>
                   </a:tcPr>
                 </a:tc>
@@ -5939,17 +4770,80 @@
                         <a:buNone/>
                       </a:pPr>
                       <a:r>
-                        <a:rPr lang="en-US" sz="700" dirty="0">
-                          <a:solidFill>
-                            <a:schemeClr val="tx1"/>
-                          </a:solidFill>
-                          <a:latin typeface="Calibri" pitchFamily="34" charset="0"/>
-                          <a:ea typeface="Calibri" pitchFamily="34" charset="-122"/>
-                          <a:cs typeface="Calibri" pitchFamily="34" charset="-120"/>
-                        </a:rPr>
-                        <a:t>Sin comentarios ni documentación</a:t>
-                      </a:r>
-                      <a:endParaRPr lang="en-US" sz="700" dirty="0">
+                        <a:rPr lang="en-US" sz="1100" dirty="0">
+                          <a:solidFill>
+                            <a:schemeClr val="tx1"/>
+                          </a:solidFill>
+                          <a:latin typeface="Calibri" pitchFamily="34" charset="0"/>
+                          <a:ea typeface="Calibri" pitchFamily="34" charset="-122"/>
+                          <a:cs typeface="Calibri" pitchFamily="34" charset="-120"/>
+                        </a:rPr>
+                        <a:t>Plan de acción:</a:t>
+                      </a:r>
+                      <a:endParaRPr lang="en-US" sz="1100" dirty="0">
+                        <a:latin typeface="Calibri" charset="0"/>
+                        <a:ea typeface="Calibri" charset="0"/>
+                        <a:cs typeface="Calibri" charset="0"/>
+                      </a:endParaRPr>
+                    </a:p>
+                    <a:p>
+                      <a:pPr algn="just" indent="0" marL="0">
+                        <a:buNone/>
+                      </a:pPr>
+                      <a:r>
+                        <a:rPr lang="en-US" sz="1100" dirty="0">
+                          <a:solidFill>
+                            <a:schemeClr val="tx1"/>
+                          </a:solidFill>
+                          <a:latin typeface="Calibri" pitchFamily="34" charset="0"/>
+                          <a:ea typeface="Calibri" pitchFamily="34" charset="-122"/>
+                          <a:cs typeface="Calibri" pitchFamily="34" charset="-120"/>
+                        </a:rPr>
+                        <a:t>Comentario CA: 14/10/2026 Compromiso</a:t>
+                      </a:r>
+                      <a:endParaRPr lang="en-US" sz="1100" dirty="0">
+                        <a:latin typeface="Calibri" charset="0"/>
+                        <a:ea typeface="Calibri" charset="0"/>
+                        <a:cs typeface="Calibri" charset="0"/>
+                      </a:endParaRPr>
+                    </a:p>
+                    <a:p>
+                      <a:pPr algn="just" indent="0" marL="0">
+                        <a:buNone/>
+                      </a:pPr>
+                      <a:r>
+                        <a:rPr lang="en-US" sz="1100" dirty="0">
+                          <a:solidFill>
+                            <a:schemeClr val="tx1"/>
+                          </a:solidFill>
+                          <a:latin typeface="Calibri" pitchFamily="34" charset="0"/>
+                          <a:ea typeface="Calibri" pitchFamily="34" charset="-122"/>
+                          <a:cs typeface="Calibri" pitchFamily="34" charset="-120"/>
+                        </a:rPr>
+                        <a:t>Comentario Licda. Bonilla: Como parte del fortalecimiento de los controles de seguridad asociados al servicio tercerizado del módulo ACRM, la Unidad de Seguridad de la Información y Ciberseguridad realizará una reevaluación de los riesgos de seguridad de la información y ciberseguridad, mediante la actualización de la matriz de riesgos y la revisión de los controles existentes, con el propósito de identificar oportunidades de mejora y definir las medidas adicionales de tratamiento que correspondan, en coordinación con el área responsable de la solución el proveedor.</a:t>
+                      </a:r>
+                      <a:endParaRPr lang="en-US" sz="1100" dirty="0">
+                        <a:latin typeface="Calibri" charset="0"/>
+                        <a:ea typeface="Calibri" charset="0"/>
+                        <a:cs typeface="Calibri" charset="0"/>
+                      </a:endParaRPr>
+                    </a:p>
+                    <a:p>
+                      <a:pPr algn="just" indent="0" marL="0">
+                        <a:buNone/>
+                      </a:pPr>
+                      <a:r>
+                        <a:rPr lang="en-US" sz="1100" dirty="0">
+                          <a:solidFill>
+                            <a:schemeClr val="tx1"/>
+                          </a:solidFill>
+                          <a:latin typeface="Calibri" pitchFamily="34" charset="0"/>
+                          <a:ea typeface="Calibri" pitchFamily="34" charset="-122"/>
+                          <a:cs typeface="Calibri" pitchFamily="34" charset="-120"/>
+                        </a:rPr>
+                        <a:t>Fecha de cumplimiento: 30 de noviembre de 2026.</a:t>
+                      </a:r>
+                      <a:endParaRPr lang="en-US" sz="1100" dirty="0">
                         <a:latin typeface="Calibri" charset="0"/>
                         <a:ea typeface="Calibri" charset="0"/>
                         <a:cs typeface="Calibri" charset="0"/>
@@ -5986,7 +4880,7 @@
                         <a:buNone/>
                       </a:pPr>
                       <a:r>
-                        <a:rPr lang="en-US" sz="700" b="1" dirty="0">
+                        <a:rPr lang="en-US" sz="1100" b="1" dirty="0">
                           <a:solidFill>
                             <a:schemeClr val="accent1"/>
                           </a:solidFill>
@@ -5994,48 +4888,20 @@
                           <a:ea typeface="Calibri" pitchFamily="34" charset="-122"/>
                           <a:cs typeface="Calibri" pitchFamily="34" charset="-120"/>
                         </a:rPr>
-                        <a:t>Auditoría interna</a:t>
-                      </a:r>
-                      <a:endParaRPr lang="en-US" sz="700" dirty="0">
-                        <a:latin typeface="Calibri" charset="0"/>
-                        <a:ea typeface="Calibri" charset="0"/>
-                        <a:cs typeface="Calibri" charset="0"/>
-                      </a:endParaRPr>
-                    </a:p>
-                  </a:txBody>
-                  <a:tcPr marL="54864" marR="54864" marT="18288" marB="18288" anchor="ctr">
-                    <a:lnL w="0" cap="flat" cmpd="sng" algn="ctr">
-                      <a:noFill/>
-                    </a:lnL>
-                    <a:lnR w="0" cap="flat" cmpd="sng" algn="ctr">
-                      <a:noFill/>
-                    </a:lnR>
-                    <a:lnT w="0" cap="flat" cmpd="sng" algn="ctr">
-                      <a:noFill/>
-                    </a:lnT>
-                    <a:lnB w="9525" cap="flat" cmpd="sng" algn="ctr">
-                      <a:solidFill>
-                        <a:srgbClr val="D9E0EA"/>
-                      </a:solidFill>
-                      <a:prstDash val="solid"/>
-                      <a:round/>
-                      <a:headEnd type="none" w="med" len="med"/>
-                      <a:tailEnd type="none" w="med" len="med"/>
-                    </a:lnB>
-                  </a:tcPr>
-                </a:tc>
-              </a:tr>
-              <a:tr h="0">
-                <a:tc gridSpan="3">
-                  <a:txBody>
-                    <a:bodyPr/>
-                    <a:lstStyle/>
-                    <a:p>
-                      <a:pPr algn="just" indent="0" marL="0">
-                        <a:buNone/>
-                      </a:pPr>
-                      <a:r>
-                        <a:rPr lang="en-US" sz="700" b="1" dirty="0">
+                        <a:t>Gerencia de Cumplimiento</a:t>
+                      </a:r>
+                      <a:endParaRPr lang="en-US" sz="1100" dirty="0">
+                        <a:latin typeface="Calibri" charset="0"/>
+                        <a:ea typeface="Calibri" charset="0"/>
+                        <a:cs typeface="Calibri" charset="0"/>
+                      </a:endParaRPr>
+                    </a:p>
+                    <a:p>
+                      <a:pPr algn="l" indent="0" marL="0">
+                        <a:buNone/>
+                      </a:pPr>
+                      <a:r>
+                        <a:rPr lang="en-US" sz="1100" b="1" dirty="0">
                           <a:solidFill>
                             <a:schemeClr val="accent1"/>
                           </a:solidFill>
@@ -6043,949 +4909,9 @@
                           <a:ea typeface="Calibri" pitchFamily="34" charset="-122"/>
                           <a:cs typeface="Calibri" pitchFamily="34" charset="-120"/>
                         </a:rPr>
-                        <a:t>C.3. Evaluación de Guías de Calidad de la Gestión de Riesgos Específicos, con el propósito evaluar la gestión de los riesgos de liquidez, mercado, operacional y tecnológico, de lavado de dinero y de activos, financiación del terrorismo y la financiación de la proliferación de armas de destrucción masiva (LDA/FT/FPADM), con referencia al 30 de septiembre de 2025, comunicadas mediante nota DS-SABAO-BCS-29295 de fecha 03 de diciembre de 2025.</a:t>
-                      </a:r>
-                      <a:endParaRPr lang="en-US" sz="700" dirty="0">
-                        <a:latin typeface="Calibri" charset="0"/>
-                        <a:ea typeface="Calibri" charset="0"/>
-                        <a:cs typeface="Calibri" charset="0"/>
-                      </a:endParaRPr>
-                    </a:p>
-                  </a:txBody>
-                  <a:tcPr marL="54864" marR="54864" marT="18288" marB="18288" anchor="ctr">
-                    <a:lnL w="0" cap="flat" cmpd="sng" algn="ctr">
-                      <a:noFill/>
-                    </a:lnL>
-                    <a:lnR w="0" cap="flat" cmpd="sng" algn="ctr">
-                      <a:noFill/>
-                    </a:lnR>
-                    <a:lnT w="0" cap="flat" cmpd="sng" algn="ctr">
-                      <a:noFill/>
-                    </a:lnT>
-                    <a:lnB w="9525" cap="flat" cmpd="sng" algn="ctr">
-                      <a:solidFill>
-                        <a:srgbClr val="D9E0EA"/>
-                      </a:solidFill>
-                      <a:prstDash val="solid"/>
-                      <a:round/>
-                      <a:headEnd type="none" w="med" len="med"/>
-                      <a:tailEnd type="none" w="med" len="med"/>
-                    </a:lnB>
-                    <a:solidFill>
-                      <a:schemeClr val="bg2"/>
-                    </a:solidFill>
-                  </a:tcPr>
-                </a:tc>
-                <a:tc hMerge="1">
-                  <a:tcPr/>
-                </a:tc>
-                <a:tc hMerge="1">
-                  <a:tcPr/>
-                </a:tc>
-              </a:tr>
-              <a:tr h="0">
-                <a:tc gridSpan="3">
-                  <a:txBody>
-                    <a:bodyPr/>
-                    <a:lstStyle/>
-                    <a:p>
-                      <a:pPr algn="just" indent="0" marL="0">
-                        <a:buNone/>
-                      </a:pPr>
-                      <a:r>
-                        <a:rPr lang="en-US" sz="700" b="1" dirty="0">
-                          <a:solidFill>
-                            <a:schemeClr val="accent1"/>
-                          </a:solidFill>
-                          <a:latin typeface="Calibri" pitchFamily="34" charset="0"/>
-                          <a:ea typeface="Calibri" pitchFamily="34" charset="-122"/>
-                          <a:cs typeface="Calibri" pitchFamily="34" charset="-120"/>
-                        </a:rPr>
-                        <a:t>C.3.1. Gestión de riesgo de Liquidez</a:t>
-                      </a:r>
-                      <a:endParaRPr lang="en-US" sz="700" dirty="0">
-                        <a:latin typeface="Calibri" charset="0"/>
-                        <a:ea typeface="Calibri" charset="0"/>
-                        <a:cs typeface="Calibri" charset="0"/>
-                      </a:endParaRPr>
-                    </a:p>
-                  </a:txBody>
-                  <a:tcPr marL="54864" marR="54864" marT="18288" marB="18288" anchor="ctr">
-                    <a:lnL w="0" cap="flat" cmpd="sng" algn="ctr">
-                      <a:noFill/>
-                    </a:lnL>
-                    <a:lnR w="0" cap="flat" cmpd="sng" algn="ctr">
-                      <a:noFill/>
-                    </a:lnR>
-                    <a:lnT w="0" cap="flat" cmpd="sng" algn="ctr">
-                      <a:noFill/>
-                    </a:lnT>
-                    <a:lnB w="9525" cap="flat" cmpd="sng" algn="ctr">
-                      <a:solidFill>
-                        <a:srgbClr val="D9E0EA"/>
-                      </a:solidFill>
-                      <a:prstDash val="solid"/>
-                      <a:round/>
-                      <a:headEnd type="none" w="med" len="med"/>
-                      <a:tailEnd type="none" w="med" len="med"/>
-                    </a:lnB>
-                    <a:solidFill>
-                      <a:schemeClr val="bg2"/>
-                    </a:solidFill>
-                  </a:tcPr>
-                </a:tc>
-                <a:tc hMerge="1">
-                  <a:tcPr/>
-                </a:tc>
-                <a:tc hMerge="1">
-                  <a:tcPr/>
-                </a:tc>
-              </a:tr>
-              <a:tr h="0">
-                <a:tc>
-                  <a:txBody>
-                    <a:bodyPr/>
-                    <a:lstStyle/>
-                    <a:p>
-                      <a:pPr algn="just" indent="0" marL="0">
-                        <a:buNone/>
-                      </a:pPr>
-                      <a:r>
-                        <a:rPr lang="en-US" sz="700" b="1" dirty="0">
-                          <a:solidFill>
-                            <a:schemeClr val="tx1"/>
-                          </a:solidFill>
-                          <a:latin typeface="Calibri" pitchFamily="34" charset="0"/>
-                          <a:ea typeface="Calibri" pitchFamily="34" charset="-122"/>
-                          <a:cs typeface="Calibri" pitchFamily="34" charset="-120"/>
-                        </a:rPr>
-                        <a:t>Observación 1: Falta de elementos en el plan de contingencia.</a:t>
-                      </a:r>
-                      <a:endParaRPr lang="en-US" sz="700" dirty="0">
-                        <a:latin typeface="Calibri" charset="0"/>
-                        <a:ea typeface="Calibri" charset="0"/>
-                        <a:cs typeface="Calibri" charset="0"/>
-                      </a:endParaRPr>
-                    </a:p>
-                    <a:p>
-                      <a:pPr algn="just" indent="0" marL="0">
-                        <a:buNone/>
-                      </a:pPr>
-                      <a:r>
-                        <a:rPr lang="en-US" sz="700" dirty="0">
-                          <a:solidFill>
-                            <a:schemeClr val="tx1"/>
-                          </a:solidFill>
-                          <a:latin typeface="Calibri" pitchFamily="34" charset="0"/>
-                          <a:ea typeface="Calibri" pitchFamily="34" charset="-122"/>
-                          <a:cs typeface="Calibri" pitchFamily="34" charset="-120"/>
-                        </a:rPr>
-                        <a:t>Seguimiento realizado en la presente visita de supervisión:</a:t>
-                      </a:r>
-                      <a:endParaRPr lang="en-US" sz="700" dirty="0">
-                        <a:latin typeface="Calibri" charset="0"/>
-                        <a:ea typeface="Calibri" charset="0"/>
-                        <a:cs typeface="Calibri" charset="0"/>
-                      </a:endParaRPr>
-                    </a:p>
-                    <a:p>
-                      <a:pPr algn="just" indent="0" marL="0">
-                        <a:buNone/>
-                      </a:pPr>
-                      <a:r>
-                        <a:rPr lang="en-US" sz="700" dirty="0">
-                          <a:solidFill>
-                            <a:schemeClr val="accent3"/>
-                          </a:solidFill>
-                          <a:latin typeface="Calibri" pitchFamily="34" charset="0"/>
-                          <a:ea typeface="Calibri" pitchFamily="34" charset="-122"/>
-                          <a:cs typeface="Calibri" pitchFamily="34" charset="-120"/>
-                        </a:rPr>
-                        <a:t>Estado de la observación: No superada.</a:t>
-                      </a:r>
-                      <a:endParaRPr lang="en-US" sz="700" dirty="0">
-                        <a:latin typeface="Calibri" charset="0"/>
-                        <a:ea typeface="Calibri" charset="0"/>
-                        <a:cs typeface="Calibri" charset="0"/>
-                      </a:endParaRPr>
-                    </a:p>
-                  </a:txBody>
-                  <a:tcPr marL="54864" marR="54864" marT="18288" marB="18288" anchor="ctr">
-                    <a:lnL w="0" cap="flat" cmpd="sng" algn="ctr">
-                      <a:noFill/>
-                    </a:lnL>
-                    <a:lnR w="0" cap="flat" cmpd="sng" algn="ctr">
-                      <a:noFill/>
-                    </a:lnR>
-                    <a:lnT w="0" cap="flat" cmpd="sng" algn="ctr">
-                      <a:noFill/>
-                    </a:lnT>
-                    <a:lnB w="9525" cap="flat" cmpd="sng" algn="ctr">
-                      <a:solidFill>
-                        <a:srgbClr val="D9E0EA"/>
-                      </a:solidFill>
-                      <a:prstDash val="solid"/>
-                      <a:round/>
-                      <a:headEnd type="none" w="med" len="med"/>
-                      <a:tailEnd type="none" w="med" len="med"/>
-                    </a:lnB>
-                    <a:solidFill>
-                      <a:srgbClr val="FBEAE8"/>
-                    </a:solidFill>
-                  </a:tcPr>
-                </a:tc>
-                <a:tc>
-                  <a:txBody>
-                    <a:bodyPr/>
-                    <a:lstStyle/>
-                    <a:p>
-                      <a:pPr algn="just" indent="0" marL="0">
-                        <a:buNone/>
-                      </a:pPr>
-                      <a:r>
-                        <a:rPr lang="en-US" sz="700" dirty="0">
-                          <a:solidFill>
-                            <a:schemeClr val="tx1"/>
-                          </a:solidFill>
-                          <a:latin typeface="Calibri" pitchFamily="34" charset="0"/>
-                          <a:ea typeface="Calibri" pitchFamily="34" charset="-122"/>
-                          <a:cs typeface="Calibri" pitchFamily="34" charset="-120"/>
-                        </a:rPr>
-                        <a:t>Se trabajará en modificar el Plan de Contingencia de Liquidez para subsanar las observaciones indicadas por la SSF.</a:t>
-                      </a:r>
-                      <a:endParaRPr lang="en-US" sz="700" dirty="0">
-                        <a:latin typeface="Calibri" charset="0"/>
-                        <a:ea typeface="Calibri" charset="0"/>
-                        <a:cs typeface="Calibri" charset="0"/>
-                      </a:endParaRPr>
-                    </a:p>
-                    <a:p>
-                      <a:pPr algn="just" indent="0" marL="0">
-                        <a:buNone/>
-                      </a:pPr>
-                      <a:r>
-                        <a:rPr lang="en-US" sz="700" dirty="0">
-                          <a:solidFill>
-                            <a:schemeClr val="tx1"/>
-                          </a:solidFill>
-                          <a:latin typeface="Calibri" pitchFamily="34" charset="0"/>
-                          <a:ea typeface="Calibri" pitchFamily="34" charset="-122"/>
-                          <a:cs typeface="Calibri" pitchFamily="34" charset="-120"/>
-                        </a:rPr>
-                        <a:t>Fecha de finalización: 16 de noviembre de 2026</a:t>
-                      </a:r>
-                      <a:endParaRPr lang="en-US" sz="700" dirty="0">
-                        <a:latin typeface="Calibri" charset="0"/>
-                        <a:ea typeface="Calibri" charset="0"/>
-                        <a:cs typeface="Calibri" charset="0"/>
-                      </a:endParaRPr>
-                    </a:p>
-                  </a:txBody>
-                  <a:tcPr marL="54864" marR="54864" marT="18288" marB="18288" anchor="ctr">
-                    <a:lnL w="0" cap="flat" cmpd="sng" algn="ctr">
-                      <a:noFill/>
-                    </a:lnL>
-                    <a:lnR w="0" cap="flat" cmpd="sng" algn="ctr">
-                      <a:noFill/>
-                    </a:lnR>
-                    <a:lnT w="0" cap="flat" cmpd="sng" algn="ctr">
-                      <a:noFill/>
-                    </a:lnT>
-                    <a:lnB w="9525" cap="flat" cmpd="sng" algn="ctr">
-                      <a:solidFill>
-                        <a:srgbClr val="D9E0EA"/>
-                      </a:solidFill>
-                      <a:prstDash val="solid"/>
-                      <a:round/>
-                      <a:headEnd type="none" w="med" len="med"/>
-                      <a:tailEnd type="none" w="med" len="med"/>
-                    </a:lnB>
-                  </a:tcPr>
-                </a:tc>
-                <a:tc>
-                  <a:txBody>
-                    <a:bodyPr/>
-                    <a:lstStyle/>
-                    <a:p>
-                      <a:pPr algn="l" indent="0" marL="0">
-                        <a:buNone/>
-                      </a:pPr>
-                      <a:r>
-                        <a:rPr lang="en-US" sz="700" b="1" dirty="0">
-                          <a:solidFill>
-                            <a:schemeClr val="accent1"/>
-                          </a:solidFill>
-                          <a:latin typeface="Calibri" pitchFamily="34" charset="0"/>
-                          <a:ea typeface="Calibri" pitchFamily="34" charset="-122"/>
-                          <a:cs typeface="Calibri" pitchFamily="34" charset="-120"/>
-                        </a:rPr>
-                        <a:t>Gerencia Financiera</a:t>
-                      </a:r>
-                      <a:endParaRPr lang="en-US" sz="700" dirty="0">
-                        <a:latin typeface="Calibri" charset="0"/>
-                        <a:ea typeface="Calibri" charset="0"/>
-                        <a:cs typeface="Calibri" charset="0"/>
-                      </a:endParaRPr>
-                    </a:p>
-                  </a:txBody>
-                  <a:tcPr marL="54864" marR="54864" marT="18288" marB="18288" anchor="ctr">
-                    <a:lnL w="0" cap="flat" cmpd="sng" algn="ctr">
-                      <a:noFill/>
-                    </a:lnL>
-                    <a:lnR w="0" cap="flat" cmpd="sng" algn="ctr">
-                      <a:noFill/>
-                    </a:lnR>
-                    <a:lnT w="0" cap="flat" cmpd="sng" algn="ctr">
-                      <a:noFill/>
-                    </a:lnT>
-                    <a:lnB w="9525" cap="flat" cmpd="sng" algn="ctr">
-                      <a:solidFill>
-                        <a:srgbClr val="D9E0EA"/>
-                      </a:solidFill>
-                      <a:prstDash val="solid"/>
-                      <a:round/>
-                      <a:headEnd type="none" w="med" len="med"/>
-                      <a:tailEnd type="none" w="med" len="med"/>
-                    </a:lnB>
-                  </a:tcPr>
-                </a:tc>
-              </a:tr>
-              <a:tr h="0">
-                <a:tc>
-                  <a:txBody>
-                    <a:bodyPr/>
-                    <a:lstStyle/>
-                    <a:p>
-                      <a:pPr algn="just" indent="0" marL="0">
-                        <a:buNone/>
-                      </a:pPr>
-                      <a:r>
-                        <a:rPr lang="en-US" sz="700" b="1" dirty="0">
-                          <a:solidFill>
-                            <a:schemeClr val="tx1"/>
-                          </a:solidFill>
-                          <a:latin typeface="Calibri" pitchFamily="34" charset="0"/>
-                          <a:ea typeface="Calibri" pitchFamily="34" charset="-122"/>
-                          <a:cs typeface="Calibri" pitchFamily="34" charset="-120"/>
-                        </a:rPr>
-                        <a:t>Observación 2: Inconsistencia en los roles y responsabilidades asignados en la elaboración del Plan de Contingencia de Liquidez</a:t>
-                      </a:r>
-                      <a:endParaRPr lang="en-US" sz="700" dirty="0">
-                        <a:latin typeface="Calibri" charset="0"/>
-                        <a:ea typeface="Calibri" charset="0"/>
-                        <a:cs typeface="Calibri" charset="0"/>
-                      </a:endParaRPr>
-                    </a:p>
-                    <a:p>
-                      <a:pPr algn="just" indent="0" marL="0">
-                        <a:buNone/>
-                      </a:pPr>
-                      <a:r>
-                        <a:rPr lang="en-US" sz="700" dirty="0">
-                          <a:solidFill>
-                            <a:schemeClr val="accent3"/>
-                          </a:solidFill>
-                          <a:latin typeface="Calibri" pitchFamily="34" charset="0"/>
-                          <a:ea typeface="Calibri" pitchFamily="34" charset="-122"/>
-                          <a:cs typeface="Calibri" pitchFamily="34" charset="-120"/>
-                        </a:rPr>
-                        <a:t>Estado de la observación: No superada.</a:t>
-                      </a:r>
-                      <a:endParaRPr lang="en-US" sz="700" dirty="0">
-                        <a:latin typeface="Calibri" charset="0"/>
-                        <a:ea typeface="Calibri" charset="0"/>
-                        <a:cs typeface="Calibri" charset="0"/>
-                      </a:endParaRPr>
-                    </a:p>
-                  </a:txBody>
-                  <a:tcPr marL="54864" marR="54864" marT="18288" marB="18288" anchor="ctr">
-                    <a:lnL w="0" cap="flat" cmpd="sng" algn="ctr">
-                      <a:noFill/>
-                    </a:lnL>
-                    <a:lnR w="0" cap="flat" cmpd="sng" algn="ctr">
-                      <a:noFill/>
-                    </a:lnR>
-                    <a:lnT w="0" cap="flat" cmpd="sng" algn="ctr">
-                      <a:noFill/>
-                    </a:lnT>
-                    <a:lnB w="9525" cap="flat" cmpd="sng" algn="ctr">
-                      <a:solidFill>
-                        <a:srgbClr val="D9E0EA"/>
-                      </a:solidFill>
-                      <a:prstDash val="solid"/>
-                      <a:round/>
-                      <a:headEnd type="none" w="med" len="med"/>
-                      <a:tailEnd type="none" w="med" len="med"/>
-                    </a:lnB>
-                    <a:solidFill>
-                      <a:srgbClr val="FBEAE8"/>
-                    </a:solidFill>
-                  </a:tcPr>
-                </a:tc>
-                <a:tc>
-                  <a:txBody>
-                    <a:bodyPr/>
-                    <a:lstStyle/>
-                    <a:p>
-                      <a:pPr algn="just" indent="0" marL="0">
-                        <a:buNone/>
-                      </a:pPr>
-                      <a:r>
-                        <a:rPr lang="en-US" sz="700" dirty="0">
-                          <a:solidFill>
-                            <a:schemeClr val="tx1"/>
-                          </a:solidFill>
-                          <a:latin typeface="Calibri" pitchFamily="34" charset="0"/>
-                          <a:ea typeface="Calibri" pitchFamily="34" charset="-122"/>
-                          <a:cs typeface="Calibri" pitchFamily="34" charset="-120"/>
-                        </a:rPr>
-                        <a:t>Se trabajará en modificar el Plan de Contingencia de Liquidez para subsanar las observaciones indicadas por la SSF.</a:t>
-                      </a:r>
-                      <a:endParaRPr lang="en-US" sz="700" dirty="0">
-                        <a:latin typeface="Calibri" charset="0"/>
-                        <a:ea typeface="Calibri" charset="0"/>
-                        <a:cs typeface="Calibri" charset="0"/>
-                      </a:endParaRPr>
-                    </a:p>
-                    <a:p>
-                      <a:pPr algn="just" indent="0" marL="0">
-                        <a:buNone/>
-                      </a:pPr>
-                      <a:r>
-                        <a:rPr lang="en-US" sz="700" dirty="0">
-                          <a:solidFill>
-                            <a:schemeClr val="tx1"/>
-                          </a:solidFill>
-                          <a:latin typeface="Calibri" pitchFamily="34" charset="0"/>
-                          <a:ea typeface="Calibri" pitchFamily="34" charset="-122"/>
-                          <a:cs typeface="Calibri" pitchFamily="34" charset="-120"/>
-                        </a:rPr>
-                        <a:t>Fecha de finalización: 16 de noviembre de 2026.</a:t>
-                      </a:r>
-                      <a:endParaRPr lang="en-US" sz="700" dirty="0">
-                        <a:latin typeface="Calibri" charset="0"/>
-                        <a:ea typeface="Calibri" charset="0"/>
-                        <a:cs typeface="Calibri" charset="0"/>
-                      </a:endParaRPr>
-                    </a:p>
-                  </a:txBody>
-                  <a:tcPr marL="54864" marR="54864" marT="18288" marB="18288" anchor="ctr">
-                    <a:lnL w="0" cap="flat" cmpd="sng" algn="ctr">
-                      <a:noFill/>
-                    </a:lnL>
-                    <a:lnR w="0" cap="flat" cmpd="sng" algn="ctr">
-                      <a:noFill/>
-                    </a:lnR>
-                    <a:lnT w="0" cap="flat" cmpd="sng" algn="ctr">
-                      <a:noFill/>
-                    </a:lnT>
-                    <a:lnB w="9525" cap="flat" cmpd="sng" algn="ctr">
-                      <a:solidFill>
-                        <a:srgbClr val="D9E0EA"/>
-                      </a:solidFill>
-                      <a:prstDash val="solid"/>
-                      <a:round/>
-                      <a:headEnd type="none" w="med" len="med"/>
-                      <a:tailEnd type="none" w="med" len="med"/>
-                    </a:lnB>
-                  </a:tcPr>
-                </a:tc>
-                <a:tc>
-                  <a:txBody>
-                    <a:bodyPr/>
-                    <a:lstStyle/>
-                    <a:p>
-                      <a:pPr algn="l" indent="0" marL="0">
-                        <a:buNone/>
-                      </a:pPr>
-                      <a:r>
-                        <a:rPr lang="en-US" sz="700" b="1" dirty="0">
-                          <a:solidFill>
-                            <a:schemeClr val="accent1"/>
-                          </a:solidFill>
-                          <a:latin typeface="Calibri" pitchFamily="34" charset="0"/>
-                          <a:ea typeface="Calibri" pitchFamily="34" charset="-122"/>
-                          <a:cs typeface="Calibri" pitchFamily="34" charset="-120"/>
-                        </a:rPr>
-                        <a:t>Gerencia Financiera</a:t>
-                      </a:r>
-                      <a:endParaRPr lang="en-US" sz="700" dirty="0">
-                        <a:latin typeface="Calibri" charset="0"/>
-                        <a:ea typeface="Calibri" charset="0"/>
-                        <a:cs typeface="Calibri" charset="0"/>
-                      </a:endParaRPr>
-                    </a:p>
-                  </a:txBody>
-                  <a:tcPr marL="54864" marR="54864" marT="18288" marB="18288" anchor="ctr">
-                    <a:lnL w="0" cap="flat" cmpd="sng" algn="ctr">
-                      <a:noFill/>
-                    </a:lnL>
-                    <a:lnR w="0" cap="flat" cmpd="sng" algn="ctr">
-                      <a:noFill/>
-                    </a:lnR>
-                    <a:lnT w="0" cap="flat" cmpd="sng" algn="ctr">
-                      <a:noFill/>
-                    </a:lnT>
-                    <a:lnB w="9525" cap="flat" cmpd="sng" algn="ctr">
-                      <a:solidFill>
-                        <a:srgbClr val="D9E0EA"/>
-                      </a:solidFill>
-                      <a:prstDash val="solid"/>
-                      <a:round/>
-                      <a:headEnd type="none" w="med" len="med"/>
-                      <a:tailEnd type="none" w="med" len="med"/>
-                    </a:lnB>
-                  </a:tcPr>
-                </a:tc>
-              </a:tr>
-              <a:tr h="0">
-                <a:tc gridSpan="3">
-                  <a:txBody>
-                    <a:bodyPr/>
-                    <a:lstStyle/>
-                    <a:p>
-                      <a:pPr algn="just" indent="0" marL="0">
-                        <a:buNone/>
-                      </a:pPr>
-                      <a:r>
-                        <a:rPr lang="en-US" sz="700" b="1" dirty="0">
-                          <a:solidFill>
-                            <a:schemeClr val="accent1"/>
-                          </a:solidFill>
-                          <a:latin typeface="Calibri" pitchFamily="34" charset="0"/>
-                          <a:ea typeface="Calibri" pitchFamily="34" charset="-122"/>
-                          <a:cs typeface="Calibri" pitchFamily="34" charset="-120"/>
-                        </a:rPr>
-                        <a:t>C.3.2. Gestión de riesgo Operacional y Tecnológico.</a:t>
-                      </a:r>
-                      <a:endParaRPr lang="en-US" sz="700" dirty="0">
-                        <a:latin typeface="Calibri" charset="0"/>
-                        <a:ea typeface="Calibri" charset="0"/>
-                        <a:cs typeface="Calibri" charset="0"/>
-                      </a:endParaRPr>
-                    </a:p>
-                  </a:txBody>
-                  <a:tcPr marL="54864" marR="54864" marT="18288" marB="18288" anchor="ctr">
-                    <a:lnL w="0" cap="flat" cmpd="sng" algn="ctr">
-                      <a:noFill/>
-                    </a:lnL>
-                    <a:lnR w="0" cap="flat" cmpd="sng" algn="ctr">
-                      <a:noFill/>
-                    </a:lnR>
-                    <a:lnT w="0" cap="flat" cmpd="sng" algn="ctr">
-                      <a:noFill/>
-                    </a:lnT>
-                    <a:lnB w="9525" cap="flat" cmpd="sng" algn="ctr">
-                      <a:solidFill>
-                        <a:srgbClr val="D9E0EA"/>
-                      </a:solidFill>
-                      <a:prstDash val="solid"/>
-                      <a:round/>
-                      <a:headEnd type="none" w="med" len="med"/>
-                      <a:tailEnd type="none" w="med" len="med"/>
-                    </a:lnB>
-                    <a:solidFill>
-                      <a:schemeClr val="bg2"/>
-                    </a:solidFill>
-                  </a:tcPr>
-                </a:tc>
-                <a:tc hMerge="1">
-                  <a:tcPr/>
-                </a:tc>
-                <a:tc hMerge="1">
-                  <a:tcPr/>
-                </a:tc>
-              </a:tr>
-              <a:tr h="0">
-                <a:tc>
-                  <a:txBody>
-                    <a:bodyPr/>
-                    <a:lstStyle/>
-                    <a:p>
-                      <a:pPr algn="just" indent="0" marL="0">
-                        <a:buNone/>
-                      </a:pPr>
-                      <a:r>
-                        <a:rPr lang="en-US" sz="700" b="1" dirty="0">
-                          <a:solidFill>
-                            <a:schemeClr val="tx1"/>
-                          </a:solidFill>
-                          <a:latin typeface="Calibri" pitchFamily="34" charset="0"/>
-                          <a:ea typeface="Calibri" pitchFamily="34" charset="-122"/>
-                          <a:cs typeface="Calibri" pitchFamily="34" charset="-120"/>
-                        </a:rPr>
-                        <a:t>Observación 1: Falta de actualización de normativa interna relacionada la gestión de Riesgo Operacional y Tecnológico</a:t>
-                      </a:r>
-                      <a:endParaRPr lang="en-US" sz="700" dirty="0">
-                        <a:latin typeface="Calibri" charset="0"/>
-                        <a:ea typeface="Calibri" charset="0"/>
-                        <a:cs typeface="Calibri" charset="0"/>
-                      </a:endParaRPr>
-                    </a:p>
-                    <a:p>
-                      <a:pPr algn="just" indent="0" marL="0">
-                        <a:buNone/>
-                      </a:pPr>
-                      <a:r>
-                        <a:rPr lang="en-US" sz="700" dirty="0">
-                          <a:solidFill>
-                            <a:schemeClr val="tx1"/>
-                          </a:solidFill>
-                          <a:latin typeface="Calibri" pitchFamily="34" charset="0"/>
-                          <a:ea typeface="Calibri" pitchFamily="34" charset="-122"/>
-                          <a:cs typeface="Calibri" pitchFamily="34" charset="-120"/>
-                        </a:rPr>
-                        <a:t>Seguimiento realizado en la presente visita de supervisión:</a:t>
-                      </a:r>
-                      <a:endParaRPr lang="en-US" sz="700" dirty="0">
-                        <a:latin typeface="Calibri" charset="0"/>
-                        <a:ea typeface="Calibri" charset="0"/>
-                        <a:cs typeface="Calibri" charset="0"/>
-                      </a:endParaRPr>
-                    </a:p>
-                    <a:p>
-                      <a:pPr algn="just" indent="0" marL="0">
-                        <a:buNone/>
-                      </a:pPr>
-                      <a:r>
-                        <a:rPr lang="en-US" sz="700" dirty="0">
-                          <a:solidFill>
-                            <a:schemeClr val="accent6"/>
-                          </a:solidFill>
-                          <a:latin typeface="Calibri" pitchFamily="34" charset="0"/>
-                          <a:ea typeface="Calibri" pitchFamily="34" charset="-122"/>
-                          <a:cs typeface="Calibri" pitchFamily="34" charset="-120"/>
-                        </a:rPr>
-                        <a:t>Estado de la observación: Parcialmente superada.</a:t>
-                      </a:r>
-                      <a:endParaRPr lang="en-US" sz="700" dirty="0">
-                        <a:latin typeface="Calibri" charset="0"/>
-                        <a:ea typeface="Calibri" charset="0"/>
-                        <a:cs typeface="Calibri" charset="0"/>
-                      </a:endParaRPr>
-                    </a:p>
-                  </a:txBody>
-                  <a:tcPr marL="54864" marR="54864" marT="18288" marB="18288" anchor="ctr">
-                    <a:lnL w="0" cap="flat" cmpd="sng" algn="ctr">
-                      <a:noFill/>
-                    </a:lnL>
-                    <a:lnR w="0" cap="flat" cmpd="sng" algn="ctr">
-                      <a:noFill/>
-                    </a:lnR>
-                    <a:lnT w="0" cap="flat" cmpd="sng" algn="ctr">
-                      <a:noFill/>
-                    </a:lnT>
-                    <a:lnB w="9525" cap="flat" cmpd="sng" algn="ctr">
-                      <a:solidFill>
-                        <a:srgbClr val="D9E0EA"/>
-                      </a:solidFill>
-                      <a:prstDash val="solid"/>
-                      <a:round/>
-                      <a:headEnd type="none" w="med" len="med"/>
-                      <a:tailEnd type="none" w="med" len="med"/>
-                    </a:lnB>
-                    <a:solidFill>
-                      <a:srgbClr val="FDF4E3"/>
-                    </a:solidFill>
-                  </a:tcPr>
-                </a:tc>
-                <a:tc>
-                  <a:txBody>
-                    <a:bodyPr/>
-                    <a:lstStyle/>
-                    <a:p>
-                      <a:pPr algn="just" indent="0" marL="0">
-                        <a:buNone/>
-                      </a:pPr>
-                      <a:r>
-                        <a:rPr lang="en-US" sz="700" dirty="0">
-                          <a:solidFill>
-                            <a:schemeClr val="tx1"/>
-                          </a:solidFill>
-                          <a:latin typeface="Calibri" pitchFamily="34" charset="0"/>
-                          <a:ea typeface="Calibri" pitchFamily="34" charset="-122"/>
-                          <a:cs typeface="Calibri" pitchFamily="34" charset="-120"/>
-                        </a:rPr>
-                        <a:t>Se agrega documentos actualizados, según detalle:</a:t>
-                      </a:r>
-                      <a:endParaRPr lang="en-US" sz="700" dirty="0">
-                        <a:latin typeface="Calibri" charset="0"/>
-                        <a:ea typeface="Calibri" charset="0"/>
-                        <a:cs typeface="Calibri" charset="0"/>
-                      </a:endParaRPr>
-                    </a:p>
-                    <a:p>
-                      <a:pPr algn="just" indent="0" marL="0">
-                        <a:buNone/>
-                      </a:pPr>
-                      <a:r>
-                        <a:rPr lang="en-US" sz="700" dirty="0">
-                          <a:solidFill>
-                            <a:schemeClr val="tx1"/>
-                          </a:solidFill>
-                          <a:latin typeface="Calibri" pitchFamily="34" charset="0"/>
-                          <a:ea typeface="Calibri" pitchFamily="34" charset="-122"/>
-                          <a:cs typeface="Calibri" pitchFamily="34" charset="-120"/>
-                        </a:rPr>
-                        <a:t>Política de Gestión de Riesgo Operacional</a:t>
-                      </a:r>
-                      <a:endParaRPr lang="en-US" sz="700" dirty="0">
-                        <a:latin typeface="Calibri" charset="0"/>
-                        <a:ea typeface="Calibri" charset="0"/>
-                        <a:cs typeface="Calibri" charset="0"/>
-                      </a:endParaRPr>
-                    </a:p>
-                    <a:p>
-                      <a:pPr algn="just" indent="0" marL="0">
-                        <a:buNone/>
-                      </a:pPr>
-                      <a:r>
-                        <a:rPr lang="en-US" sz="700" dirty="0">
-                          <a:solidFill>
-                            <a:schemeClr val="tx1"/>
-                          </a:solidFill>
-                          <a:latin typeface="Calibri" pitchFamily="34" charset="0"/>
-                          <a:ea typeface="Calibri" pitchFamily="34" charset="-122"/>
-                          <a:cs typeface="Calibri" pitchFamily="34" charset="-120"/>
-                        </a:rPr>
-                        <a:t>Manual de Administración de Riesgo Tecnológico.</a:t>
-                      </a:r>
-                      <a:endParaRPr lang="en-US" sz="700" dirty="0">
-                        <a:latin typeface="Calibri" charset="0"/>
-                        <a:ea typeface="Calibri" charset="0"/>
-                        <a:cs typeface="Calibri" charset="0"/>
-                      </a:endParaRPr>
-                    </a:p>
-                    <a:p>
-                      <a:pPr algn="just" indent="0" marL="0">
-                        <a:buNone/>
-                      </a:pPr>
-                      <a:r>
-                        <a:rPr lang="en-US" sz="700" dirty="0">
-                          <a:solidFill>
-                            <a:schemeClr val="tx1"/>
-                          </a:solidFill>
-                          <a:latin typeface="Calibri" pitchFamily="34" charset="0"/>
-                          <a:ea typeface="Calibri" pitchFamily="34" charset="-122"/>
-                          <a:cs typeface="Calibri" pitchFamily="34" charset="-120"/>
-                        </a:rPr>
-                        <a:t>Pendiente de presentar al Comité de Riesgos: Política de contratación de servicios críticos tercerizados.</a:t>
-                      </a:r>
-                      <a:endParaRPr lang="en-US" sz="700" dirty="0">
-                        <a:latin typeface="Calibri" charset="0"/>
-                        <a:ea typeface="Calibri" charset="0"/>
-                        <a:cs typeface="Calibri" charset="0"/>
-                      </a:endParaRPr>
-                    </a:p>
-                  </a:txBody>
-                  <a:tcPr marL="54864" marR="54864" marT="18288" marB="18288" anchor="ctr">
-                    <a:lnL w="0" cap="flat" cmpd="sng" algn="ctr">
-                      <a:noFill/>
-                    </a:lnL>
-                    <a:lnR w="0" cap="flat" cmpd="sng" algn="ctr">
-                      <a:noFill/>
-                    </a:lnR>
-                    <a:lnT w="0" cap="flat" cmpd="sng" algn="ctr">
-                      <a:noFill/>
-                    </a:lnT>
-                    <a:lnB w="9525" cap="flat" cmpd="sng" algn="ctr">
-                      <a:solidFill>
-                        <a:srgbClr val="D9E0EA"/>
-                      </a:solidFill>
-                      <a:prstDash val="solid"/>
-                      <a:round/>
-                      <a:headEnd type="none" w="med" len="med"/>
-                      <a:tailEnd type="none" w="med" len="med"/>
-                    </a:lnB>
-                  </a:tcPr>
-                </a:tc>
-                <a:tc>
-                  <a:txBody>
-                    <a:bodyPr/>
-                    <a:lstStyle/>
-                    <a:p>
-                      <a:pPr algn="l" indent="0" marL="0">
-                        <a:buNone/>
-                      </a:pPr>
-                      <a:r>
-                        <a:rPr lang="en-US" sz="700" b="1" dirty="0">
-                          <a:solidFill>
-                            <a:schemeClr val="accent1"/>
-                          </a:solidFill>
-                          <a:latin typeface="Calibri" pitchFamily="34" charset="0"/>
-                          <a:ea typeface="Calibri" pitchFamily="34" charset="-122"/>
-                          <a:cs typeface="Calibri" pitchFamily="34" charset="-120"/>
-                        </a:rPr>
-                        <a:t>Administración de Riesgos</a:t>
-                      </a:r>
-                      <a:endParaRPr lang="en-US" sz="700" dirty="0">
-                        <a:latin typeface="Calibri" charset="0"/>
-                        <a:ea typeface="Calibri" charset="0"/>
-                        <a:cs typeface="Calibri" charset="0"/>
-                      </a:endParaRPr>
-                    </a:p>
-                  </a:txBody>
-                  <a:tcPr marL="54864" marR="54864" marT="18288" marB="18288" anchor="ctr">
-                    <a:lnL w="0" cap="flat" cmpd="sng" algn="ctr">
-                      <a:noFill/>
-                    </a:lnL>
-                    <a:lnR w="0" cap="flat" cmpd="sng" algn="ctr">
-                      <a:noFill/>
-                    </a:lnR>
-                    <a:lnT w="0" cap="flat" cmpd="sng" algn="ctr">
-                      <a:noFill/>
-                    </a:lnT>
-                    <a:lnB w="9525" cap="flat" cmpd="sng" algn="ctr">
-                      <a:solidFill>
-                        <a:srgbClr val="D9E0EA"/>
-                      </a:solidFill>
-                      <a:prstDash val="solid"/>
-                      <a:round/>
-                      <a:headEnd type="none" w="med" len="med"/>
-                      <a:tailEnd type="none" w="med" len="med"/>
-                    </a:lnB>
-                  </a:tcPr>
-                </a:tc>
-              </a:tr>
-              <a:tr h="0">
-                <a:tc>
-                  <a:txBody>
-                    <a:bodyPr/>
-                    <a:lstStyle/>
-                    <a:p>
-                      <a:pPr algn="just" indent="0" marL="0">
-                        <a:buNone/>
-                      </a:pPr>
-                      <a:r>
-                        <a:rPr lang="en-US" sz="700" b="1" dirty="0">
-                          <a:solidFill>
-                            <a:schemeClr val="tx1"/>
-                          </a:solidFill>
-                          <a:latin typeface="Calibri" pitchFamily="34" charset="0"/>
-                          <a:ea typeface="Calibri" pitchFamily="34" charset="-122"/>
-                          <a:cs typeface="Calibri" pitchFamily="34" charset="-120"/>
-                        </a:rPr>
-                        <a:t>Observación 2: Omisión de la presentación del objetivo mínimo de continuidad de negocio (MBCO) en BIA con referencia al 31 de agosto del 2024.</a:t>
-                      </a:r>
-                      <a:endParaRPr lang="en-US" sz="700" dirty="0">
-                        <a:latin typeface="Calibri" charset="0"/>
-                        <a:ea typeface="Calibri" charset="0"/>
-                        <a:cs typeface="Calibri" charset="0"/>
-                      </a:endParaRPr>
-                    </a:p>
-                    <a:p>
-                      <a:pPr algn="just" indent="0" marL="0">
-                        <a:buNone/>
-                      </a:pPr>
-                      <a:r>
-                        <a:rPr lang="en-US" sz="700" dirty="0">
-                          <a:solidFill>
-                            <a:schemeClr val="accent3"/>
-                          </a:solidFill>
-                          <a:latin typeface="Calibri" pitchFamily="34" charset="0"/>
-                          <a:ea typeface="Calibri" pitchFamily="34" charset="-122"/>
-                          <a:cs typeface="Calibri" pitchFamily="34" charset="-120"/>
-                        </a:rPr>
-                        <a:t>Estado de la observación: No superada</a:t>
-                      </a:r>
-                      <a:endParaRPr lang="en-US" sz="700" dirty="0">
-                        <a:latin typeface="Calibri" charset="0"/>
-                        <a:ea typeface="Calibri" charset="0"/>
-                        <a:cs typeface="Calibri" charset="0"/>
-                      </a:endParaRPr>
-                    </a:p>
-                  </a:txBody>
-                  <a:tcPr marL="54864" marR="54864" marT="18288" marB="18288" anchor="ctr">
-                    <a:lnL w="0" cap="flat" cmpd="sng" algn="ctr">
-                      <a:noFill/>
-                    </a:lnL>
-                    <a:lnR w="0" cap="flat" cmpd="sng" algn="ctr">
-                      <a:noFill/>
-                    </a:lnR>
-                    <a:lnT w="0" cap="flat" cmpd="sng" algn="ctr">
-                      <a:noFill/>
-                    </a:lnT>
-                    <a:lnB w="9525" cap="flat" cmpd="sng" algn="ctr">
-                      <a:solidFill>
-                        <a:srgbClr val="D9E0EA"/>
-                      </a:solidFill>
-                      <a:prstDash val="solid"/>
-                      <a:round/>
-                      <a:headEnd type="none" w="med" len="med"/>
-                      <a:tailEnd type="none" w="med" len="med"/>
-                    </a:lnB>
-                    <a:solidFill>
-                      <a:srgbClr val="FBEAE8"/>
-                    </a:solidFill>
-                  </a:tcPr>
-                </a:tc>
-                <a:tc>
-                  <a:txBody>
-                    <a:bodyPr/>
-                    <a:lstStyle/>
-                    <a:p>
-                      <a:pPr algn="just" indent="0" marL="0">
-                        <a:buNone/>
-                      </a:pPr>
-                      <a:r>
-                        <a:rPr lang="en-US" sz="700" dirty="0">
-                          <a:solidFill>
-                            <a:schemeClr val="tx1"/>
-                          </a:solidFill>
-                          <a:latin typeface="Calibri" pitchFamily="34" charset="0"/>
-                          <a:ea typeface="Calibri" pitchFamily="34" charset="-122"/>
-                          <a:cs typeface="Calibri" pitchFamily="34" charset="-120"/>
-                        </a:rPr>
-                        <a:t>Programado actualizar el BIA en noviembre 2026, siendo esa fecha en la que se incorporará lo solicitado.</a:t>
-                      </a:r>
-                      <a:endParaRPr lang="en-US" sz="700" dirty="0">
-                        <a:latin typeface="Calibri" charset="0"/>
-                        <a:ea typeface="Calibri" charset="0"/>
-                        <a:cs typeface="Calibri" charset="0"/>
-                      </a:endParaRPr>
-                    </a:p>
-                  </a:txBody>
-                  <a:tcPr marL="54864" marR="54864" marT="18288" marB="18288" anchor="ctr">
-                    <a:lnL w="0" cap="flat" cmpd="sng" algn="ctr">
-                      <a:noFill/>
-                    </a:lnL>
-                    <a:lnR w="0" cap="flat" cmpd="sng" algn="ctr">
-                      <a:noFill/>
-                    </a:lnR>
-                    <a:lnT w="0" cap="flat" cmpd="sng" algn="ctr">
-                      <a:noFill/>
-                    </a:lnT>
-                    <a:lnB w="9525" cap="flat" cmpd="sng" algn="ctr">
-                      <a:solidFill>
-                        <a:srgbClr val="D9E0EA"/>
-                      </a:solidFill>
-                      <a:prstDash val="solid"/>
-                      <a:round/>
-                      <a:headEnd type="none" w="med" len="med"/>
-                      <a:tailEnd type="none" w="med" len="med"/>
-                    </a:lnB>
-                  </a:tcPr>
-                </a:tc>
-                <a:tc>
-                  <a:txBody>
-                    <a:bodyPr/>
-                    <a:lstStyle/>
-                    <a:p>
-                      <a:pPr algn="l" indent="0" marL="0">
-                        <a:buNone/>
-                      </a:pPr>
-                      <a:r>
-                        <a:rPr lang="en-US" sz="700" b="1" dirty="0">
-                          <a:solidFill>
-                            <a:schemeClr val="accent1"/>
-                          </a:solidFill>
-                          <a:latin typeface="Calibri" pitchFamily="34" charset="0"/>
-                          <a:ea typeface="Calibri" pitchFamily="34" charset="-122"/>
-                          <a:cs typeface="Calibri" pitchFamily="34" charset="-120"/>
-                        </a:rPr>
-                        <a:t>Administración de Riesgos</a:t>
-                      </a:r>
-                      <a:endParaRPr lang="en-US" sz="700" dirty="0">
+                        <a:t>/ Seguridad de la Información</a:t>
+                      </a:r>
+                      <a:endParaRPr lang="en-US" sz="1100" dirty="0">
                         <a:latin typeface="Calibri" charset="0"/>
                         <a:ea typeface="Calibri" charset="0"/>
                         <a:cs typeface="Calibri" charset="0"/>
@@ -7058,6 +4984,2970 @@
             <a:fld id="{F7021451-1387-4CA6-816F-3879F97B5CBC}" type="slidenum">
               <a:rPr b="0" lang="en-US"/>
               <a:t>2</a:t>
+            </a:fld>
+            <a:endParaRPr lang="en-US"/>
+          </a:p>
+        </p:txBody>
+      </p:sp>
+    </p:spTree>
+  </p:cSld>
+  <p:clrMapOvr>
+    <a:masterClrMapping/>
+  </p:clrMapOvr>
+</p:sld>
+</file>
+
+<file path=ppt/slides/slide3.xml><?xml version="1.0" encoding="utf-8"?>
+<p:sld xmlns:a="http://schemas.openxmlformats.org/drawingml/2006/main" xmlns:r="http://schemas.openxmlformats.org/officeDocument/2006/relationships" xmlns:p="http://schemas.openxmlformats.org/presentationml/2006/main">
+  <p:cSld name="Slide 3">
+    <p:spTree>
+      <p:nvGrpSpPr>
+        <p:cNvPr id="1" name=""/>
+        <p:cNvGrpSpPr/>
+        <p:nvPr/>
+      </p:nvGrpSpPr>
+      <p:grpSpPr>
+        <a:xfrm>
+          <a:off x="0" y="0"/>
+          <a:ext cx="0" cy="0"/>
+          <a:chOff x="0" y="0"/>
+          <a:chExt cx="0" cy="0"/>
+        </a:xfrm>
+      </p:grpSpPr>
+      <p:sp>
+        <p:nvSpPr>
+          <p:cNvPr id="2" name="Text 0"/>
+          <p:cNvSpPr/>
+          <p:nvPr>
+            <p:ph idx="100" type="title" hasCustomPrompt="1"/>
+          </p:nvPr>
+        </p:nvSpPr>
+        <p:spPr>
+          <a:xfrm>
+            <a:off x="411480" y="228600"/>
+            <a:ext cx="9174175" cy="411480"/>
+          </a:xfrm>
+          <a:prstGeom prst="rect">
+            <a:avLst/>
+          </a:prstGeom>
+          <a:noFill/>
+          <a:ln/>
+        </p:spPr>
+        <p:txBody>
+          <a:bodyPr wrap="square" lIns="0" tIns="0" rIns="0" bIns="0" rtlCol="0" anchor="t"/>
+          <a:lstStyle/>
+          <a:p>
+            <a:pPr algn="l" indent="0" marL="0">
+              <a:buNone/>
+            </a:pPr>
+            <a:r>
+              <a:rPr lang="en-US" sz="2000" b="1" dirty="0">
+                <a:solidFill>
+                  <a:schemeClr val="tx1"/>
+                </a:solidFill>
+                <a:latin typeface="Cambria" pitchFamily="34" charset="0"/>
+                <a:ea typeface="Cambria" pitchFamily="34" charset="-122"/>
+                <a:cs typeface="Cambria" pitchFamily="34" charset="-120"/>
+              </a:rPr>
+              <a:t>Matriz de requerimientos DS-SABAO-BCS-BC-23486</a:t>
+            </a:r>
+            <a:endParaRPr lang="en-US" sz="2000" dirty="0"/>
+          </a:p>
+        </p:txBody>
+      </p:sp>
+      <p:graphicFrame>
+        <p:nvGraphicFramePr>
+          <p:cNvPr id="4" name="Tabla matriz"/>
+          <p:cNvGraphicFramePr>
+            <a:graphicFrameLocks noGrp="1"/>
+          </p:cNvGraphicFramePr>
+          <p:nvPr>
+            <p:extLst>
+              <p:ext uri="{D42A27DB-BD31-4B8C-83A1-F6EECF244321}">
+                <p14:modId xmlns:p14="http://schemas.microsoft.com/office/powerpoint/2010/main" val="1579011935"/>
+              </p:ext>
+            </p:extLst>
+          </p:nvPr>
+        </p:nvGraphicFramePr>
+        <p:xfrm>
+          <a:off x="411480" y="731520"/>
+          <a:ext cx="11368735" cy="914400"/>
+        </p:xfrm>
+        <a:graphic>
+          <a:graphicData uri="http://schemas.openxmlformats.org/drawingml/2006/table">
+            <a:tbl>
+              <a:tblPr/>
+              <a:tblGrid>
+                <a:gridCol w="4937760"/>
+                <a:gridCol w="4873752"/>
+                <a:gridCol w="1554480"/>
+              </a:tblGrid>
+              <a:tr h="0">
+                <a:tc>
+                  <a:txBody>
+                    <a:bodyPr/>
+                    <a:lstStyle/>
+                    <a:p>
+                      <a:pPr algn="just" indent="0" marL="0">
+                        <a:buNone/>
+                      </a:pPr>
+                      <a:r>
+                        <a:rPr lang="en-US" sz="900" b="1" dirty="0">
+                          <a:solidFill>
+                            <a:schemeClr val="bg1"/>
+                          </a:solidFill>
+                          <a:latin typeface="Calibri" pitchFamily="34" charset="0"/>
+                          <a:ea typeface="Calibri" pitchFamily="34" charset="-122"/>
+                          <a:cs typeface="Calibri" pitchFamily="34" charset="-120"/>
+                        </a:rPr>
+                        <a:t>Observación</a:t>
+                      </a:r>
+                      <a:endParaRPr lang="en-US" sz="900" dirty="0">
+                        <a:latin typeface="Calibri" charset="0"/>
+                        <a:ea typeface="Calibri" charset="0"/>
+                        <a:cs typeface="Calibri" charset="0"/>
+                      </a:endParaRPr>
+                    </a:p>
+                  </a:txBody>
+                  <a:tcPr marL="54864" marR="54864" marT="18288" marB="18288" anchor="ctr">
+                    <a:lnL w="0" cap="flat" cmpd="sng" algn="ctr">
+                      <a:noFill/>
+                    </a:lnL>
+                    <a:lnR w="0" cap="flat" cmpd="sng" algn="ctr">
+                      <a:noFill/>
+                    </a:lnR>
+                    <a:lnT w="0" cap="flat" cmpd="sng" algn="ctr">
+                      <a:noFill/>
+                    </a:lnT>
+                    <a:lnB w="9525" cap="flat" cmpd="sng" algn="ctr">
+                      <a:solidFill>
+                        <a:srgbClr val="D9E0EA"/>
+                      </a:solidFill>
+                      <a:prstDash val="solid"/>
+                      <a:round/>
+                      <a:headEnd type="none" w="med" len="med"/>
+                      <a:tailEnd type="none" w="med" len="med"/>
+                    </a:lnB>
+                    <a:solidFill>
+                      <a:schemeClr val="accent3"/>
+                    </a:solidFill>
+                  </a:tcPr>
+                </a:tc>
+                <a:tc>
+                  <a:txBody>
+                    <a:bodyPr/>
+                    <a:lstStyle/>
+                    <a:p>
+                      <a:pPr algn="just" indent="0" marL="0">
+                        <a:buNone/>
+                      </a:pPr>
+                      <a:r>
+                        <a:rPr lang="en-US" sz="900" b="1" dirty="0">
+                          <a:solidFill>
+                            <a:schemeClr val="bg1"/>
+                          </a:solidFill>
+                          <a:latin typeface="Calibri" pitchFamily="34" charset="0"/>
+                          <a:ea typeface="Calibri" pitchFamily="34" charset="-122"/>
+                          <a:cs typeface="Calibri" pitchFamily="34" charset="-120"/>
+                        </a:rPr>
+                        <a:t>Comentarios</a:t>
+                      </a:r>
+                      <a:endParaRPr lang="en-US" sz="900" dirty="0">
+                        <a:latin typeface="Calibri" charset="0"/>
+                        <a:ea typeface="Calibri" charset="0"/>
+                        <a:cs typeface="Calibri" charset="0"/>
+                      </a:endParaRPr>
+                    </a:p>
+                  </a:txBody>
+                  <a:tcPr marL="54864" marR="54864" marT="18288" marB="18288" anchor="ctr">
+                    <a:lnL w="0" cap="flat" cmpd="sng" algn="ctr">
+                      <a:noFill/>
+                    </a:lnL>
+                    <a:lnR w="0" cap="flat" cmpd="sng" algn="ctr">
+                      <a:noFill/>
+                    </a:lnR>
+                    <a:lnT w="0" cap="flat" cmpd="sng" algn="ctr">
+                      <a:noFill/>
+                    </a:lnT>
+                    <a:lnB w="9525" cap="flat" cmpd="sng" algn="ctr">
+                      <a:solidFill>
+                        <a:srgbClr val="D9E0EA"/>
+                      </a:solidFill>
+                      <a:prstDash val="solid"/>
+                      <a:round/>
+                      <a:headEnd type="none" w="med" len="med"/>
+                      <a:tailEnd type="none" w="med" len="med"/>
+                    </a:lnB>
+                    <a:solidFill>
+                      <a:schemeClr val="accent3"/>
+                    </a:solidFill>
+                  </a:tcPr>
+                </a:tc>
+                <a:tc>
+                  <a:txBody>
+                    <a:bodyPr/>
+                    <a:lstStyle/>
+                    <a:p>
+                      <a:pPr algn="just" indent="0" marL="0">
+                        <a:buNone/>
+                      </a:pPr>
+                      <a:r>
+                        <a:rPr lang="en-US" sz="900" b="1" dirty="0">
+                          <a:solidFill>
+                            <a:schemeClr val="bg1"/>
+                          </a:solidFill>
+                          <a:latin typeface="Calibri" pitchFamily="34" charset="0"/>
+                          <a:ea typeface="Calibri" pitchFamily="34" charset="-122"/>
+                          <a:cs typeface="Calibri" pitchFamily="34" charset="-120"/>
+                        </a:rPr>
+                        <a:t>Funcionario</a:t>
+                      </a:r>
+                      <a:endParaRPr lang="en-US" sz="900" dirty="0">
+                        <a:latin typeface="Calibri" charset="0"/>
+                        <a:ea typeface="Calibri" charset="0"/>
+                        <a:cs typeface="Calibri" charset="0"/>
+                      </a:endParaRPr>
+                    </a:p>
+                    <a:p>
+                      <a:pPr algn="just" indent="0" marL="0">
+                        <a:buNone/>
+                      </a:pPr>
+                      <a:r>
+                        <a:rPr lang="en-US" sz="900" b="1" dirty="0">
+                          <a:solidFill>
+                            <a:schemeClr val="bg1"/>
+                          </a:solidFill>
+                          <a:latin typeface="Calibri" pitchFamily="34" charset="0"/>
+                          <a:ea typeface="Calibri" pitchFamily="34" charset="-122"/>
+                          <a:cs typeface="Calibri" pitchFamily="34" charset="-120"/>
+                        </a:rPr>
+                        <a:t>Responsable</a:t>
+                      </a:r>
+                      <a:endParaRPr lang="en-US" sz="900" dirty="0">
+                        <a:latin typeface="Calibri" charset="0"/>
+                        <a:ea typeface="Calibri" charset="0"/>
+                        <a:cs typeface="Calibri" charset="0"/>
+                      </a:endParaRPr>
+                    </a:p>
+                  </a:txBody>
+                  <a:tcPr marL="54864" marR="54864" marT="18288" marB="18288" anchor="ctr">
+                    <a:lnL w="0" cap="flat" cmpd="sng" algn="ctr">
+                      <a:noFill/>
+                    </a:lnL>
+                    <a:lnR w="0" cap="flat" cmpd="sng" algn="ctr">
+                      <a:noFill/>
+                    </a:lnR>
+                    <a:lnT w="0" cap="flat" cmpd="sng" algn="ctr">
+                      <a:noFill/>
+                    </a:lnT>
+                    <a:lnB w="9525" cap="flat" cmpd="sng" algn="ctr">
+                      <a:solidFill>
+                        <a:srgbClr val="D9E0EA"/>
+                      </a:solidFill>
+                      <a:prstDash val="solid"/>
+                      <a:round/>
+                      <a:headEnd type="none" w="med" len="med"/>
+                      <a:tailEnd type="none" w="med" len="med"/>
+                    </a:lnB>
+                    <a:solidFill>
+                      <a:schemeClr val="accent3"/>
+                    </a:solidFill>
+                  </a:tcPr>
+                </a:tc>
+              </a:tr>
+              <a:tr h="0">
+                <a:tc gridSpan="3">
+                  <a:txBody>
+                    <a:bodyPr/>
+                    <a:lstStyle/>
+                    <a:p>
+                      <a:pPr algn="just" indent="0" marL="0">
+                        <a:buNone/>
+                      </a:pPr>
+                      <a:r>
+                        <a:rPr lang="en-US" sz="950" b="1" dirty="0">
+                          <a:solidFill>
+                            <a:schemeClr val="accent1"/>
+                          </a:solidFill>
+                          <a:latin typeface="Calibri" pitchFamily="34" charset="0"/>
+                          <a:ea typeface="Calibri" pitchFamily="34" charset="-122"/>
+                          <a:cs typeface="Calibri" pitchFamily="34" charset="-120"/>
+                        </a:rPr>
+                        <a:t>Dar seguimiento a observaciones de visitas anteriores con referencia al 31 de mayo de 2026</a:t>
+                      </a:r>
+                      <a:endParaRPr lang="en-US" sz="950" dirty="0">
+                        <a:latin typeface="Calibri" charset="0"/>
+                        <a:ea typeface="Calibri" charset="0"/>
+                        <a:cs typeface="Calibri" charset="0"/>
+                      </a:endParaRPr>
+                    </a:p>
+                    <a:p>
+                      <a:pPr algn="just" indent="0" marL="0">
+                        <a:buNone/>
+                      </a:pPr>
+                      <a:r>
+                        <a:rPr lang="en-US" sz="950" b="1" dirty="0">
+                          <a:solidFill>
+                            <a:schemeClr val="accent1"/>
+                          </a:solidFill>
+                          <a:latin typeface="Calibri" pitchFamily="34" charset="0"/>
+                          <a:ea typeface="Calibri" pitchFamily="34" charset="-122"/>
+                          <a:cs typeface="Calibri" pitchFamily="34" charset="-120"/>
+                        </a:rPr>
+                        <a:t>Evaluación de la gestión de los Riesgos de Crédito, Operacional y Tecnológico, con referencia al 31 de enero de 2025; resultados preliminares comunicados mediante nota No. DS-SABAO-BCS-BC-16572 del 10 de septiembre de 2025.</a:t>
+                      </a:r>
+                      <a:endParaRPr lang="en-US" sz="950" dirty="0">
+                        <a:latin typeface="Calibri" charset="0"/>
+                        <a:ea typeface="Calibri" charset="0"/>
+                        <a:cs typeface="Calibri" charset="0"/>
+                      </a:endParaRPr>
+                    </a:p>
+                    <a:p>
+                      <a:pPr algn="just" indent="0" marL="0">
+                        <a:buNone/>
+                      </a:pPr>
+                      <a:r>
+                        <a:rPr lang="en-US" sz="950" b="1" dirty="0">
+                          <a:solidFill>
+                            <a:schemeClr val="accent1"/>
+                          </a:solidFill>
+                          <a:latin typeface="Calibri" pitchFamily="34" charset="0"/>
+                          <a:ea typeface="Calibri" pitchFamily="34" charset="-122"/>
+                          <a:cs typeface="Calibri" pitchFamily="34" charset="-120"/>
+                        </a:rPr>
+                        <a:t>C.1.1. Gestión del Riesgo de Crédito.</a:t>
+                      </a:r>
+                      <a:endParaRPr lang="en-US" sz="950" dirty="0">
+                        <a:latin typeface="Calibri" charset="0"/>
+                        <a:ea typeface="Calibri" charset="0"/>
+                        <a:cs typeface="Calibri" charset="0"/>
+                      </a:endParaRPr>
+                    </a:p>
+                  </a:txBody>
+                  <a:tcPr marL="54864" marR="54864" marT="18288" marB="18288" anchor="ctr">
+                    <a:lnL w="0" cap="flat" cmpd="sng" algn="ctr">
+                      <a:noFill/>
+                    </a:lnL>
+                    <a:lnR w="0" cap="flat" cmpd="sng" algn="ctr">
+                      <a:noFill/>
+                    </a:lnR>
+                    <a:lnT w="0" cap="flat" cmpd="sng" algn="ctr">
+                      <a:noFill/>
+                    </a:lnT>
+                    <a:lnB w="9525" cap="flat" cmpd="sng" algn="ctr">
+                      <a:solidFill>
+                        <a:srgbClr val="D9E0EA"/>
+                      </a:solidFill>
+                      <a:prstDash val="solid"/>
+                      <a:round/>
+                      <a:headEnd type="none" w="med" len="med"/>
+                      <a:tailEnd type="none" w="med" len="med"/>
+                    </a:lnB>
+                    <a:solidFill>
+                      <a:schemeClr val="bg2"/>
+                    </a:solidFill>
+                  </a:tcPr>
+                </a:tc>
+                <a:tc hMerge="1">
+                  <a:tcPr/>
+                </a:tc>
+                <a:tc hMerge="1">
+                  <a:tcPr/>
+                </a:tc>
+              </a:tr>
+              <a:tr h="0">
+                <a:tc>
+                  <a:txBody>
+                    <a:bodyPr/>
+                    <a:lstStyle/>
+                    <a:p>
+                      <a:pPr algn="just" indent="0" marL="0">
+                        <a:buNone/>
+                      </a:pPr>
+                      <a:r>
+                        <a:rPr lang="en-US" sz="950" b="1" dirty="0">
+                          <a:solidFill>
+                            <a:schemeClr val="tx1"/>
+                          </a:solidFill>
+                          <a:latin typeface="Calibri" pitchFamily="34" charset="0"/>
+                          <a:ea typeface="Calibri" pitchFamily="34" charset="-122"/>
+                          <a:cs typeface="Calibri" pitchFamily="34" charset="-120"/>
+                        </a:rPr>
+                        <a:t>Observación 2: Falta de eficacia en la subsanación de observaciones determinadas por el Departamento de Auditoría Interna.</a:t>
+                      </a:r>
+                      <a:endParaRPr lang="en-US" sz="950" dirty="0">
+                        <a:latin typeface="Calibri" charset="0"/>
+                        <a:ea typeface="Calibri" charset="0"/>
+                        <a:cs typeface="Calibri" charset="0"/>
+                      </a:endParaRPr>
+                    </a:p>
+                    <a:p>
+                      <a:pPr algn="just" indent="0" marL="0">
+                        <a:buNone/>
+                      </a:pPr>
+                      <a:r>
+                        <a:rPr lang="en-US" sz="950" dirty="0">
+                          <a:solidFill>
+                            <a:schemeClr val="tx1"/>
+                          </a:solidFill>
+                          <a:latin typeface="Calibri" pitchFamily="34" charset="0"/>
+                          <a:ea typeface="Calibri" pitchFamily="34" charset="-122"/>
+                          <a:cs typeface="Calibri" pitchFamily="34" charset="-120"/>
+                        </a:rPr>
+                        <a:t>Seguimiento realizado en la presente visita de supervisión:</a:t>
+                      </a:r>
+                      <a:endParaRPr lang="en-US" sz="950" dirty="0">
+                        <a:latin typeface="Calibri" charset="0"/>
+                        <a:ea typeface="Calibri" charset="0"/>
+                        <a:cs typeface="Calibri" charset="0"/>
+                      </a:endParaRPr>
+                    </a:p>
+                    <a:p>
+                      <a:pPr algn="just" indent="0" marL="0">
+                        <a:buNone/>
+                      </a:pPr>
+                      <a:r>
+                        <a:rPr lang="en-US" sz="950" dirty="0">
+                          <a:solidFill>
+                            <a:schemeClr val="tx1"/>
+                          </a:solidFill>
+                          <a:latin typeface="Calibri" pitchFamily="34" charset="0"/>
+                          <a:ea typeface="Calibri" pitchFamily="34" charset="-122"/>
+                          <a:cs typeface="Calibri" pitchFamily="34" charset="-120"/>
+                        </a:rPr>
+                        <a:t>Comentarios COMEDICA: en el Plan de Auditoría interna 2026 se incluyó seguimientos trimestrales como actividad 44 para solventar la observación.</a:t>
+                      </a:r>
+                      <a:endParaRPr lang="en-US" sz="950" dirty="0">
+                        <a:latin typeface="Calibri" charset="0"/>
+                        <a:ea typeface="Calibri" charset="0"/>
+                        <a:cs typeface="Calibri" charset="0"/>
+                      </a:endParaRPr>
+                    </a:p>
+                    <a:p>
+                      <a:pPr algn="just" indent="0" marL="0">
+                        <a:buNone/>
+                      </a:pPr>
+                      <a:r>
+                        <a:rPr lang="en-US" sz="950" dirty="0">
+                          <a:solidFill>
+                            <a:schemeClr val="accent6"/>
+                          </a:solidFill>
+                          <a:latin typeface="Calibri" pitchFamily="34" charset="0"/>
+                          <a:ea typeface="Calibri" pitchFamily="34" charset="-122"/>
+                          <a:cs typeface="Calibri" pitchFamily="34" charset="-120"/>
+                        </a:rPr>
+                        <a:t>Estado: parcialmente superada</a:t>
+                      </a:r>
+                      <a:endParaRPr lang="en-US" sz="950" dirty="0">
+                        <a:latin typeface="Calibri" charset="0"/>
+                        <a:ea typeface="Calibri" charset="0"/>
+                        <a:cs typeface="Calibri" charset="0"/>
+                      </a:endParaRPr>
+                    </a:p>
+                  </a:txBody>
+                  <a:tcPr marL="54864" marR="54864" marT="18288" marB="18288" anchor="ctr">
+                    <a:lnL w="0" cap="flat" cmpd="sng" algn="ctr">
+                      <a:noFill/>
+                    </a:lnL>
+                    <a:lnR w="0" cap="flat" cmpd="sng" algn="ctr">
+                      <a:noFill/>
+                    </a:lnR>
+                    <a:lnT w="0" cap="flat" cmpd="sng" algn="ctr">
+                      <a:noFill/>
+                    </a:lnT>
+                    <a:lnB w="9525" cap="flat" cmpd="sng" algn="ctr">
+                      <a:solidFill>
+                        <a:srgbClr val="D9E0EA"/>
+                      </a:solidFill>
+                      <a:prstDash val="solid"/>
+                      <a:round/>
+                      <a:headEnd type="none" w="med" len="med"/>
+                      <a:tailEnd type="none" w="med" len="med"/>
+                    </a:lnB>
+                    <a:solidFill>
+                      <a:srgbClr val="FDF4E3"/>
+                    </a:solidFill>
+                  </a:tcPr>
+                </a:tc>
+                <a:tc>
+                  <a:txBody>
+                    <a:bodyPr/>
+                    <a:lstStyle/>
+                    <a:p>
+                      <a:pPr algn="just" indent="0" marL="0">
+                        <a:buNone/>
+                      </a:pPr>
+                      <a:r>
+                        <a:rPr lang="en-US" sz="950" dirty="0">
+                          <a:solidFill>
+                            <a:schemeClr val="tx1"/>
+                          </a:solidFill>
+                          <a:latin typeface="Calibri" pitchFamily="34" charset="0"/>
+                          <a:ea typeface="Calibri" pitchFamily="34" charset="-122"/>
+                          <a:cs typeface="Calibri" pitchFamily="34" charset="-120"/>
+                        </a:rPr>
+                        <a:t>AI 28 2024 y AI 45 2024 Otorgamiento de Préstamos.</a:t>
+                      </a:r>
+                      <a:endParaRPr lang="en-US" sz="950" dirty="0">
+                        <a:latin typeface="Calibri" charset="0"/>
+                        <a:ea typeface="Calibri" charset="0"/>
+                        <a:cs typeface="Calibri" charset="0"/>
+                      </a:endParaRPr>
+                    </a:p>
+                    <a:p>
+                      <a:pPr algn="just" indent="0" marL="0">
+                        <a:buNone/>
+                      </a:pPr>
+                      <a:r>
+                        <a:rPr lang="en-US" sz="950" dirty="0">
+                          <a:solidFill>
+                            <a:schemeClr val="tx1"/>
+                          </a:solidFill>
+                          <a:latin typeface="Calibri" pitchFamily="34" charset="0"/>
+                          <a:ea typeface="Calibri" pitchFamily="34" charset="-122"/>
+                          <a:cs typeface="Calibri" pitchFamily="34" charset="-120"/>
+                        </a:rPr>
+                        <a:t>Se realizó el seguimiento correspondiente a los informes AI 44-2025, AI 64-2025 y AI 20-2026. Como resultado, las observaciones quedaron solventadas. (Se anexan los informes).</a:t>
+                      </a:r>
+                      <a:endParaRPr lang="en-US" sz="950" dirty="0">
+                        <a:latin typeface="Calibri" charset="0"/>
+                        <a:ea typeface="Calibri" charset="0"/>
+                        <a:cs typeface="Calibri" charset="0"/>
+                      </a:endParaRPr>
+                    </a:p>
+                    <a:p>
+                      <a:pPr algn="just" indent="0" marL="0">
+                        <a:buNone/>
+                      </a:pPr>
+                      <a:r>
+                        <a:rPr lang="en-US" sz="950" dirty="0">
+                          <a:solidFill>
+                            <a:schemeClr val="tx1"/>
+                          </a:solidFill>
+                          <a:latin typeface="Calibri" pitchFamily="34" charset="0"/>
+                          <a:ea typeface="Calibri" pitchFamily="34" charset="-122"/>
+                          <a:cs typeface="Calibri" pitchFamily="34" charset="-120"/>
+                        </a:rPr>
+                        <a:t>AI 21 2024 y AI 26 2024 Otorgamiento de Tarjeta de Crédito.</a:t>
+                      </a:r>
+                      <a:endParaRPr lang="en-US" sz="950" dirty="0">
+                        <a:latin typeface="Calibri" charset="0"/>
+                        <a:ea typeface="Calibri" charset="0"/>
+                        <a:cs typeface="Calibri" charset="0"/>
+                      </a:endParaRPr>
+                    </a:p>
+                    <a:p>
+                      <a:pPr algn="just" indent="0" marL="0">
+                        <a:buNone/>
+                      </a:pPr>
+                      <a:r>
+                        <a:rPr lang="en-US" sz="950" dirty="0">
+                          <a:solidFill>
+                            <a:schemeClr val="tx1"/>
+                          </a:solidFill>
+                          <a:latin typeface="Calibri" pitchFamily="34" charset="0"/>
+                          <a:ea typeface="Calibri" pitchFamily="34" charset="-122"/>
+                          <a:cs typeface="Calibri" pitchFamily="34" charset="-120"/>
+                        </a:rPr>
+                        <a:t>Se realizó el seguimiento correspondiente en los informes AI 14 2025 y AI 69 2025. Como resultado, las observaciones quedaron solventadas. (Se anexan los informes).</a:t>
+                      </a:r>
+                      <a:endParaRPr lang="en-US" sz="950" dirty="0">
+                        <a:latin typeface="Calibri" charset="0"/>
+                        <a:ea typeface="Calibri" charset="0"/>
+                        <a:cs typeface="Calibri" charset="0"/>
+                      </a:endParaRPr>
+                    </a:p>
+                    <a:p>
+                      <a:pPr algn="just" indent="0" marL="0">
+                        <a:buNone/>
+                      </a:pPr>
+                      <a:r>
+                        <a:rPr lang="en-US" sz="950" dirty="0">
+                          <a:solidFill>
+                            <a:schemeClr val="tx1"/>
+                          </a:solidFill>
+                          <a:latin typeface="Calibri" pitchFamily="34" charset="0"/>
+                          <a:ea typeface="Calibri" pitchFamily="34" charset="-122"/>
+                          <a:cs typeface="Calibri" pitchFamily="34" charset="-120"/>
+                        </a:rPr>
+                        <a:t>Informes AI 32 2024; AI 37 2024 y AI 52 2024.</a:t>
+                      </a:r>
+                      <a:endParaRPr lang="en-US" sz="950" dirty="0">
+                        <a:latin typeface="Calibri" charset="0"/>
+                        <a:ea typeface="Calibri" charset="0"/>
+                        <a:cs typeface="Calibri" charset="0"/>
+                      </a:endParaRPr>
+                    </a:p>
+                    <a:p>
+                      <a:pPr algn="just" indent="0" marL="0">
+                        <a:buNone/>
+                      </a:pPr>
+                      <a:r>
+                        <a:rPr lang="en-US" sz="950" dirty="0">
+                          <a:solidFill>
+                            <a:schemeClr val="tx1"/>
+                          </a:solidFill>
+                          <a:latin typeface="Calibri" pitchFamily="34" charset="0"/>
+                          <a:ea typeface="Calibri" pitchFamily="34" charset="-122"/>
+                          <a:cs typeface="Calibri" pitchFamily="34" charset="-120"/>
+                        </a:rPr>
+                        <a:t>Se continuará con el seguimiento, solicitando nuevamente planes de acción con fechas plazo, a cada unidad responsable.</a:t>
+                      </a:r>
+                      <a:endParaRPr lang="en-US" sz="950" dirty="0">
+                        <a:latin typeface="Calibri" charset="0"/>
+                        <a:ea typeface="Calibri" charset="0"/>
+                        <a:cs typeface="Calibri" charset="0"/>
+                      </a:endParaRPr>
+                    </a:p>
+                    <a:p>
+                      <a:pPr algn="just" indent="0" marL="0">
+                        <a:buNone/>
+                      </a:pPr>
+                      <a:r>
+                        <a:rPr lang="en-US" sz="950" dirty="0">
+                          <a:solidFill>
+                            <a:schemeClr val="tx1"/>
+                          </a:solidFill>
+                          <a:latin typeface="Calibri" pitchFamily="34" charset="0"/>
+                          <a:ea typeface="Calibri" pitchFamily="34" charset="-122"/>
+                          <a:cs typeface="Calibri" pitchFamily="34" charset="-120"/>
+                        </a:rPr>
+                        <a:t>Plazo: 30/11/2026</a:t>
+                      </a:r>
+                      <a:endParaRPr lang="en-US" sz="950" dirty="0">
+                        <a:latin typeface="Calibri" charset="0"/>
+                        <a:ea typeface="Calibri" charset="0"/>
+                        <a:cs typeface="Calibri" charset="0"/>
+                      </a:endParaRPr>
+                    </a:p>
+                  </a:txBody>
+                  <a:tcPr marL="54864" marR="54864" marT="18288" marB="18288" anchor="ctr">
+                    <a:lnL w="0" cap="flat" cmpd="sng" algn="ctr">
+                      <a:noFill/>
+                    </a:lnL>
+                    <a:lnR w="0" cap="flat" cmpd="sng" algn="ctr">
+                      <a:noFill/>
+                    </a:lnR>
+                    <a:lnT w="0" cap="flat" cmpd="sng" algn="ctr">
+                      <a:noFill/>
+                    </a:lnT>
+                    <a:lnB w="9525" cap="flat" cmpd="sng" algn="ctr">
+                      <a:solidFill>
+                        <a:srgbClr val="D9E0EA"/>
+                      </a:solidFill>
+                      <a:prstDash val="solid"/>
+                      <a:round/>
+                      <a:headEnd type="none" w="med" len="med"/>
+                      <a:tailEnd type="none" w="med" len="med"/>
+                    </a:lnB>
+                  </a:tcPr>
+                </a:tc>
+                <a:tc>
+                  <a:txBody>
+                    <a:bodyPr/>
+                    <a:lstStyle/>
+                    <a:p>
+                      <a:pPr algn="l" indent="0" marL="0">
+                        <a:buNone/>
+                      </a:pPr>
+                      <a:r>
+                        <a:rPr lang="en-US" sz="950" b="1" dirty="0">
+                          <a:solidFill>
+                            <a:schemeClr val="accent1"/>
+                          </a:solidFill>
+                          <a:latin typeface="Calibri" pitchFamily="34" charset="0"/>
+                          <a:ea typeface="Calibri" pitchFamily="34" charset="-122"/>
+                          <a:cs typeface="Calibri" pitchFamily="34" charset="-120"/>
+                        </a:rPr>
+                        <a:t>Auditoría interna</a:t>
+                      </a:r>
+                      <a:endParaRPr lang="en-US" sz="950" dirty="0">
+                        <a:latin typeface="Calibri" charset="0"/>
+                        <a:ea typeface="Calibri" charset="0"/>
+                        <a:cs typeface="Calibri" charset="0"/>
+                      </a:endParaRPr>
+                    </a:p>
+                  </a:txBody>
+                  <a:tcPr marL="54864" marR="54864" marT="18288" marB="18288" anchor="ctr">
+                    <a:lnL w="0" cap="flat" cmpd="sng" algn="ctr">
+                      <a:noFill/>
+                    </a:lnL>
+                    <a:lnR w="0" cap="flat" cmpd="sng" algn="ctr">
+                      <a:noFill/>
+                    </a:lnR>
+                    <a:lnT w="0" cap="flat" cmpd="sng" algn="ctr">
+                      <a:noFill/>
+                    </a:lnT>
+                    <a:lnB w="9525" cap="flat" cmpd="sng" algn="ctr">
+                      <a:solidFill>
+                        <a:srgbClr val="D9E0EA"/>
+                      </a:solidFill>
+                      <a:prstDash val="solid"/>
+                      <a:round/>
+                      <a:headEnd type="none" w="med" len="med"/>
+                      <a:tailEnd type="none" w="med" len="med"/>
+                    </a:lnB>
+                  </a:tcPr>
+                </a:tc>
+              </a:tr>
+              <a:tr h="0">
+                <a:tc>
+                  <a:txBody>
+                    <a:bodyPr/>
+                    <a:lstStyle/>
+                    <a:p>
+                      <a:pPr algn="just" indent="0" marL="0">
+                        <a:buNone/>
+                      </a:pPr>
+                      <a:r>
+                        <a:rPr lang="en-US" sz="950" b="1" dirty="0">
+                          <a:solidFill>
+                            <a:schemeClr val="tx1"/>
+                          </a:solidFill>
+                          <a:latin typeface="Calibri" pitchFamily="34" charset="0"/>
+                          <a:ea typeface="Calibri" pitchFamily="34" charset="-122"/>
+                          <a:cs typeface="Calibri" pitchFamily="34" charset="-120"/>
+                        </a:rPr>
+                        <a:t>Observación 3: Seguimiento inoportuno de las observaciones por parte de Auditoría Interna.</a:t>
+                      </a:r>
+                      <a:endParaRPr lang="en-US" sz="950" dirty="0">
+                        <a:latin typeface="Calibri" charset="0"/>
+                        <a:ea typeface="Calibri" charset="0"/>
+                        <a:cs typeface="Calibri" charset="0"/>
+                      </a:endParaRPr>
+                    </a:p>
+                    <a:p>
+                      <a:pPr algn="just" indent="0" marL="0">
+                        <a:buNone/>
+                      </a:pPr>
+                      <a:r>
+                        <a:rPr lang="en-US" sz="950" dirty="0">
+                          <a:solidFill>
+                            <a:schemeClr val="tx1"/>
+                          </a:solidFill>
+                          <a:latin typeface="Calibri" pitchFamily="34" charset="0"/>
+                          <a:ea typeface="Calibri" pitchFamily="34" charset="-122"/>
+                          <a:cs typeface="Calibri" pitchFamily="34" charset="-120"/>
+                        </a:rPr>
+                        <a:t>Seguimiento realizado en la presente visita de supervisión:</a:t>
+                      </a:r>
+                      <a:endParaRPr lang="en-US" sz="950" dirty="0">
+                        <a:latin typeface="Calibri" charset="0"/>
+                        <a:ea typeface="Calibri" charset="0"/>
+                        <a:cs typeface="Calibri" charset="0"/>
+                      </a:endParaRPr>
+                    </a:p>
+                    <a:p>
+                      <a:pPr algn="just" indent="0" marL="0">
+                        <a:buNone/>
+                      </a:pPr>
+                      <a:r>
+                        <a:rPr lang="en-US" sz="950" dirty="0">
+                          <a:solidFill>
+                            <a:schemeClr val="tx1"/>
+                          </a:solidFill>
+                          <a:latin typeface="Calibri" pitchFamily="34" charset="0"/>
+                          <a:ea typeface="Calibri" pitchFamily="34" charset="-122"/>
+                          <a:cs typeface="Calibri" pitchFamily="34" charset="-120"/>
+                        </a:rPr>
+                        <a:t>Comentarios COMEDICA de R.L.: En el Plan de Auditoría Interna 2026 se incluyó seguimientos trimestrales como actividad 44 para solventar la observación.</a:t>
+                      </a:r>
+                      <a:endParaRPr lang="en-US" sz="950" dirty="0">
+                        <a:latin typeface="Calibri" charset="0"/>
+                        <a:ea typeface="Calibri" charset="0"/>
+                        <a:cs typeface="Calibri" charset="0"/>
+                      </a:endParaRPr>
+                    </a:p>
+                    <a:p>
+                      <a:pPr algn="just" indent="0" marL="0">
+                        <a:buNone/>
+                      </a:pPr>
+                      <a:r>
+                        <a:rPr lang="en-US" sz="950" dirty="0">
+                          <a:solidFill>
+                            <a:schemeClr val="accent3"/>
+                          </a:solidFill>
+                          <a:latin typeface="Calibri" pitchFamily="34" charset="0"/>
+                          <a:ea typeface="Calibri" pitchFamily="34" charset="-122"/>
+                          <a:cs typeface="Calibri" pitchFamily="34" charset="-120"/>
+                        </a:rPr>
+                        <a:t>Estado: No superada.</a:t>
+                      </a:r>
+                      <a:endParaRPr lang="en-US" sz="950" dirty="0">
+                        <a:latin typeface="Calibri" charset="0"/>
+                        <a:ea typeface="Calibri" charset="0"/>
+                        <a:cs typeface="Calibri" charset="0"/>
+                      </a:endParaRPr>
+                    </a:p>
+                  </a:txBody>
+                  <a:tcPr marL="54864" marR="54864" marT="18288" marB="18288" anchor="ctr">
+                    <a:lnL w="0" cap="flat" cmpd="sng" algn="ctr">
+                      <a:noFill/>
+                    </a:lnL>
+                    <a:lnR w="0" cap="flat" cmpd="sng" algn="ctr">
+                      <a:noFill/>
+                    </a:lnR>
+                    <a:lnT w="0" cap="flat" cmpd="sng" algn="ctr">
+                      <a:noFill/>
+                    </a:lnT>
+                    <a:lnB w="9525" cap="flat" cmpd="sng" algn="ctr">
+                      <a:solidFill>
+                        <a:srgbClr val="D9E0EA"/>
+                      </a:solidFill>
+                      <a:prstDash val="solid"/>
+                      <a:round/>
+                      <a:headEnd type="none" w="med" len="med"/>
+                      <a:tailEnd type="none" w="med" len="med"/>
+                    </a:lnB>
+                    <a:solidFill>
+                      <a:srgbClr val="FBEAE8"/>
+                    </a:solidFill>
+                  </a:tcPr>
+                </a:tc>
+                <a:tc>
+                  <a:txBody>
+                    <a:bodyPr/>
+                    <a:lstStyle/>
+                    <a:p>
+                      <a:pPr algn="just" indent="0" marL="0">
+                        <a:buNone/>
+                      </a:pPr>
+                      <a:r>
+                        <a:rPr lang="en-US" sz="950" dirty="0">
+                          <a:solidFill>
+                            <a:schemeClr val="tx1"/>
+                          </a:solidFill>
+                          <a:latin typeface="Calibri" pitchFamily="34" charset="0"/>
+                          <a:ea typeface="Calibri" pitchFamily="34" charset="-122"/>
+                          <a:cs typeface="Calibri" pitchFamily="34" charset="-120"/>
+                        </a:rPr>
+                        <a:t>Para dar seguimiento a los informes se ha elaborado una matriz con las observaciones de todos los informes, la matriz es actualizada trimestralmente.</a:t>
+                      </a:r>
+                      <a:endParaRPr lang="en-US" sz="950" dirty="0">
+                        <a:latin typeface="Calibri" charset="0"/>
+                        <a:ea typeface="Calibri" charset="0"/>
+                        <a:cs typeface="Calibri" charset="0"/>
+                      </a:endParaRPr>
+                    </a:p>
+                    <a:p>
+                      <a:pPr algn="just" indent="0" marL="0">
+                        <a:buNone/>
+                      </a:pPr>
+                      <a:r>
+                        <a:rPr lang="en-US" sz="950" dirty="0">
+                          <a:solidFill>
+                            <a:schemeClr val="tx1"/>
+                          </a:solidFill>
+                          <a:latin typeface="Calibri" pitchFamily="34" charset="0"/>
+                          <a:ea typeface="Calibri" pitchFamily="34" charset="-122"/>
+                          <a:cs typeface="Calibri" pitchFamily="34" charset="-120"/>
+                        </a:rPr>
+                        <a:t>Se anexa la matriz de seguimiento de informes.</a:t>
+                      </a:r>
+                      <a:endParaRPr lang="en-US" sz="950" dirty="0">
+                        <a:latin typeface="Calibri" charset="0"/>
+                        <a:ea typeface="Calibri" charset="0"/>
+                        <a:cs typeface="Calibri" charset="0"/>
+                      </a:endParaRPr>
+                    </a:p>
+                  </a:txBody>
+                  <a:tcPr marL="54864" marR="54864" marT="18288" marB="18288" anchor="ctr">
+                    <a:lnL w="0" cap="flat" cmpd="sng" algn="ctr">
+                      <a:noFill/>
+                    </a:lnL>
+                    <a:lnR w="0" cap="flat" cmpd="sng" algn="ctr">
+                      <a:noFill/>
+                    </a:lnR>
+                    <a:lnT w="0" cap="flat" cmpd="sng" algn="ctr">
+                      <a:noFill/>
+                    </a:lnT>
+                    <a:lnB w="9525" cap="flat" cmpd="sng" algn="ctr">
+                      <a:solidFill>
+                        <a:srgbClr val="D9E0EA"/>
+                      </a:solidFill>
+                      <a:prstDash val="solid"/>
+                      <a:round/>
+                      <a:headEnd type="none" w="med" len="med"/>
+                      <a:tailEnd type="none" w="med" len="med"/>
+                    </a:lnB>
+                  </a:tcPr>
+                </a:tc>
+                <a:tc>
+                  <a:txBody>
+                    <a:bodyPr/>
+                    <a:lstStyle/>
+                    <a:p>
+                      <a:pPr algn="l" indent="0" marL="0">
+                        <a:buNone/>
+                      </a:pPr>
+                      <a:r>
+                        <a:rPr lang="en-US" sz="950" b="1" dirty="0">
+                          <a:solidFill>
+                            <a:schemeClr val="accent1"/>
+                          </a:solidFill>
+                          <a:latin typeface="Calibri" pitchFamily="34" charset="0"/>
+                          <a:ea typeface="Calibri" pitchFamily="34" charset="-122"/>
+                          <a:cs typeface="Calibri" pitchFamily="34" charset="-120"/>
+                        </a:rPr>
+                        <a:t>Auditoría interna</a:t>
+                      </a:r>
+                      <a:endParaRPr lang="en-US" sz="950" dirty="0">
+                        <a:latin typeface="Calibri" charset="0"/>
+                        <a:ea typeface="Calibri" charset="0"/>
+                        <a:cs typeface="Calibri" charset="0"/>
+                      </a:endParaRPr>
+                    </a:p>
+                  </a:txBody>
+                  <a:tcPr marL="54864" marR="54864" marT="18288" marB="18288" anchor="ctr">
+                    <a:lnL w="0" cap="flat" cmpd="sng" algn="ctr">
+                      <a:noFill/>
+                    </a:lnL>
+                    <a:lnR w="0" cap="flat" cmpd="sng" algn="ctr">
+                      <a:noFill/>
+                    </a:lnR>
+                    <a:lnT w="0" cap="flat" cmpd="sng" algn="ctr">
+                      <a:noFill/>
+                    </a:lnT>
+                    <a:lnB w="9525" cap="flat" cmpd="sng" algn="ctr">
+                      <a:solidFill>
+                        <a:srgbClr val="D9E0EA"/>
+                      </a:solidFill>
+                      <a:prstDash val="solid"/>
+                      <a:round/>
+                      <a:headEnd type="none" w="med" len="med"/>
+                      <a:tailEnd type="none" w="med" len="med"/>
+                    </a:lnB>
+                  </a:tcPr>
+                </a:tc>
+              </a:tr>
+              <a:tr h="0">
+                <a:tc gridSpan="3">
+                  <a:txBody>
+                    <a:bodyPr/>
+                    <a:lstStyle/>
+                    <a:p>
+                      <a:pPr algn="just" indent="0" marL="0">
+                        <a:buNone/>
+                      </a:pPr>
+                      <a:r>
+                        <a:rPr lang="en-US" sz="950" b="1" dirty="0">
+                          <a:solidFill>
+                            <a:schemeClr val="accent1"/>
+                          </a:solidFill>
+                          <a:latin typeface="Calibri" pitchFamily="34" charset="0"/>
+                          <a:ea typeface="Calibri" pitchFamily="34" charset="-122"/>
+                          <a:cs typeface="Calibri" pitchFamily="34" charset="-120"/>
+                        </a:rPr>
+                        <a:t>C.1.2. Gestión de Riesgo Operacional y Tecnológico</a:t>
+                      </a:r>
+                      <a:endParaRPr lang="en-US" sz="950" dirty="0">
+                        <a:latin typeface="Calibri" charset="0"/>
+                        <a:ea typeface="Calibri" charset="0"/>
+                        <a:cs typeface="Calibri" charset="0"/>
+                      </a:endParaRPr>
+                    </a:p>
+                  </a:txBody>
+                  <a:tcPr marL="54864" marR="54864" marT="18288" marB="18288" anchor="ctr">
+                    <a:lnL w="0" cap="flat" cmpd="sng" algn="ctr">
+                      <a:noFill/>
+                    </a:lnL>
+                    <a:lnR w="0" cap="flat" cmpd="sng" algn="ctr">
+                      <a:noFill/>
+                    </a:lnR>
+                    <a:lnT w="0" cap="flat" cmpd="sng" algn="ctr">
+                      <a:noFill/>
+                    </a:lnT>
+                    <a:lnB w="9525" cap="flat" cmpd="sng" algn="ctr">
+                      <a:solidFill>
+                        <a:srgbClr val="D9E0EA"/>
+                      </a:solidFill>
+                      <a:prstDash val="solid"/>
+                      <a:round/>
+                      <a:headEnd type="none" w="med" len="med"/>
+                      <a:tailEnd type="none" w="med" len="med"/>
+                    </a:lnB>
+                    <a:solidFill>
+                      <a:schemeClr val="bg2"/>
+                    </a:solidFill>
+                  </a:tcPr>
+                </a:tc>
+                <a:tc hMerge="1">
+                  <a:tcPr/>
+                </a:tc>
+                <a:tc hMerge="1">
+                  <a:tcPr/>
+                </a:tc>
+              </a:tr>
+              <a:tr h="0">
+                <a:tc>
+                  <a:txBody>
+                    <a:bodyPr/>
+                    <a:lstStyle/>
+                    <a:p>
+                      <a:pPr algn="just" indent="0" marL="0">
+                        <a:buNone/>
+                      </a:pPr>
+                      <a:r>
+                        <a:rPr lang="en-US" sz="950" b="1" dirty="0">
+                          <a:solidFill>
+                            <a:schemeClr val="tx1"/>
+                          </a:solidFill>
+                          <a:latin typeface="Calibri" pitchFamily="34" charset="0"/>
+                          <a:ea typeface="Calibri" pitchFamily="34" charset="-122"/>
+                          <a:cs typeface="Calibri" pitchFamily="34" charset="-120"/>
+                        </a:rPr>
+                        <a:t>Observación 2: Seguimiento a informes de observaciones del Comité de Auditoría y de Auditoría Interna durante el período 2023.</a:t>
+                      </a:r>
+                      <a:endParaRPr lang="en-US" sz="950" dirty="0">
+                        <a:latin typeface="Calibri" charset="0"/>
+                        <a:ea typeface="Calibri" charset="0"/>
+                        <a:cs typeface="Calibri" charset="0"/>
+                      </a:endParaRPr>
+                    </a:p>
+                    <a:p>
+                      <a:pPr algn="just" indent="0" marL="0">
+                        <a:buNone/>
+                      </a:pPr>
+                      <a:r>
+                        <a:rPr lang="en-US" sz="950" dirty="0">
+                          <a:solidFill>
+                            <a:schemeClr val="accent6"/>
+                          </a:solidFill>
+                          <a:latin typeface="Calibri" pitchFamily="34" charset="0"/>
+                          <a:ea typeface="Calibri" pitchFamily="34" charset="-122"/>
+                          <a:cs typeface="Calibri" pitchFamily="34" charset="-120"/>
+                        </a:rPr>
+                        <a:t>Estado de la observación : Parciamente superada</a:t>
+                      </a:r>
+                      <a:endParaRPr lang="en-US" sz="950" dirty="0">
+                        <a:latin typeface="Calibri" charset="0"/>
+                        <a:ea typeface="Calibri" charset="0"/>
+                        <a:cs typeface="Calibri" charset="0"/>
+                      </a:endParaRPr>
+                    </a:p>
+                  </a:txBody>
+                  <a:tcPr marL="54864" marR="54864" marT="18288" marB="18288" anchor="ctr">
+                    <a:lnL w="0" cap="flat" cmpd="sng" algn="ctr">
+                      <a:noFill/>
+                    </a:lnL>
+                    <a:lnR w="0" cap="flat" cmpd="sng" algn="ctr">
+                      <a:noFill/>
+                    </a:lnR>
+                    <a:lnT w="0" cap="flat" cmpd="sng" algn="ctr">
+                      <a:noFill/>
+                    </a:lnT>
+                    <a:lnB w="9525" cap="flat" cmpd="sng" algn="ctr">
+                      <a:solidFill>
+                        <a:srgbClr val="D9E0EA"/>
+                      </a:solidFill>
+                      <a:prstDash val="solid"/>
+                      <a:round/>
+                      <a:headEnd type="none" w="med" len="med"/>
+                      <a:tailEnd type="none" w="med" len="med"/>
+                    </a:lnB>
+                    <a:solidFill>
+                      <a:srgbClr val="FDF4E3"/>
+                    </a:solidFill>
+                  </a:tcPr>
+                </a:tc>
+                <a:tc>
+                  <a:txBody>
+                    <a:bodyPr/>
+                    <a:lstStyle/>
+                    <a:p>
+                      <a:pPr algn="just" indent="0" marL="0">
+                        <a:buNone/>
+                      </a:pPr>
+                      <a:r>
+                        <a:rPr lang="en-US" sz="950" dirty="0">
+                          <a:solidFill>
+                            <a:schemeClr val="tx1"/>
+                          </a:solidFill>
+                          <a:latin typeface="Calibri" pitchFamily="34" charset="0"/>
+                          <a:ea typeface="Calibri" pitchFamily="34" charset="-122"/>
+                          <a:cs typeface="Calibri" pitchFamily="34" charset="-120"/>
+                        </a:rPr>
+                        <a:t>Se realizará nuevamente el seguimiento de las observaciones pendientes de solventar en las Actas: 173 y 175;</a:t>
+                      </a:r>
+                      <a:endParaRPr lang="en-US" sz="950" dirty="0">
+                        <a:latin typeface="Calibri" charset="0"/>
+                        <a:ea typeface="Calibri" charset="0"/>
+                        <a:cs typeface="Calibri" charset="0"/>
+                      </a:endParaRPr>
+                    </a:p>
+                    <a:p>
+                      <a:pPr algn="just" indent="0" marL="0">
+                        <a:buNone/>
+                      </a:pPr>
+                      <a:r>
+                        <a:rPr lang="en-US" sz="950" dirty="0">
+                          <a:solidFill>
+                            <a:schemeClr val="tx1"/>
+                          </a:solidFill>
+                          <a:latin typeface="Calibri" pitchFamily="34" charset="0"/>
+                          <a:ea typeface="Calibri" pitchFamily="34" charset="-122"/>
+                          <a:cs typeface="Calibri" pitchFamily="34" charset="-120"/>
+                        </a:rPr>
+                        <a:t>Plazo: 30/11/2026</a:t>
+                      </a:r>
+                      <a:endParaRPr lang="en-US" sz="950" dirty="0">
+                        <a:latin typeface="Calibri" charset="0"/>
+                        <a:ea typeface="Calibri" charset="0"/>
+                        <a:cs typeface="Calibri" charset="0"/>
+                      </a:endParaRPr>
+                    </a:p>
+                  </a:txBody>
+                  <a:tcPr marL="54864" marR="54864" marT="18288" marB="18288" anchor="ctr">
+                    <a:lnL w="0" cap="flat" cmpd="sng" algn="ctr">
+                      <a:noFill/>
+                    </a:lnL>
+                    <a:lnR w="0" cap="flat" cmpd="sng" algn="ctr">
+                      <a:noFill/>
+                    </a:lnR>
+                    <a:lnT w="0" cap="flat" cmpd="sng" algn="ctr">
+                      <a:noFill/>
+                    </a:lnT>
+                    <a:lnB w="9525" cap="flat" cmpd="sng" algn="ctr">
+                      <a:solidFill>
+                        <a:srgbClr val="D9E0EA"/>
+                      </a:solidFill>
+                      <a:prstDash val="solid"/>
+                      <a:round/>
+                      <a:headEnd type="none" w="med" len="med"/>
+                      <a:tailEnd type="none" w="med" len="med"/>
+                    </a:lnB>
+                  </a:tcPr>
+                </a:tc>
+                <a:tc>
+                  <a:txBody>
+                    <a:bodyPr/>
+                    <a:lstStyle/>
+                    <a:p>
+                      <a:pPr algn="l" indent="0" marL="0">
+                        <a:buNone/>
+                      </a:pPr>
+                      <a:r>
+                        <a:rPr lang="en-US" sz="950" b="1" dirty="0">
+                          <a:solidFill>
+                            <a:schemeClr val="accent1"/>
+                          </a:solidFill>
+                          <a:latin typeface="Calibri" pitchFamily="34" charset="0"/>
+                          <a:ea typeface="Calibri" pitchFamily="34" charset="-122"/>
+                          <a:cs typeface="Calibri" pitchFamily="34" charset="-120"/>
+                        </a:rPr>
+                        <a:t>Auditoría interna</a:t>
+                      </a:r>
+                      <a:endParaRPr lang="en-US" sz="950" dirty="0">
+                        <a:latin typeface="Calibri" charset="0"/>
+                        <a:ea typeface="Calibri" charset="0"/>
+                        <a:cs typeface="Calibri" charset="0"/>
+                      </a:endParaRPr>
+                    </a:p>
+                  </a:txBody>
+                  <a:tcPr marL="54864" marR="54864" marT="18288" marB="18288" anchor="ctr">
+                    <a:lnL w="0" cap="flat" cmpd="sng" algn="ctr">
+                      <a:noFill/>
+                    </a:lnL>
+                    <a:lnR w="0" cap="flat" cmpd="sng" algn="ctr">
+                      <a:noFill/>
+                    </a:lnR>
+                    <a:lnT w="0" cap="flat" cmpd="sng" algn="ctr">
+                      <a:noFill/>
+                    </a:lnT>
+                    <a:lnB w="9525" cap="flat" cmpd="sng" algn="ctr">
+                      <a:solidFill>
+                        <a:srgbClr val="D9E0EA"/>
+                      </a:solidFill>
+                      <a:prstDash val="solid"/>
+                      <a:round/>
+                      <a:headEnd type="none" w="med" len="med"/>
+                      <a:tailEnd type="none" w="med" len="med"/>
+                    </a:lnB>
+                  </a:tcPr>
+                </a:tc>
+              </a:tr>
+              <a:tr h="0">
+                <a:tc gridSpan="3">
+                  <a:txBody>
+                    <a:bodyPr/>
+                    <a:lstStyle/>
+                    <a:p>
+                      <a:pPr algn="just" indent="0" marL="0">
+                        <a:buNone/>
+                      </a:pPr>
+                      <a:r>
+                        <a:rPr lang="en-US" sz="950" b="1" dirty="0">
+                          <a:solidFill>
+                            <a:schemeClr val="accent1"/>
+                          </a:solidFill>
+                          <a:latin typeface="Calibri" pitchFamily="34" charset="0"/>
+                          <a:ea typeface="Calibri" pitchFamily="34" charset="-122"/>
+                          <a:cs typeface="Calibri" pitchFamily="34" charset="-120"/>
+                        </a:rPr>
+                        <a:t>Verificacion de las Normas Técnicas para la Gestión de los Riesgos de Lavado de Dinero y de Activos, Financiacion del Terrorismo y la Financiacion de la Proliferacion de Armas de Destruccion Masiva (NRP-36), con referencia al 31 de mayo de 2025, comunicadas mediante nota No. DS-SABAO-BCS-BC-18445 del 30 de octubre de 2025.</a:t>
+                      </a:r>
+                      <a:endParaRPr lang="en-US" sz="950" dirty="0">
+                        <a:latin typeface="Calibri" charset="0"/>
+                        <a:ea typeface="Calibri" charset="0"/>
+                        <a:cs typeface="Calibri" charset="0"/>
+                      </a:endParaRPr>
+                    </a:p>
+                  </a:txBody>
+                  <a:tcPr marL="54864" marR="54864" marT="18288" marB="18288" anchor="ctr">
+                    <a:lnL w="0" cap="flat" cmpd="sng" algn="ctr">
+                      <a:noFill/>
+                    </a:lnL>
+                    <a:lnR w="0" cap="flat" cmpd="sng" algn="ctr">
+                      <a:noFill/>
+                    </a:lnR>
+                    <a:lnT w="0" cap="flat" cmpd="sng" algn="ctr">
+                      <a:noFill/>
+                    </a:lnT>
+                    <a:lnB w="9525" cap="flat" cmpd="sng" algn="ctr">
+                      <a:solidFill>
+                        <a:srgbClr val="D9E0EA"/>
+                      </a:solidFill>
+                      <a:prstDash val="solid"/>
+                      <a:round/>
+                      <a:headEnd type="none" w="med" len="med"/>
+                      <a:tailEnd type="none" w="med" len="med"/>
+                    </a:lnB>
+                    <a:solidFill>
+                      <a:schemeClr val="bg2"/>
+                    </a:solidFill>
+                  </a:tcPr>
+                </a:tc>
+                <a:tc hMerge="1">
+                  <a:tcPr/>
+                </a:tc>
+                <a:tc hMerge="1">
+                  <a:tcPr/>
+                </a:tc>
+              </a:tr>
+              <a:tr h="0">
+                <a:tc>
+                  <a:txBody>
+                    <a:bodyPr/>
+                    <a:lstStyle/>
+                    <a:p>
+                      <a:pPr algn="just" indent="0" marL="0">
+                        <a:buNone/>
+                      </a:pPr>
+                      <a:r>
+                        <a:rPr lang="en-US" sz="950" b="1" dirty="0">
+                          <a:solidFill>
+                            <a:schemeClr val="tx1"/>
+                          </a:solidFill>
+                          <a:latin typeface="Calibri" pitchFamily="34" charset="0"/>
+                          <a:ea typeface="Calibri" pitchFamily="34" charset="-122"/>
+                          <a:cs typeface="Calibri" pitchFamily="34" charset="-120"/>
+                        </a:rPr>
+                        <a:t>Observación 1. Falta de aplicación del factor de riesgo empleados.</a:t>
+                      </a:r>
+                      <a:endParaRPr lang="en-US" sz="950" dirty="0">
+                        <a:latin typeface="Calibri" charset="0"/>
+                        <a:ea typeface="Calibri" charset="0"/>
+                        <a:cs typeface="Calibri" charset="0"/>
+                      </a:endParaRPr>
+                    </a:p>
+                    <a:p>
+                      <a:pPr algn="just" indent="0" marL="0">
+                        <a:buNone/>
+                      </a:pPr>
+                      <a:r>
+                        <a:rPr lang="en-US" sz="950" dirty="0">
+                          <a:solidFill>
+                            <a:schemeClr val="tx1"/>
+                          </a:solidFill>
+                          <a:latin typeface="Calibri" pitchFamily="34" charset="0"/>
+                          <a:ea typeface="Calibri" pitchFamily="34" charset="-122"/>
+                          <a:cs typeface="Calibri" pitchFamily="34" charset="-120"/>
+                        </a:rPr>
+                        <a:t>Seguimiento realizado en la presente visita de supervisión:</a:t>
+                      </a:r>
+                      <a:endParaRPr lang="en-US" sz="950" dirty="0">
+                        <a:latin typeface="Calibri" charset="0"/>
+                        <a:ea typeface="Calibri" charset="0"/>
+                        <a:cs typeface="Calibri" charset="0"/>
+                      </a:endParaRPr>
+                    </a:p>
+                    <a:p>
+                      <a:pPr algn="just" indent="0" marL="0">
+                        <a:buNone/>
+                      </a:pPr>
+                      <a:r>
+                        <a:rPr lang="en-US" sz="950" dirty="0">
+                          <a:solidFill>
+                            <a:schemeClr val="accent3"/>
+                          </a:solidFill>
+                          <a:latin typeface="Calibri" pitchFamily="34" charset="0"/>
+                          <a:ea typeface="Calibri" pitchFamily="34" charset="-122"/>
+                          <a:cs typeface="Calibri" pitchFamily="34" charset="-120"/>
+                        </a:rPr>
+                        <a:t>Estado: No superada</a:t>
+                      </a:r>
+                      <a:endParaRPr lang="en-US" sz="950" dirty="0">
+                        <a:latin typeface="Calibri" charset="0"/>
+                        <a:ea typeface="Calibri" charset="0"/>
+                        <a:cs typeface="Calibri" charset="0"/>
+                      </a:endParaRPr>
+                    </a:p>
+                  </a:txBody>
+                  <a:tcPr marL="54864" marR="54864" marT="18288" marB="18288" anchor="ctr">
+                    <a:lnL w="0" cap="flat" cmpd="sng" algn="ctr">
+                      <a:noFill/>
+                    </a:lnL>
+                    <a:lnR w="0" cap="flat" cmpd="sng" algn="ctr">
+                      <a:noFill/>
+                    </a:lnR>
+                    <a:lnT w="0" cap="flat" cmpd="sng" algn="ctr">
+                      <a:noFill/>
+                    </a:lnT>
+                    <a:lnB w="9525" cap="flat" cmpd="sng" algn="ctr">
+                      <a:solidFill>
+                        <a:srgbClr val="D9E0EA"/>
+                      </a:solidFill>
+                      <a:prstDash val="solid"/>
+                      <a:round/>
+                      <a:headEnd type="none" w="med" len="med"/>
+                      <a:tailEnd type="none" w="med" len="med"/>
+                    </a:lnB>
+                    <a:solidFill>
+                      <a:srgbClr val="FBEAE8"/>
+                    </a:solidFill>
+                  </a:tcPr>
+                </a:tc>
+                <a:tc>
+                  <a:txBody>
+                    <a:bodyPr/>
+                    <a:lstStyle/>
+                    <a:p>
+                      <a:pPr algn="just" indent="0" marL="0">
+                        <a:buNone/>
+                      </a:pPr>
+                      <a:r>
+                        <a:rPr lang="en-US" sz="950" dirty="0">
+                          <a:solidFill>
+                            <a:schemeClr val="tx1"/>
+                          </a:solidFill>
+                          <a:latin typeface="Calibri" pitchFamily="34" charset="0"/>
+                          <a:ea typeface="Calibri" pitchFamily="34" charset="-122"/>
+                          <a:cs typeface="Calibri" pitchFamily="34" charset="-120"/>
+                        </a:rPr>
+                        <a:t>Sin comentarios ni documentación</a:t>
+                      </a:r>
+                      <a:endParaRPr lang="en-US" sz="950" dirty="0">
+                        <a:latin typeface="Calibri" charset="0"/>
+                        <a:ea typeface="Calibri" charset="0"/>
+                        <a:cs typeface="Calibri" charset="0"/>
+                      </a:endParaRPr>
+                    </a:p>
+                  </a:txBody>
+                  <a:tcPr marL="54864" marR="54864" marT="18288" marB="18288" anchor="ctr">
+                    <a:lnL w="0" cap="flat" cmpd="sng" algn="ctr">
+                      <a:noFill/>
+                    </a:lnL>
+                    <a:lnR w="0" cap="flat" cmpd="sng" algn="ctr">
+                      <a:noFill/>
+                    </a:lnR>
+                    <a:lnT w="0" cap="flat" cmpd="sng" algn="ctr">
+                      <a:noFill/>
+                    </a:lnT>
+                    <a:lnB w="9525" cap="flat" cmpd="sng" algn="ctr">
+                      <a:solidFill>
+                        <a:srgbClr val="D9E0EA"/>
+                      </a:solidFill>
+                      <a:prstDash val="solid"/>
+                      <a:round/>
+                      <a:headEnd type="none" w="med" len="med"/>
+                      <a:tailEnd type="none" w="med" len="med"/>
+                    </a:lnB>
+                  </a:tcPr>
+                </a:tc>
+                <a:tc>
+                  <a:txBody>
+                    <a:bodyPr/>
+                    <a:lstStyle/>
+                    <a:p>
+                      <a:pPr algn="l" indent="0" marL="0">
+                        <a:buNone/>
+                      </a:pPr>
+                      <a:r>
+                        <a:rPr lang="en-US" sz="950" b="1" dirty="0">
+                          <a:solidFill>
+                            <a:schemeClr val="accent1"/>
+                          </a:solidFill>
+                          <a:latin typeface="Calibri" pitchFamily="34" charset="0"/>
+                          <a:ea typeface="Calibri" pitchFamily="34" charset="-122"/>
+                          <a:cs typeface="Calibri" pitchFamily="34" charset="-120"/>
+                        </a:rPr>
+                        <a:t>Gerencia de Oficialía de Cumplimiento</a:t>
+                      </a:r>
+                      <a:endParaRPr lang="en-US" sz="950" dirty="0">
+                        <a:latin typeface="Calibri" charset="0"/>
+                        <a:ea typeface="Calibri" charset="0"/>
+                        <a:cs typeface="Calibri" charset="0"/>
+                      </a:endParaRPr>
+                    </a:p>
+                  </a:txBody>
+                  <a:tcPr marL="54864" marR="54864" marT="18288" marB="18288" anchor="ctr">
+                    <a:lnL w="0" cap="flat" cmpd="sng" algn="ctr">
+                      <a:noFill/>
+                    </a:lnL>
+                    <a:lnR w="0" cap="flat" cmpd="sng" algn="ctr">
+                      <a:noFill/>
+                    </a:lnR>
+                    <a:lnT w="0" cap="flat" cmpd="sng" algn="ctr">
+                      <a:noFill/>
+                    </a:lnT>
+                    <a:lnB w="9525" cap="flat" cmpd="sng" algn="ctr">
+                      <a:solidFill>
+                        <a:srgbClr val="D9E0EA"/>
+                      </a:solidFill>
+                      <a:prstDash val="solid"/>
+                      <a:round/>
+                      <a:headEnd type="none" w="med" len="med"/>
+                      <a:tailEnd type="none" w="med" len="med"/>
+                    </a:lnB>
+                  </a:tcPr>
+                </a:tc>
+              </a:tr>
+              <a:tr h="0">
+                <a:tc>
+                  <a:txBody>
+                    <a:bodyPr/>
+                    <a:lstStyle/>
+                    <a:p>
+                      <a:pPr algn="just" indent="0" marL="0">
+                        <a:buNone/>
+                      </a:pPr>
+                      <a:r>
+                        <a:rPr lang="en-US" sz="950" b="1" dirty="0">
+                          <a:solidFill>
+                            <a:schemeClr val="tx1"/>
+                          </a:solidFill>
+                          <a:latin typeface="Calibri" pitchFamily="34" charset="0"/>
+                          <a:ea typeface="Calibri" pitchFamily="34" charset="-122"/>
+                          <a:cs typeface="Calibri" pitchFamily="34" charset="-120"/>
+                        </a:rPr>
+                        <a:t>Observación 4. Seguimiento de observaciones de Auditoría Interna de años anteriores no subsanadas.</a:t>
+                      </a:r>
+                      <a:endParaRPr lang="en-US" sz="950" dirty="0">
+                        <a:latin typeface="Calibri" charset="0"/>
+                        <a:ea typeface="Calibri" charset="0"/>
+                        <a:cs typeface="Calibri" charset="0"/>
+                      </a:endParaRPr>
+                    </a:p>
+                    <a:p>
+                      <a:pPr algn="just" indent="0" marL="0">
+                        <a:buNone/>
+                      </a:pPr>
+                      <a:r>
+                        <a:rPr lang="en-US" sz="950" dirty="0">
+                          <a:solidFill>
+                            <a:schemeClr val="tx1"/>
+                          </a:solidFill>
+                          <a:latin typeface="Calibri" pitchFamily="34" charset="0"/>
+                          <a:ea typeface="Calibri" pitchFamily="34" charset="-122"/>
+                          <a:cs typeface="Calibri" pitchFamily="34" charset="-120"/>
+                        </a:rPr>
+                        <a:t>Seguimiento realizado en la presente visita de supervisión:</a:t>
+                      </a:r>
+                      <a:endParaRPr lang="en-US" sz="950" dirty="0">
+                        <a:latin typeface="Calibri" charset="0"/>
+                        <a:ea typeface="Calibri" charset="0"/>
+                        <a:cs typeface="Calibri" charset="0"/>
+                      </a:endParaRPr>
+                    </a:p>
+                    <a:p>
+                      <a:pPr algn="just" indent="0" marL="0">
+                        <a:buNone/>
+                      </a:pPr>
+                      <a:r>
+                        <a:rPr lang="en-US" sz="950" dirty="0">
+                          <a:solidFill>
+                            <a:schemeClr val="accent6"/>
+                          </a:solidFill>
+                          <a:latin typeface="Calibri" pitchFamily="34" charset="0"/>
+                          <a:ea typeface="Calibri" pitchFamily="34" charset="-122"/>
+                          <a:cs typeface="Calibri" pitchFamily="34" charset="-120"/>
+                        </a:rPr>
+                        <a:t>Estado: Parcialmente Superada.</a:t>
+                      </a:r>
+                      <a:endParaRPr lang="en-US" sz="950" dirty="0">
+                        <a:latin typeface="Calibri" charset="0"/>
+                        <a:ea typeface="Calibri" charset="0"/>
+                        <a:cs typeface="Calibri" charset="0"/>
+                      </a:endParaRPr>
+                    </a:p>
+                  </a:txBody>
+                  <a:tcPr marL="54864" marR="54864" marT="18288" marB="18288" anchor="ctr">
+                    <a:lnL w="0" cap="flat" cmpd="sng" algn="ctr">
+                      <a:noFill/>
+                    </a:lnL>
+                    <a:lnR w="0" cap="flat" cmpd="sng" algn="ctr">
+                      <a:noFill/>
+                    </a:lnR>
+                    <a:lnT w="0" cap="flat" cmpd="sng" algn="ctr">
+                      <a:noFill/>
+                    </a:lnT>
+                    <a:lnB w="9525" cap="flat" cmpd="sng" algn="ctr">
+                      <a:solidFill>
+                        <a:srgbClr val="D9E0EA"/>
+                      </a:solidFill>
+                      <a:prstDash val="solid"/>
+                      <a:round/>
+                      <a:headEnd type="none" w="med" len="med"/>
+                      <a:tailEnd type="none" w="med" len="med"/>
+                    </a:lnB>
+                    <a:solidFill>
+                      <a:srgbClr val="FDF4E3"/>
+                    </a:solidFill>
+                  </a:tcPr>
+                </a:tc>
+                <a:tc>
+                  <a:txBody>
+                    <a:bodyPr/>
+                    <a:lstStyle/>
+                    <a:p>
+                      <a:pPr algn="just" indent="0" marL="0">
+                        <a:buNone/>
+                      </a:pPr>
+                      <a:r>
+                        <a:rPr lang="en-US" sz="950" dirty="0">
+                          <a:solidFill>
+                            <a:schemeClr val="tx1"/>
+                          </a:solidFill>
+                          <a:latin typeface="Calibri" pitchFamily="34" charset="0"/>
+                          <a:ea typeface="Calibri" pitchFamily="34" charset="-122"/>
+                          <a:cs typeface="Calibri" pitchFamily="34" charset="-120"/>
+                        </a:rPr>
+                        <a:t>Sin comentarios ni documentación</a:t>
+                      </a:r>
+                      <a:endParaRPr lang="en-US" sz="950" dirty="0">
+                        <a:latin typeface="Calibri" charset="0"/>
+                        <a:ea typeface="Calibri" charset="0"/>
+                        <a:cs typeface="Calibri" charset="0"/>
+                      </a:endParaRPr>
+                    </a:p>
+                  </a:txBody>
+                  <a:tcPr marL="54864" marR="54864" marT="18288" marB="18288" anchor="ctr">
+                    <a:lnL w="0" cap="flat" cmpd="sng" algn="ctr">
+                      <a:noFill/>
+                    </a:lnL>
+                    <a:lnR w="0" cap="flat" cmpd="sng" algn="ctr">
+                      <a:noFill/>
+                    </a:lnR>
+                    <a:lnT w="0" cap="flat" cmpd="sng" algn="ctr">
+                      <a:noFill/>
+                    </a:lnT>
+                    <a:lnB w="9525" cap="flat" cmpd="sng" algn="ctr">
+                      <a:solidFill>
+                        <a:srgbClr val="D9E0EA"/>
+                      </a:solidFill>
+                      <a:prstDash val="solid"/>
+                      <a:round/>
+                      <a:headEnd type="none" w="med" len="med"/>
+                      <a:tailEnd type="none" w="med" len="med"/>
+                    </a:lnB>
+                  </a:tcPr>
+                </a:tc>
+                <a:tc>
+                  <a:txBody>
+                    <a:bodyPr/>
+                    <a:lstStyle/>
+                    <a:p>
+                      <a:pPr algn="l" indent="0" marL="0">
+                        <a:buNone/>
+                      </a:pPr>
+                      <a:r>
+                        <a:rPr lang="en-US" sz="950" b="1" dirty="0">
+                          <a:solidFill>
+                            <a:schemeClr val="accent1"/>
+                          </a:solidFill>
+                          <a:latin typeface="Calibri" pitchFamily="34" charset="0"/>
+                          <a:ea typeface="Calibri" pitchFamily="34" charset="-122"/>
+                          <a:cs typeface="Calibri" pitchFamily="34" charset="-120"/>
+                        </a:rPr>
+                        <a:t>Auditoría interna</a:t>
+                      </a:r>
+                      <a:endParaRPr lang="en-US" sz="950" dirty="0">
+                        <a:latin typeface="Calibri" charset="0"/>
+                        <a:ea typeface="Calibri" charset="0"/>
+                        <a:cs typeface="Calibri" charset="0"/>
+                      </a:endParaRPr>
+                    </a:p>
+                  </a:txBody>
+                  <a:tcPr marL="54864" marR="54864" marT="18288" marB="18288" anchor="ctr">
+                    <a:lnL w="0" cap="flat" cmpd="sng" algn="ctr">
+                      <a:noFill/>
+                    </a:lnL>
+                    <a:lnR w="0" cap="flat" cmpd="sng" algn="ctr">
+                      <a:noFill/>
+                    </a:lnR>
+                    <a:lnT w="0" cap="flat" cmpd="sng" algn="ctr">
+                      <a:noFill/>
+                    </a:lnT>
+                    <a:lnB w="9525" cap="flat" cmpd="sng" algn="ctr">
+                      <a:solidFill>
+                        <a:srgbClr val="D9E0EA"/>
+                      </a:solidFill>
+                      <a:prstDash val="solid"/>
+                      <a:round/>
+                      <a:headEnd type="none" w="med" len="med"/>
+                      <a:tailEnd type="none" w="med" len="med"/>
+                    </a:lnB>
+                  </a:tcPr>
+                </a:tc>
+              </a:tr>
+            </a:tbl>
+          </a:graphicData>
+        </a:graphic>
+      </p:graphicFrame>
+      <p:sp>
+        <p:nvSpPr>
+          <p:cNvPr id="25" name="Slide Number Placeholder 0"/>
+          <p:cNvSpPr>
+            <a:spLocks noGrp="1"/>
+          </p:cNvSpPr>
+          <p:nvPr>
+            <p:ph type="sldNum" sz="quarter" idx="4294967295"/>
+          </p:nvPr>
+        </p:nvSpPr>
+        <p:spPr>
+          <a:xfrm>
+            <a:off x="11323015" y="6583680"/>
+            <a:ext cx="457200" cy="182880"/>
+          </a:xfrm>
+          <a:prstGeom prst="rect">
+            <a:avLst/>
+          </a:prstGeom>
+          <a:extLst>
+            <a:ext uri="{C572A759-6A51-4108-AA02-DFA0A04FC94B}">
+              <ma14:wrappingTextBoxFlag xmlns:ma14="http://schemas.microsoft.com/office/mac/drawingml/2011/main" val="0"/>
+            </a:ext>
+          </a:extLst>
+        </p:spPr>
+        <p:txBody>
+          <a:bodyPr/>
+          <a:lstStyle>
+            <a:lvl1pPr>
+              <a:defRPr sz="850">
+                <a:solidFill>
+                  <a:schemeClr val="accent5"/>
+                </a:solidFill>
+              </a:defRPr>
+            </a:lvl1pPr>
+          </a:lstStyle>
+          <a:p>
+            <a:pPr algn="r"/>
+            <a:fld id="{F7021451-1387-4CA6-816F-3879F97B5CBC}" type="slidenum">
+              <a:rPr b="0" lang="en-US"/>
+              <a:t>3</a:t>
+            </a:fld>
+            <a:endParaRPr lang="en-US"/>
+          </a:p>
+        </p:txBody>
+      </p:sp>
+    </p:spTree>
+  </p:cSld>
+  <p:clrMapOvr>
+    <a:masterClrMapping/>
+  </p:clrMapOvr>
+</p:sld>
+</file>
+
+<file path=ppt/slides/slide4.xml><?xml version="1.0" encoding="utf-8"?>
+<p:sld xmlns:a="http://schemas.openxmlformats.org/drawingml/2006/main" xmlns:r="http://schemas.openxmlformats.org/officeDocument/2006/relationships" xmlns:p="http://schemas.openxmlformats.org/presentationml/2006/main">
+  <p:cSld name="Slide 4">
+    <p:spTree>
+      <p:nvGrpSpPr>
+        <p:cNvPr id="1" name=""/>
+        <p:cNvGrpSpPr/>
+        <p:nvPr/>
+      </p:nvGrpSpPr>
+      <p:grpSpPr>
+        <a:xfrm>
+          <a:off x="0" y="0"/>
+          <a:ext cx="0" cy="0"/>
+          <a:chOff x="0" y="0"/>
+          <a:chExt cx="0" cy="0"/>
+        </a:xfrm>
+      </p:grpSpPr>
+      <p:sp>
+        <p:nvSpPr>
+          <p:cNvPr id="2" name="Text 0"/>
+          <p:cNvSpPr/>
+          <p:nvPr>
+            <p:ph idx="100" type="title" hasCustomPrompt="1"/>
+          </p:nvPr>
+        </p:nvSpPr>
+        <p:spPr>
+          <a:xfrm>
+            <a:off x="411480" y="228600"/>
+            <a:ext cx="9174175" cy="411480"/>
+          </a:xfrm>
+          <a:prstGeom prst="rect">
+            <a:avLst/>
+          </a:prstGeom>
+          <a:noFill/>
+          <a:ln/>
+        </p:spPr>
+        <p:txBody>
+          <a:bodyPr wrap="square" lIns="0" tIns="0" rIns="0" bIns="0" rtlCol="0" anchor="t"/>
+          <a:lstStyle/>
+          <a:p>
+            <a:pPr algn="l" indent="0" marL="0">
+              <a:buNone/>
+            </a:pPr>
+            <a:r>
+              <a:rPr lang="en-US" sz="2000" b="1" dirty="0">
+                <a:solidFill>
+                  <a:schemeClr val="tx1"/>
+                </a:solidFill>
+                <a:latin typeface="Cambria" pitchFamily="34" charset="0"/>
+                <a:ea typeface="Cambria" pitchFamily="34" charset="-122"/>
+                <a:cs typeface="Cambria" pitchFamily="34" charset="-120"/>
+              </a:rPr>
+              <a:t>Matriz de requerimientos DS-SABAO-BCS-BC-23486</a:t>
+            </a:r>
+            <a:endParaRPr lang="en-US" sz="2000" dirty="0"/>
+          </a:p>
+        </p:txBody>
+      </p:sp>
+      <p:graphicFrame>
+        <p:nvGraphicFramePr>
+          <p:cNvPr id="5" name="Tabla matriz"/>
+          <p:cNvGraphicFramePr>
+            <a:graphicFrameLocks noGrp="1"/>
+          </p:cNvGraphicFramePr>
+          <p:nvPr>
+            <p:extLst>
+              <p:ext uri="{D42A27DB-BD31-4B8C-83A1-F6EECF244321}">
+                <p14:modId xmlns:p14="http://schemas.microsoft.com/office/powerpoint/2010/main" val="1579011935"/>
+              </p:ext>
+            </p:extLst>
+          </p:nvPr>
+        </p:nvGraphicFramePr>
+        <p:xfrm>
+          <a:off x="411480" y="731520"/>
+          <a:ext cx="11368735" cy="914400"/>
+        </p:xfrm>
+        <a:graphic>
+          <a:graphicData uri="http://schemas.openxmlformats.org/drawingml/2006/table">
+            <a:tbl>
+              <a:tblPr/>
+              <a:tblGrid>
+                <a:gridCol w="4937760"/>
+                <a:gridCol w="4873752"/>
+                <a:gridCol w="1554480"/>
+              </a:tblGrid>
+              <a:tr h="0">
+                <a:tc>
+                  <a:txBody>
+                    <a:bodyPr/>
+                    <a:lstStyle/>
+                    <a:p>
+                      <a:pPr algn="just" indent="0" marL="0">
+                        <a:buNone/>
+                      </a:pPr>
+                      <a:r>
+                        <a:rPr lang="en-US" sz="900" b="1" dirty="0">
+                          <a:solidFill>
+                            <a:schemeClr val="bg1"/>
+                          </a:solidFill>
+                          <a:latin typeface="Calibri" pitchFamily="34" charset="0"/>
+                          <a:ea typeface="Calibri" pitchFamily="34" charset="-122"/>
+                          <a:cs typeface="Calibri" pitchFamily="34" charset="-120"/>
+                        </a:rPr>
+                        <a:t>Observación</a:t>
+                      </a:r>
+                      <a:endParaRPr lang="en-US" sz="900" dirty="0">
+                        <a:latin typeface="Calibri" charset="0"/>
+                        <a:ea typeface="Calibri" charset="0"/>
+                        <a:cs typeface="Calibri" charset="0"/>
+                      </a:endParaRPr>
+                    </a:p>
+                  </a:txBody>
+                  <a:tcPr marL="54864" marR="54864" marT="18288" marB="18288" anchor="ctr">
+                    <a:lnL w="0" cap="flat" cmpd="sng" algn="ctr">
+                      <a:noFill/>
+                    </a:lnL>
+                    <a:lnR w="0" cap="flat" cmpd="sng" algn="ctr">
+                      <a:noFill/>
+                    </a:lnR>
+                    <a:lnT w="0" cap="flat" cmpd="sng" algn="ctr">
+                      <a:noFill/>
+                    </a:lnT>
+                    <a:lnB w="9525" cap="flat" cmpd="sng" algn="ctr">
+                      <a:solidFill>
+                        <a:srgbClr val="D9E0EA"/>
+                      </a:solidFill>
+                      <a:prstDash val="solid"/>
+                      <a:round/>
+                      <a:headEnd type="none" w="med" len="med"/>
+                      <a:tailEnd type="none" w="med" len="med"/>
+                    </a:lnB>
+                    <a:solidFill>
+                      <a:schemeClr val="accent3"/>
+                    </a:solidFill>
+                  </a:tcPr>
+                </a:tc>
+                <a:tc>
+                  <a:txBody>
+                    <a:bodyPr/>
+                    <a:lstStyle/>
+                    <a:p>
+                      <a:pPr algn="just" indent="0" marL="0">
+                        <a:buNone/>
+                      </a:pPr>
+                      <a:r>
+                        <a:rPr lang="en-US" sz="900" b="1" dirty="0">
+                          <a:solidFill>
+                            <a:schemeClr val="bg1"/>
+                          </a:solidFill>
+                          <a:latin typeface="Calibri" pitchFamily="34" charset="0"/>
+                          <a:ea typeface="Calibri" pitchFamily="34" charset="-122"/>
+                          <a:cs typeface="Calibri" pitchFamily="34" charset="-120"/>
+                        </a:rPr>
+                        <a:t>Comentarios</a:t>
+                      </a:r>
+                      <a:endParaRPr lang="en-US" sz="900" dirty="0">
+                        <a:latin typeface="Calibri" charset="0"/>
+                        <a:ea typeface="Calibri" charset="0"/>
+                        <a:cs typeface="Calibri" charset="0"/>
+                      </a:endParaRPr>
+                    </a:p>
+                  </a:txBody>
+                  <a:tcPr marL="54864" marR="54864" marT="18288" marB="18288" anchor="ctr">
+                    <a:lnL w="0" cap="flat" cmpd="sng" algn="ctr">
+                      <a:noFill/>
+                    </a:lnL>
+                    <a:lnR w="0" cap="flat" cmpd="sng" algn="ctr">
+                      <a:noFill/>
+                    </a:lnR>
+                    <a:lnT w="0" cap="flat" cmpd="sng" algn="ctr">
+                      <a:noFill/>
+                    </a:lnT>
+                    <a:lnB w="9525" cap="flat" cmpd="sng" algn="ctr">
+                      <a:solidFill>
+                        <a:srgbClr val="D9E0EA"/>
+                      </a:solidFill>
+                      <a:prstDash val="solid"/>
+                      <a:round/>
+                      <a:headEnd type="none" w="med" len="med"/>
+                      <a:tailEnd type="none" w="med" len="med"/>
+                    </a:lnB>
+                    <a:solidFill>
+                      <a:schemeClr val="accent3"/>
+                    </a:solidFill>
+                  </a:tcPr>
+                </a:tc>
+                <a:tc>
+                  <a:txBody>
+                    <a:bodyPr/>
+                    <a:lstStyle/>
+                    <a:p>
+                      <a:pPr algn="just" indent="0" marL="0">
+                        <a:buNone/>
+                      </a:pPr>
+                      <a:r>
+                        <a:rPr lang="en-US" sz="900" b="1" dirty="0">
+                          <a:solidFill>
+                            <a:schemeClr val="bg1"/>
+                          </a:solidFill>
+                          <a:latin typeface="Calibri" pitchFamily="34" charset="0"/>
+                          <a:ea typeface="Calibri" pitchFamily="34" charset="-122"/>
+                          <a:cs typeface="Calibri" pitchFamily="34" charset="-120"/>
+                        </a:rPr>
+                        <a:t>Funcionario</a:t>
+                      </a:r>
+                      <a:endParaRPr lang="en-US" sz="900" dirty="0">
+                        <a:latin typeface="Calibri" charset="0"/>
+                        <a:ea typeface="Calibri" charset="0"/>
+                        <a:cs typeface="Calibri" charset="0"/>
+                      </a:endParaRPr>
+                    </a:p>
+                    <a:p>
+                      <a:pPr algn="just" indent="0" marL="0">
+                        <a:buNone/>
+                      </a:pPr>
+                      <a:r>
+                        <a:rPr lang="en-US" sz="900" b="1" dirty="0">
+                          <a:solidFill>
+                            <a:schemeClr val="bg1"/>
+                          </a:solidFill>
+                          <a:latin typeface="Calibri" pitchFamily="34" charset="0"/>
+                          <a:ea typeface="Calibri" pitchFamily="34" charset="-122"/>
+                          <a:cs typeface="Calibri" pitchFamily="34" charset="-120"/>
+                        </a:rPr>
+                        <a:t>Responsable</a:t>
+                      </a:r>
+                      <a:endParaRPr lang="en-US" sz="900" dirty="0">
+                        <a:latin typeface="Calibri" charset="0"/>
+                        <a:ea typeface="Calibri" charset="0"/>
+                        <a:cs typeface="Calibri" charset="0"/>
+                      </a:endParaRPr>
+                    </a:p>
+                  </a:txBody>
+                  <a:tcPr marL="54864" marR="54864" marT="18288" marB="18288" anchor="ctr">
+                    <a:lnL w="0" cap="flat" cmpd="sng" algn="ctr">
+                      <a:noFill/>
+                    </a:lnL>
+                    <a:lnR w="0" cap="flat" cmpd="sng" algn="ctr">
+                      <a:noFill/>
+                    </a:lnR>
+                    <a:lnT w="0" cap="flat" cmpd="sng" algn="ctr">
+                      <a:noFill/>
+                    </a:lnT>
+                    <a:lnB w="9525" cap="flat" cmpd="sng" algn="ctr">
+                      <a:solidFill>
+                        <a:srgbClr val="D9E0EA"/>
+                      </a:solidFill>
+                      <a:prstDash val="solid"/>
+                      <a:round/>
+                      <a:headEnd type="none" w="med" len="med"/>
+                      <a:tailEnd type="none" w="med" len="med"/>
+                    </a:lnB>
+                    <a:solidFill>
+                      <a:schemeClr val="accent3"/>
+                    </a:solidFill>
+                  </a:tcPr>
+                </a:tc>
+              </a:tr>
+              <a:tr h="0">
+                <a:tc gridSpan="3">
+                  <a:txBody>
+                    <a:bodyPr/>
+                    <a:lstStyle/>
+                    <a:p>
+                      <a:pPr algn="just" indent="0" marL="0">
+                        <a:buNone/>
+                      </a:pPr>
+                      <a:r>
+                        <a:rPr lang="en-US" sz="1100" b="1" dirty="0">
+                          <a:solidFill>
+                            <a:schemeClr val="accent1"/>
+                          </a:solidFill>
+                          <a:latin typeface="Calibri" pitchFamily="34" charset="0"/>
+                          <a:ea typeface="Calibri" pitchFamily="34" charset="-122"/>
+                          <a:cs typeface="Calibri" pitchFamily="34" charset="-120"/>
+                        </a:rPr>
+                        <a:t>C.3. Evaluación de Guías de Calidad de la Gestión de Riesgos Específicos, con el propósito evaluar la gestión de los riesgos de liquidez, mercado, operacional y tecnológico, de lavado de dinero y de activos, financiación del terrorismo y la financiación de la proliferación de armas de destrucción masiva (LDA/FT/FPADM), con referencia al 30 de septiembre de 2025, comunicadas mediante nota DS-SABAO-BCS-29295 de fecha 03 de diciembre de 2025.</a:t>
+                      </a:r>
+                      <a:endParaRPr lang="en-US" sz="1100" dirty="0">
+                        <a:latin typeface="Calibri" charset="0"/>
+                        <a:ea typeface="Calibri" charset="0"/>
+                        <a:cs typeface="Calibri" charset="0"/>
+                      </a:endParaRPr>
+                    </a:p>
+                  </a:txBody>
+                  <a:tcPr marL="54864" marR="54864" marT="18288" marB="18288" anchor="ctr">
+                    <a:lnL w="0" cap="flat" cmpd="sng" algn="ctr">
+                      <a:noFill/>
+                    </a:lnL>
+                    <a:lnR w="0" cap="flat" cmpd="sng" algn="ctr">
+                      <a:noFill/>
+                    </a:lnR>
+                    <a:lnT w="0" cap="flat" cmpd="sng" algn="ctr">
+                      <a:noFill/>
+                    </a:lnT>
+                    <a:lnB w="9525" cap="flat" cmpd="sng" algn="ctr">
+                      <a:solidFill>
+                        <a:srgbClr val="D9E0EA"/>
+                      </a:solidFill>
+                      <a:prstDash val="solid"/>
+                      <a:round/>
+                      <a:headEnd type="none" w="med" len="med"/>
+                      <a:tailEnd type="none" w="med" len="med"/>
+                    </a:lnB>
+                    <a:solidFill>
+                      <a:schemeClr val="bg2"/>
+                    </a:solidFill>
+                  </a:tcPr>
+                </a:tc>
+                <a:tc hMerge="1">
+                  <a:tcPr/>
+                </a:tc>
+                <a:tc hMerge="1">
+                  <a:tcPr/>
+                </a:tc>
+              </a:tr>
+              <a:tr h="0">
+                <a:tc gridSpan="3">
+                  <a:txBody>
+                    <a:bodyPr/>
+                    <a:lstStyle/>
+                    <a:p>
+                      <a:pPr algn="just" indent="0" marL="0">
+                        <a:buNone/>
+                      </a:pPr>
+                      <a:r>
+                        <a:rPr lang="en-US" sz="1100" b="1" dirty="0">
+                          <a:solidFill>
+                            <a:schemeClr val="accent1"/>
+                          </a:solidFill>
+                          <a:latin typeface="Calibri" pitchFamily="34" charset="0"/>
+                          <a:ea typeface="Calibri" pitchFamily="34" charset="-122"/>
+                          <a:cs typeface="Calibri" pitchFamily="34" charset="-120"/>
+                        </a:rPr>
+                        <a:t>C.3.1. Gestión de riesgo de Liquidez</a:t>
+                      </a:r>
+                      <a:endParaRPr lang="en-US" sz="1100" dirty="0">
+                        <a:latin typeface="Calibri" charset="0"/>
+                        <a:ea typeface="Calibri" charset="0"/>
+                        <a:cs typeface="Calibri" charset="0"/>
+                      </a:endParaRPr>
+                    </a:p>
+                  </a:txBody>
+                  <a:tcPr marL="54864" marR="54864" marT="18288" marB="18288" anchor="ctr">
+                    <a:lnL w="0" cap="flat" cmpd="sng" algn="ctr">
+                      <a:noFill/>
+                    </a:lnL>
+                    <a:lnR w="0" cap="flat" cmpd="sng" algn="ctr">
+                      <a:noFill/>
+                    </a:lnR>
+                    <a:lnT w="0" cap="flat" cmpd="sng" algn="ctr">
+                      <a:noFill/>
+                    </a:lnT>
+                    <a:lnB w="9525" cap="flat" cmpd="sng" algn="ctr">
+                      <a:solidFill>
+                        <a:srgbClr val="D9E0EA"/>
+                      </a:solidFill>
+                      <a:prstDash val="solid"/>
+                      <a:round/>
+                      <a:headEnd type="none" w="med" len="med"/>
+                      <a:tailEnd type="none" w="med" len="med"/>
+                    </a:lnB>
+                    <a:solidFill>
+                      <a:schemeClr val="bg2"/>
+                    </a:solidFill>
+                  </a:tcPr>
+                </a:tc>
+                <a:tc hMerge="1">
+                  <a:tcPr/>
+                </a:tc>
+                <a:tc hMerge="1">
+                  <a:tcPr/>
+                </a:tc>
+              </a:tr>
+              <a:tr h="0">
+                <a:tc>
+                  <a:txBody>
+                    <a:bodyPr/>
+                    <a:lstStyle/>
+                    <a:p>
+                      <a:pPr algn="just" indent="0" marL="0">
+                        <a:buNone/>
+                      </a:pPr>
+                      <a:r>
+                        <a:rPr lang="en-US" sz="1100" b="1" dirty="0">
+                          <a:solidFill>
+                            <a:schemeClr val="tx1"/>
+                          </a:solidFill>
+                          <a:latin typeface="Calibri" pitchFamily="34" charset="0"/>
+                          <a:ea typeface="Calibri" pitchFamily="34" charset="-122"/>
+                          <a:cs typeface="Calibri" pitchFamily="34" charset="-120"/>
+                        </a:rPr>
+                        <a:t>Observación 1: Falta de elementos en el plan de contingencia.</a:t>
+                      </a:r>
+                      <a:endParaRPr lang="en-US" sz="1100" dirty="0">
+                        <a:latin typeface="Calibri" charset="0"/>
+                        <a:ea typeface="Calibri" charset="0"/>
+                        <a:cs typeface="Calibri" charset="0"/>
+                      </a:endParaRPr>
+                    </a:p>
+                    <a:p>
+                      <a:pPr algn="just" indent="0" marL="0">
+                        <a:buNone/>
+                      </a:pPr>
+                      <a:r>
+                        <a:rPr lang="en-US" sz="1100" dirty="0">
+                          <a:solidFill>
+                            <a:schemeClr val="tx1"/>
+                          </a:solidFill>
+                          <a:latin typeface="Calibri" pitchFamily="34" charset="0"/>
+                          <a:ea typeface="Calibri" pitchFamily="34" charset="-122"/>
+                          <a:cs typeface="Calibri" pitchFamily="34" charset="-120"/>
+                        </a:rPr>
+                        <a:t>Seguimiento realizado en la presente visita de supervisión:</a:t>
+                      </a:r>
+                      <a:endParaRPr lang="en-US" sz="1100" dirty="0">
+                        <a:latin typeface="Calibri" charset="0"/>
+                        <a:ea typeface="Calibri" charset="0"/>
+                        <a:cs typeface="Calibri" charset="0"/>
+                      </a:endParaRPr>
+                    </a:p>
+                    <a:p>
+                      <a:pPr algn="just" indent="0" marL="0">
+                        <a:buNone/>
+                      </a:pPr>
+                      <a:r>
+                        <a:rPr lang="en-US" sz="1100" dirty="0">
+                          <a:solidFill>
+                            <a:schemeClr val="accent3"/>
+                          </a:solidFill>
+                          <a:latin typeface="Calibri" pitchFamily="34" charset="0"/>
+                          <a:ea typeface="Calibri" pitchFamily="34" charset="-122"/>
+                          <a:cs typeface="Calibri" pitchFamily="34" charset="-120"/>
+                        </a:rPr>
+                        <a:t>Estado de la observación: No superada.</a:t>
+                      </a:r>
+                      <a:endParaRPr lang="en-US" sz="1100" dirty="0">
+                        <a:latin typeface="Calibri" charset="0"/>
+                        <a:ea typeface="Calibri" charset="0"/>
+                        <a:cs typeface="Calibri" charset="0"/>
+                      </a:endParaRPr>
+                    </a:p>
+                  </a:txBody>
+                  <a:tcPr marL="54864" marR="54864" marT="18288" marB="18288" anchor="ctr">
+                    <a:lnL w="0" cap="flat" cmpd="sng" algn="ctr">
+                      <a:noFill/>
+                    </a:lnL>
+                    <a:lnR w="0" cap="flat" cmpd="sng" algn="ctr">
+                      <a:noFill/>
+                    </a:lnR>
+                    <a:lnT w="0" cap="flat" cmpd="sng" algn="ctr">
+                      <a:noFill/>
+                    </a:lnT>
+                    <a:lnB w="9525" cap="flat" cmpd="sng" algn="ctr">
+                      <a:solidFill>
+                        <a:srgbClr val="D9E0EA"/>
+                      </a:solidFill>
+                      <a:prstDash val="solid"/>
+                      <a:round/>
+                      <a:headEnd type="none" w="med" len="med"/>
+                      <a:tailEnd type="none" w="med" len="med"/>
+                    </a:lnB>
+                    <a:solidFill>
+                      <a:srgbClr val="FBEAE8"/>
+                    </a:solidFill>
+                  </a:tcPr>
+                </a:tc>
+                <a:tc>
+                  <a:txBody>
+                    <a:bodyPr/>
+                    <a:lstStyle/>
+                    <a:p>
+                      <a:pPr algn="just" indent="0" marL="0">
+                        <a:buNone/>
+                      </a:pPr>
+                      <a:r>
+                        <a:rPr lang="en-US" sz="1100" dirty="0">
+                          <a:solidFill>
+                            <a:schemeClr val="tx1"/>
+                          </a:solidFill>
+                          <a:latin typeface="Calibri" pitchFamily="34" charset="0"/>
+                          <a:ea typeface="Calibri" pitchFamily="34" charset="-122"/>
+                          <a:cs typeface="Calibri" pitchFamily="34" charset="-120"/>
+                        </a:rPr>
+                        <a:t>Se trabajará en modificar el Plan de Contingencia de Liquidez para subsanar las observaciones indicadas por la SSF.</a:t>
+                      </a:r>
+                      <a:endParaRPr lang="en-US" sz="1100" dirty="0">
+                        <a:latin typeface="Calibri" charset="0"/>
+                        <a:ea typeface="Calibri" charset="0"/>
+                        <a:cs typeface="Calibri" charset="0"/>
+                      </a:endParaRPr>
+                    </a:p>
+                    <a:p>
+                      <a:pPr algn="just" indent="0" marL="0">
+                        <a:buNone/>
+                      </a:pPr>
+                      <a:r>
+                        <a:rPr lang="en-US" sz="1100" dirty="0">
+                          <a:solidFill>
+                            <a:schemeClr val="tx1"/>
+                          </a:solidFill>
+                          <a:latin typeface="Calibri" pitchFamily="34" charset="0"/>
+                          <a:ea typeface="Calibri" pitchFamily="34" charset="-122"/>
+                          <a:cs typeface="Calibri" pitchFamily="34" charset="-120"/>
+                        </a:rPr>
+                        <a:t>Fecha de finalización: 16 de noviembre de 2026</a:t>
+                      </a:r>
+                      <a:endParaRPr lang="en-US" sz="1100" dirty="0">
+                        <a:latin typeface="Calibri" charset="0"/>
+                        <a:ea typeface="Calibri" charset="0"/>
+                        <a:cs typeface="Calibri" charset="0"/>
+                      </a:endParaRPr>
+                    </a:p>
+                  </a:txBody>
+                  <a:tcPr marL="54864" marR="54864" marT="18288" marB="18288" anchor="ctr">
+                    <a:lnL w="0" cap="flat" cmpd="sng" algn="ctr">
+                      <a:noFill/>
+                    </a:lnL>
+                    <a:lnR w="0" cap="flat" cmpd="sng" algn="ctr">
+                      <a:noFill/>
+                    </a:lnR>
+                    <a:lnT w="0" cap="flat" cmpd="sng" algn="ctr">
+                      <a:noFill/>
+                    </a:lnT>
+                    <a:lnB w="9525" cap="flat" cmpd="sng" algn="ctr">
+                      <a:solidFill>
+                        <a:srgbClr val="D9E0EA"/>
+                      </a:solidFill>
+                      <a:prstDash val="solid"/>
+                      <a:round/>
+                      <a:headEnd type="none" w="med" len="med"/>
+                      <a:tailEnd type="none" w="med" len="med"/>
+                    </a:lnB>
+                  </a:tcPr>
+                </a:tc>
+                <a:tc>
+                  <a:txBody>
+                    <a:bodyPr/>
+                    <a:lstStyle/>
+                    <a:p>
+                      <a:pPr algn="l" indent="0" marL="0">
+                        <a:buNone/>
+                      </a:pPr>
+                      <a:r>
+                        <a:rPr lang="en-US" sz="1100" b="1" dirty="0">
+                          <a:solidFill>
+                            <a:schemeClr val="accent1"/>
+                          </a:solidFill>
+                          <a:latin typeface="Calibri" pitchFamily="34" charset="0"/>
+                          <a:ea typeface="Calibri" pitchFamily="34" charset="-122"/>
+                          <a:cs typeface="Calibri" pitchFamily="34" charset="-120"/>
+                        </a:rPr>
+                        <a:t>Gerencia Financiera</a:t>
+                      </a:r>
+                      <a:endParaRPr lang="en-US" sz="1100" dirty="0">
+                        <a:latin typeface="Calibri" charset="0"/>
+                        <a:ea typeface="Calibri" charset="0"/>
+                        <a:cs typeface="Calibri" charset="0"/>
+                      </a:endParaRPr>
+                    </a:p>
+                  </a:txBody>
+                  <a:tcPr marL="54864" marR="54864" marT="18288" marB="18288" anchor="ctr">
+                    <a:lnL w="0" cap="flat" cmpd="sng" algn="ctr">
+                      <a:noFill/>
+                    </a:lnL>
+                    <a:lnR w="0" cap="flat" cmpd="sng" algn="ctr">
+                      <a:noFill/>
+                    </a:lnR>
+                    <a:lnT w="0" cap="flat" cmpd="sng" algn="ctr">
+                      <a:noFill/>
+                    </a:lnT>
+                    <a:lnB w="9525" cap="flat" cmpd="sng" algn="ctr">
+                      <a:solidFill>
+                        <a:srgbClr val="D9E0EA"/>
+                      </a:solidFill>
+                      <a:prstDash val="solid"/>
+                      <a:round/>
+                      <a:headEnd type="none" w="med" len="med"/>
+                      <a:tailEnd type="none" w="med" len="med"/>
+                    </a:lnB>
+                  </a:tcPr>
+                </a:tc>
+              </a:tr>
+              <a:tr h="0">
+                <a:tc>
+                  <a:txBody>
+                    <a:bodyPr/>
+                    <a:lstStyle/>
+                    <a:p>
+                      <a:pPr algn="just" indent="0" marL="0">
+                        <a:buNone/>
+                      </a:pPr>
+                      <a:r>
+                        <a:rPr lang="en-US" sz="1100" b="1" dirty="0">
+                          <a:solidFill>
+                            <a:schemeClr val="tx1"/>
+                          </a:solidFill>
+                          <a:latin typeface="Calibri" pitchFamily="34" charset="0"/>
+                          <a:ea typeface="Calibri" pitchFamily="34" charset="-122"/>
+                          <a:cs typeface="Calibri" pitchFamily="34" charset="-120"/>
+                        </a:rPr>
+                        <a:t>Observación 2: Inconsistencia en los roles y responsabilidades asignados en la elaboración del Plan de Contingencia de Liquidez</a:t>
+                      </a:r>
+                      <a:endParaRPr lang="en-US" sz="1100" dirty="0">
+                        <a:latin typeface="Calibri" charset="0"/>
+                        <a:ea typeface="Calibri" charset="0"/>
+                        <a:cs typeface="Calibri" charset="0"/>
+                      </a:endParaRPr>
+                    </a:p>
+                    <a:p>
+                      <a:pPr algn="just" indent="0" marL="0">
+                        <a:buNone/>
+                      </a:pPr>
+                      <a:r>
+                        <a:rPr lang="en-US" sz="1100" dirty="0">
+                          <a:solidFill>
+                            <a:schemeClr val="accent3"/>
+                          </a:solidFill>
+                          <a:latin typeface="Calibri" pitchFamily="34" charset="0"/>
+                          <a:ea typeface="Calibri" pitchFamily="34" charset="-122"/>
+                          <a:cs typeface="Calibri" pitchFamily="34" charset="-120"/>
+                        </a:rPr>
+                        <a:t>Estado de la observación: No superada.</a:t>
+                      </a:r>
+                      <a:endParaRPr lang="en-US" sz="1100" dirty="0">
+                        <a:latin typeface="Calibri" charset="0"/>
+                        <a:ea typeface="Calibri" charset="0"/>
+                        <a:cs typeface="Calibri" charset="0"/>
+                      </a:endParaRPr>
+                    </a:p>
+                  </a:txBody>
+                  <a:tcPr marL="54864" marR="54864" marT="18288" marB="18288" anchor="ctr">
+                    <a:lnL w="0" cap="flat" cmpd="sng" algn="ctr">
+                      <a:noFill/>
+                    </a:lnL>
+                    <a:lnR w="0" cap="flat" cmpd="sng" algn="ctr">
+                      <a:noFill/>
+                    </a:lnR>
+                    <a:lnT w="0" cap="flat" cmpd="sng" algn="ctr">
+                      <a:noFill/>
+                    </a:lnT>
+                    <a:lnB w="9525" cap="flat" cmpd="sng" algn="ctr">
+                      <a:solidFill>
+                        <a:srgbClr val="D9E0EA"/>
+                      </a:solidFill>
+                      <a:prstDash val="solid"/>
+                      <a:round/>
+                      <a:headEnd type="none" w="med" len="med"/>
+                      <a:tailEnd type="none" w="med" len="med"/>
+                    </a:lnB>
+                    <a:solidFill>
+                      <a:srgbClr val="FBEAE8"/>
+                    </a:solidFill>
+                  </a:tcPr>
+                </a:tc>
+                <a:tc>
+                  <a:txBody>
+                    <a:bodyPr/>
+                    <a:lstStyle/>
+                    <a:p>
+                      <a:pPr algn="just" indent="0" marL="0">
+                        <a:buNone/>
+                      </a:pPr>
+                      <a:r>
+                        <a:rPr lang="en-US" sz="1100" dirty="0">
+                          <a:solidFill>
+                            <a:schemeClr val="tx1"/>
+                          </a:solidFill>
+                          <a:latin typeface="Calibri" pitchFamily="34" charset="0"/>
+                          <a:ea typeface="Calibri" pitchFamily="34" charset="-122"/>
+                          <a:cs typeface="Calibri" pitchFamily="34" charset="-120"/>
+                        </a:rPr>
+                        <a:t>Se trabajará en modificar el Plan de Contingencia de Liquidez para subsanar las observaciones indicadas por la SSF.</a:t>
+                      </a:r>
+                      <a:endParaRPr lang="en-US" sz="1100" dirty="0">
+                        <a:latin typeface="Calibri" charset="0"/>
+                        <a:ea typeface="Calibri" charset="0"/>
+                        <a:cs typeface="Calibri" charset="0"/>
+                      </a:endParaRPr>
+                    </a:p>
+                    <a:p>
+                      <a:pPr algn="just" indent="0" marL="0">
+                        <a:buNone/>
+                      </a:pPr>
+                      <a:r>
+                        <a:rPr lang="en-US" sz="1100" dirty="0">
+                          <a:solidFill>
+                            <a:schemeClr val="tx1"/>
+                          </a:solidFill>
+                          <a:latin typeface="Calibri" pitchFamily="34" charset="0"/>
+                          <a:ea typeface="Calibri" pitchFamily="34" charset="-122"/>
+                          <a:cs typeface="Calibri" pitchFamily="34" charset="-120"/>
+                        </a:rPr>
+                        <a:t>Fecha de finalización: 16 de noviembre de 2026.</a:t>
+                      </a:r>
+                      <a:endParaRPr lang="en-US" sz="1100" dirty="0">
+                        <a:latin typeface="Calibri" charset="0"/>
+                        <a:ea typeface="Calibri" charset="0"/>
+                        <a:cs typeface="Calibri" charset="0"/>
+                      </a:endParaRPr>
+                    </a:p>
+                  </a:txBody>
+                  <a:tcPr marL="54864" marR="54864" marT="18288" marB="18288" anchor="ctr">
+                    <a:lnL w="0" cap="flat" cmpd="sng" algn="ctr">
+                      <a:noFill/>
+                    </a:lnL>
+                    <a:lnR w="0" cap="flat" cmpd="sng" algn="ctr">
+                      <a:noFill/>
+                    </a:lnR>
+                    <a:lnT w="0" cap="flat" cmpd="sng" algn="ctr">
+                      <a:noFill/>
+                    </a:lnT>
+                    <a:lnB w="9525" cap="flat" cmpd="sng" algn="ctr">
+                      <a:solidFill>
+                        <a:srgbClr val="D9E0EA"/>
+                      </a:solidFill>
+                      <a:prstDash val="solid"/>
+                      <a:round/>
+                      <a:headEnd type="none" w="med" len="med"/>
+                      <a:tailEnd type="none" w="med" len="med"/>
+                    </a:lnB>
+                  </a:tcPr>
+                </a:tc>
+                <a:tc>
+                  <a:txBody>
+                    <a:bodyPr/>
+                    <a:lstStyle/>
+                    <a:p>
+                      <a:pPr algn="l" indent="0" marL="0">
+                        <a:buNone/>
+                      </a:pPr>
+                      <a:r>
+                        <a:rPr lang="en-US" sz="1100" b="1" dirty="0">
+                          <a:solidFill>
+                            <a:schemeClr val="accent1"/>
+                          </a:solidFill>
+                          <a:latin typeface="Calibri" pitchFamily="34" charset="0"/>
+                          <a:ea typeface="Calibri" pitchFamily="34" charset="-122"/>
+                          <a:cs typeface="Calibri" pitchFamily="34" charset="-120"/>
+                        </a:rPr>
+                        <a:t>Gerencia Financiera</a:t>
+                      </a:r>
+                      <a:endParaRPr lang="en-US" sz="1100" dirty="0">
+                        <a:latin typeface="Calibri" charset="0"/>
+                        <a:ea typeface="Calibri" charset="0"/>
+                        <a:cs typeface="Calibri" charset="0"/>
+                      </a:endParaRPr>
+                    </a:p>
+                  </a:txBody>
+                  <a:tcPr marL="54864" marR="54864" marT="18288" marB="18288" anchor="ctr">
+                    <a:lnL w="0" cap="flat" cmpd="sng" algn="ctr">
+                      <a:noFill/>
+                    </a:lnL>
+                    <a:lnR w="0" cap="flat" cmpd="sng" algn="ctr">
+                      <a:noFill/>
+                    </a:lnR>
+                    <a:lnT w="0" cap="flat" cmpd="sng" algn="ctr">
+                      <a:noFill/>
+                    </a:lnT>
+                    <a:lnB w="9525" cap="flat" cmpd="sng" algn="ctr">
+                      <a:solidFill>
+                        <a:srgbClr val="D9E0EA"/>
+                      </a:solidFill>
+                      <a:prstDash val="solid"/>
+                      <a:round/>
+                      <a:headEnd type="none" w="med" len="med"/>
+                      <a:tailEnd type="none" w="med" len="med"/>
+                    </a:lnB>
+                  </a:tcPr>
+                </a:tc>
+              </a:tr>
+              <a:tr h="0">
+                <a:tc gridSpan="3">
+                  <a:txBody>
+                    <a:bodyPr/>
+                    <a:lstStyle/>
+                    <a:p>
+                      <a:pPr algn="just" indent="0" marL="0">
+                        <a:buNone/>
+                      </a:pPr>
+                      <a:r>
+                        <a:rPr lang="en-US" sz="1100" b="1" dirty="0">
+                          <a:solidFill>
+                            <a:schemeClr val="accent1"/>
+                          </a:solidFill>
+                          <a:latin typeface="Calibri" pitchFamily="34" charset="0"/>
+                          <a:ea typeface="Calibri" pitchFamily="34" charset="-122"/>
+                          <a:cs typeface="Calibri" pitchFamily="34" charset="-120"/>
+                        </a:rPr>
+                        <a:t>C.3.2. Gestión de riesgo Operacional y Tecnológico.</a:t>
+                      </a:r>
+                      <a:endParaRPr lang="en-US" sz="1100" dirty="0">
+                        <a:latin typeface="Calibri" charset="0"/>
+                        <a:ea typeface="Calibri" charset="0"/>
+                        <a:cs typeface="Calibri" charset="0"/>
+                      </a:endParaRPr>
+                    </a:p>
+                  </a:txBody>
+                  <a:tcPr marL="54864" marR="54864" marT="18288" marB="18288" anchor="ctr">
+                    <a:lnL w="0" cap="flat" cmpd="sng" algn="ctr">
+                      <a:noFill/>
+                    </a:lnL>
+                    <a:lnR w="0" cap="flat" cmpd="sng" algn="ctr">
+                      <a:noFill/>
+                    </a:lnR>
+                    <a:lnT w="0" cap="flat" cmpd="sng" algn="ctr">
+                      <a:noFill/>
+                    </a:lnT>
+                    <a:lnB w="9525" cap="flat" cmpd="sng" algn="ctr">
+                      <a:solidFill>
+                        <a:srgbClr val="D9E0EA"/>
+                      </a:solidFill>
+                      <a:prstDash val="solid"/>
+                      <a:round/>
+                      <a:headEnd type="none" w="med" len="med"/>
+                      <a:tailEnd type="none" w="med" len="med"/>
+                    </a:lnB>
+                    <a:solidFill>
+                      <a:schemeClr val="bg2"/>
+                    </a:solidFill>
+                  </a:tcPr>
+                </a:tc>
+                <a:tc hMerge="1">
+                  <a:tcPr/>
+                </a:tc>
+                <a:tc hMerge="1">
+                  <a:tcPr/>
+                </a:tc>
+              </a:tr>
+              <a:tr h="0">
+                <a:tc>
+                  <a:txBody>
+                    <a:bodyPr/>
+                    <a:lstStyle/>
+                    <a:p>
+                      <a:pPr algn="just" indent="0" marL="0">
+                        <a:buNone/>
+                      </a:pPr>
+                      <a:r>
+                        <a:rPr lang="en-US" sz="1100" b="1" dirty="0">
+                          <a:solidFill>
+                            <a:schemeClr val="tx1"/>
+                          </a:solidFill>
+                          <a:latin typeface="Calibri" pitchFamily="34" charset="0"/>
+                          <a:ea typeface="Calibri" pitchFamily="34" charset="-122"/>
+                          <a:cs typeface="Calibri" pitchFamily="34" charset="-120"/>
+                        </a:rPr>
+                        <a:t>Observación 1: Falta de actualización de normativa interna relacionada la gestión de Riesgo Operacional y Tecnológico</a:t>
+                      </a:r>
+                      <a:endParaRPr lang="en-US" sz="1100" dirty="0">
+                        <a:latin typeface="Calibri" charset="0"/>
+                        <a:ea typeface="Calibri" charset="0"/>
+                        <a:cs typeface="Calibri" charset="0"/>
+                      </a:endParaRPr>
+                    </a:p>
+                    <a:p>
+                      <a:pPr algn="just" indent="0" marL="0">
+                        <a:buNone/>
+                      </a:pPr>
+                      <a:r>
+                        <a:rPr lang="en-US" sz="1100" dirty="0">
+                          <a:solidFill>
+                            <a:schemeClr val="tx1"/>
+                          </a:solidFill>
+                          <a:latin typeface="Calibri" pitchFamily="34" charset="0"/>
+                          <a:ea typeface="Calibri" pitchFamily="34" charset="-122"/>
+                          <a:cs typeface="Calibri" pitchFamily="34" charset="-120"/>
+                        </a:rPr>
+                        <a:t>Seguimiento realizado en la presente visita de supervisión:</a:t>
+                      </a:r>
+                      <a:endParaRPr lang="en-US" sz="1100" dirty="0">
+                        <a:latin typeface="Calibri" charset="0"/>
+                        <a:ea typeface="Calibri" charset="0"/>
+                        <a:cs typeface="Calibri" charset="0"/>
+                      </a:endParaRPr>
+                    </a:p>
+                    <a:p>
+                      <a:pPr algn="just" indent="0" marL="0">
+                        <a:buNone/>
+                      </a:pPr>
+                      <a:r>
+                        <a:rPr lang="en-US" sz="1100" dirty="0">
+                          <a:solidFill>
+                            <a:schemeClr val="accent6"/>
+                          </a:solidFill>
+                          <a:latin typeface="Calibri" pitchFamily="34" charset="0"/>
+                          <a:ea typeface="Calibri" pitchFamily="34" charset="-122"/>
+                          <a:cs typeface="Calibri" pitchFamily="34" charset="-120"/>
+                        </a:rPr>
+                        <a:t>Estado de la observación: Parcialmente superada.</a:t>
+                      </a:r>
+                      <a:endParaRPr lang="en-US" sz="1100" dirty="0">
+                        <a:latin typeface="Calibri" charset="0"/>
+                        <a:ea typeface="Calibri" charset="0"/>
+                        <a:cs typeface="Calibri" charset="0"/>
+                      </a:endParaRPr>
+                    </a:p>
+                  </a:txBody>
+                  <a:tcPr marL="54864" marR="54864" marT="18288" marB="18288" anchor="ctr">
+                    <a:lnL w="0" cap="flat" cmpd="sng" algn="ctr">
+                      <a:noFill/>
+                    </a:lnL>
+                    <a:lnR w="0" cap="flat" cmpd="sng" algn="ctr">
+                      <a:noFill/>
+                    </a:lnR>
+                    <a:lnT w="0" cap="flat" cmpd="sng" algn="ctr">
+                      <a:noFill/>
+                    </a:lnT>
+                    <a:lnB w="9525" cap="flat" cmpd="sng" algn="ctr">
+                      <a:solidFill>
+                        <a:srgbClr val="D9E0EA"/>
+                      </a:solidFill>
+                      <a:prstDash val="solid"/>
+                      <a:round/>
+                      <a:headEnd type="none" w="med" len="med"/>
+                      <a:tailEnd type="none" w="med" len="med"/>
+                    </a:lnB>
+                    <a:solidFill>
+                      <a:srgbClr val="FDF4E3"/>
+                    </a:solidFill>
+                  </a:tcPr>
+                </a:tc>
+                <a:tc>
+                  <a:txBody>
+                    <a:bodyPr/>
+                    <a:lstStyle/>
+                    <a:p>
+                      <a:pPr algn="just" indent="0" marL="0">
+                        <a:buNone/>
+                      </a:pPr>
+                      <a:r>
+                        <a:rPr lang="en-US" sz="1100" dirty="0">
+                          <a:solidFill>
+                            <a:schemeClr val="tx1"/>
+                          </a:solidFill>
+                          <a:latin typeface="Calibri" pitchFamily="34" charset="0"/>
+                          <a:ea typeface="Calibri" pitchFamily="34" charset="-122"/>
+                          <a:cs typeface="Calibri" pitchFamily="34" charset="-120"/>
+                        </a:rPr>
+                        <a:t>Se agrega documentos actualizados, según detalle:</a:t>
+                      </a:r>
+                      <a:endParaRPr lang="en-US" sz="1100" dirty="0">
+                        <a:latin typeface="Calibri" charset="0"/>
+                        <a:ea typeface="Calibri" charset="0"/>
+                        <a:cs typeface="Calibri" charset="0"/>
+                      </a:endParaRPr>
+                    </a:p>
+                    <a:p>
+                      <a:pPr algn="just" indent="0" marL="0">
+                        <a:buNone/>
+                      </a:pPr>
+                      <a:r>
+                        <a:rPr lang="en-US" sz="1100" dirty="0">
+                          <a:solidFill>
+                            <a:schemeClr val="tx1"/>
+                          </a:solidFill>
+                          <a:latin typeface="Calibri" pitchFamily="34" charset="0"/>
+                          <a:ea typeface="Calibri" pitchFamily="34" charset="-122"/>
+                          <a:cs typeface="Calibri" pitchFamily="34" charset="-120"/>
+                        </a:rPr>
+                        <a:t>Política de Gestión de Riesgo Operacional</a:t>
+                      </a:r>
+                      <a:endParaRPr lang="en-US" sz="1100" dirty="0">
+                        <a:latin typeface="Calibri" charset="0"/>
+                        <a:ea typeface="Calibri" charset="0"/>
+                        <a:cs typeface="Calibri" charset="0"/>
+                      </a:endParaRPr>
+                    </a:p>
+                    <a:p>
+                      <a:pPr algn="just" indent="0" marL="0">
+                        <a:buNone/>
+                      </a:pPr>
+                      <a:r>
+                        <a:rPr lang="en-US" sz="1100" dirty="0">
+                          <a:solidFill>
+                            <a:schemeClr val="tx1"/>
+                          </a:solidFill>
+                          <a:latin typeface="Calibri" pitchFamily="34" charset="0"/>
+                          <a:ea typeface="Calibri" pitchFamily="34" charset="-122"/>
+                          <a:cs typeface="Calibri" pitchFamily="34" charset="-120"/>
+                        </a:rPr>
+                        <a:t>Manual de Administración de Riesgo Tecnológico.</a:t>
+                      </a:r>
+                      <a:endParaRPr lang="en-US" sz="1100" dirty="0">
+                        <a:latin typeface="Calibri" charset="0"/>
+                        <a:ea typeface="Calibri" charset="0"/>
+                        <a:cs typeface="Calibri" charset="0"/>
+                      </a:endParaRPr>
+                    </a:p>
+                    <a:p>
+                      <a:pPr algn="just" indent="0" marL="0">
+                        <a:buNone/>
+                      </a:pPr>
+                      <a:r>
+                        <a:rPr lang="en-US" sz="1100" dirty="0">
+                          <a:solidFill>
+                            <a:schemeClr val="tx1"/>
+                          </a:solidFill>
+                          <a:latin typeface="Calibri" pitchFamily="34" charset="0"/>
+                          <a:ea typeface="Calibri" pitchFamily="34" charset="-122"/>
+                          <a:cs typeface="Calibri" pitchFamily="34" charset="-120"/>
+                        </a:rPr>
+                        <a:t>Pendiente de presentar al Comité de Riesgos: Política de contratación de servicios críticos tercerizados.</a:t>
+                      </a:r>
+                      <a:endParaRPr lang="en-US" sz="1100" dirty="0">
+                        <a:latin typeface="Calibri" charset="0"/>
+                        <a:ea typeface="Calibri" charset="0"/>
+                        <a:cs typeface="Calibri" charset="0"/>
+                      </a:endParaRPr>
+                    </a:p>
+                  </a:txBody>
+                  <a:tcPr marL="54864" marR="54864" marT="18288" marB="18288" anchor="ctr">
+                    <a:lnL w="0" cap="flat" cmpd="sng" algn="ctr">
+                      <a:noFill/>
+                    </a:lnL>
+                    <a:lnR w="0" cap="flat" cmpd="sng" algn="ctr">
+                      <a:noFill/>
+                    </a:lnR>
+                    <a:lnT w="0" cap="flat" cmpd="sng" algn="ctr">
+                      <a:noFill/>
+                    </a:lnT>
+                    <a:lnB w="9525" cap="flat" cmpd="sng" algn="ctr">
+                      <a:solidFill>
+                        <a:srgbClr val="D9E0EA"/>
+                      </a:solidFill>
+                      <a:prstDash val="solid"/>
+                      <a:round/>
+                      <a:headEnd type="none" w="med" len="med"/>
+                      <a:tailEnd type="none" w="med" len="med"/>
+                    </a:lnB>
+                  </a:tcPr>
+                </a:tc>
+                <a:tc>
+                  <a:txBody>
+                    <a:bodyPr/>
+                    <a:lstStyle/>
+                    <a:p>
+                      <a:pPr algn="l" indent="0" marL="0">
+                        <a:buNone/>
+                      </a:pPr>
+                      <a:r>
+                        <a:rPr lang="en-US" sz="1100" b="1" dirty="0">
+                          <a:solidFill>
+                            <a:schemeClr val="accent1"/>
+                          </a:solidFill>
+                          <a:latin typeface="Calibri" pitchFamily="34" charset="0"/>
+                          <a:ea typeface="Calibri" pitchFamily="34" charset="-122"/>
+                          <a:cs typeface="Calibri" pitchFamily="34" charset="-120"/>
+                        </a:rPr>
+                        <a:t>Administración de Riesgos</a:t>
+                      </a:r>
+                      <a:endParaRPr lang="en-US" sz="1100" dirty="0">
+                        <a:latin typeface="Calibri" charset="0"/>
+                        <a:ea typeface="Calibri" charset="0"/>
+                        <a:cs typeface="Calibri" charset="0"/>
+                      </a:endParaRPr>
+                    </a:p>
+                  </a:txBody>
+                  <a:tcPr marL="54864" marR="54864" marT="18288" marB="18288" anchor="ctr">
+                    <a:lnL w="0" cap="flat" cmpd="sng" algn="ctr">
+                      <a:noFill/>
+                    </a:lnL>
+                    <a:lnR w="0" cap="flat" cmpd="sng" algn="ctr">
+                      <a:noFill/>
+                    </a:lnR>
+                    <a:lnT w="0" cap="flat" cmpd="sng" algn="ctr">
+                      <a:noFill/>
+                    </a:lnT>
+                    <a:lnB w="9525" cap="flat" cmpd="sng" algn="ctr">
+                      <a:solidFill>
+                        <a:srgbClr val="D9E0EA"/>
+                      </a:solidFill>
+                      <a:prstDash val="solid"/>
+                      <a:round/>
+                      <a:headEnd type="none" w="med" len="med"/>
+                      <a:tailEnd type="none" w="med" len="med"/>
+                    </a:lnB>
+                  </a:tcPr>
+                </a:tc>
+              </a:tr>
+              <a:tr h="0">
+                <a:tc>
+                  <a:txBody>
+                    <a:bodyPr/>
+                    <a:lstStyle/>
+                    <a:p>
+                      <a:pPr algn="just" indent="0" marL="0">
+                        <a:buNone/>
+                      </a:pPr>
+                      <a:r>
+                        <a:rPr lang="en-US" sz="1100" b="1" dirty="0">
+                          <a:solidFill>
+                            <a:schemeClr val="tx1"/>
+                          </a:solidFill>
+                          <a:latin typeface="Calibri" pitchFamily="34" charset="0"/>
+                          <a:ea typeface="Calibri" pitchFamily="34" charset="-122"/>
+                          <a:cs typeface="Calibri" pitchFamily="34" charset="-120"/>
+                        </a:rPr>
+                        <a:t>Observación 2: Omisión de la presentación del objetivo mínimo de continuidad de negocio (MBCO) en BIA con referencia al 31 de agosto del 2024.</a:t>
+                      </a:r>
+                      <a:endParaRPr lang="en-US" sz="1100" dirty="0">
+                        <a:latin typeface="Calibri" charset="0"/>
+                        <a:ea typeface="Calibri" charset="0"/>
+                        <a:cs typeface="Calibri" charset="0"/>
+                      </a:endParaRPr>
+                    </a:p>
+                    <a:p>
+                      <a:pPr algn="just" indent="0" marL="0">
+                        <a:buNone/>
+                      </a:pPr>
+                      <a:r>
+                        <a:rPr lang="en-US" sz="1100" dirty="0">
+                          <a:solidFill>
+                            <a:schemeClr val="accent3"/>
+                          </a:solidFill>
+                          <a:latin typeface="Calibri" pitchFamily="34" charset="0"/>
+                          <a:ea typeface="Calibri" pitchFamily="34" charset="-122"/>
+                          <a:cs typeface="Calibri" pitchFamily="34" charset="-120"/>
+                        </a:rPr>
+                        <a:t>Estado de la observación: No superada</a:t>
+                      </a:r>
+                      <a:endParaRPr lang="en-US" sz="1100" dirty="0">
+                        <a:latin typeface="Calibri" charset="0"/>
+                        <a:ea typeface="Calibri" charset="0"/>
+                        <a:cs typeface="Calibri" charset="0"/>
+                      </a:endParaRPr>
+                    </a:p>
+                  </a:txBody>
+                  <a:tcPr marL="54864" marR="54864" marT="18288" marB="18288" anchor="ctr">
+                    <a:lnL w="0" cap="flat" cmpd="sng" algn="ctr">
+                      <a:noFill/>
+                    </a:lnL>
+                    <a:lnR w="0" cap="flat" cmpd="sng" algn="ctr">
+                      <a:noFill/>
+                    </a:lnR>
+                    <a:lnT w="0" cap="flat" cmpd="sng" algn="ctr">
+                      <a:noFill/>
+                    </a:lnT>
+                    <a:lnB w="9525" cap="flat" cmpd="sng" algn="ctr">
+                      <a:solidFill>
+                        <a:srgbClr val="D9E0EA"/>
+                      </a:solidFill>
+                      <a:prstDash val="solid"/>
+                      <a:round/>
+                      <a:headEnd type="none" w="med" len="med"/>
+                      <a:tailEnd type="none" w="med" len="med"/>
+                    </a:lnB>
+                    <a:solidFill>
+                      <a:srgbClr val="FBEAE8"/>
+                    </a:solidFill>
+                  </a:tcPr>
+                </a:tc>
+                <a:tc>
+                  <a:txBody>
+                    <a:bodyPr/>
+                    <a:lstStyle/>
+                    <a:p>
+                      <a:pPr algn="just" indent="0" marL="0">
+                        <a:buNone/>
+                      </a:pPr>
+                      <a:r>
+                        <a:rPr lang="en-US" sz="1100" dirty="0">
+                          <a:solidFill>
+                            <a:schemeClr val="tx1"/>
+                          </a:solidFill>
+                          <a:latin typeface="Calibri" pitchFamily="34" charset="0"/>
+                          <a:ea typeface="Calibri" pitchFamily="34" charset="-122"/>
+                          <a:cs typeface="Calibri" pitchFamily="34" charset="-120"/>
+                        </a:rPr>
+                        <a:t>Programado actualizar el BIA en noviembre 2026, siendo esa fecha en la que se incorporará lo solicitado.</a:t>
+                      </a:r>
+                      <a:endParaRPr lang="en-US" sz="1100" dirty="0">
+                        <a:latin typeface="Calibri" charset="0"/>
+                        <a:ea typeface="Calibri" charset="0"/>
+                        <a:cs typeface="Calibri" charset="0"/>
+                      </a:endParaRPr>
+                    </a:p>
+                  </a:txBody>
+                  <a:tcPr marL="54864" marR="54864" marT="18288" marB="18288" anchor="ctr">
+                    <a:lnL w="0" cap="flat" cmpd="sng" algn="ctr">
+                      <a:noFill/>
+                    </a:lnL>
+                    <a:lnR w="0" cap="flat" cmpd="sng" algn="ctr">
+                      <a:noFill/>
+                    </a:lnR>
+                    <a:lnT w="0" cap="flat" cmpd="sng" algn="ctr">
+                      <a:noFill/>
+                    </a:lnT>
+                    <a:lnB w="9525" cap="flat" cmpd="sng" algn="ctr">
+                      <a:solidFill>
+                        <a:srgbClr val="D9E0EA"/>
+                      </a:solidFill>
+                      <a:prstDash val="solid"/>
+                      <a:round/>
+                      <a:headEnd type="none" w="med" len="med"/>
+                      <a:tailEnd type="none" w="med" len="med"/>
+                    </a:lnB>
+                  </a:tcPr>
+                </a:tc>
+                <a:tc>
+                  <a:txBody>
+                    <a:bodyPr/>
+                    <a:lstStyle/>
+                    <a:p>
+                      <a:pPr algn="l" indent="0" marL="0">
+                        <a:buNone/>
+                      </a:pPr>
+                      <a:r>
+                        <a:rPr lang="en-US" sz="1100" b="1" dirty="0">
+                          <a:solidFill>
+                            <a:schemeClr val="accent1"/>
+                          </a:solidFill>
+                          <a:latin typeface="Calibri" pitchFamily="34" charset="0"/>
+                          <a:ea typeface="Calibri" pitchFamily="34" charset="-122"/>
+                          <a:cs typeface="Calibri" pitchFamily="34" charset="-120"/>
+                        </a:rPr>
+                        <a:t>Administración de Riesgos</a:t>
+                      </a:r>
+                      <a:endParaRPr lang="en-US" sz="1100" dirty="0">
+                        <a:latin typeface="Calibri" charset="0"/>
+                        <a:ea typeface="Calibri" charset="0"/>
+                        <a:cs typeface="Calibri" charset="0"/>
+                      </a:endParaRPr>
+                    </a:p>
+                  </a:txBody>
+                  <a:tcPr marL="54864" marR="54864" marT="18288" marB="18288" anchor="ctr">
+                    <a:lnL w="0" cap="flat" cmpd="sng" algn="ctr">
+                      <a:noFill/>
+                    </a:lnL>
+                    <a:lnR w="0" cap="flat" cmpd="sng" algn="ctr">
+                      <a:noFill/>
+                    </a:lnR>
+                    <a:lnT w="0" cap="flat" cmpd="sng" algn="ctr">
+                      <a:noFill/>
+                    </a:lnT>
+                    <a:lnB w="9525" cap="flat" cmpd="sng" algn="ctr">
+                      <a:solidFill>
+                        <a:srgbClr val="D9E0EA"/>
+                      </a:solidFill>
+                      <a:prstDash val="solid"/>
+                      <a:round/>
+                      <a:headEnd type="none" w="med" len="med"/>
+                      <a:tailEnd type="none" w="med" len="med"/>
+                    </a:lnB>
+                  </a:tcPr>
+                </a:tc>
+              </a:tr>
+            </a:tbl>
+          </a:graphicData>
+        </a:graphic>
+      </p:graphicFrame>
+      <p:sp>
+        <p:nvSpPr>
+          <p:cNvPr id="25" name="Slide Number Placeholder 0"/>
+          <p:cNvSpPr>
+            <a:spLocks noGrp="1"/>
+          </p:cNvSpPr>
+          <p:nvPr>
+            <p:ph type="sldNum" sz="quarter" idx="4294967295"/>
+          </p:nvPr>
+        </p:nvSpPr>
+        <p:spPr>
+          <a:xfrm>
+            <a:off x="11323015" y="6583680"/>
+            <a:ext cx="457200" cy="182880"/>
+          </a:xfrm>
+          <a:prstGeom prst="rect">
+            <a:avLst/>
+          </a:prstGeom>
+          <a:extLst>
+            <a:ext uri="{C572A759-6A51-4108-AA02-DFA0A04FC94B}">
+              <ma14:wrappingTextBoxFlag xmlns:ma14="http://schemas.microsoft.com/office/mac/drawingml/2011/main" val="0"/>
+            </a:ext>
+          </a:extLst>
+        </p:spPr>
+        <p:txBody>
+          <a:bodyPr/>
+          <a:lstStyle>
+            <a:lvl1pPr>
+              <a:defRPr sz="850">
+                <a:solidFill>
+                  <a:schemeClr val="accent5"/>
+                </a:solidFill>
+              </a:defRPr>
+            </a:lvl1pPr>
+          </a:lstStyle>
+          <a:p>
+            <a:pPr algn="r"/>
+            <a:fld id="{F7021451-1387-4CA6-816F-3879F97B5CBC}" type="slidenum">
+              <a:rPr b="0" lang="en-US"/>
+              <a:t>4</a:t>
             </a:fld>
             <a:endParaRPr lang="en-US"/>
           </a:p>

--- a/supervision-gobierno-corporativo/Matriz_Requerimientos_DS-SABAO-BCS-BC-23486.pptx
+++ b/supervision-gobierno-corporativo/Matriz_Requerimientos_DS-SABAO-BCS-BC-23486.pptx
@@ -503,7 +503,7 @@
           <a:p>
             <a:r>
               <a:rPr lang="en-US" dirty="0"/>
-              <a:t>Texto tal como aparece en la Matriz de requerimientos DS-SABAO-BCS-BC-23486 (versión corta). Secciones A y B.</a:t>
+              <a:t>Matriz de requerimientos DS-SABAO-BCS-BC-23486 (versión corta). Secciones A y B. 'Comentario CA: 14/10/2026 Compromiso' se muestra como 'Pendiente'.</a:t>
             </a:r>
             <a:endParaRPr lang="en-US" dirty="0"/>
           </a:p>
@@ -1102,15 +1102,51 @@
                 <a:ea typeface="Cambria" pitchFamily="34" charset="-122"/>
                 <a:cs typeface="Cambria" pitchFamily="34" charset="-120"/>
               </a:rPr>
-              <a:t>Matriz de requerimientos DS-SABAO-BCS-BC-23486</a:t>
+              <a:t>Matriz de requerimientos DS-SABAO-BCS-BC-23486 · Gestión de Riesgo Específico</a:t>
             </a:r>
             <a:endParaRPr lang="en-US" sz="2000" dirty="0"/>
           </a:p>
         </p:txBody>
       </p:sp>
+      <p:sp>
+        <p:nvSpPr>
+          <p:cNvPr id="3" name="Sección A"/>
+          <p:cNvSpPr txBox="1"/>
+          <p:nvPr/>
+        </p:nvSpPr>
+        <p:spPr>
+          <a:xfrm>
+            <a:off x="411480" y="694944"/>
+            <a:ext cx="11368735" cy="237744"/>
+          </a:xfrm>
+          <a:prstGeom prst="rect">
+            <a:avLst/>
+          </a:prstGeom>
+          <a:noFill/>
+          <a:ln/>
+        </p:spPr>
+        <p:txBody>
+          <a:bodyPr wrap="square" lIns="0" tIns="0" rIns="0" bIns="0" rtlCol="0" anchor="ctr"/>
+          <a:lstStyle/>
+          <a:p>
+            <a:pPr indent="0" marL="0">
+              <a:buNone/>
+            </a:pPr>
+            <a:r>
+              <a:rPr lang="en-US" sz="1100" b="1" dirty="0">
+                <a:solidFill>
+                  <a:schemeClr val="accent1"/>
+                </a:solidFill>
+              </a:rPr>
+              <a:t>A. Gestión de Riesgo de LDA/FT/FPADM</a:t>
+            </a:r>
+            <a:endParaRPr lang="en-US" sz="1100" dirty="0"/>
+          </a:p>
+        </p:txBody>
+      </p:sp>
       <p:graphicFrame>
         <p:nvGraphicFramePr>
-          <p:cNvPr id="2" name="Tabla matriz"/>
+          <p:cNvPr id="2" name="Tabla sección A"/>
           <p:cNvGraphicFramePr>
             <a:graphicFrameLocks noGrp="1"/>
           </p:cNvGraphicFramePr>
@@ -1123,7 +1159,7 @@
           </p:nvPr>
         </p:nvGraphicFramePr>
         <p:xfrm>
-          <a:off x="411480" y="731520"/>
+          <a:off x="411480" y="969264"/>
           <a:ext cx="11368735" cy="914400"/>
         </p:xfrm>
         <a:graphic>
@@ -1131,9 +1167,9 @@
             <a:tbl>
               <a:tblPr/>
               <a:tblGrid>
-                <a:gridCol w="3657600"/>
-                <a:gridCol w="5971032"/>
-                <a:gridCol w="1737360"/>
+                <a:gridCol w="3977640"/>
+                <a:gridCol w="5788152"/>
+                <a:gridCol w="1600200"/>
               </a:tblGrid>
               <a:tr h="0">
                 <a:tc>
@@ -1162,7 +1198,7 @@
                       </a:endParaRPr>
                     </a:p>
                   </a:txBody>
-                  <a:tcPr marL="54864" marR="54864" marT="18288" marB="18288" anchor="ctr">
+                  <a:tcPr marL="54864" marR="54864" marT="13716" marB="13716" anchor="ctr">
                     <a:lnL w="0" cap="flat" cmpd="sng" algn="ctr">
                       <a:noFill/>
                     </a:lnL>
@@ -1212,7 +1248,7 @@
                       </a:endParaRPr>
                     </a:p>
                   </a:txBody>
-                  <a:tcPr marL="54864" marR="54864" marT="18288" marB="18288" anchor="ctr">
+                  <a:tcPr marL="54864" marR="54864" marT="13716" marB="13716" anchor="ctr">
                     <a:lnL w="0" cap="flat" cmpd="sng" algn="ctr">
                       <a:noFill/>
                     </a:lnL>
@@ -1253,7 +1289,7 @@
                           <a:ea typeface="Calibri" pitchFamily="34" charset="-122"/>
                           <a:cs typeface="Calibri" pitchFamily="34" charset="-120"/>
                         </a:rPr>
-                        <a:t>Funcionario</a:t>
+                        <a:t>Funcionario Responsable</a:t>
                       </a:r>
                       <a:endParaRPr lang="en-US" sz="900" dirty="0">
                         <a:latin typeface="Calibri" charset="0"/>
@@ -1261,29 +1297,8 @@
                         <a:cs typeface="Calibri" charset="0"/>
                       </a:endParaRPr>
                     </a:p>
-                    <a:p>
-                      <a:pPr algn="just" indent="0" marL="0">
-                        <a:buNone/>
-                      </a:pPr>
-                      <a:r>
-                        <a:rPr lang="en-US" sz="900" b="1" dirty="0">
-                          <a:solidFill>
-                            <a:schemeClr val="bg1"/>
-                          </a:solidFill>
-                          <a:latin typeface="Calibri" pitchFamily="34" charset="0"/>
-                          <a:ea typeface="Calibri" pitchFamily="34" charset="-122"/>
-                          <a:cs typeface="Calibri" pitchFamily="34" charset="-120"/>
-                        </a:rPr>
-                        <a:t>Responsable</a:t>
-                      </a:r>
-                      <a:endParaRPr lang="en-US" sz="900" dirty="0">
-                        <a:latin typeface="Calibri" charset="0"/>
-                        <a:ea typeface="Calibri" charset="0"/>
-                        <a:cs typeface="Calibri" charset="0"/>
-                      </a:endParaRPr>
-                    </a:p>
-                  </a:txBody>
-                  <a:tcPr marL="54864" marR="54864" marT="18288" marB="18288" anchor="ctr">
+                  </a:txBody>
+                  <a:tcPr marL="54864" marR="54864" marT="13716" marB="13716" anchor="ctr">
                     <a:lnL w="0" cap="flat" cmpd="sng" algn="ctr">
                       <a:noFill/>
                     </a:lnL>
@@ -1309,91 +1324,33 @@
                 </a:tc>
               </a:tr>
               <a:tr h="0">
-                <a:tc gridSpan="3">
-                  <a:txBody>
-                    <a:bodyPr/>
-                    <a:lstStyle/>
-                    <a:p>
-                      <a:pPr algn="just" indent="0" marL="0">
-                        <a:buNone/>
-                      </a:pPr>
-                      <a:r>
-                        <a:rPr lang="en-US" sz="780" b="1" dirty="0">
-                          <a:solidFill>
-                            <a:schemeClr val="accent1"/>
-                          </a:solidFill>
-                          <a:latin typeface="Calibri" pitchFamily="34" charset="0"/>
-                          <a:ea typeface="Calibri" pitchFamily="34" charset="-122"/>
-                          <a:cs typeface="Calibri" pitchFamily="34" charset="-120"/>
-                        </a:rPr>
-                        <a:t>A. Gestión de Riesgo de LDA/FT/FPADM</a:t>
-                      </a:r>
-                      <a:endParaRPr lang="en-US" sz="780" dirty="0">
-                        <a:latin typeface="Calibri" charset="0"/>
-                        <a:ea typeface="Calibri" charset="0"/>
-                        <a:cs typeface="Calibri" charset="0"/>
-                      </a:endParaRPr>
-                    </a:p>
-                  </a:txBody>
-                  <a:tcPr marL="54864" marR="54864" marT="18288" marB="18288" anchor="ctr">
-                    <a:lnL w="0" cap="flat" cmpd="sng" algn="ctr">
-                      <a:noFill/>
-                    </a:lnL>
-                    <a:lnR w="0" cap="flat" cmpd="sng" algn="ctr">
-                      <a:noFill/>
-                    </a:lnR>
-                    <a:lnT w="0" cap="flat" cmpd="sng" algn="ctr">
-                      <a:noFill/>
-                    </a:lnT>
-                    <a:lnB w="9525" cap="flat" cmpd="sng" algn="ctr">
-                      <a:solidFill>
-                        <a:srgbClr val="D9E0EA"/>
-                      </a:solidFill>
-                      <a:prstDash val="solid"/>
-                      <a:round/>
-                      <a:headEnd type="none" w="med" len="med"/>
-                      <a:tailEnd type="none" w="med" len="med"/>
-                    </a:lnB>
-                    <a:solidFill>
-                      <a:schemeClr val="bg2"/>
-                    </a:solidFill>
-                  </a:tcPr>
-                </a:tc>
-                <a:tc hMerge="1">
-                  <a:tcPr/>
-                </a:tc>
-                <a:tc hMerge="1">
-                  <a:tcPr/>
-                </a:tc>
-              </a:tr>
-              <a:tr h="0">
-                <a:tc>
-                  <a:txBody>
-                    <a:bodyPr/>
-                    <a:lstStyle/>
-                    <a:p>
-                      <a:pPr algn="just" indent="0" marL="0">
-                        <a:buNone/>
-                      </a:pPr>
-                      <a:r>
-                        <a:rPr lang="en-US" sz="780" b="1" dirty="0">
-                          <a:solidFill>
-                            <a:schemeClr val="tx1"/>
-                          </a:solidFill>
-                          <a:latin typeface="Calibri" pitchFamily="34" charset="0"/>
-                          <a:ea typeface="Calibri" pitchFamily="34" charset="-122"/>
-                          <a:cs typeface="Calibri" pitchFamily="34" charset="-120"/>
-                        </a:rPr>
-                        <a:t>Deficiencias en la conformación y actualización de expedientes de clientes.</a:t>
-                      </a:r>
-                      <a:endParaRPr lang="en-US" sz="780" dirty="0">
-                        <a:latin typeface="Calibri" charset="0"/>
-                        <a:ea typeface="Calibri" charset="0"/>
-                        <a:cs typeface="Calibri" charset="0"/>
-                      </a:endParaRPr>
-                    </a:p>
-                  </a:txBody>
-                  <a:tcPr marL="54864" marR="54864" marT="18288" marB="18288" anchor="ctr">
+                <a:tc>
+                  <a:txBody>
+                    <a:bodyPr/>
+                    <a:lstStyle/>
+                    <a:p>
+                      <a:pPr algn="just" indent="0" marL="0">
+                        <a:buNone/>
+                      </a:pPr>
+                      <a:r>
+                        <a:rPr lang="en-US" sz="760" b="1" dirty="0">
+                          <a:solidFill>
+                            <a:schemeClr val="tx1"/>
+                          </a:solidFill>
+                          <a:latin typeface="Calibri" pitchFamily="34" charset="0"/>
+                          <a:ea typeface="Calibri" pitchFamily="34" charset="-122"/>
+                          <a:cs typeface="Calibri" pitchFamily="34" charset="-120"/>
+                        </a:rPr>
+                        <a:t>A.1  Deficiencias en la conformación y actualización de expedientes de clientes.</a:t>
+                      </a:r>
+                      <a:endParaRPr lang="en-US" sz="760" dirty="0">
+                        <a:latin typeface="Calibri" charset="0"/>
+                        <a:ea typeface="Calibri" charset="0"/>
+                        <a:cs typeface="Calibri" charset="0"/>
+                      </a:endParaRPr>
+                    </a:p>
+                  </a:txBody>
+                  <a:tcPr marL="54864" marR="54864" marT="13716" marB="13716" anchor="ctr">
                     <a:lnL w="0" cap="flat" cmpd="sng" algn="ctr">
                       <a:noFill/>
                     </a:lnL>
@@ -1426,24 +1383,24 @@
                         <a:buNone/>
                       </a:pPr>
                       <a:r>
-                        <a:rPr lang="en-US" sz="780" dirty="0">
-                          <a:solidFill>
-                            <a:schemeClr val="tx1"/>
-                          </a:solidFill>
-                          <a:latin typeface="Calibri" pitchFamily="34" charset="0"/>
-                          <a:ea typeface="Calibri" pitchFamily="34" charset="-122"/>
-                          <a:cs typeface="Calibri" pitchFamily="34" charset="-120"/>
-                        </a:rPr>
-                        <a:t>Comentario CA: 14/10/2026 Compromiso</a:t>
-                      </a:r>
-                      <a:endParaRPr lang="en-US" sz="780" dirty="0">
-                        <a:latin typeface="Calibri" charset="0"/>
-                        <a:ea typeface="Calibri" charset="0"/>
-                        <a:cs typeface="Calibri" charset="0"/>
-                      </a:endParaRPr>
-                    </a:p>
-                  </a:txBody>
-                  <a:tcPr marL="54864" marR="54864" marT="18288" marB="18288" anchor="ctr">
+                        <a:rPr lang="en-US" sz="760" dirty="0">
+                          <a:solidFill>
+                            <a:schemeClr val="tx1"/>
+                          </a:solidFill>
+                          <a:latin typeface="Calibri" pitchFamily="34" charset="0"/>
+                          <a:ea typeface="Calibri" pitchFamily="34" charset="-122"/>
+                          <a:cs typeface="Calibri" pitchFamily="34" charset="-120"/>
+                        </a:rPr>
+                        <a:t>Pendiente</a:t>
+                      </a:r>
+                      <a:endParaRPr lang="en-US" sz="760" dirty="0">
+                        <a:latin typeface="Calibri" charset="0"/>
+                        <a:ea typeface="Calibri" charset="0"/>
+                        <a:cs typeface="Calibri" charset="0"/>
+                      </a:endParaRPr>
+                    </a:p>
+                  </a:txBody>
+                  <a:tcPr marL="54864" marR="54864" marT="13716" marB="13716" anchor="ctr">
                     <a:lnL w="0" cap="flat" cmpd="sng" algn="ctr">
                       <a:noFill/>
                     </a:lnL>
@@ -1473,7 +1430,7 @@
                         <a:buNone/>
                       </a:pPr>
                       <a:r>
-                        <a:rPr lang="en-US" sz="780" b="1" dirty="0">
+                        <a:rPr lang="en-US" sz="760" b="1" dirty="0">
                           <a:solidFill>
                             <a:schemeClr val="accent1"/>
                           </a:solidFill>
@@ -1483,14 +1440,14 @@
                         </a:rPr>
                         <a:t>Gerencia de Cumplimiento</a:t>
                       </a:r>
-                      <a:endParaRPr lang="en-US" sz="780" dirty="0">
-                        <a:latin typeface="Calibri" charset="0"/>
-                        <a:ea typeface="Calibri" charset="0"/>
-                        <a:cs typeface="Calibri" charset="0"/>
-                      </a:endParaRPr>
-                    </a:p>
-                  </a:txBody>
-                  <a:tcPr marL="54864" marR="54864" marT="18288" marB="18288" anchor="ctr">
+                      <a:endParaRPr lang="en-US" sz="760" dirty="0">
+                        <a:latin typeface="Calibri" charset="0"/>
+                        <a:ea typeface="Calibri" charset="0"/>
+                        <a:cs typeface="Calibri" charset="0"/>
+                      </a:endParaRPr>
+                    </a:p>
+                  </a:txBody>
+                  <a:tcPr marL="54864" marR="54864" marT="13716" marB="13716" anchor="ctr">
                     <a:lnL w="0" cap="flat" cmpd="sng" algn="ctr">
                       <a:noFill/>
                     </a:lnL>
@@ -1522,24 +1479,24 @@
                         <a:buNone/>
                       </a:pPr>
                       <a:r>
-                        <a:rPr lang="en-US" sz="780" b="1" dirty="0">
-                          <a:solidFill>
-                            <a:schemeClr val="tx1"/>
-                          </a:solidFill>
-                          <a:latin typeface="Calibri" pitchFamily="34" charset="0"/>
-                          <a:ea typeface="Calibri" pitchFamily="34" charset="-122"/>
-                          <a:cs typeface="Calibri" pitchFamily="34" charset="-120"/>
-                        </a:rPr>
-                        <a:t>Deficiencias en la identificación de la actividad económica realizada por clientes.</a:t>
-                      </a:r>
-                      <a:endParaRPr lang="en-US" sz="780" dirty="0">
-                        <a:latin typeface="Calibri" charset="0"/>
-                        <a:ea typeface="Calibri" charset="0"/>
-                        <a:cs typeface="Calibri" charset="0"/>
-                      </a:endParaRPr>
-                    </a:p>
-                  </a:txBody>
-                  <a:tcPr marL="54864" marR="54864" marT="18288" marB="18288" anchor="ctr">
+                        <a:rPr lang="en-US" sz="760" b="1" dirty="0">
+                          <a:solidFill>
+                            <a:schemeClr val="tx1"/>
+                          </a:solidFill>
+                          <a:latin typeface="Calibri" pitchFamily="34" charset="0"/>
+                          <a:ea typeface="Calibri" pitchFamily="34" charset="-122"/>
+                          <a:cs typeface="Calibri" pitchFamily="34" charset="-120"/>
+                        </a:rPr>
+                        <a:t>A.2  Deficiencias en la identificación de la actividad económica realizada por clientes.</a:t>
+                      </a:r>
+                      <a:endParaRPr lang="en-US" sz="760" dirty="0">
+                        <a:latin typeface="Calibri" charset="0"/>
+                        <a:ea typeface="Calibri" charset="0"/>
+                        <a:cs typeface="Calibri" charset="0"/>
+                      </a:endParaRPr>
+                    </a:p>
+                  </a:txBody>
+                  <a:tcPr marL="54864" marR="54864" marT="13716" marB="13716" anchor="ctr">
                     <a:lnL w="0" cap="flat" cmpd="sng" algn="ctr">
                       <a:noFill/>
                     </a:lnL>
@@ -1572,24 +1529,24 @@
                         <a:buNone/>
                       </a:pPr>
                       <a:r>
-                        <a:rPr lang="en-US" sz="780" dirty="0">
-                          <a:solidFill>
-                            <a:schemeClr val="tx1"/>
-                          </a:solidFill>
-                          <a:latin typeface="Calibri" pitchFamily="34" charset="0"/>
-                          <a:ea typeface="Calibri" pitchFamily="34" charset="-122"/>
-                          <a:cs typeface="Calibri" pitchFamily="34" charset="-120"/>
-                        </a:rPr>
-                        <a:t>Comentario CA: 14/10/2026 Compromiso</a:t>
-                      </a:r>
-                      <a:endParaRPr lang="en-US" sz="780" dirty="0">
-                        <a:latin typeface="Calibri" charset="0"/>
-                        <a:ea typeface="Calibri" charset="0"/>
-                        <a:cs typeface="Calibri" charset="0"/>
-                      </a:endParaRPr>
-                    </a:p>
-                  </a:txBody>
-                  <a:tcPr marL="54864" marR="54864" marT="18288" marB="18288" anchor="ctr">
+                        <a:rPr lang="en-US" sz="760" dirty="0">
+                          <a:solidFill>
+                            <a:schemeClr val="tx1"/>
+                          </a:solidFill>
+                          <a:latin typeface="Calibri" pitchFamily="34" charset="0"/>
+                          <a:ea typeface="Calibri" pitchFamily="34" charset="-122"/>
+                          <a:cs typeface="Calibri" pitchFamily="34" charset="-120"/>
+                        </a:rPr>
+                        <a:t>Pendiente</a:t>
+                      </a:r>
+                      <a:endParaRPr lang="en-US" sz="760" dirty="0">
+                        <a:latin typeface="Calibri" charset="0"/>
+                        <a:ea typeface="Calibri" charset="0"/>
+                        <a:cs typeface="Calibri" charset="0"/>
+                      </a:endParaRPr>
+                    </a:p>
+                  </a:txBody>
+                  <a:tcPr marL="54864" marR="54864" marT="13716" marB="13716" anchor="ctr">
                     <a:lnL w="0" cap="flat" cmpd="sng" algn="ctr">
                       <a:noFill/>
                     </a:lnL>
@@ -1619,7 +1576,7 @@
                         <a:buNone/>
                       </a:pPr>
                       <a:r>
-                        <a:rPr lang="en-US" sz="780" b="1" dirty="0">
+                        <a:rPr lang="en-US" sz="760" b="1" dirty="0">
                           <a:solidFill>
                             <a:schemeClr val="accent1"/>
                           </a:solidFill>
@@ -1629,121 +1586,282 @@
                         </a:rPr>
                         <a:t>Gerencia de Cumplimiento</a:t>
                       </a:r>
-                      <a:endParaRPr lang="en-US" sz="780" dirty="0">
-                        <a:latin typeface="Calibri" charset="0"/>
-                        <a:ea typeface="Calibri" charset="0"/>
-                        <a:cs typeface="Calibri" charset="0"/>
-                      </a:endParaRPr>
-                    </a:p>
-                  </a:txBody>
-                  <a:tcPr marL="54864" marR="54864" marT="18288" marB="18288" anchor="ctr">
-                    <a:lnL w="0" cap="flat" cmpd="sng" algn="ctr">
-                      <a:noFill/>
-                    </a:lnL>
-                    <a:lnR w="0" cap="flat" cmpd="sng" algn="ctr">
-                      <a:noFill/>
-                    </a:lnR>
-                    <a:lnT w="0" cap="flat" cmpd="sng" algn="ctr">
-                      <a:noFill/>
-                    </a:lnT>
-                    <a:lnB w="9525" cap="flat" cmpd="sng" algn="ctr">
-                      <a:solidFill>
-                        <a:srgbClr val="D9E0EA"/>
-                      </a:solidFill>
-                      <a:prstDash val="solid"/>
-                      <a:round/>
-                      <a:headEnd type="none" w="med" len="med"/>
-                      <a:tailEnd type="none" w="med" len="med"/>
-                    </a:lnB>
+                      <a:endParaRPr lang="en-US" sz="760" dirty="0">
+                        <a:latin typeface="Calibri" charset="0"/>
+                        <a:ea typeface="Calibri" charset="0"/>
+                        <a:cs typeface="Calibri" charset="0"/>
+                      </a:endParaRPr>
+                    </a:p>
+                  </a:txBody>
+                  <a:tcPr marL="54864" marR="54864" marT="13716" marB="13716" anchor="ctr">
+                    <a:lnL w="0" cap="flat" cmpd="sng" algn="ctr">
+                      <a:noFill/>
+                    </a:lnL>
+                    <a:lnR w="0" cap="flat" cmpd="sng" algn="ctr">
+                      <a:noFill/>
+                    </a:lnR>
+                    <a:lnT w="0" cap="flat" cmpd="sng" algn="ctr">
+                      <a:noFill/>
+                    </a:lnT>
+                    <a:lnB w="9525" cap="flat" cmpd="sng" algn="ctr">
+                      <a:solidFill>
+                        <a:srgbClr val="D9E0EA"/>
+                      </a:solidFill>
+                      <a:prstDash val="solid"/>
+                      <a:round/>
+                      <a:headEnd type="none" w="med" len="med"/>
+                      <a:tailEnd type="none" w="med" len="med"/>
+                    </a:lnB>
+                  </a:tcPr>
+                </a:tc>
+              </a:tr>
+            </a:tbl>
+          </a:graphicData>
+        </a:graphic>
+      </p:graphicFrame>
+      <p:sp>
+        <p:nvSpPr>
+          <p:cNvPr id="5" name="Sección B"/>
+          <p:cNvSpPr txBox="1"/>
+          <p:nvPr/>
+        </p:nvSpPr>
+        <p:spPr>
+          <a:xfrm>
+            <a:off x="411480" y="1627632"/>
+            <a:ext cx="11368735" cy="237744"/>
+          </a:xfrm>
+          <a:prstGeom prst="rect">
+            <a:avLst/>
+          </a:prstGeom>
+          <a:noFill/>
+          <a:ln/>
+        </p:spPr>
+        <p:txBody>
+          <a:bodyPr wrap="square" lIns="0" tIns="0" rIns="0" bIns="0" rtlCol="0" anchor="ctr"/>
+          <a:lstStyle/>
+          <a:p>
+            <a:pPr indent="0" marL="0">
+              <a:buNone/>
+            </a:pPr>
+            <a:r>
+              <a:rPr lang="en-US" sz="1100" b="1" dirty="0">
+                <a:solidFill>
+                  <a:schemeClr val="accent1"/>
+                </a:solidFill>
+              </a:rPr>
+              <a:t>B. Proceso de implementación de la Herramienta de Monitoreo</a:t>
+            </a:r>
+            <a:endParaRPr lang="en-US" sz="1100" dirty="0"/>
+          </a:p>
+        </p:txBody>
+      </p:sp>
+      <p:graphicFrame>
+        <p:nvGraphicFramePr>
+          <p:cNvPr id="3" name="Tabla sección B"/>
+          <p:cNvGraphicFramePr>
+            <a:graphicFrameLocks noGrp="1"/>
+          </p:cNvGraphicFramePr>
+          <p:nvPr>
+            <p:extLst>
+              <p:ext uri="{D42A27DB-BD31-4B8C-83A1-F6EECF244321}">
+                <p14:modId xmlns:p14="http://schemas.microsoft.com/office/powerpoint/2010/main" val="1579011935"/>
+              </p:ext>
+            </p:extLst>
+          </p:nvPr>
+        </p:nvGraphicFramePr>
+        <p:xfrm>
+          <a:off x="411480" y="1901952"/>
+          <a:ext cx="11368735" cy="914400"/>
+        </p:xfrm>
+        <a:graphic>
+          <a:graphicData uri="http://schemas.openxmlformats.org/drawingml/2006/table">
+            <a:tbl>
+              <a:tblPr/>
+              <a:tblGrid>
+                <a:gridCol w="3977640"/>
+                <a:gridCol w="5788152"/>
+                <a:gridCol w="1600200"/>
+              </a:tblGrid>
+              <a:tr h="0">
+                <a:tc>
+                  <a:txBody>
+                    <a:bodyPr/>
+                    <a:lstStyle/>
+                    <a:p>
+                      <a:pPr algn="just" indent="0" marL="0">
+                        <a:buNone/>
+                      </a:pPr>
+                      <a:r>
+                        <a:rPr lang="en-US" sz="900" b="1" dirty="0">
+                          <a:solidFill>
+                            <a:schemeClr val="bg1"/>
+                          </a:solidFill>
+                          <a:latin typeface="Calibri" pitchFamily="34" charset="0"/>
+                          <a:ea typeface="Calibri" pitchFamily="34" charset="-122"/>
+                          <a:cs typeface="Calibri" pitchFamily="34" charset="-120"/>
+                        </a:rPr>
+                        <a:t>Observación</a:t>
+                      </a:r>
+                      <a:endParaRPr lang="en-US" sz="900" dirty="0">
+                        <a:latin typeface="Calibri" charset="0"/>
+                        <a:ea typeface="Calibri" charset="0"/>
+                        <a:cs typeface="Calibri" charset="0"/>
+                      </a:endParaRPr>
+                    </a:p>
+                  </a:txBody>
+                  <a:tcPr marL="54864" marR="54864" marT="13716" marB="13716" anchor="ctr">
+                    <a:lnL w="0" cap="flat" cmpd="sng" algn="ctr">
+                      <a:noFill/>
+                    </a:lnL>
+                    <a:lnR w="0" cap="flat" cmpd="sng" algn="ctr">
+                      <a:noFill/>
+                    </a:lnR>
+                    <a:lnT w="0" cap="flat" cmpd="sng" algn="ctr">
+                      <a:noFill/>
+                    </a:lnT>
+                    <a:lnB w="9525" cap="flat" cmpd="sng" algn="ctr">
+                      <a:solidFill>
+                        <a:srgbClr val="D9E0EA"/>
+                      </a:solidFill>
+                      <a:prstDash val="solid"/>
+                      <a:round/>
+                      <a:headEnd type="none" w="med" len="med"/>
+                      <a:tailEnd type="none" w="med" len="med"/>
+                    </a:lnB>
+                    <a:solidFill>
+                      <a:schemeClr val="accent1"/>
+                    </a:solidFill>
+                  </a:tcPr>
+                </a:tc>
+                <a:tc>
+                  <a:txBody>
+                    <a:bodyPr/>
+                    <a:lstStyle/>
+                    <a:p>
+                      <a:pPr algn="just" indent="0" marL="0">
+                        <a:buNone/>
+                      </a:pPr>
+                      <a:r>
+                        <a:rPr lang="en-US" sz="900" b="1" dirty="0">
+                          <a:solidFill>
+                            <a:schemeClr val="bg1"/>
+                          </a:solidFill>
+                          <a:latin typeface="Calibri" pitchFamily="34" charset="0"/>
+                          <a:ea typeface="Calibri" pitchFamily="34" charset="-122"/>
+                          <a:cs typeface="Calibri" pitchFamily="34" charset="-120"/>
+                        </a:rPr>
+                        <a:t>Comentarios</a:t>
+                      </a:r>
+                      <a:endParaRPr lang="en-US" sz="900" dirty="0">
+                        <a:latin typeface="Calibri" charset="0"/>
+                        <a:ea typeface="Calibri" charset="0"/>
+                        <a:cs typeface="Calibri" charset="0"/>
+                      </a:endParaRPr>
+                    </a:p>
+                  </a:txBody>
+                  <a:tcPr marL="54864" marR="54864" marT="13716" marB="13716" anchor="ctr">
+                    <a:lnL w="0" cap="flat" cmpd="sng" algn="ctr">
+                      <a:noFill/>
+                    </a:lnL>
+                    <a:lnR w="0" cap="flat" cmpd="sng" algn="ctr">
+                      <a:noFill/>
+                    </a:lnR>
+                    <a:lnT w="0" cap="flat" cmpd="sng" algn="ctr">
+                      <a:noFill/>
+                    </a:lnT>
+                    <a:lnB w="9525" cap="flat" cmpd="sng" algn="ctr">
+                      <a:solidFill>
+                        <a:srgbClr val="D9E0EA"/>
+                      </a:solidFill>
+                      <a:prstDash val="solid"/>
+                      <a:round/>
+                      <a:headEnd type="none" w="med" len="med"/>
+                      <a:tailEnd type="none" w="med" len="med"/>
+                    </a:lnB>
+                    <a:solidFill>
+                      <a:schemeClr val="accent1"/>
+                    </a:solidFill>
+                  </a:tcPr>
+                </a:tc>
+                <a:tc>
+                  <a:txBody>
+                    <a:bodyPr/>
+                    <a:lstStyle/>
+                    <a:p>
+                      <a:pPr algn="just" indent="0" marL="0">
+                        <a:buNone/>
+                      </a:pPr>
+                      <a:r>
+                        <a:rPr lang="en-US" sz="900" b="1" dirty="0">
+                          <a:solidFill>
+                            <a:schemeClr val="bg1"/>
+                          </a:solidFill>
+                          <a:latin typeface="Calibri" pitchFamily="34" charset="0"/>
+                          <a:ea typeface="Calibri" pitchFamily="34" charset="-122"/>
+                          <a:cs typeface="Calibri" pitchFamily="34" charset="-120"/>
+                        </a:rPr>
+                        <a:t>Funcionario Responsable</a:t>
+                      </a:r>
+                      <a:endParaRPr lang="en-US" sz="900" dirty="0">
+                        <a:latin typeface="Calibri" charset="0"/>
+                        <a:ea typeface="Calibri" charset="0"/>
+                        <a:cs typeface="Calibri" charset="0"/>
+                      </a:endParaRPr>
+                    </a:p>
+                  </a:txBody>
+                  <a:tcPr marL="54864" marR="54864" marT="13716" marB="13716" anchor="ctr">
+                    <a:lnL w="0" cap="flat" cmpd="sng" algn="ctr">
+                      <a:noFill/>
+                    </a:lnL>
+                    <a:lnR w="0" cap="flat" cmpd="sng" algn="ctr">
+                      <a:noFill/>
+                    </a:lnR>
+                    <a:lnT w="0" cap="flat" cmpd="sng" algn="ctr">
+                      <a:noFill/>
+                    </a:lnT>
+                    <a:lnB w="9525" cap="flat" cmpd="sng" algn="ctr">
+                      <a:solidFill>
+                        <a:srgbClr val="D9E0EA"/>
+                      </a:solidFill>
+                      <a:prstDash val="solid"/>
+                      <a:round/>
+                      <a:headEnd type="none" w="med" len="med"/>
+                      <a:tailEnd type="none" w="med" len="med"/>
+                    </a:lnB>
+                    <a:solidFill>
+                      <a:schemeClr val="accent1"/>
+                    </a:solidFill>
                   </a:tcPr>
                 </a:tc>
               </a:tr>
               <a:tr h="0">
-                <a:tc gridSpan="3">
-                  <a:txBody>
-                    <a:bodyPr/>
-                    <a:lstStyle/>
-                    <a:p>
-                      <a:pPr algn="just" indent="0" marL="0">
-                        <a:buNone/>
-                      </a:pPr>
-                      <a:r>
-                        <a:rPr lang="en-US" sz="780" b="1" dirty="0">
-                          <a:solidFill>
-                            <a:schemeClr val="accent1"/>
-                          </a:solidFill>
-                          <a:latin typeface="Calibri" pitchFamily="34" charset="0"/>
-                          <a:ea typeface="Calibri" pitchFamily="34" charset="-122"/>
-                          <a:cs typeface="Calibri" pitchFamily="34" charset="-120"/>
-                        </a:rPr>
-                        <a:t>B. Proceso de implementación de la Herramienta de Monitoreo</a:t>
-                      </a:r>
-                      <a:endParaRPr lang="en-US" sz="780" dirty="0">
-                        <a:latin typeface="Calibri" charset="0"/>
-                        <a:ea typeface="Calibri" charset="0"/>
-                        <a:cs typeface="Calibri" charset="0"/>
-                      </a:endParaRPr>
-                    </a:p>
-                  </a:txBody>
-                  <a:tcPr marL="54864" marR="54864" marT="18288" marB="18288" anchor="ctr">
-                    <a:lnL w="0" cap="flat" cmpd="sng" algn="ctr">
-                      <a:noFill/>
-                    </a:lnL>
-                    <a:lnR w="0" cap="flat" cmpd="sng" algn="ctr">
-                      <a:noFill/>
-                    </a:lnR>
-                    <a:lnT w="0" cap="flat" cmpd="sng" algn="ctr">
-                      <a:noFill/>
-                    </a:lnT>
-                    <a:lnB w="9525" cap="flat" cmpd="sng" algn="ctr">
-                      <a:solidFill>
-                        <a:srgbClr val="D9E0EA"/>
-                      </a:solidFill>
-                      <a:prstDash val="solid"/>
-                      <a:round/>
-                      <a:headEnd type="none" w="med" len="med"/>
-                      <a:tailEnd type="none" w="med" len="med"/>
-                    </a:lnB>
-                    <a:solidFill>
-                      <a:schemeClr val="bg2"/>
-                    </a:solidFill>
-                  </a:tcPr>
-                </a:tc>
-                <a:tc hMerge="1">
-                  <a:tcPr/>
-                </a:tc>
-                <a:tc hMerge="1">
-                  <a:tcPr/>
-                </a:tc>
-              </a:tr>
-              <a:tr h="0">
-                <a:tc>
-                  <a:txBody>
-                    <a:bodyPr/>
-                    <a:lstStyle/>
-                    <a:p>
-                      <a:pPr algn="just" indent="0" marL="0">
-                        <a:buNone/>
-                      </a:pPr>
-                      <a:r>
-                        <a:rPr lang="en-US" sz="780" b="1" dirty="0">
-                          <a:solidFill>
-                            <a:schemeClr val="tx1"/>
-                          </a:solidFill>
-                          <a:latin typeface="Calibri" pitchFamily="34" charset="0"/>
-                          <a:ea typeface="Calibri" pitchFamily="34" charset="-122"/>
-                          <a:cs typeface="Calibri" pitchFamily="34" charset="-120"/>
-                        </a:rPr>
-                        <a:t>Falta de actualización de Metodología y matriz de riesgo LA/FT/FPADM de la Entidad</a:t>
-                      </a:r>
-                      <a:endParaRPr lang="en-US" sz="780" dirty="0">
-                        <a:latin typeface="Calibri" charset="0"/>
-                        <a:ea typeface="Calibri" charset="0"/>
-                        <a:cs typeface="Calibri" charset="0"/>
-                      </a:endParaRPr>
-                    </a:p>
-                  </a:txBody>
-                  <a:tcPr marL="54864" marR="54864" marT="18288" marB="18288" anchor="ctr">
+                <a:tc>
+                  <a:txBody>
+                    <a:bodyPr/>
+                    <a:lstStyle/>
+                    <a:p>
+                      <a:pPr algn="just" indent="0" marL="0">
+                        <a:buNone/>
+                      </a:pPr>
+                      <a:r>
+                        <a:rPr lang="en-US" sz="760" b="1" dirty="0">
+                          <a:solidFill>
+                            <a:schemeClr val="tx1"/>
+                          </a:solidFill>
+                          <a:latin typeface="Calibri" pitchFamily="34" charset="0"/>
+                          <a:ea typeface="Calibri" pitchFamily="34" charset="-122"/>
+                          <a:cs typeface="Calibri" pitchFamily="34" charset="-120"/>
+                        </a:rPr>
+                        <a:t>B.1  Falta de actualización de Metodología y matriz de riesgo LA/FT/FPADM de la Entidad</a:t>
+                      </a:r>
+                      <a:endParaRPr lang="en-US" sz="760" dirty="0">
+                        <a:latin typeface="Calibri" charset="0"/>
+                        <a:ea typeface="Calibri" charset="0"/>
+                        <a:cs typeface="Calibri" charset="0"/>
+                      </a:endParaRPr>
+                    </a:p>
+                  </a:txBody>
+                  <a:tcPr marL="54864" marR="54864" marT="13716" marB="13716" anchor="ctr">
                     <a:lnL w="0" cap="flat" cmpd="sng" algn="ctr">
                       <a:noFill/>
                     </a:lnL>
@@ -1776,24 +1894,24 @@
                         <a:buNone/>
                       </a:pPr>
                       <a:r>
-                        <a:rPr lang="en-US" sz="780" dirty="0">
-                          <a:solidFill>
-                            <a:schemeClr val="tx1"/>
-                          </a:solidFill>
-                          <a:latin typeface="Calibri" pitchFamily="34" charset="0"/>
-                          <a:ea typeface="Calibri" pitchFamily="34" charset="-122"/>
-                          <a:cs typeface="Calibri" pitchFamily="34" charset="-120"/>
-                        </a:rPr>
-                        <a:t>Comentario CA: 14/10/2026 Compromiso</a:t>
-                      </a:r>
-                      <a:endParaRPr lang="en-US" sz="780" dirty="0">
-                        <a:latin typeface="Calibri" charset="0"/>
-                        <a:ea typeface="Calibri" charset="0"/>
-                        <a:cs typeface="Calibri" charset="0"/>
-                      </a:endParaRPr>
-                    </a:p>
-                  </a:txBody>
-                  <a:tcPr marL="54864" marR="54864" marT="18288" marB="18288" anchor="ctr">
+                        <a:rPr lang="en-US" sz="760" dirty="0">
+                          <a:solidFill>
+                            <a:schemeClr val="tx1"/>
+                          </a:solidFill>
+                          <a:latin typeface="Calibri" pitchFamily="34" charset="0"/>
+                          <a:ea typeface="Calibri" pitchFamily="34" charset="-122"/>
+                          <a:cs typeface="Calibri" pitchFamily="34" charset="-120"/>
+                        </a:rPr>
+                        <a:t>Pendiente</a:t>
+                      </a:r>
+                      <a:endParaRPr lang="en-US" sz="760" dirty="0">
+                        <a:latin typeface="Calibri" charset="0"/>
+                        <a:ea typeface="Calibri" charset="0"/>
+                        <a:cs typeface="Calibri" charset="0"/>
+                      </a:endParaRPr>
+                    </a:p>
+                  </a:txBody>
+                  <a:tcPr marL="54864" marR="54864" marT="13716" marB="13716" anchor="ctr">
                     <a:lnL w="0" cap="flat" cmpd="sng" algn="ctr">
                       <a:noFill/>
                     </a:lnL>
@@ -1823,7 +1941,7 @@
                         <a:buNone/>
                       </a:pPr>
                       <a:r>
-                        <a:rPr lang="en-US" sz="780" b="1" dirty="0">
+                        <a:rPr lang="en-US" sz="760" b="1" dirty="0">
                           <a:solidFill>
                             <a:schemeClr val="accent1"/>
                           </a:solidFill>
@@ -1833,14 +1951,14 @@
                         </a:rPr>
                         <a:t>Gerencia de Cumplimiento</a:t>
                       </a:r>
-                      <a:endParaRPr lang="en-US" sz="780" dirty="0">
-                        <a:latin typeface="Calibri" charset="0"/>
-                        <a:ea typeface="Calibri" charset="0"/>
-                        <a:cs typeface="Calibri" charset="0"/>
-                      </a:endParaRPr>
-                    </a:p>
-                  </a:txBody>
-                  <a:tcPr marL="54864" marR="54864" marT="18288" marB="18288" anchor="ctr">
+                      <a:endParaRPr lang="en-US" sz="760" dirty="0">
+                        <a:latin typeface="Calibri" charset="0"/>
+                        <a:ea typeface="Calibri" charset="0"/>
+                        <a:cs typeface="Calibri" charset="0"/>
+                      </a:endParaRPr>
+                    </a:p>
+                  </a:txBody>
+                  <a:tcPr marL="54864" marR="54864" marT="13716" marB="13716" anchor="ctr">
                     <a:lnL w="0" cap="flat" cmpd="sng" algn="ctr">
                       <a:noFill/>
                     </a:lnL>
@@ -1872,24 +1990,24 @@
                         <a:buNone/>
                       </a:pPr>
                       <a:r>
-                        <a:rPr lang="en-US" sz="780" b="1" dirty="0">
-                          <a:solidFill>
-                            <a:schemeClr val="tx1"/>
-                          </a:solidFill>
-                          <a:latin typeface="Calibri" pitchFamily="34" charset="0"/>
-                          <a:ea typeface="Calibri" pitchFamily="34" charset="-122"/>
-                          <a:cs typeface="Calibri" pitchFamily="34" charset="-120"/>
-                        </a:rPr>
-                        <a:t>Falta de actualización de Metodología y matriz de riesgo LA/FT/FPADM Clientes o asociados</a:t>
-                      </a:r>
-                      <a:endParaRPr lang="en-US" sz="780" dirty="0">
-                        <a:latin typeface="Calibri" charset="0"/>
-                        <a:ea typeface="Calibri" charset="0"/>
-                        <a:cs typeface="Calibri" charset="0"/>
-                      </a:endParaRPr>
-                    </a:p>
-                  </a:txBody>
-                  <a:tcPr marL="54864" marR="54864" marT="18288" marB="18288" anchor="ctr">
+                        <a:rPr lang="en-US" sz="760" b="1" dirty="0">
+                          <a:solidFill>
+                            <a:schemeClr val="tx1"/>
+                          </a:solidFill>
+                          <a:latin typeface="Calibri" pitchFamily="34" charset="0"/>
+                          <a:ea typeface="Calibri" pitchFamily="34" charset="-122"/>
+                          <a:cs typeface="Calibri" pitchFamily="34" charset="-120"/>
+                        </a:rPr>
+                        <a:t>B.2  Falta de actualización de Metodología y matriz de riesgo LA/FT/FPADM Clientes o asociados</a:t>
+                      </a:r>
+                      <a:endParaRPr lang="en-US" sz="760" dirty="0">
+                        <a:latin typeface="Calibri" charset="0"/>
+                        <a:ea typeface="Calibri" charset="0"/>
+                        <a:cs typeface="Calibri" charset="0"/>
+                      </a:endParaRPr>
+                    </a:p>
+                  </a:txBody>
+                  <a:tcPr marL="54864" marR="54864" marT="13716" marB="13716" anchor="ctr">
                     <a:lnL w="0" cap="flat" cmpd="sng" algn="ctr">
                       <a:noFill/>
                     </a:lnL>
@@ -1922,24 +2040,24 @@
                         <a:buNone/>
                       </a:pPr>
                       <a:r>
-                        <a:rPr lang="en-US" sz="780" dirty="0">
-                          <a:solidFill>
-                            <a:schemeClr val="tx1"/>
-                          </a:solidFill>
-                          <a:latin typeface="Calibri" pitchFamily="34" charset="0"/>
-                          <a:ea typeface="Calibri" pitchFamily="34" charset="-122"/>
-                          <a:cs typeface="Calibri" pitchFamily="34" charset="-120"/>
-                        </a:rPr>
-                        <a:t>Comentario CA: 14/10/2026 Compromiso</a:t>
-                      </a:r>
-                      <a:endParaRPr lang="en-US" sz="780" dirty="0">
-                        <a:latin typeface="Calibri" charset="0"/>
-                        <a:ea typeface="Calibri" charset="0"/>
-                        <a:cs typeface="Calibri" charset="0"/>
-                      </a:endParaRPr>
-                    </a:p>
-                  </a:txBody>
-                  <a:tcPr marL="54864" marR="54864" marT="18288" marB="18288" anchor="ctr">
+                        <a:rPr lang="en-US" sz="760" dirty="0">
+                          <a:solidFill>
+                            <a:schemeClr val="tx1"/>
+                          </a:solidFill>
+                          <a:latin typeface="Calibri" pitchFamily="34" charset="0"/>
+                          <a:ea typeface="Calibri" pitchFamily="34" charset="-122"/>
+                          <a:cs typeface="Calibri" pitchFamily="34" charset="-120"/>
+                        </a:rPr>
+                        <a:t>Pendiente</a:t>
+                      </a:r>
+                      <a:endParaRPr lang="en-US" sz="760" dirty="0">
+                        <a:latin typeface="Calibri" charset="0"/>
+                        <a:ea typeface="Calibri" charset="0"/>
+                        <a:cs typeface="Calibri" charset="0"/>
+                      </a:endParaRPr>
+                    </a:p>
+                  </a:txBody>
+                  <a:tcPr marL="54864" marR="54864" marT="13716" marB="13716" anchor="ctr">
                     <a:lnL w="0" cap="flat" cmpd="sng" algn="ctr">
                       <a:noFill/>
                     </a:lnL>
@@ -1969,7 +2087,7 @@
                         <a:buNone/>
                       </a:pPr>
                       <a:r>
-                        <a:rPr lang="en-US" sz="780" b="1" dirty="0">
+                        <a:rPr lang="en-US" sz="760" b="1" dirty="0">
                           <a:solidFill>
                             <a:schemeClr val="accent1"/>
                           </a:solidFill>
@@ -1979,14 +2097,14 @@
                         </a:rPr>
                         <a:t>Gerencia de Cumplimiento</a:t>
                       </a:r>
-                      <a:endParaRPr lang="en-US" sz="780" dirty="0">
-                        <a:latin typeface="Calibri" charset="0"/>
-                        <a:ea typeface="Calibri" charset="0"/>
-                        <a:cs typeface="Calibri" charset="0"/>
-                      </a:endParaRPr>
-                    </a:p>
-                  </a:txBody>
-                  <a:tcPr marL="54864" marR="54864" marT="18288" marB="18288" anchor="ctr">
+                      <a:endParaRPr lang="en-US" sz="760" dirty="0">
+                        <a:latin typeface="Calibri" charset="0"/>
+                        <a:ea typeface="Calibri" charset="0"/>
+                        <a:cs typeface="Calibri" charset="0"/>
+                      </a:endParaRPr>
+                    </a:p>
+                  </a:txBody>
+                  <a:tcPr marL="54864" marR="54864" marT="13716" marB="13716" anchor="ctr">
                     <a:lnL w="0" cap="flat" cmpd="sng" algn="ctr">
                       <a:noFill/>
                     </a:lnL>
@@ -2018,24 +2136,24 @@
                         <a:buNone/>
                       </a:pPr>
                       <a:r>
-                        <a:rPr lang="en-US" sz="780" b="1" dirty="0">
-                          <a:solidFill>
-                            <a:schemeClr val="tx1"/>
-                          </a:solidFill>
-                          <a:latin typeface="Calibri" pitchFamily="34" charset="0"/>
-                          <a:ea typeface="Calibri" pitchFamily="34" charset="-122"/>
-                          <a:cs typeface="Calibri" pitchFamily="34" charset="-120"/>
-                        </a:rPr>
-                        <a:t>Falta de automatización en el proceso de remisión de reportería regulada a la Web Service de UIF.</a:t>
-                      </a:r>
-                      <a:endParaRPr lang="en-US" sz="780" dirty="0">
-                        <a:latin typeface="Calibri" charset="0"/>
-                        <a:ea typeface="Calibri" charset="0"/>
-                        <a:cs typeface="Calibri" charset="0"/>
-                      </a:endParaRPr>
-                    </a:p>
-                  </a:txBody>
-                  <a:tcPr marL="54864" marR="54864" marT="18288" marB="18288" anchor="ctr">
+                        <a:rPr lang="en-US" sz="760" b="1" dirty="0">
+                          <a:solidFill>
+                            <a:schemeClr val="tx1"/>
+                          </a:solidFill>
+                          <a:latin typeface="Calibri" pitchFamily="34" charset="0"/>
+                          <a:ea typeface="Calibri" pitchFamily="34" charset="-122"/>
+                          <a:cs typeface="Calibri" pitchFamily="34" charset="-120"/>
+                        </a:rPr>
+                        <a:t>B.3  Falta de automatización en el proceso de remisión de reportería regulada a la Web Service de UIF.</a:t>
+                      </a:r>
+                      <a:endParaRPr lang="en-US" sz="760" dirty="0">
+                        <a:latin typeface="Calibri" charset="0"/>
+                        <a:ea typeface="Calibri" charset="0"/>
+                        <a:cs typeface="Calibri" charset="0"/>
+                      </a:endParaRPr>
+                    </a:p>
+                  </a:txBody>
+                  <a:tcPr marL="54864" marR="54864" marT="13716" marB="13716" anchor="ctr">
                     <a:lnL w="0" cap="flat" cmpd="sng" algn="ctr">
                       <a:noFill/>
                     </a:lnL>
@@ -2068,24 +2186,24 @@
                         <a:buNone/>
                       </a:pPr>
                       <a:r>
-                        <a:rPr lang="en-US" sz="780" dirty="0">
-                          <a:solidFill>
-                            <a:schemeClr val="tx1"/>
-                          </a:solidFill>
-                          <a:latin typeface="Calibri" pitchFamily="34" charset="0"/>
-                          <a:ea typeface="Calibri" pitchFamily="34" charset="-122"/>
-                          <a:cs typeface="Calibri" pitchFamily="34" charset="-120"/>
-                        </a:rPr>
-                        <a:t>Comentario CA: 14/10/2026 Compromiso</a:t>
-                      </a:r>
-                      <a:endParaRPr lang="en-US" sz="780" dirty="0">
-                        <a:latin typeface="Calibri" charset="0"/>
-                        <a:ea typeface="Calibri" charset="0"/>
-                        <a:cs typeface="Calibri" charset="0"/>
-                      </a:endParaRPr>
-                    </a:p>
-                  </a:txBody>
-                  <a:tcPr marL="54864" marR="54864" marT="18288" marB="18288" anchor="ctr">
+                        <a:rPr lang="en-US" sz="760" dirty="0">
+                          <a:solidFill>
+                            <a:schemeClr val="tx1"/>
+                          </a:solidFill>
+                          <a:latin typeface="Calibri" pitchFamily="34" charset="0"/>
+                          <a:ea typeface="Calibri" pitchFamily="34" charset="-122"/>
+                          <a:cs typeface="Calibri" pitchFamily="34" charset="-120"/>
+                        </a:rPr>
+                        <a:t>Pendiente</a:t>
+                      </a:r>
+                      <a:endParaRPr lang="en-US" sz="760" dirty="0">
+                        <a:latin typeface="Calibri" charset="0"/>
+                        <a:ea typeface="Calibri" charset="0"/>
+                        <a:cs typeface="Calibri" charset="0"/>
+                      </a:endParaRPr>
+                    </a:p>
+                  </a:txBody>
+                  <a:tcPr marL="54864" marR="54864" marT="13716" marB="13716" anchor="ctr">
                     <a:lnL w="0" cap="flat" cmpd="sng" algn="ctr">
                       <a:noFill/>
                     </a:lnL>
@@ -2115,7 +2233,7 @@
                         <a:buNone/>
                       </a:pPr>
                       <a:r>
-                        <a:rPr lang="en-US" sz="780" b="1" dirty="0">
+                        <a:rPr lang="en-US" sz="760" b="1" dirty="0">
                           <a:solidFill>
                             <a:schemeClr val="accent1"/>
                           </a:solidFill>
@@ -2125,14 +2243,14 @@
                         </a:rPr>
                         <a:t>Gerencia de Cumplimiento</a:t>
                       </a:r>
-                      <a:endParaRPr lang="en-US" sz="780" dirty="0">
-                        <a:latin typeface="Calibri" charset="0"/>
-                        <a:ea typeface="Calibri" charset="0"/>
-                        <a:cs typeface="Calibri" charset="0"/>
-                      </a:endParaRPr>
-                    </a:p>
-                  </a:txBody>
-                  <a:tcPr marL="54864" marR="54864" marT="18288" marB="18288" anchor="ctr">
+                      <a:endParaRPr lang="en-US" sz="760" dirty="0">
+                        <a:latin typeface="Calibri" charset="0"/>
+                        <a:ea typeface="Calibri" charset="0"/>
+                        <a:cs typeface="Calibri" charset="0"/>
+                      </a:endParaRPr>
+                    </a:p>
+                  </a:txBody>
+                  <a:tcPr marL="54864" marR="54864" marT="13716" marB="13716" anchor="ctr">
                     <a:lnL w="0" cap="flat" cmpd="sng" algn="ctr">
                       <a:noFill/>
                     </a:lnL>
@@ -2164,24 +2282,24 @@
                         <a:buNone/>
                       </a:pPr>
                       <a:r>
-                        <a:rPr lang="en-US" sz="780" b="1" dirty="0">
-                          <a:solidFill>
-                            <a:schemeClr val="tx1"/>
-                          </a:solidFill>
-                          <a:latin typeface="Calibri" pitchFamily="34" charset="0"/>
-                          <a:ea typeface="Calibri" pitchFamily="34" charset="-122"/>
-                          <a:cs typeface="Calibri" pitchFamily="34" charset="-120"/>
-                        </a:rPr>
-                        <a:t>Falta de Automatización de la herramienta de validación de Listas de Cautela</a:t>
-                      </a:r>
-                      <a:endParaRPr lang="en-US" sz="780" dirty="0">
-                        <a:latin typeface="Calibri" charset="0"/>
-                        <a:ea typeface="Calibri" charset="0"/>
-                        <a:cs typeface="Calibri" charset="0"/>
-                      </a:endParaRPr>
-                    </a:p>
-                  </a:txBody>
-                  <a:tcPr marL="54864" marR="54864" marT="18288" marB="18288" anchor="ctr">
+                        <a:rPr lang="en-US" sz="760" b="1" dirty="0">
+                          <a:solidFill>
+                            <a:schemeClr val="tx1"/>
+                          </a:solidFill>
+                          <a:latin typeface="Calibri" pitchFamily="34" charset="0"/>
+                          <a:ea typeface="Calibri" pitchFamily="34" charset="-122"/>
+                          <a:cs typeface="Calibri" pitchFamily="34" charset="-120"/>
+                        </a:rPr>
+                        <a:t>B.4  Falta de Automatización de la herramienta de validación de Listas de Cautela</a:t>
+                      </a:r>
+                      <a:endParaRPr lang="en-US" sz="760" dirty="0">
+                        <a:latin typeface="Calibri" charset="0"/>
+                        <a:ea typeface="Calibri" charset="0"/>
+                        <a:cs typeface="Calibri" charset="0"/>
+                      </a:endParaRPr>
+                    </a:p>
+                  </a:txBody>
+                  <a:tcPr marL="54864" marR="54864" marT="13716" marB="13716" anchor="ctr">
                     <a:lnL w="0" cap="flat" cmpd="sng" algn="ctr">
                       <a:noFill/>
                     </a:lnL>
@@ -2214,24 +2332,24 @@
                         <a:buNone/>
                       </a:pPr>
                       <a:r>
-                        <a:rPr lang="en-US" sz="780" dirty="0">
-                          <a:solidFill>
-                            <a:schemeClr val="tx1"/>
-                          </a:solidFill>
-                          <a:latin typeface="Calibri" pitchFamily="34" charset="0"/>
-                          <a:ea typeface="Calibri" pitchFamily="34" charset="-122"/>
-                          <a:cs typeface="Calibri" pitchFamily="34" charset="-120"/>
-                        </a:rPr>
-                        <a:t>Comentario CA: 14/10/2026 Compromiso</a:t>
-                      </a:r>
-                      <a:endParaRPr lang="en-US" sz="780" dirty="0">
-                        <a:latin typeface="Calibri" charset="0"/>
-                        <a:ea typeface="Calibri" charset="0"/>
-                        <a:cs typeface="Calibri" charset="0"/>
-                      </a:endParaRPr>
-                    </a:p>
-                  </a:txBody>
-                  <a:tcPr marL="54864" marR="54864" marT="18288" marB="18288" anchor="ctr">
+                        <a:rPr lang="en-US" sz="760" dirty="0">
+                          <a:solidFill>
+                            <a:schemeClr val="tx1"/>
+                          </a:solidFill>
+                          <a:latin typeface="Calibri" pitchFamily="34" charset="0"/>
+                          <a:ea typeface="Calibri" pitchFamily="34" charset="-122"/>
+                          <a:cs typeface="Calibri" pitchFamily="34" charset="-120"/>
+                        </a:rPr>
+                        <a:t>Pendiente</a:t>
+                      </a:r>
+                      <a:endParaRPr lang="en-US" sz="760" dirty="0">
+                        <a:latin typeface="Calibri" charset="0"/>
+                        <a:ea typeface="Calibri" charset="0"/>
+                        <a:cs typeface="Calibri" charset="0"/>
+                      </a:endParaRPr>
+                    </a:p>
+                  </a:txBody>
+                  <a:tcPr marL="54864" marR="54864" marT="13716" marB="13716" anchor="ctr">
                     <a:lnL w="0" cap="flat" cmpd="sng" algn="ctr">
                       <a:noFill/>
                     </a:lnL>
@@ -2261,7 +2379,7 @@
                         <a:buNone/>
                       </a:pPr>
                       <a:r>
-                        <a:rPr lang="en-US" sz="780" b="1" dirty="0">
+                        <a:rPr lang="en-US" sz="760" b="1" dirty="0">
                           <a:solidFill>
                             <a:schemeClr val="accent1"/>
                           </a:solidFill>
@@ -2271,14 +2389,14 @@
                         </a:rPr>
                         <a:t>Gerencia de Cumplimiento</a:t>
                       </a:r>
-                      <a:endParaRPr lang="en-US" sz="780" dirty="0">
-                        <a:latin typeface="Calibri" charset="0"/>
-                        <a:ea typeface="Calibri" charset="0"/>
-                        <a:cs typeface="Calibri" charset="0"/>
-                      </a:endParaRPr>
-                    </a:p>
-                  </a:txBody>
-                  <a:tcPr marL="54864" marR="54864" marT="18288" marB="18288" anchor="ctr">
+                      <a:endParaRPr lang="en-US" sz="760" dirty="0">
+                        <a:latin typeface="Calibri" charset="0"/>
+                        <a:ea typeface="Calibri" charset="0"/>
+                        <a:cs typeface="Calibri" charset="0"/>
+                      </a:endParaRPr>
+                    </a:p>
+                  </a:txBody>
+                  <a:tcPr marL="54864" marR="54864" marT="13716" marB="13716" anchor="ctr">
                     <a:lnL w="0" cap="flat" cmpd="sng" algn="ctr">
                       <a:noFill/>
                     </a:lnL>
@@ -2310,24 +2428,24 @@
                         <a:buNone/>
                       </a:pPr>
                       <a:r>
-                        <a:rPr lang="en-US" sz="780" b="1" dirty="0">
-                          <a:solidFill>
-                            <a:schemeClr val="tx1"/>
-                          </a:solidFill>
-                          <a:latin typeface="Calibri" pitchFamily="34" charset="0"/>
-                          <a:ea typeface="Calibri" pitchFamily="34" charset="-122"/>
-                          <a:cs typeface="Calibri" pitchFamily="34" charset="-120"/>
-                        </a:rPr>
-                        <a:t>Falta de evidencia en los porcentajes de avance comunicados en el cronograma</a:t>
-                      </a:r>
-                      <a:endParaRPr lang="en-US" sz="780" dirty="0">
-                        <a:latin typeface="Calibri" charset="0"/>
-                        <a:ea typeface="Calibri" charset="0"/>
-                        <a:cs typeface="Calibri" charset="0"/>
-                      </a:endParaRPr>
-                    </a:p>
-                  </a:txBody>
-                  <a:tcPr marL="54864" marR="54864" marT="18288" marB="18288" anchor="ctr">
+                        <a:rPr lang="en-US" sz="760" b="1" dirty="0">
+                          <a:solidFill>
+                            <a:schemeClr val="tx1"/>
+                          </a:solidFill>
+                          <a:latin typeface="Calibri" pitchFamily="34" charset="0"/>
+                          <a:ea typeface="Calibri" pitchFamily="34" charset="-122"/>
+                          <a:cs typeface="Calibri" pitchFamily="34" charset="-120"/>
+                        </a:rPr>
+                        <a:t>B.5  Falta de evidencia en los porcentajes de avance comunicados en el cronograma</a:t>
+                      </a:r>
+                      <a:endParaRPr lang="en-US" sz="760" dirty="0">
+                        <a:latin typeface="Calibri" charset="0"/>
+                        <a:ea typeface="Calibri" charset="0"/>
+                        <a:cs typeface="Calibri" charset="0"/>
+                      </a:endParaRPr>
+                    </a:p>
+                  </a:txBody>
+                  <a:tcPr marL="54864" marR="54864" marT="13716" marB="13716" anchor="ctr">
                     <a:lnL w="0" cap="flat" cmpd="sng" algn="ctr">
                       <a:noFill/>
                     </a:lnL>
@@ -2360,24 +2478,24 @@
                         <a:buNone/>
                       </a:pPr>
                       <a:r>
-                        <a:rPr lang="en-US" sz="780" dirty="0">
-                          <a:solidFill>
-                            <a:schemeClr val="tx1"/>
-                          </a:solidFill>
-                          <a:latin typeface="Calibri" pitchFamily="34" charset="0"/>
-                          <a:ea typeface="Calibri" pitchFamily="34" charset="-122"/>
-                          <a:cs typeface="Calibri" pitchFamily="34" charset="-120"/>
-                        </a:rPr>
-                        <a:t>Comentario CA: 14/10/2026 Compromiso</a:t>
-                      </a:r>
-                      <a:endParaRPr lang="en-US" sz="780" dirty="0">
-                        <a:latin typeface="Calibri" charset="0"/>
-                        <a:ea typeface="Calibri" charset="0"/>
-                        <a:cs typeface="Calibri" charset="0"/>
-                      </a:endParaRPr>
-                    </a:p>
-                  </a:txBody>
-                  <a:tcPr marL="54864" marR="54864" marT="18288" marB="18288" anchor="ctr">
+                        <a:rPr lang="en-US" sz="760" dirty="0">
+                          <a:solidFill>
+                            <a:schemeClr val="tx1"/>
+                          </a:solidFill>
+                          <a:latin typeface="Calibri" pitchFamily="34" charset="0"/>
+                          <a:ea typeface="Calibri" pitchFamily="34" charset="-122"/>
+                          <a:cs typeface="Calibri" pitchFamily="34" charset="-120"/>
+                        </a:rPr>
+                        <a:t>Pendiente</a:t>
+                      </a:r>
+                      <a:endParaRPr lang="en-US" sz="760" dirty="0">
+                        <a:latin typeface="Calibri" charset="0"/>
+                        <a:ea typeface="Calibri" charset="0"/>
+                        <a:cs typeface="Calibri" charset="0"/>
+                      </a:endParaRPr>
+                    </a:p>
+                  </a:txBody>
+                  <a:tcPr marL="54864" marR="54864" marT="13716" marB="13716" anchor="ctr">
                     <a:lnL w="0" cap="flat" cmpd="sng" algn="ctr">
                       <a:noFill/>
                     </a:lnL>
@@ -2407,7 +2525,7 @@
                         <a:buNone/>
                       </a:pPr>
                       <a:r>
-                        <a:rPr lang="en-US" sz="780" b="1" dirty="0">
+                        <a:rPr lang="en-US" sz="760" b="1" dirty="0">
                           <a:solidFill>
                             <a:schemeClr val="accent1"/>
                           </a:solidFill>
@@ -2417,14 +2535,14 @@
                         </a:rPr>
                         <a:t>Gerencia de Cumplimiento</a:t>
                       </a:r>
-                      <a:endParaRPr lang="en-US" sz="780" dirty="0">
-                        <a:latin typeface="Calibri" charset="0"/>
-                        <a:ea typeface="Calibri" charset="0"/>
-                        <a:cs typeface="Calibri" charset="0"/>
-                      </a:endParaRPr>
-                    </a:p>
-                  </a:txBody>
-                  <a:tcPr marL="54864" marR="54864" marT="18288" marB="18288" anchor="ctr">
+                      <a:endParaRPr lang="en-US" sz="760" dirty="0">
+                        <a:latin typeface="Calibri" charset="0"/>
+                        <a:ea typeface="Calibri" charset="0"/>
+                        <a:cs typeface="Calibri" charset="0"/>
+                      </a:endParaRPr>
+                    </a:p>
+                  </a:txBody>
+                  <a:tcPr marL="54864" marR="54864" marT="13716" marB="13716" anchor="ctr">
                     <a:lnL w="0" cap="flat" cmpd="sng" algn="ctr">
                       <a:noFill/>
                     </a:lnL>
@@ -2456,24 +2574,24 @@
                         <a:buNone/>
                       </a:pPr>
                       <a:r>
-                        <a:rPr lang="en-US" sz="780" b="1" dirty="0">
-                          <a:solidFill>
-                            <a:schemeClr val="tx1"/>
-                          </a:solidFill>
-                          <a:latin typeface="Calibri" pitchFamily="34" charset="0"/>
-                          <a:ea typeface="Calibri" pitchFamily="34" charset="-122"/>
-                          <a:cs typeface="Calibri" pitchFamily="34" charset="-120"/>
-                        </a:rPr>
-                        <a:t>Revisión documentación conforme artículo22 de la NRP-23</a:t>
-                      </a:r>
-                      <a:endParaRPr lang="en-US" sz="780" dirty="0">
-                        <a:latin typeface="Calibri" charset="0"/>
-                        <a:ea typeface="Calibri" charset="0"/>
-                        <a:cs typeface="Calibri" charset="0"/>
-                      </a:endParaRPr>
-                    </a:p>
-                  </a:txBody>
-                  <a:tcPr marL="54864" marR="54864" marT="18288" marB="18288" anchor="ctr">
+                        <a:rPr lang="en-US" sz="760" b="1" dirty="0">
+                          <a:solidFill>
+                            <a:schemeClr val="tx1"/>
+                          </a:solidFill>
+                          <a:latin typeface="Calibri" pitchFamily="34" charset="0"/>
+                          <a:ea typeface="Calibri" pitchFamily="34" charset="-122"/>
+                          <a:cs typeface="Calibri" pitchFamily="34" charset="-120"/>
+                        </a:rPr>
+                        <a:t>B.6  Revisión documentación conforme artículo22 de la NRP-23</a:t>
+                      </a:r>
+                      <a:endParaRPr lang="en-US" sz="760" dirty="0">
+                        <a:latin typeface="Calibri" charset="0"/>
+                        <a:ea typeface="Calibri" charset="0"/>
+                        <a:cs typeface="Calibri" charset="0"/>
+                      </a:endParaRPr>
+                    </a:p>
+                  </a:txBody>
+                  <a:tcPr marL="54864" marR="54864" marT="13716" marB="13716" anchor="ctr">
                     <a:lnL w="0" cap="flat" cmpd="sng" algn="ctr">
                       <a:noFill/>
                     </a:lnL>
@@ -2506,7 +2624,7 @@
                         <a:buNone/>
                       </a:pPr>
                       <a:r>
-                        <a:rPr lang="en-US" sz="780" dirty="0">
+                        <a:rPr lang="en-US" sz="760" dirty="0">
                           <a:solidFill>
                             <a:schemeClr val="tx1"/>
                           </a:solidFill>
@@ -2516,14 +2634,14 @@
                         </a:rPr>
                         <a:t>Se anexa informe elaborado en fecha 13 de diciembre de 2024, sobre proyecto de implementación de un nuevo sistema de monitoreo de LDA/FT/FPADM y del sistema de fraude de canales digitales.</a:t>
                       </a:r>
-                      <a:endParaRPr lang="en-US" sz="780" dirty="0">
-                        <a:latin typeface="Calibri" charset="0"/>
-                        <a:ea typeface="Calibri" charset="0"/>
-                        <a:cs typeface="Calibri" charset="0"/>
-                      </a:endParaRPr>
-                    </a:p>
-                  </a:txBody>
-                  <a:tcPr marL="54864" marR="54864" marT="18288" marB="18288" anchor="ctr">
+                      <a:endParaRPr lang="en-US" sz="760" dirty="0">
+                        <a:latin typeface="Calibri" charset="0"/>
+                        <a:ea typeface="Calibri" charset="0"/>
+                        <a:cs typeface="Calibri" charset="0"/>
+                      </a:endParaRPr>
+                    </a:p>
+                  </a:txBody>
+                  <a:tcPr marL="54864" marR="54864" marT="13716" marB="13716" anchor="ctr">
                     <a:lnL w="0" cap="flat" cmpd="sng" algn="ctr">
                       <a:noFill/>
                     </a:lnL>
@@ -2553,7 +2671,7 @@
                         <a:buNone/>
                       </a:pPr>
                       <a:r>
-                        <a:rPr lang="en-US" sz="780" b="1" dirty="0">
+                        <a:rPr lang="en-US" sz="760" b="1" dirty="0">
                           <a:solidFill>
                             <a:schemeClr val="accent1"/>
                           </a:solidFill>
@@ -2563,14 +2681,14 @@
                         </a:rPr>
                         <a:t>Jefe de Riesgos</a:t>
                       </a:r>
-                      <a:endParaRPr lang="en-US" sz="780" dirty="0">
-                        <a:latin typeface="Calibri" charset="0"/>
-                        <a:ea typeface="Calibri" charset="0"/>
-                        <a:cs typeface="Calibri" charset="0"/>
-                      </a:endParaRPr>
-                    </a:p>
-                  </a:txBody>
-                  <a:tcPr marL="54864" marR="54864" marT="18288" marB="18288" anchor="ctr">
+                      <a:endParaRPr lang="en-US" sz="760" dirty="0">
+                        <a:latin typeface="Calibri" charset="0"/>
+                        <a:ea typeface="Calibri" charset="0"/>
+                        <a:cs typeface="Calibri" charset="0"/>
+                      </a:endParaRPr>
+                    </a:p>
+                  </a:txBody>
+                  <a:tcPr marL="54864" marR="54864" marT="13716" marB="13716" anchor="ctr">
                     <a:lnL w="0" cap="flat" cmpd="sng" algn="ctr">
                       <a:noFill/>
                     </a:lnL>
@@ -2602,24 +2720,24 @@
                         <a:buNone/>
                       </a:pPr>
                       <a:r>
-                        <a:rPr lang="en-US" sz="780" b="1" dirty="0">
-                          <a:solidFill>
-                            <a:schemeClr val="tx1"/>
-                          </a:solidFill>
-                          <a:latin typeface="Calibri" pitchFamily="34" charset="0"/>
-                          <a:ea typeface="Calibri" pitchFamily="34" charset="-122"/>
-                          <a:cs typeface="Calibri" pitchFamily="34" charset="-120"/>
-                        </a:rPr>
-                        <a:t>Debilidades en el contrato del servicio de software</a:t>
-                      </a:r>
-                      <a:endParaRPr lang="en-US" sz="780" dirty="0">
-                        <a:latin typeface="Calibri" charset="0"/>
-                        <a:ea typeface="Calibri" charset="0"/>
-                        <a:cs typeface="Calibri" charset="0"/>
-                      </a:endParaRPr>
-                    </a:p>
-                  </a:txBody>
-                  <a:tcPr marL="54864" marR="54864" marT="18288" marB="18288" anchor="ctr">
+                        <a:rPr lang="en-US" sz="760" b="1" dirty="0">
+                          <a:solidFill>
+                            <a:schemeClr val="tx1"/>
+                          </a:solidFill>
+                          <a:latin typeface="Calibri" pitchFamily="34" charset="0"/>
+                          <a:ea typeface="Calibri" pitchFamily="34" charset="-122"/>
+                          <a:cs typeface="Calibri" pitchFamily="34" charset="-120"/>
+                        </a:rPr>
+                        <a:t>B.7  Debilidades en el contrato del servicio de software</a:t>
+                      </a:r>
+                      <a:endParaRPr lang="en-US" sz="760" dirty="0">
+                        <a:latin typeface="Calibri" charset="0"/>
+                        <a:ea typeface="Calibri" charset="0"/>
+                        <a:cs typeface="Calibri" charset="0"/>
+                      </a:endParaRPr>
+                    </a:p>
+                  </a:txBody>
+                  <a:tcPr marL="54864" marR="54864" marT="13716" marB="13716" anchor="ctr">
                     <a:lnL w="0" cap="flat" cmpd="sng" algn="ctr">
                       <a:noFill/>
                     </a:lnL>
@@ -2652,7 +2770,7 @@
                         <a:buNone/>
                       </a:pPr>
                       <a:r>
-                        <a:rPr lang="en-US" sz="780" dirty="0">
+                        <a:rPr lang="en-US" sz="760" dirty="0">
                           <a:solidFill>
                             <a:schemeClr val="tx1"/>
                           </a:solidFill>
@@ -2662,35 +2780,35 @@
                         </a:rPr>
                         <a:t>Se adjuntará la propuesta de la Gerencia Legal por medio de correo de fecha 09 de octubre 2026, envió propuesta a la Gerencia de Cumplimiento y Seguridad de la Información para la modificación del contrato.</a:t>
                       </a:r>
-                      <a:endParaRPr lang="en-US" sz="780" dirty="0">
-                        <a:latin typeface="Calibri" charset="0"/>
-                        <a:ea typeface="Calibri" charset="0"/>
-                        <a:cs typeface="Calibri" charset="0"/>
-                      </a:endParaRPr>
-                    </a:p>
-                    <a:p>
-                      <a:pPr algn="just" indent="0" marL="0">
-                        <a:buNone/>
-                      </a:pPr>
-                      <a:r>
-                        <a:rPr lang="en-US" sz="780" dirty="0">
-                          <a:solidFill>
-                            <a:schemeClr val="tx1"/>
-                          </a:solidFill>
-                          <a:latin typeface="Calibri" pitchFamily="34" charset="0"/>
-                          <a:ea typeface="Calibri" pitchFamily="34" charset="-122"/>
-                          <a:cs typeface="Calibri" pitchFamily="34" charset="-120"/>
-                        </a:rPr>
-                        <a:t>Comentario CA: 14/10/2026 Compromiso</a:t>
-                      </a:r>
-                      <a:endParaRPr lang="en-US" sz="780" dirty="0">
-                        <a:latin typeface="Calibri" charset="0"/>
-                        <a:ea typeface="Calibri" charset="0"/>
-                        <a:cs typeface="Calibri" charset="0"/>
-                      </a:endParaRPr>
-                    </a:p>
-                  </a:txBody>
-                  <a:tcPr marL="54864" marR="54864" marT="18288" marB="18288" anchor="ctr">
+                      <a:endParaRPr lang="en-US" sz="760" dirty="0">
+                        <a:latin typeface="Calibri" charset="0"/>
+                        <a:ea typeface="Calibri" charset="0"/>
+                        <a:cs typeface="Calibri" charset="0"/>
+                      </a:endParaRPr>
+                    </a:p>
+                    <a:p>
+                      <a:pPr algn="just" indent="0" marL="0">
+                        <a:buNone/>
+                      </a:pPr>
+                      <a:r>
+                        <a:rPr lang="en-US" sz="760" dirty="0">
+                          <a:solidFill>
+                            <a:schemeClr val="tx1"/>
+                          </a:solidFill>
+                          <a:latin typeface="Calibri" pitchFamily="34" charset="0"/>
+                          <a:ea typeface="Calibri" pitchFamily="34" charset="-122"/>
+                          <a:cs typeface="Calibri" pitchFamily="34" charset="-120"/>
+                        </a:rPr>
+                        <a:t>Pendiente</a:t>
+                      </a:r>
+                      <a:endParaRPr lang="en-US" sz="760" dirty="0">
+                        <a:latin typeface="Calibri" charset="0"/>
+                        <a:ea typeface="Calibri" charset="0"/>
+                        <a:cs typeface="Calibri" charset="0"/>
+                      </a:endParaRPr>
+                    </a:p>
+                  </a:txBody>
+                  <a:tcPr marL="54864" marR="54864" marT="13716" marB="13716" anchor="ctr">
                     <a:lnL w="0" cap="flat" cmpd="sng" algn="ctr">
                       <a:noFill/>
                     </a:lnL>
@@ -2720,7 +2838,7 @@
                         <a:buNone/>
                       </a:pPr>
                       <a:r>
-                        <a:rPr lang="en-US" sz="780" b="1" dirty="0">
+                        <a:rPr lang="en-US" sz="760" b="1" dirty="0">
                           <a:solidFill>
                             <a:schemeClr val="accent1"/>
                           </a:solidFill>
@@ -2730,7 +2848,7 @@
                         </a:rPr>
                         <a:t>Gerencia de Cumplimiento</a:t>
                       </a:r>
-                      <a:endParaRPr lang="en-US" sz="780" dirty="0">
+                      <a:endParaRPr lang="en-US" sz="760" dirty="0">
                         <a:latin typeface="Calibri" charset="0"/>
                         <a:ea typeface="Calibri" charset="0"/>
                         <a:cs typeface="Calibri" charset="0"/>
@@ -2741,7 +2859,7 @@
                         <a:buNone/>
                       </a:pPr>
                       <a:r>
-                        <a:rPr lang="en-US" sz="780" b="1" dirty="0">
+                        <a:rPr lang="en-US" sz="760" b="1" dirty="0">
                           <a:solidFill>
                             <a:schemeClr val="accent1"/>
                           </a:solidFill>
@@ -2751,14 +2869,14 @@
                         </a:rPr>
                         <a:t>/ Gerencia Legal</a:t>
                       </a:r>
-                      <a:endParaRPr lang="en-US" sz="780" dirty="0">
-                        <a:latin typeface="Calibri" charset="0"/>
-                        <a:ea typeface="Calibri" charset="0"/>
-                        <a:cs typeface="Calibri" charset="0"/>
-                      </a:endParaRPr>
-                    </a:p>
-                  </a:txBody>
-                  <a:tcPr marL="54864" marR="54864" marT="18288" marB="18288" anchor="ctr">
+                      <a:endParaRPr lang="en-US" sz="760" dirty="0">
+                        <a:latin typeface="Calibri" charset="0"/>
+                        <a:ea typeface="Calibri" charset="0"/>
+                        <a:cs typeface="Calibri" charset="0"/>
+                      </a:endParaRPr>
+                    </a:p>
+                  </a:txBody>
+                  <a:tcPr marL="54864" marR="54864" marT="13716" marB="13716" anchor="ctr">
                     <a:lnL w="0" cap="flat" cmpd="sng" algn="ctr">
                       <a:noFill/>
                     </a:lnL>
@@ -2790,24 +2908,24 @@
                         <a:buNone/>
                       </a:pPr>
                       <a:r>
-                        <a:rPr lang="en-US" sz="780" b="1" dirty="0">
-                          <a:solidFill>
-                            <a:schemeClr val="tx1"/>
-                          </a:solidFill>
-                          <a:latin typeface="Calibri" pitchFamily="34" charset="0"/>
-                          <a:ea typeface="Calibri" pitchFamily="34" charset="-122"/>
-                          <a:cs typeface="Calibri" pitchFamily="34" charset="-120"/>
-                        </a:rPr>
-                        <a:t>Debilidad en el Alcance de las Pruebas Continuidad del Negocio</a:t>
-                      </a:r>
-                      <a:endParaRPr lang="en-US" sz="780" dirty="0">
-                        <a:latin typeface="Calibri" charset="0"/>
-                        <a:ea typeface="Calibri" charset="0"/>
-                        <a:cs typeface="Calibri" charset="0"/>
-                      </a:endParaRPr>
-                    </a:p>
-                  </a:txBody>
-                  <a:tcPr marL="54864" marR="54864" marT="18288" marB="18288" anchor="ctr">
+                        <a:rPr lang="en-US" sz="760" b="1" dirty="0">
+                          <a:solidFill>
+                            <a:schemeClr val="tx1"/>
+                          </a:solidFill>
+                          <a:latin typeface="Calibri" pitchFamily="34" charset="0"/>
+                          <a:ea typeface="Calibri" pitchFamily="34" charset="-122"/>
+                          <a:cs typeface="Calibri" pitchFamily="34" charset="-120"/>
+                        </a:rPr>
+                        <a:t>B.8  Debilidad en el Alcance de las Pruebas Continuidad del Negocio</a:t>
+                      </a:r>
+                      <a:endParaRPr lang="en-US" sz="760" dirty="0">
+                        <a:latin typeface="Calibri" charset="0"/>
+                        <a:ea typeface="Calibri" charset="0"/>
+                        <a:cs typeface="Calibri" charset="0"/>
+                      </a:endParaRPr>
+                    </a:p>
+                  </a:txBody>
+                  <a:tcPr marL="54864" marR="54864" marT="13716" marB="13716" anchor="ctr">
                     <a:lnL w="0" cap="flat" cmpd="sng" algn="ctr">
                       <a:noFill/>
                     </a:lnL>
@@ -2840,7 +2958,7 @@
                         <a:buNone/>
                       </a:pPr>
                       <a:r>
-                        <a:rPr lang="en-US" sz="780" dirty="0">
+                        <a:rPr lang="en-US" sz="760" dirty="0">
                           <a:solidFill>
                             <a:schemeClr val="tx1"/>
                           </a:solidFill>
@@ -2850,39 +2968,39 @@
                         </a:rPr>
                         <a:t>Plan de acción: proveedor critico</a:t>
                       </a:r>
-                      <a:endParaRPr lang="en-US" sz="780" dirty="0">
-                        <a:latin typeface="Calibri" charset="0"/>
-                        <a:ea typeface="Calibri" charset="0"/>
-                        <a:cs typeface="Calibri" charset="0"/>
-                      </a:endParaRPr>
-                    </a:p>
-                    <a:p>
-                      <a:pPr algn="just" indent="0" marL="0">
-                        <a:buNone/>
-                      </a:pPr>
-                      <a:r>
-                        <a:rPr lang="en-US" sz="780" dirty="0">
-                          <a:solidFill>
-                            <a:schemeClr val="tx1"/>
-                          </a:solidFill>
-                          <a:latin typeface="Calibri" pitchFamily="34" charset="0"/>
-                          <a:ea typeface="Calibri" pitchFamily="34" charset="-122"/>
-                          <a:cs typeface="Calibri" pitchFamily="34" charset="-120"/>
-                        </a:rPr>
-                        <a:t>Comentario CA: 14/10/2026 Compromiso</a:t>
-                      </a:r>
-                      <a:endParaRPr lang="en-US" sz="780" dirty="0">
-                        <a:latin typeface="Calibri" charset="0"/>
-                        <a:ea typeface="Calibri" charset="0"/>
-                        <a:cs typeface="Calibri" charset="0"/>
-                      </a:endParaRPr>
-                    </a:p>
-                    <a:p>
-                      <a:pPr algn="just" indent="0" marL="0">
-                        <a:buNone/>
-                      </a:pPr>
-                      <a:r>
-                        <a:rPr lang="en-US" sz="780" dirty="0">
+                      <a:endParaRPr lang="en-US" sz="760" dirty="0">
+                        <a:latin typeface="Calibri" charset="0"/>
+                        <a:ea typeface="Calibri" charset="0"/>
+                        <a:cs typeface="Calibri" charset="0"/>
+                      </a:endParaRPr>
+                    </a:p>
+                    <a:p>
+                      <a:pPr algn="just" indent="0" marL="0">
+                        <a:buNone/>
+                      </a:pPr>
+                      <a:r>
+                        <a:rPr lang="en-US" sz="760" dirty="0">
+                          <a:solidFill>
+                            <a:schemeClr val="tx1"/>
+                          </a:solidFill>
+                          <a:latin typeface="Calibri" pitchFamily="34" charset="0"/>
+                          <a:ea typeface="Calibri" pitchFamily="34" charset="-122"/>
+                          <a:cs typeface="Calibri" pitchFamily="34" charset="-120"/>
+                        </a:rPr>
+                        <a:t>Pendiente</a:t>
+                      </a:r>
+                      <a:endParaRPr lang="en-US" sz="760" dirty="0">
+                        <a:latin typeface="Calibri" charset="0"/>
+                        <a:ea typeface="Calibri" charset="0"/>
+                        <a:cs typeface="Calibri" charset="0"/>
+                      </a:endParaRPr>
+                    </a:p>
+                    <a:p>
+                      <a:pPr algn="just" indent="0" marL="0">
+                        <a:buNone/>
+                      </a:pPr>
+                      <a:r>
+                        <a:rPr lang="en-US" sz="760" dirty="0">
                           <a:solidFill>
                             <a:schemeClr val="tx1"/>
                           </a:solidFill>
@@ -2892,14 +3010,14 @@
                         </a:rPr>
                         <a:t>Se identificarán los servicios tecnológicos tercerizados críticos y se incorporarán en el alcance de las pruebas de continuidad del negocio. Asimismo, se solicitarán a los proveedores los resultados y evidencias de las pruebas realizadas, con el fin de validar la efectividad de los controles implementados.</a:t>
                       </a:r>
-                      <a:endParaRPr lang="en-US" sz="780" dirty="0">
-                        <a:latin typeface="Calibri" charset="0"/>
-                        <a:ea typeface="Calibri" charset="0"/>
-                        <a:cs typeface="Calibri" charset="0"/>
-                      </a:endParaRPr>
-                    </a:p>
-                  </a:txBody>
-                  <a:tcPr marL="54864" marR="54864" marT="18288" marB="18288" anchor="ctr">
+                      <a:endParaRPr lang="en-US" sz="760" dirty="0">
+                        <a:latin typeface="Calibri" charset="0"/>
+                        <a:ea typeface="Calibri" charset="0"/>
+                        <a:cs typeface="Calibri" charset="0"/>
+                      </a:endParaRPr>
+                    </a:p>
+                  </a:txBody>
+                  <a:tcPr marL="54864" marR="54864" marT="13716" marB="13716" anchor="ctr">
                     <a:lnL w="0" cap="flat" cmpd="sng" algn="ctr">
                       <a:noFill/>
                     </a:lnL>
@@ -2929,7 +3047,7 @@
                         <a:buNone/>
                       </a:pPr>
                       <a:r>
-                        <a:rPr lang="en-US" sz="780" b="1" dirty="0">
+                        <a:rPr lang="en-US" sz="760" b="1" dirty="0">
                           <a:solidFill>
                             <a:schemeClr val="accent1"/>
                           </a:solidFill>
@@ -2939,14 +3057,14 @@
                         </a:rPr>
                         <a:t>Administración de Riesgos/Gerencia de sistemas/Seguridad de la información</a:t>
                       </a:r>
-                      <a:endParaRPr lang="en-US" sz="780" dirty="0">
-                        <a:latin typeface="Calibri" charset="0"/>
-                        <a:ea typeface="Calibri" charset="0"/>
-                        <a:cs typeface="Calibri" charset="0"/>
-                      </a:endParaRPr>
-                    </a:p>
-                  </a:txBody>
-                  <a:tcPr marL="54864" marR="54864" marT="18288" marB="18288" anchor="ctr">
+                      <a:endParaRPr lang="en-US" sz="760" dirty="0">
+                        <a:latin typeface="Calibri" charset="0"/>
+                        <a:ea typeface="Calibri" charset="0"/>
+                        <a:cs typeface="Calibri" charset="0"/>
+                      </a:endParaRPr>
+                    </a:p>
+                  </a:txBody>
+                  <a:tcPr marL="54864" marR="54864" marT="13716" marB="13716" anchor="ctr">
                     <a:lnL w="0" cap="flat" cmpd="sng" algn="ctr">
                       <a:noFill/>
                     </a:lnL>
@@ -2978,24 +3096,24 @@
                         <a:buNone/>
                       </a:pPr>
                       <a:r>
-                        <a:rPr lang="en-US" sz="780" b="1" dirty="0">
-                          <a:solidFill>
-                            <a:schemeClr val="tx1"/>
-                          </a:solidFill>
-                          <a:latin typeface="Calibri" pitchFamily="34" charset="0"/>
-                          <a:ea typeface="Calibri" pitchFamily="34" charset="-122"/>
-                          <a:cs typeface="Calibri" pitchFamily="34" charset="-120"/>
-                        </a:rPr>
-                        <a:t>Deficiencia en los procedimientos de Respaldos.</a:t>
-                      </a:r>
-                      <a:endParaRPr lang="en-US" sz="780" dirty="0">
-                        <a:latin typeface="Calibri" charset="0"/>
-                        <a:ea typeface="Calibri" charset="0"/>
-                        <a:cs typeface="Calibri" charset="0"/>
-                      </a:endParaRPr>
-                    </a:p>
-                  </a:txBody>
-                  <a:tcPr marL="54864" marR="54864" marT="18288" marB="18288" anchor="ctr">
+                        <a:rPr lang="en-US" sz="760" b="1" dirty="0">
+                          <a:solidFill>
+                            <a:schemeClr val="tx1"/>
+                          </a:solidFill>
+                          <a:latin typeface="Calibri" pitchFamily="34" charset="0"/>
+                          <a:ea typeface="Calibri" pitchFamily="34" charset="-122"/>
+                          <a:cs typeface="Calibri" pitchFamily="34" charset="-120"/>
+                        </a:rPr>
+                        <a:t>B.9  Deficiencia en los procedimientos de Respaldos.</a:t>
+                      </a:r>
+                      <a:endParaRPr lang="en-US" sz="760" dirty="0">
+                        <a:latin typeface="Calibri" charset="0"/>
+                        <a:ea typeface="Calibri" charset="0"/>
+                        <a:cs typeface="Calibri" charset="0"/>
+                      </a:endParaRPr>
+                    </a:p>
+                  </a:txBody>
+                  <a:tcPr marL="54864" marR="54864" marT="13716" marB="13716" anchor="ctr">
                     <a:lnL w="0" cap="flat" cmpd="sng" algn="ctr">
                       <a:noFill/>
                     </a:lnL>
@@ -3028,7 +3146,7 @@
                         <a:buNone/>
                       </a:pPr>
                       <a:r>
-                        <a:rPr lang="en-US" sz="780" dirty="0">
+                        <a:rPr lang="en-US" sz="760" dirty="0">
                           <a:solidFill>
                             <a:schemeClr val="tx1"/>
                           </a:solidFill>
@@ -3038,35 +3156,35 @@
                         </a:rPr>
                         <a:t>Plan de acción</a:t>
                       </a:r>
-                      <a:endParaRPr lang="en-US" sz="780" dirty="0">
-                        <a:latin typeface="Calibri" charset="0"/>
-                        <a:ea typeface="Calibri" charset="0"/>
-                        <a:cs typeface="Calibri" charset="0"/>
-                      </a:endParaRPr>
-                    </a:p>
-                    <a:p>
-                      <a:pPr algn="just" indent="0" marL="0">
-                        <a:buNone/>
-                      </a:pPr>
-                      <a:r>
-                        <a:rPr lang="en-US" sz="780" dirty="0">
-                          <a:solidFill>
-                            <a:schemeClr val="tx1"/>
-                          </a:solidFill>
-                          <a:latin typeface="Calibri" pitchFamily="34" charset="0"/>
-                          <a:ea typeface="Calibri" pitchFamily="34" charset="-122"/>
-                          <a:cs typeface="Calibri" pitchFamily="34" charset="-120"/>
-                        </a:rPr>
-                        <a:t>Comentario CA: 14/10/2026 Compromiso</a:t>
-                      </a:r>
-                      <a:endParaRPr lang="en-US" sz="780" dirty="0">
-                        <a:latin typeface="Calibri" charset="0"/>
-                        <a:ea typeface="Calibri" charset="0"/>
-                        <a:cs typeface="Calibri" charset="0"/>
-                      </a:endParaRPr>
-                    </a:p>
-                  </a:txBody>
-                  <a:tcPr marL="54864" marR="54864" marT="18288" marB="18288" anchor="ctr">
+                      <a:endParaRPr lang="en-US" sz="760" dirty="0">
+                        <a:latin typeface="Calibri" charset="0"/>
+                        <a:ea typeface="Calibri" charset="0"/>
+                        <a:cs typeface="Calibri" charset="0"/>
+                      </a:endParaRPr>
+                    </a:p>
+                    <a:p>
+                      <a:pPr algn="just" indent="0" marL="0">
+                        <a:buNone/>
+                      </a:pPr>
+                      <a:r>
+                        <a:rPr lang="en-US" sz="760" dirty="0">
+                          <a:solidFill>
+                            <a:schemeClr val="tx1"/>
+                          </a:solidFill>
+                          <a:latin typeface="Calibri" pitchFamily="34" charset="0"/>
+                          <a:ea typeface="Calibri" pitchFamily="34" charset="-122"/>
+                          <a:cs typeface="Calibri" pitchFamily="34" charset="-120"/>
+                        </a:rPr>
+                        <a:t>Pendiente</a:t>
+                      </a:r>
+                      <a:endParaRPr lang="en-US" sz="760" dirty="0">
+                        <a:latin typeface="Calibri" charset="0"/>
+                        <a:ea typeface="Calibri" charset="0"/>
+                        <a:cs typeface="Calibri" charset="0"/>
+                      </a:endParaRPr>
+                    </a:p>
+                  </a:txBody>
+                  <a:tcPr marL="54864" marR="54864" marT="13716" marB="13716" anchor="ctr">
                     <a:lnL w="0" cap="flat" cmpd="sng" algn="ctr">
                       <a:noFill/>
                     </a:lnL>
@@ -3096,7 +3214,7 @@
                         <a:buNone/>
                       </a:pPr>
                       <a:r>
-                        <a:rPr lang="en-US" sz="780" b="1" dirty="0">
+                        <a:rPr lang="en-US" sz="760" b="1" dirty="0">
                           <a:solidFill>
                             <a:schemeClr val="accent1"/>
                           </a:solidFill>
@@ -3106,7 +3224,7 @@
                         </a:rPr>
                         <a:t>Gerencia de Cumplimiento</a:t>
                       </a:r>
-                      <a:endParaRPr lang="en-US" sz="780" dirty="0">
+                      <a:endParaRPr lang="en-US" sz="760" dirty="0">
                         <a:latin typeface="Calibri" charset="0"/>
                         <a:ea typeface="Calibri" charset="0"/>
                         <a:cs typeface="Calibri" charset="0"/>
@@ -3117,7 +3235,7 @@
                         <a:buNone/>
                       </a:pPr>
                       <a:r>
-                        <a:rPr lang="en-US" sz="780" b="1" dirty="0">
+                        <a:rPr lang="en-US" sz="760" b="1" dirty="0">
                           <a:solidFill>
                             <a:schemeClr val="accent1"/>
                           </a:solidFill>
@@ -3127,14 +3245,14 @@
                         </a:rPr>
                         <a:t>/ Gerencia de Sistemas</a:t>
                       </a:r>
-                      <a:endParaRPr lang="en-US" sz="780" dirty="0">
-                        <a:latin typeface="Calibri" charset="0"/>
-                        <a:ea typeface="Calibri" charset="0"/>
-                        <a:cs typeface="Calibri" charset="0"/>
-                      </a:endParaRPr>
-                    </a:p>
-                  </a:txBody>
-                  <a:tcPr marL="54864" marR="54864" marT="18288" marB="18288" anchor="ctr">
+                      <a:endParaRPr lang="en-US" sz="760" dirty="0">
+                        <a:latin typeface="Calibri" charset="0"/>
+                        <a:ea typeface="Calibri" charset="0"/>
+                        <a:cs typeface="Calibri" charset="0"/>
+                      </a:endParaRPr>
+                    </a:p>
+                  </a:txBody>
+                  <a:tcPr marL="54864" marR="54864" marT="13716" marB="13716" anchor="ctr">
                     <a:lnL w="0" cap="flat" cmpd="sng" algn="ctr">
                       <a:noFill/>
                     </a:lnL>
@@ -3166,24 +3284,24 @@
                         <a:buNone/>
                       </a:pPr>
                       <a:r>
-                        <a:rPr lang="en-US" sz="780" b="1" dirty="0">
-                          <a:solidFill>
-                            <a:schemeClr val="tx1"/>
-                          </a:solidFill>
-                          <a:latin typeface="Calibri" pitchFamily="34" charset="0"/>
-                          <a:ea typeface="Calibri" pitchFamily="34" charset="-122"/>
-                          <a:cs typeface="Calibri" pitchFamily="34" charset="-120"/>
-                        </a:rPr>
-                        <a:t>Deficiencia en la hora del sistema y la herramienta de Monitoreo</a:t>
-                      </a:r>
-                      <a:endParaRPr lang="en-US" sz="780" dirty="0">
-                        <a:latin typeface="Calibri" charset="0"/>
-                        <a:ea typeface="Calibri" charset="0"/>
-                        <a:cs typeface="Calibri" charset="0"/>
-                      </a:endParaRPr>
-                    </a:p>
-                  </a:txBody>
-                  <a:tcPr marL="54864" marR="54864" marT="18288" marB="18288" anchor="ctr">
+                        <a:rPr lang="en-US" sz="760" b="1" dirty="0">
+                          <a:solidFill>
+                            <a:schemeClr val="tx1"/>
+                          </a:solidFill>
+                          <a:latin typeface="Calibri" pitchFamily="34" charset="0"/>
+                          <a:ea typeface="Calibri" pitchFamily="34" charset="-122"/>
+                          <a:cs typeface="Calibri" pitchFamily="34" charset="-120"/>
+                        </a:rPr>
+                        <a:t>B.10  Deficiencia en la hora del sistema y la herramienta de Monitoreo</a:t>
+                      </a:r>
+                      <a:endParaRPr lang="en-US" sz="760" dirty="0">
+                        <a:latin typeface="Calibri" charset="0"/>
+                        <a:ea typeface="Calibri" charset="0"/>
+                        <a:cs typeface="Calibri" charset="0"/>
+                      </a:endParaRPr>
+                    </a:p>
+                  </a:txBody>
+                  <a:tcPr marL="54864" marR="54864" marT="13716" marB="13716" anchor="ctr">
                     <a:lnL w="0" cap="flat" cmpd="sng" algn="ctr">
                       <a:noFill/>
                     </a:lnL>
@@ -3216,7 +3334,7 @@
                         <a:buNone/>
                       </a:pPr>
                       <a:r>
-                        <a:rPr lang="en-US" sz="780" dirty="0">
+                        <a:rPr lang="en-US" sz="760" dirty="0">
                           <a:solidFill>
                             <a:schemeClr val="tx1"/>
                           </a:solidFill>
@@ -3226,35 +3344,35 @@
                         </a:rPr>
                         <a:t>Descargo correos de gestion</a:t>
                       </a:r>
-                      <a:endParaRPr lang="en-US" sz="780" dirty="0">
-                        <a:latin typeface="Calibri" charset="0"/>
-                        <a:ea typeface="Calibri" charset="0"/>
-                        <a:cs typeface="Calibri" charset="0"/>
-                      </a:endParaRPr>
-                    </a:p>
-                    <a:p>
-                      <a:pPr algn="just" indent="0" marL="0">
-                        <a:buNone/>
-                      </a:pPr>
-                      <a:r>
-                        <a:rPr lang="en-US" sz="780" dirty="0">
-                          <a:solidFill>
-                            <a:schemeClr val="tx1"/>
-                          </a:solidFill>
-                          <a:latin typeface="Calibri" pitchFamily="34" charset="0"/>
-                          <a:ea typeface="Calibri" pitchFamily="34" charset="-122"/>
-                          <a:cs typeface="Calibri" pitchFamily="34" charset="-120"/>
-                        </a:rPr>
-                        <a:t>Comentario CA: 14/10/2026 Compromiso</a:t>
-                      </a:r>
-                      <a:endParaRPr lang="en-US" sz="780" dirty="0">
-                        <a:latin typeface="Calibri" charset="0"/>
-                        <a:ea typeface="Calibri" charset="0"/>
-                        <a:cs typeface="Calibri" charset="0"/>
-                      </a:endParaRPr>
-                    </a:p>
-                  </a:txBody>
-                  <a:tcPr marL="54864" marR="54864" marT="18288" marB="18288" anchor="ctr">
+                      <a:endParaRPr lang="en-US" sz="760" dirty="0">
+                        <a:latin typeface="Calibri" charset="0"/>
+                        <a:ea typeface="Calibri" charset="0"/>
+                        <a:cs typeface="Calibri" charset="0"/>
+                      </a:endParaRPr>
+                    </a:p>
+                    <a:p>
+                      <a:pPr algn="just" indent="0" marL="0">
+                        <a:buNone/>
+                      </a:pPr>
+                      <a:r>
+                        <a:rPr lang="en-US" sz="760" dirty="0">
+                          <a:solidFill>
+                            <a:schemeClr val="tx1"/>
+                          </a:solidFill>
+                          <a:latin typeface="Calibri" pitchFamily="34" charset="0"/>
+                          <a:ea typeface="Calibri" pitchFamily="34" charset="-122"/>
+                          <a:cs typeface="Calibri" pitchFamily="34" charset="-120"/>
+                        </a:rPr>
+                        <a:t>Pendiente</a:t>
+                      </a:r>
+                      <a:endParaRPr lang="en-US" sz="760" dirty="0">
+                        <a:latin typeface="Calibri" charset="0"/>
+                        <a:ea typeface="Calibri" charset="0"/>
+                        <a:cs typeface="Calibri" charset="0"/>
+                      </a:endParaRPr>
+                    </a:p>
+                  </a:txBody>
+                  <a:tcPr marL="54864" marR="54864" marT="13716" marB="13716" anchor="ctr">
                     <a:lnL w="0" cap="flat" cmpd="sng" algn="ctr">
                       <a:noFill/>
                     </a:lnL>
@@ -3284,7 +3402,7 @@
                         <a:buNone/>
                       </a:pPr>
                       <a:r>
-                        <a:rPr lang="en-US" sz="780" b="1" dirty="0">
+                        <a:rPr lang="en-US" sz="760" b="1" dirty="0">
                           <a:solidFill>
                             <a:schemeClr val="accent1"/>
                           </a:solidFill>
@@ -3294,14 +3412,14 @@
                         </a:rPr>
                         <a:t>Gerencia de Cumplimiento</a:t>
                       </a:r>
-                      <a:endParaRPr lang="en-US" sz="780" dirty="0">
-                        <a:latin typeface="Calibri" charset="0"/>
-                        <a:ea typeface="Calibri" charset="0"/>
-                        <a:cs typeface="Calibri" charset="0"/>
-                      </a:endParaRPr>
-                    </a:p>
-                  </a:txBody>
-                  <a:tcPr marL="54864" marR="54864" marT="18288" marB="18288" anchor="ctr">
+                      <a:endParaRPr lang="en-US" sz="760" dirty="0">
+                        <a:latin typeface="Calibri" charset="0"/>
+                        <a:ea typeface="Calibri" charset="0"/>
+                        <a:cs typeface="Calibri" charset="0"/>
+                      </a:endParaRPr>
+                    </a:p>
+                  </a:txBody>
+                  <a:tcPr marL="54864" marR="54864" marT="13716" marB="13716" anchor="ctr">
                     <a:lnL w="0" cap="flat" cmpd="sng" algn="ctr">
                       <a:noFill/>
                     </a:lnL>
@@ -3333,24 +3451,24 @@
                         <a:buNone/>
                       </a:pPr>
                       <a:r>
-                        <a:rPr lang="en-US" sz="780" b="1" dirty="0">
-                          <a:solidFill>
-                            <a:schemeClr val="tx1"/>
-                          </a:solidFill>
-                          <a:latin typeface="Calibri" pitchFamily="34" charset="0"/>
-                          <a:ea typeface="Calibri" pitchFamily="34" charset="-122"/>
-                          <a:cs typeface="Calibri" pitchFamily="34" charset="-120"/>
-                        </a:rPr>
-                        <a:t>Verificación de las condiciones en ACRM</a:t>
-                      </a:r>
-                      <a:endParaRPr lang="en-US" sz="780" dirty="0">
-                        <a:latin typeface="Calibri" charset="0"/>
-                        <a:ea typeface="Calibri" charset="0"/>
-                        <a:cs typeface="Calibri" charset="0"/>
-                      </a:endParaRPr>
-                    </a:p>
-                  </a:txBody>
-                  <a:tcPr marL="54864" marR="54864" marT="18288" marB="18288" anchor="ctr">
+                        <a:rPr lang="en-US" sz="760" b="1" dirty="0">
+                          <a:solidFill>
+                            <a:schemeClr val="tx1"/>
+                          </a:solidFill>
+                          <a:latin typeface="Calibri" pitchFamily="34" charset="0"/>
+                          <a:ea typeface="Calibri" pitchFamily="34" charset="-122"/>
+                          <a:cs typeface="Calibri" pitchFamily="34" charset="-120"/>
+                        </a:rPr>
+                        <a:t>B.11  Verificación de las condiciones en ACRM</a:t>
+                      </a:r>
+                      <a:endParaRPr lang="en-US" sz="760" dirty="0">
+                        <a:latin typeface="Calibri" charset="0"/>
+                        <a:ea typeface="Calibri" charset="0"/>
+                        <a:cs typeface="Calibri" charset="0"/>
+                      </a:endParaRPr>
+                    </a:p>
+                  </a:txBody>
+                  <a:tcPr marL="54864" marR="54864" marT="13716" marB="13716" anchor="ctr">
                     <a:lnL w="0" cap="flat" cmpd="sng" algn="ctr">
                       <a:noFill/>
                     </a:lnL>
@@ -3383,7 +3501,7 @@
                         <a:buNone/>
                       </a:pPr>
                       <a:r>
-                        <a:rPr lang="en-US" sz="780" dirty="0">
+                        <a:rPr lang="en-US" sz="760" dirty="0">
                           <a:solidFill>
                             <a:schemeClr val="tx1"/>
                           </a:solidFill>
@@ -3393,35 +3511,35 @@
                         </a:rPr>
                         <a:t>Descargo</a:t>
                       </a:r>
-                      <a:endParaRPr lang="en-US" sz="780" dirty="0">
-                        <a:latin typeface="Calibri" charset="0"/>
-                        <a:ea typeface="Calibri" charset="0"/>
-                        <a:cs typeface="Calibri" charset="0"/>
-                      </a:endParaRPr>
-                    </a:p>
-                    <a:p>
-                      <a:pPr algn="just" indent="0" marL="0">
-                        <a:buNone/>
-                      </a:pPr>
-                      <a:r>
-                        <a:rPr lang="en-US" sz="780" dirty="0">
-                          <a:solidFill>
-                            <a:schemeClr val="tx1"/>
-                          </a:solidFill>
-                          <a:latin typeface="Calibri" pitchFamily="34" charset="0"/>
-                          <a:ea typeface="Calibri" pitchFamily="34" charset="-122"/>
-                          <a:cs typeface="Calibri" pitchFamily="34" charset="-120"/>
-                        </a:rPr>
-                        <a:t>Comentario CA: 14/10/2026 Compromiso</a:t>
-                      </a:r>
-                      <a:endParaRPr lang="en-US" sz="780" dirty="0">
-                        <a:latin typeface="Calibri" charset="0"/>
-                        <a:ea typeface="Calibri" charset="0"/>
-                        <a:cs typeface="Calibri" charset="0"/>
-                      </a:endParaRPr>
-                    </a:p>
-                  </a:txBody>
-                  <a:tcPr marL="54864" marR="54864" marT="18288" marB="18288" anchor="ctr">
+                      <a:endParaRPr lang="en-US" sz="760" dirty="0">
+                        <a:latin typeface="Calibri" charset="0"/>
+                        <a:ea typeface="Calibri" charset="0"/>
+                        <a:cs typeface="Calibri" charset="0"/>
+                      </a:endParaRPr>
+                    </a:p>
+                    <a:p>
+                      <a:pPr algn="just" indent="0" marL="0">
+                        <a:buNone/>
+                      </a:pPr>
+                      <a:r>
+                        <a:rPr lang="en-US" sz="760" dirty="0">
+                          <a:solidFill>
+                            <a:schemeClr val="tx1"/>
+                          </a:solidFill>
+                          <a:latin typeface="Calibri" pitchFamily="34" charset="0"/>
+                          <a:ea typeface="Calibri" pitchFamily="34" charset="-122"/>
+                          <a:cs typeface="Calibri" pitchFamily="34" charset="-120"/>
+                        </a:rPr>
+                        <a:t>Pendiente</a:t>
+                      </a:r>
+                      <a:endParaRPr lang="en-US" sz="760" dirty="0">
+                        <a:latin typeface="Calibri" charset="0"/>
+                        <a:ea typeface="Calibri" charset="0"/>
+                        <a:cs typeface="Calibri" charset="0"/>
+                      </a:endParaRPr>
+                    </a:p>
+                  </a:txBody>
+                  <a:tcPr marL="54864" marR="54864" marT="13716" marB="13716" anchor="ctr">
                     <a:lnL w="0" cap="flat" cmpd="sng" algn="ctr">
                       <a:noFill/>
                     </a:lnL>
@@ -3451,7 +3569,7 @@
                         <a:buNone/>
                       </a:pPr>
                       <a:r>
-                        <a:rPr lang="en-US" sz="780" b="1" dirty="0">
+                        <a:rPr lang="en-US" sz="760" b="1" dirty="0">
                           <a:solidFill>
                             <a:schemeClr val="accent1"/>
                           </a:solidFill>
@@ -3461,14 +3579,14 @@
                         </a:rPr>
                         <a:t>Gerencia de Cumplimiento</a:t>
                       </a:r>
-                      <a:endParaRPr lang="en-US" sz="780" dirty="0">
-                        <a:latin typeface="Calibri" charset="0"/>
-                        <a:ea typeface="Calibri" charset="0"/>
-                        <a:cs typeface="Calibri" charset="0"/>
-                      </a:endParaRPr>
-                    </a:p>
-                  </a:txBody>
-                  <a:tcPr marL="54864" marR="54864" marT="18288" marB="18288" anchor="ctr">
+                      <a:endParaRPr lang="en-US" sz="760" dirty="0">
+                        <a:latin typeface="Calibri" charset="0"/>
+                        <a:ea typeface="Calibri" charset="0"/>
+                        <a:cs typeface="Calibri" charset="0"/>
+                      </a:endParaRPr>
+                    </a:p>
+                  </a:txBody>
+                  <a:tcPr marL="54864" marR="54864" marT="13716" marB="13716" anchor="ctr">
                     <a:lnL w="0" cap="flat" cmpd="sng" algn="ctr">
                       <a:noFill/>
                     </a:lnL>
@@ -3500,24 +3618,24 @@
                         <a:buNone/>
                       </a:pPr>
                       <a:r>
-                        <a:rPr lang="en-US" sz="780" b="1" dirty="0">
-                          <a:solidFill>
-                            <a:schemeClr val="tx1"/>
-                          </a:solidFill>
-                          <a:latin typeface="Calibri" pitchFamily="34" charset="0"/>
-                          <a:ea typeface="Calibri" pitchFamily="34" charset="-122"/>
-                          <a:cs typeface="Calibri" pitchFamily="34" charset="-120"/>
-                        </a:rPr>
-                        <a:t>Limitante de Accesos a los Datos de COMEDICA, alojada en la Herramienta de Monitoreo.</a:t>
-                      </a:r>
-                      <a:endParaRPr lang="en-US" sz="780" dirty="0">
-                        <a:latin typeface="Calibri" charset="0"/>
-                        <a:ea typeface="Calibri" charset="0"/>
-                        <a:cs typeface="Calibri" charset="0"/>
-                      </a:endParaRPr>
-                    </a:p>
-                  </a:txBody>
-                  <a:tcPr marL="54864" marR="54864" marT="18288" marB="18288" anchor="ctr">
+                        <a:rPr lang="en-US" sz="760" b="1" dirty="0">
+                          <a:solidFill>
+                            <a:schemeClr val="tx1"/>
+                          </a:solidFill>
+                          <a:latin typeface="Calibri" pitchFamily="34" charset="0"/>
+                          <a:ea typeface="Calibri" pitchFamily="34" charset="-122"/>
+                          <a:cs typeface="Calibri" pitchFamily="34" charset="-120"/>
+                        </a:rPr>
+                        <a:t>B.12  Limitante de Accesos a los Datos de COMEDICA, alojada en la Herramienta de Monitoreo.</a:t>
+                      </a:r>
+                      <a:endParaRPr lang="en-US" sz="760" dirty="0">
+                        <a:latin typeface="Calibri" charset="0"/>
+                        <a:ea typeface="Calibri" charset="0"/>
+                        <a:cs typeface="Calibri" charset="0"/>
+                      </a:endParaRPr>
+                    </a:p>
+                  </a:txBody>
+                  <a:tcPr marL="54864" marR="54864" marT="13716" marB="13716" anchor="ctr">
                     <a:lnL w="0" cap="flat" cmpd="sng" algn="ctr">
                       <a:noFill/>
                     </a:lnL>
@@ -3550,7 +3668,7 @@
                         <a:buNone/>
                       </a:pPr>
                       <a:r>
-                        <a:rPr lang="en-US" sz="780" dirty="0">
+                        <a:rPr lang="en-US" sz="760" dirty="0">
                           <a:solidFill>
                             <a:schemeClr val="tx1"/>
                           </a:solidFill>
@@ -3560,35 +3678,35 @@
                         </a:rPr>
                         <a:t>Descargo</a:t>
                       </a:r>
-                      <a:endParaRPr lang="en-US" sz="780" dirty="0">
-                        <a:latin typeface="Calibri" charset="0"/>
-                        <a:ea typeface="Calibri" charset="0"/>
-                        <a:cs typeface="Calibri" charset="0"/>
-                      </a:endParaRPr>
-                    </a:p>
-                    <a:p>
-                      <a:pPr algn="just" indent="0" marL="0">
-                        <a:buNone/>
-                      </a:pPr>
-                      <a:r>
-                        <a:rPr lang="en-US" sz="780" dirty="0">
-                          <a:solidFill>
-                            <a:schemeClr val="tx1"/>
-                          </a:solidFill>
-                          <a:latin typeface="Calibri" pitchFamily="34" charset="0"/>
-                          <a:ea typeface="Calibri" pitchFamily="34" charset="-122"/>
-                          <a:cs typeface="Calibri" pitchFamily="34" charset="-120"/>
-                        </a:rPr>
-                        <a:t>Comentario CA: 14/10/2026 Compromiso</a:t>
-                      </a:r>
-                      <a:endParaRPr lang="en-US" sz="780" dirty="0">
-                        <a:latin typeface="Calibri" charset="0"/>
-                        <a:ea typeface="Calibri" charset="0"/>
-                        <a:cs typeface="Calibri" charset="0"/>
-                      </a:endParaRPr>
-                    </a:p>
-                  </a:txBody>
-                  <a:tcPr marL="54864" marR="54864" marT="18288" marB="18288" anchor="ctr">
+                      <a:endParaRPr lang="en-US" sz="760" dirty="0">
+                        <a:latin typeface="Calibri" charset="0"/>
+                        <a:ea typeface="Calibri" charset="0"/>
+                        <a:cs typeface="Calibri" charset="0"/>
+                      </a:endParaRPr>
+                    </a:p>
+                    <a:p>
+                      <a:pPr algn="just" indent="0" marL="0">
+                        <a:buNone/>
+                      </a:pPr>
+                      <a:r>
+                        <a:rPr lang="en-US" sz="760" dirty="0">
+                          <a:solidFill>
+                            <a:schemeClr val="tx1"/>
+                          </a:solidFill>
+                          <a:latin typeface="Calibri" pitchFamily="34" charset="0"/>
+                          <a:ea typeface="Calibri" pitchFamily="34" charset="-122"/>
+                          <a:cs typeface="Calibri" pitchFamily="34" charset="-120"/>
+                        </a:rPr>
+                        <a:t>Pendiente</a:t>
+                      </a:r>
+                      <a:endParaRPr lang="en-US" sz="760" dirty="0">
+                        <a:latin typeface="Calibri" charset="0"/>
+                        <a:ea typeface="Calibri" charset="0"/>
+                        <a:cs typeface="Calibri" charset="0"/>
+                      </a:endParaRPr>
+                    </a:p>
+                  </a:txBody>
+                  <a:tcPr marL="54864" marR="54864" marT="13716" marB="13716" anchor="ctr">
                     <a:lnL w="0" cap="flat" cmpd="sng" algn="ctr">
                       <a:noFill/>
                     </a:lnL>
@@ -3618,7 +3736,7 @@
                         <a:buNone/>
                       </a:pPr>
                       <a:r>
-                        <a:rPr lang="en-US" sz="780" b="1" dirty="0">
+                        <a:rPr lang="en-US" sz="760" b="1" dirty="0">
                           <a:solidFill>
                             <a:schemeClr val="accent1"/>
                           </a:solidFill>
@@ -3628,7 +3746,7 @@
                         </a:rPr>
                         <a:t>Gerencia de Cumplimiento</a:t>
                       </a:r>
-                      <a:endParaRPr lang="en-US" sz="780" dirty="0">
+                      <a:endParaRPr lang="en-US" sz="760" dirty="0">
                         <a:latin typeface="Calibri" charset="0"/>
                         <a:ea typeface="Calibri" charset="0"/>
                         <a:cs typeface="Calibri" charset="0"/>
@@ -3639,7 +3757,7 @@
                         <a:buNone/>
                       </a:pPr>
                       <a:r>
-                        <a:rPr lang="en-US" sz="780" b="1" dirty="0">
+                        <a:rPr lang="en-US" sz="760" b="1" dirty="0">
                           <a:solidFill>
                             <a:schemeClr val="accent1"/>
                           </a:solidFill>
@@ -3649,14 +3767,14 @@
                         </a:rPr>
                         <a:t>/ Seguridad de la información</a:t>
                       </a:r>
-                      <a:endParaRPr lang="en-US" sz="780" dirty="0">
-                        <a:latin typeface="Calibri" charset="0"/>
-                        <a:ea typeface="Calibri" charset="0"/>
-                        <a:cs typeface="Calibri" charset="0"/>
-                      </a:endParaRPr>
-                    </a:p>
-                  </a:txBody>
-                  <a:tcPr marL="54864" marR="54864" marT="18288" marB="18288" anchor="ctr">
+                      <a:endParaRPr lang="en-US" sz="760" dirty="0">
+                        <a:latin typeface="Calibri" charset="0"/>
+                        <a:ea typeface="Calibri" charset="0"/>
+                        <a:cs typeface="Calibri" charset="0"/>
+                      </a:endParaRPr>
+                    </a:p>
+                  </a:txBody>
+                  <a:tcPr marL="54864" marR="54864" marT="13716" marB="13716" anchor="ctr">
                     <a:lnL w="0" cap="flat" cmpd="sng" algn="ctr">
                       <a:noFill/>
                     </a:lnL>
@@ -3688,24 +3806,24 @@
                         <a:buNone/>
                       </a:pPr>
                       <a:r>
-                        <a:rPr lang="en-US" sz="780" b="1" dirty="0">
-                          <a:solidFill>
-                            <a:schemeClr val="tx1"/>
-                          </a:solidFill>
-                          <a:latin typeface="Calibri" pitchFamily="34" charset="0"/>
-                          <a:ea typeface="Calibri" pitchFamily="34" charset="-122"/>
-                          <a:cs typeface="Calibri" pitchFamily="34" charset="-120"/>
-                        </a:rPr>
-                        <a:t>Limitante para identificar la base de datos de CRM</a:t>
-                      </a:r>
-                      <a:endParaRPr lang="en-US" sz="780" dirty="0">
-                        <a:latin typeface="Calibri" charset="0"/>
-                        <a:ea typeface="Calibri" charset="0"/>
-                        <a:cs typeface="Calibri" charset="0"/>
-                      </a:endParaRPr>
-                    </a:p>
-                  </a:txBody>
-                  <a:tcPr marL="54864" marR="54864" marT="18288" marB="18288" anchor="ctr">
+                        <a:rPr lang="en-US" sz="760" b="1" dirty="0">
+                          <a:solidFill>
+                            <a:schemeClr val="tx1"/>
+                          </a:solidFill>
+                          <a:latin typeface="Calibri" pitchFamily="34" charset="0"/>
+                          <a:ea typeface="Calibri" pitchFamily="34" charset="-122"/>
+                          <a:cs typeface="Calibri" pitchFamily="34" charset="-120"/>
+                        </a:rPr>
+                        <a:t>B.13  Limitante para identificar la base de datos de CRM</a:t>
+                      </a:r>
+                      <a:endParaRPr lang="en-US" sz="760" dirty="0">
+                        <a:latin typeface="Calibri" charset="0"/>
+                        <a:ea typeface="Calibri" charset="0"/>
+                        <a:cs typeface="Calibri" charset="0"/>
+                      </a:endParaRPr>
+                    </a:p>
+                  </a:txBody>
+                  <a:tcPr marL="54864" marR="54864" marT="13716" marB="13716" anchor="ctr">
                     <a:lnL w="0" cap="flat" cmpd="sng" algn="ctr">
                       <a:noFill/>
                     </a:lnL>
@@ -3738,24 +3856,24 @@
                         <a:buNone/>
                       </a:pPr>
                       <a:r>
-                        <a:rPr lang="en-US" sz="780" dirty="0">
-                          <a:solidFill>
-                            <a:schemeClr val="tx1"/>
-                          </a:solidFill>
-                          <a:latin typeface="Calibri" pitchFamily="34" charset="0"/>
-                          <a:ea typeface="Calibri" pitchFamily="34" charset="-122"/>
-                          <a:cs typeface="Calibri" pitchFamily="34" charset="-120"/>
-                        </a:rPr>
-                        <a:t>Comentario CA: 14/10/2026 Compromiso</a:t>
-                      </a:r>
-                      <a:endParaRPr lang="en-US" sz="780" dirty="0">
-                        <a:latin typeface="Calibri" charset="0"/>
-                        <a:ea typeface="Calibri" charset="0"/>
-                        <a:cs typeface="Calibri" charset="0"/>
-                      </a:endParaRPr>
-                    </a:p>
-                  </a:txBody>
-                  <a:tcPr marL="54864" marR="54864" marT="18288" marB="18288" anchor="ctr">
+                        <a:rPr lang="en-US" sz="760" dirty="0">
+                          <a:solidFill>
+                            <a:schemeClr val="tx1"/>
+                          </a:solidFill>
+                          <a:latin typeface="Calibri" pitchFamily="34" charset="0"/>
+                          <a:ea typeface="Calibri" pitchFamily="34" charset="-122"/>
+                          <a:cs typeface="Calibri" pitchFamily="34" charset="-120"/>
+                        </a:rPr>
+                        <a:t>Pendiente</a:t>
+                      </a:r>
+                      <a:endParaRPr lang="en-US" sz="760" dirty="0">
+                        <a:latin typeface="Calibri" charset="0"/>
+                        <a:ea typeface="Calibri" charset="0"/>
+                        <a:cs typeface="Calibri" charset="0"/>
+                      </a:endParaRPr>
+                    </a:p>
+                  </a:txBody>
+                  <a:tcPr marL="54864" marR="54864" marT="13716" marB="13716" anchor="ctr">
                     <a:lnL w="0" cap="flat" cmpd="sng" algn="ctr">
                       <a:noFill/>
                     </a:lnL>
@@ -3785,7 +3903,7 @@
                         <a:buNone/>
                       </a:pPr>
                       <a:r>
-                        <a:rPr lang="en-US" sz="780" b="1" dirty="0">
+                        <a:rPr lang="en-US" sz="760" b="1" dirty="0">
                           <a:solidFill>
                             <a:schemeClr val="accent1"/>
                           </a:solidFill>
@@ -3795,7 +3913,7 @@
                         </a:rPr>
                         <a:t>Gerencia de Cumplimiento</a:t>
                       </a:r>
-                      <a:endParaRPr lang="en-US" sz="780" dirty="0">
+                      <a:endParaRPr lang="en-US" sz="760" dirty="0">
                         <a:latin typeface="Calibri" charset="0"/>
                         <a:ea typeface="Calibri" charset="0"/>
                         <a:cs typeface="Calibri" charset="0"/>
@@ -3806,7 +3924,7 @@
                         <a:buNone/>
                       </a:pPr>
                       <a:r>
-                        <a:rPr lang="en-US" sz="780" b="1" dirty="0">
+                        <a:rPr lang="en-US" sz="760" b="1" dirty="0">
                           <a:solidFill>
                             <a:schemeClr val="accent1"/>
                           </a:solidFill>
@@ -3816,14 +3934,14 @@
                         </a:rPr>
                         <a:t>/ Seguridad de la información</a:t>
                       </a:r>
-                      <a:endParaRPr lang="en-US" sz="780" dirty="0">
-                        <a:latin typeface="Calibri" charset="0"/>
-                        <a:ea typeface="Calibri" charset="0"/>
-                        <a:cs typeface="Calibri" charset="0"/>
-                      </a:endParaRPr>
-                    </a:p>
-                  </a:txBody>
-                  <a:tcPr marL="54864" marR="54864" marT="18288" marB="18288" anchor="ctr">
+                      <a:endParaRPr lang="en-US" sz="760" dirty="0">
+                        <a:latin typeface="Calibri" charset="0"/>
+                        <a:ea typeface="Calibri" charset="0"/>
+                        <a:cs typeface="Calibri" charset="0"/>
+                      </a:endParaRPr>
+                    </a:p>
+                  </a:txBody>
+                  <a:tcPr marL="54864" marR="54864" marT="13716" marB="13716" anchor="ctr">
                     <a:lnL w="0" cap="flat" cmpd="sng" algn="ctr">
                       <a:noFill/>
                     </a:lnL>
@@ -3855,24 +3973,24 @@
                         <a:buNone/>
                       </a:pPr>
                       <a:r>
-                        <a:rPr lang="en-US" sz="780" b="1" dirty="0">
-                          <a:solidFill>
-                            <a:schemeClr val="tx1"/>
-                          </a:solidFill>
-                          <a:latin typeface="Calibri" pitchFamily="34" charset="0"/>
-                          <a:ea typeface="Calibri" pitchFamily="34" charset="-122"/>
-                          <a:cs typeface="Calibri" pitchFamily="34" charset="-120"/>
-                        </a:rPr>
-                        <a:t>Falta de documentación que dé cumplimiento a lo requerido por el artículo 22 de la NRP-23 correspondiente a la adquisición del sistema CRM.</a:t>
-                      </a:r>
-                      <a:endParaRPr lang="en-US" sz="780" dirty="0">
-                        <a:latin typeface="Calibri" charset="0"/>
-                        <a:ea typeface="Calibri" charset="0"/>
-                        <a:cs typeface="Calibri" charset="0"/>
-                      </a:endParaRPr>
-                    </a:p>
-                  </a:txBody>
-                  <a:tcPr marL="54864" marR="54864" marT="18288" marB="18288" anchor="ctr">
+                        <a:rPr lang="en-US" sz="760" b="1" dirty="0">
+                          <a:solidFill>
+                            <a:schemeClr val="tx1"/>
+                          </a:solidFill>
+                          <a:latin typeface="Calibri" pitchFamily="34" charset="0"/>
+                          <a:ea typeface="Calibri" pitchFamily="34" charset="-122"/>
+                          <a:cs typeface="Calibri" pitchFamily="34" charset="-120"/>
+                        </a:rPr>
+                        <a:t>B.14  Falta de documentación que dé cumplimiento a lo requerido por el artículo 22 de la NRP-23 correspondiente a la adquisición del sistema CRM.</a:t>
+                      </a:r>
+                      <a:endParaRPr lang="en-US" sz="760" dirty="0">
+                        <a:latin typeface="Calibri" charset="0"/>
+                        <a:ea typeface="Calibri" charset="0"/>
+                        <a:cs typeface="Calibri" charset="0"/>
+                      </a:endParaRPr>
+                    </a:p>
+                  </a:txBody>
+                  <a:tcPr marL="54864" marR="54864" marT="13716" marB="13716" anchor="ctr">
                     <a:lnL w="0" cap="flat" cmpd="sng" algn="ctr">
                       <a:noFill/>
                     </a:lnL>
@@ -3905,7 +4023,7 @@
                         <a:buNone/>
                       </a:pPr>
                       <a:r>
-                        <a:rPr lang="en-US" sz="780" dirty="0">
+                        <a:rPr lang="en-US" sz="760" dirty="0">
                           <a:solidFill>
                             <a:schemeClr val="tx1"/>
                           </a:solidFill>
@@ -3915,35 +4033,35 @@
                         </a:rPr>
                         <a:t>Descargo</a:t>
                       </a:r>
-                      <a:endParaRPr lang="en-US" sz="780" dirty="0">
-                        <a:latin typeface="Calibri" charset="0"/>
-                        <a:ea typeface="Calibri" charset="0"/>
-                        <a:cs typeface="Calibri" charset="0"/>
-                      </a:endParaRPr>
-                    </a:p>
-                    <a:p>
-                      <a:pPr algn="just" indent="0" marL="0">
-                        <a:buNone/>
-                      </a:pPr>
-                      <a:r>
-                        <a:rPr lang="en-US" sz="780" dirty="0">
-                          <a:solidFill>
-                            <a:schemeClr val="tx1"/>
-                          </a:solidFill>
-                          <a:latin typeface="Calibri" pitchFamily="34" charset="0"/>
-                          <a:ea typeface="Calibri" pitchFamily="34" charset="-122"/>
-                          <a:cs typeface="Calibri" pitchFamily="34" charset="-120"/>
-                        </a:rPr>
-                        <a:t>Comentario CA: 14/10/2026 Compromiso</a:t>
-                      </a:r>
-                      <a:endParaRPr lang="en-US" sz="780" dirty="0">
-                        <a:latin typeface="Calibri" charset="0"/>
-                        <a:ea typeface="Calibri" charset="0"/>
-                        <a:cs typeface="Calibri" charset="0"/>
-                      </a:endParaRPr>
-                    </a:p>
-                  </a:txBody>
-                  <a:tcPr marL="54864" marR="54864" marT="18288" marB="18288" anchor="ctr">
+                      <a:endParaRPr lang="en-US" sz="760" dirty="0">
+                        <a:latin typeface="Calibri" charset="0"/>
+                        <a:ea typeface="Calibri" charset="0"/>
+                        <a:cs typeface="Calibri" charset="0"/>
+                      </a:endParaRPr>
+                    </a:p>
+                    <a:p>
+                      <a:pPr algn="just" indent="0" marL="0">
+                        <a:buNone/>
+                      </a:pPr>
+                      <a:r>
+                        <a:rPr lang="en-US" sz="760" dirty="0">
+                          <a:solidFill>
+                            <a:schemeClr val="tx1"/>
+                          </a:solidFill>
+                          <a:latin typeface="Calibri" pitchFamily="34" charset="0"/>
+                          <a:ea typeface="Calibri" pitchFamily="34" charset="-122"/>
+                          <a:cs typeface="Calibri" pitchFamily="34" charset="-120"/>
+                        </a:rPr>
+                        <a:t>Pendiente</a:t>
+                      </a:r>
+                      <a:endParaRPr lang="en-US" sz="760" dirty="0">
+                        <a:latin typeface="Calibri" charset="0"/>
+                        <a:ea typeface="Calibri" charset="0"/>
+                        <a:cs typeface="Calibri" charset="0"/>
+                      </a:endParaRPr>
+                    </a:p>
+                  </a:txBody>
+                  <a:tcPr marL="54864" marR="54864" marT="13716" marB="13716" anchor="ctr">
                     <a:lnL w="0" cap="flat" cmpd="sng" algn="ctr">
                       <a:noFill/>
                     </a:lnL>
@@ -3973,7 +4091,7 @@
                         <a:buNone/>
                       </a:pPr>
                       <a:r>
-                        <a:rPr lang="en-US" sz="780" b="1" dirty="0">
+                        <a:rPr lang="en-US" sz="760" b="1" dirty="0">
                           <a:solidFill>
                             <a:schemeClr val="accent1"/>
                           </a:solidFill>
@@ -3983,7 +4101,7 @@
                         </a:rPr>
                         <a:t>Gerencia de Cumplimiento</a:t>
                       </a:r>
-                      <a:endParaRPr lang="en-US" sz="780" dirty="0">
+                      <a:endParaRPr lang="en-US" sz="760" dirty="0">
                         <a:latin typeface="Calibri" charset="0"/>
                         <a:ea typeface="Calibri" charset="0"/>
                         <a:cs typeface="Calibri" charset="0"/>
@@ -3994,7 +4112,7 @@
                         <a:buNone/>
                       </a:pPr>
                       <a:r>
-                        <a:rPr lang="en-US" sz="780" b="1" dirty="0">
+                        <a:rPr lang="en-US" sz="760" b="1" dirty="0">
                           <a:solidFill>
                             <a:schemeClr val="accent1"/>
                           </a:solidFill>
@@ -4004,14 +4122,14 @@
                         </a:rPr>
                         <a:t>/Seguridad de la Información</a:t>
                       </a:r>
-                      <a:endParaRPr lang="en-US" sz="780" dirty="0">
-                        <a:latin typeface="Calibri" charset="0"/>
-                        <a:ea typeface="Calibri" charset="0"/>
-                        <a:cs typeface="Calibri" charset="0"/>
-                      </a:endParaRPr>
-                    </a:p>
-                  </a:txBody>
-                  <a:tcPr marL="54864" marR="54864" marT="18288" marB="18288" anchor="ctr">
+                      <a:endParaRPr lang="en-US" sz="760" dirty="0">
+                        <a:latin typeface="Calibri" charset="0"/>
+                        <a:ea typeface="Calibri" charset="0"/>
+                        <a:cs typeface="Calibri" charset="0"/>
+                      </a:endParaRPr>
+                    </a:p>
+                  </a:txBody>
+                  <a:tcPr marL="54864" marR="54864" marT="13716" marB="13716" anchor="ctr">
                     <a:lnL w="0" cap="flat" cmpd="sng" algn="ctr">
                       <a:noFill/>
                     </a:lnL>
@@ -4043,24 +4161,24 @@
                         <a:buNone/>
                       </a:pPr>
                       <a:r>
-                        <a:rPr lang="en-US" sz="780" b="1" dirty="0">
-                          <a:solidFill>
-                            <a:schemeClr val="tx1"/>
-                          </a:solidFill>
-                          <a:latin typeface="Calibri" pitchFamily="34" charset="0"/>
-                          <a:ea typeface="Calibri" pitchFamily="34" charset="-122"/>
-                          <a:cs typeface="Calibri" pitchFamily="34" charset="-120"/>
-                        </a:rPr>
-                        <a:t>Servicios tercerizados</a:t>
-                      </a:r>
-                      <a:endParaRPr lang="en-US" sz="780" dirty="0">
-                        <a:latin typeface="Calibri" charset="0"/>
-                        <a:ea typeface="Calibri" charset="0"/>
-                        <a:cs typeface="Calibri" charset="0"/>
-                      </a:endParaRPr>
-                    </a:p>
-                  </a:txBody>
-                  <a:tcPr marL="54864" marR="54864" marT="18288" marB="18288" anchor="ctr">
+                        <a:rPr lang="en-US" sz="760" b="1" dirty="0">
+                          <a:solidFill>
+                            <a:schemeClr val="tx1"/>
+                          </a:solidFill>
+                          <a:latin typeface="Calibri" pitchFamily="34" charset="0"/>
+                          <a:ea typeface="Calibri" pitchFamily="34" charset="-122"/>
+                          <a:cs typeface="Calibri" pitchFamily="34" charset="-120"/>
+                        </a:rPr>
+                        <a:t>B.15  Servicios tercerizados</a:t>
+                      </a:r>
+                      <a:endParaRPr lang="en-US" sz="760" dirty="0">
+                        <a:latin typeface="Calibri" charset="0"/>
+                        <a:ea typeface="Calibri" charset="0"/>
+                        <a:cs typeface="Calibri" charset="0"/>
+                      </a:endParaRPr>
+                    </a:p>
+                  </a:txBody>
+                  <a:tcPr marL="54864" marR="54864" marT="13716" marB="13716" anchor="ctr">
                     <a:lnL w="0" cap="flat" cmpd="sng" algn="ctr">
                       <a:noFill/>
                     </a:lnL>
@@ -4093,7 +4211,7 @@
                         <a:buNone/>
                       </a:pPr>
                       <a:r>
-                        <a:rPr lang="en-US" sz="780" dirty="0">
+                        <a:rPr lang="en-US" sz="760" dirty="0">
                           <a:solidFill>
                             <a:schemeClr val="tx1"/>
                           </a:solidFill>
@@ -4103,39 +4221,39 @@
                         </a:rPr>
                         <a:t>Plan de acción:</a:t>
                       </a:r>
-                      <a:endParaRPr lang="en-US" sz="780" dirty="0">
-                        <a:latin typeface="Calibri" charset="0"/>
-                        <a:ea typeface="Calibri" charset="0"/>
-                        <a:cs typeface="Calibri" charset="0"/>
-                      </a:endParaRPr>
-                    </a:p>
-                    <a:p>
-                      <a:pPr algn="just" indent="0" marL="0">
-                        <a:buNone/>
-                      </a:pPr>
-                      <a:r>
-                        <a:rPr lang="en-US" sz="780" dirty="0">
-                          <a:solidFill>
-                            <a:schemeClr val="tx1"/>
-                          </a:solidFill>
-                          <a:latin typeface="Calibri" pitchFamily="34" charset="0"/>
-                          <a:ea typeface="Calibri" pitchFamily="34" charset="-122"/>
-                          <a:cs typeface="Calibri" pitchFamily="34" charset="-120"/>
-                        </a:rPr>
-                        <a:t>Comentario CA: 14/10/2026 Compromiso</a:t>
-                      </a:r>
-                      <a:endParaRPr lang="en-US" sz="780" dirty="0">
-                        <a:latin typeface="Calibri" charset="0"/>
-                        <a:ea typeface="Calibri" charset="0"/>
-                        <a:cs typeface="Calibri" charset="0"/>
-                      </a:endParaRPr>
-                    </a:p>
-                    <a:p>
-                      <a:pPr algn="just" indent="0" marL="0">
-                        <a:buNone/>
-                      </a:pPr>
-                      <a:r>
-                        <a:rPr lang="en-US" sz="780" dirty="0">
+                      <a:endParaRPr lang="en-US" sz="760" dirty="0">
+                        <a:latin typeface="Calibri" charset="0"/>
+                        <a:ea typeface="Calibri" charset="0"/>
+                        <a:cs typeface="Calibri" charset="0"/>
+                      </a:endParaRPr>
+                    </a:p>
+                    <a:p>
+                      <a:pPr algn="just" indent="0" marL="0">
+                        <a:buNone/>
+                      </a:pPr>
+                      <a:r>
+                        <a:rPr lang="en-US" sz="760" dirty="0">
+                          <a:solidFill>
+                            <a:schemeClr val="tx1"/>
+                          </a:solidFill>
+                          <a:latin typeface="Calibri" pitchFamily="34" charset="0"/>
+                          <a:ea typeface="Calibri" pitchFamily="34" charset="-122"/>
+                          <a:cs typeface="Calibri" pitchFamily="34" charset="-120"/>
+                        </a:rPr>
+                        <a:t>Pendiente</a:t>
+                      </a:r>
+                      <a:endParaRPr lang="en-US" sz="760" dirty="0">
+                        <a:latin typeface="Calibri" charset="0"/>
+                        <a:ea typeface="Calibri" charset="0"/>
+                        <a:cs typeface="Calibri" charset="0"/>
+                      </a:endParaRPr>
+                    </a:p>
+                    <a:p>
+                      <a:pPr algn="just" indent="0" marL="0">
+                        <a:buNone/>
+                      </a:pPr>
+                      <a:r>
+                        <a:rPr lang="en-US" sz="760" dirty="0">
                           <a:solidFill>
                             <a:schemeClr val="tx1"/>
                           </a:solidFill>
@@ -4145,18 +4263,18 @@
                         </a:rPr>
                         <a:t>Comentario Licda. Bonilla: Como parte del fortalecimiento de los controles de seguridad asociados al servicio tercerizado del módulo ACRM, la Unidad de Seguridad de la Información y Ciberseguridad realizará una reevaluación de los riesgos de seguridad de la información y ciberseguridad, mediante la actualización de la matriz de riesgos y la revisión de los controles existentes, con el propósito de identificar oportunidades de mejora y definir las medidas adicionales de tratamiento que correspondan, en coordinación con el área responsable de la solución el proveedor.</a:t>
                       </a:r>
-                      <a:endParaRPr lang="en-US" sz="780" dirty="0">
-                        <a:latin typeface="Calibri" charset="0"/>
-                        <a:ea typeface="Calibri" charset="0"/>
-                        <a:cs typeface="Calibri" charset="0"/>
-                      </a:endParaRPr>
-                    </a:p>
-                    <a:p>
-                      <a:pPr algn="just" indent="0" marL="0">
-                        <a:buNone/>
-                      </a:pPr>
-                      <a:r>
-                        <a:rPr lang="en-US" sz="780" dirty="0">
+                      <a:endParaRPr lang="en-US" sz="760" dirty="0">
+                        <a:latin typeface="Calibri" charset="0"/>
+                        <a:ea typeface="Calibri" charset="0"/>
+                        <a:cs typeface="Calibri" charset="0"/>
+                      </a:endParaRPr>
+                    </a:p>
+                    <a:p>
+                      <a:pPr algn="just" indent="0" marL="0">
+                        <a:buNone/>
+                      </a:pPr>
+                      <a:r>
+                        <a:rPr lang="en-US" sz="760" dirty="0">
                           <a:solidFill>
                             <a:schemeClr val="tx1"/>
                           </a:solidFill>
@@ -4166,14 +4284,14 @@
                         </a:rPr>
                         <a:t>Fecha de cumplimiento: 30 de noviembre de 2026.</a:t>
                       </a:r>
-                      <a:endParaRPr lang="en-US" sz="780" dirty="0">
-                        <a:latin typeface="Calibri" charset="0"/>
-                        <a:ea typeface="Calibri" charset="0"/>
-                        <a:cs typeface="Calibri" charset="0"/>
-                      </a:endParaRPr>
-                    </a:p>
-                  </a:txBody>
-                  <a:tcPr marL="54864" marR="54864" marT="18288" marB="18288" anchor="ctr">
+                      <a:endParaRPr lang="en-US" sz="760" dirty="0">
+                        <a:latin typeface="Calibri" charset="0"/>
+                        <a:ea typeface="Calibri" charset="0"/>
+                        <a:cs typeface="Calibri" charset="0"/>
+                      </a:endParaRPr>
+                    </a:p>
+                  </a:txBody>
+                  <a:tcPr marL="54864" marR="54864" marT="13716" marB="13716" anchor="ctr">
                     <a:lnL w="0" cap="flat" cmpd="sng" algn="ctr">
                       <a:noFill/>
                     </a:lnL>
@@ -4203,7 +4321,7 @@
                         <a:buNone/>
                       </a:pPr>
                       <a:r>
-                        <a:rPr lang="en-US" sz="780" b="1" dirty="0">
+                        <a:rPr lang="en-US" sz="760" b="1" dirty="0">
                           <a:solidFill>
                             <a:schemeClr val="accent1"/>
                           </a:solidFill>
@@ -4213,7 +4331,7 @@
                         </a:rPr>
                         <a:t>Gerencia de Cumplimiento</a:t>
                       </a:r>
-                      <a:endParaRPr lang="en-US" sz="780" dirty="0">
+                      <a:endParaRPr lang="en-US" sz="760" dirty="0">
                         <a:latin typeface="Calibri" charset="0"/>
                         <a:ea typeface="Calibri" charset="0"/>
                         <a:cs typeface="Calibri" charset="0"/>
@@ -4224,7 +4342,7 @@
                         <a:buNone/>
                       </a:pPr>
                       <a:r>
-                        <a:rPr lang="en-US" sz="780" b="1" dirty="0">
+                        <a:rPr lang="en-US" sz="760" b="1" dirty="0">
                           <a:solidFill>
                             <a:schemeClr val="accent1"/>
                           </a:solidFill>
@@ -4234,14 +4352,14 @@
                         </a:rPr>
                         <a:t>/ Seguridad de la Información</a:t>
                       </a:r>
-                      <a:endParaRPr lang="en-US" sz="780" dirty="0">
-                        <a:latin typeface="Calibri" charset="0"/>
-                        <a:ea typeface="Calibri" charset="0"/>
-                        <a:cs typeface="Calibri" charset="0"/>
-                      </a:endParaRPr>
-                    </a:p>
-                  </a:txBody>
-                  <a:tcPr marL="54864" marR="54864" marT="18288" marB="18288" anchor="ctr">
+                      <a:endParaRPr lang="en-US" sz="760" dirty="0">
+                        <a:latin typeface="Calibri" charset="0"/>
+                        <a:ea typeface="Calibri" charset="0"/>
+                        <a:cs typeface="Calibri" charset="0"/>
+                      </a:endParaRPr>
+                    </a:p>
+                  </a:txBody>
+                  <a:tcPr marL="54864" marR="54864" marT="13716" marB="13716" anchor="ctr">
                     <a:lnL w="0" cap="flat" cmpd="sng" algn="ctr">
                       <a:noFill/>
                     </a:lnL>
@@ -4327,7 +4445,7 @@
                 <a:ea typeface="Cambria" pitchFamily="34" charset="-122"/>
                 <a:cs typeface="Cambria" pitchFamily="34" charset="-120"/>
               </a:rPr>
-              <a:t>Matriz de requerimientos DS-SABAO-BCS-BC-23486</a:t>
+              <a:t>Matriz de requerimientos DS-SABAO-BCS-BC-23486 · Gestión de Riesgo Específico</a:t>
             </a:r>
             <a:endParaRPr lang="en-US" sz="2000" dirty="0"/>
           </a:p>
@@ -4478,28 +4596,7 @@
                           <a:ea typeface="Calibri" pitchFamily="34" charset="-122"/>
                           <a:cs typeface="Calibri" pitchFamily="34" charset="-120"/>
                         </a:rPr>
-                        <a:t>Funcionario</a:t>
-                      </a:r>
-                      <a:endParaRPr lang="en-US" sz="900" dirty="0">
-                        <a:latin typeface="Calibri" charset="0"/>
-                        <a:ea typeface="Calibri" charset="0"/>
-                        <a:cs typeface="Calibri" charset="0"/>
-                      </a:endParaRPr>
-                    </a:p>
-                    <a:p>
-                      <a:pPr algn="just" indent="0" marL="0">
-                        <a:buNone/>
-                      </a:pPr>
-                      <a:r>
-                        <a:rPr lang="en-US" sz="900" b="1" dirty="0">
-                          <a:solidFill>
-                            <a:schemeClr val="bg1"/>
-                          </a:solidFill>
-                          <a:latin typeface="Calibri" pitchFamily="34" charset="0"/>
-                          <a:ea typeface="Calibri" pitchFamily="34" charset="-122"/>
-                          <a:cs typeface="Calibri" pitchFamily="34" charset="-120"/>
-                        </a:rPr>
-                        <a:t>Responsable</a:t>
+                        <a:t>Funcionario Responsable</a:t>
                       </a:r>
                       <a:endParaRPr lang="en-US" sz="900" dirty="0">
                         <a:latin typeface="Calibri" charset="0"/>

--- a/supervision-gobierno-corporativo/Matriz_Requerimientos_DS-SABAO-BCS-BC-23486.pptx
+++ b/supervision-gobierno-corporativo/Matriz_Requerimientos_DS-SABAO-BCS-BC-23486.pptx
@@ -7,9 +7,10 @@
   <p:sldIdLst>
     <p:sldId id="256" r:id="rId2"/>
     <p:sldId id="257" r:id="rId3"/>
+    <p:sldId id="258" r:id="rId4"/>
   </p:sldIdLst>
   <p:notesMasterIdLst>
-    <p:notesMasterId r:id="rId4"/>
+    <p:notesMasterId r:id="rId5"/>
   </p:notesMasterIdLst>
   <p:sldSz cx="12192000" cy="6858000"/>
   <p:notesSz cx="6858000" cy="12192000"/>
@@ -503,7 +504,7 @@
           <a:p>
             <a:r>
               <a:rPr lang="en-US" dirty="0"/>
-              <a:t>Matriz de requerimientos DS-SABAO-BCS-BC-23486 (versión corta). Secciones A y B. 'Comentario CA: 14/10/2026 Compromiso' se muestra como 'Pendiente'.</a:t>
+              <a:t>Versión para proyectar. El texto completo de las secciones A y B está en la diapositiva oculta del anexo, al final del archivo.</a:t>
             </a:r>
             <a:endParaRPr lang="en-US" dirty="0"/>
           </a:p>
@@ -615,6 +616,94 @@
             <a:fld id="{F7021451-1387-4CA6-816F-3879F97B5CBC}" type="slidenum">
               <a:rPr lang="en-US"/>
               <a:t>2</a:t>
+            </a:fld>
+            <a:endParaRPr lang="en-US"/>
+          </a:p>
+        </p:txBody>
+      </p:sp>
+    </p:spTree>
+    <p:extLst>
+      <p:ext uri="{BB962C8B-B14F-4D97-AF65-F5344CB8AC3E}">
+        <p14:creationId xmlns:p14="http://schemas.microsoft.com/office/powerpoint/2010/main" val="1024086991"/>
+      </p:ext>
+    </p:extLst>
+  </p:cSld>
+  <p:clrMapOvr>
+    <a:masterClrMapping/>
+  </p:clrMapOvr>
+</p:notes>
+</file>
+
+<file path=ppt/notesSlides/notesSlide3.xml><?xml version="1.0" encoding="utf-8"?>
+<p:notes xmlns:a="http://schemas.openxmlformats.org/drawingml/2006/main" xmlns:r="http://schemas.openxmlformats.org/officeDocument/2006/relationships" xmlns:p="http://schemas.openxmlformats.org/presentationml/2006/main">
+  <p:cSld>
+    <p:spTree>
+      <p:nvGrpSpPr>
+        <p:cNvPr id="1" name=""/>
+        <p:cNvGrpSpPr/>
+        <p:nvPr/>
+      </p:nvGrpSpPr>
+      <p:grpSpPr>
+        <a:xfrm>
+          <a:off x="0" y="0"/>
+          <a:ext cx="0" cy="0"/>
+          <a:chOff x="0" y="0"/>
+          <a:chExt cx="0" cy="0"/>
+        </a:xfrm>
+      </p:grpSpPr>
+      <p:sp>
+        <p:nvSpPr>
+          <p:cNvPr id="2" name="Slide Image Placeholder 1"/>
+          <p:cNvSpPr>
+            <a:spLocks noGrp="1" noRot="1" noChangeAspect="1"/>
+          </p:cNvSpPr>
+          <p:nvPr>
+            <p:ph type="sldImg"/>
+          </p:nvPr>
+        </p:nvSpPr>
+        <p:spPr/>
+      </p:sp>
+      <p:sp>
+        <p:nvSpPr>
+          <p:cNvPr id="3" name="Notes Placeholder 2"/>
+          <p:cNvSpPr>
+            <a:spLocks noGrp="1"/>
+          </p:cNvSpPr>
+          <p:nvPr>
+            <p:ph type="body" idx="1"/>
+          </p:nvPr>
+        </p:nvSpPr>
+        <p:spPr/>
+        <p:txBody>
+          <a:bodyPr/>
+          <a:lstStyle/>
+          <a:p>
+            <a:r>
+              <a:rPr lang="en-US" dirty="0"/>
+              <a:t>Matriz de requerimientos DS-SABAO-BCS-BC-23486 (versión corta). Secciones A y B. 'Comentario CA: 14/10/2026 Compromiso' se muestra como 'Pendiente'.</a:t>
+            </a:r>
+            <a:endParaRPr lang="en-US" dirty="0"/>
+          </a:p>
+        </p:txBody>
+      </p:sp>
+      <p:sp>
+        <p:nvSpPr>
+          <p:cNvPr id="4" name="Slide Number Placeholder 3"/>
+          <p:cNvSpPr>
+            <a:spLocks noGrp="1"/>
+          </p:cNvSpPr>
+          <p:nvPr>
+            <p:ph type="sldNum" sz="quarter" idx="10"/>
+          </p:nvPr>
+        </p:nvSpPr>
+        <p:spPr/>
+        <p:txBody>
+          <a:bodyPr/>
+          <a:lstStyle/>
+          <a:p>
+            <a:fld id="{F7021451-1387-4CA6-816F-3879F97B5CBC}" type="slidenum">
+              <a:rPr lang="en-US"/>
+              <a:t>3</a:t>
             </a:fld>
             <a:endParaRPr lang="en-US"/>
           </a:p>
@@ -1108,45 +1197,9 @@
           </a:p>
         </p:txBody>
       </p:sp>
-      <p:sp>
-        <p:nvSpPr>
-          <p:cNvPr id="3" name="Sección A"/>
-          <p:cNvSpPr txBox="1"/>
-          <p:nvPr/>
-        </p:nvSpPr>
-        <p:spPr>
-          <a:xfrm>
-            <a:off x="411480" y="694944"/>
-            <a:ext cx="11368735" cy="237744"/>
-          </a:xfrm>
-          <a:prstGeom prst="rect">
-            <a:avLst/>
-          </a:prstGeom>
-          <a:noFill/>
-          <a:ln/>
-        </p:spPr>
-        <p:txBody>
-          <a:bodyPr wrap="square" lIns="0" tIns="0" rIns="0" bIns="0" rtlCol="0" anchor="ctr"/>
-          <a:lstStyle/>
-          <a:p>
-            <a:pPr indent="0" marL="0">
-              <a:buNone/>
-            </a:pPr>
-            <a:r>
-              <a:rPr lang="en-US" sz="1100" b="1" dirty="0">
-                <a:solidFill>
-                  <a:schemeClr val="accent1"/>
-                </a:solidFill>
-              </a:rPr>
-              <a:t>A. Gestión de Riesgo de LDA/FT/FPADM</a:t>
-            </a:r>
-            <a:endParaRPr lang="en-US" sz="1100" dirty="0"/>
-          </a:p>
-        </p:txBody>
-      </p:sp>
       <p:graphicFrame>
         <p:nvGraphicFramePr>
-          <p:cNvPr id="2" name="Tabla sección A"/>
+          <p:cNvPr id="2" name="Tabla A y B"/>
           <p:cNvGraphicFramePr>
             <a:graphicFrameLocks noGrp="1"/>
           </p:cNvGraphicFramePr>
@@ -1159,7 +1212,7 @@
           </p:nvPr>
         </p:nvGraphicFramePr>
         <p:xfrm>
-          <a:off x="411480" y="969264"/>
+          <a:off x="411480" y="749808"/>
           <a:ext cx="11368735" cy="914400"/>
         </p:xfrm>
         <a:graphic>
@@ -1167,9 +1220,9 @@
             <a:tbl>
               <a:tblPr/>
               <a:tblGrid>
-                <a:gridCol w="3977640"/>
-                <a:gridCol w="5788152"/>
-                <a:gridCol w="1600200"/>
+                <a:gridCol w="5669280"/>
+                <a:gridCol w="3383280"/>
+                <a:gridCol w="2313432"/>
               </a:tblGrid>
               <a:tr h="0">
                 <a:tc>
@@ -1177,11 +1230,11 @@
                     <a:bodyPr/>
                     <a:lstStyle/>
                     <a:p>
-                      <a:pPr algn="just" indent="0" marL="0">
-                        <a:buNone/>
-                      </a:pPr>
-                      <a:r>
-                        <a:rPr lang="en-US" sz="900" b="1" dirty="0">
+                      <a:pPr indent="0" marL="0">
+                        <a:buNone/>
+                      </a:pPr>
+                      <a:r>
+                        <a:rPr lang="en-US" sz="1100" b="1" dirty="0">
                           <a:solidFill>
                             <a:schemeClr val="bg1"/>
                           </a:solidFill>
@@ -1191,14 +1244,14 @@
                         </a:rPr>
                         <a:t>Observación</a:t>
                       </a:r>
-                      <a:endParaRPr lang="en-US" sz="900" dirty="0">
-                        <a:latin typeface="Calibri" charset="0"/>
-                        <a:ea typeface="Calibri" charset="0"/>
-                        <a:cs typeface="Calibri" charset="0"/>
-                      </a:endParaRPr>
-                    </a:p>
-                  </a:txBody>
-                  <a:tcPr marL="54864" marR="54864" marT="13716" marB="13716" anchor="ctr">
+                      <a:endParaRPr lang="en-US" sz="1100" dirty="0">
+                        <a:latin typeface="Calibri" charset="0"/>
+                        <a:ea typeface="Calibri" charset="0"/>
+                        <a:cs typeface="Calibri" charset="0"/>
+                      </a:endParaRPr>
+                    </a:p>
+                  </a:txBody>
+                  <a:tcPr marL="54864" marR="54864" marT="18288" marB="18288" anchor="ctr">
                     <a:lnL w="0" cap="flat" cmpd="sng" algn="ctr">
                       <a:noFill/>
                     </a:lnL>
@@ -1227,11 +1280,11 @@
                     <a:bodyPr/>
                     <a:lstStyle/>
                     <a:p>
-                      <a:pPr algn="just" indent="0" marL="0">
-                        <a:buNone/>
-                      </a:pPr>
-                      <a:r>
-                        <a:rPr lang="en-US" sz="900" b="1" dirty="0">
+                      <a:pPr indent="0" marL="0">
+                        <a:buNone/>
+                      </a:pPr>
+                      <a:r>
+                        <a:rPr lang="en-US" sz="1100" b="1" dirty="0">
                           <a:solidFill>
                             <a:schemeClr val="bg1"/>
                           </a:solidFill>
@@ -1241,14 +1294,14 @@
                         </a:rPr>
                         <a:t>Comentarios</a:t>
                       </a:r>
-                      <a:endParaRPr lang="en-US" sz="900" dirty="0">
-                        <a:latin typeface="Calibri" charset="0"/>
-                        <a:ea typeface="Calibri" charset="0"/>
-                        <a:cs typeface="Calibri" charset="0"/>
-                      </a:endParaRPr>
-                    </a:p>
-                  </a:txBody>
-                  <a:tcPr marL="54864" marR="54864" marT="13716" marB="13716" anchor="ctr">
+                      <a:endParaRPr lang="en-US" sz="1100" dirty="0">
+                        <a:latin typeface="Calibri" charset="0"/>
+                        <a:ea typeface="Calibri" charset="0"/>
+                        <a:cs typeface="Calibri" charset="0"/>
+                      </a:endParaRPr>
+                    </a:p>
+                  </a:txBody>
+                  <a:tcPr marL="54864" marR="54864" marT="18288" marB="18288" anchor="ctr">
                     <a:lnL w="0" cap="flat" cmpd="sng" algn="ctr">
                       <a:noFill/>
                     </a:lnL>
@@ -1277,11 +1330,11 @@
                     <a:bodyPr/>
                     <a:lstStyle/>
                     <a:p>
-                      <a:pPr algn="just" indent="0" marL="0">
-                        <a:buNone/>
-                      </a:pPr>
-                      <a:r>
-                        <a:rPr lang="en-US" sz="900" b="1" dirty="0">
+                      <a:pPr indent="0" marL="0">
+                        <a:buNone/>
+                      </a:pPr>
+                      <a:r>
+                        <a:rPr lang="en-US" sz="1100" b="1" dirty="0">
                           <a:solidFill>
                             <a:schemeClr val="bg1"/>
                           </a:solidFill>
@@ -1291,14 +1344,14 @@
                         </a:rPr>
                         <a:t>Funcionario Responsable</a:t>
                       </a:r>
-                      <a:endParaRPr lang="en-US" sz="900" dirty="0">
-                        <a:latin typeface="Calibri" charset="0"/>
-                        <a:ea typeface="Calibri" charset="0"/>
-                        <a:cs typeface="Calibri" charset="0"/>
-                      </a:endParaRPr>
-                    </a:p>
-                  </a:txBody>
-                  <a:tcPr marL="54864" marR="54864" marT="13716" marB="13716" anchor="ctr">
+                      <a:endParaRPr lang="en-US" sz="1100" dirty="0">
+                        <a:latin typeface="Calibri" charset="0"/>
+                        <a:ea typeface="Calibri" charset="0"/>
+                        <a:cs typeface="Calibri" charset="0"/>
+                      </a:endParaRPr>
+                    </a:p>
+                  </a:txBody>
+                  <a:tcPr marL="54864" marR="54864" marT="18288" marB="18288" anchor="ctr">
                     <a:lnL w="0" cap="flat" cmpd="sng" algn="ctr">
                       <a:noFill/>
                     </a:lnL>
@@ -1324,375 +1377,16 @@
                 </a:tc>
               </a:tr>
               <a:tr h="0">
-                <a:tc>
-                  <a:txBody>
-                    <a:bodyPr/>
-                    <a:lstStyle/>
-                    <a:p>
-                      <a:pPr algn="just" indent="0" marL="0">
-                        <a:buNone/>
-                      </a:pPr>
-                      <a:r>
-                        <a:rPr lang="en-US" sz="760" b="1" dirty="0">
-                          <a:solidFill>
-                            <a:schemeClr val="tx1"/>
-                          </a:solidFill>
-                          <a:latin typeface="Calibri" pitchFamily="34" charset="0"/>
-                          <a:ea typeface="Calibri" pitchFamily="34" charset="-122"/>
-                          <a:cs typeface="Calibri" pitchFamily="34" charset="-120"/>
-                        </a:rPr>
-                        <a:t>A.1  Deficiencias en la conformación y actualización de expedientes de clientes.</a:t>
-                      </a:r>
-                      <a:endParaRPr lang="en-US" sz="760" dirty="0">
-                        <a:latin typeface="Calibri" charset="0"/>
-                        <a:ea typeface="Calibri" charset="0"/>
-                        <a:cs typeface="Calibri" charset="0"/>
-                      </a:endParaRPr>
-                    </a:p>
-                  </a:txBody>
-                  <a:tcPr marL="54864" marR="54864" marT="13716" marB="13716" anchor="ctr">
-                    <a:lnL w="0" cap="flat" cmpd="sng" algn="ctr">
-                      <a:noFill/>
-                    </a:lnL>
-                    <a:lnR w="0" cap="flat" cmpd="sng" algn="ctr">
-                      <a:noFill/>
-                    </a:lnR>
-                    <a:lnT w="0" cap="flat" cmpd="sng" algn="ctr">
-                      <a:noFill/>
-                    </a:lnT>
-                    <a:lnB w="9525" cap="flat" cmpd="sng" algn="ctr">
-                      <a:solidFill>
-                        <a:srgbClr val="D9E0EA"/>
-                      </a:solidFill>
-                      <a:prstDash val="solid"/>
-                      <a:round/>
-                      <a:headEnd type="none" w="med" len="med"/>
-                      <a:tailEnd type="none" w="med" len="med"/>
-                    </a:lnB>
-                    <a:solidFill>
-                      <a:srgbClr val="FFFFFF"/>
-                    </a:solidFill>
-                  </a:tcPr>
-                </a:tc>
-                <a:tc>
-                  <a:txBody>
-                    <a:bodyPr/>
-                    <a:lstStyle/>
-                    <a:p>
-                      <a:pPr algn="just" indent="0" marL="0">
-                        <a:buNone/>
-                      </a:pPr>
-                      <a:r>
-                        <a:rPr lang="en-US" sz="760" dirty="0">
-                          <a:solidFill>
-                            <a:schemeClr val="tx1"/>
-                          </a:solidFill>
-                          <a:latin typeface="Calibri" pitchFamily="34" charset="0"/>
-                          <a:ea typeface="Calibri" pitchFamily="34" charset="-122"/>
-                          <a:cs typeface="Calibri" pitchFamily="34" charset="-120"/>
-                        </a:rPr>
-                        <a:t>Pendiente</a:t>
-                      </a:r>
-                      <a:endParaRPr lang="en-US" sz="760" dirty="0">
-                        <a:latin typeface="Calibri" charset="0"/>
-                        <a:ea typeface="Calibri" charset="0"/>
-                        <a:cs typeface="Calibri" charset="0"/>
-                      </a:endParaRPr>
-                    </a:p>
-                  </a:txBody>
-                  <a:tcPr marL="54864" marR="54864" marT="13716" marB="13716" anchor="ctr">
-                    <a:lnL w="0" cap="flat" cmpd="sng" algn="ctr">
-                      <a:noFill/>
-                    </a:lnL>
-                    <a:lnR w="0" cap="flat" cmpd="sng" algn="ctr">
-                      <a:noFill/>
-                    </a:lnR>
-                    <a:lnT w="0" cap="flat" cmpd="sng" algn="ctr">
-                      <a:noFill/>
-                    </a:lnT>
-                    <a:lnB w="9525" cap="flat" cmpd="sng" algn="ctr">
-                      <a:solidFill>
-                        <a:srgbClr val="D9E0EA"/>
-                      </a:solidFill>
-                      <a:prstDash val="solid"/>
-                      <a:round/>
-                      <a:headEnd type="none" w="med" len="med"/>
-                      <a:tailEnd type="none" w="med" len="med"/>
-                    </a:lnB>
-                  </a:tcPr>
-                </a:tc>
-                <a:tc>
-                  <a:txBody>
-                    <a:bodyPr/>
-                    <a:lstStyle/>
-                    <a:p>
-                      <a:pPr algn="l" indent="0" marL="0">
-                        <a:buNone/>
-                      </a:pPr>
-                      <a:r>
-                        <a:rPr lang="en-US" sz="760" b="1" dirty="0">
-                          <a:solidFill>
-                            <a:schemeClr val="accent1"/>
-                          </a:solidFill>
-                          <a:latin typeface="Calibri" pitchFamily="34" charset="0"/>
-                          <a:ea typeface="Calibri" pitchFamily="34" charset="-122"/>
-                          <a:cs typeface="Calibri" pitchFamily="34" charset="-120"/>
-                        </a:rPr>
-                        <a:t>Gerencia de Cumplimiento</a:t>
-                      </a:r>
-                      <a:endParaRPr lang="en-US" sz="760" dirty="0">
-                        <a:latin typeface="Calibri" charset="0"/>
-                        <a:ea typeface="Calibri" charset="0"/>
-                        <a:cs typeface="Calibri" charset="0"/>
-                      </a:endParaRPr>
-                    </a:p>
-                  </a:txBody>
-                  <a:tcPr marL="54864" marR="54864" marT="13716" marB="13716" anchor="ctr">
-                    <a:lnL w="0" cap="flat" cmpd="sng" algn="ctr">
-                      <a:noFill/>
-                    </a:lnL>
-                    <a:lnR w="0" cap="flat" cmpd="sng" algn="ctr">
-                      <a:noFill/>
-                    </a:lnR>
-                    <a:lnT w="0" cap="flat" cmpd="sng" algn="ctr">
-                      <a:noFill/>
-                    </a:lnT>
-                    <a:lnB w="9525" cap="flat" cmpd="sng" algn="ctr">
-                      <a:solidFill>
-                        <a:srgbClr val="D9E0EA"/>
-                      </a:solidFill>
-                      <a:prstDash val="solid"/>
-                      <a:round/>
-                      <a:headEnd type="none" w="med" len="med"/>
-                      <a:tailEnd type="none" w="med" len="med"/>
-                    </a:lnB>
-                  </a:tcPr>
-                </a:tc>
-              </a:tr>
-              <a:tr h="0">
-                <a:tc>
-                  <a:txBody>
-                    <a:bodyPr/>
-                    <a:lstStyle/>
-                    <a:p>
-                      <a:pPr algn="just" indent="0" marL="0">
-                        <a:buNone/>
-                      </a:pPr>
-                      <a:r>
-                        <a:rPr lang="en-US" sz="760" b="1" dirty="0">
-                          <a:solidFill>
-                            <a:schemeClr val="tx1"/>
-                          </a:solidFill>
-                          <a:latin typeface="Calibri" pitchFamily="34" charset="0"/>
-                          <a:ea typeface="Calibri" pitchFamily="34" charset="-122"/>
-                          <a:cs typeface="Calibri" pitchFamily="34" charset="-120"/>
-                        </a:rPr>
-                        <a:t>A.2  Deficiencias en la identificación de la actividad económica realizada por clientes.</a:t>
-                      </a:r>
-                      <a:endParaRPr lang="en-US" sz="760" dirty="0">
-                        <a:latin typeface="Calibri" charset="0"/>
-                        <a:ea typeface="Calibri" charset="0"/>
-                        <a:cs typeface="Calibri" charset="0"/>
-                      </a:endParaRPr>
-                    </a:p>
-                  </a:txBody>
-                  <a:tcPr marL="54864" marR="54864" marT="13716" marB="13716" anchor="ctr">
-                    <a:lnL w="0" cap="flat" cmpd="sng" algn="ctr">
-                      <a:noFill/>
-                    </a:lnL>
-                    <a:lnR w="0" cap="flat" cmpd="sng" algn="ctr">
-                      <a:noFill/>
-                    </a:lnR>
-                    <a:lnT w="0" cap="flat" cmpd="sng" algn="ctr">
-                      <a:noFill/>
-                    </a:lnT>
-                    <a:lnB w="9525" cap="flat" cmpd="sng" algn="ctr">
-                      <a:solidFill>
-                        <a:srgbClr val="D9E0EA"/>
-                      </a:solidFill>
-                      <a:prstDash val="solid"/>
-                      <a:round/>
-                      <a:headEnd type="none" w="med" len="med"/>
-                      <a:tailEnd type="none" w="med" len="med"/>
-                    </a:lnB>
-                    <a:solidFill>
-                      <a:srgbClr val="FFFFFF"/>
-                    </a:solidFill>
-                  </a:tcPr>
-                </a:tc>
-                <a:tc>
-                  <a:txBody>
-                    <a:bodyPr/>
-                    <a:lstStyle/>
-                    <a:p>
-                      <a:pPr algn="just" indent="0" marL="0">
-                        <a:buNone/>
-                      </a:pPr>
-                      <a:r>
-                        <a:rPr lang="en-US" sz="760" dirty="0">
-                          <a:solidFill>
-                            <a:schemeClr val="tx1"/>
-                          </a:solidFill>
-                          <a:latin typeface="Calibri" pitchFamily="34" charset="0"/>
-                          <a:ea typeface="Calibri" pitchFamily="34" charset="-122"/>
-                          <a:cs typeface="Calibri" pitchFamily="34" charset="-120"/>
-                        </a:rPr>
-                        <a:t>Pendiente</a:t>
-                      </a:r>
-                      <a:endParaRPr lang="en-US" sz="760" dirty="0">
-                        <a:latin typeface="Calibri" charset="0"/>
-                        <a:ea typeface="Calibri" charset="0"/>
-                        <a:cs typeface="Calibri" charset="0"/>
-                      </a:endParaRPr>
-                    </a:p>
-                  </a:txBody>
-                  <a:tcPr marL="54864" marR="54864" marT="13716" marB="13716" anchor="ctr">
-                    <a:lnL w="0" cap="flat" cmpd="sng" algn="ctr">
-                      <a:noFill/>
-                    </a:lnL>
-                    <a:lnR w="0" cap="flat" cmpd="sng" algn="ctr">
-                      <a:noFill/>
-                    </a:lnR>
-                    <a:lnT w="0" cap="flat" cmpd="sng" algn="ctr">
-                      <a:noFill/>
-                    </a:lnT>
-                    <a:lnB w="9525" cap="flat" cmpd="sng" algn="ctr">
-                      <a:solidFill>
-                        <a:srgbClr val="D9E0EA"/>
-                      </a:solidFill>
-                      <a:prstDash val="solid"/>
-                      <a:round/>
-                      <a:headEnd type="none" w="med" len="med"/>
-                      <a:tailEnd type="none" w="med" len="med"/>
-                    </a:lnB>
-                  </a:tcPr>
-                </a:tc>
-                <a:tc>
-                  <a:txBody>
-                    <a:bodyPr/>
-                    <a:lstStyle/>
-                    <a:p>
-                      <a:pPr algn="l" indent="0" marL="0">
-                        <a:buNone/>
-                      </a:pPr>
-                      <a:r>
-                        <a:rPr lang="en-US" sz="760" b="1" dirty="0">
-                          <a:solidFill>
-                            <a:schemeClr val="accent1"/>
-                          </a:solidFill>
-                          <a:latin typeface="Calibri" pitchFamily="34" charset="0"/>
-                          <a:ea typeface="Calibri" pitchFamily="34" charset="-122"/>
-                          <a:cs typeface="Calibri" pitchFamily="34" charset="-120"/>
-                        </a:rPr>
-                        <a:t>Gerencia de Cumplimiento</a:t>
-                      </a:r>
-                      <a:endParaRPr lang="en-US" sz="760" dirty="0">
-                        <a:latin typeface="Calibri" charset="0"/>
-                        <a:ea typeface="Calibri" charset="0"/>
-                        <a:cs typeface="Calibri" charset="0"/>
-                      </a:endParaRPr>
-                    </a:p>
-                  </a:txBody>
-                  <a:tcPr marL="54864" marR="54864" marT="13716" marB="13716" anchor="ctr">
-                    <a:lnL w="0" cap="flat" cmpd="sng" algn="ctr">
-                      <a:noFill/>
-                    </a:lnL>
-                    <a:lnR w="0" cap="flat" cmpd="sng" algn="ctr">
-                      <a:noFill/>
-                    </a:lnR>
-                    <a:lnT w="0" cap="flat" cmpd="sng" algn="ctr">
-                      <a:noFill/>
-                    </a:lnT>
-                    <a:lnB w="9525" cap="flat" cmpd="sng" algn="ctr">
-                      <a:solidFill>
-                        <a:srgbClr val="D9E0EA"/>
-                      </a:solidFill>
-                      <a:prstDash val="solid"/>
-                      <a:round/>
-                      <a:headEnd type="none" w="med" len="med"/>
-                      <a:tailEnd type="none" w="med" len="med"/>
-                    </a:lnB>
-                  </a:tcPr>
-                </a:tc>
-              </a:tr>
-            </a:tbl>
-          </a:graphicData>
-        </a:graphic>
-      </p:graphicFrame>
-      <p:sp>
-        <p:nvSpPr>
-          <p:cNvPr id="5" name="Sección B"/>
-          <p:cNvSpPr txBox="1"/>
-          <p:nvPr/>
-        </p:nvSpPr>
-        <p:spPr>
-          <a:xfrm>
-            <a:off x="411480" y="1627632"/>
-            <a:ext cx="11368735" cy="237744"/>
-          </a:xfrm>
-          <a:prstGeom prst="rect">
-            <a:avLst/>
-          </a:prstGeom>
-          <a:noFill/>
-          <a:ln/>
-        </p:spPr>
-        <p:txBody>
-          <a:bodyPr wrap="square" lIns="0" tIns="0" rIns="0" bIns="0" rtlCol="0" anchor="ctr"/>
-          <a:lstStyle/>
-          <a:p>
-            <a:pPr indent="0" marL="0">
-              <a:buNone/>
-            </a:pPr>
-            <a:r>
-              <a:rPr lang="en-US" sz="1100" b="1" dirty="0">
-                <a:solidFill>
-                  <a:schemeClr val="accent1"/>
-                </a:solidFill>
-              </a:rPr>
-              <a:t>B. Proceso de implementación de la Herramienta de Monitoreo</a:t>
-            </a:r>
-            <a:endParaRPr lang="en-US" sz="1100" dirty="0"/>
-          </a:p>
-        </p:txBody>
-      </p:sp>
-      <p:graphicFrame>
-        <p:nvGraphicFramePr>
-          <p:cNvPr id="3" name="Tabla sección B"/>
-          <p:cNvGraphicFramePr>
-            <a:graphicFrameLocks noGrp="1"/>
-          </p:cNvGraphicFramePr>
-          <p:nvPr>
-            <p:extLst>
-              <p:ext uri="{D42A27DB-BD31-4B8C-83A1-F6EECF244321}">
-                <p14:modId xmlns:p14="http://schemas.microsoft.com/office/powerpoint/2010/main" val="1579011935"/>
-              </p:ext>
-            </p:extLst>
-          </p:nvPr>
-        </p:nvGraphicFramePr>
-        <p:xfrm>
-          <a:off x="411480" y="1901952"/>
-          <a:ext cx="11368735" cy="914400"/>
-        </p:xfrm>
-        <a:graphic>
-          <a:graphicData uri="http://schemas.openxmlformats.org/drawingml/2006/table">
-            <a:tbl>
-              <a:tblPr/>
-              <a:tblGrid>
-                <a:gridCol w="3977640"/>
-                <a:gridCol w="5788152"/>
-                <a:gridCol w="1600200"/>
-              </a:tblGrid>
-              <a:tr h="0">
-                <a:tc>
-                  <a:txBody>
-                    <a:bodyPr/>
-                    <a:lstStyle/>
-                    <a:p>
-                      <a:pPr algn="just" indent="0" marL="0">
-                        <a:buNone/>
-                      </a:pPr>
-                      <a:r>
-                        <a:rPr lang="en-US" sz="900" b="1" dirty="0">
+                <a:tc gridSpan="3">
+                  <a:txBody>
+                    <a:bodyPr/>
+                    <a:lstStyle/>
+                    <a:p>
+                      <a:pPr indent="0" marL="0">
+                        <a:buNone/>
+                      </a:pPr>
+                      <a:r>
+                        <a:rPr lang="en-US" sz="1150" b="1" dirty="0">
                           <a:solidFill>
                             <a:schemeClr val="bg1"/>
                           </a:solidFill>
@@ -1700,16 +1394,16 @@
                           <a:ea typeface="Calibri" pitchFamily="34" charset="-122"/>
                           <a:cs typeface="Calibri" pitchFamily="34" charset="-120"/>
                         </a:rPr>
-                        <a:t>Observación</a:t>
-                      </a:r>
-                      <a:endParaRPr lang="en-US" sz="900" dirty="0">
-                        <a:latin typeface="Calibri" charset="0"/>
-                        <a:ea typeface="Calibri" charset="0"/>
-                        <a:cs typeface="Calibri" charset="0"/>
-                      </a:endParaRPr>
-                    </a:p>
-                  </a:txBody>
-                  <a:tcPr marL="54864" marR="54864" marT="13716" marB="13716" anchor="ctr">
+                        <a:t>A. Gestión de Riesgo de LDA/FT/FPADM</a:t>
+                      </a:r>
+                      <a:endParaRPr lang="en-US" sz="1150" dirty="0">
+                        <a:latin typeface="Calibri" charset="0"/>
+                        <a:ea typeface="Calibri" charset="0"/>
+                        <a:cs typeface="Calibri" charset="0"/>
+                      </a:endParaRPr>
+                    </a:p>
+                  </a:txBody>
+                  <a:tcPr marL="54864" marR="54864" marT="18288" marB="18288" anchor="ctr">
                     <a:lnL w="0" cap="flat" cmpd="sng" algn="ctr">
                       <a:noFill/>
                     </a:lnL>
@@ -1733,105 +1427,11 @@
                     </a:solidFill>
                   </a:tcPr>
                 </a:tc>
-                <a:tc>
-                  <a:txBody>
-                    <a:bodyPr/>
-                    <a:lstStyle/>
-                    <a:p>
-                      <a:pPr algn="just" indent="0" marL="0">
-                        <a:buNone/>
-                      </a:pPr>
-                      <a:r>
-                        <a:rPr lang="en-US" sz="900" b="1" dirty="0">
-                          <a:solidFill>
-                            <a:schemeClr val="bg1"/>
-                          </a:solidFill>
-                          <a:latin typeface="Calibri" pitchFamily="34" charset="0"/>
-                          <a:ea typeface="Calibri" pitchFamily="34" charset="-122"/>
-                          <a:cs typeface="Calibri" pitchFamily="34" charset="-120"/>
-                        </a:rPr>
-                        <a:t>Comentarios</a:t>
-                      </a:r>
-                      <a:endParaRPr lang="en-US" sz="900" dirty="0">
-                        <a:latin typeface="Calibri" charset="0"/>
-                        <a:ea typeface="Calibri" charset="0"/>
-                        <a:cs typeface="Calibri" charset="0"/>
-                      </a:endParaRPr>
-                    </a:p>
-                  </a:txBody>
-                  <a:tcPr marL="54864" marR="54864" marT="13716" marB="13716" anchor="ctr">
-                    <a:lnL w="0" cap="flat" cmpd="sng" algn="ctr">
-                      <a:noFill/>
-                    </a:lnL>
-                    <a:lnR w="0" cap="flat" cmpd="sng" algn="ctr">
-                      <a:noFill/>
-                    </a:lnR>
-                    <a:lnT w="0" cap="flat" cmpd="sng" algn="ctr">
-                      <a:noFill/>
-                    </a:lnT>
-                    <a:lnB w="9525" cap="flat" cmpd="sng" algn="ctr">
-                      <a:solidFill>
-                        <a:srgbClr val="D9E0EA"/>
-                      </a:solidFill>
-                      <a:prstDash val="solid"/>
-                      <a:round/>
-                      <a:headEnd type="none" w="med" len="med"/>
-                      <a:tailEnd type="none" w="med" len="med"/>
-                    </a:lnB>
-                    <a:solidFill>
-                      <a:schemeClr val="accent1"/>
-                    </a:solidFill>
-                  </a:tcPr>
-                </a:tc>
-                <a:tc>
-                  <a:txBody>
-                    <a:bodyPr/>
-                    <a:lstStyle/>
-                    <a:p>
-                      <a:pPr algn="just" indent="0" marL="0">
-                        <a:buNone/>
-                      </a:pPr>
-                      <a:r>
-                        <a:rPr lang="en-US" sz="900" b="1" dirty="0">
-                          <a:solidFill>
-                            <a:schemeClr val="bg1"/>
-                          </a:solidFill>
-                          <a:latin typeface="Calibri" pitchFamily="34" charset="0"/>
-                          <a:ea typeface="Calibri" pitchFamily="34" charset="-122"/>
-                          <a:cs typeface="Calibri" pitchFamily="34" charset="-120"/>
-                        </a:rPr>
-                        <a:t>Funcionario Responsable</a:t>
-                      </a:r>
-                      <a:endParaRPr lang="en-US" sz="900" dirty="0">
-                        <a:latin typeface="Calibri" charset="0"/>
-                        <a:ea typeface="Calibri" charset="0"/>
-                        <a:cs typeface="Calibri" charset="0"/>
-                      </a:endParaRPr>
-                    </a:p>
-                  </a:txBody>
-                  <a:tcPr marL="54864" marR="54864" marT="13716" marB="13716" anchor="ctr">
-                    <a:lnL w="0" cap="flat" cmpd="sng" algn="ctr">
-                      <a:noFill/>
-                    </a:lnL>
-                    <a:lnR w="0" cap="flat" cmpd="sng" algn="ctr">
-                      <a:noFill/>
-                    </a:lnR>
-                    <a:lnT w="0" cap="flat" cmpd="sng" algn="ctr">
-                      <a:noFill/>
-                    </a:lnT>
-                    <a:lnB w="9525" cap="flat" cmpd="sng" algn="ctr">
-                      <a:solidFill>
-                        <a:srgbClr val="D9E0EA"/>
-                      </a:solidFill>
-                      <a:prstDash val="solid"/>
-                      <a:round/>
-                      <a:headEnd type="none" w="med" len="med"/>
-                      <a:tailEnd type="none" w="med" len="med"/>
-                    </a:lnB>
-                    <a:solidFill>
-                      <a:schemeClr val="accent1"/>
-                    </a:solidFill>
-                  </a:tcPr>
+                <a:tc hMerge="1">
+                  <a:tcPr/>
+                </a:tc>
+                <a:tc hMerge="1">
+                  <a:tcPr/>
                 </a:tc>
               </a:tr>
               <a:tr h="0">
@@ -1840,61 +1440,72 @@
                     <a:bodyPr/>
                     <a:lstStyle/>
                     <a:p>
-                      <a:pPr algn="just" indent="0" marL="0">
-                        <a:buNone/>
-                      </a:pPr>
-                      <a:r>
-                        <a:rPr lang="en-US" sz="760" b="1" dirty="0">
-                          <a:solidFill>
-                            <a:schemeClr val="tx1"/>
-                          </a:solidFill>
-                          <a:latin typeface="Calibri" pitchFamily="34" charset="0"/>
-                          <a:ea typeface="Calibri" pitchFamily="34" charset="-122"/>
-                          <a:cs typeface="Calibri" pitchFamily="34" charset="-120"/>
-                        </a:rPr>
-                        <a:t>B.1  Falta de actualización de Metodología y matriz de riesgo LA/FT/FPADM de la Entidad</a:t>
-                      </a:r>
-                      <a:endParaRPr lang="en-US" sz="760" dirty="0">
-                        <a:latin typeface="Calibri" charset="0"/>
-                        <a:ea typeface="Calibri" charset="0"/>
-                        <a:cs typeface="Calibri" charset="0"/>
-                      </a:endParaRPr>
-                    </a:p>
-                  </a:txBody>
-                  <a:tcPr marL="54864" marR="54864" marT="13716" marB="13716" anchor="ctr">
-                    <a:lnL w="0" cap="flat" cmpd="sng" algn="ctr">
-                      <a:noFill/>
-                    </a:lnL>
-                    <a:lnR w="0" cap="flat" cmpd="sng" algn="ctr">
-                      <a:noFill/>
-                    </a:lnR>
-                    <a:lnT w="0" cap="flat" cmpd="sng" algn="ctr">
-                      <a:noFill/>
-                    </a:lnT>
-                    <a:lnB w="9525" cap="flat" cmpd="sng" algn="ctr">
-                      <a:solidFill>
-                        <a:srgbClr val="D9E0EA"/>
-                      </a:solidFill>
-                      <a:prstDash val="solid"/>
-                      <a:round/>
-                      <a:headEnd type="none" w="med" len="med"/>
-                      <a:tailEnd type="none" w="med" len="med"/>
-                    </a:lnB>
-                    <a:solidFill>
-                      <a:srgbClr val="FFFFFF"/>
-                    </a:solidFill>
-                  </a:tcPr>
-                </a:tc>
-                <a:tc>
-                  <a:txBody>
-                    <a:bodyPr/>
-                    <a:lstStyle/>
-                    <a:p>
-                      <a:pPr algn="just" indent="0" marL="0">
-                        <a:buNone/>
-                      </a:pPr>
-                      <a:r>
-                        <a:rPr lang="en-US" sz="760" dirty="0">
+                      <a:pPr indent="0" marL="0">
+                        <a:buNone/>
+                      </a:pPr>
+                      <a:r>
+                        <a:rPr lang="en-US" sz="1100" b="1" dirty="0">
+                          <a:solidFill>
+                            <a:schemeClr val="accent1"/>
+                          </a:solidFill>
+                          <a:latin typeface="Calibri" pitchFamily="34" charset="0"/>
+                          <a:ea typeface="Calibri" pitchFamily="34" charset="-122"/>
+                          <a:cs typeface="Calibri" pitchFamily="34" charset="-120"/>
+                        </a:rPr>
+                        <a:t>A.1  </a:t>
+                      </a:r>
+                      <a:pPr indent="0" marL="0">
+                        <a:buNone/>
+                      </a:pPr>
+                      <a:r>
+                        <a:rPr lang="en-US" sz="1100" b="1" dirty="0">
+                          <a:solidFill>
+                            <a:schemeClr val="tx1"/>
+                          </a:solidFill>
+                          <a:latin typeface="Calibri" pitchFamily="34" charset="0"/>
+                          <a:ea typeface="Calibri" pitchFamily="34" charset="-122"/>
+                          <a:cs typeface="Calibri" pitchFamily="34" charset="-120"/>
+                        </a:rPr>
+                        <a:t>Deficiencias en la conformación y actualización de expedientes de clientes.</a:t>
+                      </a:r>
+                      <a:endParaRPr lang="en-US" sz="1100" dirty="0">
+                        <a:latin typeface="Calibri" charset="0"/>
+                        <a:ea typeface="Calibri" charset="0"/>
+                        <a:cs typeface="Calibri" charset="0"/>
+                      </a:endParaRPr>
+                    </a:p>
+                  </a:txBody>
+                  <a:tcPr marL="54864" marR="54864" marT="18288" marB="18288" anchor="ctr">
+                    <a:lnL w="0" cap="flat" cmpd="sng" algn="ctr">
+                      <a:noFill/>
+                    </a:lnL>
+                    <a:lnR w="0" cap="flat" cmpd="sng" algn="ctr">
+                      <a:noFill/>
+                    </a:lnR>
+                    <a:lnT w="0" cap="flat" cmpd="sng" algn="ctr">
+                      <a:noFill/>
+                    </a:lnT>
+                    <a:lnB w="9525" cap="flat" cmpd="sng" algn="ctr">
+                      <a:solidFill>
+                        <a:srgbClr val="D9E0EA"/>
+                      </a:solidFill>
+                      <a:prstDash val="solid"/>
+                      <a:round/>
+                      <a:headEnd type="none" w="med" len="med"/>
+                      <a:tailEnd type="none" w="med" len="med"/>
+                    </a:lnB>
+                  </a:tcPr>
+                </a:tc>
+                <a:tc>
+                  <a:txBody>
+                    <a:bodyPr/>
+                    <a:lstStyle/>
+                    <a:p>
+                      <a:pPr indent="0" marL="0">
+                        <a:buNone/>
+                      </a:pPr>
+                      <a:r>
+                        <a:rPr lang="en-US" sz="1100" dirty="0">
                           <a:solidFill>
                             <a:schemeClr val="tx1"/>
                           </a:solidFill>
@@ -1904,44 +1515,44 @@
                         </a:rPr>
                         <a:t>Pendiente</a:t>
                       </a:r>
-                      <a:endParaRPr lang="en-US" sz="760" dirty="0">
-                        <a:latin typeface="Calibri" charset="0"/>
-                        <a:ea typeface="Calibri" charset="0"/>
-                        <a:cs typeface="Calibri" charset="0"/>
-                      </a:endParaRPr>
-                    </a:p>
-                  </a:txBody>
-                  <a:tcPr marL="54864" marR="54864" marT="13716" marB="13716" anchor="ctr">
-                    <a:lnL w="0" cap="flat" cmpd="sng" algn="ctr">
-                      <a:noFill/>
-                    </a:lnL>
-                    <a:lnR w="0" cap="flat" cmpd="sng" algn="ctr">
-                      <a:noFill/>
-                    </a:lnR>
-                    <a:lnT w="0" cap="flat" cmpd="sng" algn="ctr">
-                      <a:noFill/>
-                    </a:lnT>
-                    <a:lnB w="9525" cap="flat" cmpd="sng" algn="ctr">
-                      <a:solidFill>
-                        <a:srgbClr val="D9E0EA"/>
-                      </a:solidFill>
-                      <a:prstDash val="solid"/>
-                      <a:round/>
-                      <a:headEnd type="none" w="med" len="med"/>
-                      <a:tailEnd type="none" w="med" len="med"/>
-                    </a:lnB>
-                  </a:tcPr>
-                </a:tc>
-                <a:tc>
-                  <a:txBody>
-                    <a:bodyPr/>
-                    <a:lstStyle/>
-                    <a:p>
-                      <a:pPr algn="l" indent="0" marL="0">
-                        <a:buNone/>
-                      </a:pPr>
-                      <a:r>
-                        <a:rPr lang="en-US" sz="760" b="1" dirty="0">
+                      <a:endParaRPr lang="en-US" sz="1100" dirty="0">
+                        <a:latin typeface="Calibri" charset="0"/>
+                        <a:ea typeface="Calibri" charset="0"/>
+                        <a:cs typeface="Calibri" charset="0"/>
+                      </a:endParaRPr>
+                    </a:p>
+                  </a:txBody>
+                  <a:tcPr marL="54864" marR="54864" marT="18288" marB="18288" anchor="ctr">
+                    <a:lnL w="0" cap="flat" cmpd="sng" algn="ctr">
+                      <a:noFill/>
+                    </a:lnL>
+                    <a:lnR w="0" cap="flat" cmpd="sng" algn="ctr">
+                      <a:noFill/>
+                    </a:lnR>
+                    <a:lnT w="0" cap="flat" cmpd="sng" algn="ctr">
+                      <a:noFill/>
+                    </a:lnT>
+                    <a:lnB w="9525" cap="flat" cmpd="sng" algn="ctr">
+                      <a:solidFill>
+                        <a:srgbClr val="D9E0EA"/>
+                      </a:solidFill>
+                      <a:prstDash val="solid"/>
+                      <a:round/>
+                      <a:headEnd type="none" w="med" len="med"/>
+                      <a:tailEnd type="none" w="med" len="med"/>
+                    </a:lnB>
+                  </a:tcPr>
+                </a:tc>
+                <a:tc>
+                  <a:txBody>
+                    <a:bodyPr/>
+                    <a:lstStyle/>
+                    <a:p>
+                      <a:pPr indent="0" marL="0">
+                        <a:buNone/>
+                      </a:pPr>
+                      <a:r>
+                        <a:rPr lang="en-US" sz="1100" b="1" dirty="0">
                           <a:solidFill>
                             <a:schemeClr val="accent1"/>
                           </a:solidFill>
@@ -1951,14 +1562,14 @@
                         </a:rPr>
                         <a:t>Gerencia de Cumplimiento</a:t>
                       </a:r>
-                      <a:endParaRPr lang="en-US" sz="760" dirty="0">
-                        <a:latin typeface="Calibri" charset="0"/>
-                        <a:ea typeface="Calibri" charset="0"/>
-                        <a:cs typeface="Calibri" charset="0"/>
-                      </a:endParaRPr>
-                    </a:p>
-                  </a:txBody>
-                  <a:tcPr marL="54864" marR="54864" marT="13716" marB="13716" anchor="ctr">
+                      <a:endParaRPr lang="en-US" sz="1100" dirty="0">
+                        <a:latin typeface="Calibri" charset="0"/>
+                        <a:ea typeface="Calibri" charset="0"/>
+                        <a:cs typeface="Calibri" charset="0"/>
+                      </a:endParaRPr>
+                    </a:p>
+                  </a:txBody>
+                  <a:tcPr marL="54864" marR="54864" marT="18288" marB="18288" anchor="ctr">
                     <a:lnL w="0" cap="flat" cmpd="sng" algn="ctr">
                       <a:noFill/>
                     </a:lnL>
@@ -1986,61 +1597,72 @@
                     <a:bodyPr/>
                     <a:lstStyle/>
                     <a:p>
-                      <a:pPr algn="just" indent="0" marL="0">
-                        <a:buNone/>
-                      </a:pPr>
-                      <a:r>
-                        <a:rPr lang="en-US" sz="760" b="1" dirty="0">
-                          <a:solidFill>
-                            <a:schemeClr val="tx1"/>
-                          </a:solidFill>
-                          <a:latin typeface="Calibri" pitchFamily="34" charset="0"/>
-                          <a:ea typeface="Calibri" pitchFamily="34" charset="-122"/>
-                          <a:cs typeface="Calibri" pitchFamily="34" charset="-120"/>
-                        </a:rPr>
-                        <a:t>B.2  Falta de actualización de Metodología y matriz de riesgo LA/FT/FPADM Clientes o asociados</a:t>
-                      </a:r>
-                      <a:endParaRPr lang="en-US" sz="760" dirty="0">
-                        <a:latin typeface="Calibri" charset="0"/>
-                        <a:ea typeface="Calibri" charset="0"/>
-                        <a:cs typeface="Calibri" charset="0"/>
-                      </a:endParaRPr>
-                    </a:p>
-                  </a:txBody>
-                  <a:tcPr marL="54864" marR="54864" marT="13716" marB="13716" anchor="ctr">
-                    <a:lnL w="0" cap="flat" cmpd="sng" algn="ctr">
-                      <a:noFill/>
-                    </a:lnL>
-                    <a:lnR w="0" cap="flat" cmpd="sng" algn="ctr">
-                      <a:noFill/>
-                    </a:lnR>
-                    <a:lnT w="0" cap="flat" cmpd="sng" algn="ctr">
-                      <a:noFill/>
-                    </a:lnT>
-                    <a:lnB w="9525" cap="flat" cmpd="sng" algn="ctr">
-                      <a:solidFill>
-                        <a:srgbClr val="D9E0EA"/>
-                      </a:solidFill>
-                      <a:prstDash val="solid"/>
-                      <a:round/>
-                      <a:headEnd type="none" w="med" len="med"/>
-                      <a:tailEnd type="none" w="med" len="med"/>
-                    </a:lnB>
-                    <a:solidFill>
-                      <a:srgbClr val="FFFFFF"/>
-                    </a:solidFill>
-                  </a:tcPr>
-                </a:tc>
-                <a:tc>
-                  <a:txBody>
-                    <a:bodyPr/>
-                    <a:lstStyle/>
-                    <a:p>
-                      <a:pPr algn="just" indent="0" marL="0">
-                        <a:buNone/>
-                      </a:pPr>
-                      <a:r>
-                        <a:rPr lang="en-US" sz="760" dirty="0">
+                      <a:pPr indent="0" marL="0">
+                        <a:buNone/>
+                      </a:pPr>
+                      <a:r>
+                        <a:rPr lang="en-US" sz="1100" b="1" dirty="0">
+                          <a:solidFill>
+                            <a:schemeClr val="accent1"/>
+                          </a:solidFill>
+                          <a:latin typeface="Calibri" pitchFamily="34" charset="0"/>
+                          <a:ea typeface="Calibri" pitchFamily="34" charset="-122"/>
+                          <a:cs typeface="Calibri" pitchFamily="34" charset="-120"/>
+                        </a:rPr>
+                        <a:t>A.2  </a:t>
+                      </a:r>
+                      <a:pPr indent="0" marL="0">
+                        <a:buNone/>
+                      </a:pPr>
+                      <a:r>
+                        <a:rPr lang="en-US" sz="1100" b="1" dirty="0">
+                          <a:solidFill>
+                            <a:schemeClr val="tx1"/>
+                          </a:solidFill>
+                          <a:latin typeface="Calibri" pitchFamily="34" charset="0"/>
+                          <a:ea typeface="Calibri" pitchFamily="34" charset="-122"/>
+                          <a:cs typeface="Calibri" pitchFamily="34" charset="-120"/>
+                        </a:rPr>
+                        <a:t>Deficiencias en la identificación de la actividad económica realizada por clientes.</a:t>
+                      </a:r>
+                      <a:endParaRPr lang="en-US" sz="1100" dirty="0">
+                        <a:latin typeface="Calibri" charset="0"/>
+                        <a:ea typeface="Calibri" charset="0"/>
+                        <a:cs typeface="Calibri" charset="0"/>
+                      </a:endParaRPr>
+                    </a:p>
+                  </a:txBody>
+                  <a:tcPr marL="54864" marR="54864" marT="18288" marB="18288" anchor="ctr">
+                    <a:lnL w="0" cap="flat" cmpd="sng" algn="ctr">
+                      <a:noFill/>
+                    </a:lnL>
+                    <a:lnR w="0" cap="flat" cmpd="sng" algn="ctr">
+                      <a:noFill/>
+                    </a:lnR>
+                    <a:lnT w="0" cap="flat" cmpd="sng" algn="ctr">
+                      <a:noFill/>
+                    </a:lnT>
+                    <a:lnB w="9525" cap="flat" cmpd="sng" algn="ctr">
+                      <a:solidFill>
+                        <a:srgbClr val="D9E0EA"/>
+                      </a:solidFill>
+                      <a:prstDash val="solid"/>
+                      <a:round/>
+                      <a:headEnd type="none" w="med" len="med"/>
+                      <a:tailEnd type="none" w="med" len="med"/>
+                    </a:lnB>
+                  </a:tcPr>
+                </a:tc>
+                <a:tc>
+                  <a:txBody>
+                    <a:bodyPr/>
+                    <a:lstStyle/>
+                    <a:p>
+                      <a:pPr indent="0" marL="0">
+                        <a:buNone/>
+                      </a:pPr>
+                      <a:r>
+                        <a:rPr lang="en-US" sz="1100" dirty="0">
                           <a:solidFill>
                             <a:schemeClr val="tx1"/>
                           </a:solidFill>
@@ -2050,44 +1672,44 @@
                         </a:rPr>
                         <a:t>Pendiente</a:t>
                       </a:r>
-                      <a:endParaRPr lang="en-US" sz="760" dirty="0">
-                        <a:latin typeface="Calibri" charset="0"/>
-                        <a:ea typeface="Calibri" charset="0"/>
-                        <a:cs typeface="Calibri" charset="0"/>
-                      </a:endParaRPr>
-                    </a:p>
-                  </a:txBody>
-                  <a:tcPr marL="54864" marR="54864" marT="13716" marB="13716" anchor="ctr">
-                    <a:lnL w="0" cap="flat" cmpd="sng" algn="ctr">
-                      <a:noFill/>
-                    </a:lnL>
-                    <a:lnR w="0" cap="flat" cmpd="sng" algn="ctr">
-                      <a:noFill/>
-                    </a:lnR>
-                    <a:lnT w="0" cap="flat" cmpd="sng" algn="ctr">
-                      <a:noFill/>
-                    </a:lnT>
-                    <a:lnB w="9525" cap="flat" cmpd="sng" algn="ctr">
-                      <a:solidFill>
-                        <a:srgbClr val="D9E0EA"/>
-                      </a:solidFill>
-                      <a:prstDash val="solid"/>
-                      <a:round/>
-                      <a:headEnd type="none" w="med" len="med"/>
-                      <a:tailEnd type="none" w="med" len="med"/>
-                    </a:lnB>
-                  </a:tcPr>
-                </a:tc>
-                <a:tc>
-                  <a:txBody>
-                    <a:bodyPr/>
-                    <a:lstStyle/>
-                    <a:p>
-                      <a:pPr algn="l" indent="0" marL="0">
-                        <a:buNone/>
-                      </a:pPr>
-                      <a:r>
-                        <a:rPr lang="en-US" sz="760" b="1" dirty="0">
+                      <a:endParaRPr lang="en-US" sz="1100" dirty="0">
+                        <a:latin typeface="Calibri" charset="0"/>
+                        <a:ea typeface="Calibri" charset="0"/>
+                        <a:cs typeface="Calibri" charset="0"/>
+                      </a:endParaRPr>
+                    </a:p>
+                  </a:txBody>
+                  <a:tcPr marL="54864" marR="54864" marT="18288" marB="18288" anchor="ctr">
+                    <a:lnL w="0" cap="flat" cmpd="sng" algn="ctr">
+                      <a:noFill/>
+                    </a:lnL>
+                    <a:lnR w="0" cap="flat" cmpd="sng" algn="ctr">
+                      <a:noFill/>
+                    </a:lnR>
+                    <a:lnT w="0" cap="flat" cmpd="sng" algn="ctr">
+                      <a:noFill/>
+                    </a:lnT>
+                    <a:lnB w="9525" cap="flat" cmpd="sng" algn="ctr">
+                      <a:solidFill>
+                        <a:srgbClr val="D9E0EA"/>
+                      </a:solidFill>
+                      <a:prstDash val="solid"/>
+                      <a:round/>
+                      <a:headEnd type="none" w="med" len="med"/>
+                      <a:tailEnd type="none" w="med" len="med"/>
+                    </a:lnB>
+                  </a:tcPr>
+                </a:tc>
+                <a:tc>
+                  <a:txBody>
+                    <a:bodyPr/>
+                    <a:lstStyle/>
+                    <a:p>
+                      <a:pPr indent="0" marL="0">
+                        <a:buNone/>
+                      </a:pPr>
+                      <a:r>
+                        <a:rPr lang="en-US" sz="1100" b="1" dirty="0">
                           <a:solidFill>
                             <a:schemeClr val="accent1"/>
                           </a:solidFill>
@@ -2097,14 +1719,14 @@
                         </a:rPr>
                         <a:t>Gerencia de Cumplimiento</a:t>
                       </a:r>
-                      <a:endParaRPr lang="en-US" sz="760" dirty="0">
-                        <a:latin typeface="Calibri" charset="0"/>
-                        <a:ea typeface="Calibri" charset="0"/>
-                        <a:cs typeface="Calibri" charset="0"/>
-                      </a:endParaRPr>
-                    </a:p>
-                  </a:txBody>
-                  <a:tcPr marL="54864" marR="54864" marT="13716" marB="13716" anchor="ctr">
+                      <a:endParaRPr lang="en-US" sz="1100" dirty="0">
+                        <a:latin typeface="Calibri" charset="0"/>
+                        <a:ea typeface="Calibri" charset="0"/>
+                        <a:cs typeface="Calibri" charset="0"/>
+                      </a:endParaRPr>
+                    </a:p>
+                  </a:txBody>
+                  <a:tcPr marL="54864" marR="54864" marT="18288" marB="18288" anchor="ctr">
                     <a:lnL w="0" cap="flat" cmpd="sng" algn="ctr">
                       <a:noFill/>
                     </a:lnL>
@@ -2127,33 +1749,33 @@
                 </a:tc>
               </a:tr>
               <a:tr h="0">
-                <a:tc>
-                  <a:txBody>
-                    <a:bodyPr/>
-                    <a:lstStyle/>
-                    <a:p>
-                      <a:pPr algn="just" indent="0" marL="0">
-                        <a:buNone/>
-                      </a:pPr>
-                      <a:r>
-                        <a:rPr lang="en-US" sz="760" b="1" dirty="0">
-                          <a:solidFill>
-                            <a:schemeClr val="tx1"/>
-                          </a:solidFill>
-                          <a:latin typeface="Calibri" pitchFamily="34" charset="0"/>
-                          <a:ea typeface="Calibri" pitchFamily="34" charset="-122"/>
-                          <a:cs typeface="Calibri" pitchFamily="34" charset="-120"/>
-                        </a:rPr>
-                        <a:t>B.3  Falta de automatización en el proceso de remisión de reportería regulada a la Web Service de UIF.</a:t>
-                      </a:r>
-                      <a:endParaRPr lang="en-US" sz="760" dirty="0">
-                        <a:latin typeface="Calibri" charset="0"/>
-                        <a:ea typeface="Calibri" charset="0"/>
-                        <a:cs typeface="Calibri" charset="0"/>
-                      </a:endParaRPr>
-                    </a:p>
-                  </a:txBody>
-                  <a:tcPr marL="54864" marR="54864" marT="13716" marB="13716" anchor="ctr">
+                <a:tc gridSpan="3">
+                  <a:txBody>
+                    <a:bodyPr/>
+                    <a:lstStyle/>
+                    <a:p>
+                      <a:pPr indent="0" marL="0">
+                        <a:buNone/>
+                      </a:pPr>
+                      <a:r>
+                        <a:rPr lang="en-US" sz="1150" b="1" dirty="0">
+                          <a:solidFill>
+                            <a:schemeClr val="bg1"/>
+                          </a:solidFill>
+                          <a:latin typeface="Calibri" pitchFamily="34" charset="0"/>
+                          <a:ea typeface="Calibri" pitchFamily="34" charset="-122"/>
+                          <a:cs typeface="Calibri" pitchFamily="34" charset="-120"/>
+                        </a:rPr>
+                        <a:t>B. Proceso de implementación de la Herramienta de Monitoreo</a:t>
+                      </a:r>
+                      <a:endParaRPr lang="en-US" sz="1150" dirty="0">
+                        <a:latin typeface="Calibri" charset="0"/>
+                        <a:ea typeface="Calibri" charset="0"/>
+                        <a:cs typeface="Calibri" charset="0"/>
+                      </a:endParaRPr>
+                    </a:p>
+                  </a:txBody>
+                  <a:tcPr marL="54864" marR="54864" marT="18288" marB="18288" anchor="ctr">
                     <a:lnL w="0" cap="flat" cmpd="sng" algn="ctr">
                       <a:noFill/>
                     </a:lnL>
@@ -2173,103 +1795,15 @@
                       <a:tailEnd type="none" w="med" len="med"/>
                     </a:lnB>
                     <a:solidFill>
-                      <a:srgbClr val="FFFFFF"/>
+                      <a:schemeClr val="accent2"/>
                     </a:solidFill>
                   </a:tcPr>
                 </a:tc>
-                <a:tc>
-                  <a:txBody>
-                    <a:bodyPr/>
-                    <a:lstStyle/>
-                    <a:p>
-                      <a:pPr algn="just" indent="0" marL="0">
-                        <a:buNone/>
-                      </a:pPr>
-                      <a:r>
-                        <a:rPr lang="en-US" sz="760" dirty="0">
-                          <a:solidFill>
-                            <a:schemeClr val="tx1"/>
-                          </a:solidFill>
-                          <a:latin typeface="Calibri" pitchFamily="34" charset="0"/>
-                          <a:ea typeface="Calibri" pitchFamily="34" charset="-122"/>
-                          <a:cs typeface="Calibri" pitchFamily="34" charset="-120"/>
-                        </a:rPr>
-                        <a:t>Pendiente</a:t>
-                      </a:r>
-                      <a:endParaRPr lang="en-US" sz="760" dirty="0">
-                        <a:latin typeface="Calibri" charset="0"/>
-                        <a:ea typeface="Calibri" charset="0"/>
-                        <a:cs typeface="Calibri" charset="0"/>
-                      </a:endParaRPr>
-                    </a:p>
-                  </a:txBody>
-                  <a:tcPr marL="54864" marR="54864" marT="13716" marB="13716" anchor="ctr">
-                    <a:lnL w="0" cap="flat" cmpd="sng" algn="ctr">
-                      <a:noFill/>
-                    </a:lnL>
-                    <a:lnR w="0" cap="flat" cmpd="sng" algn="ctr">
-                      <a:noFill/>
-                    </a:lnR>
-                    <a:lnT w="0" cap="flat" cmpd="sng" algn="ctr">
-                      <a:noFill/>
-                    </a:lnT>
-                    <a:lnB w="9525" cap="flat" cmpd="sng" algn="ctr">
-                      <a:solidFill>
-                        <a:srgbClr val="D9E0EA"/>
-                      </a:solidFill>
-                      <a:prstDash val="solid"/>
-                      <a:round/>
-                      <a:headEnd type="none" w="med" len="med"/>
-                      <a:tailEnd type="none" w="med" len="med"/>
-                    </a:lnB>
-                  </a:tcPr>
-                </a:tc>
-                <a:tc>
-                  <a:txBody>
-                    <a:bodyPr/>
-                    <a:lstStyle/>
-                    <a:p>
-                      <a:pPr algn="l" indent="0" marL="0">
-                        <a:buNone/>
-                      </a:pPr>
-                      <a:r>
-                        <a:rPr lang="en-US" sz="760" b="1" dirty="0">
-                          <a:solidFill>
-                            <a:schemeClr val="accent1"/>
-                          </a:solidFill>
-                          <a:latin typeface="Calibri" pitchFamily="34" charset="0"/>
-                          <a:ea typeface="Calibri" pitchFamily="34" charset="-122"/>
-                          <a:cs typeface="Calibri" pitchFamily="34" charset="-120"/>
-                        </a:rPr>
-                        <a:t>Gerencia de Cumplimiento</a:t>
-                      </a:r>
-                      <a:endParaRPr lang="en-US" sz="760" dirty="0">
-                        <a:latin typeface="Calibri" charset="0"/>
-                        <a:ea typeface="Calibri" charset="0"/>
-                        <a:cs typeface="Calibri" charset="0"/>
-                      </a:endParaRPr>
-                    </a:p>
-                  </a:txBody>
-                  <a:tcPr marL="54864" marR="54864" marT="13716" marB="13716" anchor="ctr">
-                    <a:lnL w="0" cap="flat" cmpd="sng" algn="ctr">
-                      <a:noFill/>
-                    </a:lnL>
-                    <a:lnR w="0" cap="flat" cmpd="sng" algn="ctr">
-                      <a:noFill/>
-                    </a:lnR>
-                    <a:lnT w="0" cap="flat" cmpd="sng" algn="ctr">
-                      <a:noFill/>
-                    </a:lnT>
-                    <a:lnB w="9525" cap="flat" cmpd="sng" algn="ctr">
-                      <a:solidFill>
-                        <a:srgbClr val="D9E0EA"/>
-                      </a:solidFill>
-                      <a:prstDash val="solid"/>
-                      <a:round/>
-                      <a:headEnd type="none" w="med" len="med"/>
-                      <a:tailEnd type="none" w="med" len="med"/>
-                    </a:lnB>
-                  </a:tcPr>
+                <a:tc hMerge="1">
+                  <a:tcPr/>
+                </a:tc>
+                <a:tc hMerge="1">
+                  <a:tcPr/>
                 </a:tc>
               </a:tr>
               <a:tr h="0">
@@ -2278,61 +1812,72 @@
                     <a:bodyPr/>
                     <a:lstStyle/>
                     <a:p>
-                      <a:pPr algn="just" indent="0" marL="0">
-                        <a:buNone/>
-                      </a:pPr>
-                      <a:r>
-                        <a:rPr lang="en-US" sz="760" b="1" dirty="0">
-                          <a:solidFill>
-                            <a:schemeClr val="tx1"/>
-                          </a:solidFill>
-                          <a:latin typeface="Calibri" pitchFamily="34" charset="0"/>
-                          <a:ea typeface="Calibri" pitchFamily="34" charset="-122"/>
-                          <a:cs typeface="Calibri" pitchFamily="34" charset="-120"/>
-                        </a:rPr>
-                        <a:t>B.4  Falta de Automatización de la herramienta de validación de Listas de Cautela</a:t>
-                      </a:r>
-                      <a:endParaRPr lang="en-US" sz="760" dirty="0">
-                        <a:latin typeface="Calibri" charset="0"/>
-                        <a:ea typeface="Calibri" charset="0"/>
-                        <a:cs typeface="Calibri" charset="0"/>
-                      </a:endParaRPr>
-                    </a:p>
-                  </a:txBody>
-                  <a:tcPr marL="54864" marR="54864" marT="13716" marB="13716" anchor="ctr">
-                    <a:lnL w="0" cap="flat" cmpd="sng" algn="ctr">
-                      <a:noFill/>
-                    </a:lnL>
-                    <a:lnR w="0" cap="flat" cmpd="sng" algn="ctr">
-                      <a:noFill/>
-                    </a:lnR>
-                    <a:lnT w="0" cap="flat" cmpd="sng" algn="ctr">
-                      <a:noFill/>
-                    </a:lnT>
-                    <a:lnB w="9525" cap="flat" cmpd="sng" algn="ctr">
-                      <a:solidFill>
-                        <a:srgbClr val="D9E0EA"/>
-                      </a:solidFill>
-                      <a:prstDash val="solid"/>
-                      <a:round/>
-                      <a:headEnd type="none" w="med" len="med"/>
-                      <a:tailEnd type="none" w="med" len="med"/>
-                    </a:lnB>
-                    <a:solidFill>
-                      <a:srgbClr val="FFFFFF"/>
-                    </a:solidFill>
-                  </a:tcPr>
-                </a:tc>
-                <a:tc>
-                  <a:txBody>
-                    <a:bodyPr/>
-                    <a:lstStyle/>
-                    <a:p>
-                      <a:pPr algn="just" indent="0" marL="0">
-                        <a:buNone/>
-                      </a:pPr>
-                      <a:r>
-                        <a:rPr lang="en-US" sz="760" dirty="0">
+                      <a:pPr indent="0" marL="0">
+                        <a:buNone/>
+                      </a:pPr>
+                      <a:r>
+                        <a:rPr lang="en-US" sz="1100" b="1" dirty="0">
+                          <a:solidFill>
+                            <a:schemeClr val="accent2"/>
+                          </a:solidFill>
+                          <a:latin typeface="Calibri" pitchFamily="34" charset="0"/>
+                          <a:ea typeface="Calibri" pitchFamily="34" charset="-122"/>
+                          <a:cs typeface="Calibri" pitchFamily="34" charset="-120"/>
+                        </a:rPr>
+                        <a:t>B.1  </a:t>
+                      </a:r>
+                      <a:pPr indent="0" marL="0">
+                        <a:buNone/>
+                      </a:pPr>
+                      <a:r>
+                        <a:rPr lang="en-US" sz="1100" b="1" dirty="0">
+                          <a:solidFill>
+                            <a:schemeClr val="tx1"/>
+                          </a:solidFill>
+                          <a:latin typeface="Calibri" pitchFamily="34" charset="0"/>
+                          <a:ea typeface="Calibri" pitchFamily="34" charset="-122"/>
+                          <a:cs typeface="Calibri" pitchFamily="34" charset="-120"/>
+                        </a:rPr>
+                        <a:t>Falta de actualización de Metodología y matriz de riesgo LA/FT/FPADM de la Entidad</a:t>
+                      </a:r>
+                      <a:endParaRPr lang="en-US" sz="1100" dirty="0">
+                        <a:latin typeface="Calibri" charset="0"/>
+                        <a:ea typeface="Calibri" charset="0"/>
+                        <a:cs typeface="Calibri" charset="0"/>
+                      </a:endParaRPr>
+                    </a:p>
+                  </a:txBody>
+                  <a:tcPr marL="54864" marR="54864" marT="18288" marB="18288" anchor="ctr">
+                    <a:lnL w="0" cap="flat" cmpd="sng" algn="ctr">
+                      <a:noFill/>
+                    </a:lnL>
+                    <a:lnR w="0" cap="flat" cmpd="sng" algn="ctr">
+                      <a:noFill/>
+                    </a:lnR>
+                    <a:lnT w="0" cap="flat" cmpd="sng" algn="ctr">
+                      <a:noFill/>
+                    </a:lnT>
+                    <a:lnB w="9525" cap="flat" cmpd="sng" algn="ctr">
+                      <a:solidFill>
+                        <a:srgbClr val="D9E0EA"/>
+                      </a:solidFill>
+                      <a:prstDash val="solid"/>
+                      <a:round/>
+                      <a:headEnd type="none" w="med" len="med"/>
+                      <a:tailEnd type="none" w="med" len="med"/>
+                    </a:lnB>
+                  </a:tcPr>
+                </a:tc>
+                <a:tc>
+                  <a:txBody>
+                    <a:bodyPr/>
+                    <a:lstStyle/>
+                    <a:p>
+                      <a:pPr indent="0" marL="0">
+                        <a:buNone/>
+                      </a:pPr>
+                      <a:r>
+                        <a:rPr lang="en-US" sz="1100" dirty="0">
                           <a:solidFill>
                             <a:schemeClr val="tx1"/>
                           </a:solidFill>
@@ -2342,44 +1887,44 @@
                         </a:rPr>
                         <a:t>Pendiente</a:t>
                       </a:r>
-                      <a:endParaRPr lang="en-US" sz="760" dirty="0">
-                        <a:latin typeface="Calibri" charset="0"/>
-                        <a:ea typeface="Calibri" charset="0"/>
-                        <a:cs typeface="Calibri" charset="0"/>
-                      </a:endParaRPr>
-                    </a:p>
-                  </a:txBody>
-                  <a:tcPr marL="54864" marR="54864" marT="13716" marB="13716" anchor="ctr">
-                    <a:lnL w="0" cap="flat" cmpd="sng" algn="ctr">
-                      <a:noFill/>
-                    </a:lnL>
-                    <a:lnR w="0" cap="flat" cmpd="sng" algn="ctr">
-                      <a:noFill/>
-                    </a:lnR>
-                    <a:lnT w="0" cap="flat" cmpd="sng" algn="ctr">
-                      <a:noFill/>
-                    </a:lnT>
-                    <a:lnB w="9525" cap="flat" cmpd="sng" algn="ctr">
-                      <a:solidFill>
-                        <a:srgbClr val="D9E0EA"/>
-                      </a:solidFill>
-                      <a:prstDash val="solid"/>
-                      <a:round/>
-                      <a:headEnd type="none" w="med" len="med"/>
-                      <a:tailEnd type="none" w="med" len="med"/>
-                    </a:lnB>
-                  </a:tcPr>
-                </a:tc>
-                <a:tc>
-                  <a:txBody>
-                    <a:bodyPr/>
-                    <a:lstStyle/>
-                    <a:p>
-                      <a:pPr algn="l" indent="0" marL="0">
-                        <a:buNone/>
-                      </a:pPr>
-                      <a:r>
-                        <a:rPr lang="en-US" sz="760" b="1" dirty="0">
+                      <a:endParaRPr lang="en-US" sz="1100" dirty="0">
+                        <a:latin typeface="Calibri" charset="0"/>
+                        <a:ea typeface="Calibri" charset="0"/>
+                        <a:cs typeface="Calibri" charset="0"/>
+                      </a:endParaRPr>
+                    </a:p>
+                  </a:txBody>
+                  <a:tcPr marL="54864" marR="54864" marT="18288" marB="18288" anchor="ctr">
+                    <a:lnL w="0" cap="flat" cmpd="sng" algn="ctr">
+                      <a:noFill/>
+                    </a:lnL>
+                    <a:lnR w="0" cap="flat" cmpd="sng" algn="ctr">
+                      <a:noFill/>
+                    </a:lnR>
+                    <a:lnT w="0" cap="flat" cmpd="sng" algn="ctr">
+                      <a:noFill/>
+                    </a:lnT>
+                    <a:lnB w="9525" cap="flat" cmpd="sng" algn="ctr">
+                      <a:solidFill>
+                        <a:srgbClr val="D9E0EA"/>
+                      </a:solidFill>
+                      <a:prstDash val="solid"/>
+                      <a:round/>
+                      <a:headEnd type="none" w="med" len="med"/>
+                      <a:tailEnd type="none" w="med" len="med"/>
+                    </a:lnB>
+                  </a:tcPr>
+                </a:tc>
+                <a:tc>
+                  <a:txBody>
+                    <a:bodyPr/>
+                    <a:lstStyle/>
+                    <a:p>
+                      <a:pPr indent="0" marL="0">
+                        <a:buNone/>
+                      </a:pPr>
+                      <a:r>
+                        <a:rPr lang="en-US" sz="1100" b="1" dirty="0">
                           <a:solidFill>
                             <a:schemeClr val="accent1"/>
                           </a:solidFill>
@@ -2389,14 +1934,14 @@
                         </a:rPr>
                         <a:t>Gerencia de Cumplimiento</a:t>
                       </a:r>
-                      <a:endParaRPr lang="en-US" sz="760" dirty="0">
-                        <a:latin typeface="Calibri" charset="0"/>
-                        <a:ea typeface="Calibri" charset="0"/>
-                        <a:cs typeface="Calibri" charset="0"/>
-                      </a:endParaRPr>
-                    </a:p>
-                  </a:txBody>
-                  <a:tcPr marL="54864" marR="54864" marT="13716" marB="13716" anchor="ctr">
+                      <a:endParaRPr lang="en-US" sz="1100" dirty="0">
+                        <a:latin typeface="Calibri" charset="0"/>
+                        <a:ea typeface="Calibri" charset="0"/>
+                        <a:cs typeface="Calibri" charset="0"/>
+                      </a:endParaRPr>
+                    </a:p>
+                  </a:txBody>
+                  <a:tcPr marL="54864" marR="54864" marT="18288" marB="18288" anchor="ctr">
                     <a:lnL w="0" cap="flat" cmpd="sng" algn="ctr">
                       <a:noFill/>
                     </a:lnL>
@@ -2424,61 +1969,72 @@
                     <a:bodyPr/>
                     <a:lstStyle/>
                     <a:p>
-                      <a:pPr algn="just" indent="0" marL="0">
-                        <a:buNone/>
-                      </a:pPr>
-                      <a:r>
-                        <a:rPr lang="en-US" sz="760" b="1" dirty="0">
-                          <a:solidFill>
-                            <a:schemeClr val="tx1"/>
-                          </a:solidFill>
-                          <a:latin typeface="Calibri" pitchFamily="34" charset="0"/>
-                          <a:ea typeface="Calibri" pitchFamily="34" charset="-122"/>
-                          <a:cs typeface="Calibri" pitchFamily="34" charset="-120"/>
-                        </a:rPr>
-                        <a:t>B.5  Falta de evidencia en los porcentajes de avance comunicados en el cronograma</a:t>
-                      </a:r>
-                      <a:endParaRPr lang="en-US" sz="760" dirty="0">
-                        <a:latin typeface="Calibri" charset="0"/>
-                        <a:ea typeface="Calibri" charset="0"/>
-                        <a:cs typeface="Calibri" charset="0"/>
-                      </a:endParaRPr>
-                    </a:p>
-                  </a:txBody>
-                  <a:tcPr marL="54864" marR="54864" marT="13716" marB="13716" anchor="ctr">
-                    <a:lnL w="0" cap="flat" cmpd="sng" algn="ctr">
-                      <a:noFill/>
-                    </a:lnL>
-                    <a:lnR w="0" cap="flat" cmpd="sng" algn="ctr">
-                      <a:noFill/>
-                    </a:lnR>
-                    <a:lnT w="0" cap="flat" cmpd="sng" algn="ctr">
-                      <a:noFill/>
-                    </a:lnT>
-                    <a:lnB w="9525" cap="flat" cmpd="sng" algn="ctr">
-                      <a:solidFill>
-                        <a:srgbClr val="D9E0EA"/>
-                      </a:solidFill>
-                      <a:prstDash val="solid"/>
-                      <a:round/>
-                      <a:headEnd type="none" w="med" len="med"/>
-                      <a:tailEnd type="none" w="med" len="med"/>
-                    </a:lnB>
-                    <a:solidFill>
-                      <a:srgbClr val="FFFFFF"/>
-                    </a:solidFill>
-                  </a:tcPr>
-                </a:tc>
-                <a:tc>
-                  <a:txBody>
-                    <a:bodyPr/>
-                    <a:lstStyle/>
-                    <a:p>
-                      <a:pPr algn="just" indent="0" marL="0">
-                        <a:buNone/>
-                      </a:pPr>
-                      <a:r>
-                        <a:rPr lang="en-US" sz="760" dirty="0">
+                      <a:pPr indent="0" marL="0">
+                        <a:buNone/>
+                      </a:pPr>
+                      <a:r>
+                        <a:rPr lang="en-US" sz="1100" b="1" dirty="0">
+                          <a:solidFill>
+                            <a:schemeClr val="accent2"/>
+                          </a:solidFill>
+                          <a:latin typeface="Calibri" pitchFamily="34" charset="0"/>
+                          <a:ea typeface="Calibri" pitchFamily="34" charset="-122"/>
+                          <a:cs typeface="Calibri" pitchFamily="34" charset="-120"/>
+                        </a:rPr>
+                        <a:t>B.2  </a:t>
+                      </a:r>
+                      <a:pPr indent="0" marL="0">
+                        <a:buNone/>
+                      </a:pPr>
+                      <a:r>
+                        <a:rPr lang="en-US" sz="1100" b="1" dirty="0">
+                          <a:solidFill>
+                            <a:schemeClr val="tx1"/>
+                          </a:solidFill>
+                          <a:latin typeface="Calibri" pitchFamily="34" charset="0"/>
+                          <a:ea typeface="Calibri" pitchFamily="34" charset="-122"/>
+                          <a:cs typeface="Calibri" pitchFamily="34" charset="-120"/>
+                        </a:rPr>
+                        <a:t>Falta de actualización de Metodología y matriz de riesgo LA/FT/FPADM Clientes o asociados</a:t>
+                      </a:r>
+                      <a:endParaRPr lang="en-US" sz="1100" dirty="0">
+                        <a:latin typeface="Calibri" charset="0"/>
+                        <a:ea typeface="Calibri" charset="0"/>
+                        <a:cs typeface="Calibri" charset="0"/>
+                      </a:endParaRPr>
+                    </a:p>
+                  </a:txBody>
+                  <a:tcPr marL="54864" marR="54864" marT="18288" marB="18288" anchor="ctr">
+                    <a:lnL w="0" cap="flat" cmpd="sng" algn="ctr">
+                      <a:noFill/>
+                    </a:lnL>
+                    <a:lnR w="0" cap="flat" cmpd="sng" algn="ctr">
+                      <a:noFill/>
+                    </a:lnR>
+                    <a:lnT w="0" cap="flat" cmpd="sng" algn="ctr">
+                      <a:noFill/>
+                    </a:lnT>
+                    <a:lnB w="9525" cap="flat" cmpd="sng" algn="ctr">
+                      <a:solidFill>
+                        <a:srgbClr val="D9E0EA"/>
+                      </a:solidFill>
+                      <a:prstDash val="solid"/>
+                      <a:round/>
+                      <a:headEnd type="none" w="med" len="med"/>
+                      <a:tailEnd type="none" w="med" len="med"/>
+                    </a:lnB>
+                  </a:tcPr>
+                </a:tc>
+                <a:tc>
+                  <a:txBody>
+                    <a:bodyPr/>
+                    <a:lstStyle/>
+                    <a:p>
+                      <a:pPr indent="0" marL="0">
+                        <a:buNone/>
+                      </a:pPr>
+                      <a:r>
+                        <a:rPr lang="en-US" sz="1100" dirty="0">
                           <a:solidFill>
                             <a:schemeClr val="tx1"/>
                           </a:solidFill>
@@ -2488,44 +2044,44 @@
                         </a:rPr>
                         <a:t>Pendiente</a:t>
                       </a:r>
-                      <a:endParaRPr lang="en-US" sz="760" dirty="0">
-                        <a:latin typeface="Calibri" charset="0"/>
-                        <a:ea typeface="Calibri" charset="0"/>
-                        <a:cs typeface="Calibri" charset="0"/>
-                      </a:endParaRPr>
-                    </a:p>
-                  </a:txBody>
-                  <a:tcPr marL="54864" marR="54864" marT="13716" marB="13716" anchor="ctr">
-                    <a:lnL w="0" cap="flat" cmpd="sng" algn="ctr">
-                      <a:noFill/>
-                    </a:lnL>
-                    <a:lnR w="0" cap="flat" cmpd="sng" algn="ctr">
-                      <a:noFill/>
-                    </a:lnR>
-                    <a:lnT w="0" cap="flat" cmpd="sng" algn="ctr">
-                      <a:noFill/>
-                    </a:lnT>
-                    <a:lnB w="9525" cap="flat" cmpd="sng" algn="ctr">
-                      <a:solidFill>
-                        <a:srgbClr val="D9E0EA"/>
-                      </a:solidFill>
-                      <a:prstDash val="solid"/>
-                      <a:round/>
-                      <a:headEnd type="none" w="med" len="med"/>
-                      <a:tailEnd type="none" w="med" len="med"/>
-                    </a:lnB>
-                  </a:tcPr>
-                </a:tc>
-                <a:tc>
-                  <a:txBody>
-                    <a:bodyPr/>
-                    <a:lstStyle/>
-                    <a:p>
-                      <a:pPr algn="l" indent="0" marL="0">
-                        <a:buNone/>
-                      </a:pPr>
-                      <a:r>
-                        <a:rPr lang="en-US" sz="760" b="1" dirty="0">
+                      <a:endParaRPr lang="en-US" sz="1100" dirty="0">
+                        <a:latin typeface="Calibri" charset="0"/>
+                        <a:ea typeface="Calibri" charset="0"/>
+                        <a:cs typeface="Calibri" charset="0"/>
+                      </a:endParaRPr>
+                    </a:p>
+                  </a:txBody>
+                  <a:tcPr marL="54864" marR="54864" marT="18288" marB="18288" anchor="ctr">
+                    <a:lnL w="0" cap="flat" cmpd="sng" algn="ctr">
+                      <a:noFill/>
+                    </a:lnL>
+                    <a:lnR w="0" cap="flat" cmpd="sng" algn="ctr">
+                      <a:noFill/>
+                    </a:lnR>
+                    <a:lnT w="0" cap="flat" cmpd="sng" algn="ctr">
+                      <a:noFill/>
+                    </a:lnT>
+                    <a:lnB w="9525" cap="flat" cmpd="sng" algn="ctr">
+                      <a:solidFill>
+                        <a:srgbClr val="D9E0EA"/>
+                      </a:solidFill>
+                      <a:prstDash val="solid"/>
+                      <a:round/>
+                      <a:headEnd type="none" w="med" len="med"/>
+                      <a:tailEnd type="none" w="med" len="med"/>
+                    </a:lnB>
+                  </a:tcPr>
+                </a:tc>
+                <a:tc>
+                  <a:txBody>
+                    <a:bodyPr/>
+                    <a:lstStyle/>
+                    <a:p>
+                      <a:pPr indent="0" marL="0">
+                        <a:buNone/>
+                      </a:pPr>
+                      <a:r>
+                        <a:rPr lang="en-US" sz="1100" b="1" dirty="0">
                           <a:solidFill>
                             <a:schemeClr val="accent1"/>
                           </a:solidFill>
@@ -2535,14 +2091,14 @@
                         </a:rPr>
                         <a:t>Gerencia de Cumplimiento</a:t>
                       </a:r>
-                      <a:endParaRPr lang="en-US" sz="760" dirty="0">
-                        <a:latin typeface="Calibri" charset="0"/>
-                        <a:ea typeface="Calibri" charset="0"/>
-                        <a:cs typeface="Calibri" charset="0"/>
-                      </a:endParaRPr>
-                    </a:p>
-                  </a:txBody>
-                  <a:tcPr marL="54864" marR="54864" marT="13716" marB="13716" anchor="ctr">
+                      <a:endParaRPr lang="en-US" sz="1100" dirty="0">
+                        <a:latin typeface="Calibri" charset="0"/>
+                        <a:ea typeface="Calibri" charset="0"/>
+                        <a:cs typeface="Calibri" charset="0"/>
+                      </a:endParaRPr>
+                    </a:p>
+                  </a:txBody>
+                  <a:tcPr marL="54864" marR="54864" marT="18288" marB="18288" anchor="ctr">
                     <a:lnL w="0" cap="flat" cmpd="sng" algn="ctr">
                       <a:noFill/>
                     </a:lnL>
@@ -2570,108 +2126,119 @@
                     <a:bodyPr/>
                     <a:lstStyle/>
                     <a:p>
-                      <a:pPr algn="just" indent="0" marL="0">
-                        <a:buNone/>
-                      </a:pPr>
-                      <a:r>
-                        <a:rPr lang="en-US" sz="760" b="1" dirty="0">
-                          <a:solidFill>
-                            <a:schemeClr val="tx1"/>
-                          </a:solidFill>
-                          <a:latin typeface="Calibri" pitchFamily="34" charset="0"/>
-                          <a:ea typeface="Calibri" pitchFamily="34" charset="-122"/>
-                          <a:cs typeface="Calibri" pitchFamily="34" charset="-120"/>
-                        </a:rPr>
-                        <a:t>B.6  Revisión documentación conforme artículo22 de la NRP-23</a:t>
-                      </a:r>
-                      <a:endParaRPr lang="en-US" sz="760" dirty="0">
-                        <a:latin typeface="Calibri" charset="0"/>
-                        <a:ea typeface="Calibri" charset="0"/>
-                        <a:cs typeface="Calibri" charset="0"/>
-                      </a:endParaRPr>
-                    </a:p>
-                  </a:txBody>
-                  <a:tcPr marL="54864" marR="54864" marT="13716" marB="13716" anchor="ctr">
-                    <a:lnL w="0" cap="flat" cmpd="sng" algn="ctr">
-                      <a:noFill/>
-                    </a:lnL>
-                    <a:lnR w="0" cap="flat" cmpd="sng" algn="ctr">
-                      <a:noFill/>
-                    </a:lnR>
-                    <a:lnT w="0" cap="flat" cmpd="sng" algn="ctr">
-                      <a:noFill/>
-                    </a:lnT>
-                    <a:lnB w="9525" cap="flat" cmpd="sng" algn="ctr">
-                      <a:solidFill>
-                        <a:srgbClr val="D9E0EA"/>
-                      </a:solidFill>
-                      <a:prstDash val="solid"/>
-                      <a:round/>
-                      <a:headEnd type="none" w="med" len="med"/>
-                      <a:tailEnd type="none" w="med" len="med"/>
-                    </a:lnB>
-                    <a:solidFill>
-                      <a:srgbClr val="FFFFFF"/>
-                    </a:solidFill>
-                  </a:tcPr>
-                </a:tc>
-                <a:tc>
-                  <a:txBody>
-                    <a:bodyPr/>
-                    <a:lstStyle/>
-                    <a:p>
-                      <a:pPr algn="just" indent="0" marL="0">
-                        <a:buNone/>
-                      </a:pPr>
-                      <a:r>
-                        <a:rPr lang="en-US" sz="760" dirty="0">
-                          <a:solidFill>
-                            <a:schemeClr val="tx1"/>
-                          </a:solidFill>
-                          <a:latin typeface="Calibri" pitchFamily="34" charset="0"/>
-                          <a:ea typeface="Calibri" pitchFamily="34" charset="-122"/>
-                          <a:cs typeface="Calibri" pitchFamily="34" charset="-120"/>
-                        </a:rPr>
-                        <a:t>Se anexa informe elaborado en fecha 13 de diciembre de 2024, sobre proyecto de implementación de un nuevo sistema de monitoreo de LDA/FT/FPADM y del sistema de fraude de canales digitales.</a:t>
-                      </a:r>
-                      <a:endParaRPr lang="en-US" sz="760" dirty="0">
-                        <a:latin typeface="Calibri" charset="0"/>
-                        <a:ea typeface="Calibri" charset="0"/>
-                        <a:cs typeface="Calibri" charset="0"/>
-                      </a:endParaRPr>
-                    </a:p>
-                  </a:txBody>
-                  <a:tcPr marL="54864" marR="54864" marT="13716" marB="13716" anchor="ctr">
-                    <a:lnL w="0" cap="flat" cmpd="sng" algn="ctr">
-                      <a:noFill/>
-                    </a:lnL>
-                    <a:lnR w="0" cap="flat" cmpd="sng" algn="ctr">
-                      <a:noFill/>
-                    </a:lnR>
-                    <a:lnT w="0" cap="flat" cmpd="sng" algn="ctr">
-                      <a:noFill/>
-                    </a:lnT>
-                    <a:lnB w="9525" cap="flat" cmpd="sng" algn="ctr">
-                      <a:solidFill>
-                        <a:srgbClr val="D9E0EA"/>
-                      </a:solidFill>
-                      <a:prstDash val="solid"/>
-                      <a:round/>
-                      <a:headEnd type="none" w="med" len="med"/>
-                      <a:tailEnd type="none" w="med" len="med"/>
-                    </a:lnB>
-                  </a:tcPr>
-                </a:tc>
-                <a:tc>
-                  <a:txBody>
-                    <a:bodyPr/>
-                    <a:lstStyle/>
-                    <a:p>
-                      <a:pPr algn="l" indent="0" marL="0">
-                        <a:buNone/>
-                      </a:pPr>
-                      <a:r>
-                        <a:rPr lang="en-US" sz="760" b="1" dirty="0">
+                      <a:pPr indent="0" marL="0">
+                        <a:buNone/>
+                      </a:pPr>
+                      <a:r>
+                        <a:rPr lang="en-US" sz="1100" b="1" dirty="0">
+                          <a:solidFill>
+                            <a:schemeClr val="accent2"/>
+                          </a:solidFill>
+                          <a:latin typeface="Calibri" pitchFamily="34" charset="0"/>
+                          <a:ea typeface="Calibri" pitchFamily="34" charset="-122"/>
+                          <a:cs typeface="Calibri" pitchFamily="34" charset="-120"/>
+                        </a:rPr>
+                        <a:t>B.3  </a:t>
+                      </a:r>
+                      <a:pPr indent="0" marL="0">
+                        <a:buNone/>
+                      </a:pPr>
+                      <a:r>
+                        <a:rPr lang="en-US" sz="1100" b="1" dirty="0">
+                          <a:solidFill>
+                            <a:schemeClr val="tx1"/>
+                          </a:solidFill>
+                          <a:latin typeface="Calibri" pitchFamily="34" charset="0"/>
+                          <a:ea typeface="Calibri" pitchFamily="34" charset="-122"/>
+                          <a:cs typeface="Calibri" pitchFamily="34" charset="-120"/>
+                        </a:rPr>
+                        <a:t>Falta de automatización en el proceso de remisión de reportería regulada a la Web Service de UIF.</a:t>
+                      </a:r>
+                      <a:endParaRPr lang="en-US" sz="1100" dirty="0">
+                        <a:latin typeface="Calibri" charset="0"/>
+                        <a:ea typeface="Calibri" charset="0"/>
+                        <a:cs typeface="Calibri" charset="0"/>
+                      </a:endParaRPr>
+                    </a:p>
+                  </a:txBody>
+                  <a:tcPr marL="54864" marR="54864" marT="18288" marB="18288" anchor="ctr">
+                    <a:lnL w="0" cap="flat" cmpd="sng" algn="ctr">
+                      <a:noFill/>
+                    </a:lnL>
+                    <a:lnR w="0" cap="flat" cmpd="sng" algn="ctr">
+                      <a:noFill/>
+                    </a:lnR>
+                    <a:lnT w="0" cap="flat" cmpd="sng" algn="ctr">
+                      <a:noFill/>
+                    </a:lnT>
+                    <a:lnB w="9525" cap="flat" cmpd="sng" algn="ctr">
+                      <a:solidFill>
+                        <a:srgbClr val="D9E0EA"/>
+                      </a:solidFill>
+                      <a:prstDash val="solid"/>
+                      <a:round/>
+                      <a:headEnd type="none" w="med" len="med"/>
+                      <a:tailEnd type="none" w="med" len="med"/>
+                    </a:lnB>
+                  </a:tcPr>
+                </a:tc>
+                <a:tc>
+                  <a:txBody>
+                    <a:bodyPr/>
+                    <a:lstStyle/>
+                    <a:p>
+                      <a:pPr indent="0" marL="0">
+                        <a:buNone/>
+                      </a:pPr>
+                      <a:r>
+                        <a:rPr lang="en-US" sz="1100" dirty="0">
+                          <a:solidFill>
+                            <a:schemeClr val="tx1"/>
+                          </a:solidFill>
+                          <a:latin typeface="Calibri" pitchFamily="34" charset="0"/>
+                          <a:ea typeface="Calibri" pitchFamily="34" charset="-122"/>
+                          <a:cs typeface="Calibri" pitchFamily="34" charset="-120"/>
+                        </a:rPr>
+                        <a:t>Pendiente</a:t>
+                      </a:r>
+                      <a:endParaRPr lang="en-US" sz="1100" dirty="0">
+                        <a:latin typeface="Calibri" charset="0"/>
+                        <a:ea typeface="Calibri" charset="0"/>
+                        <a:cs typeface="Calibri" charset="0"/>
+                      </a:endParaRPr>
+                    </a:p>
+                  </a:txBody>
+                  <a:tcPr marL="54864" marR="54864" marT="18288" marB="18288" anchor="ctr">
+                    <a:lnL w="0" cap="flat" cmpd="sng" algn="ctr">
+                      <a:noFill/>
+                    </a:lnL>
+                    <a:lnR w="0" cap="flat" cmpd="sng" algn="ctr">
+                      <a:noFill/>
+                    </a:lnR>
+                    <a:lnT w="0" cap="flat" cmpd="sng" algn="ctr">
+                      <a:noFill/>
+                    </a:lnT>
+                    <a:lnB w="9525" cap="flat" cmpd="sng" algn="ctr">
+                      <a:solidFill>
+                        <a:srgbClr val="D9E0EA"/>
+                      </a:solidFill>
+                      <a:prstDash val="solid"/>
+                      <a:round/>
+                      <a:headEnd type="none" w="med" len="med"/>
+                      <a:tailEnd type="none" w="med" len="med"/>
+                    </a:lnB>
+                  </a:tcPr>
+                </a:tc>
+                <a:tc>
+                  <a:txBody>
+                    <a:bodyPr/>
+                    <a:lstStyle/>
+                    <a:p>
+                      <a:pPr indent="0" marL="0">
+                        <a:buNone/>
+                      </a:pPr>
+                      <a:r>
+                        <a:rPr lang="en-US" sz="1100" b="1" dirty="0">
                           <a:solidFill>
                             <a:schemeClr val="accent1"/>
                           </a:solidFill>
@@ -2679,16 +2246,16 @@
                           <a:ea typeface="Calibri" pitchFamily="34" charset="-122"/>
                           <a:cs typeface="Calibri" pitchFamily="34" charset="-120"/>
                         </a:rPr>
-                        <a:t>Jefe de Riesgos</a:t>
-                      </a:r>
-                      <a:endParaRPr lang="en-US" sz="760" dirty="0">
-                        <a:latin typeface="Calibri" charset="0"/>
-                        <a:ea typeface="Calibri" charset="0"/>
-                        <a:cs typeface="Calibri" charset="0"/>
-                      </a:endParaRPr>
-                    </a:p>
-                  </a:txBody>
-                  <a:tcPr marL="54864" marR="54864" marT="13716" marB="13716" anchor="ctr">
+                        <a:t>Gerencia de Cumplimiento</a:t>
+                      </a:r>
+                      <a:endParaRPr lang="en-US" sz="1100" dirty="0">
+                        <a:latin typeface="Calibri" charset="0"/>
+                        <a:ea typeface="Calibri" charset="0"/>
+                        <a:cs typeface="Calibri" charset="0"/>
+                      </a:endParaRPr>
+                    </a:p>
+                  </a:txBody>
+                  <a:tcPr marL="54864" marR="54864" marT="18288" marB="18288" anchor="ctr">
                     <a:lnL w="0" cap="flat" cmpd="sng" algn="ctr">
                       <a:noFill/>
                     </a:lnL>
@@ -2716,82 +2283,72 @@
                     <a:bodyPr/>
                     <a:lstStyle/>
                     <a:p>
-                      <a:pPr algn="just" indent="0" marL="0">
-                        <a:buNone/>
-                      </a:pPr>
-                      <a:r>
-                        <a:rPr lang="en-US" sz="760" b="1" dirty="0">
-                          <a:solidFill>
-                            <a:schemeClr val="tx1"/>
-                          </a:solidFill>
-                          <a:latin typeface="Calibri" pitchFamily="34" charset="0"/>
-                          <a:ea typeface="Calibri" pitchFamily="34" charset="-122"/>
-                          <a:cs typeface="Calibri" pitchFamily="34" charset="-120"/>
-                        </a:rPr>
-                        <a:t>B.7  Debilidades en el contrato del servicio de software</a:t>
-                      </a:r>
-                      <a:endParaRPr lang="en-US" sz="760" dirty="0">
-                        <a:latin typeface="Calibri" charset="0"/>
-                        <a:ea typeface="Calibri" charset="0"/>
-                        <a:cs typeface="Calibri" charset="0"/>
-                      </a:endParaRPr>
-                    </a:p>
-                  </a:txBody>
-                  <a:tcPr marL="54864" marR="54864" marT="13716" marB="13716" anchor="ctr">
-                    <a:lnL w="0" cap="flat" cmpd="sng" algn="ctr">
-                      <a:noFill/>
-                    </a:lnL>
-                    <a:lnR w="0" cap="flat" cmpd="sng" algn="ctr">
-                      <a:noFill/>
-                    </a:lnR>
-                    <a:lnT w="0" cap="flat" cmpd="sng" algn="ctr">
-                      <a:noFill/>
-                    </a:lnT>
-                    <a:lnB w="9525" cap="flat" cmpd="sng" algn="ctr">
-                      <a:solidFill>
-                        <a:srgbClr val="D9E0EA"/>
-                      </a:solidFill>
-                      <a:prstDash val="solid"/>
-                      <a:round/>
-                      <a:headEnd type="none" w="med" len="med"/>
-                      <a:tailEnd type="none" w="med" len="med"/>
-                    </a:lnB>
-                    <a:solidFill>
-                      <a:srgbClr val="FFFFFF"/>
-                    </a:solidFill>
-                  </a:tcPr>
-                </a:tc>
-                <a:tc>
-                  <a:txBody>
-                    <a:bodyPr/>
-                    <a:lstStyle/>
-                    <a:p>
-                      <a:pPr algn="just" indent="0" marL="0">
-                        <a:buNone/>
-                      </a:pPr>
-                      <a:r>
-                        <a:rPr lang="en-US" sz="760" dirty="0">
-                          <a:solidFill>
-                            <a:schemeClr val="tx1"/>
-                          </a:solidFill>
-                          <a:latin typeface="Calibri" pitchFamily="34" charset="0"/>
-                          <a:ea typeface="Calibri" pitchFamily="34" charset="-122"/>
-                          <a:cs typeface="Calibri" pitchFamily="34" charset="-120"/>
-                        </a:rPr>
-                        <a:t>Se adjuntará la propuesta de la Gerencia Legal por medio de correo de fecha 09 de octubre 2026, envió propuesta a la Gerencia de Cumplimiento y Seguridad de la Información para la modificación del contrato.</a:t>
-                      </a:r>
-                      <a:endParaRPr lang="en-US" sz="760" dirty="0">
-                        <a:latin typeface="Calibri" charset="0"/>
-                        <a:ea typeface="Calibri" charset="0"/>
-                        <a:cs typeface="Calibri" charset="0"/>
-                      </a:endParaRPr>
-                    </a:p>
-                    <a:p>
-                      <a:pPr algn="just" indent="0" marL="0">
-                        <a:buNone/>
-                      </a:pPr>
-                      <a:r>
-                        <a:rPr lang="en-US" sz="760" dirty="0">
+                      <a:pPr indent="0" marL="0">
+                        <a:buNone/>
+                      </a:pPr>
+                      <a:r>
+                        <a:rPr lang="en-US" sz="1100" b="1" dirty="0">
+                          <a:solidFill>
+                            <a:schemeClr val="accent2"/>
+                          </a:solidFill>
+                          <a:latin typeface="Calibri" pitchFamily="34" charset="0"/>
+                          <a:ea typeface="Calibri" pitchFamily="34" charset="-122"/>
+                          <a:cs typeface="Calibri" pitchFamily="34" charset="-120"/>
+                        </a:rPr>
+                        <a:t>B.4  </a:t>
+                      </a:r>
+                      <a:pPr indent="0" marL="0">
+                        <a:buNone/>
+                      </a:pPr>
+                      <a:r>
+                        <a:rPr lang="en-US" sz="1100" b="1" dirty="0">
+                          <a:solidFill>
+                            <a:schemeClr val="tx1"/>
+                          </a:solidFill>
+                          <a:latin typeface="Calibri" pitchFamily="34" charset="0"/>
+                          <a:ea typeface="Calibri" pitchFamily="34" charset="-122"/>
+                          <a:cs typeface="Calibri" pitchFamily="34" charset="-120"/>
+                        </a:rPr>
+                        <a:t>Falta de Automatización de la herramienta de validación de Listas de Cautela</a:t>
+                      </a:r>
+                      <a:endParaRPr lang="en-US" sz="1100" dirty="0">
+                        <a:latin typeface="Calibri" charset="0"/>
+                        <a:ea typeface="Calibri" charset="0"/>
+                        <a:cs typeface="Calibri" charset="0"/>
+                      </a:endParaRPr>
+                    </a:p>
+                  </a:txBody>
+                  <a:tcPr marL="54864" marR="54864" marT="18288" marB="18288" anchor="ctr">
+                    <a:lnL w="0" cap="flat" cmpd="sng" algn="ctr">
+                      <a:noFill/>
+                    </a:lnL>
+                    <a:lnR w="0" cap="flat" cmpd="sng" algn="ctr">
+                      <a:noFill/>
+                    </a:lnR>
+                    <a:lnT w="0" cap="flat" cmpd="sng" algn="ctr">
+                      <a:noFill/>
+                    </a:lnT>
+                    <a:lnB w="9525" cap="flat" cmpd="sng" algn="ctr">
+                      <a:solidFill>
+                        <a:srgbClr val="D9E0EA"/>
+                      </a:solidFill>
+                      <a:prstDash val="solid"/>
+                      <a:round/>
+                      <a:headEnd type="none" w="med" len="med"/>
+                      <a:tailEnd type="none" w="med" len="med"/>
+                    </a:lnB>
+                  </a:tcPr>
+                </a:tc>
+                <a:tc>
+                  <a:txBody>
+                    <a:bodyPr/>
+                    <a:lstStyle/>
+                    <a:p>
+                      <a:pPr indent="0" marL="0">
+                        <a:buNone/>
+                      </a:pPr>
+                      <a:r>
+                        <a:rPr lang="en-US" sz="1100" dirty="0">
                           <a:solidFill>
                             <a:schemeClr val="tx1"/>
                           </a:solidFill>
@@ -2801,44 +2358,44 @@
                         </a:rPr>
                         <a:t>Pendiente</a:t>
                       </a:r>
-                      <a:endParaRPr lang="en-US" sz="760" dirty="0">
-                        <a:latin typeface="Calibri" charset="0"/>
-                        <a:ea typeface="Calibri" charset="0"/>
-                        <a:cs typeface="Calibri" charset="0"/>
-                      </a:endParaRPr>
-                    </a:p>
-                  </a:txBody>
-                  <a:tcPr marL="54864" marR="54864" marT="13716" marB="13716" anchor="ctr">
-                    <a:lnL w="0" cap="flat" cmpd="sng" algn="ctr">
-                      <a:noFill/>
-                    </a:lnL>
-                    <a:lnR w="0" cap="flat" cmpd="sng" algn="ctr">
-                      <a:noFill/>
-                    </a:lnR>
-                    <a:lnT w="0" cap="flat" cmpd="sng" algn="ctr">
-                      <a:noFill/>
-                    </a:lnT>
-                    <a:lnB w="9525" cap="flat" cmpd="sng" algn="ctr">
-                      <a:solidFill>
-                        <a:srgbClr val="D9E0EA"/>
-                      </a:solidFill>
-                      <a:prstDash val="solid"/>
-                      <a:round/>
-                      <a:headEnd type="none" w="med" len="med"/>
-                      <a:tailEnd type="none" w="med" len="med"/>
-                    </a:lnB>
-                  </a:tcPr>
-                </a:tc>
-                <a:tc>
-                  <a:txBody>
-                    <a:bodyPr/>
-                    <a:lstStyle/>
-                    <a:p>
-                      <a:pPr algn="l" indent="0" marL="0">
-                        <a:buNone/>
-                      </a:pPr>
-                      <a:r>
-                        <a:rPr lang="en-US" sz="760" b="1" dirty="0">
+                      <a:endParaRPr lang="en-US" sz="1100" dirty="0">
+                        <a:latin typeface="Calibri" charset="0"/>
+                        <a:ea typeface="Calibri" charset="0"/>
+                        <a:cs typeface="Calibri" charset="0"/>
+                      </a:endParaRPr>
+                    </a:p>
+                  </a:txBody>
+                  <a:tcPr marL="54864" marR="54864" marT="18288" marB="18288" anchor="ctr">
+                    <a:lnL w="0" cap="flat" cmpd="sng" algn="ctr">
+                      <a:noFill/>
+                    </a:lnL>
+                    <a:lnR w="0" cap="flat" cmpd="sng" algn="ctr">
+                      <a:noFill/>
+                    </a:lnR>
+                    <a:lnT w="0" cap="flat" cmpd="sng" algn="ctr">
+                      <a:noFill/>
+                    </a:lnT>
+                    <a:lnB w="9525" cap="flat" cmpd="sng" algn="ctr">
+                      <a:solidFill>
+                        <a:srgbClr val="D9E0EA"/>
+                      </a:solidFill>
+                      <a:prstDash val="solid"/>
+                      <a:round/>
+                      <a:headEnd type="none" w="med" len="med"/>
+                      <a:tailEnd type="none" w="med" len="med"/>
+                    </a:lnB>
+                  </a:tcPr>
+                </a:tc>
+                <a:tc>
+                  <a:txBody>
+                    <a:bodyPr/>
+                    <a:lstStyle/>
+                    <a:p>
+                      <a:pPr indent="0" marL="0">
+                        <a:buNone/>
+                      </a:pPr>
+                      <a:r>
+                        <a:rPr lang="en-US" sz="1100" b="1" dirty="0">
                           <a:solidFill>
                             <a:schemeClr val="accent1"/>
                           </a:solidFill>
@@ -2848,35 +2405,14 @@
                         </a:rPr>
                         <a:t>Gerencia de Cumplimiento</a:t>
                       </a:r>
-                      <a:endParaRPr lang="en-US" sz="760" dirty="0">
-                        <a:latin typeface="Calibri" charset="0"/>
-                        <a:ea typeface="Calibri" charset="0"/>
-                        <a:cs typeface="Calibri" charset="0"/>
-                      </a:endParaRPr>
-                    </a:p>
-                    <a:p>
-                      <a:pPr algn="l" indent="0" marL="0">
-                        <a:buNone/>
-                      </a:pPr>
-                      <a:r>
-                        <a:rPr lang="en-US" sz="760" b="1" dirty="0">
-                          <a:solidFill>
-                            <a:schemeClr val="accent1"/>
-                          </a:solidFill>
-                          <a:latin typeface="Calibri" pitchFamily="34" charset="0"/>
-                          <a:ea typeface="Calibri" pitchFamily="34" charset="-122"/>
-                          <a:cs typeface="Calibri" pitchFamily="34" charset="-120"/>
-                        </a:rPr>
-                        <a:t>/ Gerencia Legal</a:t>
-                      </a:r>
-                      <a:endParaRPr lang="en-US" sz="760" dirty="0">
-                        <a:latin typeface="Calibri" charset="0"/>
-                        <a:ea typeface="Calibri" charset="0"/>
-                        <a:cs typeface="Calibri" charset="0"/>
-                      </a:endParaRPr>
-                    </a:p>
-                  </a:txBody>
-                  <a:tcPr marL="54864" marR="54864" marT="13716" marB="13716" anchor="ctr">
+                      <a:endParaRPr lang="en-US" sz="1100" dirty="0">
+                        <a:latin typeface="Calibri" charset="0"/>
+                        <a:ea typeface="Calibri" charset="0"/>
+                        <a:cs typeface="Calibri" charset="0"/>
+                      </a:endParaRPr>
+                    </a:p>
+                  </a:txBody>
+                  <a:tcPr marL="54864" marR="54864" marT="18288" marB="18288" anchor="ctr">
                     <a:lnL w="0" cap="flat" cmpd="sng" algn="ctr">
                       <a:noFill/>
                     </a:lnL>
@@ -2904,82 +2440,72 @@
                     <a:bodyPr/>
                     <a:lstStyle/>
                     <a:p>
-                      <a:pPr algn="just" indent="0" marL="0">
-                        <a:buNone/>
-                      </a:pPr>
-                      <a:r>
-                        <a:rPr lang="en-US" sz="760" b="1" dirty="0">
-                          <a:solidFill>
-                            <a:schemeClr val="tx1"/>
-                          </a:solidFill>
-                          <a:latin typeface="Calibri" pitchFamily="34" charset="0"/>
-                          <a:ea typeface="Calibri" pitchFamily="34" charset="-122"/>
-                          <a:cs typeface="Calibri" pitchFamily="34" charset="-120"/>
-                        </a:rPr>
-                        <a:t>B.8  Debilidad en el Alcance de las Pruebas Continuidad del Negocio</a:t>
-                      </a:r>
-                      <a:endParaRPr lang="en-US" sz="760" dirty="0">
-                        <a:latin typeface="Calibri" charset="0"/>
-                        <a:ea typeface="Calibri" charset="0"/>
-                        <a:cs typeface="Calibri" charset="0"/>
-                      </a:endParaRPr>
-                    </a:p>
-                  </a:txBody>
-                  <a:tcPr marL="54864" marR="54864" marT="13716" marB="13716" anchor="ctr">
-                    <a:lnL w="0" cap="flat" cmpd="sng" algn="ctr">
-                      <a:noFill/>
-                    </a:lnL>
-                    <a:lnR w="0" cap="flat" cmpd="sng" algn="ctr">
-                      <a:noFill/>
-                    </a:lnR>
-                    <a:lnT w="0" cap="flat" cmpd="sng" algn="ctr">
-                      <a:noFill/>
-                    </a:lnT>
-                    <a:lnB w="9525" cap="flat" cmpd="sng" algn="ctr">
-                      <a:solidFill>
-                        <a:srgbClr val="D9E0EA"/>
-                      </a:solidFill>
-                      <a:prstDash val="solid"/>
-                      <a:round/>
-                      <a:headEnd type="none" w="med" len="med"/>
-                      <a:tailEnd type="none" w="med" len="med"/>
-                    </a:lnB>
-                    <a:solidFill>
-                      <a:srgbClr val="FFFFFF"/>
-                    </a:solidFill>
-                  </a:tcPr>
-                </a:tc>
-                <a:tc>
-                  <a:txBody>
-                    <a:bodyPr/>
-                    <a:lstStyle/>
-                    <a:p>
-                      <a:pPr algn="just" indent="0" marL="0">
-                        <a:buNone/>
-                      </a:pPr>
-                      <a:r>
-                        <a:rPr lang="en-US" sz="760" dirty="0">
-                          <a:solidFill>
-                            <a:schemeClr val="tx1"/>
-                          </a:solidFill>
-                          <a:latin typeface="Calibri" pitchFamily="34" charset="0"/>
-                          <a:ea typeface="Calibri" pitchFamily="34" charset="-122"/>
-                          <a:cs typeface="Calibri" pitchFamily="34" charset="-120"/>
-                        </a:rPr>
-                        <a:t>Plan de acción: proveedor critico</a:t>
-                      </a:r>
-                      <a:endParaRPr lang="en-US" sz="760" dirty="0">
-                        <a:latin typeface="Calibri" charset="0"/>
-                        <a:ea typeface="Calibri" charset="0"/>
-                        <a:cs typeface="Calibri" charset="0"/>
-                      </a:endParaRPr>
-                    </a:p>
-                    <a:p>
-                      <a:pPr algn="just" indent="0" marL="0">
-                        <a:buNone/>
-                      </a:pPr>
-                      <a:r>
-                        <a:rPr lang="en-US" sz="760" dirty="0">
+                      <a:pPr indent="0" marL="0">
+                        <a:buNone/>
+                      </a:pPr>
+                      <a:r>
+                        <a:rPr lang="en-US" sz="1100" b="1" dirty="0">
+                          <a:solidFill>
+                            <a:schemeClr val="accent2"/>
+                          </a:solidFill>
+                          <a:latin typeface="Calibri" pitchFamily="34" charset="0"/>
+                          <a:ea typeface="Calibri" pitchFamily="34" charset="-122"/>
+                          <a:cs typeface="Calibri" pitchFamily="34" charset="-120"/>
+                        </a:rPr>
+                        <a:t>B.5  </a:t>
+                      </a:r>
+                      <a:pPr indent="0" marL="0">
+                        <a:buNone/>
+                      </a:pPr>
+                      <a:r>
+                        <a:rPr lang="en-US" sz="1100" b="1" dirty="0">
+                          <a:solidFill>
+                            <a:schemeClr val="tx1"/>
+                          </a:solidFill>
+                          <a:latin typeface="Calibri" pitchFamily="34" charset="0"/>
+                          <a:ea typeface="Calibri" pitchFamily="34" charset="-122"/>
+                          <a:cs typeface="Calibri" pitchFamily="34" charset="-120"/>
+                        </a:rPr>
+                        <a:t>Falta de evidencia en los porcentajes de avance comunicados en el cronograma</a:t>
+                      </a:r>
+                      <a:endParaRPr lang="en-US" sz="1100" dirty="0">
+                        <a:latin typeface="Calibri" charset="0"/>
+                        <a:ea typeface="Calibri" charset="0"/>
+                        <a:cs typeface="Calibri" charset="0"/>
+                      </a:endParaRPr>
+                    </a:p>
+                  </a:txBody>
+                  <a:tcPr marL="54864" marR="54864" marT="18288" marB="18288" anchor="ctr">
+                    <a:lnL w="0" cap="flat" cmpd="sng" algn="ctr">
+                      <a:noFill/>
+                    </a:lnL>
+                    <a:lnR w="0" cap="flat" cmpd="sng" algn="ctr">
+                      <a:noFill/>
+                    </a:lnR>
+                    <a:lnT w="0" cap="flat" cmpd="sng" algn="ctr">
+                      <a:noFill/>
+                    </a:lnT>
+                    <a:lnB w="9525" cap="flat" cmpd="sng" algn="ctr">
+                      <a:solidFill>
+                        <a:srgbClr val="D9E0EA"/>
+                      </a:solidFill>
+                      <a:prstDash val="solid"/>
+                      <a:round/>
+                      <a:headEnd type="none" w="med" len="med"/>
+                      <a:tailEnd type="none" w="med" len="med"/>
+                    </a:lnB>
+                  </a:tcPr>
+                </a:tc>
+                <a:tc>
+                  <a:txBody>
+                    <a:bodyPr/>
+                    <a:lstStyle/>
+                    <a:p>
+                      <a:pPr indent="0" marL="0">
+                        <a:buNone/>
+                      </a:pPr>
+                      <a:r>
+                        <a:rPr lang="en-US" sz="1100" dirty="0">
                           <a:solidFill>
                             <a:schemeClr val="tx1"/>
                           </a:solidFill>
@@ -2989,65 +2515,44 @@
                         </a:rPr>
                         <a:t>Pendiente</a:t>
                       </a:r>
-                      <a:endParaRPr lang="en-US" sz="760" dirty="0">
-                        <a:latin typeface="Calibri" charset="0"/>
-                        <a:ea typeface="Calibri" charset="0"/>
-                        <a:cs typeface="Calibri" charset="0"/>
-                      </a:endParaRPr>
-                    </a:p>
-                    <a:p>
-                      <a:pPr algn="just" indent="0" marL="0">
-                        <a:buNone/>
-                      </a:pPr>
-                      <a:r>
-                        <a:rPr lang="en-US" sz="760" dirty="0">
-                          <a:solidFill>
-                            <a:schemeClr val="tx1"/>
-                          </a:solidFill>
-                          <a:latin typeface="Calibri" pitchFamily="34" charset="0"/>
-                          <a:ea typeface="Calibri" pitchFamily="34" charset="-122"/>
-                          <a:cs typeface="Calibri" pitchFamily="34" charset="-120"/>
-                        </a:rPr>
-                        <a:t>Se identificarán los servicios tecnológicos tercerizados críticos y se incorporarán en el alcance de las pruebas de continuidad del negocio. Asimismo, se solicitarán a los proveedores los resultados y evidencias de las pruebas realizadas, con el fin de validar la efectividad de los controles implementados.</a:t>
-                      </a:r>
-                      <a:endParaRPr lang="en-US" sz="760" dirty="0">
-                        <a:latin typeface="Calibri" charset="0"/>
-                        <a:ea typeface="Calibri" charset="0"/>
-                        <a:cs typeface="Calibri" charset="0"/>
-                      </a:endParaRPr>
-                    </a:p>
-                  </a:txBody>
-                  <a:tcPr marL="54864" marR="54864" marT="13716" marB="13716" anchor="ctr">
-                    <a:lnL w="0" cap="flat" cmpd="sng" algn="ctr">
-                      <a:noFill/>
-                    </a:lnL>
-                    <a:lnR w="0" cap="flat" cmpd="sng" algn="ctr">
-                      <a:noFill/>
-                    </a:lnR>
-                    <a:lnT w="0" cap="flat" cmpd="sng" algn="ctr">
-                      <a:noFill/>
-                    </a:lnT>
-                    <a:lnB w="9525" cap="flat" cmpd="sng" algn="ctr">
-                      <a:solidFill>
-                        <a:srgbClr val="D9E0EA"/>
-                      </a:solidFill>
-                      <a:prstDash val="solid"/>
-                      <a:round/>
-                      <a:headEnd type="none" w="med" len="med"/>
-                      <a:tailEnd type="none" w="med" len="med"/>
-                    </a:lnB>
-                  </a:tcPr>
-                </a:tc>
-                <a:tc>
-                  <a:txBody>
-                    <a:bodyPr/>
-                    <a:lstStyle/>
-                    <a:p>
-                      <a:pPr algn="l" indent="0" marL="0">
-                        <a:buNone/>
-                      </a:pPr>
-                      <a:r>
-                        <a:rPr lang="en-US" sz="760" b="1" dirty="0">
+                      <a:endParaRPr lang="en-US" sz="1100" dirty="0">
+                        <a:latin typeface="Calibri" charset="0"/>
+                        <a:ea typeface="Calibri" charset="0"/>
+                        <a:cs typeface="Calibri" charset="0"/>
+                      </a:endParaRPr>
+                    </a:p>
+                  </a:txBody>
+                  <a:tcPr marL="54864" marR="54864" marT="18288" marB="18288" anchor="ctr">
+                    <a:lnL w="0" cap="flat" cmpd="sng" algn="ctr">
+                      <a:noFill/>
+                    </a:lnL>
+                    <a:lnR w="0" cap="flat" cmpd="sng" algn="ctr">
+                      <a:noFill/>
+                    </a:lnR>
+                    <a:lnT w="0" cap="flat" cmpd="sng" algn="ctr">
+                      <a:noFill/>
+                    </a:lnT>
+                    <a:lnB w="9525" cap="flat" cmpd="sng" algn="ctr">
+                      <a:solidFill>
+                        <a:srgbClr val="D9E0EA"/>
+                      </a:solidFill>
+                      <a:prstDash val="solid"/>
+                      <a:round/>
+                      <a:headEnd type="none" w="med" len="med"/>
+                      <a:tailEnd type="none" w="med" len="med"/>
+                    </a:lnB>
+                  </a:tcPr>
+                </a:tc>
+                <a:tc>
+                  <a:txBody>
+                    <a:bodyPr/>
+                    <a:lstStyle/>
+                    <a:p>
+                      <a:pPr indent="0" marL="0">
+                        <a:buNone/>
+                      </a:pPr>
+                      <a:r>
+                        <a:rPr lang="en-US" sz="1100" b="1" dirty="0">
                           <a:solidFill>
                             <a:schemeClr val="accent1"/>
                           </a:solidFill>
@@ -3055,16 +2560,16 @@
                           <a:ea typeface="Calibri" pitchFamily="34" charset="-122"/>
                           <a:cs typeface="Calibri" pitchFamily="34" charset="-120"/>
                         </a:rPr>
-                        <a:t>Administración de Riesgos/Gerencia de sistemas/Seguridad de la información</a:t>
-                      </a:r>
-                      <a:endParaRPr lang="en-US" sz="760" dirty="0">
-                        <a:latin typeface="Calibri" charset="0"/>
-                        <a:ea typeface="Calibri" charset="0"/>
-                        <a:cs typeface="Calibri" charset="0"/>
-                      </a:endParaRPr>
-                    </a:p>
-                  </a:txBody>
-                  <a:tcPr marL="54864" marR="54864" marT="13716" marB="13716" anchor="ctr">
+                        <a:t>Gerencia de Cumplimiento</a:t>
+                      </a:r>
+                      <a:endParaRPr lang="en-US" sz="1100" dirty="0">
+                        <a:latin typeface="Calibri" charset="0"/>
+                        <a:ea typeface="Calibri" charset="0"/>
+                        <a:cs typeface="Calibri" charset="0"/>
+                      </a:endParaRPr>
+                    </a:p>
+                  </a:txBody>
+                  <a:tcPr marL="54864" marR="54864" marT="18288" marB="18288" anchor="ctr">
                     <a:lnL w="0" cap="flat" cmpd="sng" algn="ctr">
                       <a:noFill/>
                     </a:lnL>
@@ -3092,129 +2597,119 @@
                     <a:bodyPr/>
                     <a:lstStyle/>
                     <a:p>
-                      <a:pPr algn="just" indent="0" marL="0">
-                        <a:buNone/>
-                      </a:pPr>
-                      <a:r>
-                        <a:rPr lang="en-US" sz="760" b="1" dirty="0">
-                          <a:solidFill>
-                            <a:schemeClr val="tx1"/>
-                          </a:solidFill>
-                          <a:latin typeface="Calibri" pitchFamily="34" charset="0"/>
-                          <a:ea typeface="Calibri" pitchFamily="34" charset="-122"/>
-                          <a:cs typeface="Calibri" pitchFamily="34" charset="-120"/>
-                        </a:rPr>
-                        <a:t>B.9  Deficiencia en los procedimientos de Respaldos.</a:t>
-                      </a:r>
-                      <a:endParaRPr lang="en-US" sz="760" dirty="0">
-                        <a:latin typeface="Calibri" charset="0"/>
-                        <a:ea typeface="Calibri" charset="0"/>
-                        <a:cs typeface="Calibri" charset="0"/>
-                      </a:endParaRPr>
-                    </a:p>
-                  </a:txBody>
-                  <a:tcPr marL="54864" marR="54864" marT="13716" marB="13716" anchor="ctr">
-                    <a:lnL w="0" cap="flat" cmpd="sng" algn="ctr">
-                      <a:noFill/>
-                    </a:lnL>
-                    <a:lnR w="0" cap="flat" cmpd="sng" algn="ctr">
-                      <a:noFill/>
-                    </a:lnR>
-                    <a:lnT w="0" cap="flat" cmpd="sng" algn="ctr">
-                      <a:noFill/>
-                    </a:lnT>
-                    <a:lnB w="9525" cap="flat" cmpd="sng" algn="ctr">
-                      <a:solidFill>
-                        <a:srgbClr val="D9E0EA"/>
-                      </a:solidFill>
-                      <a:prstDash val="solid"/>
-                      <a:round/>
-                      <a:headEnd type="none" w="med" len="med"/>
-                      <a:tailEnd type="none" w="med" len="med"/>
-                    </a:lnB>
-                    <a:solidFill>
-                      <a:srgbClr val="FFFFFF"/>
-                    </a:solidFill>
-                  </a:tcPr>
-                </a:tc>
-                <a:tc>
-                  <a:txBody>
-                    <a:bodyPr/>
-                    <a:lstStyle/>
-                    <a:p>
-                      <a:pPr algn="just" indent="0" marL="0">
-                        <a:buNone/>
-                      </a:pPr>
-                      <a:r>
-                        <a:rPr lang="en-US" sz="760" dirty="0">
-                          <a:solidFill>
-                            <a:schemeClr val="tx1"/>
-                          </a:solidFill>
-                          <a:latin typeface="Calibri" pitchFamily="34" charset="0"/>
-                          <a:ea typeface="Calibri" pitchFamily="34" charset="-122"/>
-                          <a:cs typeface="Calibri" pitchFamily="34" charset="-120"/>
-                        </a:rPr>
-                        <a:t>Plan de acción</a:t>
-                      </a:r>
-                      <a:endParaRPr lang="en-US" sz="760" dirty="0">
-                        <a:latin typeface="Calibri" charset="0"/>
-                        <a:ea typeface="Calibri" charset="0"/>
-                        <a:cs typeface="Calibri" charset="0"/>
-                      </a:endParaRPr>
-                    </a:p>
-                    <a:p>
-                      <a:pPr algn="just" indent="0" marL="0">
-                        <a:buNone/>
-                      </a:pPr>
-                      <a:r>
-                        <a:rPr lang="en-US" sz="760" dirty="0">
-                          <a:solidFill>
-                            <a:schemeClr val="tx1"/>
-                          </a:solidFill>
-                          <a:latin typeface="Calibri" pitchFamily="34" charset="0"/>
-                          <a:ea typeface="Calibri" pitchFamily="34" charset="-122"/>
-                          <a:cs typeface="Calibri" pitchFamily="34" charset="-120"/>
-                        </a:rPr>
-                        <a:t>Pendiente</a:t>
-                      </a:r>
-                      <a:endParaRPr lang="en-US" sz="760" dirty="0">
-                        <a:latin typeface="Calibri" charset="0"/>
-                        <a:ea typeface="Calibri" charset="0"/>
-                        <a:cs typeface="Calibri" charset="0"/>
-                      </a:endParaRPr>
-                    </a:p>
-                  </a:txBody>
-                  <a:tcPr marL="54864" marR="54864" marT="13716" marB="13716" anchor="ctr">
-                    <a:lnL w="0" cap="flat" cmpd="sng" algn="ctr">
-                      <a:noFill/>
-                    </a:lnL>
-                    <a:lnR w="0" cap="flat" cmpd="sng" algn="ctr">
-                      <a:noFill/>
-                    </a:lnR>
-                    <a:lnT w="0" cap="flat" cmpd="sng" algn="ctr">
-                      <a:noFill/>
-                    </a:lnT>
-                    <a:lnB w="9525" cap="flat" cmpd="sng" algn="ctr">
-                      <a:solidFill>
-                        <a:srgbClr val="D9E0EA"/>
-                      </a:solidFill>
-                      <a:prstDash val="solid"/>
-                      <a:round/>
-                      <a:headEnd type="none" w="med" len="med"/>
-                      <a:tailEnd type="none" w="med" len="med"/>
-                    </a:lnB>
-                  </a:tcPr>
-                </a:tc>
-                <a:tc>
-                  <a:txBody>
-                    <a:bodyPr/>
-                    <a:lstStyle/>
-                    <a:p>
-                      <a:pPr algn="l" indent="0" marL="0">
-                        <a:buNone/>
-                      </a:pPr>
-                      <a:r>
-                        <a:rPr lang="en-US" sz="760" b="1" dirty="0">
+                      <a:pPr indent="0" marL="0">
+                        <a:buNone/>
+                      </a:pPr>
+                      <a:r>
+                        <a:rPr lang="en-US" sz="1100" b="1" dirty="0">
+                          <a:solidFill>
+                            <a:schemeClr val="accent2"/>
+                          </a:solidFill>
+                          <a:latin typeface="Calibri" pitchFamily="34" charset="0"/>
+                          <a:ea typeface="Calibri" pitchFamily="34" charset="-122"/>
+                          <a:cs typeface="Calibri" pitchFamily="34" charset="-120"/>
+                        </a:rPr>
+                        <a:t>B.6  </a:t>
+                      </a:r>
+                      <a:pPr indent="0" marL="0">
+                        <a:buNone/>
+                      </a:pPr>
+                      <a:r>
+                        <a:rPr lang="en-US" sz="1100" b="1" dirty="0">
+                          <a:solidFill>
+                            <a:schemeClr val="tx1"/>
+                          </a:solidFill>
+                          <a:latin typeface="Calibri" pitchFamily="34" charset="0"/>
+                          <a:ea typeface="Calibri" pitchFamily="34" charset="-122"/>
+                          <a:cs typeface="Calibri" pitchFamily="34" charset="-120"/>
+                        </a:rPr>
+                        <a:t>Revisión documentación conforme artículo22 de la NRP-23</a:t>
+                      </a:r>
+                      <a:endParaRPr lang="en-US" sz="1100" dirty="0">
+                        <a:latin typeface="Calibri" charset="0"/>
+                        <a:ea typeface="Calibri" charset="0"/>
+                        <a:cs typeface="Calibri" charset="0"/>
+                      </a:endParaRPr>
+                    </a:p>
+                  </a:txBody>
+                  <a:tcPr marL="54864" marR="54864" marT="18288" marB="18288" anchor="ctr">
+                    <a:lnL w="0" cap="flat" cmpd="sng" algn="ctr">
+                      <a:noFill/>
+                    </a:lnL>
+                    <a:lnR w="0" cap="flat" cmpd="sng" algn="ctr">
+                      <a:noFill/>
+                    </a:lnR>
+                    <a:lnT w="0" cap="flat" cmpd="sng" algn="ctr">
+                      <a:noFill/>
+                    </a:lnT>
+                    <a:lnB w="9525" cap="flat" cmpd="sng" algn="ctr">
+                      <a:solidFill>
+                        <a:srgbClr val="D9E0EA"/>
+                      </a:solidFill>
+                      <a:prstDash val="solid"/>
+                      <a:round/>
+                      <a:headEnd type="none" w="med" len="med"/>
+                      <a:tailEnd type="none" w="med" len="med"/>
+                    </a:lnB>
+                  </a:tcPr>
+                </a:tc>
+                <a:tc>
+                  <a:txBody>
+                    <a:bodyPr/>
+                    <a:lstStyle/>
+                    <a:p>
+                      <a:pPr indent="0" marL="0">
+                        <a:buNone/>
+                      </a:pPr>
+                      <a:r>
+                        <a:rPr lang="en-US" sz="1100" dirty="0">
+                          <a:solidFill>
+                            <a:schemeClr val="tx1"/>
+                          </a:solidFill>
+                          <a:latin typeface="Calibri" pitchFamily="34" charset="0"/>
+                          <a:ea typeface="Calibri" pitchFamily="34" charset="-122"/>
+                          <a:cs typeface="Calibri" pitchFamily="34" charset="-120"/>
+                        </a:rPr>
+                        <a:t>Se anexa informe elaborado en fecha 13 de diciembre de 20… (ver anexo)</a:t>
+                      </a:r>
+                      <a:endParaRPr lang="en-US" sz="1100" dirty="0">
+                        <a:latin typeface="Calibri" charset="0"/>
+                        <a:ea typeface="Calibri" charset="0"/>
+                        <a:cs typeface="Calibri" charset="0"/>
+                      </a:endParaRPr>
+                    </a:p>
+                  </a:txBody>
+                  <a:tcPr marL="54864" marR="54864" marT="18288" marB="18288" anchor="ctr">
+                    <a:lnL w="0" cap="flat" cmpd="sng" algn="ctr">
+                      <a:noFill/>
+                    </a:lnL>
+                    <a:lnR w="0" cap="flat" cmpd="sng" algn="ctr">
+                      <a:noFill/>
+                    </a:lnR>
+                    <a:lnT w="0" cap="flat" cmpd="sng" algn="ctr">
+                      <a:noFill/>
+                    </a:lnT>
+                    <a:lnB w="9525" cap="flat" cmpd="sng" algn="ctr">
+                      <a:solidFill>
+                        <a:srgbClr val="D9E0EA"/>
+                      </a:solidFill>
+                      <a:prstDash val="solid"/>
+                      <a:round/>
+                      <a:headEnd type="none" w="med" len="med"/>
+                      <a:tailEnd type="none" w="med" len="med"/>
+                    </a:lnB>
+                  </a:tcPr>
+                </a:tc>
+                <a:tc>
+                  <a:txBody>
+                    <a:bodyPr/>
+                    <a:lstStyle/>
+                    <a:p>
+                      <a:pPr indent="0" marL="0">
+                        <a:buNone/>
+                      </a:pPr>
+                      <a:r>
+                        <a:rPr lang="en-US" sz="1100" b="1" dirty="0">
                           <a:solidFill>
                             <a:schemeClr val="accent1"/>
                           </a:solidFill>
@@ -3222,37 +2717,16 @@
                           <a:ea typeface="Calibri" pitchFamily="34" charset="-122"/>
                           <a:cs typeface="Calibri" pitchFamily="34" charset="-120"/>
                         </a:rPr>
-                        <a:t>Gerencia de Cumplimiento</a:t>
-                      </a:r>
-                      <a:endParaRPr lang="en-US" sz="760" dirty="0">
-                        <a:latin typeface="Calibri" charset="0"/>
-                        <a:ea typeface="Calibri" charset="0"/>
-                        <a:cs typeface="Calibri" charset="0"/>
-                      </a:endParaRPr>
-                    </a:p>
-                    <a:p>
-                      <a:pPr algn="l" indent="0" marL="0">
-                        <a:buNone/>
-                      </a:pPr>
-                      <a:r>
-                        <a:rPr lang="en-US" sz="760" b="1" dirty="0">
-                          <a:solidFill>
-                            <a:schemeClr val="accent1"/>
-                          </a:solidFill>
-                          <a:latin typeface="Calibri" pitchFamily="34" charset="0"/>
-                          <a:ea typeface="Calibri" pitchFamily="34" charset="-122"/>
-                          <a:cs typeface="Calibri" pitchFamily="34" charset="-120"/>
-                        </a:rPr>
-                        <a:t>/ Gerencia de Sistemas</a:t>
-                      </a:r>
-                      <a:endParaRPr lang="en-US" sz="760" dirty="0">
-                        <a:latin typeface="Calibri" charset="0"/>
-                        <a:ea typeface="Calibri" charset="0"/>
-                        <a:cs typeface="Calibri" charset="0"/>
-                      </a:endParaRPr>
-                    </a:p>
-                  </a:txBody>
-                  <a:tcPr marL="54864" marR="54864" marT="13716" marB="13716" anchor="ctr">
+                        <a:t>Jefe de Riesgos</a:t>
+                      </a:r>
+                      <a:endParaRPr lang="en-US" sz="1100" dirty="0">
+                        <a:latin typeface="Calibri" charset="0"/>
+                        <a:ea typeface="Calibri" charset="0"/>
+                        <a:cs typeface="Calibri" charset="0"/>
+                      </a:endParaRPr>
+                    </a:p>
+                  </a:txBody>
+                  <a:tcPr marL="54864" marR="54864" marT="18288" marB="18288" anchor="ctr">
                     <a:lnL w="0" cap="flat" cmpd="sng" algn="ctr">
                       <a:noFill/>
                     </a:lnL>
@@ -3280,129 +2754,119 @@
                     <a:bodyPr/>
                     <a:lstStyle/>
                     <a:p>
-                      <a:pPr algn="just" indent="0" marL="0">
-                        <a:buNone/>
-                      </a:pPr>
-                      <a:r>
-                        <a:rPr lang="en-US" sz="760" b="1" dirty="0">
-                          <a:solidFill>
-                            <a:schemeClr val="tx1"/>
-                          </a:solidFill>
-                          <a:latin typeface="Calibri" pitchFamily="34" charset="0"/>
-                          <a:ea typeface="Calibri" pitchFamily="34" charset="-122"/>
-                          <a:cs typeface="Calibri" pitchFamily="34" charset="-120"/>
-                        </a:rPr>
-                        <a:t>B.10  Deficiencia en la hora del sistema y la herramienta de Monitoreo</a:t>
-                      </a:r>
-                      <a:endParaRPr lang="en-US" sz="760" dirty="0">
-                        <a:latin typeface="Calibri" charset="0"/>
-                        <a:ea typeface="Calibri" charset="0"/>
-                        <a:cs typeface="Calibri" charset="0"/>
-                      </a:endParaRPr>
-                    </a:p>
-                  </a:txBody>
-                  <a:tcPr marL="54864" marR="54864" marT="13716" marB="13716" anchor="ctr">
-                    <a:lnL w="0" cap="flat" cmpd="sng" algn="ctr">
-                      <a:noFill/>
-                    </a:lnL>
-                    <a:lnR w="0" cap="flat" cmpd="sng" algn="ctr">
-                      <a:noFill/>
-                    </a:lnR>
-                    <a:lnT w="0" cap="flat" cmpd="sng" algn="ctr">
-                      <a:noFill/>
-                    </a:lnT>
-                    <a:lnB w="9525" cap="flat" cmpd="sng" algn="ctr">
-                      <a:solidFill>
-                        <a:srgbClr val="D9E0EA"/>
-                      </a:solidFill>
-                      <a:prstDash val="solid"/>
-                      <a:round/>
-                      <a:headEnd type="none" w="med" len="med"/>
-                      <a:tailEnd type="none" w="med" len="med"/>
-                    </a:lnB>
-                    <a:solidFill>
-                      <a:srgbClr val="FFFFFF"/>
-                    </a:solidFill>
-                  </a:tcPr>
-                </a:tc>
-                <a:tc>
-                  <a:txBody>
-                    <a:bodyPr/>
-                    <a:lstStyle/>
-                    <a:p>
-                      <a:pPr algn="just" indent="0" marL="0">
-                        <a:buNone/>
-                      </a:pPr>
-                      <a:r>
-                        <a:rPr lang="en-US" sz="760" dirty="0">
-                          <a:solidFill>
-                            <a:schemeClr val="tx1"/>
-                          </a:solidFill>
-                          <a:latin typeface="Calibri" pitchFamily="34" charset="0"/>
-                          <a:ea typeface="Calibri" pitchFamily="34" charset="-122"/>
-                          <a:cs typeface="Calibri" pitchFamily="34" charset="-120"/>
-                        </a:rPr>
-                        <a:t>Descargo correos de gestion</a:t>
-                      </a:r>
-                      <a:endParaRPr lang="en-US" sz="760" dirty="0">
-                        <a:latin typeface="Calibri" charset="0"/>
-                        <a:ea typeface="Calibri" charset="0"/>
-                        <a:cs typeface="Calibri" charset="0"/>
-                      </a:endParaRPr>
-                    </a:p>
-                    <a:p>
-                      <a:pPr algn="just" indent="0" marL="0">
-                        <a:buNone/>
-                      </a:pPr>
-                      <a:r>
-                        <a:rPr lang="en-US" sz="760" dirty="0">
-                          <a:solidFill>
-                            <a:schemeClr val="tx1"/>
-                          </a:solidFill>
-                          <a:latin typeface="Calibri" pitchFamily="34" charset="0"/>
-                          <a:ea typeface="Calibri" pitchFamily="34" charset="-122"/>
-                          <a:cs typeface="Calibri" pitchFamily="34" charset="-120"/>
-                        </a:rPr>
-                        <a:t>Pendiente</a:t>
-                      </a:r>
-                      <a:endParaRPr lang="en-US" sz="760" dirty="0">
-                        <a:latin typeface="Calibri" charset="0"/>
-                        <a:ea typeface="Calibri" charset="0"/>
-                        <a:cs typeface="Calibri" charset="0"/>
-                      </a:endParaRPr>
-                    </a:p>
-                  </a:txBody>
-                  <a:tcPr marL="54864" marR="54864" marT="13716" marB="13716" anchor="ctr">
-                    <a:lnL w="0" cap="flat" cmpd="sng" algn="ctr">
-                      <a:noFill/>
-                    </a:lnL>
-                    <a:lnR w="0" cap="flat" cmpd="sng" algn="ctr">
-                      <a:noFill/>
-                    </a:lnR>
-                    <a:lnT w="0" cap="flat" cmpd="sng" algn="ctr">
-                      <a:noFill/>
-                    </a:lnT>
-                    <a:lnB w="9525" cap="flat" cmpd="sng" algn="ctr">
-                      <a:solidFill>
-                        <a:srgbClr val="D9E0EA"/>
-                      </a:solidFill>
-                      <a:prstDash val="solid"/>
-                      <a:round/>
-                      <a:headEnd type="none" w="med" len="med"/>
-                      <a:tailEnd type="none" w="med" len="med"/>
-                    </a:lnB>
-                  </a:tcPr>
-                </a:tc>
-                <a:tc>
-                  <a:txBody>
-                    <a:bodyPr/>
-                    <a:lstStyle/>
-                    <a:p>
-                      <a:pPr algn="l" indent="0" marL="0">
-                        <a:buNone/>
-                      </a:pPr>
-                      <a:r>
-                        <a:rPr lang="en-US" sz="760" b="1" dirty="0">
+                      <a:pPr indent="0" marL="0">
+                        <a:buNone/>
+                      </a:pPr>
+                      <a:r>
+                        <a:rPr lang="en-US" sz="1100" b="1" dirty="0">
+                          <a:solidFill>
+                            <a:schemeClr val="accent2"/>
+                          </a:solidFill>
+                          <a:latin typeface="Calibri" pitchFamily="34" charset="0"/>
+                          <a:ea typeface="Calibri" pitchFamily="34" charset="-122"/>
+                          <a:cs typeface="Calibri" pitchFamily="34" charset="-120"/>
+                        </a:rPr>
+                        <a:t>B.7  </a:t>
+                      </a:r>
+                      <a:pPr indent="0" marL="0">
+                        <a:buNone/>
+                      </a:pPr>
+                      <a:r>
+                        <a:rPr lang="en-US" sz="1100" b="1" dirty="0">
+                          <a:solidFill>
+                            <a:schemeClr val="tx1"/>
+                          </a:solidFill>
+                          <a:latin typeface="Calibri" pitchFamily="34" charset="0"/>
+                          <a:ea typeface="Calibri" pitchFamily="34" charset="-122"/>
+                          <a:cs typeface="Calibri" pitchFamily="34" charset="-120"/>
+                        </a:rPr>
+                        <a:t>Debilidades en el contrato del servicio de software</a:t>
+                      </a:r>
+                      <a:endParaRPr lang="en-US" sz="1100" dirty="0">
+                        <a:latin typeface="Calibri" charset="0"/>
+                        <a:ea typeface="Calibri" charset="0"/>
+                        <a:cs typeface="Calibri" charset="0"/>
+                      </a:endParaRPr>
+                    </a:p>
+                  </a:txBody>
+                  <a:tcPr marL="54864" marR="54864" marT="18288" marB="18288" anchor="ctr">
+                    <a:lnL w="0" cap="flat" cmpd="sng" algn="ctr">
+                      <a:noFill/>
+                    </a:lnL>
+                    <a:lnR w="0" cap="flat" cmpd="sng" algn="ctr">
+                      <a:noFill/>
+                    </a:lnR>
+                    <a:lnT w="0" cap="flat" cmpd="sng" algn="ctr">
+                      <a:noFill/>
+                    </a:lnT>
+                    <a:lnB w="9525" cap="flat" cmpd="sng" algn="ctr">
+                      <a:solidFill>
+                        <a:srgbClr val="D9E0EA"/>
+                      </a:solidFill>
+                      <a:prstDash val="solid"/>
+                      <a:round/>
+                      <a:headEnd type="none" w="med" len="med"/>
+                      <a:tailEnd type="none" w="med" len="med"/>
+                    </a:lnB>
+                  </a:tcPr>
+                </a:tc>
+                <a:tc>
+                  <a:txBody>
+                    <a:bodyPr/>
+                    <a:lstStyle/>
+                    <a:p>
+                      <a:pPr indent="0" marL="0">
+                        <a:buNone/>
+                      </a:pPr>
+                      <a:r>
+                        <a:rPr lang="en-US" sz="1100" dirty="0">
+                          <a:solidFill>
+                            <a:schemeClr val="tx1"/>
+                          </a:solidFill>
+                          <a:latin typeface="Calibri" pitchFamily="34" charset="0"/>
+                          <a:ea typeface="Calibri" pitchFamily="34" charset="-122"/>
+                          <a:cs typeface="Calibri" pitchFamily="34" charset="-120"/>
+                        </a:rPr>
+                        <a:t>Se adjuntará la propuesta de la Gerencia Legal por medio… (ver anexo)</a:t>
+                      </a:r>
+                      <a:endParaRPr lang="en-US" sz="1100" dirty="0">
+                        <a:latin typeface="Calibri" charset="0"/>
+                        <a:ea typeface="Calibri" charset="0"/>
+                        <a:cs typeface="Calibri" charset="0"/>
+                      </a:endParaRPr>
+                    </a:p>
+                  </a:txBody>
+                  <a:tcPr marL="54864" marR="54864" marT="18288" marB="18288" anchor="ctr">
+                    <a:lnL w="0" cap="flat" cmpd="sng" algn="ctr">
+                      <a:noFill/>
+                    </a:lnL>
+                    <a:lnR w="0" cap="flat" cmpd="sng" algn="ctr">
+                      <a:noFill/>
+                    </a:lnR>
+                    <a:lnT w="0" cap="flat" cmpd="sng" algn="ctr">
+                      <a:noFill/>
+                    </a:lnT>
+                    <a:lnB w="9525" cap="flat" cmpd="sng" algn="ctr">
+                      <a:solidFill>
+                        <a:srgbClr val="D9E0EA"/>
+                      </a:solidFill>
+                      <a:prstDash val="solid"/>
+                      <a:round/>
+                      <a:headEnd type="none" w="med" len="med"/>
+                      <a:tailEnd type="none" w="med" len="med"/>
+                    </a:lnB>
+                  </a:tcPr>
+                </a:tc>
+                <a:tc>
+                  <a:txBody>
+                    <a:bodyPr/>
+                    <a:lstStyle/>
+                    <a:p>
+                      <a:pPr indent="0" marL="0">
+                        <a:buNone/>
+                      </a:pPr>
+                      <a:r>
+                        <a:rPr lang="en-US" sz="1100" b="1" dirty="0">
                           <a:solidFill>
                             <a:schemeClr val="accent1"/>
                           </a:solidFill>
@@ -3410,16 +2874,16 @@
                           <a:ea typeface="Calibri" pitchFamily="34" charset="-122"/>
                           <a:cs typeface="Calibri" pitchFamily="34" charset="-120"/>
                         </a:rPr>
-                        <a:t>Gerencia de Cumplimiento</a:t>
-                      </a:r>
-                      <a:endParaRPr lang="en-US" sz="760" dirty="0">
-                        <a:latin typeface="Calibri" charset="0"/>
-                        <a:ea typeface="Calibri" charset="0"/>
-                        <a:cs typeface="Calibri" charset="0"/>
-                      </a:endParaRPr>
-                    </a:p>
-                  </a:txBody>
-                  <a:tcPr marL="54864" marR="54864" marT="13716" marB="13716" anchor="ctr">
+                        <a:t>Gerencia de Cumplimiento / Gerencia Legal</a:t>
+                      </a:r>
+                      <a:endParaRPr lang="en-US" sz="1100" dirty="0">
+                        <a:latin typeface="Calibri" charset="0"/>
+                        <a:ea typeface="Calibri" charset="0"/>
+                        <a:cs typeface="Calibri" charset="0"/>
+                      </a:endParaRPr>
+                    </a:p>
+                  </a:txBody>
+                  <a:tcPr marL="54864" marR="54864" marT="18288" marB="18288" anchor="ctr">
                     <a:lnL w="0" cap="flat" cmpd="sng" algn="ctr">
                       <a:noFill/>
                     </a:lnL>
@@ -3447,129 +2911,119 @@
                     <a:bodyPr/>
                     <a:lstStyle/>
                     <a:p>
-                      <a:pPr algn="just" indent="0" marL="0">
-                        <a:buNone/>
-                      </a:pPr>
-                      <a:r>
-                        <a:rPr lang="en-US" sz="760" b="1" dirty="0">
-                          <a:solidFill>
-                            <a:schemeClr val="tx1"/>
-                          </a:solidFill>
-                          <a:latin typeface="Calibri" pitchFamily="34" charset="0"/>
-                          <a:ea typeface="Calibri" pitchFamily="34" charset="-122"/>
-                          <a:cs typeface="Calibri" pitchFamily="34" charset="-120"/>
-                        </a:rPr>
-                        <a:t>B.11  Verificación de las condiciones en ACRM</a:t>
-                      </a:r>
-                      <a:endParaRPr lang="en-US" sz="760" dirty="0">
-                        <a:latin typeface="Calibri" charset="0"/>
-                        <a:ea typeface="Calibri" charset="0"/>
-                        <a:cs typeface="Calibri" charset="0"/>
-                      </a:endParaRPr>
-                    </a:p>
-                  </a:txBody>
-                  <a:tcPr marL="54864" marR="54864" marT="13716" marB="13716" anchor="ctr">
-                    <a:lnL w="0" cap="flat" cmpd="sng" algn="ctr">
-                      <a:noFill/>
-                    </a:lnL>
-                    <a:lnR w="0" cap="flat" cmpd="sng" algn="ctr">
-                      <a:noFill/>
-                    </a:lnR>
-                    <a:lnT w="0" cap="flat" cmpd="sng" algn="ctr">
-                      <a:noFill/>
-                    </a:lnT>
-                    <a:lnB w="9525" cap="flat" cmpd="sng" algn="ctr">
-                      <a:solidFill>
-                        <a:srgbClr val="D9E0EA"/>
-                      </a:solidFill>
-                      <a:prstDash val="solid"/>
-                      <a:round/>
-                      <a:headEnd type="none" w="med" len="med"/>
-                      <a:tailEnd type="none" w="med" len="med"/>
-                    </a:lnB>
-                    <a:solidFill>
-                      <a:srgbClr val="FFFFFF"/>
-                    </a:solidFill>
-                  </a:tcPr>
-                </a:tc>
-                <a:tc>
-                  <a:txBody>
-                    <a:bodyPr/>
-                    <a:lstStyle/>
-                    <a:p>
-                      <a:pPr algn="just" indent="0" marL="0">
-                        <a:buNone/>
-                      </a:pPr>
-                      <a:r>
-                        <a:rPr lang="en-US" sz="760" dirty="0">
-                          <a:solidFill>
-                            <a:schemeClr val="tx1"/>
-                          </a:solidFill>
-                          <a:latin typeface="Calibri" pitchFamily="34" charset="0"/>
-                          <a:ea typeface="Calibri" pitchFamily="34" charset="-122"/>
-                          <a:cs typeface="Calibri" pitchFamily="34" charset="-120"/>
-                        </a:rPr>
-                        <a:t>Descargo</a:t>
-                      </a:r>
-                      <a:endParaRPr lang="en-US" sz="760" dirty="0">
-                        <a:latin typeface="Calibri" charset="0"/>
-                        <a:ea typeface="Calibri" charset="0"/>
-                        <a:cs typeface="Calibri" charset="0"/>
-                      </a:endParaRPr>
-                    </a:p>
-                    <a:p>
-                      <a:pPr algn="just" indent="0" marL="0">
-                        <a:buNone/>
-                      </a:pPr>
-                      <a:r>
-                        <a:rPr lang="en-US" sz="760" dirty="0">
-                          <a:solidFill>
-                            <a:schemeClr val="tx1"/>
-                          </a:solidFill>
-                          <a:latin typeface="Calibri" pitchFamily="34" charset="0"/>
-                          <a:ea typeface="Calibri" pitchFamily="34" charset="-122"/>
-                          <a:cs typeface="Calibri" pitchFamily="34" charset="-120"/>
-                        </a:rPr>
-                        <a:t>Pendiente</a:t>
-                      </a:r>
-                      <a:endParaRPr lang="en-US" sz="760" dirty="0">
-                        <a:latin typeface="Calibri" charset="0"/>
-                        <a:ea typeface="Calibri" charset="0"/>
-                        <a:cs typeface="Calibri" charset="0"/>
-                      </a:endParaRPr>
-                    </a:p>
-                  </a:txBody>
-                  <a:tcPr marL="54864" marR="54864" marT="13716" marB="13716" anchor="ctr">
-                    <a:lnL w="0" cap="flat" cmpd="sng" algn="ctr">
-                      <a:noFill/>
-                    </a:lnL>
-                    <a:lnR w="0" cap="flat" cmpd="sng" algn="ctr">
-                      <a:noFill/>
-                    </a:lnR>
-                    <a:lnT w="0" cap="flat" cmpd="sng" algn="ctr">
-                      <a:noFill/>
-                    </a:lnT>
-                    <a:lnB w="9525" cap="flat" cmpd="sng" algn="ctr">
-                      <a:solidFill>
-                        <a:srgbClr val="D9E0EA"/>
-                      </a:solidFill>
-                      <a:prstDash val="solid"/>
-                      <a:round/>
-                      <a:headEnd type="none" w="med" len="med"/>
-                      <a:tailEnd type="none" w="med" len="med"/>
-                    </a:lnB>
-                  </a:tcPr>
-                </a:tc>
-                <a:tc>
-                  <a:txBody>
-                    <a:bodyPr/>
-                    <a:lstStyle/>
-                    <a:p>
-                      <a:pPr algn="l" indent="0" marL="0">
-                        <a:buNone/>
-                      </a:pPr>
-                      <a:r>
-                        <a:rPr lang="en-US" sz="760" b="1" dirty="0">
+                      <a:pPr indent="0" marL="0">
+                        <a:buNone/>
+                      </a:pPr>
+                      <a:r>
+                        <a:rPr lang="en-US" sz="1100" b="1" dirty="0">
+                          <a:solidFill>
+                            <a:schemeClr val="accent2"/>
+                          </a:solidFill>
+                          <a:latin typeface="Calibri" pitchFamily="34" charset="0"/>
+                          <a:ea typeface="Calibri" pitchFamily="34" charset="-122"/>
+                          <a:cs typeface="Calibri" pitchFamily="34" charset="-120"/>
+                        </a:rPr>
+                        <a:t>B.8  </a:t>
+                      </a:r>
+                      <a:pPr indent="0" marL="0">
+                        <a:buNone/>
+                      </a:pPr>
+                      <a:r>
+                        <a:rPr lang="en-US" sz="1100" b="1" dirty="0">
+                          <a:solidFill>
+                            <a:schemeClr val="tx1"/>
+                          </a:solidFill>
+                          <a:latin typeface="Calibri" pitchFamily="34" charset="0"/>
+                          <a:ea typeface="Calibri" pitchFamily="34" charset="-122"/>
+                          <a:cs typeface="Calibri" pitchFamily="34" charset="-120"/>
+                        </a:rPr>
+                        <a:t>Debilidad en el Alcance de las Pruebas Continuidad del Negocio</a:t>
+                      </a:r>
+                      <a:endParaRPr lang="en-US" sz="1100" dirty="0">
+                        <a:latin typeface="Calibri" charset="0"/>
+                        <a:ea typeface="Calibri" charset="0"/>
+                        <a:cs typeface="Calibri" charset="0"/>
+                      </a:endParaRPr>
+                    </a:p>
+                  </a:txBody>
+                  <a:tcPr marL="54864" marR="54864" marT="18288" marB="18288" anchor="ctr">
+                    <a:lnL w="0" cap="flat" cmpd="sng" algn="ctr">
+                      <a:noFill/>
+                    </a:lnL>
+                    <a:lnR w="0" cap="flat" cmpd="sng" algn="ctr">
+                      <a:noFill/>
+                    </a:lnR>
+                    <a:lnT w="0" cap="flat" cmpd="sng" algn="ctr">
+                      <a:noFill/>
+                    </a:lnT>
+                    <a:lnB w="9525" cap="flat" cmpd="sng" algn="ctr">
+                      <a:solidFill>
+                        <a:srgbClr val="D9E0EA"/>
+                      </a:solidFill>
+                      <a:prstDash val="solid"/>
+                      <a:round/>
+                      <a:headEnd type="none" w="med" len="med"/>
+                      <a:tailEnd type="none" w="med" len="med"/>
+                    </a:lnB>
+                  </a:tcPr>
+                </a:tc>
+                <a:tc>
+                  <a:txBody>
+                    <a:bodyPr/>
+                    <a:lstStyle/>
+                    <a:p>
+                      <a:pPr indent="0" marL="0">
+                        <a:buNone/>
+                      </a:pPr>
+                      <a:r>
+                        <a:rPr lang="en-US" sz="1100" dirty="0">
+                          <a:solidFill>
+                            <a:schemeClr val="tx1"/>
+                          </a:solidFill>
+                          <a:latin typeface="Calibri" pitchFamily="34" charset="0"/>
+                          <a:ea typeface="Calibri" pitchFamily="34" charset="-122"/>
+                          <a:cs typeface="Calibri" pitchFamily="34" charset="-120"/>
+                        </a:rPr>
+                        <a:t>Plan de acción: proveedor critico · Pendiente</a:t>
+                      </a:r>
+                      <a:endParaRPr lang="en-US" sz="1100" dirty="0">
+                        <a:latin typeface="Calibri" charset="0"/>
+                        <a:ea typeface="Calibri" charset="0"/>
+                        <a:cs typeface="Calibri" charset="0"/>
+                      </a:endParaRPr>
+                    </a:p>
+                  </a:txBody>
+                  <a:tcPr marL="54864" marR="54864" marT="18288" marB="18288" anchor="ctr">
+                    <a:lnL w="0" cap="flat" cmpd="sng" algn="ctr">
+                      <a:noFill/>
+                    </a:lnL>
+                    <a:lnR w="0" cap="flat" cmpd="sng" algn="ctr">
+                      <a:noFill/>
+                    </a:lnR>
+                    <a:lnT w="0" cap="flat" cmpd="sng" algn="ctr">
+                      <a:noFill/>
+                    </a:lnT>
+                    <a:lnB w="9525" cap="flat" cmpd="sng" algn="ctr">
+                      <a:solidFill>
+                        <a:srgbClr val="D9E0EA"/>
+                      </a:solidFill>
+                      <a:prstDash val="solid"/>
+                      <a:round/>
+                      <a:headEnd type="none" w="med" len="med"/>
+                      <a:tailEnd type="none" w="med" len="med"/>
+                    </a:lnB>
+                  </a:tcPr>
+                </a:tc>
+                <a:tc>
+                  <a:txBody>
+                    <a:bodyPr/>
+                    <a:lstStyle/>
+                    <a:p>
+                      <a:pPr indent="0" marL="0">
+                        <a:buNone/>
+                      </a:pPr>
+                      <a:r>
+                        <a:rPr lang="en-US" sz="1100" b="1" dirty="0">
                           <a:solidFill>
                             <a:schemeClr val="accent1"/>
                           </a:solidFill>
@@ -3577,16 +3031,16 @@
                           <a:ea typeface="Calibri" pitchFamily="34" charset="-122"/>
                           <a:cs typeface="Calibri" pitchFamily="34" charset="-120"/>
                         </a:rPr>
-                        <a:t>Gerencia de Cumplimiento</a:t>
-                      </a:r>
-                      <a:endParaRPr lang="en-US" sz="760" dirty="0">
-                        <a:latin typeface="Calibri" charset="0"/>
-                        <a:ea typeface="Calibri" charset="0"/>
-                        <a:cs typeface="Calibri" charset="0"/>
-                      </a:endParaRPr>
-                    </a:p>
-                  </a:txBody>
-                  <a:tcPr marL="54864" marR="54864" marT="13716" marB="13716" anchor="ctr">
+                        <a:t>Administración de Riesgos/Gerencia de sistemas/Seguridad de la información</a:t>
+                      </a:r>
+                      <a:endParaRPr lang="en-US" sz="1100" dirty="0">
+                        <a:latin typeface="Calibri" charset="0"/>
+                        <a:ea typeface="Calibri" charset="0"/>
+                        <a:cs typeface="Calibri" charset="0"/>
+                      </a:endParaRPr>
+                    </a:p>
+                  </a:txBody>
+                  <a:tcPr marL="54864" marR="54864" marT="18288" marB="18288" anchor="ctr">
                     <a:lnL w="0" cap="flat" cmpd="sng" algn="ctr">
                       <a:noFill/>
                     </a:lnL>
@@ -3614,129 +3068,119 @@
                     <a:bodyPr/>
                     <a:lstStyle/>
                     <a:p>
-                      <a:pPr algn="just" indent="0" marL="0">
-                        <a:buNone/>
-                      </a:pPr>
-                      <a:r>
-                        <a:rPr lang="en-US" sz="760" b="1" dirty="0">
-                          <a:solidFill>
-                            <a:schemeClr val="tx1"/>
-                          </a:solidFill>
-                          <a:latin typeface="Calibri" pitchFamily="34" charset="0"/>
-                          <a:ea typeface="Calibri" pitchFamily="34" charset="-122"/>
-                          <a:cs typeface="Calibri" pitchFamily="34" charset="-120"/>
-                        </a:rPr>
-                        <a:t>B.12  Limitante de Accesos a los Datos de COMEDICA, alojada en la Herramienta de Monitoreo.</a:t>
-                      </a:r>
-                      <a:endParaRPr lang="en-US" sz="760" dirty="0">
-                        <a:latin typeface="Calibri" charset="0"/>
-                        <a:ea typeface="Calibri" charset="0"/>
-                        <a:cs typeface="Calibri" charset="0"/>
-                      </a:endParaRPr>
-                    </a:p>
-                  </a:txBody>
-                  <a:tcPr marL="54864" marR="54864" marT="13716" marB="13716" anchor="ctr">
-                    <a:lnL w="0" cap="flat" cmpd="sng" algn="ctr">
-                      <a:noFill/>
-                    </a:lnL>
-                    <a:lnR w="0" cap="flat" cmpd="sng" algn="ctr">
-                      <a:noFill/>
-                    </a:lnR>
-                    <a:lnT w="0" cap="flat" cmpd="sng" algn="ctr">
-                      <a:noFill/>
-                    </a:lnT>
-                    <a:lnB w="9525" cap="flat" cmpd="sng" algn="ctr">
-                      <a:solidFill>
-                        <a:srgbClr val="D9E0EA"/>
-                      </a:solidFill>
-                      <a:prstDash val="solid"/>
-                      <a:round/>
-                      <a:headEnd type="none" w="med" len="med"/>
-                      <a:tailEnd type="none" w="med" len="med"/>
-                    </a:lnB>
-                    <a:solidFill>
-                      <a:srgbClr val="FFFFFF"/>
-                    </a:solidFill>
-                  </a:tcPr>
-                </a:tc>
-                <a:tc>
-                  <a:txBody>
-                    <a:bodyPr/>
-                    <a:lstStyle/>
-                    <a:p>
-                      <a:pPr algn="just" indent="0" marL="0">
-                        <a:buNone/>
-                      </a:pPr>
-                      <a:r>
-                        <a:rPr lang="en-US" sz="760" dirty="0">
-                          <a:solidFill>
-                            <a:schemeClr val="tx1"/>
-                          </a:solidFill>
-                          <a:latin typeface="Calibri" pitchFamily="34" charset="0"/>
-                          <a:ea typeface="Calibri" pitchFamily="34" charset="-122"/>
-                          <a:cs typeface="Calibri" pitchFamily="34" charset="-120"/>
-                        </a:rPr>
-                        <a:t>Descargo</a:t>
-                      </a:r>
-                      <a:endParaRPr lang="en-US" sz="760" dirty="0">
-                        <a:latin typeface="Calibri" charset="0"/>
-                        <a:ea typeface="Calibri" charset="0"/>
-                        <a:cs typeface="Calibri" charset="0"/>
-                      </a:endParaRPr>
-                    </a:p>
-                    <a:p>
-                      <a:pPr algn="just" indent="0" marL="0">
-                        <a:buNone/>
-                      </a:pPr>
-                      <a:r>
-                        <a:rPr lang="en-US" sz="760" dirty="0">
-                          <a:solidFill>
-                            <a:schemeClr val="tx1"/>
-                          </a:solidFill>
-                          <a:latin typeface="Calibri" pitchFamily="34" charset="0"/>
-                          <a:ea typeface="Calibri" pitchFamily="34" charset="-122"/>
-                          <a:cs typeface="Calibri" pitchFamily="34" charset="-120"/>
-                        </a:rPr>
-                        <a:t>Pendiente</a:t>
-                      </a:r>
-                      <a:endParaRPr lang="en-US" sz="760" dirty="0">
-                        <a:latin typeface="Calibri" charset="0"/>
-                        <a:ea typeface="Calibri" charset="0"/>
-                        <a:cs typeface="Calibri" charset="0"/>
-                      </a:endParaRPr>
-                    </a:p>
-                  </a:txBody>
-                  <a:tcPr marL="54864" marR="54864" marT="13716" marB="13716" anchor="ctr">
-                    <a:lnL w="0" cap="flat" cmpd="sng" algn="ctr">
-                      <a:noFill/>
-                    </a:lnL>
-                    <a:lnR w="0" cap="flat" cmpd="sng" algn="ctr">
-                      <a:noFill/>
-                    </a:lnR>
-                    <a:lnT w="0" cap="flat" cmpd="sng" algn="ctr">
-                      <a:noFill/>
-                    </a:lnT>
-                    <a:lnB w="9525" cap="flat" cmpd="sng" algn="ctr">
-                      <a:solidFill>
-                        <a:srgbClr val="D9E0EA"/>
-                      </a:solidFill>
-                      <a:prstDash val="solid"/>
-                      <a:round/>
-                      <a:headEnd type="none" w="med" len="med"/>
-                      <a:tailEnd type="none" w="med" len="med"/>
-                    </a:lnB>
-                  </a:tcPr>
-                </a:tc>
-                <a:tc>
-                  <a:txBody>
-                    <a:bodyPr/>
-                    <a:lstStyle/>
-                    <a:p>
-                      <a:pPr algn="l" indent="0" marL="0">
-                        <a:buNone/>
-                      </a:pPr>
-                      <a:r>
-                        <a:rPr lang="en-US" sz="760" b="1" dirty="0">
+                      <a:pPr indent="0" marL="0">
+                        <a:buNone/>
+                      </a:pPr>
+                      <a:r>
+                        <a:rPr lang="en-US" sz="1100" b="1" dirty="0">
+                          <a:solidFill>
+                            <a:schemeClr val="accent2"/>
+                          </a:solidFill>
+                          <a:latin typeface="Calibri" pitchFamily="34" charset="0"/>
+                          <a:ea typeface="Calibri" pitchFamily="34" charset="-122"/>
+                          <a:cs typeface="Calibri" pitchFamily="34" charset="-120"/>
+                        </a:rPr>
+                        <a:t>B.9  </a:t>
+                      </a:r>
+                      <a:pPr indent="0" marL="0">
+                        <a:buNone/>
+                      </a:pPr>
+                      <a:r>
+                        <a:rPr lang="en-US" sz="1100" b="1" dirty="0">
+                          <a:solidFill>
+                            <a:schemeClr val="tx1"/>
+                          </a:solidFill>
+                          <a:latin typeface="Calibri" pitchFamily="34" charset="0"/>
+                          <a:ea typeface="Calibri" pitchFamily="34" charset="-122"/>
+                          <a:cs typeface="Calibri" pitchFamily="34" charset="-120"/>
+                        </a:rPr>
+                        <a:t>Deficiencia en los procedimientos de Respaldos.</a:t>
+                      </a:r>
+                      <a:endParaRPr lang="en-US" sz="1100" dirty="0">
+                        <a:latin typeface="Calibri" charset="0"/>
+                        <a:ea typeface="Calibri" charset="0"/>
+                        <a:cs typeface="Calibri" charset="0"/>
+                      </a:endParaRPr>
+                    </a:p>
+                  </a:txBody>
+                  <a:tcPr marL="54864" marR="54864" marT="18288" marB="18288" anchor="ctr">
+                    <a:lnL w="0" cap="flat" cmpd="sng" algn="ctr">
+                      <a:noFill/>
+                    </a:lnL>
+                    <a:lnR w="0" cap="flat" cmpd="sng" algn="ctr">
+                      <a:noFill/>
+                    </a:lnR>
+                    <a:lnT w="0" cap="flat" cmpd="sng" algn="ctr">
+                      <a:noFill/>
+                    </a:lnT>
+                    <a:lnB w="9525" cap="flat" cmpd="sng" algn="ctr">
+                      <a:solidFill>
+                        <a:srgbClr val="D9E0EA"/>
+                      </a:solidFill>
+                      <a:prstDash val="solid"/>
+                      <a:round/>
+                      <a:headEnd type="none" w="med" len="med"/>
+                      <a:tailEnd type="none" w="med" len="med"/>
+                    </a:lnB>
+                  </a:tcPr>
+                </a:tc>
+                <a:tc>
+                  <a:txBody>
+                    <a:bodyPr/>
+                    <a:lstStyle/>
+                    <a:p>
+                      <a:pPr indent="0" marL="0">
+                        <a:buNone/>
+                      </a:pPr>
+                      <a:r>
+                        <a:rPr lang="en-US" sz="1100" dirty="0">
+                          <a:solidFill>
+                            <a:schemeClr val="tx1"/>
+                          </a:solidFill>
+                          <a:latin typeface="Calibri" pitchFamily="34" charset="0"/>
+                          <a:ea typeface="Calibri" pitchFamily="34" charset="-122"/>
+                          <a:cs typeface="Calibri" pitchFamily="34" charset="-120"/>
+                        </a:rPr>
+                        <a:t>Plan de acción · Pendiente</a:t>
+                      </a:r>
+                      <a:endParaRPr lang="en-US" sz="1100" dirty="0">
+                        <a:latin typeface="Calibri" charset="0"/>
+                        <a:ea typeface="Calibri" charset="0"/>
+                        <a:cs typeface="Calibri" charset="0"/>
+                      </a:endParaRPr>
+                    </a:p>
+                  </a:txBody>
+                  <a:tcPr marL="54864" marR="54864" marT="18288" marB="18288" anchor="ctr">
+                    <a:lnL w="0" cap="flat" cmpd="sng" algn="ctr">
+                      <a:noFill/>
+                    </a:lnL>
+                    <a:lnR w="0" cap="flat" cmpd="sng" algn="ctr">
+                      <a:noFill/>
+                    </a:lnR>
+                    <a:lnT w="0" cap="flat" cmpd="sng" algn="ctr">
+                      <a:noFill/>
+                    </a:lnT>
+                    <a:lnB w="9525" cap="flat" cmpd="sng" algn="ctr">
+                      <a:solidFill>
+                        <a:srgbClr val="D9E0EA"/>
+                      </a:solidFill>
+                      <a:prstDash val="solid"/>
+                      <a:round/>
+                      <a:headEnd type="none" w="med" len="med"/>
+                      <a:tailEnd type="none" w="med" len="med"/>
+                    </a:lnB>
+                  </a:tcPr>
+                </a:tc>
+                <a:tc>
+                  <a:txBody>
+                    <a:bodyPr/>
+                    <a:lstStyle/>
+                    <a:p>
+                      <a:pPr indent="0" marL="0">
+                        <a:buNone/>
+                      </a:pPr>
+                      <a:r>
+                        <a:rPr lang="en-US" sz="1100" b="1" dirty="0">
                           <a:solidFill>
                             <a:schemeClr val="accent1"/>
                           </a:solidFill>
@@ -3744,37 +3188,16 @@
                           <a:ea typeface="Calibri" pitchFamily="34" charset="-122"/>
                           <a:cs typeface="Calibri" pitchFamily="34" charset="-120"/>
                         </a:rPr>
-                        <a:t>Gerencia de Cumplimiento</a:t>
-                      </a:r>
-                      <a:endParaRPr lang="en-US" sz="760" dirty="0">
-                        <a:latin typeface="Calibri" charset="0"/>
-                        <a:ea typeface="Calibri" charset="0"/>
-                        <a:cs typeface="Calibri" charset="0"/>
-                      </a:endParaRPr>
-                    </a:p>
-                    <a:p>
-                      <a:pPr algn="l" indent="0" marL="0">
-                        <a:buNone/>
-                      </a:pPr>
-                      <a:r>
-                        <a:rPr lang="en-US" sz="760" b="1" dirty="0">
-                          <a:solidFill>
-                            <a:schemeClr val="accent1"/>
-                          </a:solidFill>
-                          <a:latin typeface="Calibri" pitchFamily="34" charset="0"/>
-                          <a:ea typeface="Calibri" pitchFamily="34" charset="-122"/>
-                          <a:cs typeface="Calibri" pitchFamily="34" charset="-120"/>
-                        </a:rPr>
-                        <a:t>/ Seguridad de la información</a:t>
-                      </a:r>
-                      <a:endParaRPr lang="en-US" sz="760" dirty="0">
-                        <a:latin typeface="Calibri" charset="0"/>
-                        <a:ea typeface="Calibri" charset="0"/>
-                        <a:cs typeface="Calibri" charset="0"/>
-                      </a:endParaRPr>
-                    </a:p>
-                  </a:txBody>
-                  <a:tcPr marL="54864" marR="54864" marT="13716" marB="13716" anchor="ctr">
+                        <a:t>Gerencia de Cumplimiento / Gerencia de Sistemas</a:t>
+                      </a:r>
+                      <a:endParaRPr lang="en-US" sz="1100" dirty="0">
+                        <a:latin typeface="Calibri" charset="0"/>
+                        <a:ea typeface="Calibri" charset="0"/>
+                        <a:cs typeface="Calibri" charset="0"/>
+                      </a:endParaRPr>
+                    </a:p>
+                  </a:txBody>
+                  <a:tcPr marL="54864" marR="54864" marT="18288" marB="18288" anchor="ctr">
                     <a:lnL w="0" cap="flat" cmpd="sng" algn="ctr">
                       <a:noFill/>
                     </a:lnL>
@@ -3802,108 +3225,119 @@
                     <a:bodyPr/>
                     <a:lstStyle/>
                     <a:p>
-                      <a:pPr algn="just" indent="0" marL="0">
-                        <a:buNone/>
-                      </a:pPr>
-                      <a:r>
-                        <a:rPr lang="en-US" sz="760" b="1" dirty="0">
-                          <a:solidFill>
-                            <a:schemeClr val="tx1"/>
-                          </a:solidFill>
-                          <a:latin typeface="Calibri" pitchFamily="34" charset="0"/>
-                          <a:ea typeface="Calibri" pitchFamily="34" charset="-122"/>
-                          <a:cs typeface="Calibri" pitchFamily="34" charset="-120"/>
-                        </a:rPr>
-                        <a:t>B.13  Limitante para identificar la base de datos de CRM</a:t>
-                      </a:r>
-                      <a:endParaRPr lang="en-US" sz="760" dirty="0">
-                        <a:latin typeface="Calibri" charset="0"/>
-                        <a:ea typeface="Calibri" charset="0"/>
-                        <a:cs typeface="Calibri" charset="0"/>
-                      </a:endParaRPr>
-                    </a:p>
-                  </a:txBody>
-                  <a:tcPr marL="54864" marR="54864" marT="13716" marB="13716" anchor="ctr">
-                    <a:lnL w="0" cap="flat" cmpd="sng" algn="ctr">
-                      <a:noFill/>
-                    </a:lnL>
-                    <a:lnR w="0" cap="flat" cmpd="sng" algn="ctr">
-                      <a:noFill/>
-                    </a:lnR>
-                    <a:lnT w="0" cap="flat" cmpd="sng" algn="ctr">
-                      <a:noFill/>
-                    </a:lnT>
-                    <a:lnB w="9525" cap="flat" cmpd="sng" algn="ctr">
-                      <a:solidFill>
-                        <a:srgbClr val="D9E0EA"/>
-                      </a:solidFill>
-                      <a:prstDash val="solid"/>
-                      <a:round/>
-                      <a:headEnd type="none" w="med" len="med"/>
-                      <a:tailEnd type="none" w="med" len="med"/>
-                    </a:lnB>
-                    <a:solidFill>
-                      <a:srgbClr val="FFFFFF"/>
-                    </a:solidFill>
-                  </a:tcPr>
-                </a:tc>
-                <a:tc>
-                  <a:txBody>
-                    <a:bodyPr/>
-                    <a:lstStyle/>
-                    <a:p>
-                      <a:pPr algn="just" indent="0" marL="0">
-                        <a:buNone/>
-                      </a:pPr>
-                      <a:r>
-                        <a:rPr lang="en-US" sz="760" dirty="0">
-                          <a:solidFill>
-                            <a:schemeClr val="tx1"/>
-                          </a:solidFill>
-                          <a:latin typeface="Calibri" pitchFamily="34" charset="0"/>
-                          <a:ea typeface="Calibri" pitchFamily="34" charset="-122"/>
-                          <a:cs typeface="Calibri" pitchFamily="34" charset="-120"/>
-                        </a:rPr>
-                        <a:t>Pendiente</a:t>
-                      </a:r>
-                      <a:endParaRPr lang="en-US" sz="760" dirty="0">
-                        <a:latin typeface="Calibri" charset="0"/>
-                        <a:ea typeface="Calibri" charset="0"/>
-                        <a:cs typeface="Calibri" charset="0"/>
-                      </a:endParaRPr>
-                    </a:p>
-                  </a:txBody>
-                  <a:tcPr marL="54864" marR="54864" marT="13716" marB="13716" anchor="ctr">
-                    <a:lnL w="0" cap="flat" cmpd="sng" algn="ctr">
-                      <a:noFill/>
-                    </a:lnL>
-                    <a:lnR w="0" cap="flat" cmpd="sng" algn="ctr">
-                      <a:noFill/>
-                    </a:lnR>
-                    <a:lnT w="0" cap="flat" cmpd="sng" algn="ctr">
-                      <a:noFill/>
-                    </a:lnT>
-                    <a:lnB w="9525" cap="flat" cmpd="sng" algn="ctr">
-                      <a:solidFill>
-                        <a:srgbClr val="D9E0EA"/>
-                      </a:solidFill>
-                      <a:prstDash val="solid"/>
-                      <a:round/>
-                      <a:headEnd type="none" w="med" len="med"/>
-                      <a:tailEnd type="none" w="med" len="med"/>
-                    </a:lnB>
-                  </a:tcPr>
-                </a:tc>
-                <a:tc>
-                  <a:txBody>
-                    <a:bodyPr/>
-                    <a:lstStyle/>
-                    <a:p>
-                      <a:pPr algn="l" indent="0" marL="0">
-                        <a:buNone/>
-                      </a:pPr>
-                      <a:r>
-                        <a:rPr lang="en-US" sz="760" b="1" dirty="0">
+                      <a:pPr indent="0" marL="0">
+                        <a:buNone/>
+                      </a:pPr>
+                      <a:r>
+                        <a:rPr lang="en-US" sz="1100" b="1" dirty="0">
+                          <a:solidFill>
+                            <a:schemeClr val="accent2"/>
+                          </a:solidFill>
+                          <a:latin typeface="Calibri" pitchFamily="34" charset="0"/>
+                          <a:ea typeface="Calibri" pitchFamily="34" charset="-122"/>
+                          <a:cs typeface="Calibri" pitchFamily="34" charset="-120"/>
+                        </a:rPr>
+                        <a:t>B.10  </a:t>
+                      </a:r>
+                      <a:pPr indent="0" marL="0">
+                        <a:buNone/>
+                      </a:pPr>
+                      <a:r>
+                        <a:rPr lang="en-US" sz="1100" b="1" dirty="0">
+                          <a:solidFill>
+                            <a:schemeClr val="tx1"/>
+                          </a:solidFill>
+                          <a:latin typeface="Calibri" pitchFamily="34" charset="0"/>
+                          <a:ea typeface="Calibri" pitchFamily="34" charset="-122"/>
+                          <a:cs typeface="Calibri" pitchFamily="34" charset="-120"/>
+                        </a:rPr>
+                        <a:t>Deficiencia en la hora del sistema y la herramienta de Monitoreo</a:t>
+                      </a:r>
+                      <a:endParaRPr lang="en-US" sz="1100" dirty="0">
+                        <a:latin typeface="Calibri" charset="0"/>
+                        <a:ea typeface="Calibri" charset="0"/>
+                        <a:cs typeface="Calibri" charset="0"/>
+                      </a:endParaRPr>
+                    </a:p>
+                  </a:txBody>
+                  <a:tcPr marL="54864" marR="54864" marT="18288" marB="18288" anchor="ctr">
+                    <a:lnL w="0" cap="flat" cmpd="sng" algn="ctr">
+                      <a:noFill/>
+                    </a:lnL>
+                    <a:lnR w="0" cap="flat" cmpd="sng" algn="ctr">
+                      <a:noFill/>
+                    </a:lnR>
+                    <a:lnT w="0" cap="flat" cmpd="sng" algn="ctr">
+                      <a:noFill/>
+                    </a:lnT>
+                    <a:lnB w="9525" cap="flat" cmpd="sng" algn="ctr">
+                      <a:solidFill>
+                        <a:srgbClr val="D9E0EA"/>
+                      </a:solidFill>
+                      <a:prstDash val="solid"/>
+                      <a:round/>
+                      <a:headEnd type="none" w="med" len="med"/>
+                      <a:tailEnd type="none" w="med" len="med"/>
+                    </a:lnB>
+                  </a:tcPr>
+                </a:tc>
+                <a:tc>
+                  <a:txBody>
+                    <a:bodyPr/>
+                    <a:lstStyle/>
+                    <a:p>
+                      <a:pPr indent="0" marL="0">
+                        <a:buNone/>
+                      </a:pPr>
+                      <a:r>
+                        <a:rPr lang="en-US" sz="1100" dirty="0">
+                          <a:solidFill>
+                            <a:schemeClr val="tx1"/>
+                          </a:solidFill>
+                          <a:latin typeface="Calibri" pitchFamily="34" charset="0"/>
+                          <a:ea typeface="Calibri" pitchFamily="34" charset="-122"/>
+                          <a:cs typeface="Calibri" pitchFamily="34" charset="-120"/>
+                        </a:rPr>
+                        <a:t>Descargo correos de gestion · Pendiente</a:t>
+                      </a:r>
+                      <a:endParaRPr lang="en-US" sz="1100" dirty="0">
+                        <a:latin typeface="Calibri" charset="0"/>
+                        <a:ea typeface="Calibri" charset="0"/>
+                        <a:cs typeface="Calibri" charset="0"/>
+                      </a:endParaRPr>
+                    </a:p>
+                  </a:txBody>
+                  <a:tcPr marL="54864" marR="54864" marT="18288" marB="18288" anchor="ctr">
+                    <a:lnL w="0" cap="flat" cmpd="sng" algn="ctr">
+                      <a:noFill/>
+                    </a:lnL>
+                    <a:lnR w="0" cap="flat" cmpd="sng" algn="ctr">
+                      <a:noFill/>
+                    </a:lnR>
+                    <a:lnT w="0" cap="flat" cmpd="sng" algn="ctr">
+                      <a:noFill/>
+                    </a:lnT>
+                    <a:lnB w="9525" cap="flat" cmpd="sng" algn="ctr">
+                      <a:solidFill>
+                        <a:srgbClr val="D9E0EA"/>
+                      </a:solidFill>
+                      <a:prstDash val="solid"/>
+                      <a:round/>
+                      <a:headEnd type="none" w="med" len="med"/>
+                      <a:tailEnd type="none" w="med" len="med"/>
+                    </a:lnB>
+                  </a:tcPr>
+                </a:tc>
+                <a:tc>
+                  <a:txBody>
+                    <a:bodyPr/>
+                    <a:lstStyle/>
+                    <a:p>
+                      <a:pPr indent="0" marL="0">
+                        <a:buNone/>
+                      </a:pPr>
+                      <a:r>
+                        <a:rPr lang="en-US" sz="1100" b="1" dirty="0">
                           <a:solidFill>
                             <a:schemeClr val="accent1"/>
                           </a:solidFill>
@@ -3913,35 +3347,14 @@
                         </a:rPr>
                         <a:t>Gerencia de Cumplimiento</a:t>
                       </a:r>
-                      <a:endParaRPr lang="en-US" sz="760" dirty="0">
-                        <a:latin typeface="Calibri" charset="0"/>
-                        <a:ea typeface="Calibri" charset="0"/>
-                        <a:cs typeface="Calibri" charset="0"/>
-                      </a:endParaRPr>
-                    </a:p>
-                    <a:p>
-                      <a:pPr algn="l" indent="0" marL="0">
-                        <a:buNone/>
-                      </a:pPr>
-                      <a:r>
-                        <a:rPr lang="en-US" sz="760" b="1" dirty="0">
-                          <a:solidFill>
-                            <a:schemeClr val="accent1"/>
-                          </a:solidFill>
-                          <a:latin typeface="Calibri" pitchFamily="34" charset="0"/>
-                          <a:ea typeface="Calibri" pitchFamily="34" charset="-122"/>
-                          <a:cs typeface="Calibri" pitchFamily="34" charset="-120"/>
-                        </a:rPr>
-                        <a:t>/ Seguridad de la información</a:t>
-                      </a:r>
-                      <a:endParaRPr lang="en-US" sz="760" dirty="0">
-                        <a:latin typeface="Calibri" charset="0"/>
-                        <a:ea typeface="Calibri" charset="0"/>
-                        <a:cs typeface="Calibri" charset="0"/>
-                      </a:endParaRPr>
-                    </a:p>
-                  </a:txBody>
-                  <a:tcPr marL="54864" marR="54864" marT="13716" marB="13716" anchor="ctr">
+                      <a:endParaRPr lang="en-US" sz="1100" dirty="0">
+                        <a:latin typeface="Calibri" charset="0"/>
+                        <a:ea typeface="Calibri" charset="0"/>
+                        <a:cs typeface="Calibri" charset="0"/>
+                      </a:endParaRPr>
+                    </a:p>
+                  </a:txBody>
+                  <a:tcPr marL="54864" marR="54864" marT="18288" marB="18288" anchor="ctr">
                     <a:lnL w="0" cap="flat" cmpd="sng" algn="ctr">
                       <a:noFill/>
                     </a:lnL>
@@ -3969,129 +3382,119 @@
                     <a:bodyPr/>
                     <a:lstStyle/>
                     <a:p>
-                      <a:pPr algn="just" indent="0" marL="0">
-                        <a:buNone/>
-                      </a:pPr>
-                      <a:r>
-                        <a:rPr lang="en-US" sz="760" b="1" dirty="0">
-                          <a:solidFill>
-                            <a:schemeClr val="tx1"/>
-                          </a:solidFill>
-                          <a:latin typeface="Calibri" pitchFamily="34" charset="0"/>
-                          <a:ea typeface="Calibri" pitchFamily="34" charset="-122"/>
-                          <a:cs typeface="Calibri" pitchFamily="34" charset="-120"/>
-                        </a:rPr>
-                        <a:t>B.14  Falta de documentación que dé cumplimiento a lo requerido por el artículo 22 de la NRP-23 correspondiente a la adquisición del sistema CRM.</a:t>
-                      </a:r>
-                      <a:endParaRPr lang="en-US" sz="760" dirty="0">
-                        <a:latin typeface="Calibri" charset="0"/>
-                        <a:ea typeface="Calibri" charset="0"/>
-                        <a:cs typeface="Calibri" charset="0"/>
-                      </a:endParaRPr>
-                    </a:p>
-                  </a:txBody>
-                  <a:tcPr marL="54864" marR="54864" marT="13716" marB="13716" anchor="ctr">
-                    <a:lnL w="0" cap="flat" cmpd="sng" algn="ctr">
-                      <a:noFill/>
-                    </a:lnL>
-                    <a:lnR w="0" cap="flat" cmpd="sng" algn="ctr">
-                      <a:noFill/>
-                    </a:lnR>
-                    <a:lnT w="0" cap="flat" cmpd="sng" algn="ctr">
-                      <a:noFill/>
-                    </a:lnT>
-                    <a:lnB w="9525" cap="flat" cmpd="sng" algn="ctr">
-                      <a:solidFill>
-                        <a:srgbClr val="D9E0EA"/>
-                      </a:solidFill>
-                      <a:prstDash val="solid"/>
-                      <a:round/>
-                      <a:headEnd type="none" w="med" len="med"/>
-                      <a:tailEnd type="none" w="med" len="med"/>
-                    </a:lnB>
-                    <a:solidFill>
-                      <a:srgbClr val="FFFFFF"/>
-                    </a:solidFill>
-                  </a:tcPr>
-                </a:tc>
-                <a:tc>
-                  <a:txBody>
-                    <a:bodyPr/>
-                    <a:lstStyle/>
-                    <a:p>
-                      <a:pPr algn="just" indent="0" marL="0">
-                        <a:buNone/>
-                      </a:pPr>
-                      <a:r>
-                        <a:rPr lang="en-US" sz="760" dirty="0">
-                          <a:solidFill>
-                            <a:schemeClr val="tx1"/>
-                          </a:solidFill>
-                          <a:latin typeface="Calibri" pitchFamily="34" charset="0"/>
-                          <a:ea typeface="Calibri" pitchFamily="34" charset="-122"/>
-                          <a:cs typeface="Calibri" pitchFamily="34" charset="-120"/>
-                        </a:rPr>
-                        <a:t>Descargo</a:t>
-                      </a:r>
-                      <a:endParaRPr lang="en-US" sz="760" dirty="0">
-                        <a:latin typeface="Calibri" charset="0"/>
-                        <a:ea typeface="Calibri" charset="0"/>
-                        <a:cs typeface="Calibri" charset="0"/>
-                      </a:endParaRPr>
-                    </a:p>
-                    <a:p>
-                      <a:pPr algn="just" indent="0" marL="0">
-                        <a:buNone/>
-                      </a:pPr>
-                      <a:r>
-                        <a:rPr lang="en-US" sz="760" dirty="0">
-                          <a:solidFill>
-                            <a:schemeClr val="tx1"/>
-                          </a:solidFill>
-                          <a:latin typeface="Calibri" pitchFamily="34" charset="0"/>
-                          <a:ea typeface="Calibri" pitchFamily="34" charset="-122"/>
-                          <a:cs typeface="Calibri" pitchFamily="34" charset="-120"/>
-                        </a:rPr>
-                        <a:t>Pendiente</a:t>
-                      </a:r>
-                      <a:endParaRPr lang="en-US" sz="760" dirty="0">
-                        <a:latin typeface="Calibri" charset="0"/>
-                        <a:ea typeface="Calibri" charset="0"/>
-                        <a:cs typeface="Calibri" charset="0"/>
-                      </a:endParaRPr>
-                    </a:p>
-                  </a:txBody>
-                  <a:tcPr marL="54864" marR="54864" marT="13716" marB="13716" anchor="ctr">
-                    <a:lnL w="0" cap="flat" cmpd="sng" algn="ctr">
-                      <a:noFill/>
-                    </a:lnL>
-                    <a:lnR w="0" cap="flat" cmpd="sng" algn="ctr">
-                      <a:noFill/>
-                    </a:lnR>
-                    <a:lnT w="0" cap="flat" cmpd="sng" algn="ctr">
-                      <a:noFill/>
-                    </a:lnT>
-                    <a:lnB w="9525" cap="flat" cmpd="sng" algn="ctr">
-                      <a:solidFill>
-                        <a:srgbClr val="D9E0EA"/>
-                      </a:solidFill>
-                      <a:prstDash val="solid"/>
-                      <a:round/>
-                      <a:headEnd type="none" w="med" len="med"/>
-                      <a:tailEnd type="none" w="med" len="med"/>
-                    </a:lnB>
-                  </a:tcPr>
-                </a:tc>
-                <a:tc>
-                  <a:txBody>
-                    <a:bodyPr/>
-                    <a:lstStyle/>
-                    <a:p>
-                      <a:pPr algn="l" indent="0" marL="0">
-                        <a:buNone/>
-                      </a:pPr>
-                      <a:r>
-                        <a:rPr lang="en-US" sz="760" b="1" dirty="0">
+                      <a:pPr indent="0" marL="0">
+                        <a:buNone/>
+                      </a:pPr>
+                      <a:r>
+                        <a:rPr lang="en-US" sz="1100" b="1" dirty="0">
+                          <a:solidFill>
+                            <a:schemeClr val="accent2"/>
+                          </a:solidFill>
+                          <a:latin typeface="Calibri" pitchFamily="34" charset="0"/>
+                          <a:ea typeface="Calibri" pitchFamily="34" charset="-122"/>
+                          <a:cs typeface="Calibri" pitchFamily="34" charset="-120"/>
+                        </a:rPr>
+                        <a:t>B.11  </a:t>
+                      </a:r>
+                      <a:pPr indent="0" marL="0">
+                        <a:buNone/>
+                      </a:pPr>
+                      <a:r>
+                        <a:rPr lang="en-US" sz="1100" b="1" dirty="0">
+                          <a:solidFill>
+                            <a:schemeClr val="tx1"/>
+                          </a:solidFill>
+                          <a:latin typeface="Calibri" pitchFamily="34" charset="0"/>
+                          <a:ea typeface="Calibri" pitchFamily="34" charset="-122"/>
+                          <a:cs typeface="Calibri" pitchFamily="34" charset="-120"/>
+                        </a:rPr>
+                        <a:t>Verificación de las condiciones en ACRM</a:t>
+                      </a:r>
+                      <a:endParaRPr lang="en-US" sz="1100" dirty="0">
+                        <a:latin typeface="Calibri" charset="0"/>
+                        <a:ea typeface="Calibri" charset="0"/>
+                        <a:cs typeface="Calibri" charset="0"/>
+                      </a:endParaRPr>
+                    </a:p>
+                  </a:txBody>
+                  <a:tcPr marL="54864" marR="54864" marT="18288" marB="18288" anchor="ctr">
+                    <a:lnL w="0" cap="flat" cmpd="sng" algn="ctr">
+                      <a:noFill/>
+                    </a:lnL>
+                    <a:lnR w="0" cap="flat" cmpd="sng" algn="ctr">
+                      <a:noFill/>
+                    </a:lnR>
+                    <a:lnT w="0" cap="flat" cmpd="sng" algn="ctr">
+                      <a:noFill/>
+                    </a:lnT>
+                    <a:lnB w="9525" cap="flat" cmpd="sng" algn="ctr">
+                      <a:solidFill>
+                        <a:srgbClr val="D9E0EA"/>
+                      </a:solidFill>
+                      <a:prstDash val="solid"/>
+                      <a:round/>
+                      <a:headEnd type="none" w="med" len="med"/>
+                      <a:tailEnd type="none" w="med" len="med"/>
+                    </a:lnB>
+                  </a:tcPr>
+                </a:tc>
+                <a:tc>
+                  <a:txBody>
+                    <a:bodyPr/>
+                    <a:lstStyle/>
+                    <a:p>
+                      <a:pPr indent="0" marL="0">
+                        <a:buNone/>
+                      </a:pPr>
+                      <a:r>
+                        <a:rPr lang="en-US" sz="1100" dirty="0">
+                          <a:solidFill>
+                            <a:schemeClr val="tx1"/>
+                          </a:solidFill>
+                          <a:latin typeface="Calibri" pitchFamily="34" charset="0"/>
+                          <a:ea typeface="Calibri" pitchFamily="34" charset="-122"/>
+                          <a:cs typeface="Calibri" pitchFamily="34" charset="-120"/>
+                        </a:rPr>
+                        <a:t>Descargo · Pendiente</a:t>
+                      </a:r>
+                      <a:endParaRPr lang="en-US" sz="1100" dirty="0">
+                        <a:latin typeface="Calibri" charset="0"/>
+                        <a:ea typeface="Calibri" charset="0"/>
+                        <a:cs typeface="Calibri" charset="0"/>
+                      </a:endParaRPr>
+                    </a:p>
+                  </a:txBody>
+                  <a:tcPr marL="54864" marR="54864" marT="18288" marB="18288" anchor="ctr">
+                    <a:lnL w="0" cap="flat" cmpd="sng" algn="ctr">
+                      <a:noFill/>
+                    </a:lnL>
+                    <a:lnR w="0" cap="flat" cmpd="sng" algn="ctr">
+                      <a:noFill/>
+                    </a:lnR>
+                    <a:lnT w="0" cap="flat" cmpd="sng" algn="ctr">
+                      <a:noFill/>
+                    </a:lnT>
+                    <a:lnB w="9525" cap="flat" cmpd="sng" algn="ctr">
+                      <a:solidFill>
+                        <a:srgbClr val="D9E0EA"/>
+                      </a:solidFill>
+                      <a:prstDash val="solid"/>
+                      <a:round/>
+                      <a:headEnd type="none" w="med" len="med"/>
+                      <a:tailEnd type="none" w="med" len="med"/>
+                    </a:lnB>
+                  </a:tcPr>
+                </a:tc>
+                <a:tc>
+                  <a:txBody>
+                    <a:bodyPr/>
+                    <a:lstStyle/>
+                    <a:p>
+                      <a:pPr indent="0" marL="0">
+                        <a:buNone/>
+                      </a:pPr>
+                      <a:r>
+                        <a:rPr lang="en-US" sz="1100" b="1" dirty="0">
                           <a:solidFill>
                             <a:schemeClr val="accent1"/>
                           </a:solidFill>
@@ -4101,35 +3504,14 @@
                         </a:rPr>
                         <a:t>Gerencia de Cumplimiento</a:t>
                       </a:r>
-                      <a:endParaRPr lang="en-US" sz="760" dirty="0">
-                        <a:latin typeface="Calibri" charset="0"/>
-                        <a:ea typeface="Calibri" charset="0"/>
-                        <a:cs typeface="Calibri" charset="0"/>
-                      </a:endParaRPr>
-                    </a:p>
-                    <a:p>
-                      <a:pPr algn="l" indent="0" marL="0">
-                        <a:buNone/>
-                      </a:pPr>
-                      <a:r>
-                        <a:rPr lang="en-US" sz="760" b="1" dirty="0">
-                          <a:solidFill>
-                            <a:schemeClr val="accent1"/>
-                          </a:solidFill>
-                          <a:latin typeface="Calibri" pitchFamily="34" charset="0"/>
-                          <a:ea typeface="Calibri" pitchFamily="34" charset="-122"/>
-                          <a:cs typeface="Calibri" pitchFamily="34" charset="-120"/>
-                        </a:rPr>
-                        <a:t>/Seguridad de la Información</a:t>
-                      </a:r>
-                      <a:endParaRPr lang="en-US" sz="760" dirty="0">
-                        <a:latin typeface="Calibri" charset="0"/>
-                        <a:ea typeface="Calibri" charset="0"/>
-                        <a:cs typeface="Calibri" charset="0"/>
-                      </a:endParaRPr>
-                    </a:p>
-                  </a:txBody>
-                  <a:tcPr marL="54864" marR="54864" marT="13716" marB="13716" anchor="ctr">
+                      <a:endParaRPr lang="en-US" sz="1100" dirty="0">
+                        <a:latin typeface="Calibri" charset="0"/>
+                        <a:ea typeface="Calibri" charset="0"/>
+                        <a:cs typeface="Calibri" charset="0"/>
+                      </a:endParaRPr>
+                    </a:p>
+                  </a:txBody>
+                  <a:tcPr marL="54864" marR="54864" marT="18288" marB="18288" anchor="ctr">
                     <a:lnL w="0" cap="flat" cmpd="sng" algn="ctr">
                       <a:noFill/>
                     </a:lnL>
@@ -4157,82 +3539,229 @@
                     <a:bodyPr/>
                     <a:lstStyle/>
                     <a:p>
-                      <a:pPr algn="just" indent="0" marL="0">
-                        <a:buNone/>
-                      </a:pPr>
-                      <a:r>
-                        <a:rPr lang="en-US" sz="760" b="1" dirty="0">
-                          <a:solidFill>
-                            <a:schemeClr val="tx1"/>
-                          </a:solidFill>
-                          <a:latin typeface="Calibri" pitchFamily="34" charset="0"/>
-                          <a:ea typeface="Calibri" pitchFamily="34" charset="-122"/>
-                          <a:cs typeface="Calibri" pitchFamily="34" charset="-120"/>
-                        </a:rPr>
-                        <a:t>B.15  Servicios tercerizados</a:t>
-                      </a:r>
-                      <a:endParaRPr lang="en-US" sz="760" dirty="0">
-                        <a:latin typeface="Calibri" charset="0"/>
-                        <a:ea typeface="Calibri" charset="0"/>
-                        <a:cs typeface="Calibri" charset="0"/>
-                      </a:endParaRPr>
-                    </a:p>
-                  </a:txBody>
-                  <a:tcPr marL="54864" marR="54864" marT="13716" marB="13716" anchor="ctr">
-                    <a:lnL w="0" cap="flat" cmpd="sng" algn="ctr">
-                      <a:noFill/>
-                    </a:lnL>
-                    <a:lnR w="0" cap="flat" cmpd="sng" algn="ctr">
-                      <a:noFill/>
-                    </a:lnR>
-                    <a:lnT w="0" cap="flat" cmpd="sng" algn="ctr">
-                      <a:noFill/>
-                    </a:lnT>
-                    <a:lnB w="9525" cap="flat" cmpd="sng" algn="ctr">
-                      <a:solidFill>
-                        <a:srgbClr val="D9E0EA"/>
-                      </a:solidFill>
-                      <a:prstDash val="solid"/>
-                      <a:round/>
-                      <a:headEnd type="none" w="med" len="med"/>
-                      <a:tailEnd type="none" w="med" len="med"/>
-                    </a:lnB>
-                    <a:solidFill>
-                      <a:srgbClr val="FFFFFF"/>
-                    </a:solidFill>
-                  </a:tcPr>
-                </a:tc>
-                <a:tc>
-                  <a:txBody>
-                    <a:bodyPr/>
-                    <a:lstStyle/>
-                    <a:p>
-                      <a:pPr algn="just" indent="0" marL="0">
-                        <a:buNone/>
-                      </a:pPr>
-                      <a:r>
-                        <a:rPr lang="en-US" sz="760" dirty="0">
-                          <a:solidFill>
-                            <a:schemeClr val="tx1"/>
-                          </a:solidFill>
-                          <a:latin typeface="Calibri" pitchFamily="34" charset="0"/>
-                          <a:ea typeface="Calibri" pitchFamily="34" charset="-122"/>
-                          <a:cs typeface="Calibri" pitchFamily="34" charset="-120"/>
-                        </a:rPr>
-                        <a:t>Plan de acción:</a:t>
-                      </a:r>
-                      <a:endParaRPr lang="en-US" sz="760" dirty="0">
-                        <a:latin typeface="Calibri" charset="0"/>
-                        <a:ea typeface="Calibri" charset="0"/>
-                        <a:cs typeface="Calibri" charset="0"/>
-                      </a:endParaRPr>
-                    </a:p>
-                    <a:p>
-                      <a:pPr algn="just" indent="0" marL="0">
-                        <a:buNone/>
-                      </a:pPr>
-                      <a:r>
-                        <a:rPr lang="en-US" sz="760" dirty="0">
+                      <a:pPr indent="0" marL="0">
+                        <a:buNone/>
+                      </a:pPr>
+                      <a:r>
+                        <a:rPr lang="en-US" sz="1100" b="1" dirty="0">
+                          <a:solidFill>
+                            <a:schemeClr val="accent2"/>
+                          </a:solidFill>
+                          <a:latin typeface="Calibri" pitchFamily="34" charset="0"/>
+                          <a:ea typeface="Calibri" pitchFamily="34" charset="-122"/>
+                          <a:cs typeface="Calibri" pitchFamily="34" charset="-120"/>
+                        </a:rPr>
+                        <a:t>B.12  </a:t>
+                      </a:r>
+                      <a:pPr indent="0" marL="0">
+                        <a:buNone/>
+                      </a:pPr>
+                      <a:r>
+                        <a:rPr lang="en-US" sz="1100" b="1" dirty="0">
+                          <a:solidFill>
+                            <a:schemeClr val="tx1"/>
+                          </a:solidFill>
+                          <a:latin typeface="Calibri" pitchFamily="34" charset="0"/>
+                          <a:ea typeface="Calibri" pitchFamily="34" charset="-122"/>
+                          <a:cs typeface="Calibri" pitchFamily="34" charset="-120"/>
+                        </a:rPr>
+                        <a:t>Limitante de Accesos a los Datos de COMEDICA, alojada en la Herramienta de Monitoreo.</a:t>
+                      </a:r>
+                      <a:endParaRPr lang="en-US" sz="1100" dirty="0">
+                        <a:latin typeface="Calibri" charset="0"/>
+                        <a:ea typeface="Calibri" charset="0"/>
+                        <a:cs typeface="Calibri" charset="0"/>
+                      </a:endParaRPr>
+                    </a:p>
+                  </a:txBody>
+                  <a:tcPr marL="54864" marR="54864" marT="18288" marB="18288" anchor="ctr">
+                    <a:lnL w="0" cap="flat" cmpd="sng" algn="ctr">
+                      <a:noFill/>
+                    </a:lnL>
+                    <a:lnR w="0" cap="flat" cmpd="sng" algn="ctr">
+                      <a:noFill/>
+                    </a:lnR>
+                    <a:lnT w="0" cap="flat" cmpd="sng" algn="ctr">
+                      <a:noFill/>
+                    </a:lnT>
+                    <a:lnB w="9525" cap="flat" cmpd="sng" algn="ctr">
+                      <a:solidFill>
+                        <a:srgbClr val="D9E0EA"/>
+                      </a:solidFill>
+                      <a:prstDash val="solid"/>
+                      <a:round/>
+                      <a:headEnd type="none" w="med" len="med"/>
+                      <a:tailEnd type="none" w="med" len="med"/>
+                    </a:lnB>
+                  </a:tcPr>
+                </a:tc>
+                <a:tc>
+                  <a:txBody>
+                    <a:bodyPr/>
+                    <a:lstStyle/>
+                    <a:p>
+                      <a:pPr indent="0" marL="0">
+                        <a:buNone/>
+                      </a:pPr>
+                      <a:r>
+                        <a:rPr lang="en-US" sz="1100" dirty="0">
+                          <a:solidFill>
+                            <a:schemeClr val="tx1"/>
+                          </a:solidFill>
+                          <a:latin typeface="Calibri" pitchFamily="34" charset="0"/>
+                          <a:ea typeface="Calibri" pitchFamily="34" charset="-122"/>
+                          <a:cs typeface="Calibri" pitchFamily="34" charset="-120"/>
+                        </a:rPr>
+                        <a:t>Descargo · Pendiente</a:t>
+                      </a:r>
+                      <a:endParaRPr lang="en-US" sz="1100" dirty="0">
+                        <a:latin typeface="Calibri" charset="0"/>
+                        <a:ea typeface="Calibri" charset="0"/>
+                        <a:cs typeface="Calibri" charset="0"/>
+                      </a:endParaRPr>
+                    </a:p>
+                  </a:txBody>
+                  <a:tcPr marL="54864" marR="54864" marT="18288" marB="18288" anchor="ctr">
+                    <a:lnL w="0" cap="flat" cmpd="sng" algn="ctr">
+                      <a:noFill/>
+                    </a:lnL>
+                    <a:lnR w="0" cap="flat" cmpd="sng" algn="ctr">
+                      <a:noFill/>
+                    </a:lnR>
+                    <a:lnT w="0" cap="flat" cmpd="sng" algn="ctr">
+                      <a:noFill/>
+                    </a:lnT>
+                    <a:lnB w="9525" cap="flat" cmpd="sng" algn="ctr">
+                      <a:solidFill>
+                        <a:srgbClr val="D9E0EA"/>
+                      </a:solidFill>
+                      <a:prstDash val="solid"/>
+                      <a:round/>
+                      <a:headEnd type="none" w="med" len="med"/>
+                      <a:tailEnd type="none" w="med" len="med"/>
+                    </a:lnB>
+                  </a:tcPr>
+                </a:tc>
+                <a:tc>
+                  <a:txBody>
+                    <a:bodyPr/>
+                    <a:lstStyle/>
+                    <a:p>
+                      <a:pPr indent="0" marL="0">
+                        <a:buNone/>
+                      </a:pPr>
+                      <a:r>
+                        <a:rPr lang="en-US" sz="1100" b="1" dirty="0">
+                          <a:solidFill>
+                            <a:schemeClr val="accent1"/>
+                          </a:solidFill>
+                          <a:latin typeface="Calibri" pitchFamily="34" charset="0"/>
+                          <a:ea typeface="Calibri" pitchFamily="34" charset="-122"/>
+                          <a:cs typeface="Calibri" pitchFamily="34" charset="-120"/>
+                        </a:rPr>
+                        <a:t>Gerencia de Cumplimiento / Seguridad de la información</a:t>
+                      </a:r>
+                      <a:endParaRPr lang="en-US" sz="1100" dirty="0">
+                        <a:latin typeface="Calibri" charset="0"/>
+                        <a:ea typeface="Calibri" charset="0"/>
+                        <a:cs typeface="Calibri" charset="0"/>
+                      </a:endParaRPr>
+                    </a:p>
+                  </a:txBody>
+                  <a:tcPr marL="54864" marR="54864" marT="18288" marB="18288" anchor="ctr">
+                    <a:lnL w="0" cap="flat" cmpd="sng" algn="ctr">
+                      <a:noFill/>
+                    </a:lnL>
+                    <a:lnR w="0" cap="flat" cmpd="sng" algn="ctr">
+                      <a:noFill/>
+                    </a:lnR>
+                    <a:lnT w="0" cap="flat" cmpd="sng" algn="ctr">
+                      <a:noFill/>
+                    </a:lnT>
+                    <a:lnB w="9525" cap="flat" cmpd="sng" algn="ctr">
+                      <a:solidFill>
+                        <a:srgbClr val="D9E0EA"/>
+                      </a:solidFill>
+                      <a:prstDash val="solid"/>
+                      <a:round/>
+                      <a:headEnd type="none" w="med" len="med"/>
+                      <a:tailEnd type="none" w="med" len="med"/>
+                    </a:lnB>
+                  </a:tcPr>
+                </a:tc>
+              </a:tr>
+              <a:tr h="0">
+                <a:tc>
+                  <a:txBody>
+                    <a:bodyPr/>
+                    <a:lstStyle/>
+                    <a:p>
+                      <a:pPr indent="0" marL="0">
+                        <a:buNone/>
+                      </a:pPr>
+                      <a:r>
+                        <a:rPr lang="en-US" sz="1100" b="1" dirty="0">
+                          <a:solidFill>
+                            <a:schemeClr val="accent2"/>
+                          </a:solidFill>
+                          <a:latin typeface="Calibri" pitchFamily="34" charset="0"/>
+                          <a:ea typeface="Calibri" pitchFamily="34" charset="-122"/>
+                          <a:cs typeface="Calibri" pitchFamily="34" charset="-120"/>
+                        </a:rPr>
+                        <a:t>B.13  </a:t>
+                      </a:r>
+                      <a:pPr indent="0" marL="0">
+                        <a:buNone/>
+                      </a:pPr>
+                      <a:r>
+                        <a:rPr lang="en-US" sz="1100" b="1" dirty="0">
+                          <a:solidFill>
+                            <a:schemeClr val="tx1"/>
+                          </a:solidFill>
+                          <a:latin typeface="Calibri" pitchFamily="34" charset="0"/>
+                          <a:ea typeface="Calibri" pitchFamily="34" charset="-122"/>
+                          <a:cs typeface="Calibri" pitchFamily="34" charset="-120"/>
+                        </a:rPr>
+                        <a:t>Limitante para identificar la base de datos de CRM</a:t>
+                      </a:r>
+                      <a:endParaRPr lang="en-US" sz="1100" dirty="0">
+                        <a:latin typeface="Calibri" charset="0"/>
+                        <a:ea typeface="Calibri" charset="0"/>
+                        <a:cs typeface="Calibri" charset="0"/>
+                      </a:endParaRPr>
+                    </a:p>
+                  </a:txBody>
+                  <a:tcPr marL="54864" marR="54864" marT="18288" marB="18288" anchor="ctr">
+                    <a:lnL w="0" cap="flat" cmpd="sng" algn="ctr">
+                      <a:noFill/>
+                    </a:lnL>
+                    <a:lnR w="0" cap="flat" cmpd="sng" algn="ctr">
+                      <a:noFill/>
+                    </a:lnR>
+                    <a:lnT w="0" cap="flat" cmpd="sng" algn="ctr">
+                      <a:noFill/>
+                    </a:lnT>
+                    <a:lnB w="9525" cap="flat" cmpd="sng" algn="ctr">
+                      <a:solidFill>
+                        <a:srgbClr val="D9E0EA"/>
+                      </a:solidFill>
+                      <a:prstDash val="solid"/>
+                      <a:round/>
+                      <a:headEnd type="none" w="med" len="med"/>
+                      <a:tailEnd type="none" w="med" len="med"/>
+                    </a:lnB>
+                  </a:tcPr>
+                </a:tc>
+                <a:tc>
+                  <a:txBody>
+                    <a:bodyPr/>
+                    <a:lstStyle/>
+                    <a:p>
+                      <a:pPr indent="0" marL="0">
+                        <a:buNone/>
+                      </a:pPr>
+                      <a:r>
+                        <a:rPr lang="en-US" sz="1100" dirty="0">
                           <a:solidFill>
                             <a:schemeClr val="tx1"/>
                           </a:solidFill>
@@ -4242,86 +3771,44 @@
                         </a:rPr>
                         <a:t>Pendiente</a:t>
                       </a:r>
-                      <a:endParaRPr lang="en-US" sz="760" dirty="0">
-                        <a:latin typeface="Calibri" charset="0"/>
-                        <a:ea typeface="Calibri" charset="0"/>
-                        <a:cs typeface="Calibri" charset="0"/>
-                      </a:endParaRPr>
-                    </a:p>
-                    <a:p>
-                      <a:pPr algn="just" indent="0" marL="0">
-                        <a:buNone/>
-                      </a:pPr>
-                      <a:r>
-                        <a:rPr lang="en-US" sz="760" dirty="0">
-                          <a:solidFill>
-                            <a:schemeClr val="tx1"/>
-                          </a:solidFill>
-                          <a:latin typeface="Calibri" pitchFamily="34" charset="0"/>
-                          <a:ea typeface="Calibri" pitchFamily="34" charset="-122"/>
-                          <a:cs typeface="Calibri" pitchFamily="34" charset="-120"/>
-                        </a:rPr>
-                        <a:t>Comentario Licda. Bonilla: Como parte del fortalecimiento de los controles de seguridad asociados al servicio tercerizado del módulo ACRM, la Unidad de Seguridad de la Información y Ciberseguridad realizará una reevaluación de los riesgos de seguridad de la información y ciberseguridad, mediante la actualización de la matriz de riesgos y la revisión de los controles existentes, con el propósito de identificar oportunidades de mejora y definir las medidas adicionales de tratamiento que correspondan, en coordinación con el área responsable de la solución el proveedor.</a:t>
-                      </a:r>
-                      <a:endParaRPr lang="en-US" sz="760" dirty="0">
-                        <a:latin typeface="Calibri" charset="0"/>
-                        <a:ea typeface="Calibri" charset="0"/>
-                        <a:cs typeface="Calibri" charset="0"/>
-                      </a:endParaRPr>
-                    </a:p>
-                    <a:p>
-                      <a:pPr algn="just" indent="0" marL="0">
-                        <a:buNone/>
-                      </a:pPr>
-                      <a:r>
-                        <a:rPr lang="en-US" sz="760" dirty="0">
-                          <a:solidFill>
-                            <a:schemeClr val="tx1"/>
-                          </a:solidFill>
-                          <a:latin typeface="Calibri" pitchFamily="34" charset="0"/>
-                          <a:ea typeface="Calibri" pitchFamily="34" charset="-122"/>
-                          <a:cs typeface="Calibri" pitchFamily="34" charset="-120"/>
-                        </a:rPr>
-                        <a:t>Fecha de cumplimiento: 30 de noviembre de 2026.</a:t>
-                      </a:r>
-                      <a:endParaRPr lang="en-US" sz="760" dirty="0">
-                        <a:latin typeface="Calibri" charset="0"/>
-                        <a:ea typeface="Calibri" charset="0"/>
-                        <a:cs typeface="Calibri" charset="0"/>
-                      </a:endParaRPr>
-                    </a:p>
-                  </a:txBody>
-                  <a:tcPr marL="54864" marR="54864" marT="13716" marB="13716" anchor="ctr">
-                    <a:lnL w="0" cap="flat" cmpd="sng" algn="ctr">
-                      <a:noFill/>
-                    </a:lnL>
-                    <a:lnR w="0" cap="flat" cmpd="sng" algn="ctr">
-                      <a:noFill/>
-                    </a:lnR>
-                    <a:lnT w="0" cap="flat" cmpd="sng" algn="ctr">
-                      <a:noFill/>
-                    </a:lnT>
-                    <a:lnB w="9525" cap="flat" cmpd="sng" algn="ctr">
-                      <a:solidFill>
-                        <a:srgbClr val="D9E0EA"/>
-                      </a:solidFill>
-                      <a:prstDash val="solid"/>
-                      <a:round/>
-                      <a:headEnd type="none" w="med" len="med"/>
-                      <a:tailEnd type="none" w="med" len="med"/>
-                    </a:lnB>
-                  </a:tcPr>
-                </a:tc>
-                <a:tc>
-                  <a:txBody>
-                    <a:bodyPr/>
-                    <a:lstStyle/>
-                    <a:p>
-                      <a:pPr algn="l" indent="0" marL="0">
-                        <a:buNone/>
-                      </a:pPr>
-                      <a:r>
-                        <a:rPr lang="en-US" sz="760" b="1" dirty="0">
+                      <a:endParaRPr lang="en-US" sz="1100" dirty="0">
+                        <a:latin typeface="Calibri" charset="0"/>
+                        <a:ea typeface="Calibri" charset="0"/>
+                        <a:cs typeface="Calibri" charset="0"/>
+                      </a:endParaRPr>
+                    </a:p>
+                  </a:txBody>
+                  <a:tcPr marL="54864" marR="54864" marT="18288" marB="18288" anchor="ctr">
+                    <a:lnL w="0" cap="flat" cmpd="sng" algn="ctr">
+                      <a:noFill/>
+                    </a:lnL>
+                    <a:lnR w="0" cap="flat" cmpd="sng" algn="ctr">
+                      <a:noFill/>
+                    </a:lnR>
+                    <a:lnT w="0" cap="flat" cmpd="sng" algn="ctr">
+                      <a:noFill/>
+                    </a:lnT>
+                    <a:lnB w="9525" cap="flat" cmpd="sng" algn="ctr">
+                      <a:solidFill>
+                        <a:srgbClr val="D9E0EA"/>
+                      </a:solidFill>
+                      <a:prstDash val="solid"/>
+                      <a:round/>
+                      <a:headEnd type="none" w="med" len="med"/>
+                      <a:tailEnd type="none" w="med" len="med"/>
+                    </a:lnB>
+                  </a:tcPr>
+                </a:tc>
+                <a:tc>
+                  <a:txBody>
+                    <a:bodyPr/>
+                    <a:lstStyle/>
+                    <a:p>
+                      <a:pPr indent="0" marL="0">
+                        <a:buNone/>
+                      </a:pPr>
+                      <a:r>
+                        <a:rPr lang="en-US" sz="1100" b="1" dirty="0">
                           <a:solidFill>
                             <a:schemeClr val="accent1"/>
                           </a:solidFill>
@@ -4329,20 +3816,156 @@
                           <a:ea typeface="Calibri" pitchFamily="34" charset="-122"/>
                           <a:cs typeface="Calibri" pitchFamily="34" charset="-120"/>
                         </a:rPr>
-                        <a:t>Gerencia de Cumplimiento</a:t>
-                      </a:r>
-                      <a:endParaRPr lang="en-US" sz="760" dirty="0">
-                        <a:latin typeface="Calibri" charset="0"/>
-                        <a:ea typeface="Calibri" charset="0"/>
-                        <a:cs typeface="Calibri" charset="0"/>
-                      </a:endParaRPr>
-                    </a:p>
-                    <a:p>
-                      <a:pPr algn="l" indent="0" marL="0">
-                        <a:buNone/>
-                      </a:pPr>
-                      <a:r>
-                        <a:rPr lang="en-US" sz="760" b="1" dirty="0">
+                        <a:t>Gerencia de Cumplimiento / Seguridad de la información</a:t>
+                      </a:r>
+                      <a:endParaRPr lang="en-US" sz="1100" dirty="0">
+                        <a:latin typeface="Calibri" charset="0"/>
+                        <a:ea typeface="Calibri" charset="0"/>
+                        <a:cs typeface="Calibri" charset="0"/>
+                      </a:endParaRPr>
+                    </a:p>
+                  </a:txBody>
+                  <a:tcPr marL="54864" marR="54864" marT="18288" marB="18288" anchor="ctr">
+                    <a:lnL w="0" cap="flat" cmpd="sng" algn="ctr">
+                      <a:noFill/>
+                    </a:lnL>
+                    <a:lnR w="0" cap="flat" cmpd="sng" algn="ctr">
+                      <a:noFill/>
+                    </a:lnR>
+                    <a:lnT w="0" cap="flat" cmpd="sng" algn="ctr">
+                      <a:noFill/>
+                    </a:lnT>
+                    <a:lnB w="9525" cap="flat" cmpd="sng" algn="ctr">
+                      <a:solidFill>
+                        <a:srgbClr val="D9E0EA"/>
+                      </a:solidFill>
+                      <a:prstDash val="solid"/>
+                      <a:round/>
+                      <a:headEnd type="none" w="med" len="med"/>
+                      <a:tailEnd type="none" w="med" len="med"/>
+                    </a:lnB>
+                  </a:tcPr>
+                </a:tc>
+              </a:tr>
+              <a:tr h="0">
+                <a:tc>
+                  <a:txBody>
+                    <a:bodyPr/>
+                    <a:lstStyle/>
+                    <a:p>
+                      <a:pPr indent="0" marL="0">
+                        <a:buNone/>
+                      </a:pPr>
+                      <a:r>
+                        <a:rPr lang="en-US" sz="1100" b="1" dirty="0">
+                          <a:solidFill>
+                            <a:schemeClr val="accent2"/>
+                          </a:solidFill>
+                          <a:latin typeface="Calibri" pitchFamily="34" charset="0"/>
+                          <a:ea typeface="Calibri" pitchFamily="34" charset="-122"/>
+                          <a:cs typeface="Calibri" pitchFamily="34" charset="-120"/>
+                        </a:rPr>
+                        <a:t>B.14  </a:t>
+                      </a:r>
+                      <a:pPr indent="0" marL="0">
+                        <a:buNone/>
+                      </a:pPr>
+                      <a:r>
+                        <a:rPr lang="en-US" sz="1100" b="1" dirty="0">
+                          <a:solidFill>
+                            <a:schemeClr val="tx1"/>
+                          </a:solidFill>
+                          <a:latin typeface="Calibri" pitchFamily="34" charset="0"/>
+                          <a:ea typeface="Calibri" pitchFamily="34" charset="-122"/>
+                          <a:cs typeface="Calibri" pitchFamily="34" charset="-120"/>
+                        </a:rPr>
+                        <a:t>Falta de documentación que dé cumplimiento a lo requerido por el artículo 22 de la NRP-23 correspondiente a la adquisición del sistema CRM.</a:t>
+                      </a:r>
+                      <a:endParaRPr lang="en-US" sz="1100" dirty="0">
+                        <a:latin typeface="Calibri" charset="0"/>
+                        <a:ea typeface="Calibri" charset="0"/>
+                        <a:cs typeface="Calibri" charset="0"/>
+                      </a:endParaRPr>
+                    </a:p>
+                  </a:txBody>
+                  <a:tcPr marL="54864" marR="54864" marT="18288" marB="18288" anchor="ctr">
+                    <a:lnL w="0" cap="flat" cmpd="sng" algn="ctr">
+                      <a:noFill/>
+                    </a:lnL>
+                    <a:lnR w="0" cap="flat" cmpd="sng" algn="ctr">
+                      <a:noFill/>
+                    </a:lnR>
+                    <a:lnT w="0" cap="flat" cmpd="sng" algn="ctr">
+                      <a:noFill/>
+                    </a:lnT>
+                    <a:lnB w="9525" cap="flat" cmpd="sng" algn="ctr">
+                      <a:solidFill>
+                        <a:srgbClr val="D9E0EA"/>
+                      </a:solidFill>
+                      <a:prstDash val="solid"/>
+                      <a:round/>
+                      <a:headEnd type="none" w="med" len="med"/>
+                      <a:tailEnd type="none" w="med" len="med"/>
+                    </a:lnB>
+                  </a:tcPr>
+                </a:tc>
+                <a:tc>
+                  <a:txBody>
+                    <a:bodyPr/>
+                    <a:lstStyle/>
+                    <a:p>
+                      <a:pPr indent="0" marL="0">
+                        <a:buNone/>
+                      </a:pPr>
+                      <a:r>
+                        <a:rPr lang="en-US" sz="1100" dirty="0">
+                          <a:solidFill>
+                            <a:schemeClr val="tx1"/>
+                          </a:solidFill>
+                          <a:latin typeface="Calibri" pitchFamily="34" charset="0"/>
+                          <a:ea typeface="Calibri" pitchFamily="34" charset="-122"/>
+                          <a:cs typeface="Calibri" pitchFamily="34" charset="-120"/>
+                        </a:rPr>
+                        <a:t>Descargo · Pendiente</a:t>
+                      </a:r>
+                      <a:endParaRPr lang="en-US" sz="1100" dirty="0">
+                        <a:latin typeface="Calibri" charset="0"/>
+                        <a:ea typeface="Calibri" charset="0"/>
+                        <a:cs typeface="Calibri" charset="0"/>
+                      </a:endParaRPr>
+                    </a:p>
+                  </a:txBody>
+                  <a:tcPr marL="54864" marR="54864" marT="18288" marB="18288" anchor="ctr">
+                    <a:lnL w="0" cap="flat" cmpd="sng" algn="ctr">
+                      <a:noFill/>
+                    </a:lnL>
+                    <a:lnR w="0" cap="flat" cmpd="sng" algn="ctr">
+                      <a:noFill/>
+                    </a:lnR>
+                    <a:lnT w="0" cap="flat" cmpd="sng" algn="ctr">
+                      <a:noFill/>
+                    </a:lnT>
+                    <a:lnB w="9525" cap="flat" cmpd="sng" algn="ctr">
+                      <a:solidFill>
+                        <a:srgbClr val="D9E0EA"/>
+                      </a:solidFill>
+                      <a:prstDash val="solid"/>
+                      <a:round/>
+                      <a:headEnd type="none" w="med" len="med"/>
+                      <a:tailEnd type="none" w="med" len="med"/>
+                    </a:lnB>
+                  </a:tcPr>
+                </a:tc>
+                <a:tc>
+                  <a:txBody>
+                    <a:bodyPr/>
+                    <a:lstStyle/>
+                    <a:p>
+                      <a:pPr indent="0" marL="0">
+                        <a:buNone/>
+                      </a:pPr>
+                      <a:r>
+                        <a:rPr lang="en-US" sz="1100" b="1" dirty="0">
                           <a:solidFill>
                             <a:schemeClr val="accent1"/>
                           </a:solidFill>
@@ -4350,16 +3973,173 @@
                           <a:ea typeface="Calibri" pitchFamily="34" charset="-122"/>
                           <a:cs typeface="Calibri" pitchFamily="34" charset="-120"/>
                         </a:rPr>
-                        <a:t>/ Seguridad de la Información</a:t>
-                      </a:r>
-                      <a:endParaRPr lang="en-US" sz="760" dirty="0">
-                        <a:latin typeface="Calibri" charset="0"/>
-                        <a:ea typeface="Calibri" charset="0"/>
-                        <a:cs typeface="Calibri" charset="0"/>
-                      </a:endParaRPr>
-                    </a:p>
-                  </a:txBody>
-                  <a:tcPr marL="54864" marR="54864" marT="13716" marB="13716" anchor="ctr">
+                        <a:t>Gerencia de Cumplimiento /Seguridad de la Información</a:t>
+                      </a:r>
+                      <a:endParaRPr lang="en-US" sz="1100" dirty="0">
+                        <a:latin typeface="Calibri" charset="0"/>
+                        <a:ea typeface="Calibri" charset="0"/>
+                        <a:cs typeface="Calibri" charset="0"/>
+                      </a:endParaRPr>
+                    </a:p>
+                  </a:txBody>
+                  <a:tcPr marL="54864" marR="54864" marT="18288" marB="18288" anchor="ctr">
+                    <a:lnL w="0" cap="flat" cmpd="sng" algn="ctr">
+                      <a:noFill/>
+                    </a:lnL>
+                    <a:lnR w="0" cap="flat" cmpd="sng" algn="ctr">
+                      <a:noFill/>
+                    </a:lnR>
+                    <a:lnT w="0" cap="flat" cmpd="sng" algn="ctr">
+                      <a:noFill/>
+                    </a:lnT>
+                    <a:lnB w="9525" cap="flat" cmpd="sng" algn="ctr">
+                      <a:solidFill>
+                        <a:srgbClr val="D9E0EA"/>
+                      </a:solidFill>
+                      <a:prstDash val="solid"/>
+                      <a:round/>
+                      <a:headEnd type="none" w="med" len="med"/>
+                      <a:tailEnd type="none" w="med" len="med"/>
+                    </a:lnB>
+                  </a:tcPr>
+                </a:tc>
+              </a:tr>
+              <a:tr h="0">
+                <a:tc>
+                  <a:txBody>
+                    <a:bodyPr/>
+                    <a:lstStyle/>
+                    <a:p>
+                      <a:pPr indent="0" marL="0">
+                        <a:buNone/>
+                      </a:pPr>
+                      <a:r>
+                        <a:rPr lang="en-US" sz="1100" b="1" dirty="0">
+                          <a:solidFill>
+                            <a:schemeClr val="accent2"/>
+                          </a:solidFill>
+                          <a:latin typeface="Calibri" pitchFamily="34" charset="0"/>
+                          <a:ea typeface="Calibri" pitchFamily="34" charset="-122"/>
+                          <a:cs typeface="Calibri" pitchFamily="34" charset="-120"/>
+                        </a:rPr>
+                        <a:t>B.15  </a:t>
+                      </a:r>
+                      <a:pPr indent="0" marL="0">
+                        <a:buNone/>
+                      </a:pPr>
+                      <a:r>
+                        <a:rPr lang="en-US" sz="1100" b="1" dirty="0">
+                          <a:solidFill>
+                            <a:schemeClr val="tx1"/>
+                          </a:solidFill>
+                          <a:latin typeface="Calibri" pitchFamily="34" charset="0"/>
+                          <a:ea typeface="Calibri" pitchFamily="34" charset="-122"/>
+                          <a:cs typeface="Calibri" pitchFamily="34" charset="-120"/>
+                        </a:rPr>
+                        <a:t>Servicios tercerizados</a:t>
+                      </a:r>
+                      <a:endParaRPr lang="en-US" sz="1100" dirty="0">
+                        <a:latin typeface="Calibri" charset="0"/>
+                        <a:ea typeface="Calibri" charset="0"/>
+                        <a:cs typeface="Calibri" charset="0"/>
+                      </a:endParaRPr>
+                    </a:p>
+                  </a:txBody>
+                  <a:tcPr marL="54864" marR="54864" marT="18288" marB="18288" anchor="ctr">
+                    <a:lnL w="0" cap="flat" cmpd="sng" algn="ctr">
+                      <a:noFill/>
+                    </a:lnL>
+                    <a:lnR w="0" cap="flat" cmpd="sng" algn="ctr">
+                      <a:noFill/>
+                    </a:lnR>
+                    <a:lnT w="0" cap="flat" cmpd="sng" algn="ctr">
+                      <a:noFill/>
+                    </a:lnT>
+                    <a:lnB w="9525" cap="flat" cmpd="sng" algn="ctr">
+                      <a:solidFill>
+                        <a:srgbClr val="D9E0EA"/>
+                      </a:solidFill>
+                      <a:prstDash val="solid"/>
+                      <a:round/>
+                      <a:headEnd type="none" w="med" len="med"/>
+                      <a:tailEnd type="none" w="med" len="med"/>
+                    </a:lnB>
+                  </a:tcPr>
+                </a:tc>
+                <a:tc>
+                  <a:txBody>
+                    <a:bodyPr/>
+                    <a:lstStyle/>
+                    <a:p>
+                      <a:pPr indent="0" marL="0">
+                        <a:buNone/>
+                      </a:pPr>
+                      <a:r>
+                        <a:rPr lang="en-US" sz="1100" dirty="0">
+                          <a:solidFill>
+                            <a:schemeClr val="tx1"/>
+                          </a:solidFill>
+                          <a:latin typeface="Calibri" pitchFamily="34" charset="0"/>
+                          <a:ea typeface="Calibri" pitchFamily="34" charset="-122"/>
+                          <a:cs typeface="Calibri" pitchFamily="34" charset="-120"/>
+                        </a:rPr>
+                        <a:t>Plan de acción: · Pendiente</a:t>
+                      </a:r>
+                      <a:endParaRPr lang="en-US" sz="1100" dirty="0">
+                        <a:latin typeface="Calibri" charset="0"/>
+                        <a:ea typeface="Calibri" charset="0"/>
+                        <a:cs typeface="Calibri" charset="0"/>
+                      </a:endParaRPr>
+                    </a:p>
+                  </a:txBody>
+                  <a:tcPr marL="54864" marR="54864" marT="18288" marB="18288" anchor="ctr">
+                    <a:lnL w="0" cap="flat" cmpd="sng" algn="ctr">
+                      <a:noFill/>
+                    </a:lnL>
+                    <a:lnR w="0" cap="flat" cmpd="sng" algn="ctr">
+                      <a:noFill/>
+                    </a:lnR>
+                    <a:lnT w="0" cap="flat" cmpd="sng" algn="ctr">
+                      <a:noFill/>
+                    </a:lnT>
+                    <a:lnB w="9525" cap="flat" cmpd="sng" algn="ctr">
+                      <a:solidFill>
+                        <a:srgbClr val="D9E0EA"/>
+                      </a:solidFill>
+                      <a:prstDash val="solid"/>
+                      <a:round/>
+                      <a:headEnd type="none" w="med" len="med"/>
+                      <a:tailEnd type="none" w="med" len="med"/>
+                    </a:lnB>
+                  </a:tcPr>
+                </a:tc>
+                <a:tc>
+                  <a:txBody>
+                    <a:bodyPr/>
+                    <a:lstStyle/>
+                    <a:p>
+                      <a:pPr indent="0" marL="0">
+                        <a:buNone/>
+                      </a:pPr>
+                      <a:r>
+                        <a:rPr lang="en-US" sz="1100" b="1" dirty="0">
+                          <a:solidFill>
+                            <a:schemeClr val="accent1"/>
+                          </a:solidFill>
+                          <a:latin typeface="Calibri" pitchFamily="34" charset="0"/>
+                          <a:ea typeface="Calibri" pitchFamily="34" charset="-122"/>
+                          <a:cs typeface="Calibri" pitchFamily="34" charset="-120"/>
+                        </a:rPr>
+                        <a:t>Gerencia de Cumplimiento / Seguridad de la Información</a:t>
+                      </a:r>
+                      <a:endParaRPr lang="en-US" sz="1100" dirty="0">
+                        <a:latin typeface="Calibri" charset="0"/>
+                        <a:ea typeface="Calibri" charset="0"/>
+                        <a:cs typeface="Calibri" charset="0"/>
+                      </a:endParaRPr>
+                    </a:p>
+                  </a:txBody>
+                  <a:tcPr marL="54864" marR="54864" marT="18288" marB="18288" anchor="ctr">
                     <a:lnL w="0" cap="flat" cmpd="sng" algn="ctr">
                       <a:noFill/>
                     </a:lnL>
@@ -6943,6 +6723,3349 @@
                     </a:p>
                   </a:txBody>
                   <a:tcPr marL="54864" marR="54864" marT="18288" marB="18288" anchor="ctr">
+                    <a:lnL w="0" cap="flat" cmpd="sng" algn="ctr">
+                      <a:noFill/>
+                    </a:lnL>
+                    <a:lnR w="0" cap="flat" cmpd="sng" algn="ctr">
+                      <a:noFill/>
+                    </a:lnR>
+                    <a:lnT w="0" cap="flat" cmpd="sng" algn="ctr">
+                      <a:noFill/>
+                    </a:lnT>
+                    <a:lnB w="9525" cap="flat" cmpd="sng" algn="ctr">
+                      <a:solidFill>
+                        <a:srgbClr val="D9E0EA"/>
+                      </a:solidFill>
+                      <a:prstDash val="solid"/>
+                      <a:round/>
+                      <a:headEnd type="none" w="med" len="med"/>
+                      <a:tailEnd type="none" w="med" len="med"/>
+                    </a:lnB>
+                  </a:tcPr>
+                </a:tc>
+              </a:tr>
+            </a:tbl>
+          </a:graphicData>
+        </a:graphic>
+      </p:graphicFrame>
+    </p:spTree>
+  </p:cSld>
+  <p:clrMapOvr>
+    <a:masterClrMapping/>
+  </p:clrMapOvr>
+</p:sld>
+</file>
+
+<file path=ppt/slides/slide3.xml><?xml version="1.0" encoding="utf-8"?>
+<p:sld xmlns:a="http://schemas.openxmlformats.org/drawingml/2006/main" xmlns:r="http://schemas.openxmlformats.org/officeDocument/2006/relationships" xmlns:p="http://schemas.openxmlformats.org/presentationml/2006/main" show="0">
+  <p:cSld name="Slide 3">
+    <p:spTree>
+      <p:nvGrpSpPr>
+        <p:cNvPr id="1" name=""/>
+        <p:cNvGrpSpPr/>
+        <p:nvPr/>
+      </p:nvGrpSpPr>
+      <p:grpSpPr>
+        <a:xfrm>
+          <a:off x="0" y="0"/>
+          <a:ext cx="0" cy="0"/>
+          <a:chOff x="0" y="0"/>
+          <a:chExt cx="0" cy="0"/>
+        </a:xfrm>
+      </p:grpSpPr>
+      <p:sp>
+        <p:nvSpPr>
+          <p:cNvPr id="2" name="Text 0"/>
+          <p:cNvSpPr/>
+          <p:nvPr>
+            <p:ph idx="100" type="title" hasCustomPrompt="1"/>
+          </p:nvPr>
+        </p:nvSpPr>
+        <p:spPr>
+          <a:xfrm>
+            <a:off x="411480" y="228600"/>
+            <a:ext cx="9174175" cy="411480"/>
+          </a:xfrm>
+          <a:prstGeom prst="rect">
+            <a:avLst/>
+          </a:prstGeom>
+          <a:noFill/>
+          <a:ln/>
+        </p:spPr>
+        <p:txBody>
+          <a:bodyPr wrap="square" lIns="0" tIns="0" rIns="0" bIns="0" rtlCol="0" anchor="t"/>
+          <a:lstStyle/>
+          <a:p>
+            <a:pPr algn="l" indent="0" marL="0">
+              <a:buNone/>
+            </a:pPr>
+            <a:r>
+              <a:rPr lang="en-US" sz="2000" b="1" dirty="0">
+                <a:solidFill>
+                  <a:schemeClr val="tx1"/>
+                </a:solidFill>
+                <a:latin typeface="Cambria" pitchFamily="34" charset="0"/>
+                <a:ea typeface="Cambria" pitchFamily="34" charset="-122"/>
+                <a:cs typeface="Cambria" pitchFamily="34" charset="-120"/>
+              </a:rPr>
+              <a:t>Matriz de requerimientos DS-SABAO-BCS-BC-23486 · Gestión de Riesgo Específico · Anexo A y B (texto completo)</a:t>
+            </a:r>
+            <a:endParaRPr lang="en-US" sz="2000" dirty="0"/>
+          </a:p>
+        </p:txBody>
+      </p:sp>
+      <p:sp>
+        <p:nvSpPr>
+          <p:cNvPr id="3" name="Sección A"/>
+          <p:cNvSpPr txBox="1"/>
+          <p:nvPr/>
+        </p:nvSpPr>
+        <p:spPr>
+          <a:xfrm>
+            <a:off x="411480" y="694944"/>
+            <a:ext cx="11368735" cy="237744"/>
+          </a:xfrm>
+          <a:prstGeom prst="rect">
+            <a:avLst/>
+          </a:prstGeom>
+          <a:noFill/>
+          <a:ln/>
+        </p:spPr>
+        <p:txBody>
+          <a:bodyPr wrap="square" lIns="0" tIns="0" rIns="0" bIns="0" rtlCol="0" anchor="ctr"/>
+          <a:lstStyle/>
+          <a:p>
+            <a:pPr indent="0" marL="0">
+              <a:buNone/>
+            </a:pPr>
+            <a:r>
+              <a:rPr lang="en-US" sz="1100" b="1" dirty="0">
+                <a:solidFill>
+                  <a:schemeClr val="accent1"/>
+                </a:solidFill>
+              </a:rPr>
+              <a:t>A. Gestión de Riesgo de LDA/FT/FPADM</a:t>
+            </a:r>
+            <a:endParaRPr lang="en-US" sz="1100" dirty="0"/>
+          </a:p>
+        </p:txBody>
+      </p:sp>
+      <p:graphicFrame>
+        <p:nvGraphicFramePr>
+          <p:cNvPr id="4" name="Tabla sección A"/>
+          <p:cNvGraphicFramePr>
+            <a:graphicFrameLocks noGrp="1"/>
+          </p:cNvGraphicFramePr>
+          <p:nvPr>
+            <p:extLst>
+              <p:ext uri="{D42A27DB-BD31-4B8C-83A1-F6EECF244321}">
+                <p14:modId xmlns:p14="http://schemas.microsoft.com/office/powerpoint/2010/main" val="1579011935"/>
+              </p:ext>
+            </p:extLst>
+          </p:nvPr>
+        </p:nvGraphicFramePr>
+        <p:xfrm>
+          <a:off x="411480" y="969264"/>
+          <a:ext cx="11368735" cy="914400"/>
+        </p:xfrm>
+        <a:graphic>
+          <a:graphicData uri="http://schemas.openxmlformats.org/drawingml/2006/table">
+            <a:tbl>
+              <a:tblPr/>
+              <a:tblGrid>
+                <a:gridCol w="3977640"/>
+                <a:gridCol w="5788152"/>
+                <a:gridCol w="1600200"/>
+              </a:tblGrid>
+              <a:tr h="0">
+                <a:tc>
+                  <a:txBody>
+                    <a:bodyPr/>
+                    <a:lstStyle/>
+                    <a:p>
+                      <a:pPr algn="just" indent="0" marL="0">
+                        <a:buNone/>
+                      </a:pPr>
+                      <a:r>
+                        <a:rPr lang="en-US" sz="900" b="1" dirty="0">
+                          <a:solidFill>
+                            <a:schemeClr val="bg1"/>
+                          </a:solidFill>
+                          <a:latin typeface="Calibri" pitchFamily="34" charset="0"/>
+                          <a:ea typeface="Calibri" pitchFamily="34" charset="-122"/>
+                          <a:cs typeface="Calibri" pitchFamily="34" charset="-120"/>
+                        </a:rPr>
+                        <a:t>Observación</a:t>
+                      </a:r>
+                      <a:endParaRPr lang="en-US" sz="900" dirty="0">
+                        <a:latin typeface="Calibri" charset="0"/>
+                        <a:ea typeface="Calibri" charset="0"/>
+                        <a:cs typeface="Calibri" charset="0"/>
+                      </a:endParaRPr>
+                    </a:p>
+                  </a:txBody>
+                  <a:tcPr marL="54864" marR="54864" marT="13716" marB="13716" anchor="ctr">
+                    <a:lnL w="0" cap="flat" cmpd="sng" algn="ctr">
+                      <a:noFill/>
+                    </a:lnL>
+                    <a:lnR w="0" cap="flat" cmpd="sng" algn="ctr">
+                      <a:noFill/>
+                    </a:lnR>
+                    <a:lnT w="0" cap="flat" cmpd="sng" algn="ctr">
+                      <a:noFill/>
+                    </a:lnT>
+                    <a:lnB w="9525" cap="flat" cmpd="sng" algn="ctr">
+                      <a:solidFill>
+                        <a:srgbClr val="D9E0EA"/>
+                      </a:solidFill>
+                      <a:prstDash val="solid"/>
+                      <a:round/>
+                      <a:headEnd type="none" w="med" len="med"/>
+                      <a:tailEnd type="none" w="med" len="med"/>
+                    </a:lnB>
+                    <a:solidFill>
+                      <a:schemeClr val="accent1"/>
+                    </a:solidFill>
+                  </a:tcPr>
+                </a:tc>
+                <a:tc>
+                  <a:txBody>
+                    <a:bodyPr/>
+                    <a:lstStyle/>
+                    <a:p>
+                      <a:pPr algn="just" indent="0" marL="0">
+                        <a:buNone/>
+                      </a:pPr>
+                      <a:r>
+                        <a:rPr lang="en-US" sz="900" b="1" dirty="0">
+                          <a:solidFill>
+                            <a:schemeClr val="bg1"/>
+                          </a:solidFill>
+                          <a:latin typeface="Calibri" pitchFamily="34" charset="0"/>
+                          <a:ea typeface="Calibri" pitchFamily="34" charset="-122"/>
+                          <a:cs typeface="Calibri" pitchFamily="34" charset="-120"/>
+                        </a:rPr>
+                        <a:t>Comentarios</a:t>
+                      </a:r>
+                      <a:endParaRPr lang="en-US" sz="900" dirty="0">
+                        <a:latin typeface="Calibri" charset="0"/>
+                        <a:ea typeface="Calibri" charset="0"/>
+                        <a:cs typeface="Calibri" charset="0"/>
+                      </a:endParaRPr>
+                    </a:p>
+                  </a:txBody>
+                  <a:tcPr marL="54864" marR="54864" marT="13716" marB="13716" anchor="ctr">
+                    <a:lnL w="0" cap="flat" cmpd="sng" algn="ctr">
+                      <a:noFill/>
+                    </a:lnL>
+                    <a:lnR w="0" cap="flat" cmpd="sng" algn="ctr">
+                      <a:noFill/>
+                    </a:lnR>
+                    <a:lnT w="0" cap="flat" cmpd="sng" algn="ctr">
+                      <a:noFill/>
+                    </a:lnT>
+                    <a:lnB w="9525" cap="flat" cmpd="sng" algn="ctr">
+                      <a:solidFill>
+                        <a:srgbClr val="D9E0EA"/>
+                      </a:solidFill>
+                      <a:prstDash val="solid"/>
+                      <a:round/>
+                      <a:headEnd type="none" w="med" len="med"/>
+                      <a:tailEnd type="none" w="med" len="med"/>
+                    </a:lnB>
+                    <a:solidFill>
+                      <a:schemeClr val="accent1"/>
+                    </a:solidFill>
+                  </a:tcPr>
+                </a:tc>
+                <a:tc>
+                  <a:txBody>
+                    <a:bodyPr/>
+                    <a:lstStyle/>
+                    <a:p>
+                      <a:pPr algn="just" indent="0" marL="0">
+                        <a:buNone/>
+                      </a:pPr>
+                      <a:r>
+                        <a:rPr lang="en-US" sz="900" b="1" dirty="0">
+                          <a:solidFill>
+                            <a:schemeClr val="bg1"/>
+                          </a:solidFill>
+                          <a:latin typeface="Calibri" pitchFamily="34" charset="0"/>
+                          <a:ea typeface="Calibri" pitchFamily="34" charset="-122"/>
+                          <a:cs typeface="Calibri" pitchFamily="34" charset="-120"/>
+                        </a:rPr>
+                        <a:t>Funcionario Responsable</a:t>
+                      </a:r>
+                      <a:endParaRPr lang="en-US" sz="900" dirty="0">
+                        <a:latin typeface="Calibri" charset="0"/>
+                        <a:ea typeface="Calibri" charset="0"/>
+                        <a:cs typeface="Calibri" charset="0"/>
+                      </a:endParaRPr>
+                    </a:p>
+                  </a:txBody>
+                  <a:tcPr marL="54864" marR="54864" marT="13716" marB="13716" anchor="ctr">
+                    <a:lnL w="0" cap="flat" cmpd="sng" algn="ctr">
+                      <a:noFill/>
+                    </a:lnL>
+                    <a:lnR w="0" cap="flat" cmpd="sng" algn="ctr">
+                      <a:noFill/>
+                    </a:lnR>
+                    <a:lnT w="0" cap="flat" cmpd="sng" algn="ctr">
+                      <a:noFill/>
+                    </a:lnT>
+                    <a:lnB w="9525" cap="flat" cmpd="sng" algn="ctr">
+                      <a:solidFill>
+                        <a:srgbClr val="D9E0EA"/>
+                      </a:solidFill>
+                      <a:prstDash val="solid"/>
+                      <a:round/>
+                      <a:headEnd type="none" w="med" len="med"/>
+                      <a:tailEnd type="none" w="med" len="med"/>
+                    </a:lnB>
+                    <a:solidFill>
+                      <a:schemeClr val="accent1"/>
+                    </a:solidFill>
+                  </a:tcPr>
+                </a:tc>
+              </a:tr>
+              <a:tr h="0">
+                <a:tc>
+                  <a:txBody>
+                    <a:bodyPr/>
+                    <a:lstStyle/>
+                    <a:p>
+                      <a:pPr algn="just" indent="0" marL="0">
+                        <a:buNone/>
+                      </a:pPr>
+                      <a:r>
+                        <a:rPr lang="en-US" sz="760" b="1" dirty="0">
+                          <a:solidFill>
+                            <a:schemeClr val="tx1"/>
+                          </a:solidFill>
+                          <a:latin typeface="Calibri" pitchFamily="34" charset="0"/>
+                          <a:ea typeface="Calibri" pitchFamily="34" charset="-122"/>
+                          <a:cs typeface="Calibri" pitchFamily="34" charset="-120"/>
+                        </a:rPr>
+                        <a:t>A.1  Deficiencias en la conformación y actualización de expedientes de clientes.</a:t>
+                      </a:r>
+                      <a:endParaRPr lang="en-US" sz="760" dirty="0">
+                        <a:latin typeface="Calibri" charset="0"/>
+                        <a:ea typeface="Calibri" charset="0"/>
+                        <a:cs typeface="Calibri" charset="0"/>
+                      </a:endParaRPr>
+                    </a:p>
+                  </a:txBody>
+                  <a:tcPr marL="54864" marR="54864" marT="13716" marB="13716" anchor="ctr">
+                    <a:lnL w="0" cap="flat" cmpd="sng" algn="ctr">
+                      <a:noFill/>
+                    </a:lnL>
+                    <a:lnR w="0" cap="flat" cmpd="sng" algn="ctr">
+                      <a:noFill/>
+                    </a:lnR>
+                    <a:lnT w="0" cap="flat" cmpd="sng" algn="ctr">
+                      <a:noFill/>
+                    </a:lnT>
+                    <a:lnB w="9525" cap="flat" cmpd="sng" algn="ctr">
+                      <a:solidFill>
+                        <a:srgbClr val="D9E0EA"/>
+                      </a:solidFill>
+                      <a:prstDash val="solid"/>
+                      <a:round/>
+                      <a:headEnd type="none" w="med" len="med"/>
+                      <a:tailEnd type="none" w="med" len="med"/>
+                    </a:lnB>
+                    <a:solidFill>
+                      <a:srgbClr val="FFFFFF"/>
+                    </a:solidFill>
+                  </a:tcPr>
+                </a:tc>
+                <a:tc>
+                  <a:txBody>
+                    <a:bodyPr/>
+                    <a:lstStyle/>
+                    <a:p>
+                      <a:pPr algn="just" indent="0" marL="0">
+                        <a:buNone/>
+                      </a:pPr>
+                      <a:r>
+                        <a:rPr lang="en-US" sz="760" dirty="0">
+                          <a:solidFill>
+                            <a:schemeClr val="tx1"/>
+                          </a:solidFill>
+                          <a:latin typeface="Calibri" pitchFamily="34" charset="0"/>
+                          <a:ea typeface="Calibri" pitchFamily="34" charset="-122"/>
+                          <a:cs typeface="Calibri" pitchFamily="34" charset="-120"/>
+                        </a:rPr>
+                        <a:t>Pendiente</a:t>
+                      </a:r>
+                      <a:endParaRPr lang="en-US" sz="760" dirty="0">
+                        <a:latin typeface="Calibri" charset="0"/>
+                        <a:ea typeface="Calibri" charset="0"/>
+                        <a:cs typeface="Calibri" charset="0"/>
+                      </a:endParaRPr>
+                    </a:p>
+                  </a:txBody>
+                  <a:tcPr marL="54864" marR="54864" marT="13716" marB="13716" anchor="ctr">
+                    <a:lnL w="0" cap="flat" cmpd="sng" algn="ctr">
+                      <a:noFill/>
+                    </a:lnL>
+                    <a:lnR w="0" cap="flat" cmpd="sng" algn="ctr">
+                      <a:noFill/>
+                    </a:lnR>
+                    <a:lnT w="0" cap="flat" cmpd="sng" algn="ctr">
+                      <a:noFill/>
+                    </a:lnT>
+                    <a:lnB w="9525" cap="flat" cmpd="sng" algn="ctr">
+                      <a:solidFill>
+                        <a:srgbClr val="D9E0EA"/>
+                      </a:solidFill>
+                      <a:prstDash val="solid"/>
+                      <a:round/>
+                      <a:headEnd type="none" w="med" len="med"/>
+                      <a:tailEnd type="none" w="med" len="med"/>
+                    </a:lnB>
+                  </a:tcPr>
+                </a:tc>
+                <a:tc>
+                  <a:txBody>
+                    <a:bodyPr/>
+                    <a:lstStyle/>
+                    <a:p>
+                      <a:pPr algn="l" indent="0" marL="0">
+                        <a:buNone/>
+                      </a:pPr>
+                      <a:r>
+                        <a:rPr lang="en-US" sz="760" b="1" dirty="0">
+                          <a:solidFill>
+                            <a:schemeClr val="accent1"/>
+                          </a:solidFill>
+                          <a:latin typeface="Calibri" pitchFamily="34" charset="0"/>
+                          <a:ea typeface="Calibri" pitchFamily="34" charset="-122"/>
+                          <a:cs typeface="Calibri" pitchFamily="34" charset="-120"/>
+                        </a:rPr>
+                        <a:t>Gerencia de Cumplimiento</a:t>
+                      </a:r>
+                      <a:endParaRPr lang="en-US" sz="760" dirty="0">
+                        <a:latin typeface="Calibri" charset="0"/>
+                        <a:ea typeface="Calibri" charset="0"/>
+                        <a:cs typeface="Calibri" charset="0"/>
+                      </a:endParaRPr>
+                    </a:p>
+                  </a:txBody>
+                  <a:tcPr marL="54864" marR="54864" marT="13716" marB="13716" anchor="ctr">
+                    <a:lnL w="0" cap="flat" cmpd="sng" algn="ctr">
+                      <a:noFill/>
+                    </a:lnL>
+                    <a:lnR w="0" cap="flat" cmpd="sng" algn="ctr">
+                      <a:noFill/>
+                    </a:lnR>
+                    <a:lnT w="0" cap="flat" cmpd="sng" algn="ctr">
+                      <a:noFill/>
+                    </a:lnT>
+                    <a:lnB w="9525" cap="flat" cmpd="sng" algn="ctr">
+                      <a:solidFill>
+                        <a:srgbClr val="D9E0EA"/>
+                      </a:solidFill>
+                      <a:prstDash val="solid"/>
+                      <a:round/>
+                      <a:headEnd type="none" w="med" len="med"/>
+                      <a:tailEnd type="none" w="med" len="med"/>
+                    </a:lnB>
+                  </a:tcPr>
+                </a:tc>
+              </a:tr>
+              <a:tr h="0">
+                <a:tc>
+                  <a:txBody>
+                    <a:bodyPr/>
+                    <a:lstStyle/>
+                    <a:p>
+                      <a:pPr algn="just" indent="0" marL="0">
+                        <a:buNone/>
+                      </a:pPr>
+                      <a:r>
+                        <a:rPr lang="en-US" sz="760" b="1" dirty="0">
+                          <a:solidFill>
+                            <a:schemeClr val="tx1"/>
+                          </a:solidFill>
+                          <a:latin typeface="Calibri" pitchFamily="34" charset="0"/>
+                          <a:ea typeface="Calibri" pitchFamily="34" charset="-122"/>
+                          <a:cs typeface="Calibri" pitchFamily="34" charset="-120"/>
+                        </a:rPr>
+                        <a:t>A.2  Deficiencias en la identificación de la actividad económica realizada por clientes.</a:t>
+                      </a:r>
+                      <a:endParaRPr lang="en-US" sz="760" dirty="0">
+                        <a:latin typeface="Calibri" charset="0"/>
+                        <a:ea typeface="Calibri" charset="0"/>
+                        <a:cs typeface="Calibri" charset="0"/>
+                      </a:endParaRPr>
+                    </a:p>
+                  </a:txBody>
+                  <a:tcPr marL="54864" marR="54864" marT="13716" marB="13716" anchor="ctr">
+                    <a:lnL w="0" cap="flat" cmpd="sng" algn="ctr">
+                      <a:noFill/>
+                    </a:lnL>
+                    <a:lnR w="0" cap="flat" cmpd="sng" algn="ctr">
+                      <a:noFill/>
+                    </a:lnR>
+                    <a:lnT w="0" cap="flat" cmpd="sng" algn="ctr">
+                      <a:noFill/>
+                    </a:lnT>
+                    <a:lnB w="9525" cap="flat" cmpd="sng" algn="ctr">
+                      <a:solidFill>
+                        <a:srgbClr val="D9E0EA"/>
+                      </a:solidFill>
+                      <a:prstDash val="solid"/>
+                      <a:round/>
+                      <a:headEnd type="none" w="med" len="med"/>
+                      <a:tailEnd type="none" w="med" len="med"/>
+                    </a:lnB>
+                    <a:solidFill>
+                      <a:srgbClr val="FFFFFF"/>
+                    </a:solidFill>
+                  </a:tcPr>
+                </a:tc>
+                <a:tc>
+                  <a:txBody>
+                    <a:bodyPr/>
+                    <a:lstStyle/>
+                    <a:p>
+                      <a:pPr algn="just" indent="0" marL="0">
+                        <a:buNone/>
+                      </a:pPr>
+                      <a:r>
+                        <a:rPr lang="en-US" sz="760" dirty="0">
+                          <a:solidFill>
+                            <a:schemeClr val="tx1"/>
+                          </a:solidFill>
+                          <a:latin typeface="Calibri" pitchFamily="34" charset="0"/>
+                          <a:ea typeface="Calibri" pitchFamily="34" charset="-122"/>
+                          <a:cs typeface="Calibri" pitchFamily="34" charset="-120"/>
+                        </a:rPr>
+                        <a:t>Pendiente</a:t>
+                      </a:r>
+                      <a:endParaRPr lang="en-US" sz="760" dirty="0">
+                        <a:latin typeface="Calibri" charset="0"/>
+                        <a:ea typeface="Calibri" charset="0"/>
+                        <a:cs typeface="Calibri" charset="0"/>
+                      </a:endParaRPr>
+                    </a:p>
+                  </a:txBody>
+                  <a:tcPr marL="54864" marR="54864" marT="13716" marB="13716" anchor="ctr">
+                    <a:lnL w="0" cap="flat" cmpd="sng" algn="ctr">
+                      <a:noFill/>
+                    </a:lnL>
+                    <a:lnR w="0" cap="flat" cmpd="sng" algn="ctr">
+                      <a:noFill/>
+                    </a:lnR>
+                    <a:lnT w="0" cap="flat" cmpd="sng" algn="ctr">
+                      <a:noFill/>
+                    </a:lnT>
+                    <a:lnB w="9525" cap="flat" cmpd="sng" algn="ctr">
+                      <a:solidFill>
+                        <a:srgbClr val="D9E0EA"/>
+                      </a:solidFill>
+                      <a:prstDash val="solid"/>
+                      <a:round/>
+                      <a:headEnd type="none" w="med" len="med"/>
+                      <a:tailEnd type="none" w="med" len="med"/>
+                    </a:lnB>
+                  </a:tcPr>
+                </a:tc>
+                <a:tc>
+                  <a:txBody>
+                    <a:bodyPr/>
+                    <a:lstStyle/>
+                    <a:p>
+                      <a:pPr algn="l" indent="0" marL="0">
+                        <a:buNone/>
+                      </a:pPr>
+                      <a:r>
+                        <a:rPr lang="en-US" sz="760" b="1" dirty="0">
+                          <a:solidFill>
+                            <a:schemeClr val="accent1"/>
+                          </a:solidFill>
+                          <a:latin typeface="Calibri" pitchFamily="34" charset="0"/>
+                          <a:ea typeface="Calibri" pitchFamily="34" charset="-122"/>
+                          <a:cs typeface="Calibri" pitchFamily="34" charset="-120"/>
+                        </a:rPr>
+                        <a:t>Gerencia de Cumplimiento</a:t>
+                      </a:r>
+                      <a:endParaRPr lang="en-US" sz="760" dirty="0">
+                        <a:latin typeface="Calibri" charset="0"/>
+                        <a:ea typeface="Calibri" charset="0"/>
+                        <a:cs typeface="Calibri" charset="0"/>
+                      </a:endParaRPr>
+                    </a:p>
+                  </a:txBody>
+                  <a:tcPr marL="54864" marR="54864" marT="13716" marB="13716" anchor="ctr">
+                    <a:lnL w="0" cap="flat" cmpd="sng" algn="ctr">
+                      <a:noFill/>
+                    </a:lnL>
+                    <a:lnR w="0" cap="flat" cmpd="sng" algn="ctr">
+                      <a:noFill/>
+                    </a:lnR>
+                    <a:lnT w="0" cap="flat" cmpd="sng" algn="ctr">
+                      <a:noFill/>
+                    </a:lnT>
+                    <a:lnB w="9525" cap="flat" cmpd="sng" algn="ctr">
+                      <a:solidFill>
+                        <a:srgbClr val="D9E0EA"/>
+                      </a:solidFill>
+                      <a:prstDash val="solid"/>
+                      <a:round/>
+                      <a:headEnd type="none" w="med" len="med"/>
+                      <a:tailEnd type="none" w="med" len="med"/>
+                    </a:lnB>
+                  </a:tcPr>
+                </a:tc>
+              </a:tr>
+            </a:tbl>
+          </a:graphicData>
+        </a:graphic>
+      </p:graphicFrame>
+      <p:sp>
+        <p:nvSpPr>
+          <p:cNvPr id="5" name="Sección B"/>
+          <p:cNvSpPr txBox="1"/>
+          <p:nvPr/>
+        </p:nvSpPr>
+        <p:spPr>
+          <a:xfrm>
+            <a:off x="411480" y="1627632"/>
+            <a:ext cx="11368735" cy="237744"/>
+          </a:xfrm>
+          <a:prstGeom prst="rect">
+            <a:avLst/>
+          </a:prstGeom>
+          <a:noFill/>
+          <a:ln/>
+        </p:spPr>
+        <p:txBody>
+          <a:bodyPr wrap="square" lIns="0" tIns="0" rIns="0" bIns="0" rtlCol="0" anchor="ctr"/>
+          <a:lstStyle/>
+          <a:p>
+            <a:pPr indent="0" marL="0">
+              <a:buNone/>
+            </a:pPr>
+            <a:r>
+              <a:rPr lang="en-US" sz="1100" b="1" dirty="0">
+                <a:solidFill>
+                  <a:schemeClr val="accent1"/>
+                </a:solidFill>
+              </a:rPr>
+              <a:t>B. Proceso de implementación de la Herramienta de Monitoreo</a:t>
+            </a:r>
+            <a:endParaRPr lang="en-US" sz="1100" dirty="0"/>
+          </a:p>
+        </p:txBody>
+      </p:sp>
+      <p:graphicFrame>
+        <p:nvGraphicFramePr>
+          <p:cNvPr id="7" name="Tabla sección B"/>
+          <p:cNvGraphicFramePr>
+            <a:graphicFrameLocks noGrp="1"/>
+          </p:cNvGraphicFramePr>
+          <p:nvPr>
+            <p:extLst>
+              <p:ext uri="{D42A27DB-BD31-4B8C-83A1-F6EECF244321}">
+                <p14:modId xmlns:p14="http://schemas.microsoft.com/office/powerpoint/2010/main" val="1579011935"/>
+              </p:ext>
+            </p:extLst>
+          </p:nvPr>
+        </p:nvGraphicFramePr>
+        <p:xfrm>
+          <a:off x="411480" y="1901952"/>
+          <a:ext cx="11368735" cy="914400"/>
+        </p:xfrm>
+        <a:graphic>
+          <a:graphicData uri="http://schemas.openxmlformats.org/drawingml/2006/table">
+            <a:tbl>
+              <a:tblPr/>
+              <a:tblGrid>
+                <a:gridCol w="3977640"/>
+                <a:gridCol w="5788152"/>
+                <a:gridCol w="1600200"/>
+              </a:tblGrid>
+              <a:tr h="0">
+                <a:tc>
+                  <a:txBody>
+                    <a:bodyPr/>
+                    <a:lstStyle/>
+                    <a:p>
+                      <a:pPr algn="just" indent="0" marL="0">
+                        <a:buNone/>
+                      </a:pPr>
+                      <a:r>
+                        <a:rPr lang="en-US" sz="900" b="1" dirty="0">
+                          <a:solidFill>
+                            <a:schemeClr val="bg1"/>
+                          </a:solidFill>
+                          <a:latin typeface="Calibri" pitchFamily="34" charset="0"/>
+                          <a:ea typeface="Calibri" pitchFamily="34" charset="-122"/>
+                          <a:cs typeface="Calibri" pitchFamily="34" charset="-120"/>
+                        </a:rPr>
+                        <a:t>Observación</a:t>
+                      </a:r>
+                      <a:endParaRPr lang="en-US" sz="900" dirty="0">
+                        <a:latin typeface="Calibri" charset="0"/>
+                        <a:ea typeface="Calibri" charset="0"/>
+                        <a:cs typeface="Calibri" charset="0"/>
+                      </a:endParaRPr>
+                    </a:p>
+                  </a:txBody>
+                  <a:tcPr marL="54864" marR="54864" marT="13716" marB="13716" anchor="ctr">
+                    <a:lnL w="0" cap="flat" cmpd="sng" algn="ctr">
+                      <a:noFill/>
+                    </a:lnL>
+                    <a:lnR w="0" cap="flat" cmpd="sng" algn="ctr">
+                      <a:noFill/>
+                    </a:lnR>
+                    <a:lnT w="0" cap="flat" cmpd="sng" algn="ctr">
+                      <a:noFill/>
+                    </a:lnT>
+                    <a:lnB w="9525" cap="flat" cmpd="sng" algn="ctr">
+                      <a:solidFill>
+                        <a:srgbClr val="D9E0EA"/>
+                      </a:solidFill>
+                      <a:prstDash val="solid"/>
+                      <a:round/>
+                      <a:headEnd type="none" w="med" len="med"/>
+                      <a:tailEnd type="none" w="med" len="med"/>
+                    </a:lnB>
+                    <a:solidFill>
+                      <a:schemeClr val="accent1"/>
+                    </a:solidFill>
+                  </a:tcPr>
+                </a:tc>
+                <a:tc>
+                  <a:txBody>
+                    <a:bodyPr/>
+                    <a:lstStyle/>
+                    <a:p>
+                      <a:pPr algn="just" indent="0" marL="0">
+                        <a:buNone/>
+                      </a:pPr>
+                      <a:r>
+                        <a:rPr lang="en-US" sz="900" b="1" dirty="0">
+                          <a:solidFill>
+                            <a:schemeClr val="bg1"/>
+                          </a:solidFill>
+                          <a:latin typeface="Calibri" pitchFamily="34" charset="0"/>
+                          <a:ea typeface="Calibri" pitchFamily="34" charset="-122"/>
+                          <a:cs typeface="Calibri" pitchFamily="34" charset="-120"/>
+                        </a:rPr>
+                        <a:t>Comentarios</a:t>
+                      </a:r>
+                      <a:endParaRPr lang="en-US" sz="900" dirty="0">
+                        <a:latin typeface="Calibri" charset="0"/>
+                        <a:ea typeface="Calibri" charset="0"/>
+                        <a:cs typeface="Calibri" charset="0"/>
+                      </a:endParaRPr>
+                    </a:p>
+                  </a:txBody>
+                  <a:tcPr marL="54864" marR="54864" marT="13716" marB="13716" anchor="ctr">
+                    <a:lnL w="0" cap="flat" cmpd="sng" algn="ctr">
+                      <a:noFill/>
+                    </a:lnL>
+                    <a:lnR w="0" cap="flat" cmpd="sng" algn="ctr">
+                      <a:noFill/>
+                    </a:lnR>
+                    <a:lnT w="0" cap="flat" cmpd="sng" algn="ctr">
+                      <a:noFill/>
+                    </a:lnT>
+                    <a:lnB w="9525" cap="flat" cmpd="sng" algn="ctr">
+                      <a:solidFill>
+                        <a:srgbClr val="D9E0EA"/>
+                      </a:solidFill>
+                      <a:prstDash val="solid"/>
+                      <a:round/>
+                      <a:headEnd type="none" w="med" len="med"/>
+                      <a:tailEnd type="none" w="med" len="med"/>
+                    </a:lnB>
+                    <a:solidFill>
+                      <a:schemeClr val="accent1"/>
+                    </a:solidFill>
+                  </a:tcPr>
+                </a:tc>
+                <a:tc>
+                  <a:txBody>
+                    <a:bodyPr/>
+                    <a:lstStyle/>
+                    <a:p>
+                      <a:pPr algn="just" indent="0" marL="0">
+                        <a:buNone/>
+                      </a:pPr>
+                      <a:r>
+                        <a:rPr lang="en-US" sz="900" b="1" dirty="0">
+                          <a:solidFill>
+                            <a:schemeClr val="bg1"/>
+                          </a:solidFill>
+                          <a:latin typeface="Calibri" pitchFamily="34" charset="0"/>
+                          <a:ea typeface="Calibri" pitchFamily="34" charset="-122"/>
+                          <a:cs typeface="Calibri" pitchFamily="34" charset="-120"/>
+                        </a:rPr>
+                        <a:t>Funcionario Responsable</a:t>
+                      </a:r>
+                      <a:endParaRPr lang="en-US" sz="900" dirty="0">
+                        <a:latin typeface="Calibri" charset="0"/>
+                        <a:ea typeface="Calibri" charset="0"/>
+                        <a:cs typeface="Calibri" charset="0"/>
+                      </a:endParaRPr>
+                    </a:p>
+                  </a:txBody>
+                  <a:tcPr marL="54864" marR="54864" marT="13716" marB="13716" anchor="ctr">
+                    <a:lnL w="0" cap="flat" cmpd="sng" algn="ctr">
+                      <a:noFill/>
+                    </a:lnL>
+                    <a:lnR w="0" cap="flat" cmpd="sng" algn="ctr">
+                      <a:noFill/>
+                    </a:lnR>
+                    <a:lnT w="0" cap="flat" cmpd="sng" algn="ctr">
+                      <a:noFill/>
+                    </a:lnT>
+                    <a:lnB w="9525" cap="flat" cmpd="sng" algn="ctr">
+                      <a:solidFill>
+                        <a:srgbClr val="D9E0EA"/>
+                      </a:solidFill>
+                      <a:prstDash val="solid"/>
+                      <a:round/>
+                      <a:headEnd type="none" w="med" len="med"/>
+                      <a:tailEnd type="none" w="med" len="med"/>
+                    </a:lnB>
+                    <a:solidFill>
+                      <a:schemeClr val="accent1"/>
+                    </a:solidFill>
+                  </a:tcPr>
+                </a:tc>
+              </a:tr>
+              <a:tr h="0">
+                <a:tc>
+                  <a:txBody>
+                    <a:bodyPr/>
+                    <a:lstStyle/>
+                    <a:p>
+                      <a:pPr algn="just" indent="0" marL="0">
+                        <a:buNone/>
+                      </a:pPr>
+                      <a:r>
+                        <a:rPr lang="en-US" sz="760" b="1" dirty="0">
+                          <a:solidFill>
+                            <a:schemeClr val="tx1"/>
+                          </a:solidFill>
+                          <a:latin typeface="Calibri" pitchFamily="34" charset="0"/>
+                          <a:ea typeface="Calibri" pitchFamily="34" charset="-122"/>
+                          <a:cs typeface="Calibri" pitchFamily="34" charset="-120"/>
+                        </a:rPr>
+                        <a:t>B.1  Falta de actualización de Metodología y matriz de riesgo LA/FT/FPADM de la Entidad</a:t>
+                      </a:r>
+                      <a:endParaRPr lang="en-US" sz="760" dirty="0">
+                        <a:latin typeface="Calibri" charset="0"/>
+                        <a:ea typeface="Calibri" charset="0"/>
+                        <a:cs typeface="Calibri" charset="0"/>
+                      </a:endParaRPr>
+                    </a:p>
+                  </a:txBody>
+                  <a:tcPr marL="54864" marR="54864" marT="13716" marB="13716" anchor="ctr">
+                    <a:lnL w="0" cap="flat" cmpd="sng" algn="ctr">
+                      <a:noFill/>
+                    </a:lnL>
+                    <a:lnR w="0" cap="flat" cmpd="sng" algn="ctr">
+                      <a:noFill/>
+                    </a:lnR>
+                    <a:lnT w="0" cap="flat" cmpd="sng" algn="ctr">
+                      <a:noFill/>
+                    </a:lnT>
+                    <a:lnB w="9525" cap="flat" cmpd="sng" algn="ctr">
+                      <a:solidFill>
+                        <a:srgbClr val="D9E0EA"/>
+                      </a:solidFill>
+                      <a:prstDash val="solid"/>
+                      <a:round/>
+                      <a:headEnd type="none" w="med" len="med"/>
+                      <a:tailEnd type="none" w="med" len="med"/>
+                    </a:lnB>
+                    <a:solidFill>
+                      <a:srgbClr val="FFFFFF"/>
+                    </a:solidFill>
+                  </a:tcPr>
+                </a:tc>
+                <a:tc>
+                  <a:txBody>
+                    <a:bodyPr/>
+                    <a:lstStyle/>
+                    <a:p>
+                      <a:pPr algn="just" indent="0" marL="0">
+                        <a:buNone/>
+                      </a:pPr>
+                      <a:r>
+                        <a:rPr lang="en-US" sz="760" dirty="0">
+                          <a:solidFill>
+                            <a:schemeClr val="tx1"/>
+                          </a:solidFill>
+                          <a:latin typeface="Calibri" pitchFamily="34" charset="0"/>
+                          <a:ea typeface="Calibri" pitchFamily="34" charset="-122"/>
+                          <a:cs typeface="Calibri" pitchFamily="34" charset="-120"/>
+                        </a:rPr>
+                        <a:t>Pendiente</a:t>
+                      </a:r>
+                      <a:endParaRPr lang="en-US" sz="760" dirty="0">
+                        <a:latin typeface="Calibri" charset="0"/>
+                        <a:ea typeface="Calibri" charset="0"/>
+                        <a:cs typeface="Calibri" charset="0"/>
+                      </a:endParaRPr>
+                    </a:p>
+                  </a:txBody>
+                  <a:tcPr marL="54864" marR="54864" marT="13716" marB="13716" anchor="ctr">
+                    <a:lnL w="0" cap="flat" cmpd="sng" algn="ctr">
+                      <a:noFill/>
+                    </a:lnL>
+                    <a:lnR w="0" cap="flat" cmpd="sng" algn="ctr">
+                      <a:noFill/>
+                    </a:lnR>
+                    <a:lnT w="0" cap="flat" cmpd="sng" algn="ctr">
+                      <a:noFill/>
+                    </a:lnT>
+                    <a:lnB w="9525" cap="flat" cmpd="sng" algn="ctr">
+                      <a:solidFill>
+                        <a:srgbClr val="D9E0EA"/>
+                      </a:solidFill>
+                      <a:prstDash val="solid"/>
+                      <a:round/>
+                      <a:headEnd type="none" w="med" len="med"/>
+                      <a:tailEnd type="none" w="med" len="med"/>
+                    </a:lnB>
+                  </a:tcPr>
+                </a:tc>
+                <a:tc>
+                  <a:txBody>
+                    <a:bodyPr/>
+                    <a:lstStyle/>
+                    <a:p>
+                      <a:pPr algn="l" indent="0" marL="0">
+                        <a:buNone/>
+                      </a:pPr>
+                      <a:r>
+                        <a:rPr lang="en-US" sz="760" b="1" dirty="0">
+                          <a:solidFill>
+                            <a:schemeClr val="accent1"/>
+                          </a:solidFill>
+                          <a:latin typeface="Calibri" pitchFamily="34" charset="0"/>
+                          <a:ea typeface="Calibri" pitchFamily="34" charset="-122"/>
+                          <a:cs typeface="Calibri" pitchFamily="34" charset="-120"/>
+                        </a:rPr>
+                        <a:t>Gerencia de Cumplimiento</a:t>
+                      </a:r>
+                      <a:endParaRPr lang="en-US" sz="760" dirty="0">
+                        <a:latin typeface="Calibri" charset="0"/>
+                        <a:ea typeface="Calibri" charset="0"/>
+                        <a:cs typeface="Calibri" charset="0"/>
+                      </a:endParaRPr>
+                    </a:p>
+                  </a:txBody>
+                  <a:tcPr marL="54864" marR="54864" marT="13716" marB="13716" anchor="ctr">
+                    <a:lnL w="0" cap="flat" cmpd="sng" algn="ctr">
+                      <a:noFill/>
+                    </a:lnL>
+                    <a:lnR w="0" cap="flat" cmpd="sng" algn="ctr">
+                      <a:noFill/>
+                    </a:lnR>
+                    <a:lnT w="0" cap="flat" cmpd="sng" algn="ctr">
+                      <a:noFill/>
+                    </a:lnT>
+                    <a:lnB w="9525" cap="flat" cmpd="sng" algn="ctr">
+                      <a:solidFill>
+                        <a:srgbClr val="D9E0EA"/>
+                      </a:solidFill>
+                      <a:prstDash val="solid"/>
+                      <a:round/>
+                      <a:headEnd type="none" w="med" len="med"/>
+                      <a:tailEnd type="none" w="med" len="med"/>
+                    </a:lnB>
+                  </a:tcPr>
+                </a:tc>
+              </a:tr>
+              <a:tr h="0">
+                <a:tc>
+                  <a:txBody>
+                    <a:bodyPr/>
+                    <a:lstStyle/>
+                    <a:p>
+                      <a:pPr algn="just" indent="0" marL="0">
+                        <a:buNone/>
+                      </a:pPr>
+                      <a:r>
+                        <a:rPr lang="en-US" sz="760" b="1" dirty="0">
+                          <a:solidFill>
+                            <a:schemeClr val="tx1"/>
+                          </a:solidFill>
+                          <a:latin typeface="Calibri" pitchFamily="34" charset="0"/>
+                          <a:ea typeface="Calibri" pitchFamily="34" charset="-122"/>
+                          <a:cs typeface="Calibri" pitchFamily="34" charset="-120"/>
+                        </a:rPr>
+                        <a:t>B.2  Falta de actualización de Metodología y matriz de riesgo LA/FT/FPADM Clientes o asociados</a:t>
+                      </a:r>
+                      <a:endParaRPr lang="en-US" sz="760" dirty="0">
+                        <a:latin typeface="Calibri" charset="0"/>
+                        <a:ea typeface="Calibri" charset="0"/>
+                        <a:cs typeface="Calibri" charset="0"/>
+                      </a:endParaRPr>
+                    </a:p>
+                  </a:txBody>
+                  <a:tcPr marL="54864" marR="54864" marT="13716" marB="13716" anchor="ctr">
+                    <a:lnL w="0" cap="flat" cmpd="sng" algn="ctr">
+                      <a:noFill/>
+                    </a:lnL>
+                    <a:lnR w="0" cap="flat" cmpd="sng" algn="ctr">
+                      <a:noFill/>
+                    </a:lnR>
+                    <a:lnT w="0" cap="flat" cmpd="sng" algn="ctr">
+                      <a:noFill/>
+                    </a:lnT>
+                    <a:lnB w="9525" cap="flat" cmpd="sng" algn="ctr">
+                      <a:solidFill>
+                        <a:srgbClr val="D9E0EA"/>
+                      </a:solidFill>
+                      <a:prstDash val="solid"/>
+                      <a:round/>
+                      <a:headEnd type="none" w="med" len="med"/>
+                      <a:tailEnd type="none" w="med" len="med"/>
+                    </a:lnB>
+                    <a:solidFill>
+                      <a:srgbClr val="FFFFFF"/>
+                    </a:solidFill>
+                  </a:tcPr>
+                </a:tc>
+                <a:tc>
+                  <a:txBody>
+                    <a:bodyPr/>
+                    <a:lstStyle/>
+                    <a:p>
+                      <a:pPr algn="just" indent="0" marL="0">
+                        <a:buNone/>
+                      </a:pPr>
+                      <a:r>
+                        <a:rPr lang="en-US" sz="760" dirty="0">
+                          <a:solidFill>
+                            <a:schemeClr val="tx1"/>
+                          </a:solidFill>
+                          <a:latin typeface="Calibri" pitchFamily="34" charset="0"/>
+                          <a:ea typeface="Calibri" pitchFamily="34" charset="-122"/>
+                          <a:cs typeface="Calibri" pitchFamily="34" charset="-120"/>
+                        </a:rPr>
+                        <a:t>Pendiente</a:t>
+                      </a:r>
+                      <a:endParaRPr lang="en-US" sz="760" dirty="0">
+                        <a:latin typeface="Calibri" charset="0"/>
+                        <a:ea typeface="Calibri" charset="0"/>
+                        <a:cs typeface="Calibri" charset="0"/>
+                      </a:endParaRPr>
+                    </a:p>
+                  </a:txBody>
+                  <a:tcPr marL="54864" marR="54864" marT="13716" marB="13716" anchor="ctr">
+                    <a:lnL w="0" cap="flat" cmpd="sng" algn="ctr">
+                      <a:noFill/>
+                    </a:lnL>
+                    <a:lnR w="0" cap="flat" cmpd="sng" algn="ctr">
+                      <a:noFill/>
+                    </a:lnR>
+                    <a:lnT w="0" cap="flat" cmpd="sng" algn="ctr">
+                      <a:noFill/>
+                    </a:lnT>
+                    <a:lnB w="9525" cap="flat" cmpd="sng" algn="ctr">
+                      <a:solidFill>
+                        <a:srgbClr val="D9E0EA"/>
+                      </a:solidFill>
+                      <a:prstDash val="solid"/>
+                      <a:round/>
+                      <a:headEnd type="none" w="med" len="med"/>
+                      <a:tailEnd type="none" w="med" len="med"/>
+                    </a:lnB>
+                  </a:tcPr>
+                </a:tc>
+                <a:tc>
+                  <a:txBody>
+                    <a:bodyPr/>
+                    <a:lstStyle/>
+                    <a:p>
+                      <a:pPr algn="l" indent="0" marL="0">
+                        <a:buNone/>
+                      </a:pPr>
+                      <a:r>
+                        <a:rPr lang="en-US" sz="760" b="1" dirty="0">
+                          <a:solidFill>
+                            <a:schemeClr val="accent1"/>
+                          </a:solidFill>
+                          <a:latin typeface="Calibri" pitchFamily="34" charset="0"/>
+                          <a:ea typeface="Calibri" pitchFamily="34" charset="-122"/>
+                          <a:cs typeface="Calibri" pitchFamily="34" charset="-120"/>
+                        </a:rPr>
+                        <a:t>Gerencia de Cumplimiento</a:t>
+                      </a:r>
+                      <a:endParaRPr lang="en-US" sz="760" dirty="0">
+                        <a:latin typeface="Calibri" charset="0"/>
+                        <a:ea typeface="Calibri" charset="0"/>
+                        <a:cs typeface="Calibri" charset="0"/>
+                      </a:endParaRPr>
+                    </a:p>
+                  </a:txBody>
+                  <a:tcPr marL="54864" marR="54864" marT="13716" marB="13716" anchor="ctr">
+                    <a:lnL w="0" cap="flat" cmpd="sng" algn="ctr">
+                      <a:noFill/>
+                    </a:lnL>
+                    <a:lnR w="0" cap="flat" cmpd="sng" algn="ctr">
+                      <a:noFill/>
+                    </a:lnR>
+                    <a:lnT w="0" cap="flat" cmpd="sng" algn="ctr">
+                      <a:noFill/>
+                    </a:lnT>
+                    <a:lnB w="9525" cap="flat" cmpd="sng" algn="ctr">
+                      <a:solidFill>
+                        <a:srgbClr val="D9E0EA"/>
+                      </a:solidFill>
+                      <a:prstDash val="solid"/>
+                      <a:round/>
+                      <a:headEnd type="none" w="med" len="med"/>
+                      <a:tailEnd type="none" w="med" len="med"/>
+                    </a:lnB>
+                  </a:tcPr>
+                </a:tc>
+              </a:tr>
+              <a:tr h="0">
+                <a:tc>
+                  <a:txBody>
+                    <a:bodyPr/>
+                    <a:lstStyle/>
+                    <a:p>
+                      <a:pPr algn="just" indent="0" marL="0">
+                        <a:buNone/>
+                      </a:pPr>
+                      <a:r>
+                        <a:rPr lang="en-US" sz="760" b="1" dirty="0">
+                          <a:solidFill>
+                            <a:schemeClr val="tx1"/>
+                          </a:solidFill>
+                          <a:latin typeface="Calibri" pitchFamily="34" charset="0"/>
+                          <a:ea typeface="Calibri" pitchFamily="34" charset="-122"/>
+                          <a:cs typeface="Calibri" pitchFamily="34" charset="-120"/>
+                        </a:rPr>
+                        <a:t>B.3  Falta de automatización en el proceso de remisión de reportería regulada a la Web Service de UIF.</a:t>
+                      </a:r>
+                      <a:endParaRPr lang="en-US" sz="760" dirty="0">
+                        <a:latin typeface="Calibri" charset="0"/>
+                        <a:ea typeface="Calibri" charset="0"/>
+                        <a:cs typeface="Calibri" charset="0"/>
+                      </a:endParaRPr>
+                    </a:p>
+                  </a:txBody>
+                  <a:tcPr marL="54864" marR="54864" marT="13716" marB="13716" anchor="ctr">
+                    <a:lnL w="0" cap="flat" cmpd="sng" algn="ctr">
+                      <a:noFill/>
+                    </a:lnL>
+                    <a:lnR w="0" cap="flat" cmpd="sng" algn="ctr">
+                      <a:noFill/>
+                    </a:lnR>
+                    <a:lnT w="0" cap="flat" cmpd="sng" algn="ctr">
+                      <a:noFill/>
+                    </a:lnT>
+                    <a:lnB w="9525" cap="flat" cmpd="sng" algn="ctr">
+                      <a:solidFill>
+                        <a:srgbClr val="D9E0EA"/>
+                      </a:solidFill>
+                      <a:prstDash val="solid"/>
+                      <a:round/>
+                      <a:headEnd type="none" w="med" len="med"/>
+                      <a:tailEnd type="none" w="med" len="med"/>
+                    </a:lnB>
+                    <a:solidFill>
+                      <a:srgbClr val="FFFFFF"/>
+                    </a:solidFill>
+                  </a:tcPr>
+                </a:tc>
+                <a:tc>
+                  <a:txBody>
+                    <a:bodyPr/>
+                    <a:lstStyle/>
+                    <a:p>
+                      <a:pPr algn="just" indent="0" marL="0">
+                        <a:buNone/>
+                      </a:pPr>
+                      <a:r>
+                        <a:rPr lang="en-US" sz="760" dirty="0">
+                          <a:solidFill>
+                            <a:schemeClr val="tx1"/>
+                          </a:solidFill>
+                          <a:latin typeface="Calibri" pitchFamily="34" charset="0"/>
+                          <a:ea typeface="Calibri" pitchFamily="34" charset="-122"/>
+                          <a:cs typeface="Calibri" pitchFamily="34" charset="-120"/>
+                        </a:rPr>
+                        <a:t>Pendiente</a:t>
+                      </a:r>
+                      <a:endParaRPr lang="en-US" sz="760" dirty="0">
+                        <a:latin typeface="Calibri" charset="0"/>
+                        <a:ea typeface="Calibri" charset="0"/>
+                        <a:cs typeface="Calibri" charset="0"/>
+                      </a:endParaRPr>
+                    </a:p>
+                  </a:txBody>
+                  <a:tcPr marL="54864" marR="54864" marT="13716" marB="13716" anchor="ctr">
+                    <a:lnL w="0" cap="flat" cmpd="sng" algn="ctr">
+                      <a:noFill/>
+                    </a:lnL>
+                    <a:lnR w="0" cap="flat" cmpd="sng" algn="ctr">
+                      <a:noFill/>
+                    </a:lnR>
+                    <a:lnT w="0" cap="flat" cmpd="sng" algn="ctr">
+                      <a:noFill/>
+                    </a:lnT>
+                    <a:lnB w="9525" cap="flat" cmpd="sng" algn="ctr">
+                      <a:solidFill>
+                        <a:srgbClr val="D9E0EA"/>
+                      </a:solidFill>
+                      <a:prstDash val="solid"/>
+                      <a:round/>
+                      <a:headEnd type="none" w="med" len="med"/>
+                      <a:tailEnd type="none" w="med" len="med"/>
+                    </a:lnB>
+                  </a:tcPr>
+                </a:tc>
+                <a:tc>
+                  <a:txBody>
+                    <a:bodyPr/>
+                    <a:lstStyle/>
+                    <a:p>
+                      <a:pPr algn="l" indent="0" marL="0">
+                        <a:buNone/>
+                      </a:pPr>
+                      <a:r>
+                        <a:rPr lang="en-US" sz="760" b="1" dirty="0">
+                          <a:solidFill>
+                            <a:schemeClr val="accent1"/>
+                          </a:solidFill>
+                          <a:latin typeface="Calibri" pitchFamily="34" charset="0"/>
+                          <a:ea typeface="Calibri" pitchFamily="34" charset="-122"/>
+                          <a:cs typeface="Calibri" pitchFamily="34" charset="-120"/>
+                        </a:rPr>
+                        <a:t>Gerencia de Cumplimiento</a:t>
+                      </a:r>
+                      <a:endParaRPr lang="en-US" sz="760" dirty="0">
+                        <a:latin typeface="Calibri" charset="0"/>
+                        <a:ea typeface="Calibri" charset="0"/>
+                        <a:cs typeface="Calibri" charset="0"/>
+                      </a:endParaRPr>
+                    </a:p>
+                  </a:txBody>
+                  <a:tcPr marL="54864" marR="54864" marT="13716" marB="13716" anchor="ctr">
+                    <a:lnL w="0" cap="flat" cmpd="sng" algn="ctr">
+                      <a:noFill/>
+                    </a:lnL>
+                    <a:lnR w="0" cap="flat" cmpd="sng" algn="ctr">
+                      <a:noFill/>
+                    </a:lnR>
+                    <a:lnT w="0" cap="flat" cmpd="sng" algn="ctr">
+                      <a:noFill/>
+                    </a:lnT>
+                    <a:lnB w="9525" cap="flat" cmpd="sng" algn="ctr">
+                      <a:solidFill>
+                        <a:srgbClr val="D9E0EA"/>
+                      </a:solidFill>
+                      <a:prstDash val="solid"/>
+                      <a:round/>
+                      <a:headEnd type="none" w="med" len="med"/>
+                      <a:tailEnd type="none" w="med" len="med"/>
+                    </a:lnB>
+                  </a:tcPr>
+                </a:tc>
+              </a:tr>
+              <a:tr h="0">
+                <a:tc>
+                  <a:txBody>
+                    <a:bodyPr/>
+                    <a:lstStyle/>
+                    <a:p>
+                      <a:pPr algn="just" indent="0" marL="0">
+                        <a:buNone/>
+                      </a:pPr>
+                      <a:r>
+                        <a:rPr lang="en-US" sz="760" b="1" dirty="0">
+                          <a:solidFill>
+                            <a:schemeClr val="tx1"/>
+                          </a:solidFill>
+                          <a:latin typeface="Calibri" pitchFamily="34" charset="0"/>
+                          <a:ea typeface="Calibri" pitchFamily="34" charset="-122"/>
+                          <a:cs typeface="Calibri" pitchFamily="34" charset="-120"/>
+                        </a:rPr>
+                        <a:t>B.4  Falta de Automatización de la herramienta de validación de Listas de Cautela</a:t>
+                      </a:r>
+                      <a:endParaRPr lang="en-US" sz="760" dirty="0">
+                        <a:latin typeface="Calibri" charset="0"/>
+                        <a:ea typeface="Calibri" charset="0"/>
+                        <a:cs typeface="Calibri" charset="0"/>
+                      </a:endParaRPr>
+                    </a:p>
+                  </a:txBody>
+                  <a:tcPr marL="54864" marR="54864" marT="13716" marB="13716" anchor="ctr">
+                    <a:lnL w="0" cap="flat" cmpd="sng" algn="ctr">
+                      <a:noFill/>
+                    </a:lnL>
+                    <a:lnR w="0" cap="flat" cmpd="sng" algn="ctr">
+                      <a:noFill/>
+                    </a:lnR>
+                    <a:lnT w="0" cap="flat" cmpd="sng" algn="ctr">
+                      <a:noFill/>
+                    </a:lnT>
+                    <a:lnB w="9525" cap="flat" cmpd="sng" algn="ctr">
+                      <a:solidFill>
+                        <a:srgbClr val="D9E0EA"/>
+                      </a:solidFill>
+                      <a:prstDash val="solid"/>
+                      <a:round/>
+                      <a:headEnd type="none" w="med" len="med"/>
+                      <a:tailEnd type="none" w="med" len="med"/>
+                    </a:lnB>
+                    <a:solidFill>
+                      <a:srgbClr val="FFFFFF"/>
+                    </a:solidFill>
+                  </a:tcPr>
+                </a:tc>
+                <a:tc>
+                  <a:txBody>
+                    <a:bodyPr/>
+                    <a:lstStyle/>
+                    <a:p>
+                      <a:pPr algn="just" indent="0" marL="0">
+                        <a:buNone/>
+                      </a:pPr>
+                      <a:r>
+                        <a:rPr lang="en-US" sz="760" dirty="0">
+                          <a:solidFill>
+                            <a:schemeClr val="tx1"/>
+                          </a:solidFill>
+                          <a:latin typeface="Calibri" pitchFamily="34" charset="0"/>
+                          <a:ea typeface="Calibri" pitchFamily="34" charset="-122"/>
+                          <a:cs typeface="Calibri" pitchFamily="34" charset="-120"/>
+                        </a:rPr>
+                        <a:t>Pendiente</a:t>
+                      </a:r>
+                      <a:endParaRPr lang="en-US" sz="760" dirty="0">
+                        <a:latin typeface="Calibri" charset="0"/>
+                        <a:ea typeface="Calibri" charset="0"/>
+                        <a:cs typeface="Calibri" charset="0"/>
+                      </a:endParaRPr>
+                    </a:p>
+                  </a:txBody>
+                  <a:tcPr marL="54864" marR="54864" marT="13716" marB="13716" anchor="ctr">
+                    <a:lnL w="0" cap="flat" cmpd="sng" algn="ctr">
+                      <a:noFill/>
+                    </a:lnL>
+                    <a:lnR w="0" cap="flat" cmpd="sng" algn="ctr">
+                      <a:noFill/>
+                    </a:lnR>
+                    <a:lnT w="0" cap="flat" cmpd="sng" algn="ctr">
+                      <a:noFill/>
+                    </a:lnT>
+                    <a:lnB w="9525" cap="flat" cmpd="sng" algn="ctr">
+                      <a:solidFill>
+                        <a:srgbClr val="D9E0EA"/>
+                      </a:solidFill>
+                      <a:prstDash val="solid"/>
+                      <a:round/>
+                      <a:headEnd type="none" w="med" len="med"/>
+                      <a:tailEnd type="none" w="med" len="med"/>
+                    </a:lnB>
+                  </a:tcPr>
+                </a:tc>
+                <a:tc>
+                  <a:txBody>
+                    <a:bodyPr/>
+                    <a:lstStyle/>
+                    <a:p>
+                      <a:pPr algn="l" indent="0" marL="0">
+                        <a:buNone/>
+                      </a:pPr>
+                      <a:r>
+                        <a:rPr lang="en-US" sz="760" b="1" dirty="0">
+                          <a:solidFill>
+                            <a:schemeClr val="accent1"/>
+                          </a:solidFill>
+                          <a:latin typeface="Calibri" pitchFamily="34" charset="0"/>
+                          <a:ea typeface="Calibri" pitchFamily="34" charset="-122"/>
+                          <a:cs typeface="Calibri" pitchFamily="34" charset="-120"/>
+                        </a:rPr>
+                        <a:t>Gerencia de Cumplimiento</a:t>
+                      </a:r>
+                      <a:endParaRPr lang="en-US" sz="760" dirty="0">
+                        <a:latin typeface="Calibri" charset="0"/>
+                        <a:ea typeface="Calibri" charset="0"/>
+                        <a:cs typeface="Calibri" charset="0"/>
+                      </a:endParaRPr>
+                    </a:p>
+                  </a:txBody>
+                  <a:tcPr marL="54864" marR="54864" marT="13716" marB="13716" anchor="ctr">
+                    <a:lnL w="0" cap="flat" cmpd="sng" algn="ctr">
+                      <a:noFill/>
+                    </a:lnL>
+                    <a:lnR w="0" cap="flat" cmpd="sng" algn="ctr">
+                      <a:noFill/>
+                    </a:lnR>
+                    <a:lnT w="0" cap="flat" cmpd="sng" algn="ctr">
+                      <a:noFill/>
+                    </a:lnT>
+                    <a:lnB w="9525" cap="flat" cmpd="sng" algn="ctr">
+                      <a:solidFill>
+                        <a:srgbClr val="D9E0EA"/>
+                      </a:solidFill>
+                      <a:prstDash val="solid"/>
+                      <a:round/>
+                      <a:headEnd type="none" w="med" len="med"/>
+                      <a:tailEnd type="none" w="med" len="med"/>
+                    </a:lnB>
+                  </a:tcPr>
+                </a:tc>
+              </a:tr>
+              <a:tr h="0">
+                <a:tc>
+                  <a:txBody>
+                    <a:bodyPr/>
+                    <a:lstStyle/>
+                    <a:p>
+                      <a:pPr algn="just" indent="0" marL="0">
+                        <a:buNone/>
+                      </a:pPr>
+                      <a:r>
+                        <a:rPr lang="en-US" sz="760" b="1" dirty="0">
+                          <a:solidFill>
+                            <a:schemeClr val="tx1"/>
+                          </a:solidFill>
+                          <a:latin typeface="Calibri" pitchFamily="34" charset="0"/>
+                          <a:ea typeface="Calibri" pitchFamily="34" charset="-122"/>
+                          <a:cs typeface="Calibri" pitchFamily="34" charset="-120"/>
+                        </a:rPr>
+                        <a:t>B.5  Falta de evidencia en los porcentajes de avance comunicados en el cronograma</a:t>
+                      </a:r>
+                      <a:endParaRPr lang="en-US" sz="760" dirty="0">
+                        <a:latin typeface="Calibri" charset="0"/>
+                        <a:ea typeface="Calibri" charset="0"/>
+                        <a:cs typeface="Calibri" charset="0"/>
+                      </a:endParaRPr>
+                    </a:p>
+                  </a:txBody>
+                  <a:tcPr marL="54864" marR="54864" marT="13716" marB="13716" anchor="ctr">
+                    <a:lnL w="0" cap="flat" cmpd="sng" algn="ctr">
+                      <a:noFill/>
+                    </a:lnL>
+                    <a:lnR w="0" cap="flat" cmpd="sng" algn="ctr">
+                      <a:noFill/>
+                    </a:lnR>
+                    <a:lnT w="0" cap="flat" cmpd="sng" algn="ctr">
+                      <a:noFill/>
+                    </a:lnT>
+                    <a:lnB w="9525" cap="flat" cmpd="sng" algn="ctr">
+                      <a:solidFill>
+                        <a:srgbClr val="D9E0EA"/>
+                      </a:solidFill>
+                      <a:prstDash val="solid"/>
+                      <a:round/>
+                      <a:headEnd type="none" w="med" len="med"/>
+                      <a:tailEnd type="none" w="med" len="med"/>
+                    </a:lnB>
+                    <a:solidFill>
+                      <a:srgbClr val="FFFFFF"/>
+                    </a:solidFill>
+                  </a:tcPr>
+                </a:tc>
+                <a:tc>
+                  <a:txBody>
+                    <a:bodyPr/>
+                    <a:lstStyle/>
+                    <a:p>
+                      <a:pPr algn="just" indent="0" marL="0">
+                        <a:buNone/>
+                      </a:pPr>
+                      <a:r>
+                        <a:rPr lang="en-US" sz="760" dirty="0">
+                          <a:solidFill>
+                            <a:schemeClr val="tx1"/>
+                          </a:solidFill>
+                          <a:latin typeface="Calibri" pitchFamily="34" charset="0"/>
+                          <a:ea typeface="Calibri" pitchFamily="34" charset="-122"/>
+                          <a:cs typeface="Calibri" pitchFamily="34" charset="-120"/>
+                        </a:rPr>
+                        <a:t>Pendiente</a:t>
+                      </a:r>
+                      <a:endParaRPr lang="en-US" sz="760" dirty="0">
+                        <a:latin typeface="Calibri" charset="0"/>
+                        <a:ea typeface="Calibri" charset="0"/>
+                        <a:cs typeface="Calibri" charset="0"/>
+                      </a:endParaRPr>
+                    </a:p>
+                  </a:txBody>
+                  <a:tcPr marL="54864" marR="54864" marT="13716" marB="13716" anchor="ctr">
+                    <a:lnL w="0" cap="flat" cmpd="sng" algn="ctr">
+                      <a:noFill/>
+                    </a:lnL>
+                    <a:lnR w="0" cap="flat" cmpd="sng" algn="ctr">
+                      <a:noFill/>
+                    </a:lnR>
+                    <a:lnT w="0" cap="flat" cmpd="sng" algn="ctr">
+                      <a:noFill/>
+                    </a:lnT>
+                    <a:lnB w="9525" cap="flat" cmpd="sng" algn="ctr">
+                      <a:solidFill>
+                        <a:srgbClr val="D9E0EA"/>
+                      </a:solidFill>
+                      <a:prstDash val="solid"/>
+                      <a:round/>
+                      <a:headEnd type="none" w="med" len="med"/>
+                      <a:tailEnd type="none" w="med" len="med"/>
+                    </a:lnB>
+                  </a:tcPr>
+                </a:tc>
+                <a:tc>
+                  <a:txBody>
+                    <a:bodyPr/>
+                    <a:lstStyle/>
+                    <a:p>
+                      <a:pPr algn="l" indent="0" marL="0">
+                        <a:buNone/>
+                      </a:pPr>
+                      <a:r>
+                        <a:rPr lang="en-US" sz="760" b="1" dirty="0">
+                          <a:solidFill>
+                            <a:schemeClr val="accent1"/>
+                          </a:solidFill>
+                          <a:latin typeface="Calibri" pitchFamily="34" charset="0"/>
+                          <a:ea typeface="Calibri" pitchFamily="34" charset="-122"/>
+                          <a:cs typeface="Calibri" pitchFamily="34" charset="-120"/>
+                        </a:rPr>
+                        <a:t>Gerencia de Cumplimiento</a:t>
+                      </a:r>
+                      <a:endParaRPr lang="en-US" sz="760" dirty="0">
+                        <a:latin typeface="Calibri" charset="0"/>
+                        <a:ea typeface="Calibri" charset="0"/>
+                        <a:cs typeface="Calibri" charset="0"/>
+                      </a:endParaRPr>
+                    </a:p>
+                  </a:txBody>
+                  <a:tcPr marL="54864" marR="54864" marT="13716" marB="13716" anchor="ctr">
+                    <a:lnL w="0" cap="flat" cmpd="sng" algn="ctr">
+                      <a:noFill/>
+                    </a:lnL>
+                    <a:lnR w="0" cap="flat" cmpd="sng" algn="ctr">
+                      <a:noFill/>
+                    </a:lnR>
+                    <a:lnT w="0" cap="flat" cmpd="sng" algn="ctr">
+                      <a:noFill/>
+                    </a:lnT>
+                    <a:lnB w="9525" cap="flat" cmpd="sng" algn="ctr">
+                      <a:solidFill>
+                        <a:srgbClr val="D9E0EA"/>
+                      </a:solidFill>
+                      <a:prstDash val="solid"/>
+                      <a:round/>
+                      <a:headEnd type="none" w="med" len="med"/>
+                      <a:tailEnd type="none" w="med" len="med"/>
+                    </a:lnB>
+                  </a:tcPr>
+                </a:tc>
+              </a:tr>
+              <a:tr h="0">
+                <a:tc>
+                  <a:txBody>
+                    <a:bodyPr/>
+                    <a:lstStyle/>
+                    <a:p>
+                      <a:pPr algn="just" indent="0" marL="0">
+                        <a:buNone/>
+                      </a:pPr>
+                      <a:r>
+                        <a:rPr lang="en-US" sz="760" b="1" dirty="0">
+                          <a:solidFill>
+                            <a:schemeClr val="tx1"/>
+                          </a:solidFill>
+                          <a:latin typeface="Calibri" pitchFamily="34" charset="0"/>
+                          <a:ea typeface="Calibri" pitchFamily="34" charset="-122"/>
+                          <a:cs typeface="Calibri" pitchFamily="34" charset="-120"/>
+                        </a:rPr>
+                        <a:t>B.6  Revisión documentación conforme artículo22 de la NRP-23</a:t>
+                      </a:r>
+                      <a:endParaRPr lang="en-US" sz="760" dirty="0">
+                        <a:latin typeface="Calibri" charset="0"/>
+                        <a:ea typeface="Calibri" charset="0"/>
+                        <a:cs typeface="Calibri" charset="0"/>
+                      </a:endParaRPr>
+                    </a:p>
+                  </a:txBody>
+                  <a:tcPr marL="54864" marR="54864" marT="13716" marB="13716" anchor="ctr">
+                    <a:lnL w="0" cap="flat" cmpd="sng" algn="ctr">
+                      <a:noFill/>
+                    </a:lnL>
+                    <a:lnR w="0" cap="flat" cmpd="sng" algn="ctr">
+                      <a:noFill/>
+                    </a:lnR>
+                    <a:lnT w="0" cap="flat" cmpd="sng" algn="ctr">
+                      <a:noFill/>
+                    </a:lnT>
+                    <a:lnB w="9525" cap="flat" cmpd="sng" algn="ctr">
+                      <a:solidFill>
+                        <a:srgbClr val="D9E0EA"/>
+                      </a:solidFill>
+                      <a:prstDash val="solid"/>
+                      <a:round/>
+                      <a:headEnd type="none" w="med" len="med"/>
+                      <a:tailEnd type="none" w="med" len="med"/>
+                    </a:lnB>
+                    <a:solidFill>
+                      <a:srgbClr val="FFFFFF"/>
+                    </a:solidFill>
+                  </a:tcPr>
+                </a:tc>
+                <a:tc>
+                  <a:txBody>
+                    <a:bodyPr/>
+                    <a:lstStyle/>
+                    <a:p>
+                      <a:pPr algn="just" indent="0" marL="0">
+                        <a:buNone/>
+                      </a:pPr>
+                      <a:r>
+                        <a:rPr lang="en-US" sz="760" dirty="0">
+                          <a:solidFill>
+                            <a:schemeClr val="tx1"/>
+                          </a:solidFill>
+                          <a:latin typeface="Calibri" pitchFamily="34" charset="0"/>
+                          <a:ea typeface="Calibri" pitchFamily="34" charset="-122"/>
+                          <a:cs typeface="Calibri" pitchFamily="34" charset="-120"/>
+                        </a:rPr>
+                        <a:t>Se anexa informe elaborado en fecha 13 de diciembre de 2024, sobre proyecto de implementación de un nuevo sistema de monitoreo de LDA/FT/FPADM y del sistema de fraude de canales digitales.</a:t>
+                      </a:r>
+                      <a:endParaRPr lang="en-US" sz="760" dirty="0">
+                        <a:latin typeface="Calibri" charset="0"/>
+                        <a:ea typeface="Calibri" charset="0"/>
+                        <a:cs typeface="Calibri" charset="0"/>
+                      </a:endParaRPr>
+                    </a:p>
+                  </a:txBody>
+                  <a:tcPr marL="54864" marR="54864" marT="13716" marB="13716" anchor="ctr">
+                    <a:lnL w="0" cap="flat" cmpd="sng" algn="ctr">
+                      <a:noFill/>
+                    </a:lnL>
+                    <a:lnR w="0" cap="flat" cmpd="sng" algn="ctr">
+                      <a:noFill/>
+                    </a:lnR>
+                    <a:lnT w="0" cap="flat" cmpd="sng" algn="ctr">
+                      <a:noFill/>
+                    </a:lnT>
+                    <a:lnB w="9525" cap="flat" cmpd="sng" algn="ctr">
+                      <a:solidFill>
+                        <a:srgbClr val="D9E0EA"/>
+                      </a:solidFill>
+                      <a:prstDash val="solid"/>
+                      <a:round/>
+                      <a:headEnd type="none" w="med" len="med"/>
+                      <a:tailEnd type="none" w="med" len="med"/>
+                    </a:lnB>
+                  </a:tcPr>
+                </a:tc>
+                <a:tc>
+                  <a:txBody>
+                    <a:bodyPr/>
+                    <a:lstStyle/>
+                    <a:p>
+                      <a:pPr algn="l" indent="0" marL="0">
+                        <a:buNone/>
+                      </a:pPr>
+                      <a:r>
+                        <a:rPr lang="en-US" sz="760" b="1" dirty="0">
+                          <a:solidFill>
+                            <a:schemeClr val="accent1"/>
+                          </a:solidFill>
+                          <a:latin typeface="Calibri" pitchFamily="34" charset="0"/>
+                          <a:ea typeface="Calibri" pitchFamily="34" charset="-122"/>
+                          <a:cs typeface="Calibri" pitchFamily="34" charset="-120"/>
+                        </a:rPr>
+                        <a:t>Jefe de Riesgos</a:t>
+                      </a:r>
+                      <a:endParaRPr lang="en-US" sz="760" dirty="0">
+                        <a:latin typeface="Calibri" charset="0"/>
+                        <a:ea typeface="Calibri" charset="0"/>
+                        <a:cs typeface="Calibri" charset="0"/>
+                      </a:endParaRPr>
+                    </a:p>
+                  </a:txBody>
+                  <a:tcPr marL="54864" marR="54864" marT="13716" marB="13716" anchor="ctr">
+                    <a:lnL w="0" cap="flat" cmpd="sng" algn="ctr">
+                      <a:noFill/>
+                    </a:lnL>
+                    <a:lnR w="0" cap="flat" cmpd="sng" algn="ctr">
+                      <a:noFill/>
+                    </a:lnR>
+                    <a:lnT w="0" cap="flat" cmpd="sng" algn="ctr">
+                      <a:noFill/>
+                    </a:lnT>
+                    <a:lnB w="9525" cap="flat" cmpd="sng" algn="ctr">
+                      <a:solidFill>
+                        <a:srgbClr val="D9E0EA"/>
+                      </a:solidFill>
+                      <a:prstDash val="solid"/>
+                      <a:round/>
+                      <a:headEnd type="none" w="med" len="med"/>
+                      <a:tailEnd type="none" w="med" len="med"/>
+                    </a:lnB>
+                  </a:tcPr>
+                </a:tc>
+              </a:tr>
+              <a:tr h="0">
+                <a:tc>
+                  <a:txBody>
+                    <a:bodyPr/>
+                    <a:lstStyle/>
+                    <a:p>
+                      <a:pPr algn="just" indent="0" marL="0">
+                        <a:buNone/>
+                      </a:pPr>
+                      <a:r>
+                        <a:rPr lang="en-US" sz="760" b="1" dirty="0">
+                          <a:solidFill>
+                            <a:schemeClr val="tx1"/>
+                          </a:solidFill>
+                          <a:latin typeface="Calibri" pitchFamily="34" charset="0"/>
+                          <a:ea typeface="Calibri" pitchFamily="34" charset="-122"/>
+                          <a:cs typeface="Calibri" pitchFamily="34" charset="-120"/>
+                        </a:rPr>
+                        <a:t>B.7  Debilidades en el contrato del servicio de software</a:t>
+                      </a:r>
+                      <a:endParaRPr lang="en-US" sz="760" dirty="0">
+                        <a:latin typeface="Calibri" charset="0"/>
+                        <a:ea typeface="Calibri" charset="0"/>
+                        <a:cs typeface="Calibri" charset="0"/>
+                      </a:endParaRPr>
+                    </a:p>
+                  </a:txBody>
+                  <a:tcPr marL="54864" marR="54864" marT="13716" marB="13716" anchor="ctr">
+                    <a:lnL w="0" cap="flat" cmpd="sng" algn="ctr">
+                      <a:noFill/>
+                    </a:lnL>
+                    <a:lnR w="0" cap="flat" cmpd="sng" algn="ctr">
+                      <a:noFill/>
+                    </a:lnR>
+                    <a:lnT w="0" cap="flat" cmpd="sng" algn="ctr">
+                      <a:noFill/>
+                    </a:lnT>
+                    <a:lnB w="9525" cap="flat" cmpd="sng" algn="ctr">
+                      <a:solidFill>
+                        <a:srgbClr val="D9E0EA"/>
+                      </a:solidFill>
+                      <a:prstDash val="solid"/>
+                      <a:round/>
+                      <a:headEnd type="none" w="med" len="med"/>
+                      <a:tailEnd type="none" w="med" len="med"/>
+                    </a:lnB>
+                    <a:solidFill>
+                      <a:srgbClr val="FFFFFF"/>
+                    </a:solidFill>
+                  </a:tcPr>
+                </a:tc>
+                <a:tc>
+                  <a:txBody>
+                    <a:bodyPr/>
+                    <a:lstStyle/>
+                    <a:p>
+                      <a:pPr algn="just" indent="0" marL="0">
+                        <a:buNone/>
+                      </a:pPr>
+                      <a:r>
+                        <a:rPr lang="en-US" sz="760" dirty="0">
+                          <a:solidFill>
+                            <a:schemeClr val="tx1"/>
+                          </a:solidFill>
+                          <a:latin typeface="Calibri" pitchFamily="34" charset="0"/>
+                          <a:ea typeface="Calibri" pitchFamily="34" charset="-122"/>
+                          <a:cs typeface="Calibri" pitchFamily="34" charset="-120"/>
+                        </a:rPr>
+                        <a:t>Se adjuntará la propuesta de la Gerencia Legal por medio de correo de fecha 09 de octubre 2026, envió propuesta a la Gerencia de Cumplimiento y Seguridad de la Información para la modificación del contrato.</a:t>
+                      </a:r>
+                      <a:endParaRPr lang="en-US" sz="760" dirty="0">
+                        <a:latin typeface="Calibri" charset="0"/>
+                        <a:ea typeface="Calibri" charset="0"/>
+                        <a:cs typeface="Calibri" charset="0"/>
+                      </a:endParaRPr>
+                    </a:p>
+                    <a:p>
+                      <a:pPr algn="just" indent="0" marL="0">
+                        <a:buNone/>
+                      </a:pPr>
+                      <a:r>
+                        <a:rPr lang="en-US" sz="760" dirty="0">
+                          <a:solidFill>
+                            <a:schemeClr val="tx1"/>
+                          </a:solidFill>
+                          <a:latin typeface="Calibri" pitchFamily="34" charset="0"/>
+                          <a:ea typeface="Calibri" pitchFamily="34" charset="-122"/>
+                          <a:cs typeface="Calibri" pitchFamily="34" charset="-120"/>
+                        </a:rPr>
+                        <a:t>Pendiente</a:t>
+                      </a:r>
+                      <a:endParaRPr lang="en-US" sz="760" dirty="0">
+                        <a:latin typeface="Calibri" charset="0"/>
+                        <a:ea typeface="Calibri" charset="0"/>
+                        <a:cs typeface="Calibri" charset="0"/>
+                      </a:endParaRPr>
+                    </a:p>
+                  </a:txBody>
+                  <a:tcPr marL="54864" marR="54864" marT="13716" marB="13716" anchor="ctr">
+                    <a:lnL w="0" cap="flat" cmpd="sng" algn="ctr">
+                      <a:noFill/>
+                    </a:lnL>
+                    <a:lnR w="0" cap="flat" cmpd="sng" algn="ctr">
+                      <a:noFill/>
+                    </a:lnR>
+                    <a:lnT w="0" cap="flat" cmpd="sng" algn="ctr">
+                      <a:noFill/>
+                    </a:lnT>
+                    <a:lnB w="9525" cap="flat" cmpd="sng" algn="ctr">
+                      <a:solidFill>
+                        <a:srgbClr val="D9E0EA"/>
+                      </a:solidFill>
+                      <a:prstDash val="solid"/>
+                      <a:round/>
+                      <a:headEnd type="none" w="med" len="med"/>
+                      <a:tailEnd type="none" w="med" len="med"/>
+                    </a:lnB>
+                  </a:tcPr>
+                </a:tc>
+                <a:tc>
+                  <a:txBody>
+                    <a:bodyPr/>
+                    <a:lstStyle/>
+                    <a:p>
+                      <a:pPr algn="l" indent="0" marL="0">
+                        <a:buNone/>
+                      </a:pPr>
+                      <a:r>
+                        <a:rPr lang="en-US" sz="760" b="1" dirty="0">
+                          <a:solidFill>
+                            <a:schemeClr val="accent1"/>
+                          </a:solidFill>
+                          <a:latin typeface="Calibri" pitchFamily="34" charset="0"/>
+                          <a:ea typeface="Calibri" pitchFamily="34" charset="-122"/>
+                          <a:cs typeface="Calibri" pitchFamily="34" charset="-120"/>
+                        </a:rPr>
+                        <a:t>Gerencia de Cumplimiento</a:t>
+                      </a:r>
+                      <a:endParaRPr lang="en-US" sz="760" dirty="0">
+                        <a:latin typeface="Calibri" charset="0"/>
+                        <a:ea typeface="Calibri" charset="0"/>
+                        <a:cs typeface="Calibri" charset="0"/>
+                      </a:endParaRPr>
+                    </a:p>
+                    <a:p>
+                      <a:pPr algn="l" indent="0" marL="0">
+                        <a:buNone/>
+                      </a:pPr>
+                      <a:r>
+                        <a:rPr lang="en-US" sz="760" b="1" dirty="0">
+                          <a:solidFill>
+                            <a:schemeClr val="accent1"/>
+                          </a:solidFill>
+                          <a:latin typeface="Calibri" pitchFamily="34" charset="0"/>
+                          <a:ea typeface="Calibri" pitchFamily="34" charset="-122"/>
+                          <a:cs typeface="Calibri" pitchFamily="34" charset="-120"/>
+                        </a:rPr>
+                        <a:t>/ Gerencia Legal</a:t>
+                      </a:r>
+                      <a:endParaRPr lang="en-US" sz="760" dirty="0">
+                        <a:latin typeface="Calibri" charset="0"/>
+                        <a:ea typeface="Calibri" charset="0"/>
+                        <a:cs typeface="Calibri" charset="0"/>
+                      </a:endParaRPr>
+                    </a:p>
+                  </a:txBody>
+                  <a:tcPr marL="54864" marR="54864" marT="13716" marB="13716" anchor="ctr">
+                    <a:lnL w="0" cap="flat" cmpd="sng" algn="ctr">
+                      <a:noFill/>
+                    </a:lnL>
+                    <a:lnR w="0" cap="flat" cmpd="sng" algn="ctr">
+                      <a:noFill/>
+                    </a:lnR>
+                    <a:lnT w="0" cap="flat" cmpd="sng" algn="ctr">
+                      <a:noFill/>
+                    </a:lnT>
+                    <a:lnB w="9525" cap="flat" cmpd="sng" algn="ctr">
+                      <a:solidFill>
+                        <a:srgbClr val="D9E0EA"/>
+                      </a:solidFill>
+                      <a:prstDash val="solid"/>
+                      <a:round/>
+                      <a:headEnd type="none" w="med" len="med"/>
+                      <a:tailEnd type="none" w="med" len="med"/>
+                    </a:lnB>
+                  </a:tcPr>
+                </a:tc>
+              </a:tr>
+              <a:tr h="0">
+                <a:tc>
+                  <a:txBody>
+                    <a:bodyPr/>
+                    <a:lstStyle/>
+                    <a:p>
+                      <a:pPr algn="just" indent="0" marL="0">
+                        <a:buNone/>
+                      </a:pPr>
+                      <a:r>
+                        <a:rPr lang="en-US" sz="760" b="1" dirty="0">
+                          <a:solidFill>
+                            <a:schemeClr val="tx1"/>
+                          </a:solidFill>
+                          <a:latin typeface="Calibri" pitchFamily="34" charset="0"/>
+                          <a:ea typeface="Calibri" pitchFamily="34" charset="-122"/>
+                          <a:cs typeface="Calibri" pitchFamily="34" charset="-120"/>
+                        </a:rPr>
+                        <a:t>B.8  Debilidad en el Alcance de las Pruebas Continuidad del Negocio</a:t>
+                      </a:r>
+                      <a:endParaRPr lang="en-US" sz="760" dirty="0">
+                        <a:latin typeface="Calibri" charset="0"/>
+                        <a:ea typeface="Calibri" charset="0"/>
+                        <a:cs typeface="Calibri" charset="0"/>
+                      </a:endParaRPr>
+                    </a:p>
+                  </a:txBody>
+                  <a:tcPr marL="54864" marR="54864" marT="13716" marB="13716" anchor="ctr">
+                    <a:lnL w="0" cap="flat" cmpd="sng" algn="ctr">
+                      <a:noFill/>
+                    </a:lnL>
+                    <a:lnR w="0" cap="flat" cmpd="sng" algn="ctr">
+                      <a:noFill/>
+                    </a:lnR>
+                    <a:lnT w="0" cap="flat" cmpd="sng" algn="ctr">
+                      <a:noFill/>
+                    </a:lnT>
+                    <a:lnB w="9525" cap="flat" cmpd="sng" algn="ctr">
+                      <a:solidFill>
+                        <a:srgbClr val="D9E0EA"/>
+                      </a:solidFill>
+                      <a:prstDash val="solid"/>
+                      <a:round/>
+                      <a:headEnd type="none" w="med" len="med"/>
+                      <a:tailEnd type="none" w="med" len="med"/>
+                    </a:lnB>
+                    <a:solidFill>
+                      <a:srgbClr val="FFFFFF"/>
+                    </a:solidFill>
+                  </a:tcPr>
+                </a:tc>
+                <a:tc>
+                  <a:txBody>
+                    <a:bodyPr/>
+                    <a:lstStyle/>
+                    <a:p>
+                      <a:pPr algn="just" indent="0" marL="0">
+                        <a:buNone/>
+                      </a:pPr>
+                      <a:r>
+                        <a:rPr lang="en-US" sz="760" dirty="0">
+                          <a:solidFill>
+                            <a:schemeClr val="tx1"/>
+                          </a:solidFill>
+                          <a:latin typeface="Calibri" pitchFamily="34" charset="0"/>
+                          <a:ea typeface="Calibri" pitchFamily="34" charset="-122"/>
+                          <a:cs typeface="Calibri" pitchFamily="34" charset="-120"/>
+                        </a:rPr>
+                        <a:t>Plan de acción: proveedor critico</a:t>
+                      </a:r>
+                      <a:endParaRPr lang="en-US" sz="760" dirty="0">
+                        <a:latin typeface="Calibri" charset="0"/>
+                        <a:ea typeface="Calibri" charset="0"/>
+                        <a:cs typeface="Calibri" charset="0"/>
+                      </a:endParaRPr>
+                    </a:p>
+                    <a:p>
+                      <a:pPr algn="just" indent="0" marL="0">
+                        <a:buNone/>
+                      </a:pPr>
+                      <a:r>
+                        <a:rPr lang="en-US" sz="760" dirty="0">
+                          <a:solidFill>
+                            <a:schemeClr val="tx1"/>
+                          </a:solidFill>
+                          <a:latin typeface="Calibri" pitchFamily="34" charset="0"/>
+                          <a:ea typeface="Calibri" pitchFamily="34" charset="-122"/>
+                          <a:cs typeface="Calibri" pitchFamily="34" charset="-120"/>
+                        </a:rPr>
+                        <a:t>Pendiente</a:t>
+                      </a:r>
+                      <a:endParaRPr lang="en-US" sz="760" dirty="0">
+                        <a:latin typeface="Calibri" charset="0"/>
+                        <a:ea typeface="Calibri" charset="0"/>
+                        <a:cs typeface="Calibri" charset="0"/>
+                      </a:endParaRPr>
+                    </a:p>
+                    <a:p>
+                      <a:pPr algn="just" indent="0" marL="0">
+                        <a:buNone/>
+                      </a:pPr>
+                      <a:r>
+                        <a:rPr lang="en-US" sz="760" dirty="0">
+                          <a:solidFill>
+                            <a:schemeClr val="tx1"/>
+                          </a:solidFill>
+                          <a:latin typeface="Calibri" pitchFamily="34" charset="0"/>
+                          <a:ea typeface="Calibri" pitchFamily="34" charset="-122"/>
+                          <a:cs typeface="Calibri" pitchFamily="34" charset="-120"/>
+                        </a:rPr>
+                        <a:t>Se identificarán los servicios tecnológicos tercerizados críticos y se incorporarán en el alcance de las pruebas de continuidad del negocio. Asimismo, se solicitarán a los proveedores los resultados y evidencias de las pruebas realizadas, con el fin de validar la efectividad de los controles implementados.</a:t>
+                      </a:r>
+                      <a:endParaRPr lang="en-US" sz="760" dirty="0">
+                        <a:latin typeface="Calibri" charset="0"/>
+                        <a:ea typeface="Calibri" charset="0"/>
+                        <a:cs typeface="Calibri" charset="0"/>
+                      </a:endParaRPr>
+                    </a:p>
+                  </a:txBody>
+                  <a:tcPr marL="54864" marR="54864" marT="13716" marB="13716" anchor="ctr">
+                    <a:lnL w="0" cap="flat" cmpd="sng" algn="ctr">
+                      <a:noFill/>
+                    </a:lnL>
+                    <a:lnR w="0" cap="flat" cmpd="sng" algn="ctr">
+                      <a:noFill/>
+                    </a:lnR>
+                    <a:lnT w="0" cap="flat" cmpd="sng" algn="ctr">
+                      <a:noFill/>
+                    </a:lnT>
+                    <a:lnB w="9525" cap="flat" cmpd="sng" algn="ctr">
+                      <a:solidFill>
+                        <a:srgbClr val="D9E0EA"/>
+                      </a:solidFill>
+                      <a:prstDash val="solid"/>
+                      <a:round/>
+                      <a:headEnd type="none" w="med" len="med"/>
+                      <a:tailEnd type="none" w="med" len="med"/>
+                    </a:lnB>
+                  </a:tcPr>
+                </a:tc>
+                <a:tc>
+                  <a:txBody>
+                    <a:bodyPr/>
+                    <a:lstStyle/>
+                    <a:p>
+                      <a:pPr algn="l" indent="0" marL="0">
+                        <a:buNone/>
+                      </a:pPr>
+                      <a:r>
+                        <a:rPr lang="en-US" sz="760" b="1" dirty="0">
+                          <a:solidFill>
+                            <a:schemeClr val="accent1"/>
+                          </a:solidFill>
+                          <a:latin typeface="Calibri" pitchFamily="34" charset="0"/>
+                          <a:ea typeface="Calibri" pitchFamily="34" charset="-122"/>
+                          <a:cs typeface="Calibri" pitchFamily="34" charset="-120"/>
+                        </a:rPr>
+                        <a:t>Administración de Riesgos/Gerencia de sistemas/Seguridad de la información</a:t>
+                      </a:r>
+                      <a:endParaRPr lang="en-US" sz="760" dirty="0">
+                        <a:latin typeface="Calibri" charset="0"/>
+                        <a:ea typeface="Calibri" charset="0"/>
+                        <a:cs typeface="Calibri" charset="0"/>
+                      </a:endParaRPr>
+                    </a:p>
+                  </a:txBody>
+                  <a:tcPr marL="54864" marR="54864" marT="13716" marB="13716" anchor="ctr">
+                    <a:lnL w="0" cap="flat" cmpd="sng" algn="ctr">
+                      <a:noFill/>
+                    </a:lnL>
+                    <a:lnR w="0" cap="flat" cmpd="sng" algn="ctr">
+                      <a:noFill/>
+                    </a:lnR>
+                    <a:lnT w="0" cap="flat" cmpd="sng" algn="ctr">
+                      <a:noFill/>
+                    </a:lnT>
+                    <a:lnB w="9525" cap="flat" cmpd="sng" algn="ctr">
+                      <a:solidFill>
+                        <a:srgbClr val="D9E0EA"/>
+                      </a:solidFill>
+                      <a:prstDash val="solid"/>
+                      <a:round/>
+                      <a:headEnd type="none" w="med" len="med"/>
+                      <a:tailEnd type="none" w="med" len="med"/>
+                    </a:lnB>
+                  </a:tcPr>
+                </a:tc>
+              </a:tr>
+              <a:tr h="0">
+                <a:tc>
+                  <a:txBody>
+                    <a:bodyPr/>
+                    <a:lstStyle/>
+                    <a:p>
+                      <a:pPr algn="just" indent="0" marL="0">
+                        <a:buNone/>
+                      </a:pPr>
+                      <a:r>
+                        <a:rPr lang="en-US" sz="760" b="1" dirty="0">
+                          <a:solidFill>
+                            <a:schemeClr val="tx1"/>
+                          </a:solidFill>
+                          <a:latin typeface="Calibri" pitchFamily="34" charset="0"/>
+                          <a:ea typeface="Calibri" pitchFamily="34" charset="-122"/>
+                          <a:cs typeface="Calibri" pitchFamily="34" charset="-120"/>
+                        </a:rPr>
+                        <a:t>B.9  Deficiencia en los procedimientos de Respaldos.</a:t>
+                      </a:r>
+                      <a:endParaRPr lang="en-US" sz="760" dirty="0">
+                        <a:latin typeface="Calibri" charset="0"/>
+                        <a:ea typeface="Calibri" charset="0"/>
+                        <a:cs typeface="Calibri" charset="0"/>
+                      </a:endParaRPr>
+                    </a:p>
+                  </a:txBody>
+                  <a:tcPr marL="54864" marR="54864" marT="13716" marB="13716" anchor="ctr">
+                    <a:lnL w="0" cap="flat" cmpd="sng" algn="ctr">
+                      <a:noFill/>
+                    </a:lnL>
+                    <a:lnR w="0" cap="flat" cmpd="sng" algn="ctr">
+                      <a:noFill/>
+                    </a:lnR>
+                    <a:lnT w="0" cap="flat" cmpd="sng" algn="ctr">
+                      <a:noFill/>
+                    </a:lnT>
+                    <a:lnB w="9525" cap="flat" cmpd="sng" algn="ctr">
+                      <a:solidFill>
+                        <a:srgbClr val="D9E0EA"/>
+                      </a:solidFill>
+                      <a:prstDash val="solid"/>
+                      <a:round/>
+                      <a:headEnd type="none" w="med" len="med"/>
+                      <a:tailEnd type="none" w="med" len="med"/>
+                    </a:lnB>
+                    <a:solidFill>
+                      <a:srgbClr val="FFFFFF"/>
+                    </a:solidFill>
+                  </a:tcPr>
+                </a:tc>
+                <a:tc>
+                  <a:txBody>
+                    <a:bodyPr/>
+                    <a:lstStyle/>
+                    <a:p>
+                      <a:pPr algn="just" indent="0" marL="0">
+                        <a:buNone/>
+                      </a:pPr>
+                      <a:r>
+                        <a:rPr lang="en-US" sz="760" dirty="0">
+                          <a:solidFill>
+                            <a:schemeClr val="tx1"/>
+                          </a:solidFill>
+                          <a:latin typeface="Calibri" pitchFamily="34" charset="0"/>
+                          <a:ea typeface="Calibri" pitchFamily="34" charset="-122"/>
+                          <a:cs typeface="Calibri" pitchFamily="34" charset="-120"/>
+                        </a:rPr>
+                        <a:t>Plan de acción</a:t>
+                      </a:r>
+                      <a:endParaRPr lang="en-US" sz="760" dirty="0">
+                        <a:latin typeface="Calibri" charset="0"/>
+                        <a:ea typeface="Calibri" charset="0"/>
+                        <a:cs typeface="Calibri" charset="0"/>
+                      </a:endParaRPr>
+                    </a:p>
+                    <a:p>
+                      <a:pPr algn="just" indent="0" marL="0">
+                        <a:buNone/>
+                      </a:pPr>
+                      <a:r>
+                        <a:rPr lang="en-US" sz="760" dirty="0">
+                          <a:solidFill>
+                            <a:schemeClr val="tx1"/>
+                          </a:solidFill>
+                          <a:latin typeface="Calibri" pitchFamily="34" charset="0"/>
+                          <a:ea typeface="Calibri" pitchFamily="34" charset="-122"/>
+                          <a:cs typeface="Calibri" pitchFamily="34" charset="-120"/>
+                        </a:rPr>
+                        <a:t>Pendiente</a:t>
+                      </a:r>
+                      <a:endParaRPr lang="en-US" sz="760" dirty="0">
+                        <a:latin typeface="Calibri" charset="0"/>
+                        <a:ea typeface="Calibri" charset="0"/>
+                        <a:cs typeface="Calibri" charset="0"/>
+                      </a:endParaRPr>
+                    </a:p>
+                  </a:txBody>
+                  <a:tcPr marL="54864" marR="54864" marT="13716" marB="13716" anchor="ctr">
+                    <a:lnL w="0" cap="flat" cmpd="sng" algn="ctr">
+                      <a:noFill/>
+                    </a:lnL>
+                    <a:lnR w="0" cap="flat" cmpd="sng" algn="ctr">
+                      <a:noFill/>
+                    </a:lnR>
+                    <a:lnT w="0" cap="flat" cmpd="sng" algn="ctr">
+                      <a:noFill/>
+                    </a:lnT>
+                    <a:lnB w="9525" cap="flat" cmpd="sng" algn="ctr">
+                      <a:solidFill>
+                        <a:srgbClr val="D9E0EA"/>
+                      </a:solidFill>
+                      <a:prstDash val="solid"/>
+                      <a:round/>
+                      <a:headEnd type="none" w="med" len="med"/>
+                      <a:tailEnd type="none" w="med" len="med"/>
+                    </a:lnB>
+                  </a:tcPr>
+                </a:tc>
+                <a:tc>
+                  <a:txBody>
+                    <a:bodyPr/>
+                    <a:lstStyle/>
+                    <a:p>
+                      <a:pPr algn="l" indent="0" marL="0">
+                        <a:buNone/>
+                      </a:pPr>
+                      <a:r>
+                        <a:rPr lang="en-US" sz="760" b="1" dirty="0">
+                          <a:solidFill>
+                            <a:schemeClr val="accent1"/>
+                          </a:solidFill>
+                          <a:latin typeface="Calibri" pitchFamily="34" charset="0"/>
+                          <a:ea typeface="Calibri" pitchFamily="34" charset="-122"/>
+                          <a:cs typeface="Calibri" pitchFamily="34" charset="-120"/>
+                        </a:rPr>
+                        <a:t>Gerencia de Cumplimiento</a:t>
+                      </a:r>
+                      <a:endParaRPr lang="en-US" sz="760" dirty="0">
+                        <a:latin typeface="Calibri" charset="0"/>
+                        <a:ea typeface="Calibri" charset="0"/>
+                        <a:cs typeface="Calibri" charset="0"/>
+                      </a:endParaRPr>
+                    </a:p>
+                    <a:p>
+                      <a:pPr algn="l" indent="0" marL="0">
+                        <a:buNone/>
+                      </a:pPr>
+                      <a:r>
+                        <a:rPr lang="en-US" sz="760" b="1" dirty="0">
+                          <a:solidFill>
+                            <a:schemeClr val="accent1"/>
+                          </a:solidFill>
+                          <a:latin typeface="Calibri" pitchFamily="34" charset="0"/>
+                          <a:ea typeface="Calibri" pitchFamily="34" charset="-122"/>
+                          <a:cs typeface="Calibri" pitchFamily="34" charset="-120"/>
+                        </a:rPr>
+                        <a:t>/ Gerencia de Sistemas</a:t>
+                      </a:r>
+                      <a:endParaRPr lang="en-US" sz="760" dirty="0">
+                        <a:latin typeface="Calibri" charset="0"/>
+                        <a:ea typeface="Calibri" charset="0"/>
+                        <a:cs typeface="Calibri" charset="0"/>
+                      </a:endParaRPr>
+                    </a:p>
+                  </a:txBody>
+                  <a:tcPr marL="54864" marR="54864" marT="13716" marB="13716" anchor="ctr">
+                    <a:lnL w="0" cap="flat" cmpd="sng" algn="ctr">
+                      <a:noFill/>
+                    </a:lnL>
+                    <a:lnR w="0" cap="flat" cmpd="sng" algn="ctr">
+                      <a:noFill/>
+                    </a:lnR>
+                    <a:lnT w="0" cap="flat" cmpd="sng" algn="ctr">
+                      <a:noFill/>
+                    </a:lnT>
+                    <a:lnB w="9525" cap="flat" cmpd="sng" algn="ctr">
+                      <a:solidFill>
+                        <a:srgbClr val="D9E0EA"/>
+                      </a:solidFill>
+                      <a:prstDash val="solid"/>
+                      <a:round/>
+                      <a:headEnd type="none" w="med" len="med"/>
+                      <a:tailEnd type="none" w="med" len="med"/>
+                    </a:lnB>
+                  </a:tcPr>
+                </a:tc>
+              </a:tr>
+              <a:tr h="0">
+                <a:tc>
+                  <a:txBody>
+                    <a:bodyPr/>
+                    <a:lstStyle/>
+                    <a:p>
+                      <a:pPr algn="just" indent="0" marL="0">
+                        <a:buNone/>
+                      </a:pPr>
+                      <a:r>
+                        <a:rPr lang="en-US" sz="760" b="1" dirty="0">
+                          <a:solidFill>
+                            <a:schemeClr val="tx1"/>
+                          </a:solidFill>
+                          <a:latin typeface="Calibri" pitchFamily="34" charset="0"/>
+                          <a:ea typeface="Calibri" pitchFamily="34" charset="-122"/>
+                          <a:cs typeface="Calibri" pitchFamily="34" charset="-120"/>
+                        </a:rPr>
+                        <a:t>B.10  Deficiencia en la hora del sistema y la herramienta de Monitoreo</a:t>
+                      </a:r>
+                      <a:endParaRPr lang="en-US" sz="760" dirty="0">
+                        <a:latin typeface="Calibri" charset="0"/>
+                        <a:ea typeface="Calibri" charset="0"/>
+                        <a:cs typeface="Calibri" charset="0"/>
+                      </a:endParaRPr>
+                    </a:p>
+                  </a:txBody>
+                  <a:tcPr marL="54864" marR="54864" marT="13716" marB="13716" anchor="ctr">
+                    <a:lnL w="0" cap="flat" cmpd="sng" algn="ctr">
+                      <a:noFill/>
+                    </a:lnL>
+                    <a:lnR w="0" cap="flat" cmpd="sng" algn="ctr">
+                      <a:noFill/>
+                    </a:lnR>
+                    <a:lnT w="0" cap="flat" cmpd="sng" algn="ctr">
+                      <a:noFill/>
+                    </a:lnT>
+                    <a:lnB w="9525" cap="flat" cmpd="sng" algn="ctr">
+                      <a:solidFill>
+                        <a:srgbClr val="D9E0EA"/>
+                      </a:solidFill>
+                      <a:prstDash val="solid"/>
+                      <a:round/>
+                      <a:headEnd type="none" w="med" len="med"/>
+                      <a:tailEnd type="none" w="med" len="med"/>
+                    </a:lnB>
+                    <a:solidFill>
+                      <a:srgbClr val="FFFFFF"/>
+                    </a:solidFill>
+                  </a:tcPr>
+                </a:tc>
+                <a:tc>
+                  <a:txBody>
+                    <a:bodyPr/>
+                    <a:lstStyle/>
+                    <a:p>
+                      <a:pPr algn="just" indent="0" marL="0">
+                        <a:buNone/>
+                      </a:pPr>
+                      <a:r>
+                        <a:rPr lang="en-US" sz="760" dirty="0">
+                          <a:solidFill>
+                            <a:schemeClr val="tx1"/>
+                          </a:solidFill>
+                          <a:latin typeface="Calibri" pitchFamily="34" charset="0"/>
+                          <a:ea typeface="Calibri" pitchFamily="34" charset="-122"/>
+                          <a:cs typeface="Calibri" pitchFamily="34" charset="-120"/>
+                        </a:rPr>
+                        <a:t>Descargo correos de gestion</a:t>
+                      </a:r>
+                      <a:endParaRPr lang="en-US" sz="760" dirty="0">
+                        <a:latin typeface="Calibri" charset="0"/>
+                        <a:ea typeface="Calibri" charset="0"/>
+                        <a:cs typeface="Calibri" charset="0"/>
+                      </a:endParaRPr>
+                    </a:p>
+                    <a:p>
+                      <a:pPr algn="just" indent="0" marL="0">
+                        <a:buNone/>
+                      </a:pPr>
+                      <a:r>
+                        <a:rPr lang="en-US" sz="760" dirty="0">
+                          <a:solidFill>
+                            <a:schemeClr val="tx1"/>
+                          </a:solidFill>
+                          <a:latin typeface="Calibri" pitchFamily="34" charset="0"/>
+                          <a:ea typeface="Calibri" pitchFamily="34" charset="-122"/>
+                          <a:cs typeface="Calibri" pitchFamily="34" charset="-120"/>
+                        </a:rPr>
+                        <a:t>Pendiente</a:t>
+                      </a:r>
+                      <a:endParaRPr lang="en-US" sz="760" dirty="0">
+                        <a:latin typeface="Calibri" charset="0"/>
+                        <a:ea typeface="Calibri" charset="0"/>
+                        <a:cs typeface="Calibri" charset="0"/>
+                      </a:endParaRPr>
+                    </a:p>
+                  </a:txBody>
+                  <a:tcPr marL="54864" marR="54864" marT="13716" marB="13716" anchor="ctr">
+                    <a:lnL w="0" cap="flat" cmpd="sng" algn="ctr">
+                      <a:noFill/>
+                    </a:lnL>
+                    <a:lnR w="0" cap="flat" cmpd="sng" algn="ctr">
+                      <a:noFill/>
+                    </a:lnR>
+                    <a:lnT w="0" cap="flat" cmpd="sng" algn="ctr">
+                      <a:noFill/>
+                    </a:lnT>
+                    <a:lnB w="9525" cap="flat" cmpd="sng" algn="ctr">
+                      <a:solidFill>
+                        <a:srgbClr val="D9E0EA"/>
+                      </a:solidFill>
+                      <a:prstDash val="solid"/>
+                      <a:round/>
+                      <a:headEnd type="none" w="med" len="med"/>
+                      <a:tailEnd type="none" w="med" len="med"/>
+                    </a:lnB>
+                  </a:tcPr>
+                </a:tc>
+                <a:tc>
+                  <a:txBody>
+                    <a:bodyPr/>
+                    <a:lstStyle/>
+                    <a:p>
+                      <a:pPr algn="l" indent="0" marL="0">
+                        <a:buNone/>
+                      </a:pPr>
+                      <a:r>
+                        <a:rPr lang="en-US" sz="760" b="1" dirty="0">
+                          <a:solidFill>
+                            <a:schemeClr val="accent1"/>
+                          </a:solidFill>
+                          <a:latin typeface="Calibri" pitchFamily="34" charset="0"/>
+                          <a:ea typeface="Calibri" pitchFamily="34" charset="-122"/>
+                          <a:cs typeface="Calibri" pitchFamily="34" charset="-120"/>
+                        </a:rPr>
+                        <a:t>Gerencia de Cumplimiento</a:t>
+                      </a:r>
+                      <a:endParaRPr lang="en-US" sz="760" dirty="0">
+                        <a:latin typeface="Calibri" charset="0"/>
+                        <a:ea typeface="Calibri" charset="0"/>
+                        <a:cs typeface="Calibri" charset="0"/>
+                      </a:endParaRPr>
+                    </a:p>
+                  </a:txBody>
+                  <a:tcPr marL="54864" marR="54864" marT="13716" marB="13716" anchor="ctr">
+                    <a:lnL w="0" cap="flat" cmpd="sng" algn="ctr">
+                      <a:noFill/>
+                    </a:lnL>
+                    <a:lnR w="0" cap="flat" cmpd="sng" algn="ctr">
+                      <a:noFill/>
+                    </a:lnR>
+                    <a:lnT w="0" cap="flat" cmpd="sng" algn="ctr">
+                      <a:noFill/>
+                    </a:lnT>
+                    <a:lnB w="9525" cap="flat" cmpd="sng" algn="ctr">
+                      <a:solidFill>
+                        <a:srgbClr val="D9E0EA"/>
+                      </a:solidFill>
+                      <a:prstDash val="solid"/>
+                      <a:round/>
+                      <a:headEnd type="none" w="med" len="med"/>
+                      <a:tailEnd type="none" w="med" len="med"/>
+                    </a:lnB>
+                  </a:tcPr>
+                </a:tc>
+              </a:tr>
+              <a:tr h="0">
+                <a:tc>
+                  <a:txBody>
+                    <a:bodyPr/>
+                    <a:lstStyle/>
+                    <a:p>
+                      <a:pPr algn="just" indent="0" marL="0">
+                        <a:buNone/>
+                      </a:pPr>
+                      <a:r>
+                        <a:rPr lang="en-US" sz="760" b="1" dirty="0">
+                          <a:solidFill>
+                            <a:schemeClr val="tx1"/>
+                          </a:solidFill>
+                          <a:latin typeface="Calibri" pitchFamily="34" charset="0"/>
+                          <a:ea typeface="Calibri" pitchFamily="34" charset="-122"/>
+                          <a:cs typeface="Calibri" pitchFamily="34" charset="-120"/>
+                        </a:rPr>
+                        <a:t>B.11  Verificación de las condiciones en ACRM</a:t>
+                      </a:r>
+                      <a:endParaRPr lang="en-US" sz="760" dirty="0">
+                        <a:latin typeface="Calibri" charset="0"/>
+                        <a:ea typeface="Calibri" charset="0"/>
+                        <a:cs typeface="Calibri" charset="0"/>
+                      </a:endParaRPr>
+                    </a:p>
+                  </a:txBody>
+                  <a:tcPr marL="54864" marR="54864" marT="13716" marB="13716" anchor="ctr">
+                    <a:lnL w="0" cap="flat" cmpd="sng" algn="ctr">
+                      <a:noFill/>
+                    </a:lnL>
+                    <a:lnR w="0" cap="flat" cmpd="sng" algn="ctr">
+                      <a:noFill/>
+                    </a:lnR>
+                    <a:lnT w="0" cap="flat" cmpd="sng" algn="ctr">
+                      <a:noFill/>
+                    </a:lnT>
+                    <a:lnB w="9525" cap="flat" cmpd="sng" algn="ctr">
+                      <a:solidFill>
+                        <a:srgbClr val="D9E0EA"/>
+                      </a:solidFill>
+                      <a:prstDash val="solid"/>
+                      <a:round/>
+                      <a:headEnd type="none" w="med" len="med"/>
+                      <a:tailEnd type="none" w="med" len="med"/>
+                    </a:lnB>
+                    <a:solidFill>
+                      <a:srgbClr val="FFFFFF"/>
+                    </a:solidFill>
+                  </a:tcPr>
+                </a:tc>
+                <a:tc>
+                  <a:txBody>
+                    <a:bodyPr/>
+                    <a:lstStyle/>
+                    <a:p>
+                      <a:pPr algn="just" indent="0" marL="0">
+                        <a:buNone/>
+                      </a:pPr>
+                      <a:r>
+                        <a:rPr lang="en-US" sz="760" dirty="0">
+                          <a:solidFill>
+                            <a:schemeClr val="tx1"/>
+                          </a:solidFill>
+                          <a:latin typeface="Calibri" pitchFamily="34" charset="0"/>
+                          <a:ea typeface="Calibri" pitchFamily="34" charset="-122"/>
+                          <a:cs typeface="Calibri" pitchFamily="34" charset="-120"/>
+                        </a:rPr>
+                        <a:t>Descargo</a:t>
+                      </a:r>
+                      <a:endParaRPr lang="en-US" sz="760" dirty="0">
+                        <a:latin typeface="Calibri" charset="0"/>
+                        <a:ea typeface="Calibri" charset="0"/>
+                        <a:cs typeface="Calibri" charset="0"/>
+                      </a:endParaRPr>
+                    </a:p>
+                    <a:p>
+                      <a:pPr algn="just" indent="0" marL="0">
+                        <a:buNone/>
+                      </a:pPr>
+                      <a:r>
+                        <a:rPr lang="en-US" sz="760" dirty="0">
+                          <a:solidFill>
+                            <a:schemeClr val="tx1"/>
+                          </a:solidFill>
+                          <a:latin typeface="Calibri" pitchFamily="34" charset="0"/>
+                          <a:ea typeface="Calibri" pitchFamily="34" charset="-122"/>
+                          <a:cs typeface="Calibri" pitchFamily="34" charset="-120"/>
+                        </a:rPr>
+                        <a:t>Pendiente</a:t>
+                      </a:r>
+                      <a:endParaRPr lang="en-US" sz="760" dirty="0">
+                        <a:latin typeface="Calibri" charset="0"/>
+                        <a:ea typeface="Calibri" charset="0"/>
+                        <a:cs typeface="Calibri" charset="0"/>
+                      </a:endParaRPr>
+                    </a:p>
+                  </a:txBody>
+                  <a:tcPr marL="54864" marR="54864" marT="13716" marB="13716" anchor="ctr">
+                    <a:lnL w="0" cap="flat" cmpd="sng" algn="ctr">
+                      <a:noFill/>
+                    </a:lnL>
+                    <a:lnR w="0" cap="flat" cmpd="sng" algn="ctr">
+                      <a:noFill/>
+                    </a:lnR>
+                    <a:lnT w="0" cap="flat" cmpd="sng" algn="ctr">
+                      <a:noFill/>
+                    </a:lnT>
+                    <a:lnB w="9525" cap="flat" cmpd="sng" algn="ctr">
+                      <a:solidFill>
+                        <a:srgbClr val="D9E0EA"/>
+                      </a:solidFill>
+                      <a:prstDash val="solid"/>
+                      <a:round/>
+                      <a:headEnd type="none" w="med" len="med"/>
+                      <a:tailEnd type="none" w="med" len="med"/>
+                    </a:lnB>
+                  </a:tcPr>
+                </a:tc>
+                <a:tc>
+                  <a:txBody>
+                    <a:bodyPr/>
+                    <a:lstStyle/>
+                    <a:p>
+                      <a:pPr algn="l" indent="0" marL="0">
+                        <a:buNone/>
+                      </a:pPr>
+                      <a:r>
+                        <a:rPr lang="en-US" sz="760" b="1" dirty="0">
+                          <a:solidFill>
+                            <a:schemeClr val="accent1"/>
+                          </a:solidFill>
+                          <a:latin typeface="Calibri" pitchFamily="34" charset="0"/>
+                          <a:ea typeface="Calibri" pitchFamily="34" charset="-122"/>
+                          <a:cs typeface="Calibri" pitchFamily="34" charset="-120"/>
+                        </a:rPr>
+                        <a:t>Gerencia de Cumplimiento</a:t>
+                      </a:r>
+                      <a:endParaRPr lang="en-US" sz="760" dirty="0">
+                        <a:latin typeface="Calibri" charset="0"/>
+                        <a:ea typeface="Calibri" charset="0"/>
+                        <a:cs typeface="Calibri" charset="0"/>
+                      </a:endParaRPr>
+                    </a:p>
+                  </a:txBody>
+                  <a:tcPr marL="54864" marR="54864" marT="13716" marB="13716" anchor="ctr">
+                    <a:lnL w="0" cap="flat" cmpd="sng" algn="ctr">
+                      <a:noFill/>
+                    </a:lnL>
+                    <a:lnR w="0" cap="flat" cmpd="sng" algn="ctr">
+                      <a:noFill/>
+                    </a:lnR>
+                    <a:lnT w="0" cap="flat" cmpd="sng" algn="ctr">
+                      <a:noFill/>
+                    </a:lnT>
+                    <a:lnB w="9525" cap="flat" cmpd="sng" algn="ctr">
+                      <a:solidFill>
+                        <a:srgbClr val="D9E0EA"/>
+                      </a:solidFill>
+                      <a:prstDash val="solid"/>
+                      <a:round/>
+                      <a:headEnd type="none" w="med" len="med"/>
+                      <a:tailEnd type="none" w="med" len="med"/>
+                    </a:lnB>
+                  </a:tcPr>
+                </a:tc>
+              </a:tr>
+              <a:tr h="0">
+                <a:tc>
+                  <a:txBody>
+                    <a:bodyPr/>
+                    <a:lstStyle/>
+                    <a:p>
+                      <a:pPr algn="just" indent="0" marL="0">
+                        <a:buNone/>
+                      </a:pPr>
+                      <a:r>
+                        <a:rPr lang="en-US" sz="760" b="1" dirty="0">
+                          <a:solidFill>
+                            <a:schemeClr val="tx1"/>
+                          </a:solidFill>
+                          <a:latin typeface="Calibri" pitchFamily="34" charset="0"/>
+                          <a:ea typeface="Calibri" pitchFamily="34" charset="-122"/>
+                          <a:cs typeface="Calibri" pitchFamily="34" charset="-120"/>
+                        </a:rPr>
+                        <a:t>B.12  Limitante de Accesos a los Datos de COMEDICA, alojada en la Herramienta de Monitoreo.</a:t>
+                      </a:r>
+                      <a:endParaRPr lang="en-US" sz="760" dirty="0">
+                        <a:latin typeface="Calibri" charset="0"/>
+                        <a:ea typeface="Calibri" charset="0"/>
+                        <a:cs typeface="Calibri" charset="0"/>
+                      </a:endParaRPr>
+                    </a:p>
+                  </a:txBody>
+                  <a:tcPr marL="54864" marR="54864" marT="13716" marB="13716" anchor="ctr">
+                    <a:lnL w="0" cap="flat" cmpd="sng" algn="ctr">
+                      <a:noFill/>
+                    </a:lnL>
+                    <a:lnR w="0" cap="flat" cmpd="sng" algn="ctr">
+                      <a:noFill/>
+                    </a:lnR>
+                    <a:lnT w="0" cap="flat" cmpd="sng" algn="ctr">
+                      <a:noFill/>
+                    </a:lnT>
+                    <a:lnB w="9525" cap="flat" cmpd="sng" algn="ctr">
+                      <a:solidFill>
+                        <a:srgbClr val="D9E0EA"/>
+                      </a:solidFill>
+                      <a:prstDash val="solid"/>
+                      <a:round/>
+                      <a:headEnd type="none" w="med" len="med"/>
+                      <a:tailEnd type="none" w="med" len="med"/>
+                    </a:lnB>
+                    <a:solidFill>
+                      <a:srgbClr val="FFFFFF"/>
+                    </a:solidFill>
+                  </a:tcPr>
+                </a:tc>
+                <a:tc>
+                  <a:txBody>
+                    <a:bodyPr/>
+                    <a:lstStyle/>
+                    <a:p>
+                      <a:pPr algn="just" indent="0" marL="0">
+                        <a:buNone/>
+                      </a:pPr>
+                      <a:r>
+                        <a:rPr lang="en-US" sz="760" dirty="0">
+                          <a:solidFill>
+                            <a:schemeClr val="tx1"/>
+                          </a:solidFill>
+                          <a:latin typeface="Calibri" pitchFamily="34" charset="0"/>
+                          <a:ea typeface="Calibri" pitchFamily="34" charset="-122"/>
+                          <a:cs typeface="Calibri" pitchFamily="34" charset="-120"/>
+                        </a:rPr>
+                        <a:t>Descargo</a:t>
+                      </a:r>
+                      <a:endParaRPr lang="en-US" sz="760" dirty="0">
+                        <a:latin typeface="Calibri" charset="0"/>
+                        <a:ea typeface="Calibri" charset="0"/>
+                        <a:cs typeface="Calibri" charset="0"/>
+                      </a:endParaRPr>
+                    </a:p>
+                    <a:p>
+                      <a:pPr algn="just" indent="0" marL="0">
+                        <a:buNone/>
+                      </a:pPr>
+                      <a:r>
+                        <a:rPr lang="en-US" sz="760" dirty="0">
+                          <a:solidFill>
+                            <a:schemeClr val="tx1"/>
+                          </a:solidFill>
+                          <a:latin typeface="Calibri" pitchFamily="34" charset="0"/>
+                          <a:ea typeface="Calibri" pitchFamily="34" charset="-122"/>
+                          <a:cs typeface="Calibri" pitchFamily="34" charset="-120"/>
+                        </a:rPr>
+                        <a:t>Pendiente</a:t>
+                      </a:r>
+                      <a:endParaRPr lang="en-US" sz="760" dirty="0">
+                        <a:latin typeface="Calibri" charset="0"/>
+                        <a:ea typeface="Calibri" charset="0"/>
+                        <a:cs typeface="Calibri" charset="0"/>
+                      </a:endParaRPr>
+                    </a:p>
+                  </a:txBody>
+                  <a:tcPr marL="54864" marR="54864" marT="13716" marB="13716" anchor="ctr">
+                    <a:lnL w="0" cap="flat" cmpd="sng" algn="ctr">
+                      <a:noFill/>
+                    </a:lnL>
+                    <a:lnR w="0" cap="flat" cmpd="sng" algn="ctr">
+                      <a:noFill/>
+                    </a:lnR>
+                    <a:lnT w="0" cap="flat" cmpd="sng" algn="ctr">
+                      <a:noFill/>
+                    </a:lnT>
+                    <a:lnB w="9525" cap="flat" cmpd="sng" algn="ctr">
+                      <a:solidFill>
+                        <a:srgbClr val="D9E0EA"/>
+                      </a:solidFill>
+                      <a:prstDash val="solid"/>
+                      <a:round/>
+                      <a:headEnd type="none" w="med" len="med"/>
+                      <a:tailEnd type="none" w="med" len="med"/>
+                    </a:lnB>
+                  </a:tcPr>
+                </a:tc>
+                <a:tc>
+                  <a:txBody>
+                    <a:bodyPr/>
+                    <a:lstStyle/>
+                    <a:p>
+                      <a:pPr algn="l" indent="0" marL="0">
+                        <a:buNone/>
+                      </a:pPr>
+                      <a:r>
+                        <a:rPr lang="en-US" sz="760" b="1" dirty="0">
+                          <a:solidFill>
+                            <a:schemeClr val="accent1"/>
+                          </a:solidFill>
+                          <a:latin typeface="Calibri" pitchFamily="34" charset="0"/>
+                          <a:ea typeface="Calibri" pitchFamily="34" charset="-122"/>
+                          <a:cs typeface="Calibri" pitchFamily="34" charset="-120"/>
+                        </a:rPr>
+                        <a:t>Gerencia de Cumplimiento</a:t>
+                      </a:r>
+                      <a:endParaRPr lang="en-US" sz="760" dirty="0">
+                        <a:latin typeface="Calibri" charset="0"/>
+                        <a:ea typeface="Calibri" charset="0"/>
+                        <a:cs typeface="Calibri" charset="0"/>
+                      </a:endParaRPr>
+                    </a:p>
+                    <a:p>
+                      <a:pPr algn="l" indent="0" marL="0">
+                        <a:buNone/>
+                      </a:pPr>
+                      <a:r>
+                        <a:rPr lang="en-US" sz="760" b="1" dirty="0">
+                          <a:solidFill>
+                            <a:schemeClr val="accent1"/>
+                          </a:solidFill>
+                          <a:latin typeface="Calibri" pitchFamily="34" charset="0"/>
+                          <a:ea typeface="Calibri" pitchFamily="34" charset="-122"/>
+                          <a:cs typeface="Calibri" pitchFamily="34" charset="-120"/>
+                        </a:rPr>
+                        <a:t>/ Seguridad de la información</a:t>
+                      </a:r>
+                      <a:endParaRPr lang="en-US" sz="760" dirty="0">
+                        <a:latin typeface="Calibri" charset="0"/>
+                        <a:ea typeface="Calibri" charset="0"/>
+                        <a:cs typeface="Calibri" charset="0"/>
+                      </a:endParaRPr>
+                    </a:p>
+                  </a:txBody>
+                  <a:tcPr marL="54864" marR="54864" marT="13716" marB="13716" anchor="ctr">
+                    <a:lnL w="0" cap="flat" cmpd="sng" algn="ctr">
+                      <a:noFill/>
+                    </a:lnL>
+                    <a:lnR w="0" cap="flat" cmpd="sng" algn="ctr">
+                      <a:noFill/>
+                    </a:lnR>
+                    <a:lnT w="0" cap="flat" cmpd="sng" algn="ctr">
+                      <a:noFill/>
+                    </a:lnT>
+                    <a:lnB w="9525" cap="flat" cmpd="sng" algn="ctr">
+                      <a:solidFill>
+                        <a:srgbClr val="D9E0EA"/>
+                      </a:solidFill>
+                      <a:prstDash val="solid"/>
+                      <a:round/>
+                      <a:headEnd type="none" w="med" len="med"/>
+                      <a:tailEnd type="none" w="med" len="med"/>
+                    </a:lnB>
+                  </a:tcPr>
+                </a:tc>
+              </a:tr>
+              <a:tr h="0">
+                <a:tc>
+                  <a:txBody>
+                    <a:bodyPr/>
+                    <a:lstStyle/>
+                    <a:p>
+                      <a:pPr algn="just" indent="0" marL="0">
+                        <a:buNone/>
+                      </a:pPr>
+                      <a:r>
+                        <a:rPr lang="en-US" sz="760" b="1" dirty="0">
+                          <a:solidFill>
+                            <a:schemeClr val="tx1"/>
+                          </a:solidFill>
+                          <a:latin typeface="Calibri" pitchFamily="34" charset="0"/>
+                          <a:ea typeface="Calibri" pitchFamily="34" charset="-122"/>
+                          <a:cs typeface="Calibri" pitchFamily="34" charset="-120"/>
+                        </a:rPr>
+                        <a:t>B.13  Limitante para identificar la base de datos de CRM</a:t>
+                      </a:r>
+                      <a:endParaRPr lang="en-US" sz="760" dirty="0">
+                        <a:latin typeface="Calibri" charset="0"/>
+                        <a:ea typeface="Calibri" charset="0"/>
+                        <a:cs typeface="Calibri" charset="0"/>
+                      </a:endParaRPr>
+                    </a:p>
+                  </a:txBody>
+                  <a:tcPr marL="54864" marR="54864" marT="13716" marB="13716" anchor="ctr">
+                    <a:lnL w="0" cap="flat" cmpd="sng" algn="ctr">
+                      <a:noFill/>
+                    </a:lnL>
+                    <a:lnR w="0" cap="flat" cmpd="sng" algn="ctr">
+                      <a:noFill/>
+                    </a:lnR>
+                    <a:lnT w="0" cap="flat" cmpd="sng" algn="ctr">
+                      <a:noFill/>
+                    </a:lnT>
+                    <a:lnB w="9525" cap="flat" cmpd="sng" algn="ctr">
+                      <a:solidFill>
+                        <a:srgbClr val="D9E0EA"/>
+                      </a:solidFill>
+                      <a:prstDash val="solid"/>
+                      <a:round/>
+                      <a:headEnd type="none" w="med" len="med"/>
+                      <a:tailEnd type="none" w="med" len="med"/>
+                    </a:lnB>
+                    <a:solidFill>
+                      <a:srgbClr val="FFFFFF"/>
+                    </a:solidFill>
+                  </a:tcPr>
+                </a:tc>
+                <a:tc>
+                  <a:txBody>
+                    <a:bodyPr/>
+                    <a:lstStyle/>
+                    <a:p>
+                      <a:pPr algn="just" indent="0" marL="0">
+                        <a:buNone/>
+                      </a:pPr>
+                      <a:r>
+                        <a:rPr lang="en-US" sz="760" dirty="0">
+                          <a:solidFill>
+                            <a:schemeClr val="tx1"/>
+                          </a:solidFill>
+                          <a:latin typeface="Calibri" pitchFamily="34" charset="0"/>
+                          <a:ea typeface="Calibri" pitchFamily="34" charset="-122"/>
+                          <a:cs typeface="Calibri" pitchFamily="34" charset="-120"/>
+                        </a:rPr>
+                        <a:t>Pendiente</a:t>
+                      </a:r>
+                      <a:endParaRPr lang="en-US" sz="760" dirty="0">
+                        <a:latin typeface="Calibri" charset="0"/>
+                        <a:ea typeface="Calibri" charset="0"/>
+                        <a:cs typeface="Calibri" charset="0"/>
+                      </a:endParaRPr>
+                    </a:p>
+                  </a:txBody>
+                  <a:tcPr marL="54864" marR="54864" marT="13716" marB="13716" anchor="ctr">
+                    <a:lnL w="0" cap="flat" cmpd="sng" algn="ctr">
+                      <a:noFill/>
+                    </a:lnL>
+                    <a:lnR w="0" cap="flat" cmpd="sng" algn="ctr">
+                      <a:noFill/>
+                    </a:lnR>
+                    <a:lnT w="0" cap="flat" cmpd="sng" algn="ctr">
+                      <a:noFill/>
+                    </a:lnT>
+                    <a:lnB w="9525" cap="flat" cmpd="sng" algn="ctr">
+                      <a:solidFill>
+                        <a:srgbClr val="D9E0EA"/>
+                      </a:solidFill>
+                      <a:prstDash val="solid"/>
+                      <a:round/>
+                      <a:headEnd type="none" w="med" len="med"/>
+                      <a:tailEnd type="none" w="med" len="med"/>
+                    </a:lnB>
+                  </a:tcPr>
+                </a:tc>
+                <a:tc>
+                  <a:txBody>
+                    <a:bodyPr/>
+                    <a:lstStyle/>
+                    <a:p>
+                      <a:pPr algn="l" indent="0" marL="0">
+                        <a:buNone/>
+                      </a:pPr>
+                      <a:r>
+                        <a:rPr lang="en-US" sz="760" b="1" dirty="0">
+                          <a:solidFill>
+                            <a:schemeClr val="accent1"/>
+                          </a:solidFill>
+                          <a:latin typeface="Calibri" pitchFamily="34" charset="0"/>
+                          <a:ea typeface="Calibri" pitchFamily="34" charset="-122"/>
+                          <a:cs typeface="Calibri" pitchFamily="34" charset="-120"/>
+                        </a:rPr>
+                        <a:t>Gerencia de Cumplimiento</a:t>
+                      </a:r>
+                      <a:endParaRPr lang="en-US" sz="760" dirty="0">
+                        <a:latin typeface="Calibri" charset="0"/>
+                        <a:ea typeface="Calibri" charset="0"/>
+                        <a:cs typeface="Calibri" charset="0"/>
+                      </a:endParaRPr>
+                    </a:p>
+                    <a:p>
+                      <a:pPr algn="l" indent="0" marL="0">
+                        <a:buNone/>
+                      </a:pPr>
+                      <a:r>
+                        <a:rPr lang="en-US" sz="760" b="1" dirty="0">
+                          <a:solidFill>
+                            <a:schemeClr val="accent1"/>
+                          </a:solidFill>
+                          <a:latin typeface="Calibri" pitchFamily="34" charset="0"/>
+                          <a:ea typeface="Calibri" pitchFamily="34" charset="-122"/>
+                          <a:cs typeface="Calibri" pitchFamily="34" charset="-120"/>
+                        </a:rPr>
+                        <a:t>/ Seguridad de la información</a:t>
+                      </a:r>
+                      <a:endParaRPr lang="en-US" sz="760" dirty="0">
+                        <a:latin typeface="Calibri" charset="0"/>
+                        <a:ea typeface="Calibri" charset="0"/>
+                        <a:cs typeface="Calibri" charset="0"/>
+                      </a:endParaRPr>
+                    </a:p>
+                  </a:txBody>
+                  <a:tcPr marL="54864" marR="54864" marT="13716" marB="13716" anchor="ctr">
+                    <a:lnL w="0" cap="flat" cmpd="sng" algn="ctr">
+                      <a:noFill/>
+                    </a:lnL>
+                    <a:lnR w="0" cap="flat" cmpd="sng" algn="ctr">
+                      <a:noFill/>
+                    </a:lnR>
+                    <a:lnT w="0" cap="flat" cmpd="sng" algn="ctr">
+                      <a:noFill/>
+                    </a:lnT>
+                    <a:lnB w="9525" cap="flat" cmpd="sng" algn="ctr">
+                      <a:solidFill>
+                        <a:srgbClr val="D9E0EA"/>
+                      </a:solidFill>
+                      <a:prstDash val="solid"/>
+                      <a:round/>
+                      <a:headEnd type="none" w="med" len="med"/>
+                      <a:tailEnd type="none" w="med" len="med"/>
+                    </a:lnB>
+                  </a:tcPr>
+                </a:tc>
+              </a:tr>
+              <a:tr h="0">
+                <a:tc>
+                  <a:txBody>
+                    <a:bodyPr/>
+                    <a:lstStyle/>
+                    <a:p>
+                      <a:pPr algn="just" indent="0" marL="0">
+                        <a:buNone/>
+                      </a:pPr>
+                      <a:r>
+                        <a:rPr lang="en-US" sz="760" b="1" dirty="0">
+                          <a:solidFill>
+                            <a:schemeClr val="tx1"/>
+                          </a:solidFill>
+                          <a:latin typeface="Calibri" pitchFamily="34" charset="0"/>
+                          <a:ea typeface="Calibri" pitchFamily="34" charset="-122"/>
+                          <a:cs typeface="Calibri" pitchFamily="34" charset="-120"/>
+                        </a:rPr>
+                        <a:t>B.14  Falta de documentación que dé cumplimiento a lo requerido por el artículo 22 de la NRP-23 correspondiente a la adquisición del sistema CRM.</a:t>
+                      </a:r>
+                      <a:endParaRPr lang="en-US" sz="760" dirty="0">
+                        <a:latin typeface="Calibri" charset="0"/>
+                        <a:ea typeface="Calibri" charset="0"/>
+                        <a:cs typeface="Calibri" charset="0"/>
+                      </a:endParaRPr>
+                    </a:p>
+                  </a:txBody>
+                  <a:tcPr marL="54864" marR="54864" marT="13716" marB="13716" anchor="ctr">
+                    <a:lnL w="0" cap="flat" cmpd="sng" algn="ctr">
+                      <a:noFill/>
+                    </a:lnL>
+                    <a:lnR w="0" cap="flat" cmpd="sng" algn="ctr">
+                      <a:noFill/>
+                    </a:lnR>
+                    <a:lnT w="0" cap="flat" cmpd="sng" algn="ctr">
+                      <a:noFill/>
+                    </a:lnT>
+                    <a:lnB w="9525" cap="flat" cmpd="sng" algn="ctr">
+                      <a:solidFill>
+                        <a:srgbClr val="D9E0EA"/>
+                      </a:solidFill>
+                      <a:prstDash val="solid"/>
+                      <a:round/>
+                      <a:headEnd type="none" w="med" len="med"/>
+                      <a:tailEnd type="none" w="med" len="med"/>
+                    </a:lnB>
+                    <a:solidFill>
+                      <a:srgbClr val="FFFFFF"/>
+                    </a:solidFill>
+                  </a:tcPr>
+                </a:tc>
+                <a:tc>
+                  <a:txBody>
+                    <a:bodyPr/>
+                    <a:lstStyle/>
+                    <a:p>
+                      <a:pPr algn="just" indent="0" marL="0">
+                        <a:buNone/>
+                      </a:pPr>
+                      <a:r>
+                        <a:rPr lang="en-US" sz="760" dirty="0">
+                          <a:solidFill>
+                            <a:schemeClr val="tx1"/>
+                          </a:solidFill>
+                          <a:latin typeface="Calibri" pitchFamily="34" charset="0"/>
+                          <a:ea typeface="Calibri" pitchFamily="34" charset="-122"/>
+                          <a:cs typeface="Calibri" pitchFamily="34" charset="-120"/>
+                        </a:rPr>
+                        <a:t>Descargo</a:t>
+                      </a:r>
+                      <a:endParaRPr lang="en-US" sz="760" dirty="0">
+                        <a:latin typeface="Calibri" charset="0"/>
+                        <a:ea typeface="Calibri" charset="0"/>
+                        <a:cs typeface="Calibri" charset="0"/>
+                      </a:endParaRPr>
+                    </a:p>
+                    <a:p>
+                      <a:pPr algn="just" indent="0" marL="0">
+                        <a:buNone/>
+                      </a:pPr>
+                      <a:r>
+                        <a:rPr lang="en-US" sz="760" dirty="0">
+                          <a:solidFill>
+                            <a:schemeClr val="tx1"/>
+                          </a:solidFill>
+                          <a:latin typeface="Calibri" pitchFamily="34" charset="0"/>
+                          <a:ea typeface="Calibri" pitchFamily="34" charset="-122"/>
+                          <a:cs typeface="Calibri" pitchFamily="34" charset="-120"/>
+                        </a:rPr>
+                        <a:t>Pendiente</a:t>
+                      </a:r>
+                      <a:endParaRPr lang="en-US" sz="760" dirty="0">
+                        <a:latin typeface="Calibri" charset="0"/>
+                        <a:ea typeface="Calibri" charset="0"/>
+                        <a:cs typeface="Calibri" charset="0"/>
+                      </a:endParaRPr>
+                    </a:p>
+                  </a:txBody>
+                  <a:tcPr marL="54864" marR="54864" marT="13716" marB="13716" anchor="ctr">
+                    <a:lnL w="0" cap="flat" cmpd="sng" algn="ctr">
+                      <a:noFill/>
+                    </a:lnL>
+                    <a:lnR w="0" cap="flat" cmpd="sng" algn="ctr">
+                      <a:noFill/>
+                    </a:lnR>
+                    <a:lnT w="0" cap="flat" cmpd="sng" algn="ctr">
+                      <a:noFill/>
+                    </a:lnT>
+                    <a:lnB w="9525" cap="flat" cmpd="sng" algn="ctr">
+                      <a:solidFill>
+                        <a:srgbClr val="D9E0EA"/>
+                      </a:solidFill>
+                      <a:prstDash val="solid"/>
+                      <a:round/>
+                      <a:headEnd type="none" w="med" len="med"/>
+                      <a:tailEnd type="none" w="med" len="med"/>
+                    </a:lnB>
+                  </a:tcPr>
+                </a:tc>
+                <a:tc>
+                  <a:txBody>
+                    <a:bodyPr/>
+                    <a:lstStyle/>
+                    <a:p>
+                      <a:pPr algn="l" indent="0" marL="0">
+                        <a:buNone/>
+                      </a:pPr>
+                      <a:r>
+                        <a:rPr lang="en-US" sz="760" b="1" dirty="0">
+                          <a:solidFill>
+                            <a:schemeClr val="accent1"/>
+                          </a:solidFill>
+                          <a:latin typeface="Calibri" pitchFamily="34" charset="0"/>
+                          <a:ea typeface="Calibri" pitchFamily="34" charset="-122"/>
+                          <a:cs typeface="Calibri" pitchFamily="34" charset="-120"/>
+                        </a:rPr>
+                        <a:t>Gerencia de Cumplimiento</a:t>
+                      </a:r>
+                      <a:endParaRPr lang="en-US" sz="760" dirty="0">
+                        <a:latin typeface="Calibri" charset="0"/>
+                        <a:ea typeface="Calibri" charset="0"/>
+                        <a:cs typeface="Calibri" charset="0"/>
+                      </a:endParaRPr>
+                    </a:p>
+                    <a:p>
+                      <a:pPr algn="l" indent="0" marL="0">
+                        <a:buNone/>
+                      </a:pPr>
+                      <a:r>
+                        <a:rPr lang="en-US" sz="760" b="1" dirty="0">
+                          <a:solidFill>
+                            <a:schemeClr val="accent1"/>
+                          </a:solidFill>
+                          <a:latin typeface="Calibri" pitchFamily="34" charset="0"/>
+                          <a:ea typeface="Calibri" pitchFamily="34" charset="-122"/>
+                          <a:cs typeface="Calibri" pitchFamily="34" charset="-120"/>
+                        </a:rPr>
+                        <a:t>/Seguridad de la Información</a:t>
+                      </a:r>
+                      <a:endParaRPr lang="en-US" sz="760" dirty="0">
+                        <a:latin typeface="Calibri" charset="0"/>
+                        <a:ea typeface="Calibri" charset="0"/>
+                        <a:cs typeface="Calibri" charset="0"/>
+                      </a:endParaRPr>
+                    </a:p>
+                  </a:txBody>
+                  <a:tcPr marL="54864" marR="54864" marT="13716" marB="13716" anchor="ctr">
+                    <a:lnL w="0" cap="flat" cmpd="sng" algn="ctr">
+                      <a:noFill/>
+                    </a:lnL>
+                    <a:lnR w="0" cap="flat" cmpd="sng" algn="ctr">
+                      <a:noFill/>
+                    </a:lnR>
+                    <a:lnT w="0" cap="flat" cmpd="sng" algn="ctr">
+                      <a:noFill/>
+                    </a:lnT>
+                    <a:lnB w="9525" cap="flat" cmpd="sng" algn="ctr">
+                      <a:solidFill>
+                        <a:srgbClr val="D9E0EA"/>
+                      </a:solidFill>
+                      <a:prstDash val="solid"/>
+                      <a:round/>
+                      <a:headEnd type="none" w="med" len="med"/>
+                      <a:tailEnd type="none" w="med" len="med"/>
+                    </a:lnB>
+                  </a:tcPr>
+                </a:tc>
+              </a:tr>
+              <a:tr h="0">
+                <a:tc>
+                  <a:txBody>
+                    <a:bodyPr/>
+                    <a:lstStyle/>
+                    <a:p>
+                      <a:pPr algn="just" indent="0" marL="0">
+                        <a:buNone/>
+                      </a:pPr>
+                      <a:r>
+                        <a:rPr lang="en-US" sz="760" b="1" dirty="0">
+                          <a:solidFill>
+                            <a:schemeClr val="tx1"/>
+                          </a:solidFill>
+                          <a:latin typeface="Calibri" pitchFamily="34" charset="0"/>
+                          <a:ea typeface="Calibri" pitchFamily="34" charset="-122"/>
+                          <a:cs typeface="Calibri" pitchFamily="34" charset="-120"/>
+                        </a:rPr>
+                        <a:t>B.15  Servicios tercerizados</a:t>
+                      </a:r>
+                      <a:endParaRPr lang="en-US" sz="760" dirty="0">
+                        <a:latin typeface="Calibri" charset="0"/>
+                        <a:ea typeface="Calibri" charset="0"/>
+                        <a:cs typeface="Calibri" charset="0"/>
+                      </a:endParaRPr>
+                    </a:p>
+                  </a:txBody>
+                  <a:tcPr marL="54864" marR="54864" marT="13716" marB="13716" anchor="ctr">
+                    <a:lnL w="0" cap="flat" cmpd="sng" algn="ctr">
+                      <a:noFill/>
+                    </a:lnL>
+                    <a:lnR w="0" cap="flat" cmpd="sng" algn="ctr">
+                      <a:noFill/>
+                    </a:lnR>
+                    <a:lnT w="0" cap="flat" cmpd="sng" algn="ctr">
+                      <a:noFill/>
+                    </a:lnT>
+                    <a:lnB w="9525" cap="flat" cmpd="sng" algn="ctr">
+                      <a:solidFill>
+                        <a:srgbClr val="D9E0EA"/>
+                      </a:solidFill>
+                      <a:prstDash val="solid"/>
+                      <a:round/>
+                      <a:headEnd type="none" w="med" len="med"/>
+                      <a:tailEnd type="none" w="med" len="med"/>
+                    </a:lnB>
+                    <a:solidFill>
+                      <a:srgbClr val="FFFFFF"/>
+                    </a:solidFill>
+                  </a:tcPr>
+                </a:tc>
+                <a:tc>
+                  <a:txBody>
+                    <a:bodyPr/>
+                    <a:lstStyle/>
+                    <a:p>
+                      <a:pPr algn="just" indent="0" marL="0">
+                        <a:buNone/>
+                      </a:pPr>
+                      <a:r>
+                        <a:rPr lang="en-US" sz="760" dirty="0">
+                          <a:solidFill>
+                            <a:schemeClr val="tx1"/>
+                          </a:solidFill>
+                          <a:latin typeface="Calibri" pitchFamily="34" charset="0"/>
+                          <a:ea typeface="Calibri" pitchFamily="34" charset="-122"/>
+                          <a:cs typeface="Calibri" pitchFamily="34" charset="-120"/>
+                        </a:rPr>
+                        <a:t>Plan de acción:</a:t>
+                      </a:r>
+                      <a:endParaRPr lang="en-US" sz="760" dirty="0">
+                        <a:latin typeface="Calibri" charset="0"/>
+                        <a:ea typeface="Calibri" charset="0"/>
+                        <a:cs typeface="Calibri" charset="0"/>
+                      </a:endParaRPr>
+                    </a:p>
+                    <a:p>
+                      <a:pPr algn="just" indent="0" marL="0">
+                        <a:buNone/>
+                      </a:pPr>
+                      <a:r>
+                        <a:rPr lang="en-US" sz="760" dirty="0">
+                          <a:solidFill>
+                            <a:schemeClr val="tx1"/>
+                          </a:solidFill>
+                          <a:latin typeface="Calibri" pitchFamily="34" charset="0"/>
+                          <a:ea typeface="Calibri" pitchFamily="34" charset="-122"/>
+                          <a:cs typeface="Calibri" pitchFamily="34" charset="-120"/>
+                        </a:rPr>
+                        <a:t>Pendiente</a:t>
+                      </a:r>
+                      <a:endParaRPr lang="en-US" sz="760" dirty="0">
+                        <a:latin typeface="Calibri" charset="0"/>
+                        <a:ea typeface="Calibri" charset="0"/>
+                        <a:cs typeface="Calibri" charset="0"/>
+                      </a:endParaRPr>
+                    </a:p>
+                    <a:p>
+                      <a:pPr algn="just" indent="0" marL="0">
+                        <a:buNone/>
+                      </a:pPr>
+                      <a:r>
+                        <a:rPr lang="en-US" sz="760" dirty="0">
+                          <a:solidFill>
+                            <a:schemeClr val="tx1"/>
+                          </a:solidFill>
+                          <a:latin typeface="Calibri" pitchFamily="34" charset="0"/>
+                          <a:ea typeface="Calibri" pitchFamily="34" charset="-122"/>
+                          <a:cs typeface="Calibri" pitchFamily="34" charset="-120"/>
+                        </a:rPr>
+                        <a:t>Comentario Licda. Bonilla: Como parte del fortalecimiento de los controles de seguridad asociados al servicio tercerizado del módulo ACRM, la Unidad de Seguridad de la Información y Ciberseguridad realizará una reevaluación de los riesgos de seguridad de la información y ciberseguridad, mediante la actualización de la matriz de riesgos y la revisión de los controles existentes, con el propósito de identificar oportunidades de mejora y definir las medidas adicionales de tratamiento que correspondan, en coordinación con el área responsable de la solución el proveedor.</a:t>
+                      </a:r>
+                      <a:endParaRPr lang="en-US" sz="760" dirty="0">
+                        <a:latin typeface="Calibri" charset="0"/>
+                        <a:ea typeface="Calibri" charset="0"/>
+                        <a:cs typeface="Calibri" charset="0"/>
+                      </a:endParaRPr>
+                    </a:p>
+                    <a:p>
+                      <a:pPr algn="just" indent="0" marL="0">
+                        <a:buNone/>
+                      </a:pPr>
+                      <a:r>
+                        <a:rPr lang="en-US" sz="760" dirty="0">
+                          <a:solidFill>
+                            <a:schemeClr val="tx1"/>
+                          </a:solidFill>
+                          <a:latin typeface="Calibri" pitchFamily="34" charset="0"/>
+                          <a:ea typeface="Calibri" pitchFamily="34" charset="-122"/>
+                          <a:cs typeface="Calibri" pitchFamily="34" charset="-120"/>
+                        </a:rPr>
+                        <a:t>Fecha de cumplimiento: 30 de noviembre de 2026.</a:t>
+                      </a:r>
+                      <a:endParaRPr lang="en-US" sz="760" dirty="0">
+                        <a:latin typeface="Calibri" charset="0"/>
+                        <a:ea typeface="Calibri" charset="0"/>
+                        <a:cs typeface="Calibri" charset="0"/>
+                      </a:endParaRPr>
+                    </a:p>
+                  </a:txBody>
+                  <a:tcPr marL="54864" marR="54864" marT="13716" marB="13716" anchor="ctr">
+                    <a:lnL w="0" cap="flat" cmpd="sng" algn="ctr">
+                      <a:noFill/>
+                    </a:lnL>
+                    <a:lnR w="0" cap="flat" cmpd="sng" algn="ctr">
+                      <a:noFill/>
+                    </a:lnR>
+                    <a:lnT w="0" cap="flat" cmpd="sng" algn="ctr">
+                      <a:noFill/>
+                    </a:lnT>
+                    <a:lnB w="9525" cap="flat" cmpd="sng" algn="ctr">
+                      <a:solidFill>
+                        <a:srgbClr val="D9E0EA"/>
+                      </a:solidFill>
+                      <a:prstDash val="solid"/>
+                      <a:round/>
+                      <a:headEnd type="none" w="med" len="med"/>
+                      <a:tailEnd type="none" w="med" len="med"/>
+                    </a:lnB>
+                  </a:tcPr>
+                </a:tc>
+                <a:tc>
+                  <a:txBody>
+                    <a:bodyPr/>
+                    <a:lstStyle/>
+                    <a:p>
+                      <a:pPr algn="l" indent="0" marL="0">
+                        <a:buNone/>
+                      </a:pPr>
+                      <a:r>
+                        <a:rPr lang="en-US" sz="760" b="1" dirty="0">
+                          <a:solidFill>
+                            <a:schemeClr val="accent1"/>
+                          </a:solidFill>
+                          <a:latin typeface="Calibri" pitchFamily="34" charset="0"/>
+                          <a:ea typeface="Calibri" pitchFamily="34" charset="-122"/>
+                          <a:cs typeface="Calibri" pitchFamily="34" charset="-120"/>
+                        </a:rPr>
+                        <a:t>Gerencia de Cumplimiento</a:t>
+                      </a:r>
+                      <a:endParaRPr lang="en-US" sz="760" dirty="0">
+                        <a:latin typeface="Calibri" charset="0"/>
+                        <a:ea typeface="Calibri" charset="0"/>
+                        <a:cs typeface="Calibri" charset="0"/>
+                      </a:endParaRPr>
+                    </a:p>
+                    <a:p>
+                      <a:pPr algn="l" indent="0" marL="0">
+                        <a:buNone/>
+                      </a:pPr>
+                      <a:r>
+                        <a:rPr lang="en-US" sz="760" b="1" dirty="0">
+                          <a:solidFill>
+                            <a:schemeClr val="accent1"/>
+                          </a:solidFill>
+                          <a:latin typeface="Calibri" pitchFamily="34" charset="0"/>
+                          <a:ea typeface="Calibri" pitchFamily="34" charset="-122"/>
+                          <a:cs typeface="Calibri" pitchFamily="34" charset="-120"/>
+                        </a:rPr>
+                        <a:t>/ Seguridad de la Información</a:t>
+                      </a:r>
+                      <a:endParaRPr lang="en-US" sz="760" dirty="0">
+                        <a:latin typeface="Calibri" charset="0"/>
+                        <a:ea typeface="Calibri" charset="0"/>
+                        <a:cs typeface="Calibri" charset="0"/>
+                      </a:endParaRPr>
+                    </a:p>
+                  </a:txBody>
+                  <a:tcPr marL="54864" marR="54864" marT="13716" marB="13716" anchor="ctr">
                     <a:lnL w="0" cap="flat" cmpd="sng" algn="ctr">
                       <a:noFill/>
                     </a:lnL>

--- a/supervision-gobierno-corporativo/Matriz_Requerimientos_DS-SABAO-BCS-BC-23486.pptx
+++ b/supervision-gobierno-corporativo/Matriz_Requerimientos_DS-SABAO-BCS-BC-23486.pptx
@@ -1423,7 +1423,7 @@
                       <a:tailEnd type="none" w="med" len="med"/>
                     </a:lnB>
                     <a:solidFill>
-                      <a:schemeClr val="accent1"/>
+                      <a:srgbClr val="0E7490"/>
                     </a:solidFill>
                   </a:tcPr>
                 </a:tc>
@@ -1446,7 +1446,7 @@
                       <a:r>
                         <a:rPr lang="en-US" sz="1100" b="1" dirty="0">
                           <a:solidFill>
-                            <a:schemeClr val="accent1"/>
+                            <a:srgbClr val="0E7490"/>
                           </a:solidFill>
                           <a:latin typeface="Calibri" pitchFamily="34" charset="0"/>
                           <a:ea typeface="Calibri" pitchFamily="34" charset="-122"/>
@@ -1603,7 +1603,7 @@
                       <a:r>
                         <a:rPr lang="en-US" sz="1100" b="1" dirty="0">
                           <a:solidFill>
-                            <a:schemeClr val="accent1"/>
+                            <a:srgbClr val="0E7490"/>
                           </a:solidFill>
                           <a:latin typeface="Calibri" pitchFamily="34" charset="0"/>
                           <a:ea typeface="Calibri" pitchFamily="34" charset="-122"/>

--- a/supervision-gobierno-corporativo/Matriz_Requerimientos_DS-SABAO-BCS-BC-23486.pptx
+++ b/supervision-gobierno-corporativo/Matriz_Requerimientos_DS-SABAO-BCS-BC-23486.pptx
@@ -1502,14 +1502,14 @@
           <p:nvPr>
             <p:extLst>
               <p:ext uri="{D42A27DB-BD31-4B8C-83A1-F6EECF244321}">
-                <p14:modId xmlns:p14="http://schemas.microsoft.com/office/powerpoint/2010/main" val="1522017504"/>
+                <p14:modId xmlns:p14="http://schemas.microsoft.com/office/powerpoint/2010/main" val="3879619768"/>
               </p:ext>
             </p:extLst>
           </p:nvPr>
         </p:nvGraphicFramePr>
         <p:xfrm>
           <a:off x="44116" y="1569069"/>
-          <a:ext cx="12103768" cy="5209032"/>
+          <a:ext cx="12103768" cy="5173964"/>
         </p:xfrm>
         <a:graphic>
           <a:graphicData uri="http://schemas.openxmlformats.org/drawingml/2006/table">
@@ -3455,18 +3455,18 @@
                           <a:ea typeface="Calibri" pitchFamily="34" charset="-122"/>
                           <a:cs typeface="Arial" panose="020B0604020202020204" pitchFamily="34" charset="0"/>
                         </a:rPr>
-                        <a:t>Descargo correos de </a:t>
-                      </a:r>
-                      <a:r>
-                        <a:rPr lang="es-SV" sz="800" noProof="0" dirty="0" err="1">
-                          <a:solidFill>
-                            <a:schemeClr val="tx1"/>
-                          </a:solidFill>
-                          <a:latin typeface="Arial" panose="020B0604020202020204" pitchFamily="34" charset="0"/>
-                          <a:ea typeface="Calibri" pitchFamily="34" charset="-122"/>
-                          <a:cs typeface="Arial" panose="020B0604020202020204" pitchFamily="34" charset="0"/>
-                        </a:rPr>
-                        <a:t>gestion</a:t>
+                        <a:t>Descargo correos </a:t>
+                      </a:r>
+                      <a:r>
+                        <a:rPr lang="es-SV" sz="800" noProof="0">
+                          <a:solidFill>
+                            <a:schemeClr val="tx1"/>
+                          </a:solidFill>
+                          <a:latin typeface="Arial" panose="020B0604020202020204" pitchFamily="34" charset="0"/>
+                          <a:ea typeface="Calibri" pitchFamily="34" charset="-122"/>
+                          <a:cs typeface="Arial" panose="020B0604020202020204" pitchFamily="34" charset="0"/>
+                        </a:rPr>
+                        <a:t>de gestión</a:t>
                       </a:r>
                       <a:endParaRPr lang="es-SV" sz="800" noProof="0" dirty="0">
                         <a:solidFill>
@@ -3662,30 +3662,6 @@
                           <a:ea typeface="Calibri" pitchFamily="34" charset="-122"/>
                           <a:cs typeface="Arial" panose="020B0604020202020204" pitchFamily="34" charset="0"/>
                         </a:rPr>
-                        <a:t>Descargo</a:t>
-                      </a:r>
-                      <a:endParaRPr lang="es-SV" sz="800" noProof="0" dirty="0">
-                        <a:solidFill>
-                          <a:schemeClr val="tx1"/>
-                        </a:solidFill>
-                        <a:latin typeface="Arial" panose="020B0604020202020204" pitchFamily="34" charset="0"/>
-                        <a:ea typeface="Calibri" charset="0"/>
-                        <a:cs typeface="Arial" panose="020B0604020202020204" pitchFamily="34" charset="0"/>
-                      </a:endParaRPr>
-                    </a:p>
-                    <a:p>
-                      <a:pPr marL="0" indent="0" algn="just">
-                        <a:buNone/>
-                      </a:pPr>
-                      <a:r>
-                        <a:rPr lang="es-SV" sz="800" noProof="0" dirty="0">
-                          <a:solidFill>
-                            <a:schemeClr val="tx1"/>
-                          </a:solidFill>
-                          <a:latin typeface="Arial" panose="020B0604020202020204" pitchFamily="34" charset="0"/>
-                          <a:ea typeface="Calibri" pitchFamily="34" charset="-122"/>
-                          <a:cs typeface="Arial" panose="020B0604020202020204" pitchFamily="34" charset="0"/>
-                        </a:rPr>
                         <a:t>Pendiente</a:t>
                       </a:r>
                       <a:endParaRPr lang="es-SV" sz="800" noProof="0" dirty="0">
@@ -3858,30 +3834,6 @@
                           <a:ea typeface="Calibri" pitchFamily="34" charset="-122"/>
                           <a:cs typeface="Arial" panose="020B0604020202020204" pitchFamily="34" charset="0"/>
                         </a:rPr>
-                        <a:t>Descargo</a:t>
-                      </a:r>
-                      <a:endParaRPr lang="es-SV" sz="800" noProof="0" dirty="0">
-                        <a:solidFill>
-                          <a:schemeClr val="tx1"/>
-                        </a:solidFill>
-                        <a:latin typeface="Arial" panose="020B0604020202020204" pitchFamily="34" charset="0"/>
-                        <a:ea typeface="Calibri" charset="0"/>
-                        <a:cs typeface="Arial" panose="020B0604020202020204" pitchFamily="34" charset="0"/>
-                      </a:endParaRPr>
-                    </a:p>
-                    <a:p>
-                      <a:pPr marL="0" indent="0" algn="just">
-                        <a:buNone/>
-                      </a:pPr>
-                      <a:r>
-                        <a:rPr lang="es-SV" sz="800" noProof="0" dirty="0">
-                          <a:solidFill>
-                            <a:schemeClr val="tx1"/>
-                          </a:solidFill>
-                          <a:latin typeface="Arial" panose="020B0604020202020204" pitchFamily="34" charset="0"/>
-                          <a:ea typeface="Calibri" pitchFamily="34" charset="-122"/>
-                          <a:cs typeface="Arial" panose="020B0604020202020204" pitchFamily="34" charset="0"/>
-                        </a:rPr>
                         <a:t>Pendiente</a:t>
                       </a:r>
                       <a:endParaRPr lang="es-SV" sz="800" noProof="0" dirty="0">
@@ -4268,30 +4220,6 @@
                           <a:ea typeface="Calibri" pitchFamily="34" charset="-122"/>
                           <a:cs typeface="Arial" panose="020B0604020202020204" pitchFamily="34" charset="0"/>
                         </a:rPr>
-                        <a:t>Descargo</a:t>
-                      </a:r>
-                      <a:endParaRPr lang="es-SV" sz="800" noProof="0" dirty="0">
-                        <a:solidFill>
-                          <a:schemeClr val="tx1"/>
-                        </a:solidFill>
-                        <a:latin typeface="Arial" panose="020B0604020202020204" pitchFamily="34" charset="0"/>
-                        <a:ea typeface="Calibri" charset="0"/>
-                        <a:cs typeface="Arial" panose="020B0604020202020204" pitchFamily="34" charset="0"/>
-                      </a:endParaRPr>
-                    </a:p>
-                    <a:p>
-                      <a:pPr marL="0" indent="0" algn="just">
-                        <a:buNone/>
-                      </a:pPr>
-                      <a:r>
-                        <a:rPr lang="es-SV" sz="800" noProof="0" dirty="0">
-                          <a:solidFill>
-                            <a:schemeClr val="tx1"/>
-                          </a:solidFill>
-                          <a:latin typeface="Arial" panose="020B0604020202020204" pitchFamily="34" charset="0"/>
-                          <a:ea typeface="Calibri" pitchFamily="34" charset="-122"/>
-                          <a:cs typeface="Arial" panose="020B0604020202020204" pitchFamily="34" charset="0"/>
-                        </a:rPr>
                         <a:t>Pendiente</a:t>
                       </a:r>
                       <a:endParaRPr lang="es-SV" sz="800" noProof="0" dirty="0">
@@ -4485,7 +4413,7 @@
                           <a:ea typeface="Calibri" pitchFamily="34" charset="-122"/>
                           <a:cs typeface="Arial" panose="020B0604020202020204" pitchFamily="34" charset="0"/>
                         </a:rPr>
-                        <a:t>Plan de acción:</a:t>
+                        <a:t>Como parte del fortalecimiento de los controles de seguridad asociados al servicio tercerizado del módulo ACRM, la Unidad de Seguridad de la Información y Ciberseguridad realizará una reevaluación de los riesgos de seguridad de la información y ciberseguridad, mediante la actualización de la matriz de riesgos y la revisión de los controles existentes, con el propósito de identificar oportunidades de mejora y definir las medidas adicionales de tratamiento que correspondan, en coordinación con el área responsable de la solución el proveedor.</a:t>
                       </a:r>
                       <a:endParaRPr lang="es-SV" sz="800" noProof="0" dirty="0">
                         <a:solidFill>
@@ -4509,7 +4437,7 @@
                           <a:ea typeface="Calibri" pitchFamily="34" charset="-122"/>
                           <a:cs typeface="Arial" panose="020B0604020202020204" pitchFamily="34" charset="0"/>
                         </a:rPr>
-                        <a:t>Pendiente</a:t>
+                        <a:t>Fecha de cumplimiento: 30 de noviembre de 2026.</a:t>
                       </a:r>
                       <a:endParaRPr lang="es-SV" sz="800" noProof="0" dirty="0">
                         <a:solidFill>
@@ -4520,54 +4448,6 @@
                         <a:cs typeface="Arial" panose="020B0604020202020204" pitchFamily="34" charset="0"/>
                       </a:endParaRPr>
                     </a:p>
-                    <a:p>
-                      <a:pPr marL="0" indent="0" algn="just">
-                        <a:buNone/>
-                      </a:pPr>
-                      <a:r>
-                        <a:rPr lang="es-SV" sz="800" noProof="0" dirty="0">
-                          <a:solidFill>
-                            <a:schemeClr val="tx1"/>
-                          </a:solidFill>
-                          <a:latin typeface="Arial" panose="020B0604020202020204" pitchFamily="34" charset="0"/>
-                          <a:ea typeface="Calibri" pitchFamily="34" charset="-122"/>
-                          <a:cs typeface="Arial" panose="020B0604020202020204" pitchFamily="34" charset="0"/>
-                        </a:rPr>
-                        <a:t>Comentario Licda. Bonilla: Como parte del fortalecimiento de los controles de seguridad asociados al servicio tercerizado del módulo ACRM, la Unidad de Seguridad de la Información y Ciberseguridad realizará una reevaluación de los riesgos de seguridad de la información y ciberseguridad, mediante la actualización de la matriz de riesgos y la revisión de los controles existentes, con el propósito de identificar oportunidades de mejora y definir las medidas adicionales de tratamiento que correspondan, en coordinación con el área responsable de la solución el proveedor.</a:t>
-                      </a:r>
-                      <a:endParaRPr lang="es-SV" sz="800" noProof="0" dirty="0">
-                        <a:solidFill>
-                          <a:schemeClr val="tx1"/>
-                        </a:solidFill>
-                        <a:latin typeface="Arial" panose="020B0604020202020204" pitchFamily="34" charset="0"/>
-                        <a:ea typeface="Calibri" charset="0"/>
-                        <a:cs typeface="Arial" panose="020B0604020202020204" pitchFamily="34" charset="0"/>
-                      </a:endParaRPr>
-                    </a:p>
-                    <a:p>
-                      <a:pPr marL="0" indent="0" algn="just">
-                        <a:buNone/>
-                      </a:pPr>
-                      <a:r>
-                        <a:rPr lang="es-SV" sz="800" noProof="0" dirty="0">
-                          <a:solidFill>
-                            <a:schemeClr val="tx1"/>
-                          </a:solidFill>
-                          <a:latin typeface="Arial" panose="020B0604020202020204" pitchFamily="34" charset="0"/>
-                          <a:ea typeface="Calibri" pitchFamily="34" charset="-122"/>
-                          <a:cs typeface="Arial" panose="020B0604020202020204" pitchFamily="34" charset="0"/>
-                        </a:rPr>
-                        <a:t>Fecha de cumplimiento: 30 de noviembre de 2026.</a:t>
-                      </a:r>
-                      <a:endParaRPr lang="es-SV" sz="800" noProof="0" dirty="0">
-                        <a:solidFill>
-                          <a:schemeClr val="tx1"/>
-                        </a:solidFill>
-                        <a:latin typeface="Arial" panose="020B0604020202020204" pitchFamily="34" charset="0"/>
-                        <a:ea typeface="Calibri" charset="0"/>
-                        <a:cs typeface="Arial" panose="020B0604020202020204" pitchFamily="34" charset="0"/>
-                      </a:endParaRPr>
-                    </a:p>
                   </a:txBody>
                   <a:tcPr marL="54864" marR="54864" marT="13716" marB="13716" anchor="ctr">
                     <a:lnL w="0" cap="flat" cmpd="sng" algn="ctr">
@@ -4613,28 +4493,7 @@
                           <a:ea typeface="Calibri" pitchFamily="34" charset="-122"/>
                           <a:cs typeface="Arial" panose="020B0604020202020204" pitchFamily="34" charset="0"/>
                         </a:rPr>
-                        <a:t>Gerencia de Cumplimiento</a:t>
-                      </a:r>
-                      <a:endParaRPr lang="es-SV" sz="800" noProof="0" dirty="0">
-                        <a:latin typeface="Arial" panose="020B0604020202020204" pitchFamily="34" charset="0"/>
-                        <a:ea typeface="Calibri" charset="0"/>
-                        <a:cs typeface="Arial" panose="020B0604020202020204" pitchFamily="34" charset="0"/>
-                      </a:endParaRPr>
-                    </a:p>
-                    <a:p>
-                      <a:pPr marL="0" indent="0" algn="l">
-                        <a:buNone/>
-                      </a:pPr>
-                      <a:r>
-                        <a:rPr lang="es-SV" sz="800" b="1" noProof="0" dirty="0">
-                          <a:solidFill>
-                            <a:schemeClr val="accent1"/>
-                          </a:solidFill>
-                          <a:latin typeface="Arial" panose="020B0604020202020204" pitchFamily="34" charset="0"/>
-                          <a:ea typeface="Calibri" pitchFamily="34" charset="-122"/>
-                          <a:cs typeface="Arial" panose="020B0604020202020204" pitchFamily="34" charset="0"/>
-                        </a:rPr>
-                        <a:t>/ Seguridad de la Información</a:t>
+                        <a:t>Seguridad de la Información</a:t>
                       </a:r>
                       <a:endParaRPr lang="es-SV" sz="800" noProof="0" dirty="0">
                         <a:latin typeface="Arial" panose="020B0604020202020204" pitchFamily="34" charset="0"/>
@@ -4696,7 +4555,7 @@
         </p:blipFill>
         <p:spPr>
           <a:xfrm>
-            <a:off x="9814255" y="109728"/>
+            <a:off x="9814560" y="0"/>
             <a:ext cx="1965960" cy="603504"/>
           </a:xfrm>
           <a:prstGeom prst="rect">
@@ -4785,13 +4644,13 @@
           <p:nvPr>
             <p:extLst>
               <p:ext uri="{D42A27DB-BD31-4B8C-83A1-F6EECF244321}">
-                <p14:modId xmlns:p14="http://schemas.microsoft.com/office/powerpoint/2010/main" val="852790113"/>
+                <p14:modId xmlns:p14="http://schemas.microsoft.com/office/powerpoint/2010/main" val="1314962269"/>
               </p:ext>
             </p:extLst>
           </p:nvPr>
         </p:nvGraphicFramePr>
         <p:xfrm>
-          <a:off x="112296" y="657726"/>
+          <a:off x="112296" y="559367"/>
           <a:ext cx="11983452" cy="6198290"/>
         </p:xfrm>
         <a:graphic>
@@ -6396,6 +6255,22 @@
                         <a:buNone/>
                       </a:pPr>
                       <a:r>
+                        <a:rPr lang="es-MX" sz="750" noProof="0" dirty="0">
+                          <a:solidFill>
+                            <a:schemeClr val="tx1"/>
+                          </a:solidFill>
+                          <a:latin typeface="Arial" panose="020B0604020202020204" pitchFamily="34" charset="0"/>
+                          <a:ea typeface="Calibri" pitchFamily="34" charset="-122"/>
+                          <a:cs typeface="Arial" panose="020B0604020202020204" pitchFamily="34" charset="0"/>
+                        </a:rPr>
+                        <a:t>Se gestionará con la Gerencia de Oficialía de Cumplimiento un nuevo Plan de Acción. Auditoría Interna dará seguimiento.</a:t>
+                      </a:r>
+                    </a:p>
+                    <a:p>
+                      <a:pPr marL="0" indent="0" algn="just">
+                        <a:buNone/>
+                      </a:pPr>
+                      <a:r>
                         <a:rPr lang="es-SV" sz="750" noProof="0" dirty="0">
                           <a:solidFill>
                             <a:schemeClr val="tx1"/>
@@ -6404,7 +6279,7 @@
                           <a:ea typeface="Calibri" pitchFamily="34" charset="-122"/>
                           <a:cs typeface="Arial" panose="020B0604020202020204" pitchFamily="34" charset="0"/>
                         </a:rPr>
-                        <a:t>Sin comentarios ni documentación</a:t>
+                        <a:t>Plazo: 30/11/2026</a:t>
                       </a:r>
                       <a:endParaRPr lang="es-SV" sz="750" noProof="0" dirty="0">
                         <a:latin typeface="Arial" panose="020B0604020202020204" pitchFamily="34" charset="0"/>
@@ -7660,7 +7535,7 @@
         </p:blipFill>
         <p:spPr>
           <a:xfrm>
-            <a:off x="9814255" y="109728"/>
+            <a:off x="9910813" y="-44137"/>
             <a:ext cx="1965960" cy="603504"/>
           </a:xfrm>
           <a:prstGeom prst="rect">
